--- a/downloads/presentations/modules/pmg-220.pptx
+++ b/downloads/presentations/modules/pmg-220.pptx
@@ -3528,13 +3528,11 @@
             </a:avLst>
           </a:prstGeom>
           <a:solidFill>
-            <a:srgbClr val="FFFFFF">
-              <a:alpha val="88000"/>
-            </a:srgbClr>
+            <a:srgbClr val="FFFFFF"/>
           </a:solidFill>
           <a:ln w="12700">
             <a:solidFill>
-              <a:srgbClr val="D6E8F2"/>
+              <a:srgbClr val="B9D7E6"/>
             </a:solidFill>
             <a:prstDash val="solid"/>
           </a:ln>
@@ -3542,26 +3540,42 @@
       </p:sp>
       <p:sp>
         <p:nvSpPr>
-          <p:cNvPr id="14" name="Shape 12"/>
-          <p:cNvSpPr/>
-          <p:nvPr/>
-        </p:nvSpPr>
-        <p:spPr>
-          <a:xfrm>
-            <a:off x="8046720" y="3108960"/>
-            <a:ext cx="2651760" cy="896112"/>
-          </a:xfrm>
-          <a:prstGeom prst="arc">
-            <a:avLst/>
-          </a:prstGeom>
-          <a:noFill/>
-          <a:ln w="25400">
-            <a:solidFill>
-              <a:srgbClr val="0068B7"/>
-            </a:solidFill>
-            <a:prstDash val="solid"/>
-          </a:ln>
-        </p:spPr>
+          <p:cNvPr id="14" name="Text 12"/>
+          <p:cNvSpPr/>
+          <p:nvPr/>
+        </p:nvSpPr>
+        <p:spPr>
+          <a:xfrm>
+            <a:off x="7799832" y="2935224"/>
+            <a:ext cx="3145536" cy="256032"/>
+          </a:xfrm>
+          <a:prstGeom prst="rect">
+            <a:avLst/>
+          </a:prstGeom>
+          <a:noFill/>
+          <a:ln/>
+        </p:spPr>
+        <p:txBody>
+          <a:bodyPr wrap="square" lIns="0" tIns="0" rIns="0" bIns="0" rtlCol="0" anchor="ctr"/>
+          <a:lstStyle/>
+          <a:p>
+            <a:pPr indent="0" marL="0">
+              <a:buNone/>
+            </a:pPr>
+            <a:r>
+              <a:rPr lang="en-US" sz="1300" b="1" dirty="0">
+                <a:solidFill>
+                  <a:srgbClr val="0068B7"/>
+                </a:solidFill>
+                <a:latin typeface="Aptos" pitchFamily="34" charset="0"/>
+                <a:ea typeface="Aptos" pitchFamily="34" charset="-122"/>
+                <a:cs typeface="Aptos" pitchFamily="34" charset="-120"/>
+              </a:rPr>
+              <a:t>Concept checkpoints</a:t>
+            </a:r>
+            <a:endParaRPr lang="en-US" sz="1300" dirty="0"/>
+          </a:p>
+        </p:txBody>
       </p:sp>
       <p:sp>
         <p:nvSpPr>
@@ -3571,102 +3585,67 @@
         </p:nvSpPr>
         <p:spPr>
           <a:xfrm>
-            <a:off x="7909560" y="3099816"/>
-            <a:ext cx="2926080" cy="256032"/>
-          </a:xfrm>
-          <a:prstGeom prst="rect">
-            <a:avLst/>
-          </a:prstGeom>
-          <a:noFill/>
-          <a:ln/>
-        </p:spPr>
-        <p:txBody>
-          <a:bodyPr wrap="square" lIns="0" tIns="0" rIns="0" bIns="0" rtlCol="0" anchor="ctr"/>
-          <a:lstStyle/>
-          <a:p>
-            <a:pPr algn="ctr" indent="0" marL="0">
-              <a:buNone/>
-            </a:pPr>
-            <a:r>
-              <a:rPr lang="en-US" sz="1500" b="1" dirty="0">
-                <a:solidFill>
-                  <a:srgbClr val="003A63"/>
-                </a:solidFill>
-                <a:latin typeface="Aptos" pitchFamily="34" charset="0"/>
-                <a:ea typeface="Aptos" pitchFamily="34" charset="-122"/>
-                <a:cs typeface="Aptos" pitchFamily="34" charset="-120"/>
-              </a:rPr>
-              <a:t>Risk</a:t>
-            </a:r>
-            <a:endParaRPr lang="en-US" sz="1500" dirty="0"/>
+            <a:off x="7818120" y="3300984"/>
+            <a:ext cx="3090672" cy="877824"/>
+          </a:xfrm>
+          <a:prstGeom prst="rect">
+            <a:avLst/>
+          </a:prstGeom>
+          <a:noFill/>
+          <a:ln/>
+        </p:spPr>
+        <p:txBody>
+          <a:bodyPr wrap="square" lIns="254" tIns="254" rIns="254" bIns="254" rtlCol="0" anchor="t">
+            <a:normAutofit/>
+          </a:bodyPr>
+          <a:lstStyle/>
+          <a:p>
+            <a:r>
+              <a:rPr lang="en-US" sz="1380" dirty="0">
+                <a:solidFill>
+                  <a:srgbClr val="17364A"/>
+                </a:solidFill>
+                <a:latin typeface="Aptos" pitchFamily="34" charset="0"/>
+                <a:ea typeface="Aptos" pitchFamily="34" charset="-122"/>
+                <a:cs typeface="Aptos" pitchFamily="34" charset="-120"/>
+              </a:rPr>
+              <a:t>Risks and failure modes include the following:</a:t>
+            </a:r>
+            <a:endParaRPr lang="en-US" sz="1380" dirty="0"/>
+          </a:p>
+          <a:p>
+            <a:r>
+              <a:rPr lang="en-US" sz="1380" dirty="0">
+                <a:solidFill>
+                  <a:srgbClr val="17364A"/>
+                </a:solidFill>
+                <a:latin typeface="Aptos" pitchFamily="34" charset="0"/>
+                <a:ea typeface="Aptos" pitchFamily="34" charset="-122"/>
+                <a:cs typeface="Aptos" pitchFamily="34" charset="-120"/>
+              </a:rPr>
+              <a:t>Pilots launching without governance approval or operational ownership.</a:t>
+            </a:r>
+            <a:endParaRPr lang="en-US" sz="1380" dirty="0"/>
+          </a:p>
+          <a:p>
+            <a:r>
+              <a:rPr lang="en-US" sz="1380" dirty="0">
+                <a:solidFill>
+                  <a:srgbClr val="17364A"/>
+                </a:solidFill>
+                <a:latin typeface="Aptos" pitchFamily="34" charset="0"/>
+                <a:ea typeface="Aptos" pitchFamily="34" charset="-122"/>
+                <a:cs typeface="Aptos" pitchFamily="34" charset="-120"/>
+              </a:rPr>
+              <a:t>Project plans overlooking data, privacy, security, workflow, or training dependencies.</a:t>
+            </a:r>
+            <a:endParaRPr lang="en-US" sz="1380" dirty="0"/>
           </a:p>
         </p:txBody>
       </p:sp>
       <p:sp>
         <p:nvSpPr>
           <p:cNvPr id="16" name="Shape 14"/>
-          <p:cNvSpPr/>
-          <p:nvPr/>
-        </p:nvSpPr>
-        <p:spPr>
-          <a:xfrm>
-            <a:off x="8366760" y="3639312"/>
-            <a:ext cx="2011680" cy="0"/>
-          </a:xfrm>
-          <a:prstGeom prst="line">
-            <a:avLst/>
-          </a:prstGeom>
-          <a:noFill/>
-          <a:ln w="63500">
-            <a:solidFill>
-              <a:srgbClr val="2F8A28"/>
-            </a:solidFill>
-            <a:prstDash val="solid"/>
-          </a:ln>
-        </p:spPr>
-      </p:sp>
-      <p:sp>
-        <p:nvSpPr>
-          <p:cNvPr id="17" name="Text 15"/>
-          <p:cNvSpPr/>
-          <p:nvPr/>
-        </p:nvSpPr>
-        <p:spPr>
-          <a:xfrm>
-            <a:off x="7909560" y="3849624"/>
-            <a:ext cx="2926080" cy="164592"/>
-          </a:xfrm>
-          <a:prstGeom prst="rect">
-            <a:avLst/>
-          </a:prstGeom>
-          <a:noFill/>
-          <a:ln/>
-        </p:spPr>
-        <p:txBody>
-          <a:bodyPr wrap="square" lIns="0" tIns="0" rIns="0" bIns="0" rtlCol="0" anchor="ctr"/>
-          <a:lstStyle/>
-          <a:p>
-            <a:pPr algn="ctr" indent="0" marL="0">
-              <a:buNone/>
-            </a:pPr>
-            <a:r>
-              <a:rPr lang="en-US" sz="900" dirty="0">
-                <a:solidFill>
-                  <a:srgbClr val="003A63"/>
-                </a:solidFill>
-                <a:latin typeface="Aptos" pitchFamily="34" charset="0"/>
-                <a:ea typeface="Aptos" pitchFamily="34" charset="-122"/>
-                <a:cs typeface="Aptos" pitchFamily="34" charset="-120"/>
-              </a:rPr>
-              <a:t>Human review</a:t>
-            </a:r>
-            <a:endParaRPr lang="en-US" sz="900" dirty="0"/>
-          </a:p>
-        </p:txBody>
-      </p:sp>
-      <p:sp>
-        <p:nvSpPr>
-          <p:cNvPr id="18" name="Shape 16"/>
           <p:cNvSpPr/>
           <p:nvPr/>
         </p:nvSpPr>
@@ -3693,7 +3672,7 @@
       </p:sp>
       <p:sp>
         <p:nvSpPr>
-          <p:cNvPr id="19" name="Text 17"/>
+          <p:cNvPr id="17" name="Text 15"/>
           <p:cNvSpPr/>
           <p:nvPr/>
         </p:nvSpPr>
@@ -3732,7 +3711,7 @@
       </p:sp>
       <p:sp>
         <p:nvSpPr>
-          <p:cNvPr id="20" name="Text 18"/>
+          <p:cNvPr id="18" name="Text 16"/>
           <p:cNvSpPr/>
           <p:nvPr/>
         </p:nvSpPr>
@@ -4240,13 +4219,11 @@
             </a:avLst>
           </a:prstGeom>
           <a:solidFill>
-            <a:srgbClr val="FFFFFF">
-              <a:alpha val="88000"/>
-            </a:srgbClr>
+            <a:srgbClr val="FFFFFF"/>
           </a:solidFill>
           <a:ln w="12700">
             <a:solidFill>
-              <a:srgbClr val="D6E8F2"/>
+              <a:srgbClr val="B9D7E6"/>
             </a:solidFill>
             <a:prstDash val="solid"/>
           </a:ln>
@@ -4254,26 +4231,42 @@
       </p:sp>
       <p:sp>
         <p:nvSpPr>
-          <p:cNvPr id="14" name="Shape 12"/>
-          <p:cNvSpPr/>
-          <p:nvPr/>
-        </p:nvSpPr>
-        <p:spPr>
-          <a:xfrm>
-            <a:off x="8046720" y="3108960"/>
-            <a:ext cx="2651760" cy="896112"/>
-          </a:xfrm>
-          <a:prstGeom prst="arc">
-            <a:avLst/>
-          </a:prstGeom>
-          <a:noFill/>
-          <a:ln w="25400">
-            <a:solidFill>
-              <a:srgbClr val="0068B7"/>
-            </a:solidFill>
-            <a:prstDash val="solid"/>
-          </a:ln>
-        </p:spPr>
+          <p:cNvPr id="14" name="Text 12"/>
+          <p:cNvSpPr/>
+          <p:nvPr/>
+        </p:nvSpPr>
+        <p:spPr>
+          <a:xfrm>
+            <a:off x="7799832" y="2935224"/>
+            <a:ext cx="3145536" cy="256032"/>
+          </a:xfrm>
+          <a:prstGeom prst="rect">
+            <a:avLst/>
+          </a:prstGeom>
+          <a:noFill/>
+          <a:ln/>
+        </p:spPr>
+        <p:txBody>
+          <a:bodyPr wrap="square" lIns="0" tIns="0" rIns="0" bIns="0" rtlCol="0" anchor="ctr"/>
+          <a:lstStyle/>
+          <a:p>
+            <a:pPr indent="0" marL="0">
+              <a:buNone/>
+            </a:pPr>
+            <a:r>
+              <a:rPr lang="en-US" sz="1300" b="1" dirty="0">
+                <a:solidFill>
+                  <a:srgbClr val="0068B7"/>
+                </a:solidFill>
+                <a:latin typeface="Aptos" pitchFamily="34" charset="0"/>
+                <a:ea typeface="Aptos" pitchFamily="34" charset="-122"/>
+                <a:cs typeface="Aptos" pitchFamily="34" charset="-120"/>
+              </a:rPr>
+              <a:t>Concept checkpoints</a:t>
+            </a:r>
+            <a:endParaRPr lang="en-US" sz="1300" dirty="0"/>
+          </a:p>
+        </p:txBody>
       </p:sp>
       <p:sp>
         <p:nvSpPr>
@@ -4283,102 +4276,67 @@
         </p:nvSpPr>
         <p:spPr>
           <a:xfrm>
-            <a:off x="7909560" y="3099816"/>
-            <a:ext cx="2926080" cy="256032"/>
-          </a:xfrm>
-          <a:prstGeom prst="rect">
-            <a:avLst/>
-          </a:prstGeom>
-          <a:noFill/>
-          <a:ln/>
-        </p:spPr>
-        <p:txBody>
-          <a:bodyPr wrap="square" lIns="0" tIns="0" rIns="0" bIns="0" rtlCol="0" anchor="ctr"/>
-          <a:lstStyle/>
-          <a:p>
-            <a:pPr algn="ctr" indent="0" marL="0">
-              <a:buNone/>
-            </a:pPr>
-            <a:r>
-              <a:rPr lang="en-US" sz="1500" b="1" dirty="0">
-                <a:solidFill>
-                  <a:srgbClr val="003A63"/>
-                </a:solidFill>
-                <a:latin typeface="Aptos" pitchFamily="34" charset="0"/>
-                <a:ea typeface="Aptos" pitchFamily="34" charset="-122"/>
-                <a:cs typeface="Aptos" pitchFamily="34" charset="-120"/>
-              </a:rPr>
-              <a:t>Risk</a:t>
-            </a:r>
-            <a:endParaRPr lang="en-US" sz="1500" dirty="0"/>
+            <a:off x="7818120" y="3300984"/>
+            <a:ext cx="3090672" cy="877824"/>
+          </a:xfrm>
+          <a:prstGeom prst="rect">
+            <a:avLst/>
+          </a:prstGeom>
+          <a:noFill/>
+          <a:ln/>
+        </p:spPr>
+        <p:txBody>
+          <a:bodyPr wrap="square" lIns="254" tIns="254" rIns="254" bIns="254" rtlCol="0" anchor="t">
+            <a:normAutofit/>
+          </a:bodyPr>
+          <a:lstStyle/>
+          <a:p>
+            <a:r>
+              <a:rPr lang="en-US" sz="1380" dirty="0">
+                <a:solidFill>
+                  <a:srgbClr val="17364A"/>
+                </a:solidFill>
+                <a:latin typeface="Aptos" pitchFamily="34" charset="0"/>
+                <a:ea typeface="Aptos" pitchFamily="34" charset="-122"/>
+                <a:cs typeface="Aptos" pitchFamily="34" charset="-120"/>
+              </a:rPr>
+              <a:t>Vendors controlling implementation timelines without agency readiness gates.</a:t>
+            </a:r>
+            <a:endParaRPr lang="en-US" sz="1380" dirty="0"/>
+          </a:p>
+          <a:p>
+            <a:r>
+              <a:rPr lang="en-US" sz="1380" dirty="0">
+                <a:solidFill>
+                  <a:srgbClr val="17364A"/>
+                </a:solidFill>
+                <a:latin typeface="Aptos" pitchFamily="34" charset="0"/>
+                <a:ea typeface="Aptos" pitchFamily="34" charset="-122"/>
+                <a:cs typeface="Aptos" pitchFamily="34" charset="-120"/>
+              </a:rPr>
+              <a:t>No transition plan from pilot to routine operations.</a:t>
+            </a:r>
+            <a:endParaRPr lang="en-US" sz="1380" dirty="0"/>
+          </a:p>
+          <a:p>
+            <a:r>
+              <a:rPr lang="en-US" sz="1380" dirty="0">
+                <a:solidFill>
+                  <a:srgbClr val="17364A"/>
+                </a:solidFill>
+                <a:latin typeface="Aptos" pitchFamily="34" charset="0"/>
+                <a:ea typeface="Aptos" pitchFamily="34" charset="-122"/>
+                <a:cs typeface="Aptos" pitchFamily="34" charset="-120"/>
+              </a:rPr>
+              <a:t>Success measured only by deployment rather than public health value and safe use.</a:t>
+            </a:r>
+            <a:endParaRPr lang="en-US" sz="1380" dirty="0"/>
           </a:p>
         </p:txBody>
       </p:sp>
       <p:sp>
         <p:nvSpPr>
           <p:cNvPr id="16" name="Shape 14"/>
-          <p:cNvSpPr/>
-          <p:nvPr/>
-        </p:nvSpPr>
-        <p:spPr>
-          <a:xfrm>
-            <a:off x="8366760" y="3639312"/>
-            <a:ext cx="2011680" cy="0"/>
-          </a:xfrm>
-          <a:prstGeom prst="line">
-            <a:avLst/>
-          </a:prstGeom>
-          <a:noFill/>
-          <a:ln w="63500">
-            <a:solidFill>
-              <a:srgbClr val="2F8A28"/>
-            </a:solidFill>
-            <a:prstDash val="solid"/>
-          </a:ln>
-        </p:spPr>
-      </p:sp>
-      <p:sp>
-        <p:nvSpPr>
-          <p:cNvPr id="17" name="Text 15"/>
-          <p:cNvSpPr/>
-          <p:nvPr/>
-        </p:nvSpPr>
-        <p:spPr>
-          <a:xfrm>
-            <a:off x="7909560" y="3849624"/>
-            <a:ext cx="2926080" cy="164592"/>
-          </a:xfrm>
-          <a:prstGeom prst="rect">
-            <a:avLst/>
-          </a:prstGeom>
-          <a:noFill/>
-          <a:ln/>
-        </p:spPr>
-        <p:txBody>
-          <a:bodyPr wrap="square" lIns="0" tIns="0" rIns="0" bIns="0" rtlCol="0" anchor="ctr"/>
-          <a:lstStyle/>
-          <a:p>
-            <a:pPr algn="ctr" indent="0" marL="0">
-              <a:buNone/>
-            </a:pPr>
-            <a:r>
-              <a:rPr lang="en-US" sz="900" dirty="0">
-                <a:solidFill>
-                  <a:srgbClr val="003A63"/>
-                </a:solidFill>
-                <a:latin typeface="Aptos" pitchFamily="34" charset="0"/>
-                <a:ea typeface="Aptos" pitchFamily="34" charset="-122"/>
-                <a:cs typeface="Aptos" pitchFamily="34" charset="-120"/>
-              </a:rPr>
-              <a:t>Human review</a:t>
-            </a:r>
-            <a:endParaRPr lang="en-US" sz="900" dirty="0"/>
-          </a:p>
-        </p:txBody>
-      </p:sp>
-      <p:sp>
-        <p:nvSpPr>
-          <p:cNvPr id="18" name="Shape 16"/>
           <p:cNvSpPr/>
           <p:nvPr/>
         </p:nvSpPr>
@@ -4405,7 +4363,7 @@
       </p:sp>
       <p:sp>
         <p:nvSpPr>
-          <p:cNvPr id="19" name="Text 17"/>
+          <p:cNvPr id="17" name="Text 15"/>
           <p:cNvSpPr/>
           <p:nvPr/>
         </p:nvSpPr>
@@ -4444,7 +4402,7 @@
       </p:sp>
       <p:sp>
         <p:nvSpPr>
-          <p:cNvPr id="20" name="Text 18"/>
+          <p:cNvPr id="18" name="Text 16"/>
           <p:cNvSpPr/>
           <p:nvPr/>
         </p:nvSpPr>
@@ -4952,13 +4910,11 @@
             </a:avLst>
           </a:prstGeom>
           <a:solidFill>
-            <a:srgbClr val="FFFFFF">
-              <a:alpha val="88000"/>
-            </a:srgbClr>
+            <a:srgbClr val="FFFFFF"/>
           </a:solidFill>
           <a:ln w="12700">
             <a:solidFill>
-              <a:srgbClr val="D6E8F2"/>
+              <a:srgbClr val="B9D7E6"/>
             </a:solidFill>
             <a:prstDash val="solid"/>
           </a:ln>
@@ -4966,26 +4922,42 @@
       </p:sp>
       <p:sp>
         <p:nvSpPr>
-          <p:cNvPr id="14" name="Shape 12"/>
-          <p:cNvSpPr/>
-          <p:nvPr/>
-        </p:nvSpPr>
-        <p:spPr>
-          <a:xfrm>
-            <a:off x="8046720" y="3108960"/>
-            <a:ext cx="2651760" cy="896112"/>
-          </a:xfrm>
-          <a:prstGeom prst="arc">
-            <a:avLst/>
-          </a:prstGeom>
-          <a:noFill/>
-          <a:ln w="25400">
-            <a:solidFill>
-              <a:srgbClr val="0068B7"/>
-            </a:solidFill>
-            <a:prstDash val="solid"/>
-          </a:ln>
-        </p:spPr>
+          <p:cNvPr id="14" name="Text 12"/>
+          <p:cNvSpPr/>
+          <p:nvPr/>
+        </p:nvSpPr>
+        <p:spPr>
+          <a:xfrm>
+            <a:off x="7799832" y="2935224"/>
+            <a:ext cx="3145536" cy="256032"/>
+          </a:xfrm>
+          <a:prstGeom prst="rect">
+            <a:avLst/>
+          </a:prstGeom>
+          <a:noFill/>
+          <a:ln/>
+        </p:spPr>
+        <p:txBody>
+          <a:bodyPr wrap="square" lIns="0" tIns="0" rIns="0" bIns="0" rtlCol="0" anchor="ctr"/>
+          <a:lstStyle/>
+          <a:p>
+            <a:pPr indent="0" marL="0">
+              <a:buNone/>
+            </a:pPr>
+            <a:r>
+              <a:rPr lang="en-US" sz="1300" b="1" dirty="0">
+                <a:solidFill>
+                  <a:srgbClr val="0068B7"/>
+                </a:solidFill>
+                <a:latin typeface="Aptos" pitchFamily="34" charset="0"/>
+                <a:ea typeface="Aptos" pitchFamily="34" charset="-122"/>
+                <a:cs typeface="Aptos" pitchFamily="34" charset="-120"/>
+              </a:rPr>
+              <a:t>Concept checkpoints</a:t>
+            </a:r>
+            <a:endParaRPr lang="en-US" sz="1300" dirty="0"/>
+          </a:p>
+        </p:txBody>
       </p:sp>
       <p:sp>
         <p:nvSpPr>
@@ -4995,102 +4967,67 @@
         </p:nvSpPr>
         <p:spPr>
           <a:xfrm>
-            <a:off x="7909560" y="3099816"/>
-            <a:ext cx="2926080" cy="256032"/>
-          </a:xfrm>
-          <a:prstGeom prst="rect">
-            <a:avLst/>
-          </a:prstGeom>
-          <a:noFill/>
-          <a:ln/>
-        </p:spPr>
-        <p:txBody>
-          <a:bodyPr wrap="square" lIns="0" tIns="0" rIns="0" bIns="0" rtlCol="0" anchor="ctr"/>
-          <a:lstStyle/>
-          <a:p>
-            <a:pPr algn="ctr" indent="0" marL="0">
-              <a:buNone/>
-            </a:pPr>
-            <a:r>
-              <a:rPr lang="en-US" sz="1500" b="1" dirty="0">
-                <a:solidFill>
-                  <a:srgbClr val="003A63"/>
-                </a:solidFill>
-                <a:latin typeface="Aptos" pitchFamily="34" charset="0"/>
-                <a:ea typeface="Aptos" pitchFamily="34" charset="-122"/>
-                <a:cs typeface="Aptos" pitchFamily="34" charset="-120"/>
-              </a:rPr>
-              <a:t>Risk</a:t>
-            </a:r>
-            <a:endParaRPr lang="en-US" sz="1500" dirty="0"/>
+            <a:off x="7818120" y="3300984"/>
+            <a:ext cx="3090672" cy="877824"/>
+          </a:xfrm>
+          <a:prstGeom prst="rect">
+            <a:avLst/>
+          </a:prstGeom>
+          <a:noFill/>
+          <a:ln/>
+        </p:spPr>
+        <p:txBody>
+          <a:bodyPr wrap="square" lIns="254" tIns="254" rIns="254" bIns="254" rtlCol="0" anchor="t">
+            <a:normAutofit/>
+          </a:bodyPr>
+          <a:lstStyle/>
+          <a:p>
+            <a:r>
+              <a:rPr lang="en-US" sz="1380" dirty="0">
+                <a:solidFill>
+                  <a:srgbClr val="17364A"/>
+                </a:solidFill>
+                <a:latin typeface="Aptos" pitchFamily="34" charset="0"/>
+                <a:ea typeface="Aptos" pitchFamily="34" charset="-122"/>
+                <a:cs typeface="Aptos" pitchFamily="34" charset="-120"/>
+              </a:rPr>
+              <a:t>Recommended guardrails include the following:</a:t>
+            </a:r>
+            <a:endParaRPr lang="en-US" sz="1380" dirty="0"/>
+          </a:p>
+          <a:p>
+            <a:r>
+              <a:rPr lang="en-US" sz="1380" dirty="0">
+                <a:solidFill>
+                  <a:srgbClr val="17364A"/>
+                </a:solidFill>
+                <a:latin typeface="Aptos" pitchFamily="34" charset="0"/>
+                <a:ea typeface="Aptos" pitchFamily="34" charset="-122"/>
+                <a:cs typeface="Aptos" pitchFamily="34" charset="-120"/>
+              </a:rPr>
+              <a:t>Use an AI-specific project charter and risk log.</a:t>
+            </a:r>
+            <a:endParaRPr lang="en-US" sz="1380" dirty="0"/>
+          </a:p>
+          <a:p>
+            <a:r>
+              <a:rPr lang="en-US" sz="1380" dirty="0">
+                <a:solidFill>
+                  <a:srgbClr val="17364A"/>
+                </a:solidFill>
+                <a:latin typeface="Aptos" pitchFamily="34" charset="0"/>
+                <a:ea typeface="Aptos" pitchFamily="34" charset="-122"/>
+                <a:cs typeface="Aptos" pitchFamily="34" charset="-120"/>
+              </a:rPr>
+              <a:t>Define governance gates before implementation begins.</a:t>
+            </a:r>
+            <a:endParaRPr lang="en-US" sz="1380" dirty="0"/>
           </a:p>
         </p:txBody>
       </p:sp>
       <p:sp>
         <p:nvSpPr>
           <p:cNvPr id="16" name="Shape 14"/>
-          <p:cNvSpPr/>
-          <p:nvPr/>
-        </p:nvSpPr>
-        <p:spPr>
-          <a:xfrm>
-            <a:off x="8366760" y="3639312"/>
-            <a:ext cx="2011680" cy="0"/>
-          </a:xfrm>
-          <a:prstGeom prst="line">
-            <a:avLst/>
-          </a:prstGeom>
-          <a:noFill/>
-          <a:ln w="63500">
-            <a:solidFill>
-              <a:srgbClr val="2F8A28"/>
-            </a:solidFill>
-            <a:prstDash val="solid"/>
-          </a:ln>
-        </p:spPr>
-      </p:sp>
-      <p:sp>
-        <p:nvSpPr>
-          <p:cNvPr id="17" name="Text 15"/>
-          <p:cNvSpPr/>
-          <p:nvPr/>
-        </p:nvSpPr>
-        <p:spPr>
-          <a:xfrm>
-            <a:off x="7909560" y="3849624"/>
-            <a:ext cx="2926080" cy="164592"/>
-          </a:xfrm>
-          <a:prstGeom prst="rect">
-            <a:avLst/>
-          </a:prstGeom>
-          <a:noFill/>
-          <a:ln/>
-        </p:spPr>
-        <p:txBody>
-          <a:bodyPr wrap="square" lIns="0" tIns="0" rIns="0" bIns="0" rtlCol="0" anchor="ctr"/>
-          <a:lstStyle/>
-          <a:p>
-            <a:pPr algn="ctr" indent="0" marL="0">
-              <a:buNone/>
-            </a:pPr>
-            <a:r>
-              <a:rPr lang="en-US" sz="900" dirty="0">
-                <a:solidFill>
-                  <a:srgbClr val="003A63"/>
-                </a:solidFill>
-                <a:latin typeface="Aptos" pitchFamily="34" charset="0"/>
-                <a:ea typeface="Aptos" pitchFamily="34" charset="-122"/>
-                <a:cs typeface="Aptos" pitchFamily="34" charset="-120"/>
-              </a:rPr>
-              <a:t>Human review</a:t>
-            </a:r>
-            <a:endParaRPr lang="en-US" sz="900" dirty="0"/>
-          </a:p>
-        </p:txBody>
-      </p:sp>
-      <p:sp>
-        <p:nvSpPr>
-          <p:cNvPr id="18" name="Shape 16"/>
           <p:cNvSpPr/>
           <p:nvPr/>
         </p:nvSpPr>
@@ -5117,7 +5054,7 @@
       </p:sp>
       <p:sp>
         <p:nvSpPr>
-          <p:cNvPr id="19" name="Text 17"/>
+          <p:cNvPr id="17" name="Text 15"/>
           <p:cNvSpPr/>
           <p:nvPr/>
         </p:nvSpPr>
@@ -5156,7 +5093,7 @@
       </p:sp>
       <p:sp>
         <p:nvSpPr>
-          <p:cNvPr id="20" name="Text 18"/>
+          <p:cNvPr id="18" name="Text 16"/>
           <p:cNvSpPr/>
           <p:nvPr/>
         </p:nvSpPr>
@@ -5664,13 +5601,11 @@
             </a:avLst>
           </a:prstGeom>
           <a:solidFill>
-            <a:srgbClr val="FFFFFF">
-              <a:alpha val="88000"/>
-            </a:srgbClr>
+            <a:srgbClr val="FFFFFF"/>
           </a:solidFill>
           <a:ln w="12700">
             <a:solidFill>
-              <a:srgbClr val="D6E8F2"/>
+              <a:srgbClr val="B9D7E6"/>
             </a:solidFill>
             <a:prstDash val="solid"/>
           </a:ln>
@@ -5678,26 +5613,42 @@
       </p:sp>
       <p:sp>
         <p:nvSpPr>
-          <p:cNvPr id="14" name="Shape 12"/>
-          <p:cNvSpPr/>
-          <p:nvPr/>
-        </p:nvSpPr>
-        <p:spPr>
-          <a:xfrm>
-            <a:off x="8046720" y="3108960"/>
-            <a:ext cx="2651760" cy="896112"/>
-          </a:xfrm>
-          <a:prstGeom prst="arc">
-            <a:avLst/>
-          </a:prstGeom>
-          <a:noFill/>
-          <a:ln w="25400">
-            <a:solidFill>
-              <a:srgbClr val="0068B7"/>
-            </a:solidFill>
-            <a:prstDash val="solid"/>
-          </a:ln>
-        </p:spPr>
+          <p:cNvPr id="14" name="Text 12"/>
+          <p:cNvSpPr/>
+          <p:nvPr/>
+        </p:nvSpPr>
+        <p:spPr>
+          <a:xfrm>
+            <a:off x="7799832" y="2935224"/>
+            <a:ext cx="3145536" cy="256032"/>
+          </a:xfrm>
+          <a:prstGeom prst="rect">
+            <a:avLst/>
+          </a:prstGeom>
+          <a:noFill/>
+          <a:ln/>
+        </p:spPr>
+        <p:txBody>
+          <a:bodyPr wrap="square" lIns="0" tIns="0" rIns="0" bIns="0" rtlCol="0" anchor="ctr"/>
+          <a:lstStyle/>
+          <a:p>
+            <a:pPr indent="0" marL="0">
+              <a:buNone/>
+            </a:pPr>
+            <a:r>
+              <a:rPr lang="en-US" sz="1300" b="1" dirty="0">
+                <a:solidFill>
+                  <a:srgbClr val="0068B7"/>
+                </a:solidFill>
+                <a:latin typeface="Aptos" pitchFamily="34" charset="0"/>
+                <a:ea typeface="Aptos" pitchFamily="34" charset="-122"/>
+                <a:cs typeface="Aptos" pitchFamily="34" charset="-120"/>
+              </a:rPr>
+              <a:t>Concept checkpoints</a:t>
+            </a:r>
+            <a:endParaRPr lang="en-US" sz="1300" dirty="0"/>
+          </a:p>
+        </p:txBody>
       </p:sp>
       <p:sp>
         <p:nvSpPr>
@@ -5707,102 +5658,67 @@
         </p:nvSpPr>
         <p:spPr>
           <a:xfrm>
-            <a:off x="7909560" y="3099816"/>
-            <a:ext cx="2926080" cy="256032"/>
-          </a:xfrm>
-          <a:prstGeom prst="rect">
-            <a:avLst/>
-          </a:prstGeom>
-          <a:noFill/>
-          <a:ln/>
-        </p:spPr>
-        <p:txBody>
-          <a:bodyPr wrap="square" lIns="0" tIns="0" rIns="0" bIns="0" rtlCol="0" anchor="ctr"/>
-          <a:lstStyle/>
-          <a:p>
-            <a:pPr algn="ctr" indent="0" marL="0">
-              <a:buNone/>
-            </a:pPr>
-            <a:r>
-              <a:rPr lang="en-US" sz="1500" b="1" dirty="0">
-                <a:solidFill>
-                  <a:srgbClr val="003A63"/>
-                </a:solidFill>
-                <a:latin typeface="Aptos" pitchFamily="34" charset="0"/>
-                <a:ea typeface="Aptos" pitchFamily="34" charset="-122"/>
-                <a:cs typeface="Aptos" pitchFamily="34" charset="-120"/>
-              </a:rPr>
-              <a:t>Risk</a:t>
-            </a:r>
-            <a:endParaRPr lang="en-US" sz="1500" dirty="0"/>
+            <a:off x="7818120" y="3300984"/>
+            <a:ext cx="3090672" cy="877824"/>
+          </a:xfrm>
+          <a:prstGeom prst="rect">
+            <a:avLst/>
+          </a:prstGeom>
+          <a:noFill/>
+          <a:ln/>
+        </p:spPr>
+        <p:txBody>
+          <a:bodyPr wrap="square" lIns="254" tIns="254" rIns="254" bIns="254" rtlCol="0" anchor="t">
+            <a:normAutofit/>
+          </a:bodyPr>
+          <a:lstStyle/>
+          <a:p>
+            <a:r>
+              <a:rPr lang="en-US" sz="1380" dirty="0">
+                <a:solidFill>
+                  <a:srgbClr val="17364A"/>
+                </a:solidFill>
+                <a:latin typeface="Aptos" pitchFamily="34" charset="0"/>
+                <a:ea typeface="Aptos" pitchFamily="34" charset="-122"/>
+                <a:cs typeface="Aptos" pitchFamily="34" charset="-120"/>
+              </a:rPr>
+              <a:t>Create separate workstreams for data, technology, governance, workflow, training,.</a:t>
+            </a:r>
+            <a:endParaRPr lang="en-US" sz="1380" dirty="0"/>
+          </a:p>
+          <a:p>
+            <a:r>
+              <a:rPr lang="en-US" sz="1380" dirty="0">
+                <a:solidFill>
+                  <a:srgbClr val="17364A"/>
+                </a:solidFill>
+                <a:latin typeface="Aptos" pitchFamily="34" charset="0"/>
+                <a:ea typeface="Aptos" pitchFamily="34" charset="-122"/>
+                <a:cs typeface="Aptos" pitchFamily="34" charset="-120"/>
+              </a:rPr>
+              <a:t>Require launch readiness review before deployment.</a:t>
+            </a:r>
+            <a:endParaRPr lang="en-US" sz="1380" dirty="0"/>
+          </a:p>
+          <a:p>
+            <a:r>
+              <a:rPr lang="en-US" sz="1380" dirty="0">
+                <a:solidFill>
+                  <a:srgbClr val="17364A"/>
+                </a:solidFill>
+                <a:latin typeface="Aptos" pitchFamily="34" charset="0"/>
+                <a:ea typeface="Aptos" pitchFamily="34" charset="-122"/>
+                <a:cs typeface="Aptos" pitchFamily="34" charset="-120"/>
+              </a:rPr>
+              <a:t>Document transition to operations and sustainability responsibilities.</a:t>
+            </a:r>
+            <a:endParaRPr lang="en-US" sz="1380" dirty="0"/>
           </a:p>
         </p:txBody>
       </p:sp>
       <p:sp>
         <p:nvSpPr>
           <p:cNvPr id="16" name="Shape 14"/>
-          <p:cNvSpPr/>
-          <p:nvPr/>
-        </p:nvSpPr>
-        <p:spPr>
-          <a:xfrm>
-            <a:off x="8366760" y="3639312"/>
-            <a:ext cx="2011680" cy="0"/>
-          </a:xfrm>
-          <a:prstGeom prst="line">
-            <a:avLst/>
-          </a:prstGeom>
-          <a:noFill/>
-          <a:ln w="63500">
-            <a:solidFill>
-              <a:srgbClr val="2F8A28"/>
-            </a:solidFill>
-            <a:prstDash val="solid"/>
-          </a:ln>
-        </p:spPr>
-      </p:sp>
-      <p:sp>
-        <p:nvSpPr>
-          <p:cNvPr id="17" name="Text 15"/>
-          <p:cNvSpPr/>
-          <p:nvPr/>
-        </p:nvSpPr>
-        <p:spPr>
-          <a:xfrm>
-            <a:off x="7909560" y="3849624"/>
-            <a:ext cx="2926080" cy="164592"/>
-          </a:xfrm>
-          <a:prstGeom prst="rect">
-            <a:avLst/>
-          </a:prstGeom>
-          <a:noFill/>
-          <a:ln/>
-        </p:spPr>
-        <p:txBody>
-          <a:bodyPr wrap="square" lIns="0" tIns="0" rIns="0" bIns="0" rtlCol="0" anchor="ctr"/>
-          <a:lstStyle/>
-          <a:p>
-            <a:pPr algn="ctr" indent="0" marL="0">
-              <a:buNone/>
-            </a:pPr>
-            <a:r>
-              <a:rPr lang="en-US" sz="900" dirty="0">
-                <a:solidFill>
-                  <a:srgbClr val="003A63"/>
-                </a:solidFill>
-                <a:latin typeface="Aptos" pitchFamily="34" charset="0"/>
-                <a:ea typeface="Aptos" pitchFamily="34" charset="-122"/>
-                <a:cs typeface="Aptos" pitchFamily="34" charset="-120"/>
-              </a:rPr>
-              <a:t>Human review</a:t>
-            </a:r>
-            <a:endParaRPr lang="en-US" sz="900" dirty="0"/>
-          </a:p>
-        </p:txBody>
-      </p:sp>
-      <p:sp>
-        <p:nvSpPr>
-          <p:cNvPr id="18" name="Shape 16"/>
           <p:cNvSpPr/>
           <p:nvPr/>
         </p:nvSpPr>
@@ -5829,7 +5745,7 @@
       </p:sp>
       <p:sp>
         <p:nvSpPr>
-          <p:cNvPr id="19" name="Text 17"/>
+          <p:cNvPr id="17" name="Text 15"/>
           <p:cNvSpPr/>
           <p:nvPr/>
         </p:nvSpPr>
@@ -5868,7 +5784,7 @@
       </p:sp>
       <p:sp>
         <p:nvSpPr>
-          <p:cNvPr id="20" name="Text 18"/>
+          <p:cNvPr id="18" name="Text 16"/>
           <p:cNvSpPr/>
           <p:nvPr/>
         </p:nvSpPr>
@@ -6376,13 +6292,11 @@
             </a:avLst>
           </a:prstGeom>
           <a:solidFill>
-            <a:srgbClr val="FFFFFF">
-              <a:alpha val="88000"/>
-            </a:srgbClr>
+            <a:srgbClr val="FFFFFF"/>
           </a:solidFill>
           <a:ln w="12700">
             <a:solidFill>
-              <a:srgbClr val="D6E8F2"/>
+              <a:srgbClr val="B9D7E6"/>
             </a:solidFill>
             <a:prstDash val="solid"/>
           </a:ln>
@@ -6390,30 +6304,42 @@
       </p:sp>
       <p:sp>
         <p:nvSpPr>
-          <p:cNvPr id="14" name="Shape 12"/>
-          <p:cNvSpPr/>
-          <p:nvPr/>
-        </p:nvSpPr>
-        <p:spPr>
-          <a:xfrm>
-            <a:off x="7927848" y="3319272"/>
-            <a:ext cx="792480" cy="749808"/>
-          </a:xfrm>
-          <a:prstGeom prst="roundRect">
-            <a:avLst>
-              <a:gd name="adj" fmla="val 14634"/>
-            </a:avLst>
-          </a:prstGeom>
-          <a:solidFill>
-            <a:srgbClr val="0068B7"/>
-          </a:solidFill>
-          <a:ln w="12700">
-            <a:solidFill>
-              <a:srgbClr val="0068B7"/>
-            </a:solidFill>
-            <a:prstDash val="solid"/>
-          </a:ln>
-        </p:spPr>
+          <p:cNvPr id="14" name="Text 12"/>
+          <p:cNvSpPr/>
+          <p:nvPr/>
+        </p:nvSpPr>
+        <p:spPr>
+          <a:xfrm>
+            <a:off x="7799832" y="2935224"/>
+            <a:ext cx="3145536" cy="256032"/>
+          </a:xfrm>
+          <a:prstGeom prst="rect">
+            <a:avLst/>
+          </a:prstGeom>
+          <a:noFill/>
+          <a:ln/>
+        </p:spPr>
+        <p:txBody>
+          <a:bodyPr wrap="square" lIns="0" tIns="0" rIns="0" bIns="0" rtlCol="0" anchor="ctr"/>
+          <a:lstStyle/>
+          <a:p>
+            <a:pPr indent="0" marL="0">
+              <a:buNone/>
+            </a:pPr>
+            <a:r>
+              <a:rPr lang="en-US" sz="1300" b="1" dirty="0">
+                <a:solidFill>
+                  <a:srgbClr val="0068B7"/>
+                </a:solidFill>
+                <a:latin typeface="Aptos" pitchFamily="34" charset="0"/>
+                <a:ea typeface="Aptos" pitchFamily="34" charset="-122"/>
+                <a:cs typeface="Aptos" pitchFamily="34" charset="-120"/>
+              </a:rPr>
+              <a:t>Concept checkpoints</a:t>
+            </a:r>
+            <a:endParaRPr lang="en-US" sz="1300" dirty="0"/>
+          </a:p>
+        </p:txBody>
       </p:sp>
       <p:sp>
         <p:nvSpPr>
@@ -6423,240 +6349,67 @@
         </p:nvSpPr>
         <p:spPr>
           <a:xfrm>
-            <a:off x="8001000" y="3511296"/>
-            <a:ext cx="646176" cy="310896"/>
-          </a:xfrm>
-          <a:prstGeom prst="rect">
-            <a:avLst/>
-          </a:prstGeom>
-          <a:noFill/>
-          <a:ln/>
-        </p:spPr>
-        <p:txBody>
-          <a:bodyPr wrap="square" lIns="0" tIns="0" rIns="0" bIns="0" rtlCol="0" anchor="ctr">
+            <a:off x="7818120" y="3300984"/>
+            <a:ext cx="3090672" cy="877824"/>
+          </a:xfrm>
+          <a:prstGeom prst="rect">
+            <a:avLst/>
+          </a:prstGeom>
+          <a:noFill/>
+          <a:ln/>
+        </p:spPr>
+        <p:txBody>
+          <a:bodyPr wrap="square" lIns="254" tIns="254" rIns="254" bIns="254" rtlCol="0" anchor="t">
             <a:normAutofit/>
           </a:bodyPr>
           <a:lstStyle/>
           <a:p>
-            <a:pPr algn="ctr" indent="0" marL="0">
-              <a:buNone/>
-            </a:pPr>
-            <a:r>
-              <a:rPr lang="en-US" sz="1500" b="1" dirty="0">
-                <a:solidFill>
-                  <a:srgbClr val="FFFFFF"/>
-                </a:solidFill>
-                <a:latin typeface="Aptos" pitchFamily="34" charset="0"/>
-                <a:ea typeface="Aptos" pitchFamily="34" charset="-122"/>
-                <a:cs typeface="Aptos" pitchFamily="34" charset="-120"/>
-              </a:rPr>
-              <a:t>Plan</a:t>
-            </a:r>
-            <a:endParaRPr lang="en-US" sz="1500" dirty="0"/>
+            <a:r>
+              <a:rPr lang="en-US" sz="1380" dirty="0">
+                <a:solidFill>
+                  <a:srgbClr val="17364A"/>
+                </a:solidFill>
+                <a:latin typeface="Aptos" pitchFamily="34" charset="0"/>
+                <a:ea typeface="Aptos" pitchFamily="34" charset="-122"/>
+                <a:cs typeface="Aptos" pitchFamily="34" charset="-120"/>
+              </a:rPr>
+              <a:t>Where does this topic appear in your agency, program, or workflow?</a:t>
+            </a:r>
+            <a:endParaRPr lang="en-US" sz="1380" dirty="0"/>
+          </a:p>
+          <a:p>
+            <a:r>
+              <a:rPr lang="en-US" sz="1380" dirty="0">
+                <a:solidFill>
+                  <a:srgbClr val="17364A"/>
+                </a:solidFill>
+                <a:latin typeface="Aptos" pitchFamily="34" charset="0"/>
+                <a:ea typeface="Aptos" pitchFamily="34" charset="-122"/>
+                <a:cs typeface="Aptos" pitchFamily="34" charset="-120"/>
+              </a:rPr>
+              <a:t>Which staff roles would need to understand or apply this concept before AI use is approved?</a:t>
+            </a:r>
+            <a:endParaRPr lang="en-US" sz="1380" dirty="0"/>
+          </a:p>
+          <a:p>
+            <a:r>
+              <a:rPr lang="en-US" sz="1380" dirty="0">
+                <a:solidFill>
+                  <a:srgbClr val="17364A"/>
+                </a:solidFill>
+                <a:latin typeface="Aptos" pitchFamily="34" charset="0"/>
+                <a:ea typeface="Aptos" pitchFamily="34" charset="-122"/>
+                <a:cs typeface="Aptos" pitchFamily="34" charset="-120"/>
+              </a:rPr>
+              <a:t>What could go wrong if this topic is not addressed before implementation?</a:t>
+            </a:r>
+            <a:endParaRPr lang="en-US" sz="1380" dirty="0"/>
           </a:p>
         </p:txBody>
       </p:sp>
       <p:sp>
         <p:nvSpPr>
           <p:cNvPr id="16" name="Shape 14"/>
-          <p:cNvSpPr/>
-          <p:nvPr/>
-        </p:nvSpPr>
-        <p:spPr>
-          <a:xfrm>
-            <a:off x="8976360" y="3319272"/>
-            <a:ext cx="792480" cy="749808"/>
-          </a:xfrm>
-          <a:prstGeom prst="roundRect">
-            <a:avLst>
-              <a:gd name="adj" fmla="val 14634"/>
-            </a:avLst>
-          </a:prstGeom>
-          <a:solidFill>
-            <a:srgbClr val="2F8A28"/>
-          </a:solidFill>
-          <a:ln w="12700">
-            <a:solidFill>
-              <a:srgbClr val="2F8A28"/>
-            </a:solidFill>
-            <a:prstDash val="solid"/>
-          </a:ln>
-        </p:spPr>
-      </p:sp>
-      <p:sp>
-        <p:nvSpPr>
-          <p:cNvPr id="17" name="Text 15"/>
-          <p:cNvSpPr/>
-          <p:nvPr/>
-        </p:nvSpPr>
-        <p:spPr>
-          <a:xfrm>
-            <a:off x="9049512" y="3511296"/>
-            <a:ext cx="646176" cy="310896"/>
-          </a:xfrm>
-          <a:prstGeom prst="rect">
-            <a:avLst/>
-          </a:prstGeom>
-          <a:noFill/>
-          <a:ln/>
-        </p:spPr>
-        <p:txBody>
-          <a:bodyPr wrap="square" lIns="0" tIns="0" rIns="0" bIns="0" rtlCol="0" anchor="ctr">
-            <a:normAutofit/>
-          </a:bodyPr>
-          <a:lstStyle/>
-          <a:p>
-            <a:pPr algn="ctr" indent="0" marL="0">
-              <a:buNone/>
-            </a:pPr>
-            <a:r>
-              <a:rPr lang="en-US" sz="1500" b="1" dirty="0">
-                <a:solidFill>
-                  <a:srgbClr val="FFFFFF"/>
-                </a:solidFill>
-                <a:latin typeface="Aptos" pitchFamily="34" charset="0"/>
-                <a:ea typeface="Aptos" pitchFamily="34" charset="-122"/>
-                <a:cs typeface="Aptos" pitchFamily="34" charset="-120"/>
-              </a:rPr>
-              <a:t>Do</a:t>
-            </a:r>
-            <a:endParaRPr lang="en-US" sz="1500" dirty="0"/>
-          </a:p>
-        </p:txBody>
-      </p:sp>
-      <p:sp>
-        <p:nvSpPr>
-          <p:cNvPr id="18" name="Shape 16"/>
-          <p:cNvSpPr/>
-          <p:nvPr/>
-        </p:nvSpPr>
-        <p:spPr>
-          <a:xfrm>
-            <a:off x="10024872" y="3319272"/>
-            <a:ext cx="792480" cy="749808"/>
-          </a:xfrm>
-          <a:prstGeom prst="roundRect">
-            <a:avLst>
-              <a:gd name="adj" fmla="val 14634"/>
-            </a:avLst>
-          </a:prstGeom>
-          <a:solidFill>
-            <a:srgbClr val="D69A2D"/>
-          </a:solidFill>
-          <a:ln w="12700">
-            <a:solidFill>
-              <a:srgbClr val="D69A2D"/>
-            </a:solidFill>
-            <a:prstDash val="solid"/>
-          </a:ln>
-        </p:spPr>
-      </p:sp>
-      <p:sp>
-        <p:nvSpPr>
-          <p:cNvPr id="19" name="Text 17"/>
-          <p:cNvSpPr/>
-          <p:nvPr/>
-        </p:nvSpPr>
-        <p:spPr>
-          <a:xfrm>
-            <a:off x="10098024" y="3511296"/>
-            <a:ext cx="646176" cy="310896"/>
-          </a:xfrm>
-          <a:prstGeom prst="rect">
-            <a:avLst/>
-          </a:prstGeom>
-          <a:noFill/>
-          <a:ln/>
-        </p:spPr>
-        <p:txBody>
-          <a:bodyPr wrap="square" lIns="0" tIns="0" rIns="0" bIns="0" rtlCol="0" anchor="ctr">
-            <a:normAutofit/>
-          </a:bodyPr>
-          <a:lstStyle/>
-          <a:p>
-            <a:pPr algn="ctr" indent="0" marL="0">
-              <a:buNone/>
-            </a:pPr>
-            <a:r>
-              <a:rPr lang="en-US" sz="1500" b="1" dirty="0">
-                <a:solidFill>
-                  <a:srgbClr val="FFFFFF"/>
-                </a:solidFill>
-                <a:latin typeface="Aptos" pitchFamily="34" charset="0"/>
-                <a:ea typeface="Aptos" pitchFamily="34" charset="-122"/>
-                <a:cs typeface="Aptos" pitchFamily="34" charset="-120"/>
-              </a:rPr>
-              <a:t>Review</a:t>
-            </a:r>
-            <a:endParaRPr lang="en-US" sz="1500" dirty="0"/>
-          </a:p>
-        </p:txBody>
-      </p:sp>
-      <p:sp>
-        <p:nvSpPr>
-          <p:cNvPr id="20" name="Shape 18"/>
-          <p:cNvSpPr/>
-          <p:nvPr/>
-        </p:nvSpPr>
-        <p:spPr>
-          <a:xfrm>
-            <a:off x="8293608" y="4389120"/>
-            <a:ext cx="2157984" cy="0"/>
-          </a:xfrm>
-          <a:prstGeom prst="line">
-            <a:avLst/>
-          </a:prstGeom>
-          <a:noFill/>
-          <a:ln w="25400">
-            <a:solidFill>
-              <a:srgbClr val="8ABBD8"/>
-            </a:solidFill>
-            <a:prstDash val="solid"/>
-          </a:ln>
-        </p:spPr>
-      </p:sp>
-      <p:sp>
-        <p:nvSpPr>
-          <p:cNvPr id="21" name="Text 19"/>
-          <p:cNvSpPr/>
-          <p:nvPr/>
-        </p:nvSpPr>
-        <p:spPr>
-          <a:xfrm>
-            <a:off x="7909560" y="3977640"/>
-            <a:ext cx="2926080" cy="182880"/>
-          </a:xfrm>
-          <a:prstGeom prst="rect">
-            <a:avLst/>
-          </a:prstGeom>
-          <a:noFill/>
-          <a:ln/>
-        </p:spPr>
-        <p:txBody>
-          <a:bodyPr wrap="square" lIns="0" tIns="0" rIns="0" bIns="0" rtlCol="0" anchor="ctr"/>
-          <a:lstStyle/>
-          <a:p>
-            <a:pPr algn="ctr" indent="0" marL="0">
-              <a:buNone/>
-            </a:pPr>
-            <a:r>
-              <a:rPr lang="en-US" sz="1000" dirty="0">
-                <a:solidFill>
-                  <a:srgbClr val="003A63"/>
-                </a:solidFill>
-                <a:latin typeface="Aptos" pitchFamily="34" charset="0"/>
-                <a:ea typeface="Aptos" pitchFamily="34" charset="-122"/>
-                <a:cs typeface="Aptos" pitchFamily="34" charset="-120"/>
-              </a:rPr>
-              <a:t>Dependencies visible</a:t>
-            </a:r>
-            <a:endParaRPr lang="en-US" sz="1000" dirty="0"/>
-          </a:p>
-        </p:txBody>
-      </p:sp>
-      <p:sp>
-        <p:nvSpPr>
-          <p:cNvPr id="22" name="Shape 20"/>
           <p:cNvSpPr/>
           <p:nvPr/>
         </p:nvSpPr>
@@ -6683,7 +6436,7 @@
       </p:sp>
       <p:sp>
         <p:nvSpPr>
-          <p:cNvPr id="23" name="Text 21"/>
+          <p:cNvPr id="17" name="Text 15"/>
           <p:cNvSpPr/>
           <p:nvPr/>
         </p:nvSpPr>
@@ -6722,7 +6475,7 @@
       </p:sp>
       <p:sp>
         <p:nvSpPr>
-          <p:cNvPr id="24" name="Text 22"/>
+          <p:cNvPr id="18" name="Text 16"/>
           <p:cNvSpPr/>
           <p:nvPr/>
         </p:nvSpPr>
@@ -7216,13 +6969,11 @@
             </a:avLst>
           </a:prstGeom>
           <a:solidFill>
-            <a:srgbClr val="FFFFFF">
-              <a:alpha val="88000"/>
-            </a:srgbClr>
+            <a:srgbClr val="FFFFFF"/>
           </a:solidFill>
           <a:ln w="12700">
             <a:solidFill>
-              <a:srgbClr val="D6E8F2"/>
+              <a:srgbClr val="B9D7E6"/>
             </a:solidFill>
             <a:prstDash val="solid"/>
           </a:ln>
@@ -7230,30 +6981,42 @@
       </p:sp>
       <p:sp>
         <p:nvSpPr>
-          <p:cNvPr id="14" name="Shape 12"/>
-          <p:cNvSpPr/>
-          <p:nvPr/>
-        </p:nvSpPr>
-        <p:spPr>
-          <a:xfrm>
-            <a:off x="7927848" y="3319272"/>
-            <a:ext cx="792480" cy="749808"/>
-          </a:xfrm>
-          <a:prstGeom prst="roundRect">
-            <a:avLst>
-              <a:gd name="adj" fmla="val 14634"/>
-            </a:avLst>
-          </a:prstGeom>
-          <a:solidFill>
-            <a:srgbClr val="0068B7"/>
-          </a:solidFill>
-          <a:ln w="12700">
-            <a:solidFill>
-              <a:srgbClr val="0068B7"/>
-            </a:solidFill>
-            <a:prstDash val="solid"/>
-          </a:ln>
-        </p:spPr>
+          <p:cNvPr id="14" name="Text 12"/>
+          <p:cNvSpPr/>
+          <p:nvPr/>
+        </p:nvSpPr>
+        <p:spPr>
+          <a:xfrm>
+            <a:off x="7799832" y="2935224"/>
+            <a:ext cx="3145536" cy="256032"/>
+          </a:xfrm>
+          <a:prstGeom prst="rect">
+            <a:avLst/>
+          </a:prstGeom>
+          <a:noFill/>
+          <a:ln/>
+        </p:spPr>
+        <p:txBody>
+          <a:bodyPr wrap="square" lIns="0" tIns="0" rIns="0" bIns="0" rtlCol="0" anchor="ctr"/>
+          <a:lstStyle/>
+          <a:p>
+            <a:pPr indent="0" marL="0">
+              <a:buNone/>
+            </a:pPr>
+            <a:r>
+              <a:rPr lang="en-US" sz="1300" b="1" dirty="0">
+                <a:solidFill>
+                  <a:srgbClr val="0068B7"/>
+                </a:solidFill>
+                <a:latin typeface="Aptos" pitchFamily="34" charset="0"/>
+                <a:ea typeface="Aptos" pitchFamily="34" charset="-122"/>
+                <a:cs typeface="Aptos" pitchFamily="34" charset="-120"/>
+              </a:rPr>
+              <a:t>Concept checkpoints</a:t>
+            </a:r>
+            <a:endParaRPr lang="en-US" sz="1300" dirty="0"/>
+          </a:p>
+        </p:txBody>
       </p:sp>
       <p:sp>
         <p:nvSpPr>
@@ -7263,240 +7026,53 @@
         </p:nvSpPr>
         <p:spPr>
           <a:xfrm>
-            <a:off x="8001000" y="3511296"/>
-            <a:ext cx="646176" cy="310896"/>
-          </a:xfrm>
-          <a:prstGeom prst="rect">
-            <a:avLst/>
-          </a:prstGeom>
-          <a:noFill/>
-          <a:ln/>
-        </p:spPr>
-        <p:txBody>
-          <a:bodyPr wrap="square" lIns="0" tIns="0" rIns="0" bIns="0" rtlCol="0" anchor="ctr">
+            <a:off x="7818120" y="3300984"/>
+            <a:ext cx="3090672" cy="877824"/>
+          </a:xfrm>
+          <a:prstGeom prst="rect">
+            <a:avLst/>
+          </a:prstGeom>
+          <a:noFill/>
+          <a:ln/>
+        </p:spPr>
+        <p:txBody>
+          <a:bodyPr wrap="square" lIns="254" tIns="254" rIns="254" bIns="254" rtlCol="0" anchor="t">
             <a:normAutofit/>
           </a:bodyPr>
           <a:lstStyle/>
           <a:p>
-            <a:pPr algn="ctr" indent="0" marL="0">
-              <a:buNone/>
-            </a:pPr>
-            <a:r>
-              <a:rPr lang="en-US" sz="1500" b="1" dirty="0">
-                <a:solidFill>
-                  <a:srgbClr val="FFFFFF"/>
-                </a:solidFill>
-                <a:latin typeface="Aptos" pitchFamily="34" charset="0"/>
-                <a:ea typeface="Aptos" pitchFamily="34" charset="-122"/>
-                <a:cs typeface="Aptos" pitchFamily="34" charset="-120"/>
-              </a:rPr>
-              <a:t>Plan</a:t>
-            </a:r>
-            <a:endParaRPr lang="en-US" sz="1500" dirty="0"/>
+            <a:r>
+              <a:rPr lang="en-US" sz="1380" dirty="0">
+                <a:solidFill>
+                  <a:srgbClr val="17364A"/>
+                </a:solidFill>
+                <a:latin typeface="Aptos" pitchFamily="34" charset="0"/>
+                <a:ea typeface="Aptos" pitchFamily="34" charset="-122"/>
+                <a:cs typeface="Aptos" pitchFamily="34" charset="-120"/>
+              </a:rPr>
+              <a:t>What evidence would governance, leadership, or operations staff need before moving forward?</a:t>
+            </a:r>
+            <a:endParaRPr lang="en-US" sz="1380" dirty="0"/>
+          </a:p>
+          <a:p>
+            <a:r>
+              <a:rPr lang="en-US" sz="1380" dirty="0">
+                <a:solidFill>
+                  <a:srgbClr val="17364A"/>
+                </a:solidFill>
+                <a:latin typeface="Aptos" pitchFamily="34" charset="0"/>
+                <a:ea typeface="Aptos" pitchFamily="34" charset="-122"/>
+                <a:cs typeface="Aptos" pitchFamily="34" charset="-120"/>
+              </a:rPr>
+              <a:t>Which policy, data, equity, privacy, security, or workflow questions remain unresolved?</a:t>
+            </a:r>
+            <a:endParaRPr lang="en-US" sz="1380" dirty="0"/>
           </a:p>
         </p:txBody>
       </p:sp>
       <p:sp>
         <p:nvSpPr>
           <p:cNvPr id="16" name="Shape 14"/>
-          <p:cNvSpPr/>
-          <p:nvPr/>
-        </p:nvSpPr>
-        <p:spPr>
-          <a:xfrm>
-            <a:off x="8976360" y="3319272"/>
-            <a:ext cx="792480" cy="749808"/>
-          </a:xfrm>
-          <a:prstGeom prst="roundRect">
-            <a:avLst>
-              <a:gd name="adj" fmla="val 14634"/>
-            </a:avLst>
-          </a:prstGeom>
-          <a:solidFill>
-            <a:srgbClr val="2F8A28"/>
-          </a:solidFill>
-          <a:ln w="12700">
-            <a:solidFill>
-              <a:srgbClr val="2F8A28"/>
-            </a:solidFill>
-            <a:prstDash val="solid"/>
-          </a:ln>
-        </p:spPr>
-      </p:sp>
-      <p:sp>
-        <p:nvSpPr>
-          <p:cNvPr id="17" name="Text 15"/>
-          <p:cNvSpPr/>
-          <p:nvPr/>
-        </p:nvSpPr>
-        <p:spPr>
-          <a:xfrm>
-            <a:off x="9049512" y="3511296"/>
-            <a:ext cx="646176" cy="310896"/>
-          </a:xfrm>
-          <a:prstGeom prst="rect">
-            <a:avLst/>
-          </a:prstGeom>
-          <a:noFill/>
-          <a:ln/>
-        </p:spPr>
-        <p:txBody>
-          <a:bodyPr wrap="square" lIns="0" tIns="0" rIns="0" bIns="0" rtlCol="0" anchor="ctr">
-            <a:normAutofit/>
-          </a:bodyPr>
-          <a:lstStyle/>
-          <a:p>
-            <a:pPr algn="ctr" indent="0" marL="0">
-              <a:buNone/>
-            </a:pPr>
-            <a:r>
-              <a:rPr lang="en-US" sz="1500" b="1" dirty="0">
-                <a:solidFill>
-                  <a:srgbClr val="FFFFFF"/>
-                </a:solidFill>
-                <a:latin typeface="Aptos" pitchFamily="34" charset="0"/>
-                <a:ea typeface="Aptos" pitchFamily="34" charset="-122"/>
-                <a:cs typeface="Aptos" pitchFamily="34" charset="-120"/>
-              </a:rPr>
-              <a:t>Do</a:t>
-            </a:r>
-            <a:endParaRPr lang="en-US" sz="1500" dirty="0"/>
-          </a:p>
-        </p:txBody>
-      </p:sp>
-      <p:sp>
-        <p:nvSpPr>
-          <p:cNvPr id="18" name="Shape 16"/>
-          <p:cNvSpPr/>
-          <p:nvPr/>
-        </p:nvSpPr>
-        <p:spPr>
-          <a:xfrm>
-            <a:off x="10024872" y="3319272"/>
-            <a:ext cx="792480" cy="749808"/>
-          </a:xfrm>
-          <a:prstGeom prst="roundRect">
-            <a:avLst>
-              <a:gd name="adj" fmla="val 14634"/>
-            </a:avLst>
-          </a:prstGeom>
-          <a:solidFill>
-            <a:srgbClr val="D69A2D"/>
-          </a:solidFill>
-          <a:ln w="12700">
-            <a:solidFill>
-              <a:srgbClr val="D69A2D"/>
-            </a:solidFill>
-            <a:prstDash val="solid"/>
-          </a:ln>
-        </p:spPr>
-      </p:sp>
-      <p:sp>
-        <p:nvSpPr>
-          <p:cNvPr id="19" name="Text 17"/>
-          <p:cNvSpPr/>
-          <p:nvPr/>
-        </p:nvSpPr>
-        <p:spPr>
-          <a:xfrm>
-            <a:off x="10098024" y="3511296"/>
-            <a:ext cx="646176" cy="310896"/>
-          </a:xfrm>
-          <a:prstGeom prst="rect">
-            <a:avLst/>
-          </a:prstGeom>
-          <a:noFill/>
-          <a:ln/>
-        </p:spPr>
-        <p:txBody>
-          <a:bodyPr wrap="square" lIns="0" tIns="0" rIns="0" bIns="0" rtlCol="0" anchor="ctr">
-            <a:normAutofit/>
-          </a:bodyPr>
-          <a:lstStyle/>
-          <a:p>
-            <a:pPr algn="ctr" indent="0" marL="0">
-              <a:buNone/>
-            </a:pPr>
-            <a:r>
-              <a:rPr lang="en-US" sz="1500" b="1" dirty="0">
-                <a:solidFill>
-                  <a:srgbClr val="FFFFFF"/>
-                </a:solidFill>
-                <a:latin typeface="Aptos" pitchFamily="34" charset="0"/>
-                <a:ea typeface="Aptos" pitchFamily="34" charset="-122"/>
-                <a:cs typeface="Aptos" pitchFamily="34" charset="-120"/>
-              </a:rPr>
-              <a:t>Review</a:t>
-            </a:r>
-            <a:endParaRPr lang="en-US" sz="1500" dirty="0"/>
-          </a:p>
-        </p:txBody>
-      </p:sp>
-      <p:sp>
-        <p:nvSpPr>
-          <p:cNvPr id="20" name="Shape 18"/>
-          <p:cNvSpPr/>
-          <p:nvPr/>
-        </p:nvSpPr>
-        <p:spPr>
-          <a:xfrm>
-            <a:off x="8293608" y="4389120"/>
-            <a:ext cx="2157984" cy="0"/>
-          </a:xfrm>
-          <a:prstGeom prst="line">
-            <a:avLst/>
-          </a:prstGeom>
-          <a:noFill/>
-          <a:ln w="25400">
-            <a:solidFill>
-              <a:srgbClr val="8ABBD8"/>
-            </a:solidFill>
-            <a:prstDash val="solid"/>
-          </a:ln>
-        </p:spPr>
-      </p:sp>
-      <p:sp>
-        <p:nvSpPr>
-          <p:cNvPr id="21" name="Text 19"/>
-          <p:cNvSpPr/>
-          <p:nvPr/>
-        </p:nvSpPr>
-        <p:spPr>
-          <a:xfrm>
-            <a:off x="7909560" y="3977640"/>
-            <a:ext cx="2926080" cy="182880"/>
-          </a:xfrm>
-          <a:prstGeom prst="rect">
-            <a:avLst/>
-          </a:prstGeom>
-          <a:noFill/>
-          <a:ln/>
-        </p:spPr>
-        <p:txBody>
-          <a:bodyPr wrap="square" lIns="0" tIns="0" rIns="0" bIns="0" rtlCol="0" anchor="ctr"/>
-          <a:lstStyle/>
-          <a:p>
-            <a:pPr algn="ctr" indent="0" marL="0">
-              <a:buNone/>
-            </a:pPr>
-            <a:r>
-              <a:rPr lang="en-US" sz="1000" dirty="0">
-                <a:solidFill>
-                  <a:srgbClr val="003A63"/>
-                </a:solidFill>
-                <a:latin typeface="Aptos" pitchFamily="34" charset="0"/>
-                <a:ea typeface="Aptos" pitchFamily="34" charset="-122"/>
-                <a:cs typeface="Aptos" pitchFamily="34" charset="-120"/>
-              </a:rPr>
-              <a:t>Dependencies visible</a:t>
-            </a:r>
-            <a:endParaRPr lang="en-US" sz="1000" dirty="0"/>
-          </a:p>
-        </p:txBody>
-      </p:sp>
-      <p:sp>
-        <p:nvSpPr>
-          <p:cNvPr id="22" name="Shape 20"/>
           <p:cNvSpPr/>
           <p:nvPr/>
         </p:nvSpPr>
@@ -7523,7 +7099,7 @@
       </p:sp>
       <p:sp>
         <p:nvSpPr>
-          <p:cNvPr id="23" name="Text 21"/>
+          <p:cNvPr id="17" name="Text 15"/>
           <p:cNvSpPr/>
           <p:nvPr/>
         </p:nvSpPr>
@@ -7562,7 +7138,7 @@
       </p:sp>
       <p:sp>
         <p:nvSpPr>
-          <p:cNvPr id="24" name="Text 22"/>
+          <p:cNvPr id="18" name="Text 16"/>
           <p:cNvSpPr/>
           <p:nvPr/>
         </p:nvSpPr>
@@ -8056,13 +7632,11 @@
             </a:avLst>
           </a:prstGeom>
           <a:solidFill>
-            <a:srgbClr val="FFFFFF">
-              <a:alpha val="88000"/>
-            </a:srgbClr>
+            <a:srgbClr val="FFFFFF"/>
           </a:solidFill>
           <a:ln w="12700">
             <a:solidFill>
-              <a:srgbClr val="D6E8F2"/>
+              <a:srgbClr val="B9D7E6"/>
             </a:solidFill>
             <a:prstDash val="solid"/>
           </a:ln>
@@ -8070,30 +7644,42 @@
       </p:sp>
       <p:sp>
         <p:nvSpPr>
-          <p:cNvPr id="14" name="Shape 12"/>
-          <p:cNvSpPr/>
-          <p:nvPr/>
-        </p:nvSpPr>
-        <p:spPr>
-          <a:xfrm>
-            <a:off x="7927848" y="3319272"/>
-            <a:ext cx="792480" cy="749808"/>
-          </a:xfrm>
-          <a:prstGeom prst="roundRect">
-            <a:avLst>
-              <a:gd name="adj" fmla="val 14634"/>
-            </a:avLst>
-          </a:prstGeom>
-          <a:solidFill>
-            <a:srgbClr val="0068B7"/>
-          </a:solidFill>
-          <a:ln w="12700">
-            <a:solidFill>
-              <a:srgbClr val="0068B7"/>
-            </a:solidFill>
-            <a:prstDash val="solid"/>
-          </a:ln>
-        </p:spPr>
+          <p:cNvPr id="14" name="Text 12"/>
+          <p:cNvSpPr/>
+          <p:nvPr/>
+        </p:nvSpPr>
+        <p:spPr>
+          <a:xfrm>
+            <a:off x="7799832" y="2935224"/>
+            <a:ext cx="3145536" cy="256032"/>
+          </a:xfrm>
+          <a:prstGeom prst="rect">
+            <a:avLst/>
+          </a:prstGeom>
+          <a:noFill/>
+          <a:ln/>
+        </p:spPr>
+        <p:txBody>
+          <a:bodyPr wrap="square" lIns="0" tIns="0" rIns="0" bIns="0" rtlCol="0" anchor="ctr"/>
+          <a:lstStyle/>
+          <a:p>
+            <a:pPr indent="0" marL="0">
+              <a:buNone/>
+            </a:pPr>
+            <a:r>
+              <a:rPr lang="en-US" sz="1300" b="1" dirty="0">
+                <a:solidFill>
+                  <a:srgbClr val="0068B7"/>
+                </a:solidFill>
+                <a:latin typeface="Aptos" pitchFamily="34" charset="0"/>
+                <a:ea typeface="Aptos" pitchFamily="34" charset="-122"/>
+                <a:cs typeface="Aptos" pitchFamily="34" charset="-120"/>
+              </a:rPr>
+              <a:t>Concept checkpoints</a:t>
+            </a:r>
+            <a:endParaRPr lang="en-US" sz="1300" dirty="0"/>
+          </a:p>
+        </p:txBody>
       </p:sp>
       <p:sp>
         <p:nvSpPr>
@@ -8103,240 +7689,53 @@
         </p:nvSpPr>
         <p:spPr>
           <a:xfrm>
-            <a:off x="8001000" y="3511296"/>
-            <a:ext cx="646176" cy="310896"/>
-          </a:xfrm>
-          <a:prstGeom prst="rect">
-            <a:avLst/>
-          </a:prstGeom>
-          <a:noFill/>
-          <a:ln/>
-        </p:spPr>
-        <p:txBody>
-          <a:bodyPr wrap="square" lIns="0" tIns="0" rIns="0" bIns="0" rtlCol="0" anchor="ctr">
+            <a:off x="7818120" y="3300984"/>
+            <a:ext cx="3090672" cy="877824"/>
+          </a:xfrm>
+          <a:prstGeom prst="rect">
+            <a:avLst/>
+          </a:prstGeom>
+          <a:noFill/>
+          <a:ln/>
+        </p:spPr>
+        <p:txBody>
+          <a:bodyPr wrap="square" lIns="254" tIns="254" rIns="254" bIns="254" rtlCol="0" anchor="t">
             <a:normAutofit/>
           </a:bodyPr>
           <a:lstStyle/>
           <a:p>
-            <a:pPr algn="ctr" indent="0" marL="0">
-              <a:buNone/>
-            </a:pPr>
-            <a:r>
-              <a:rPr lang="en-US" sz="1500" b="1" dirty="0">
-                <a:solidFill>
-                  <a:srgbClr val="FFFFFF"/>
-                </a:solidFill>
-                <a:latin typeface="Aptos" pitchFamily="34" charset="0"/>
-                <a:ea typeface="Aptos" pitchFamily="34" charset="-122"/>
-                <a:cs typeface="Aptos" pitchFamily="34" charset="-120"/>
-              </a:rPr>
-              <a:t>Plan</a:t>
-            </a:r>
-            <a:endParaRPr lang="en-US" sz="1500" dirty="0"/>
+            <a:r>
+              <a:rPr lang="en-US" sz="1380" dirty="0">
+                <a:solidFill>
+                  <a:srgbClr val="17364A"/>
+                </a:solidFill>
+                <a:latin typeface="Aptos" pitchFamily="34" charset="0"/>
+                <a:ea typeface="Aptos" pitchFamily="34" charset="-122"/>
+                <a:cs typeface="Aptos" pitchFamily="34" charset="-120"/>
+              </a:rPr>
+              <a:t>Create an AI project charter and implementation plan for one proposed AI-supported public.</a:t>
+            </a:r>
+            <a:endParaRPr lang="en-US" sz="1380" dirty="0"/>
+          </a:p>
+          <a:p>
+            <a:r>
+              <a:rPr lang="en-US" sz="1380" dirty="0">
+                <a:solidFill>
+                  <a:srgbClr val="17364A"/>
+                </a:solidFill>
+                <a:latin typeface="Aptos" pitchFamily="34" charset="0"/>
+                <a:ea typeface="Aptos" pitchFamily="34" charset="-122"/>
+                <a:cs typeface="Aptos" pitchFamily="34" charset="-120"/>
+              </a:rPr>
+              <a:t>Include project purpose, scope, objectives, roles, governance gates, milestones,.</a:t>
+            </a:r>
+            <a:endParaRPr lang="en-US" sz="1380" dirty="0"/>
           </a:p>
         </p:txBody>
       </p:sp>
       <p:sp>
         <p:nvSpPr>
           <p:cNvPr id="16" name="Shape 14"/>
-          <p:cNvSpPr/>
-          <p:nvPr/>
-        </p:nvSpPr>
-        <p:spPr>
-          <a:xfrm>
-            <a:off x="8976360" y="3319272"/>
-            <a:ext cx="792480" cy="749808"/>
-          </a:xfrm>
-          <a:prstGeom prst="roundRect">
-            <a:avLst>
-              <a:gd name="adj" fmla="val 14634"/>
-            </a:avLst>
-          </a:prstGeom>
-          <a:solidFill>
-            <a:srgbClr val="2F8A28"/>
-          </a:solidFill>
-          <a:ln w="12700">
-            <a:solidFill>
-              <a:srgbClr val="2F8A28"/>
-            </a:solidFill>
-            <a:prstDash val="solid"/>
-          </a:ln>
-        </p:spPr>
-      </p:sp>
-      <p:sp>
-        <p:nvSpPr>
-          <p:cNvPr id="17" name="Text 15"/>
-          <p:cNvSpPr/>
-          <p:nvPr/>
-        </p:nvSpPr>
-        <p:spPr>
-          <a:xfrm>
-            <a:off x="9049512" y="3511296"/>
-            <a:ext cx="646176" cy="310896"/>
-          </a:xfrm>
-          <a:prstGeom prst="rect">
-            <a:avLst/>
-          </a:prstGeom>
-          <a:noFill/>
-          <a:ln/>
-        </p:spPr>
-        <p:txBody>
-          <a:bodyPr wrap="square" lIns="0" tIns="0" rIns="0" bIns="0" rtlCol="0" anchor="ctr">
-            <a:normAutofit/>
-          </a:bodyPr>
-          <a:lstStyle/>
-          <a:p>
-            <a:pPr algn="ctr" indent="0" marL="0">
-              <a:buNone/>
-            </a:pPr>
-            <a:r>
-              <a:rPr lang="en-US" sz="1500" b="1" dirty="0">
-                <a:solidFill>
-                  <a:srgbClr val="FFFFFF"/>
-                </a:solidFill>
-                <a:latin typeface="Aptos" pitchFamily="34" charset="0"/>
-                <a:ea typeface="Aptos" pitchFamily="34" charset="-122"/>
-                <a:cs typeface="Aptos" pitchFamily="34" charset="-120"/>
-              </a:rPr>
-              <a:t>Do</a:t>
-            </a:r>
-            <a:endParaRPr lang="en-US" sz="1500" dirty="0"/>
-          </a:p>
-        </p:txBody>
-      </p:sp>
-      <p:sp>
-        <p:nvSpPr>
-          <p:cNvPr id="18" name="Shape 16"/>
-          <p:cNvSpPr/>
-          <p:nvPr/>
-        </p:nvSpPr>
-        <p:spPr>
-          <a:xfrm>
-            <a:off x="10024872" y="3319272"/>
-            <a:ext cx="792480" cy="749808"/>
-          </a:xfrm>
-          <a:prstGeom prst="roundRect">
-            <a:avLst>
-              <a:gd name="adj" fmla="val 14634"/>
-            </a:avLst>
-          </a:prstGeom>
-          <a:solidFill>
-            <a:srgbClr val="D69A2D"/>
-          </a:solidFill>
-          <a:ln w="12700">
-            <a:solidFill>
-              <a:srgbClr val="D69A2D"/>
-            </a:solidFill>
-            <a:prstDash val="solid"/>
-          </a:ln>
-        </p:spPr>
-      </p:sp>
-      <p:sp>
-        <p:nvSpPr>
-          <p:cNvPr id="19" name="Text 17"/>
-          <p:cNvSpPr/>
-          <p:nvPr/>
-        </p:nvSpPr>
-        <p:spPr>
-          <a:xfrm>
-            <a:off x="10098024" y="3511296"/>
-            <a:ext cx="646176" cy="310896"/>
-          </a:xfrm>
-          <a:prstGeom prst="rect">
-            <a:avLst/>
-          </a:prstGeom>
-          <a:noFill/>
-          <a:ln/>
-        </p:spPr>
-        <p:txBody>
-          <a:bodyPr wrap="square" lIns="0" tIns="0" rIns="0" bIns="0" rtlCol="0" anchor="ctr">
-            <a:normAutofit/>
-          </a:bodyPr>
-          <a:lstStyle/>
-          <a:p>
-            <a:pPr algn="ctr" indent="0" marL="0">
-              <a:buNone/>
-            </a:pPr>
-            <a:r>
-              <a:rPr lang="en-US" sz="1500" b="1" dirty="0">
-                <a:solidFill>
-                  <a:srgbClr val="FFFFFF"/>
-                </a:solidFill>
-                <a:latin typeface="Aptos" pitchFamily="34" charset="0"/>
-                <a:ea typeface="Aptos" pitchFamily="34" charset="-122"/>
-                <a:cs typeface="Aptos" pitchFamily="34" charset="-120"/>
-              </a:rPr>
-              <a:t>Review</a:t>
-            </a:r>
-            <a:endParaRPr lang="en-US" sz="1500" dirty="0"/>
-          </a:p>
-        </p:txBody>
-      </p:sp>
-      <p:sp>
-        <p:nvSpPr>
-          <p:cNvPr id="20" name="Shape 18"/>
-          <p:cNvSpPr/>
-          <p:nvPr/>
-        </p:nvSpPr>
-        <p:spPr>
-          <a:xfrm>
-            <a:off x="8293608" y="4389120"/>
-            <a:ext cx="2157984" cy="0"/>
-          </a:xfrm>
-          <a:prstGeom prst="line">
-            <a:avLst/>
-          </a:prstGeom>
-          <a:noFill/>
-          <a:ln w="25400">
-            <a:solidFill>
-              <a:srgbClr val="8ABBD8"/>
-            </a:solidFill>
-            <a:prstDash val="solid"/>
-          </a:ln>
-        </p:spPr>
-      </p:sp>
-      <p:sp>
-        <p:nvSpPr>
-          <p:cNvPr id="21" name="Text 19"/>
-          <p:cNvSpPr/>
-          <p:nvPr/>
-        </p:nvSpPr>
-        <p:spPr>
-          <a:xfrm>
-            <a:off x="7909560" y="3977640"/>
-            <a:ext cx="2926080" cy="182880"/>
-          </a:xfrm>
-          <a:prstGeom prst="rect">
-            <a:avLst/>
-          </a:prstGeom>
-          <a:noFill/>
-          <a:ln/>
-        </p:spPr>
-        <p:txBody>
-          <a:bodyPr wrap="square" lIns="0" tIns="0" rIns="0" bIns="0" rtlCol="0" anchor="ctr"/>
-          <a:lstStyle/>
-          <a:p>
-            <a:pPr algn="ctr" indent="0" marL="0">
-              <a:buNone/>
-            </a:pPr>
-            <a:r>
-              <a:rPr lang="en-US" sz="1000" dirty="0">
-                <a:solidFill>
-                  <a:srgbClr val="003A63"/>
-                </a:solidFill>
-                <a:latin typeface="Aptos" pitchFamily="34" charset="0"/>
-                <a:ea typeface="Aptos" pitchFamily="34" charset="-122"/>
-                <a:cs typeface="Aptos" pitchFamily="34" charset="-120"/>
-              </a:rPr>
-              <a:t>Dependencies visible</a:t>
-            </a:r>
-            <a:endParaRPr lang="en-US" sz="1000" dirty="0"/>
-          </a:p>
-        </p:txBody>
-      </p:sp>
-      <p:sp>
-        <p:nvSpPr>
-          <p:cNvPr id="22" name="Shape 20"/>
           <p:cNvSpPr/>
           <p:nvPr/>
         </p:nvSpPr>
@@ -8363,7 +7762,7 @@
       </p:sp>
       <p:sp>
         <p:nvSpPr>
-          <p:cNvPr id="23" name="Text 21"/>
+          <p:cNvPr id="17" name="Text 15"/>
           <p:cNvSpPr/>
           <p:nvPr/>
         </p:nvSpPr>
@@ -8402,7 +7801,7 @@
       </p:sp>
       <p:sp>
         <p:nvSpPr>
-          <p:cNvPr id="24" name="Text 22"/>
+          <p:cNvPr id="18" name="Text 16"/>
           <p:cNvSpPr/>
           <p:nvPr/>
         </p:nvSpPr>
@@ -8910,13 +8309,11 @@
             </a:avLst>
           </a:prstGeom>
           <a:solidFill>
-            <a:srgbClr val="FFFFFF">
-              <a:alpha val="88000"/>
-            </a:srgbClr>
+            <a:srgbClr val="FFFFFF"/>
           </a:solidFill>
           <a:ln w="12700">
             <a:solidFill>
-              <a:srgbClr val="D6E8F2"/>
+              <a:srgbClr val="B9D7E6"/>
             </a:solidFill>
             <a:prstDash val="solid"/>
           </a:ln>
@@ -8924,30 +8321,42 @@
       </p:sp>
       <p:sp>
         <p:nvSpPr>
-          <p:cNvPr id="14" name="Shape 12"/>
-          <p:cNvSpPr/>
-          <p:nvPr/>
-        </p:nvSpPr>
-        <p:spPr>
-          <a:xfrm>
-            <a:off x="7927848" y="3319272"/>
-            <a:ext cx="792480" cy="749808"/>
-          </a:xfrm>
-          <a:prstGeom prst="roundRect">
-            <a:avLst>
-              <a:gd name="adj" fmla="val 14634"/>
-            </a:avLst>
-          </a:prstGeom>
-          <a:solidFill>
-            <a:srgbClr val="0068B7"/>
-          </a:solidFill>
-          <a:ln w="12700">
-            <a:solidFill>
-              <a:srgbClr val="0068B7"/>
-            </a:solidFill>
-            <a:prstDash val="solid"/>
-          </a:ln>
-        </p:spPr>
+          <p:cNvPr id="14" name="Text 12"/>
+          <p:cNvSpPr/>
+          <p:nvPr/>
+        </p:nvSpPr>
+        <p:spPr>
+          <a:xfrm>
+            <a:off x="7799832" y="2935224"/>
+            <a:ext cx="3145536" cy="256032"/>
+          </a:xfrm>
+          <a:prstGeom prst="rect">
+            <a:avLst/>
+          </a:prstGeom>
+          <a:noFill/>
+          <a:ln/>
+        </p:spPr>
+        <p:txBody>
+          <a:bodyPr wrap="square" lIns="0" tIns="0" rIns="0" bIns="0" rtlCol="0" anchor="ctr"/>
+          <a:lstStyle/>
+          <a:p>
+            <a:pPr indent="0" marL="0">
+              <a:buNone/>
+            </a:pPr>
+            <a:r>
+              <a:rPr lang="en-US" sz="1300" b="1" dirty="0">
+                <a:solidFill>
+                  <a:srgbClr val="0068B7"/>
+                </a:solidFill>
+                <a:latin typeface="Aptos" pitchFamily="34" charset="0"/>
+                <a:ea typeface="Aptos" pitchFamily="34" charset="-122"/>
+                <a:cs typeface="Aptos" pitchFamily="34" charset="-120"/>
+              </a:rPr>
+              <a:t>Concept checkpoints</a:t>
+            </a:r>
+            <a:endParaRPr lang="en-US" sz="1300" dirty="0"/>
+          </a:p>
+        </p:txBody>
       </p:sp>
       <p:sp>
         <p:nvSpPr>
@@ -8957,240 +8366,67 @@
         </p:nvSpPr>
         <p:spPr>
           <a:xfrm>
-            <a:off x="8001000" y="3511296"/>
-            <a:ext cx="646176" cy="310896"/>
-          </a:xfrm>
-          <a:prstGeom prst="rect">
-            <a:avLst/>
-          </a:prstGeom>
-          <a:noFill/>
-          <a:ln/>
-        </p:spPr>
-        <p:txBody>
-          <a:bodyPr wrap="square" lIns="0" tIns="0" rIns="0" bIns="0" rtlCol="0" anchor="ctr">
+            <a:off x="7818120" y="3300984"/>
+            <a:ext cx="3090672" cy="877824"/>
+          </a:xfrm>
+          <a:prstGeom prst="rect">
+            <a:avLst/>
+          </a:prstGeom>
+          <a:noFill/>
+          <a:ln/>
+        </p:spPr>
+        <p:txBody>
+          <a:bodyPr wrap="square" lIns="254" tIns="254" rIns="254" bIns="254" rtlCol="0" anchor="t">
             <a:normAutofit/>
           </a:bodyPr>
           <a:lstStyle/>
           <a:p>
-            <a:pPr algn="ctr" indent="0" marL="0">
-              <a:buNone/>
-            </a:pPr>
-            <a:r>
-              <a:rPr lang="en-US" sz="1500" b="1" dirty="0">
-                <a:solidFill>
-                  <a:srgbClr val="FFFFFF"/>
-                </a:solidFill>
-                <a:latin typeface="Aptos" pitchFamily="34" charset="0"/>
-                <a:ea typeface="Aptos" pitchFamily="34" charset="-122"/>
-                <a:cs typeface="Aptos" pitchFamily="34" charset="-120"/>
-              </a:rPr>
-              <a:t>Plan</a:t>
-            </a:r>
-            <a:endParaRPr lang="en-US" sz="1500" dirty="0"/>
+            <a:r>
+              <a:rPr lang="en-US" sz="1380" dirty="0">
+                <a:solidFill>
+                  <a:srgbClr val="17364A"/>
+                </a:solidFill>
+                <a:latin typeface="Aptos" pitchFamily="34" charset="0"/>
+                <a:ea typeface="Aptos" pitchFamily="34" charset="-122"/>
+                <a:cs typeface="Aptos" pitchFamily="34" charset="-120"/>
+              </a:rPr>
+              <a:t>AI project charter</a:t>
+            </a:r>
+            <a:endParaRPr lang="en-US" sz="1380" dirty="0"/>
+          </a:p>
+          <a:p>
+            <a:r>
+              <a:rPr lang="en-US" sz="1380" dirty="0">
+                <a:solidFill>
+                  <a:srgbClr val="17364A"/>
+                </a:solidFill>
+                <a:latin typeface="Aptos" pitchFamily="34" charset="0"/>
+                <a:ea typeface="Aptos" pitchFamily="34" charset="-122"/>
+                <a:cs typeface="Aptos" pitchFamily="34" charset="-120"/>
+              </a:rPr>
+              <a:t>Implementation workplan</a:t>
+            </a:r>
+            <a:endParaRPr lang="en-US" sz="1380" dirty="0"/>
+          </a:p>
+          <a:p>
+            <a:r>
+              <a:rPr lang="en-US" sz="1380" dirty="0">
+                <a:solidFill>
+                  <a:srgbClr val="17364A"/>
+                </a:solidFill>
+                <a:latin typeface="Aptos" pitchFamily="34" charset="0"/>
+                <a:ea typeface="Aptos" pitchFamily="34" charset="-122"/>
+                <a:cs typeface="Aptos" pitchFamily="34" charset="-120"/>
+              </a:rPr>
+              <a:t>AI-specific risk log</a:t>
+            </a:r>
+            <a:endParaRPr lang="en-US" sz="1380" dirty="0"/>
           </a:p>
         </p:txBody>
       </p:sp>
       <p:sp>
         <p:nvSpPr>
           <p:cNvPr id="16" name="Shape 14"/>
-          <p:cNvSpPr/>
-          <p:nvPr/>
-        </p:nvSpPr>
-        <p:spPr>
-          <a:xfrm>
-            <a:off x="8976360" y="3319272"/>
-            <a:ext cx="792480" cy="749808"/>
-          </a:xfrm>
-          <a:prstGeom prst="roundRect">
-            <a:avLst>
-              <a:gd name="adj" fmla="val 14634"/>
-            </a:avLst>
-          </a:prstGeom>
-          <a:solidFill>
-            <a:srgbClr val="2F8A28"/>
-          </a:solidFill>
-          <a:ln w="12700">
-            <a:solidFill>
-              <a:srgbClr val="2F8A28"/>
-            </a:solidFill>
-            <a:prstDash val="solid"/>
-          </a:ln>
-        </p:spPr>
-      </p:sp>
-      <p:sp>
-        <p:nvSpPr>
-          <p:cNvPr id="17" name="Text 15"/>
-          <p:cNvSpPr/>
-          <p:nvPr/>
-        </p:nvSpPr>
-        <p:spPr>
-          <a:xfrm>
-            <a:off x="9049512" y="3511296"/>
-            <a:ext cx="646176" cy="310896"/>
-          </a:xfrm>
-          <a:prstGeom prst="rect">
-            <a:avLst/>
-          </a:prstGeom>
-          <a:noFill/>
-          <a:ln/>
-        </p:spPr>
-        <p:txBody>
-          <a:bodyPr wrap="square" lIns="0" tIns="0" rIns="0" bIns="0" rtlCol="0" anchor="ctr">
-            <a:normAutofit/>
-          </a:bodyPr>
-          <a:lstStyle/>
-          <a:p>
-            <a:pPr algn="ctr" indent="0" marL="0">
-              <a:buNone/>
-            </a:pPr>
-            <a:r>
-              <a:rPr lang="en-US" sz="1500" b="1" dirty="0">
-                <a:solidFill>
-                  <a:srgbClr val="FFFFFF"/>
-                </a:solidFill>
-                <a:latin typeface="Aptos" pitchFamily="34" charset="0"/>
-                <a:ea typeface="Aptos" pitchFamily="34" charset="-122"/>
-                <a:cs typeface="Aptos" pitchFamily="34" charset="-120"/>
-              </a:rPr>
-              <a:t>Do</a:t>
-            </a:r>
-            <a:endParaRPr lang="en-US" sz="1500" dirty="0"/>
-          </a:p>
-        </p:txBody>
-      </p:sp>
-      <p:sp>
-        <p:nvSpPr>
-          <p:cNvPr id="18" name="Shape 16"/>
-          <p:cNvSpPr/>
-          <p:nvPr/>
-        </p:nvSpPr>
-        <p:spPr>
-          <a:xfrm>
-            <a:off x="10024872" y="3319272"/>
-            <a:ext cx="792480" cy="749808"/>
-          </a:xfrm>
-          <a:prstGeom prst="roundRect">
-            <a:avLst>
-              <a:gd name="adj" fmla="val 14634"/>
-            </a:avLst>
-          </a:prstGeom>
-          <a:solidFill>
-            <a:srgbClr val="D69A2D"/>
-          </a:solidFill>
-          <a:ln w="12700">
-            <a:solidFill>
-              <a:srgbClr val="D69A2D"/>
-            </a:solidFill>
-            <a:prstDash val="solid"/>
-          </a:ln>
-        </p:spPr>
-      </p:sp>
-      <p:sp>
-        <p:nvSpPr>
-          <p:cNvPr id="19" name="Text 17"/>
-          <p:cNvSpPr/>
-          <p:nvPr/>
-        </p:nvSpPr>
-        <p:spPr>
-          <a:xfrm>
-            <a:off x="10098024" y="3511296"/>
-            <a:ext cx="646176" cy="310896"/>
-          </a:xfrm>
-          <a:prstGeom prst="rect">
-            <a:avLst/>
-          </a:prstGeom>
-          <a:noFill/>
-          <a:ln/>
-        </p:spPr>
-        <p:txBody>
-          <a:bodyPr wrap="square" lIns="0" tIns="0" rIns="0" bIns="0" rtlCol="0" anchor="ctr">
-            <a:normAutofit/>
-          </a:bodyPr>
-          <a:lstStyle/>
-          <a:p>
-            <a:pPr algn="ctr" indent="0" marL="0">
-              <a:buNone/>
-            </a:pPr>
-            <a:r>
-              <a:rPr lang="en-US" sz="1500" b="1" dirty="0">
-                <a:solidFill>
-                  <a:srgbClr val="FFFFFF"/>
-                </a:solidFill>
-                <a:latin typeface="Aptos" pitchFamily="34" charset="0"/>
-                <a:ea typeface="Aptos" pitchFamily="34" charset="-122"/>
-                <a:cs typeface="Aptos" pitchFamily="34" charset="-120"/>
-              </a:rPr>
-              <a:t>Review</a:t>
-            </a:r>
-            <a:endParaRPr lang="en-US" sz="1500" dirty="0"/>
-          </a:p>
-        </p:txBody>
-      </p:sp>
-      <p:sp>
-        <p:nvSpPr>
-          <p:cNvPr id="20" name="Shape 18"/>
-          <p:cNvSpPr/>
-          <p:nvPr/>
-        </p:nvSpPr>
-        <p:spPr>
-          <a:xfrm>
-            <a:off x="8293608" y="4389120"/>
-            <a:ext cx="2157984" cy="0"/>
-          </a:xfrm>
-          <a:prstGeom prst="line">
-            <a:avLst/>
-          </a:prstGeom>
-          <a:noFill/>
-          <a:ln w="25400">
-            <a:solidFill>
-              <a:srgbClr val="8ABBD8"/>
-            </a:solidFill>
-            <a:prstDash val="solid"/>
-          </a:ln>
-        </p:spPr>
-      </p:sp>
-      <p:sp>
-        <p:nvSpPr>
-          <p:cNvPr id="21" name="Text 19"/>
-          <p:cNvSpPr/>
-          <p:nvPr/>
-        </p:nvSpPr>
-        <p:spPr>
-          <a:xfrm>
-            <a:off x="7909560" y="3977640"/>
-            <a:ext cx="2926080" cy="182880"/>
-          </a:xfrm>
-          <a:prstGeom prst="rect">
-            <a:avLst/>
-          </a:prstGeom>
-          <a:noFill/>
-          <a:ln/>
-        </p:spPr>
-        <p:txBody>
-          <a:bodyPr wrap="square" lIns="0" tIns="0" rIns="0" bIns="0" rtlCol="0" anchor="ctr"/>
-          <a:lstStyle/>
-          <a:p>
-            <a:pPr algn="ctr" indent="0" marL="0">
-              <a:buNone/>
-            </a:pPr>
-            <a:r>
-              <a:rPr lang="en-US" sz="1000" dirty="0">
-                <a:solidFill>
-                  <a:srgbClr val="003A63"/>
-                </a:solidFill>
-                <a:latin typeface="Aptos" pitchFamily="34" charset="0"/>
-                <a:ea typeface="Aptos" pitchFamily="34" charset="-122"/>
-                <a:cs typeface="Aptos" pitchFamily="34" charset="-120"/>
-              </a:rPr>
-              <a:t>Dependencies visible</a:t>
-            </a:r>
-            <a:endParaRPr lang="en-US" sz="1000" dirty="0"/>
-          </a:p>
-        </p:txBody>
-      </p:sp>
-      <p:sp>
-        <p:nvSpPr>
-          <p:cNvPr id="22" name="Shape 20"/>
           <p:cNvSpPr/>
           <p:nvPr/>
         </p:nvSpPr>
@@ -9217,7 +8453,7 @@
       </p:sp>
       <p:sp>
         <p:nvSpPr>
-          <p:cNvPr id="23" name="Text 21"/>
+          <p:cNvPr id="17" name="Text 15"/>
           <p:cNvSpPr/>
           <p:nvPr/>
         </p:nvSpPr>
@@ -9256,7 +8492,7 @@
       </p:sp>
       <p:sp>
         <p:nvSpPr>
-          <p:cNvPr id="24" name="Text 22"/>
+          <p:cNvPr id="18" name="Text 16"/>
           <p:cNvSpPr/>
           <p:nvPr/>
         </p:nvSpPr>
@@ -9750,13 +8986,11 @@
             </a:avLst>
           </a:prstGeom>
           <a:solidFill>
-            <a:srgbClr val="FFFFFF">
-              <a:alpha val="88000"/>
-            </a:srgbClr>
+            <a:srgbClr val="FFFFFF"/>
           </a:solidFill>
           <a:ln w="12700">
             <a:solidFill>
-              <a:srgbClr val="D6E8F2"/>
+              <a:srgbClr val="B9D7E6"/>
             </a:solidFill>
             <a:prstDash val="solid"/>
           </a:ln>
@@ -9764,30 +8998,42 @@
       </p:sp>
       <p:sp>
         <p:nvSpPr>
-          <p:cNvPr id="14" name="Shape 12"/>
-          <p:cNvSpPr/>
-          <p:nvPr/>
-        </p:nvSpPr>
-        <p:spPr>
-          <a:xfrm>
-            <a:off x="7927848" y="3319272"/>
-            <a:ext cx="792480" cy="749808"/>
-          </a:xfrm>
-          <a:prstGeom prst="roundRect">
-            <a:avLst>
-              <a:gd name="adj" fmla="val 14634"/>
-            </a:avLst>
-          </a:prstGeom>
-          <a:solidFill>
-            <a:srgbClr val="0068B7"/>
-          </a:solidFill>
-          <a:ln w="12700">
-            <a:solidFill>
-              <a:srgbClr val="0068B7"/>
-            </a:solidFill>
-            <a:prstDash val="solid"/>
-          </a:ln>
-        </p:spPr>
+          <p:cNvPr id="14" name="Text 12"/>
+          <p:cNvSpPr/>
+          <p:nvPr/>
+        </p:nvSpPr>
+        <p:spPr>
+          <a:xfrm>
+            <a:off x="7799832" y="2935224"/>
+            <a:ext cx="3145536" cy="256032"/>
+          </a:xfrm>
+          <a:prstGeom prst="rect">
+            <a:avLst/>
+          </a:prstGeom>
+          <a:noFill/>
+          <a:ln/>
+        </p:spPr>
+        <p:txBody>
+          <a:bodyPr wrap="square" lIns="0" tIns="0" rIns="0" bIns="0" rtlCol="0" anchor="ctr"/>
+          <a:lstStyle/>
+          <a:p>
+            <a:pPr indent="0" marL="0">
+              <a:buNone/>
+            </a:pPr>
+            <a:r>
+              <a:rPr lang="en-US" sz="1300" b="1" dirty="0">
+                <a:solidFill>
+                  <a:srgbClr val="0068B7"/>
+                </a:solidFill>
+                <a:latin typeface="Aptos" pitchFamily="34" charset="0"/>
+                <a:ea typeface="Aptos" pitchFamily="34" charset="-122"/>
+                <a:cs typeface="Aptos" pitchFamily="34" charset="-120"/>
+              </a:rPr>
+              <a:t>Concept checkpoints</a:t>
+            </a:r>
+            <a:endParaRPr lang="en-US" sz="1300" dirty="0"/>
+          </a:p>
+        </p:txBody>
       </p:sp>
       <p:sp>
         <p:nvSpPr>
@@ -9797,240 +9043,53 @@
         </p:nvSpPr>
         <p:spPr>
           <a:xfrm>
-            <a:off x="8001000" y="3511296"/>
-            <a:ext cx="646176" cy="310896"/>
-          </a:xfrm>
-          <a:prstGeom prst="rect">
-            <a:avLst/>
-          </a:prstGeom>
-          <a:noFill/>
-          <a:ln/>
-        </p:spPr>
-        <p:txBody>
-          <a:bodyPr wrap="square" lIns="0" tIns="0" rIns="0" bIns="0" rtlCol="0" anchor="ctr">
+            <a:off x="7818120" y="3300984"/>
+            <a:ext cx="3090672" cy="877824"/>
+          </a:xfrm>
+          <a:prstGeom prst="rect">
+            <a:avLst/>
+          </a:prstGeom>
+          <a:noFill/>
+          <a:ln/>
+        </p:spPr>
+        <p:txBody>
+          <a:bodyPr wrap="square" lIns="254" tIns="254" rIns="254" bIns="254" rtlCol="0" anchor="t">
             <a:normAutofit/>
           </a:bodyPr>
           <a:lstStyle/>
           <a:p>
-            <a:pPr algn="ctr" indent="0" marL="0">
-              <a:buNone/>
-            </a:pPr>
-            <a:r>
-              <a:rPr lang="en-US" sz="1500" b="1" dirty="0">
-                <a:solidFill>
-                  <a:srgbClr val="FFFFFF"/>
-                </a:solidFill>
-                <a:latin typeface="Aptos" pitchFamily="34" charset="0"/>
-                <a:ea typeface="Aptos" pitchFamily="34" charset="-122"/>
-                <a:cs typeface="Aptos" pitchFamily="34" charset="-120"/>
-              </a:rPr>
-              <a:t>Plan</a:t>
-            </a:r>
-            <a:endParaRPr lang="en-US" sz="1500" dirty="0"/>
+            <a:r>
+              <a:rPr lang="en-US" sz="1380" dirty="0">
+                <a:solidFill>
+                  <a:srgbClr val="17364A"/>
+                </a:solidFill>
+                <a:latin typeface="Aptos" pitchFamily="34" charset="0"/>
+                <a:ea typeface="Aptos" pitchFamily="34" charset="-122"/>
+                <a:cs typeface="Aptos" pitchFamily="34" charset="-120"/>
+              </a:rPr>
+              <a:t>Launch readiness checklist</a:t>
+            </a:r>
+            <a:endParaRPr lang="en-US" sz="1380" dirty="0"/>
+          </a:p>
+          <a:p>
+            <a:r>
+              <a:rPr lang="en-US" sz="1380" dirty="0">
+                <a:solidFill>
+                  <a:srgbClr val="17364A"/>
+                </a:solidFill>
+                <a:latin typeface="Aptos" pitchFamily="34" charset="0"/>
+                <a:ea typeface="Aptos" pitchFamily="34" charset="-122"/>
+                <a:cs typeface="Aptos" pitchFamily="34" charset="-120"/>
+              </a:rPr>
+              <a:t>Transition-to-operations plan</a:t>
+            </a:r>
+            <a:endParaRPr lang="en-US" sz="1380" dirty="0"/>
           </a:p>
         </p:txBody>
       </p:sp>
       <p:sp>
         <p:nvSpPr>
           <p:cNvPr id="16" name="Shape 14"/>
-          <p:cNvSpPr/>
-          <p:nvPr/>
-        </p:nvSpPr>
-        <p:spPr>
-          <a:xfrm>
-            <a:off x="8976360" y="3319272"/>
-            <a:ext cx="792480" cy="749808"/>
-          </a:xfrm>
-          <a:prstGeom prst="roundRect">
-            <a:avLst>
-              <a:gd name="adj" fmla="val 14634"/>
-            </a:avLst>
-          </a:prstGeom>
-          <a:solidFill>
-            <a:srgbClr val="2F8A28"/>
-          </a:solidFill>
-          <a:ln w="12700">
-            <a:solidFill>
-              <a:srgbClr val="2F8A28"/>
-            </a:solidFill>
-            <a:prstDash val="solid"/>
-          </a:ln>
-        </p:spPr>
-      </p:sp>
-      <p:sp>
-        <p:nvSpPr>
-          <p:cNvPr id="17" name="Text 15"/>
-          <p:cNvSpPr/>
-          <p:nvPr/>
-        </p:nvSpPr>
-        <p:spPr>
-          <a:xfrm>
-            <a:off x="9049512" y="3511296"/>
-            <a:ext cx="646176" cy="310896"/>
-          </a:xfrm>
-          <a:prstGeom prst="rect">
-            <a:avLst/>
-          </a:prstGeom>
-          <a:noFill/>
-          <a:ln/>
-        </p:spPr>
-        <p:txBody>
-          <a:bodyPr wrap="square" lIns="0" tIns="0" rIns="0" bIns="0" rtlCol="0" anchor="ctr">
-            <a:normAutofit/>
-          </a:bodyPr>
-          <a:lstStyle/>
-          <a:p>
-            <a:pPr algn="ctr" indent="0" marL="0">
-              <a:buNone/>
-            </a:pPr>
-            <a:r>
-              <a:rPr lang="en-US" sz="1500" b="1" dirty="0">
-                <a:solidFill>
-                  <a:srgbClr val="FFFFFF"/>
-                </a:solidFill>
-                <a:latin typeface="Aptos" pitchFamily="34" charset="0"/>
-                <a:ea typeface="Aptos" pitchFamily="34" charset="-122"/>
-                <a:cs typeface="Aptos" pitchFamily="34" charset="-120"/>
-              </a:rPr>
-              <a:t>Do</a:t>
-            </a:r>
-            <a:endParaRPr lang="en-US" sz="1500" dirty="0"/>
-          </a:p>
-        </p:txBody>
-      </p:sp>
-      <p:sp>
-        <p:nvSpPr>
-          <p:cNvPr id="18" name="Shape 16"/>
-          <p:cNvSpPr/>
-          <p:nvPr/>
-        </p:nvSpPr>
-        <p:spPr>
-          <a:xfrm>
-            <a:off x="10024872" y="3319272"/>
-            <a:ext cx="792480" cy="749808"/>
-          </a:xfrm>
-          <a:prstGeom prst="roundRect">
-            <a:avLst>
-              <a:gd name="adj" fmla="val 14634"/>
-            </a:avLst>
-          </a:prstGeom>
-          <a:solidFill>
-            <a:srgbClr val="D69A2D"/>
-          </a:solidFill>
-          <a:ln w="12700">
-            <a:solidFill>
-              <a:srgbClr val="D69A2D"/>
-            </a:solidFill>
-            <a:prstDash val="solid"/>
-          </a:ln>
-        </p:spPr>
-      </p:sp>
-      <p:sp>
-        <p:nvSpPr>
-          <p:cNvPr id="19" name="Text 17"/>
-          <p:cNvSpPr/>
-          <p:nvPr/>
-        </p:nvSpPr>
-        <p:spPr>
-          <a:xfrm>
-            <a:off x="10098024" y="3511296"/>
-            <a:ext cx="646176" cy="310896"/>
-          </a:xfrm>
-          <a:prstGeom prst="rect">
-            <a:avLst/>
-          </a:prstGeom>
-          <a:noFill/>
-          <a:ln/>
-        </p:spPr>
-        <p:txBody>
-          <a:bodyPr wrap="square" lIns="0" tIns="0" rIns="0" bIns="0" rtlCol="0" anchor="ctr">
-            <a:normAutofit/>
-          </a:bodyPr>
-          <a:lstStyle/>
-          <a:p>
-            <a:pPr algn="ctr" indent="0" marL="0">
-              <a:buNone/>
-            </a:pPr>
-            <a:r>
-              <a:rPr lang="en-US" sz="1500" b="1" dirty="0">
-                <a:solidFill>
-                  <a:srgbClr val="FFFFFF"/>
-                </a:solidFill>
-                <a:latin typeface="Aptos" pitchFamily="34" charset="0"/>
-                <a:ea typeface="Aptos" pitchFamily="34" charset="-122"/>
-                <a:cs typeface="Aptos" pitchFamily="34" charset="-120"/>
-              </a:rPr>
-              <a:t>Review</a:t>
-            </a:r>
-            <a:endParaRPr lang="en-US" sz="1500" dirty="0"/>
-          </a:p>
-        </p:txBody>
-      </p:sp>
-      <p:sp>
-        <p:nvSpPr>
-          <p:cNvPr id="20" name="Shape 18"/>
-          <p:cNvSpPr/>
-          <p:nvPr/>
-        </p:nvSpPr>
-        <p:spPr>
-          <a:xfrm>
-            <a:off x="8293608" y="4389120"/>
-            <a:ext cx="2157984" cy="0"/>
-          </a:xfrm>
-          <a:prstGeom prst="line">
-            <a:avLst/>
-          </a:prstGeom>
-          <a:noFill/>
-          <a:ln w="25400">
-            <a:solidFill>
-              <a:srgbClr val="8ABBD8"/>
-            </a:solidFill>
-            <a:prstDash val="solid"/>
-          </a:ln>
-        </p:spPr>
-      </p:sp>
-      <p:sp>
-        <p:nvSpPr>
-          <p:cNvPr id="21" name="Text 19"/>
-          <p:cNvSpPr/>
-          <p:nvPr/>
-        </p:nvSpPr>
-        <p:spPr>
-          <a:xfrm>
-            <a:off x="7909560" y="3977640"/>
-            <a:ext cx="2926080" cy="182880"/>
-          </a:xfrm>
-          <a:prstGeom prst="rect">
-            <a:avLst/>
-          </a:prstGeom>
-          <a:noFill/>
-          <a:ln/>
-        </p:spPr>
-        <p:txBody>
-          <a:bodyPr wrap="square" lIns="0" tIns="0" rIns="0" bIns="0" rtlCol="0" anchor="ctr"/>
-          <a:lstStyle/>
-          <a:p>
-            <a:pPr algn="ctr" indent="0" marL="0">
-              <a:buNone/>
-            </a:pPr>
-            <a:r>
-              <a:rPr lang="en-US" sz="1000" dirty="0">
-                <a:solidFill>
-                  <a:srgbClr val="003A63"/>
-                </a:solidFill>
-                <a:latin typeface="Aptos" pitchFamily="34" charset="0"/>
-                <a:ea typeface="Aptos" pitchFamily="34" charset="-122"/>
-                <a:cs typeface="Aptos" pitchFamily="34" charset="-120"/>
-              </a:rPr>
-              <a:t>Dependencies visible</a:t>
-            </a:r>
-            <a:endParaRPr lang="en-US" sz="1000" dirty="0"/>
-          </a:p>
-        </p:txBody>
-      </p:sp>
-      <p:sp>
-        <p:nvSpPr>
-          <p:cNvPr id="22" name="Shape 20"/>
           <p:cNvSpPr/>
           <p:nvPr/>
         </p:nvSpPr>
@@ -10057,7 +9116,7 @@
       </p:sp>
       <p:sp>
         <p:nvSpPr>
-          <p:cNvPr id="23" name="Text 21"/>
+          <p:cNvPr id="17" name="Text 15"/>
           <p:cNvSpPr/>
           <p:nvPr/>
         </p:nvSpPr>
@@ -10096,7 +9155,7 @@
       </p:sp>
       <p:sp>
         <p:nvSpPr>
-          <p:cNvPr id="24" name="Text 22"/>
+          <p:cNvPr id="18" name="Text 16"/>
           <p:cNvSpPr/>
           <p:nvPr/>
         </p:nvSpPr>
@@ -10604,13 +9663,11 @@
             </a:avLst>
           </a:prstGeom>
           <a:solidFill>
-            <a:srgbClr val="FFFFFF">
-              <a:alpha val="88000"/>
-            </a:srgbClr>
+            <a:srgbClr val="FFFFFF"/>
           </a:solidFill>
           <a:ln w="12700">
             <a:solidFill>
-              <a:srgbClr val="D6E8F2"/>
+              <a:srgbClr val="B9D7E6"/>
             </a:solidFill>
             <a:prstDash val="solid"/>
           </a:ln>
@@ -10618,30 +9675,42 @@
       </p:sp>
       <p:sp>
         <p:nvSpPr>
-          <p:cNvPr id="14" name="Shape 12"/>
-          <p:cNvSpPr/>
-          <p:nvPr/>
-        </p:nvSpPr>
-        <p:spPr>
-          <a:xfrm>
-            <a:off x="7927848" y="3319272"/>
-            <a:ext cx="792480" cy="749808"/>
-          </a:xfrm>
-          <a:prstGeom prst="roundRect">
-            <a:avLst>
-              <a:gd name="adj" fmla="val 14634"/>
-            </a:avLst>
-          </a:prstGeom>
-          <a:solidFill>
-            <a:srgbClr val="0068B7"/>
-          </a:solidFill>
-          <a:ln w="12700">
-            <a:solidFill>
-              <a:srgbClr val="0068B7"/>
-            </a:solidFill>
-            <a:prstDash val="solid"/>
-          </a:ln>
-        </p:spPr>
+          <p:cNvPr id="14" name="Text 12"/>
+          <p:cNvSpPr/>
+          <p:nvPr/>
+        </p:nvSpPr>
+        <p:spPr>
+          <a:xfrm>
+            <a:off x="7799832" y="2935224"/>
+            <a:ext cx="3145536" cy="256032"/>
+          </a:xfrm>
+          <a:prstGeom prst="rect">
+            <a:avLst/>
+          </a:prstGeom>
+          <a:noFill/>
+          <a:ln/>
+        </p:spPr>
+        <p:txBody>
+          <a:bodyPr wrap="square" lIns="0" tIns="0" rIns="0" bIns="0" rtlCol="0" anchor="ctr"/>
+          <a:lstStyle/>
+          <a:p>
+            <a:pPr indent="0" marL="0">
+              <a:buNone/>
+            </a:pPr>
+            <a:r>
+              <a:rPr lang="en-US" sz="1300" b="1" dirty="0">
+                <a:solidFill>
+                  <a:srgbClr val="0068B7"/>
+                </a:solidFill>
+                <a:latin typeface="Aptos" pitchFamily="34" charset="0"/>
+                <a:ea typeface="Aptos" pitchFamily="34" charset="-122"/>
+                <a:cs typeface="Aptos" pitchFamily="34" charset="-120"/>
+              </a:rPr>
+              <a:t>Concept checkpoints</a:t>
+            </a:r>
+            <a:endParaRPr lang="en-US" sz="1300" dirty="0"/>
+          </a:p>
+        </p:txBody>
       </p:sp>
       <p:sp>
         <p:nvSpPr>
@@ -10651,240 +9720,53 @@
         </p:nvSpPr>
         <p:spPr>
           <a:xfrm>
-            <a:off x="8001000" y="3511296"/>
-            <a:ext cx="646176" cy="310896"/>
-          </a:xfrm>
-          <a:prstGeom prst="rect">
-            <a:avLst/>
-          </a:prstGeom>
-          <a:noFill/>
-          <a:ln/>
-        </p:spPr>
-        <p:txBody>
-          <a:bodyPr wrap="square" lIns="0" tIns="0" rIns="0" bIns="0" rtlCol="0" anchor="ctr">
+            <a:off x="7818120" y="3300984"/>
+            <a:ext cx="3090672" cy="877824"/>
+          </a:xfrm>
+          <a:prstGeom prst="rect">
+            <a:avLst/>
+          </a:prstGeom>
+          <a:noFill/>
+          <a:ln/>
+        </p:spPr>
+        <p:txBody>
+          <a:bodyPr wrap="square" lIns="254" tIns="254" rIns="254" bIns="254" rtlCol="0" anchor="t">
             <a:normAutofit/>
           </a:bodyPr>
           <a:lstStyle/>
           <a:p>
-            <a:pPr algn="ctr" indent="0" marL="0">
-              <a:buNone/>
-            </a:pPr>
-            <a:r>
-              <a:rPr lang="en-US" sz="1500" b="1" dirty="0">
-                <a:solidFill>
-                  <a:srgbClr val="FFFFFF"/>
-                </a:solidFill>
-                <a:latin typeface="Aptos" pitchFamily="34" charset="0"/>
-                <a:ea typeface="Aptos" pitchFamily="34" charset="-122"/>
-                <a:cs typeface="Aptos" pitchFamily="34" charset="-120"/>
-              </a:rPr>
-              <a:t>Plan</a:t>
-            </a:r>
-            <a:endParaRPr lang="en-US" sz="1500" dirty="0"/>
+            <a:r>
+              <a:rPr lang="en-US" sz="1380" dirty="0">
+                <a:solidFill>
+                  <a:srgbClr val="17364A"/>
+                </a:solidFill>
+                <a:latin typeface="Aptos" pitchFamily="34" charset="0"/>
+                <a:ea typeface="Aptos" pitchFamily="34" charset="-122"/>
+                <a:cs typeface="Aptos" pitchFamily="34" charset="-120"/>
+              </a:rPr>
+              <a:t>Launch readiness checklist</a:t>
+            </a:r>
+            <a:endParaRPr lang="en-US" sz="1380" dirty="0"/>
+          </a:p>
+          <a:p>
+            <a:r>
+              <a:rPr lang="en-US" sz="1380" dirty="0">
+                <a:solidFill>
+                  <a:srgbClr val="17364A"/>
+                </a:solidFill>
+                <a:latin typeface="Aptos" pitchFamily="34" charset="0"/>
+                <a:ea typeface="Aptos" pitchFamily="34" charset="-122"/>
+                <a:cs typeface="Aptos" pitchFamily="34" charset="-120"/>
+              </a:rPr>
+              <a:t>Transition-to-operations plan</a:t>
+            </a:r>
+            <a:endParaRPr lang="en-US" sz="1380" dirty="0"/>
           </a:p>
         </p:txBody>
       </p:sp>
       <p:sp>
         <p:nvSpPr>
           <p:cNvPr id="16" name="Shape 14"/>
-          <p:cNvSpPr/>
-          <p:nvPr/>
-        </p:nvSpPr>
-        <p:spPr>
-          <a:xfrm>
-            <a:off x="8976360" y="3319272"/>
-            <a:ext cx="792480" cy="749808"/>
-          </a:xfrm>
-          <a:prstGeom prst="roundRect">
-            <a:avLst>
-              <a:gd name="adj" fmla="val 14634"/>
-            </a:avLst>
-          </a:prstGeom>
-          <a:solidFill>
-            <a:srgbClr val="2F8A28"/>
-          </a:solidFill>
-          <a:ln w="12700">
-            <a:solidFill>
-              <a:srgbClr val="2F8A28"/>
-            </a:solidFill>
-            <a:prstDash val="solid"/>
-          </a:ln>
-        </p:spPr>
-      </p:sp>
-      <p:sp>
-        <p:nvSpPr>
-          <p:cNvPr id="17" name="Text 15"/>
-          <p:cNvSpPr/>
-          <p:nvPr/>
-        </p:nvSpPr>
-        <p:spPr>
-          <a:xfrm>
-            <a:off x="9049512" y="3511296"/>
-            <a:ext cx="646176" cy="310896"/>
-          </a:xfrm>
-          <a:prstGeom prst="rect">
-            <a:avLst/>
-          </a:prstGeom>
-          <a:noFill/>
-          <a:ln/>
-        </p:spPr>
-        <p:txBody>
-          <a:bodyPr wrap="square" lIns="0" tIns="0" rIns="0" bIns="0" rtlCol="0" anchor="ctr">
-            <a:normAutofit/>
-          </a:bodyPr>
-          <a:lstStyle/>
-          <a:p>
-            <a:pPr algn="ctr" indent="0" marL="0">
-              <a:buNone/>
-            </a:pPr>
-            <a:r>
-              <a:rPr lang="en-US" sz="1500" b="1" dirty="0">
-                <a:solidFill>
-                  <a:srgbClr val="FFFFFF"/>
-                </a:solidFill>
-                <a:latin typeface="Aptos" pitchFamily="34" charset="0"/>
-                <a:ea typeface="Aptos" pitchFamily="34" charset="-122"/>
-                <a:cs typeface="Aptos" pitchFamily="34" charset="-120"/>
-              </a:rPr>
-              <a:t>Do</a:t>
-            </a:r>
-            <a:endParaRPr lang="en-US" sz="1500" dirty="0"/>
-          </a:p>
-        </p:txBody>
-      </p:sp>
-      <p:sp>
-        <p:nvSpPr>
-          <p:cNvPr id="18" name="Shape 16"/>
-          <p:cNvSpPr/>
-          <p:nvPr/>
-        </p:nvSpPr>
-        <p:spPr>
-          <a:xfrm>
-            <a:off x="10024872" y="3319272"/>
-            <a:ext cx="792480" cy="749808"/>
-          </a:xfrm>
-          <a:prstGeom prst="roundRect">
-            <a:avLst>
-              <a:gd name="adj" fmla="val 14634"/>
-            </a:avLst>
-          </a:prstGeom>
-          <a:solidFill>
-            <a:srgbClr val="D69A2D"/>
-          </a:solidFill>
-          <a:ln w="12700">
-            <a:solidFill>
-              <a:srgbClr val="D69A2D"/>
-            </a:solidFill>
-            <a:prstDash val="solid"/>
-          </a:ln>
-        </p:spPr>
-      </p:sp>
-      <p:sp>
-        <p:nvSpPr>
-          <p:cNvPr id="19" name="Text 17"/>
-          <p:cNvSpPr/>
-          <p:nvPr/>
-        </p:nvSpPr>
-        <p:spPr>
-          <a:xfrm>
-            <a:off x="10098024" y="3511296"/>
-            <a:ext cx="646176" cy="310896"/>
-          </a:xfrm>
-          <a:prstGeom prst="rect">
-            <a:avLst/>
-          </a:prstGeom>
-          <a:noFill/>
-          <a:ln/>
-        </p:spPr>
-        <p:txBody>
-          <a:bodyPr wrap="square" lIns="0" tIns="0" rIns="0" bIns="0" rtlCol="0" anchor="ctr">
-            <a:normAutofit/>
-          </a:bodyPr>
-          <a:lstStyle/>
-          <a:p>
-            <a:pPr algn="ctr" indent="0" marL="0">
-              <a:buNone/>
-            </a:pPr>
-            <a:r>
-              <a:rPr lang="en-US" sz="1500" b="1" dirty="0">
-                <a:solidFill>
-                  <a:srgbClr val="FFFFFF"/>
-                </a:solidFill>
-                <a:latin typeface="Aptos" pitchFamily="34" charset="0"/>
-                <a:ea typeface="Aptos" pitchFamily="34" charset="-122"/>
-                <a:cs typeface="Aptos" pitchFamily="34" charset="-120"/>
-              </a:rPr>
-              <a:t>Review</a:t>
-            </a:r>
-            <a:endParaRPr lang="en-US" sz="1500" dirty="0"/>
-          </a:p>
-        </p:txBody>
-      </p:sp>
-      <p:sp>
-        <p:nvSpPr>
-          <p:cNvPr id="20" name="Shape 18"/>
-          <p:cNvSpPr/>
-          <p:nvPr/>
-        </p:nvSpPr>
-        <p:spPr>
-          <a:xfrm>
-            <a:off x="8293608" y="4389120"/>
-            <a:ext cx="2157984" cy="0"/>
-          </a:xfrm>
-          <a:prstGeom prst="line">
-            <a:avLst/>
-          </a:prstGeom>
-          <a:noFill/>
-          <a:ln w="25400">
-            <a:solidFill>
-              <a:srgbClr val="8ABBD8"/>
-            </a:solidFill>
-            <a:prstDash val="solid"/>
-          </a:ln>
-        </p:spPr>
-      </p:sp>
-      <p:sp>
-        <p:nvSpPr>
-          <p:cNvPr id="21" name="Text 19"/>
-          <p:cNvSpPr/>
-          <p:nvPr/>
-        </p:nvSpPr>
-        <p:spPr>
-          <a:xfrm>
-            <a:off x="7909560" y="3977640"/>
-            <a:ext cx="2926080" cy="182880"/>
-          </a:xfrm>
-          <a:prstGeom prst="rect">
-            <a:avLst/>
-          </a:prstGeom>
-          <a:noFill/>
-          <a:ln/>
-        </p:spPr>
-        <p:txBody>
-          <a:bodyPr wrap="square" lIns="0" tIns="0" rIns="0" bIns="0" rtlCol="0" anchor="ctr"/>
-          <a:lstStyle/>
-          <a:p>
-            <a:pPr algn="ctr" indent="0" marL="0">
-              <a:buNone/>
-            </a:pPr>
-            <a:r>
-              <a:rPr lang="en-US" sz="1000" dirty="0">
-                <a:solidFill>
-                  <a:srgbClr val="003A63"/>
-                </a:solidFill>
-                <a:latin typeface="Aptos" pitchFamily="34" charset="0"/>
-                <a:ea typeface="Aptos" pitchFamily="34" charset="-122"/>
-                <a:cs typeface="Aptos" pitchFamily="34" charset="-120"/>
-              </a:rPr>
-              <a:t>Dependencies visible</a:t>
-            </a:r>
-            <a:endParaRPr lang="en-US" sz="1000" dirty="0"/>
-          </a:p>
-        </p:txBody>
-      </p:sp>
-      <p:sp>
-        <p:nvSpPr>
-          <p:cNvPr id="22" name="Shape 20"/>
           <p:cNvSpPr/>
           <p:nvPr/>
         </p:nvSpPr>
@@ -10911,7 +9793,7 @@
       </p:sp>
       <p:sp>
         <p:nvSpPr>
-          <p:cNvPr id="23" name="Text 21"/>
+          <p:cNvPr id="17" name="Text 15"/>
           <p:cNvSpPr/>
           <p:nvPr/>
         </p:nvSpPr>
@@ -10950,7 +9832,7 @@
       </p:sp>
       <p:sp>
         <p:nvSpPr>
-          <p:cNvPr id="24" name="Text 22"/>
+          <p:cNvPr id="18" name="Text 16"/>
           <p:cNvSpPr/>
           <p:nvPr/>
         </p:nvSpPr>
@@ -11483,20 +10365,20 @@
         </p:nvSpPr>
         <p:spPr>
           <a:xfrm>
-            <a:off x="7635240" y="3730752"/>
-            <a:ext cx="1033272" cy="749808"/>
+            <a:off x="7909560" y="3675888"/>
+            <a:ext cx="3154680" cy="1691640"/>
           </a:xfrm>
           <a:prstGeom prst="roundRect">
             <a:avLst>
-              <a:gd name="adj" fmla="val 14634"/>
+              <a:gd name="adj" fmla="val 6486"/>
             </a:avLst>
           </a:prstGeom>
           <a:solidFill>
-            <a:srgbClr val="0068B7"/>
+            <a:srgbClr val="FFFFFF"/>
           </a:solidFill>
           <a:ln w="12700">
             <a:solidFill>
-              <a:srgbClr val="0068B7"/>
+              <a:srgbClr val="B9D7E6"/>
             </a:solidFill>
             <a:prstDash val="solid"/>
           </a:ln>
@@ -11510,172 +10392,100 @@
         </p:nvSpPr>
         <p:spPr>
           <a:xfrm>
-            <a:off x="7708392" y="3922776"/>
-            <a:ext cx="886968" cy="310896"/>
-          </a:xfrm>
-          <a:prstGeom prst="rect">
-            <a:avLst/>
-          </a:prstGeom>
-          <a:noFill/>
-          <a:ln/>
-        </p:spPr>
-        <p:txBody>
-          <a:bodyPr wrap="square" lIns="0" tIns="0" rIns="0" bIns="0" rtlCol="0" anchor="ctr">
+            <a:off x="8074152" y="3822192"/>
+            <a:ext cx="2825496" cy="256032"/>
+          </a:xfrm>
+          <a:prstGeom prst="rect">
+            <a:avLst/>
+          </a:prstGeom>
+          <a:noFill/>
+          <a:ln/>
+        </p:spPr>
+        <p:txBody>
+          <a:bodyPr wrap="square" lIns="0" tIns="0" rIns="0" bIns="0" rtlCol="0" anchor="ctr"/>
+          <a:lstStyle/>
+          <a:p>
+            <a:pPr indent="0" marL="0">
+              <a:buNone/>
+            </a:pPr>
+            <a:r>
+              <a:rPr lang="en-US" sz="1300" b="1" dirty="0">
+                <a:solidFill>
+                  <a:srgbClr val="0068B7"/>
+                </a:solidFill>
+                <a:latin typeface="Aptos" pitchFamily="34" charset="0"/>
+                <a:ea typeface="Aptos" pitchFamily="34" charset="-122"/>
+                <a:cs typeface="Aptos" pitchFamily="34" charset="-120"/>
+              </a:rPr>
+              <a:t>Learning sequence</a:t>
+            </a:r>
+            <a:endParaRPr lang="en-US" sz="1300" dirty="0"/>
+          </a:p>
+        </p:txBody>
+      </p:sp>
+      <p:sp>
+        <p:nvSpPr>
+          <p:cNvPr id="15" name="Text 13"/>
+          <p:cNvSpPr/>
+          <p:nvPr/>
+        </p:nvSpPr>
+        <p:spPr>
+          <a:xfrm>
+            <a:off x="8092440" y="4187952"/>
+            <a:ext cx="2770632" cy="1033272"/>
+          </a:xfrm>
+          <a:prstGeom prst="rect">
+            <a:avLst/>
+          </a:prstGeom>
+          <a:noFill/>
+          <a:ln/>
+        </p:spPr>
+        <p:txBody>
+          <a:bodyPr wrap="square" lIns="254" tIns="254" rIns="254" bIns="254" rtlCol="0" anchor="t">
             <a:normAutofit/>
           </a:bodyPr>
           <a:lstStyle/>
           <a:p>
-            <a:pPr algn="ctr" indent="0" marL="0">
-              <a:buNone/>
-            </a:pPr>
-            <a:r>
-              <a:rPr lang="en-US" sz="1500" b="1" dirty="0">
-                <a:solidFill>
-                  <a:srgbClr val="FFFFFF"/>
-                </a:solidFill>
-                <a:latin typeface="Aptos" pitchFamily="34" charset="0"/>
-                <a:ea typeface="Aptos" pitchFamily="34" charset="-122"/>
-                <a:cs typeface="Aptos" pitchFamily="34" charset="-120"/>
-              </a:rPr>
-              <a:t>Learn</a:t>
-            </a:r>
-            <a:endParaRPr lang="en-US" sz="1500" dirty="0"/>
-          </a:p>
-        </p:txBody>
-      </p:sp>
-      <p:sp>
-        <p:nvSpPr>
-          <p:cNvPr id="15" name="Shape 13"/>
-          <p:cNvSpPr/>
-          <p:nvPr/>
-        </p:nvSpPr>
-        <p:spPr>
-          <a:xfrm>
-            <a:off x="8924544" y="3730752"/>
-            <a:ext cx="1033272" cy="749808"/>
-          </a:xfrm>
-          <a:prstGeom prst="roundRect">
-            <a:avLst>
-              <a:gd name="adj" fmla="val 14634"/>
-            </a:avLst>
-          </a:prstGeom>
-          <a:solidFill>
-            <a:srgbClr val="2F8A28"/>
-          </a:solidFill>
-          <a:ln w="12700">
-            <a:solidFill>
-              <a:srgbClr val="2F8A28"/>
-            </a:solidFill>
-            <a:prstDash val="solid"/>
-          </a:ln>
-        </p:spPr>
-      </p:sp>
-      <p:sp>
-        <p:nvSpPr>
-          <p:cNvPr id="16" name="Text 14"/>
-          <p:cNvSpPr/>
-          <p:nvPr/>
-        </p:nvSpPr>
-        <p:spPr>
-          <a:xfrm>
-            <a:off x="8997696" y="3922776"/>
-            <a:ext cx="886968" cy="310896"/>
-          </a:xfrm>
-          <a:prstGeom prst="rect">
-            <a:avLst/>
-          </a:prstGeom>
-          <a:noFill/>
-          <a:ln/>
-        </p:spPr>
-        <p:txBody>
-          <a:bodyPr wrap="square" lIns="0" tIns="0" rIns="0" bIns="0" rtlCol="0" anchor="ctr">
-            <a:normAutofit/>
-          </a:bodyPr>
-          <a:lstStyle/>
-          <a:p>
-            <a:pPr algn="ctr" indent="0" marL="0">
-              <a:buNone/>
-            </a:pPr>
-            <a:r>
-              <a:rPr lang="en-US" sz="1500" b="1" dirty="0">
-                <a:solidFill>
-                  <a:srgbClr val="FFFFFF"/>
-                </a:solidFill>
-                <a:latin typeface="Aptos" pitchFamily="34" charset="0"/>
-                <a:ea typeface="Aptos" pitchFamily="34" charset="-122"/>
-                <a:cs typeface="Aptos" pitchFamily="34" charset="-120"/>
-              </a:rPr>
-              <a:t>Apply</a:t>
-            </a:r>
-            <a:endParaRPr lang="en-US" sz="1500" dirty="0"/>
-          </a:p>
-        </p:txBody>
-      </p:sp>
-      <p:sp>
-        <p:nvSpPr>
-          <p:cNvPr id="17" name="Shape 15"/>
-          <p:cNvSpPr/>
-          <p:nvPr/>
-        </p:nvSpPr>
-        <p:spPr>
-          <a:xfrm>
-            <a:off x="10213848" y="3730752"/>
-            <a:ext cx="1033272" cy="749808"/>
-          </a:xfrm>
-          <a:prstGeom prst="roundRect">
-            <a:avLst>
-              <a:gd name="adj" fmla="val 14634"/>
-            </a:avLst>
-          </a:prstGeom>
-          <a:solidFill>
-            <a:srgbClr val="6A4CA3"/>
-          </a:solidFill>
-          <a:ln w="12700">
-            <a:solidFill>
-              <a:srgbClr val="6A4CA3"/>
-            </a:solidFill>
-            <a:prstDash val="solid"/>
-          </a:ln>
-        </p:spPr>
-      </p:sp>
-      <p:sp>
-        <p:nvSpPr>
-          <p:cNvPr id="18" name="Text 16"/>
-          <p:cNvSpPr/>
-          <p:nvPr/>
-        </p:nvSpPr>
-        <p:spPr>
-          <a:xfrm>
-            <a:off x="10287000" y="3922776"/>
-            <a:ext cx="886968" cy="310896"/>
-          </a:xfrm>
-          <a:prstGeom prst="rect">
-            <a:avLst/>
-          </a:prstGeom>
-          <a:noFill/>
-          <a:ln/>
-        </p:spPr>
-        <p:txBody>
-          <a:bodyPr wrap="square" lIns="0" tIns="0" rIns="0" bIns="0" rtlCol="0" anchor="ctr">
-            <a:normAutofit/>
-          </a:bodyPr>
-          <a:lstStyle/>
-          <a:p>
-            <a:pPr algn="ctr" indent="0" marL="0">
-              <a:buNone/>
-            </a:pPr>
-            <a:r>
-              <a:rPr lang="en-US" sz="1500" b="1" dirty="0">
-                <a:solidFill>
-                  <a:srgbClr val="FFFFFF"/>
-                </a:solidFill>
-                <a:latin typeface="Aptos" pitchFamily="34" charset="0"/>
-                <a:ea typeface="Aptos" pitchFamily="34" charset="-122"/>
-                <a:cs typeface="Aptos" pitchFamily="34" charset="-120"/>
-              </a:rPr>
-              <a:t>Document</a:t>
-            </a:r>
-            <a:endParaRPr lang="en-US" sz="1500" dirty="0"/>
+            <a:r>
+              <a:rPr lang="en-US" sz="1380" dirty="0">
+                <a:solidFill>
+                  <a:srgbClr val="17364A"/>
+                </a:solidFill>
+                <a:latin typeface="Aptos" pitchFamily="34" charset="0"/>
+                <a:ea typeface="Aptos" pitchFamily="34" charset="-122"/>
+                <a:cs typeface="Aptos" pitchFamily="34" charset="-120"/>
+              </a:rPr>
+              <a:t>Read the module for shared vocabulary and context.</a:t>
+            </a:r>
+            <a:endParaRPr lang="en-US" sz="1380" dirty="0"/>
+          </a:p>
+          <a:p>
+            <a:r>
+              <a:rPr lang="en-US" sz="1380" dirty="0">
+                <a:solidFill>
+                  <a:srgbClr val="17364A"/>
+                </a:solidFill>
+                <a:latin typeface="Aptos" pitchFamily="34" charset="0"/>
+                <a:ea typeface="Aptos" pitchFamily="34" charset="-122"/>
+                <a:cs typeface="Aptos" pitchFamily="34" charset="-120"/>
+              </a:rPr>
+              <a:t>Complete the practical exercise to apply the concept.</a:t>
+            </a:r>
+            <a:endParaRPr lang="en-US" sz="1380" dirty="0"/>
+          </a:p>
+          <a:p>
+            <a:r>
+              <a:rPr lang="en-US" sz="1380" dirty="0">
+                <a:solidFill>
+                  <a:srgbClr val="17364A"/>
+                </a:solidFill>
+                <a:latin typeface="Aptos" pitchFamily="34" charset="0"/>
+                <a:ea typeface="Aptos" pitchFamily="34" charset="-122"/>
+                <a:cs typeface="Aptos" pitchFamily="34" charset="-120"/>
+              </a:rPr>
+              <a:t>Use the notes and references for deeper review.</a:t>
+            </a:r>
+            <a:endParaRPr lang="en-US" sz="1380" dirty="0"/>
           </a:p>
         </p:txBody>
       </p:sp>
@@ -12148,13 +10958,11 @@
             </a:avLst>
           </a:prstGeom>
           <a:solidFill>
-            <a:srgbClr val="FFFFFF">
-              <a:alpha val="88000"/>
-            </a:srgbClr>
+            <a:srgbClr val="FFFFFF"/>
           </a:solidFill>
           <a:ln w="12700">
             <a:solidFill>
-              <a:srgbClr val="D6E8F2"/>
+              <a:srgbClr val="B9D7E6"/>
             </a:solidFill>
             <a:prstDash val="solid"/>
           </a:ln>
@@ -12162,30 +10970,42 @@
       </p:sp>
       <p:sp>
         <p:nvSpPr>
-          <p:cNvPr id="14" name="Shape 12"/>
-          <p:cNvSpPr/>
-          <p:nvPr/>
-        </p:nvSpPr>
-        <p:spPr>
-          <a:xfrm>
-            <a:off x="7927848" y="3319272"/>
-            <a:ext cx="792480" cy="749808"/>
-          </a:xfrm>
-          <a:prstGeom prst="roundRect">
-            <a:avLst>
-              <a:gd name="adj" fmla="val 14634"/>
-            </a:avLst>
-          </a:prstGeom>
-          <a:solidFill>
-            <a:srgbClr val="0068B7"/>
-          </a:solidFill>
-          <a:ln w="12700">
-            <a:solidFill>
-              <a:srgbClr val="0068B7"/>
-            </a:solidFill>
-            <a:prstDash val="solid"/>
-          </a:ln>
-        </p:spPr>
+          <p:cNvPr id="14" name="Text 12"/>
+          <p:cNvSpPr/>
+          <p:nvPr/>
+        </p:nvSpPr>
+        <p:spPr>
+          <a:xfrm>
+            <a:off x="7799832" y="2935224"/>
+            <a:ext cx="3145536" cy="256032"/>
+          </a:xfrm>
+          <a:prstGeom prst="rect">
+            <a:avLst/>
+          </a:prstGeom>
+          <a:noFill/>
+          <a:ln/>
+        </p:spPr>
+        <p:txBody>
+          <a:bodyPr wrap="square" lIns="0" tIns="0" rIns="0" bIns="0" rtlCol="0" anchor="ctr"/>
+          <a:lstStyle/>
+          <a:p>
+            <a:pPr indent="0" marL="0">
+              <a:buNone/>
+            </a:pPr>
+            <a:r>
+              <a:rPr lang="en-US" sz="1300" b="1" dirty="0">
+                <a:solidFill>
+                  <a:srgbClr val="0068B7"/>
+                </a:solidFill>
+                <a:latin typeface="Aptos" pitchFamily="34" charset="0"/>
+                <a:ea typeface="Aptos" pitchFamily="34" charset="-122"/>
+                <a:cs typeface="Aptos" pitchFamily="34" charset="-120"/>
+              </a:rPr>
+              <a:t>Concept checkpoints</a:t>
+            </a:r>
+            <a:endParaRPr lang="en-US" sz="1300" dirty="0"/>
+          </a:p>
+        </p:txBody>
       </p:sp>
       <p:sp>
         <p:nvSpPr>
@@ -12195,240 +11015,67 @@
         </p:nvSpPr>
         <p:spPr>
           <a:xfrm>
-            <a:off x="8001000" y="3511296"/>
-            <a:ext cx="646176" cy="310896"/>
-          </a:xfrm>
-          <a:prstGeom prst="rect">
-            <a:avLst/>
-          </a:prstGeom>
-          <a:noFill/>
-          <a:ln/>
-        </p:spPr>
-        <p:txBody>
-          <a:bodyPr wrap="square" lIns="0" tIns="0" rIns="0" bIns="0" rtlCol="0" anchor="ctr">
+            <a:off x="7818120" y="3300984"/>
+            <a:ext cx="3090672" cy="877824"/>
+          </a:xfrm>
+          <a:prstGeom prst="rect">
+            <a:avLst/>
+          </a:prstGeom>
+          <a:noFill/>
+          <a:ln/>
+        </p:spPr>
+        <p:txBody>
+          <a:bodyPr wrap="square" lIns="254" tIns="254" rIns="254" bIns="254" rtlCol="0" anchor="t">
             <a:normAutofit/>
           </a:bodyPr>
           <a:lstStyle/>
           <a:p>
-            <a:pPr algn="ctr" indent="0" marL="0">
-              <a:buNone/>
-            </a:pPr>
-            <a:r>
-              <a:rPr lang="en-US" sz="1500" b="1" dirty="0">
-                <a:solidFill>
-                  <a:srgbClr val="FFFFFF"/>
-                </a:solidFill>
-                <a:latin typeface="Aptos" pitchFamily="34" charset="0"/>
-                <a:ea typeface="Aptos" pitchFamily="34" charset="-122"/>
-                <a:cs typeface="Aptos" pitchFamily="34" charset="-120"/>
-              </a:rPr>
-              <a:t>Plan</a:t>
-            </a:r>
-            <a:endParaRPr lang="en-US" sz="1500" dirty="0"/>
+            <a:r>
+              <a:rPr lang="en-US" sz="1380" dirty="0">
+                <a:solidFill>
+                  <a:srgbClr val="17364A"/>
+                </a:solidFill>
+                <a:latin typeface="Aptos" pitchFamily="34" charset="0"/>
+                <a:ea typeface="Aptos" pitchFamily="34" charset="-122"/>
+                <a:cs typeface="Aptos" pitchFamily="34" charset="-120"/>
+              </a:rPr>
+              <a:t>1.</a:t>
+            </a:r>
+            <a:endParaRPr lang="en-US" sz="1380" dirty="0"/>
+          </a:p>
+          <a:p>
+            <a:r>
+              <a:rPr lang="en-US" sz="1380" dirty="0">
+                <a:solidFill>
+                  <a:srgbClr val="17364A"/>
+                </a:solidFill>
+                <a:latin typeface="Aptos" pitchFamily="34" charset="0"/>
+                <a:ea typeface="Aptos" pitchFamily="34" charset="-122"/>
+                <a:cs typeface="Aptos" pitchFamily="34" charset="-120"/>
+              </a:rPr>
+              <a:t>What distinguishes AI project management from ordinary software implementation?</a:t>
+            </a:r>
+            <a:endParaRPr lang="en-US" sz="1380" dirty="0"/>
+          </a:p>
+          <a:p>
+            <a:r>
+              <a:rPr lang="en-US" sz="1380" dirty="0">
+                <a:solidFill>
+                  <a:srgbClr val="17364A"/>
+                </a:solidFill>
+                <a:latin typeface="Aptos" pitchFamily="34" charset="0"/>
+                <a:ea typeface="Aptos" pitchFamily="34" charset="-122"/>
+                <a:cs typeface="Aptos" pitchFamily="34" charset="-120"/>
+              </a:rPr>
+              <a:t>2.</a:t>
+            </a:r>
+            <a:endParaRPr lang="en-US" sz="1380" dirty="0"/>
           </a:p>
         </p:txBody>
       </p:sp>
       <p:sp>
         <p:nvSpPr>
           <p:cNvPr id="16" name="Shape 14"/>
-          <p:cNvSpPr/>
-          <p:nvPr/>
-        </p:nvSpPr>
-        <p:spPr>
-          <a:xfrm>
-            <a:off x="8976360" y="3319272"/>
-            <a:ext cx="792480" cy="749808"/>
-          </a:xfrm>
-          <a:prstGeom prst="roundRect">
-            <a:avLst>
-              <a:gd name="adj" fmla="val 14634"/>
-            </a:avLst>
-          </a:prstGeom>
-          <a:solidFill>
-            <a:srgbClr val="2F8A28"/>
-          </a:solidFill>
-          <a:ln w="12700">
-            <a:solidFill>
-              <a:srgbClr val="2F8A28"/>
-            </a:solidFill>
-            <a:prstDash val="solid"/>
-          </a:ln>
-        </p:spPr>
-      </p:sp>
-      <p:sp>
-        <p:nvSpPr>
-          <p:cNvPr id="17" name="Text 15"/>
-          <p:cNvSpPr/>
-          <p:nvPr/>
-        </p:nvSpPr>
-        <p:spPr>
-          <a:xfrm>
-            <a:off x="9049512" y="3511296"/>
-            <a:ext cx="646176" cy="310896"/>
-          </a:xfrm>
-          <a:prstGeom prst="rect">
-            <a:avLst/>
-          </a:prstGeom>
-          <a:noFill/>
-          <a:ln/>
-        </p:spPr>
-        <p:txBody>
-          <a:bodyPr wrap="square" lIns="0" tIns="0" rIns="0" bIns="0" rtlCol="0" anchor="ctr">
-            <a:normAutofit/>
-          </a:bodyPr>
-          <a:lstStyle/>
-          <a:p>
-            <a:pPr algn="ctr" indent="0" marL="0">
-              <a:buNone/>
-            </a:pPr>
-            <a:r>
-              <a:rPr lang="en-US" sz="1500" b="1" dirty="0">
-                <a:solidFill>
-                  <a:srgbClr val="FFFFFF"/>
-                </a:solidFill>
-                <a:latin typeface="Aptos" pitchFamily="34" charset="0"/>
-                <a:ea typeface="Aptos" pitchFamily="34" charset="-122"/>
-                <a:cs typeface="Aptos" pitchFamily="34" charset="-120"/>
-              </a:rPr>
-              <a:t>Do</a:t>
-            </a:r>
-            <a:endParaRPr lang="en-US" sz="1500" dirty="0"/>
-          </a:p>
-        </p:txBody>
-      </p:sp>
-      <p:sp>
-        <p:nvSpPr>
-          <p:cNvPr id="18" name="Shape 16"/>
-          <p:cNvSpPr/>
-          <p:nvPr/>
-        </p:nvSpPr>
-        <p:spPr>
-          <a:xfrm>
-            <a:off x="10024872" y="3319272"/>
-            <a:ext cx="792480" cy="749808"/>
-          </a:xfrm>
-          <a:prstGeom prst="roundRect">
-            <a:avLst>
-              <a:gd name="adj" fmla="val 14634"/>
-            </a:avLst>
-          </a:prstGeom>
-          <a:solidFill>
-            <a:srgbClr val="D69A2D"/>
-          </a:solidFill>
-          <a:ln w="12700">
-            <a:solidFill>
-              <a:srgbClr val="D69A2D"/>
-            </a:solidFill>
-            <a:prstDash val="solid"/>
-          </a:ln>
-        </p:spPr>
-      </p:sp>
-      <p:sp>
-        <p:nvSpPr>
-          <p:cNvPr id="19" name="Text 17"/>
-          <p:cNvSpPr/>
-          <p:nvPr/>
-        </p:nvSpPr>
-        <p:spPr>
-          <a:xfrm>
-            <a:off x="10098024" y="3511296"/>
-            <a:ext cx="646176" cy="310896"/>
-          </a:xfrm>
-          <a:prstGeom prst="rect">
-            <a:avLst/>
-          </a:prstGeom>
-          <a:noFill/>
-          <a:ln/>
-        </p:spPr>
-        <p:txBody>
-          <a:bodyPr wrap="square" lIns="0" tIns="0" rIns="0" bIns="0" rtlCol="0" anchor="ctr">
-            <a:normAutofit/>
-          </a:bodyPr>
-          <a:lstStyle/>
-          <a:p>
-            <a:pPr algn="ctr" indent="0" marL="0">
-              <a:buNone/>
-            </a:pPr>
-            <a:r>
-              <a:rPr lang="en-US" sz="1500" b="1" dirty="0">
-                <a:solidFill>
-                  <a:srgbClr val="FFFFFF"/>
-                </a:solidFill>
-                <a:latin typeface="Aptos" pitchFamily="34" charset="0"/>
-                <a:ea typeface="Aptos" pitchFamily="34" charset="-122"/>
-                <a:cs typeface="Aptos" pitchFamily="34" charset="-120"/>
-              </a:rPr>
-              <a:t>Review</a:t>
-            </a:r>
-            <a:endParaRPr lang="en-US" sz="1500" dirty="0"/>
-          </a:p>
-        </p:txBody>
-      </p:sp>
-      <p:sp>
-        <p:nvSpPr>
-          <p:cNvPr id="20" name="Shape 18"/>
-          <p:cNvSpPr/>
-          <p:nvPr/>
-        </p:nvSpPr>
-        <p:spPr>
-          <a:xfrm>
-            <a:off x="8293608" y="4389120"/>
-            <a:ext cx="2157984" cy="0"/>
-          </a:xfrm>
-          <a:prstGeom prst="line">
-            <a:avLst/>
-          </a:prstGeom>
-          <a:noFill/>
-          <a:ln w="25400">
-            <a:solidFill>
-              <a:srgbClr val="8ABBD8"/>
-            </a:solidFill>
-            <a:prstDash val="solid"/>
-          </a:ln>
-        </p:spPr>
-      </p:sp>
-      <p:sp>
-        <p:nvSpPr>
-          <p:cNvPr id="21" name="Text 19"/>
-          <p:cNvSpPr/>
-          <p:nvPr/>
-        </p:nvSpPr>
-        <p:spPr>
-          <a:xfrm>
-            <a:off x="7909560" y="3977640"/>
-            <a:ext cx="2926080" cy="182880"/>
-          </a:xfrm>
-          <a:prstGeom prst="rect">
-            <a:avLst/>
-          </a:prstGeom>
-          <a:noFill/>
-          <a:ln/>
-        </p:spPr>
-        <p:txBody>
-          <a:bodyPr wrap="square" lIns="0" tIns="0" rIns="0" bIns="0" rtlCol="0" anchor="ctr"/>
-          <a:lstStyle/>
-          <a:p>
-            <a:pPr algn="ctr" indent="0" marL="0">
-              <a:buNone/>
-            </a:pPr>
-            <a:r>
-              <a:rPr lang="en-US" sz="1000" dirty="0">
-                <a:solidFill>
-                  <a:srgbClr val="003A63"/>
-                </a:solidFill>
-                <a:latin typeface="Aptos" pitchFamily="34" charset="0"/>
-                <a:ea typeface="Aptos" pitchFamily="34" charset="-122"/>
-                <a:cs typeface="Aptos" pitchFamily="34" charset="-120"/>
-              </a:rPr>
-              <a:t>Dependencies visible</a:t>
-            </a:r>
-            <a:endParaRPr lang="en-US" sz="1000" dirty="0"/>
-          </a:p>
-        </p:txBody>
-      </p:sp>
-      <p:sp>
-        <p:nvSpPr>
-          <p:cNvPr id="22" name="Shape 20"/>
           <p:cNvSpPr/>
           <p:nvPr/>
         </p:nvSpPr>
@@ -12455,7 +11102,7 @@
       </p:sp>
       <p:sp>
         <p:nvSpPr>
-          <p:cNvPr id="23" name="Text 21"/>
+          <p:cNvPr id="17" name="Text 15"/>
           <p:cNvSpPr/>
           <p:nvPr/>
         </p:nvSpPr>
@@ -12494,7 +11141,7 @@
       </p:sp>
       <p:sp>
         <p:nvSpPr>
-          <p:cNvPr id="24" name="Text 22"/>
+          <p:cNvPr id="18" name="Text 16"/>
           <p:cNvSpPr/>
           <p:nvPr/>
         </p:nvSpPr>
@@ -13002,13 +11649,11 @@
             </a:avLst>
           </a:prstGeom>
           <a:solidFill>
-            <a:srgbClr val="FFFFFF">
-              <a:alpha val="88000"/>
-            </a:srgbClr>
+            <a:srgbClr val="FFFFFF"/>
           </a:solidFill>
           <a:ln w="12700">
             <a:solidFill>
-              <a:srgbClr val="D6E8F2"/>
+              <a:srgbClr val="B9D7E6"/>
             </a:solidFill>
             <a:prstDash val="solid"/>
           </a:ln>
@@ -13016,30 +11661,42 @@
       </p:sp>
       <p:sp>
         <p:nvSpPr>
-          <p:cNvPr id="14" name="Shape 12"/>
-          <p:cNvSpPr/>
-          <p:nvPr/>
-        </p:nvSpPr>
-        <p:spPr>
-          <a:xfrm>
-            <a:off x="7927848" y="3319272"/>
-            <a:ext cx="792480" cy="749808"/>
-          </a:xfrm>
-          <a:prstGeom prst="roundRect">
-            <a:avLst>
-              <a:gd name="adj" fmla="val 14634"/>
-            </a:avLst>
-          </a:prstGeom>
-          <a:solidFill>
-            <a:srgbClr val="0068B7"/>
-          </a:solidFill>
-          <a:ln w="12700">
-            <a:solidFill>
-              <a:srgbClr val="0068B7"/>
-            </a:solidFill>
-            <a:prstDash val="solid"/>
-          </a:ln>
-        </p:spPr>
+          <p:cNvPr id="14" name="Text 12"/>
+          <p:cNvSpPr/>
+          <p:nvPr/>
+        </p:nvSpPr>
+        <p:spPr>
+          <a:xfrm>
+            <a:off x="7799832" y="2935224"/>
+            <a:ext cx="3145536" cy="256032"/>
+          </a:xfrm>
+          <a:prstGeom prst="rect">
+            <a:avLst/>
+          </a:prstGeom>
+          <a:noFill/>
+          <a:ln/>
+        </p:spPr>
+        <p:txBody>
+          <a:bodyPr wrap="square" lIns="0" tIns="0" rIns="0" bIns="0" rtlCol="0" anchor="ctr"/>
+          <a:lstStyle/>
+          <a:p>
+            <a:pPr indent="0" marL="0">
+              <a:buNone/>
+            </a:pPr>
+            <a:r>
+              <a:rPr lang="en-US" sz="1300" b="1" dirty="0">
+                <a:solidFill>
+                  <a:srgbClr val="0068B7"/>
+                </a:solidFill>
+                <a:latin typeface="Aptos" pitchFamily="34" charset="0"/>
+                <a:ea typeface="Aptos" pitchFamily="34" charset="-122"/>
+                <a:cs typeface="Aptos" pitchFamily="34" charset="-120"/>
+              </a:rPr>
+              <a:t>Concept checkpoints</a:t>
+            </a:r>
+            <a:endParaRPr lang="en-US" sz="1300" dirty="0"/>
+          </a:p>
+        </p:txBody>
       </p:sp>
       <p:sp>
         <p:nvSpPr>
@@ -13049,240 +11706,67 @@
         </p:nvSpPr>
         <p:spPr>
           <a:xfrm>
-            <a:off x="8001000" y="3511296"/>
-            <a:ext cx="646176" cy="310896"/>
-          </a:xfrm>
-          <a:prstGeom prst="rect">
-            <a:avLst/>
-          </a:prstGeom>
-          <a:noFill/>
-          <a:ln/>
-        </p:spPr>
-        <p:txBody>
-          <a:bodyPr wrap="square" lIns="0" tIns="0" rIns="0" bIns="0" rtlCol="0" anchor="ctr">
+            <a:off x="7818120" y="3300984"/>
+            <a:ext cx="3090672" cy="877824"/>
+          </a:xfrm>
+          <a:prstGeom prst="rect">
+            <a:avLst/>
+          </a:prstGeom>
+          <a:noFill/>
+          <a:ln/>
+        </p:spPr>
+        <p:txBody>
+          <a:bodyPr wrap="square" lIns="254" tIns="254" rIns="254" bIns="254" rtlCol="0" anchor="t">
             <a:normAutofit/>
           </a:bodyPr>
           <a:lstStyle/>
           <a:p>
-            <a:pPr algn="ctr" indent="0" marL="0">
-              <a:buNone/>
-            </a:pPr>
-            <a:r>
-              <a:rPr lang="en-US" sz="1500" b="1" dirty="0">
-                <a:solidFill>
-                  <a:srgbClr val="FFFFFF"/>
-                </a:solidFill>
-                <a:latin typeface="Aptos" pitchFamily="34" charset="0"/>
-                <a:ea typeface="Aptos" pitchFamily="34" charset="-122"/>
-                <a:cs typeface="Aptos" pitchFamily="34" charset="-120"/>
-              </a:rPr>
-              <a:t>Plan</a:t>
-            </a:r>
-            <a:endParaRPr lang="en-US" sz="1500" dirty="0"/>
+            <a:r>
+              <a:rPr lang="en-US" sz="1380" dirty="0">
+                <a:solidFill>
+                  <a:srgbClr val="17364A"/>
+                </a:solidFill>
+                <a:latin typeface="Aptos" pitchFamily="34" charset="0"/>
+                <a:ea typeface="Aptos" pitchFamily="34" charset="-122"/>
+                <a:cs typeface="Aptos" pitchFamily="34" charset="-120"/>
+              </a:rPr>
+              <a:t>NIST Artificial Intelligence Risk Management Framework:.</a:t>
+            </a:r>
+            <a:endParaRPr lang="en-US" sz="1380" dirty="0"/>
+          </a:p>
+          <a:p>
+            <a:r>
+              <a:rPr lang="en-US" sz="1380" dirty="0">
+                <a:solidFill>
+                  <a:srgbClr val="17364A"/>
+                </a:solidFill>
+                <a:latin typeface="Aptos" pitchFamily="34" charset="0"/>
+                <a:ea typeface="Aptos" pitchFamily="34" charset="-122"/>
+                <a:cs typeface="Aptos" pitchFamily="34" charset="-120"/>
+              </a:rPr>
+              <a:t>OWASP guidance for LLM application security</a:t>
+            </a:r>
+            <a:endParaRPr lang="en-US" sz="1380" dirty="0"/>
+          </a:p>
+          <a:p>
+            <a:r>
+              <a:rPr lang="en-US" sz="1380" dirty="0">
+                <a:solidFill>
+                  <a:srgbClr val="17364A"/>
+                </a:solidFill>
+                <a:latin typeface="Aptos" pitchFamily="34" charset="0"/>
+                <a:ea typeface="Aptos" pitchFamily="34" charset="-122"/>
+                <a:cs typeface="Aptos" pitchFamily="34" charset="-120"/>
+              </a:rPr>
+              <a:t>Agency policies for privacy, cybersecurity, records, procurement, accessibility, and.</a:t>
+            </a:r>
+            <a:endParaRPr lang="en-US" sz="1380" dirty="0"/>
           </a:p>
         </p:txBody>
       </p:sp>
       <p:sp>
         <p:nvSpPr>
           <p:cNvPr id="16" name="Shape 14"/>
-          <p:cNvSpPr/>
-          <p:nvPr/>
-        </p:nvSpPr>
-        <p:spPr>
-          <a:xfrm>
-            <a:off x="8976360" y="3319272"/>
-            <a:ext cx="792480" cy="749808"/>
-          </a:xfrm>
-          <a:prstGeom prst="roundRect">
-            <a:avLst>
-              <a:gd name="adj" fmla="val 14634"/>
-            </a:avLst>
-          </a:prstGeom>
-          <a:solidFill>
-            <a:srgbClr val="2F8A28"/>
-          </a:solidFill>
-          <a:ln w="12700">
-            <a:solidFill>
-              <a:srgbClr val="2F8A28"/>
-            </a:solidFill>
-            <a:prstDash val="solid"/>
-          </a:ln>
-        </p:spPr>
-      </p:sp>
-      <p:sp>
-        <p:nvSpPr>
-          <p:cNvPr id="17" name="Text 15"/>
-          <p:cNvSpPr/>
-          <p:nvPr/>
-        </p:nvSpPr>
-        <p:spPr>
-          <a:xfrm>
-            <a:off x="9049512" y="3511296"/>
-            <a:ext cx="646176" cy="310896"/>
-          </a:xfrm>
-          <a:prstGeom prst="rect">
-            <a:avLst/>
-          </a:prstGeom>
-          <a:noFill/>
-          <a:ln/>
-        </p:spPr>
-        <p:txBody>
-          <a:bodyPr wrap="square" lIns="0" tIns="0" rIns="0" bIns="0" rtlCol="0" anchor="ctr">
-            <a:normAutofit/>
-          </a:bodyPr>
-          <a:lstStyle/>
-          <a:p>
-            <a:pPr algn="ctr" indent="0" marL="0">
-              <a:buNone/>
-            </a:pPr>
-            <a:r>
-              <a:rPr lang="en-US" sz="1500" b="1" dirty="0">
-                <a:solidFill>
-                  <a:srgbClr val="FFFFFF"/>
-                </a:solidFill>
-                <a:latin typeface="Aptos" pitchFamily="34" charset="0"/>
-                <a:ea typeface="Aptos" pitchFamily="34" charset="-122"/>
-                <a:cs typeface="Aptos" pitchFamily="34" charset="-120"/>
-              </a:rPr>
-              <a:t>Do</a:t>
-            </a:r>
-            <a:endParaRPr lang="en-US" sz="1500" dirty="0"/>
-          </a:p>
-        </p:txBody>
-      </p:sp>
-      <p:sp>
-        <p:nvSpPr>
-          <p:cNvPr id="18" name="Shape 16"/>
-          <p:cNvSpPr/>
-          <p:nvPr/>
-        </p:nvSpPr>
-        <p:spPr>
-          <a:xfrm>
-            <a:off x="10024872" y="3319272"/>
-            <a:ext cx="792480" cy="749808"/>
-          </a:xfrm>
-          <a:prstGeom prst="roundRect">
-            <a:avLst>
-              <a:gd name="adj" fmla="val 14634"/>
-            </a:avLst>
-          </a:prstGeom>
-          <a:solidFill>
-            <a:srgbClr val="D69A2D"/>
-          </a:solidFill>
-          <a:ln w="12700">
-            <a:solidFill>
-              <a:srgbClr val="D69A2D"/>
-            </a:solidFill>
-            <a:prstDash val="solid"/>
-          </a:ln>
-        </p:spPr>
-      </p:sp>
-      <p:sp>
-        <p:nvSpPr>
-          <p:cNvPr id="19" name="Text 17"/>
-          <p:cNvSpPr/>
-          <p:nvPr/>
-        </p:nvSpPr>
-        <p:spPr>
-          <a:xfrm>
-            <a:off x="10098024" y="3511296"/>
-            <a:ext cx="646176" cy="310896"/>
-          </a:xfrm>
-          <a:prstGeom prst="rect">
-            <a:avLst/>
-          </a:prstGeom>
-          <a:noFill/>
-          <a:ln/>
-        </p:spPr>
-        <p:txBody>
-          <a:bodyPr wrap="square" lIns="0" tIns="0" rIns="0" bIns="0" rtlCol="0" anchor="ctr">
-            <a:normAutofit/>
-          </a:bodyPr>
-          <a:lstStyle/>
-          <a:p>
-            <a:pPr algn="ctr" indent="0" marL="0">
-              <a:buNone/>
-            </a:pPr>
-            <a:r>
-              <a:rPr lang="en-US" sz="1500" b="1" dirty="0">
-                <a:solidFill>
-                  <a:srgbClr val="FFFFFF"/>
-                </a:solidFill>
-                <a:latin typeface="Aptos" pitchFamily="34" charset="0"/>
-                <a:ea typeface="Aptos" pitchFamily="34" charset="-122"/>
-                <a:cs typeface="Aptos" pitchFamily="34" charset="-120"/>
-              </a:rPr>
-              <a:t>Review</a:t>
-            </a:r>
-            <a:endParaRPr lang="en-US" sz="1500" dirty="0"/>
-          </a:p>
-        </p:txBody>
-      </p:sp>
-      <p:sp>
-        <p:nvSpPr>
-          <p:cNvPr id="20" name="Shape 18"/>
-          <p:cNvSpPr/>
-          <p:nvPr/>
-        </p:nvSpPr>
-        <p:spPr>
-          <a:xfrm>
-            <a:off x="8293608" y="4389120"/>
-            <a:ext cx="2157984" cy="0"/>
-          </a:xfrm>
-          <a:prstGeom prst="line">
-            <a:avLst/>
-          </a:prstGeom>
-          <a:noFill/>
-          <a:ln w="25400">
-            <a:solidFill>
-              <a:srgbClr val="8ABBD8"/>
-            </a:solidFill>
-            <a:prstDash val="solid"/>
-          </a:ln>
-        </p:spPr>
-      </p:sp>
-      <p:sp>
-        <p:nvSpPr>
-          <p:cNvPr id="21" name="Text 19"/>
-          <p:cNvSpPr/>
-          <p:nvPr/>
-        </p:nvSpPr>
-        <p:spPr>
-          <a:xfrm>
-            <a:off x="7909560" y="3977640"/>
-            <a:ext cx="2926080" cy="182880"/>
-          </a:xfrm>
-          <a:prstGeom prst="rect">
-            <a:avLst/>
-          </a:prstGeom>
-          <a:noFill/>
-          <a:ln/>
-        </p:spPr>
-        <p:txBody>
-          <a:bodyPr wrap="square" lIns="0" tIns="0" rIns="0" bIns="0" rtlCol="0" anchor="ctr"/>
-          <a:lstStyle/>
-          <a:p>
-            <a:pPr algn="ctr" indent="0" marL="0">
-              <a:buNone/>
-            </a:pPr>
-            <a:r>
-              <a:rPr lang="en-US" sz="1000" dirty="0">
-                <a:solidFill>
-                  <a:srgbClr val="003A63"/>
-                </a:solidFill>
-                <a:latin typeface="Aptos" pitchFamily="34" charset="0"/>
-                <a:ea typeface="Aptos" pitchFamily="34" charset="-122"/>
-                <a:cs typeface="Aptos" pitchFamily="34" charset="-120"/>
-              </a:rPr>
-              <a:t>Dependencies visible</a:t>
-            </a:r>
-            <a:endParaRPr lang="en-US" sz="1000" dirty="0"/>
-          </a:p>
-        </p:txBody>
-      </p:sp>
-      <p:sp>
-        <p:nvSpPr>
-          <p:cNvPr id="22" name="Shape 20"/>
           <p:cNvSpPr/>
           <p:nvPr/>
         </p:nvSpPr>
@@ -13309,7 +11793,7 @@
       </p:sp>
       <p:sp>
         <p:nvSpPr>
-          <p:cNvPr id="23" name="Text 21"/>
+          <p:cNvPr id="17" name="Text 15"/>
           <p:cNvSpPr/>
           <p:nvPr/>
         </p:nvSpPr>
@@ -13348,7 +11832,7 @@
       </p:sp>
       <p:sp>
         <p:nvSpPr>
-          <p:cNvPr id="24" name="Text 22"/>
+          <p:cNvPr id="18" name="Text 16"/>
           <p:cNvSpPr/>
           <p:nvPr/>
         </p:nvSpPr>
@@ -13828,13 +12312,11 @@
             </a:avLst>
           </a:prstGeom>
           <a:solidFill>
-            <a:srgbClr val="FFFFFF">
-              <a:alpha val="88000"/>
-            </a:srgbClr>
+            <a:srgbClr val="FFFFFF"/>
           </a:solidFill>
           <a:ln w="12700">
             <a:solidFill>
-              <a:srgbClr val="D6E8F2"/>
+              <a:srgbClr val="B9D7E6"/>
             </a:solidFill>
             <a:prstDash val="solid"/>
           </a:ln>
@@ -13842,30 +12324,42 @@
       </p:sp>
       <p:sp>
         <p:nvSpPr>
-          <p:cNvPr id="14" name="Shape 12"/>
-          <p:cNvSpPr/>
-          <p:nvPr/>
-        </p:nvSpPr>
-        <p:spPr>
-          <a:xfrm>
-            <a:off x="7927848" y="3319272"/>
-            <a:ext cx="792480" cy="749808"/>
-          </a:xfrm>
-          <a:prstGeom prst="roundRect">
-            <a:avLst>
-              <a:gd name="adj" fmla="val 14634"/>
-            </a:avLst>
-          </a:prstGeom>
-          <a:solidFill>
-            <a:srgbClr val="0068B7"/>
-          </a:solidFill>
-          <a:ln w="12700">
-            <a:solidFill>
-              <a:srgbClr val="0068B7"/>
-            </a:solidFill>
-            <a:prstDash val="solid"/>
-          </a:ln>
-        </p:spPr>
+          <p:cNvPr id="14" name="Text 12"/>
+          <p:cNvSpPr/>
+          <p:nvPr/>
+        </p:nvSpPr>
+        <p:spPr>
+          <a:xfrm>
+            <a:off x="7799832" y="2935224"/>
+            <a:ext cx="3145536" cy="256032"/>
+          </a:xfrm>
+          <a:prstGeom prst="rect">
+            <a:avLst/>
+          </a:prstGeom>
+          <a:noFill/>
+          <a:ln/>
+        </p:spPr>
+        <p:txBody>
+          <a:bodyPr wrap="square" lIns="0" tIns="0" rIns="0" bIns="0" rtlCol="0" anchor="ctr"/>
+          <a:lstStyle/>
+          <a:p>
+            <a:pPr indent="0" marL="0">
+              <a:buNone/>
+            </a:pPr>
+            <a:r>
+              <a:rPr lang="en-US" sz="1300" b="1" dirty="0">
+                <a:solidFill>
+                  <a:srgbClr val="0068B7"/>
+                </a:solidFill>
+                <a:latin typeface="Aptos" pitchFamily="34" charset="0"/>
+                <a:ea typeface="Aptos" pitchFamily="34" charset="-122"/>
+                <a:cs typeface="Aptos" pitchFamily="34" charset="-120"/>
+              </a:rPr>
+              <a:t>Concept checkpoints</a:t>
+            </a:r>
+            <a:endParaRPr lang="en-US" sz="1300" dirty="0"/>
+          </a:p>
+        </p:txBody>
       </p:sp>
       <p:sp>
         <p:nvSpPr>
@@ -13875,240 +12369,39 @@
         </p:nvSpPr>
         <p:spPr>
           <a:xfrm>
-            <a:off x="8001000" y="3511296"/>
-            <a:ext cx="646176" cy="310896"/>
-          </a:xfrm>
-          <a:prstGeom prst="rect">
-            <a:avLst/>
-          </a:prstGeom>
-          <a:noFill/>
-          <a:ln/>
-        </p:spPr>
-        <p:txBody>
-          <a:bodyPr wrap="square" lIns="0" tIns="0" rIns="0" bIns="0" rtlCol="0" anchor="ctr">
+            <a:off x="7818120" y="3300984"/>
+            <a:ext cx="3090672" cy="877824"/>
+          </a:xfrm>
+          <a:prstGeom prst="rect">
+            <a:avLst/>
+          </a:prstGeom>
+          <a:noFill/>
+          <a:ln/>
+        </p:spPr>
+        <p:txBody>
+          <a:bodyPr wrap="square" lIns="254" tIns="254" rIns="254" bIns="254" rtlCol="0" anchor="t">
             <a:normAutofit/>
           </a:bodyPr>
           <a:lstStyle/>
           <a:p>
-            <a:pPr algn="ctr" indent="0" marL="0">
-              <a:buNone/>
-            </a:pPr>
-            <a:r>
-              <a:rPr lang="en-US" sz="1500" b="1" dirty="0">
-                <a:solidFill>
-                  <a:srgbClr val="FFFFFF"/>
-                </a:solidFill>
-                <a:latin typeface="Aptos" pitchFamily="34" charset="0"/>
-                <a:ea typeface="Aptos" pitchFamily="34" charset="-122"/>
-                <a:cs typeface="Aptos" pitchFamily="34" charset="-120"/>
-              </a:rPr>
-              <a:t>Plan</a:t>
-            </a:r>
-            <a:endParaRPr lang="en-US" sz="1500" dirty="0"/>
+            <a:r>
+              <a:rPr lang="en-US" sz="1380" dirty="0">
+                <a:solidFill>
+                  <a:srgbClr val="17364A"/>
+                </a:solidFill>
+                <a:latin typeface="Aptos" pitchFamily="34" charset="0"/>
+                <a:ea typeface="Aptos" pitchFamily="34" charset="-122"/>
+                <a:cs typeface="Aptos" pitchFamily="34" charset="-120"/>
+              </a:rPr>
+              <a:t>Relevant public health program SOPs, data governance documentation, and implementation plans</a:t>
+            </a:r>
+            <a:endParaRPr lang="en-US" sz="1380" dirty="0"/>
           </a:p>
         </p:txBody>
       </p:sp>
       <p:sp>
         <p:nvSpPr>
           <p:cNvPr id="16" name="Shape 14"/>
-          <p:cNvSpPr/>
-          <p:nvPr/>
-        </p:nvSpPr>
-        <p:spPr>
-          <a:xfrm>
-            <a:off x="8976360" y="3319272"/>
-            <a:ext cx="792480" cy="749808"/>
-          </a:xfrm>
-          <a:prstGeom prst="roundRect">
-            <a:avLst>
-              <a:gd name="adj" fmla="val 14634"/>
-            </a:avLst>
-          </a:prstGeom>
-          <a:solidFill>
-            <a:srgbClr val="2F8A28"/>
-          </a:solidFill>
-          <a:ln w="12700">
-            <a:solidFill>
-              <a:srgbClr val="2F8A28"/>
-            </a:solidFill>
-            <a:prstDash val="solid"/>
-          </a:ln>
-        </p:spPr>
-      </p:sp>
-      <p:sp>
-        <p:nvSpPr>
-          <p:cNvPr id="17" name="Text 15"/>
-          <p:cNvSpPr/>
-          <p:nvPr/>
-        </p:nvSpPr>
-        <p:spPr>
-          <a:xfrm>
-            <a:off x="9049512" y="3511296"/>
-            <a:ext cx="646176" cy="310896"/>
-          </a:xfrm>
-          <a:prstGeom prst="rect">
-            <a:avLst/>
-          </a:prstGeom>
-          <a:noFill/>
-          <a:ln/>
-        </p:spPr>
-        <p:txBody>
-          <a:bodyPr wrap="square" lIns="0" tIns="0" rIns="0" bIns="0" rtlCol="0" anchor="ctr">
-            <a:normAutofit/>
-          </a:bodyPr>
-          <a:lstStyle/>
-          <a:p>
-            <a:pPr algn="ctr" indent="0" marL="0">
-              <a:buNone/>
-            </a:pPr>
-            <a:r>
-              <a:rPr lang="en-US" sz="1500" b="1" dirty="0">
-                <a:solidFill>
-                  <a:srgbClr val="FFFFFF"/>
-                </a:solidFill>
-                <a:latin typeface="Aptos" pitchFamily="34" charset="0"/>
-                <a:ea typeface="Aptos" pitchFamily="34" charset="-122"/>
-                <a:cs typeface="Aptos" pitchFamily="34" charset="-120"/>
-              </a:rPr>
-              <a:t>Do</a:t>
-            </a:r>
-            <a:endParaRPr lang="en-US" sz="1500" dirty="0"/>
-          </a:p>
-        </p:txBody>
-      </p:sp>
-      <p:sp>
-        <p:nvSpPr>
-          <p:cNvPr id="18" name="Shape 16"/>
-          <p:cNvSpPr/>
-          <p:nvPr/>
-        </p:nvSpPr>
-        <p:spPr>
-          <a:xfrm>
-            <a:off x="10024872" y="3319272"/>
-            <a:ext cx="792480" cy="749808"/>
-          </a:xfrm>
-          <a:prstGeom prst="roundRect">
-            <a:avLst>
-              <a:gd name="adj" fmla="val 14634"/>
-            </a:avLst>
-          </a:prstGeom>
-          <a:solidFill>
-            <a:srgbClr val="D69A2D"/>
-          </a:solidFill>
-          <a:ln w="12700">
-            <a:solidFill>
-              <a:srgbClr val="D69A2D"/>
-            </a:solidFill>
-            <a:prstDash val="solid"/>
-          </a:ln>
-        </p:spPr>
-      </p:sp>
-      <p:sp>
-        <p:nvSpPr>
-          <p:cNvPr id="19" name="Text 17"/>
-          <p:cNvSpPr/>
-          <p:nvPr/>
-        </p:nvSpPr>
-        <p:spPr>
-          <a:xfrm>
-            <a:off x="10098024" y="3511296"/>
-            <a:ext cx="646176" cy="310896"/>
-          </a:xfrm>
-          <a:prstGeom prst="rect">
-            <a:avLst/>
-          </a:prstGeom>
-          <a:noFill/>
-          <a:ln/>
-        </p:spPr>
-        <p:txBody>
-          <a:bodyPr wrap="square" lIns="0" tIns="0" rIns="0" bIns="0" rtlCol="0" anchor="ctr">
-            <a:normAutofit/>
-          </a:bodyPr>
-          <a:lstStyle/>
-          <a:p>
-            <a:pPr algn="ctr" indent="0" marL="0">
-              <a:buNone/>
-            </a:pPr>
-            <a:r>
-              <a:rPr lang="en-US" sz="1500" b="1" dirty="0">
-                <a:solidFill>
-                  <a:srgbClr val="FFFFFF"/>
-                </a:solidFill>
-                <a:latin typeface="Aptos" pitchFamily="34" charset="0"/>
-                <a:ea typeface="Aptos" pitchFamily="34" charset="-122"/>
-                <a:cs typeface="Aptos" pitchFamily="34" charset="-120"/>
-              </a:rPr>
-              <a:t>Review</a:t>
-            </a:r>
-            <a:endParaRPr lang="en-US" sz="1500" dirty="0"/>
-          </a:p>
-        </p:txBody>
-      </p:sp>
-      <p:sp>
-        <p:nvSpPr>
-          <p:cNvPr id="20" name="Shape 18"/>
-          <p:cNvSpPr/>
-          <p:nvPr/>
-        </p:nvSpPr>
-        <p:spPr>
-          <a:xfrm>
-            <a:off x="8293608" y="4389120"/>
-            <a:ext cx="2157984" cy="0"/>
-          </a:xfrm>
-          <a:prstGeom prst="line">
-            <a:avLst/>
-          </a:prstGeom>
-          <a:noFill/>
-          <a:ln w="25400">
-            <a:solidFill>
-              <a:srgbClr val="8ABBD8"/>
-            </a:solidFill>
-            <a:prstDash val="solid"/>
-          </a:ln>
-        </p:spPr>
-      </p:sp>
-      <p:sp>
-        <p:nvSpPr>
-          <p:cNvPr id="21" name="Text 19"/>
-          <p:cNvSpPr/>
-          <p:nvPr/>
-        </p:nvSpPr>
-        <p:spPr>
-          <a:xfrm>
-            <a:off x="7909560" y="3977640"/>
-            <a:ext cx="2926080" cy="182880"/>
-          </a:xfrm>
-          <a:prstGeom prst="rect">
-            <a:avLst/>
-          </a:prstGeom>
-          <a:noFill/>
-          <a:ln/>
-        </p:spPr>
-        <p:txBody>
-          <a:bodyPr wrap="square" lIns="0" tIns="0" rIns="0" bIns="0" rtlCol="0" anchor="ctr"/>
-          <a:lstStyle/>
-          <a:p>
-            <a:pPr algn="ctr" indent="0" marL="0">
-              <a:buNone/>
-            </a:pPr>
-            <a:r>
-              <a:rPr lang="en-US" sz="1000" dirty="0">
-                <a:solidFill>
-                  <a:srgbClr val="003A63"/>
-                </a:solidFill>
-                <a:latin typeface="Aptos" pitchFamily="34" charset="0"/>
-                <a:ea typeface="Aptos" pitchFamily="34" charset="-122"/>
-                <a:cs typeface="Aptos" pitchFamily="34" charset="-120"/>
-              </a:rPr>
-              <a:t>Dependencies visible</a:t>
-            </a:r>
-            <a:endParaRPr lang="en-US" sz="1000" dirty="0"/>
-          </a:p>
-        </p:txBody>
-      </p:sp>
-      <p:sp>
-        <p:nvSpPr>
-          <p:cNvPr id="22" name="Shape 20"/>
           <p:cNvSpPr/>
           <p:nvPr/>
         </p:nvSpPr>
@@ -14135,7 +12428,7 @@
       </p:sp>
       <p:sp>
         <p:nvSpPr>
-          <p:cNvPr id="23" name="Text 21"/>
+          <p:cNvPr id="17" name="Text 15"/>
           <p:cNvSpPr/>
           <p:nvPr/>
         </p:nvSpPr>
@@ -14174,7 +12467,7 @@
       </p:sp>
       <p:sp>
         <p:nvSpPr>
-          <p:cNvPr id="24" name="Text 22"/>
+          <p:cNvPr id="18" name="Text 16"/>
           <p:cNvSpPr/>
           <p:nvPr/>
         </p:nvSpPr>
@@ -14687,20 +12980,20 @@
         </p:nvSpPr>
         <p:spPr>
           <a:xfrm>
-            <a:off x="7818120" y="3977640"/>
-            <a:ext cx="972312" cy="749808"/>
+            <a:off x="8046720" y="3794760"/>
+            <a:ext cx="3063240" cy="1600200"/>
           </a:xfrm>
           <a:prstGeom prst="roundRect">
             <a:avLst>
-              <a:gd name="adj" fmla="val 14634"/>
+              <a:gd name="adj" fmla="val 6857"/>
             </a:avLst>
           </a:prstGeom>
           <a:solidFill>
-            <a:srgbClr val="0068B7"/>
+            <a:srgbClr val="FFFFFF"/>
           </a:solidFill>
           <a:ln w="12700">
             <a:solidFill>
-              <a:srgbClr val="0068B7"/>
+              <a:srgbClr val="B9D7E6"/>
             </a:solidFill>
             <a:prstDash val="solid"/>
           </a:ln>
@@ -14714,172 +13007,100 @@
         </p:nvSpPr>
         <p:spPr>
           <a:xfrm>
-            <a:off x="7891272" y="4169664"/>
-            <a:ext cx="826008" cy="310896"/>
-          </a:xfrm>
-          <a:prstGeom prst="rect">
-            <a:avLst/>
-          </a:prstGeom>
-          <a:noFill/>
-          <a:ln/>
-        </p:spPr>
-        <p:txBody>
-          <a:bodyPr wrap="square" lIns="0" tIns="0" rIns="0" bIns="0" rtlCol="0" anchor="ctr">
+            <a:off x="8211312" y="3941064"/>
+            <a:ext cx="2734056" cy="256032"/>
+          </a:xfrm>
+          <a:prstGeom prst="rect">
+            <a:avLst/>
+          </a:prstGeom>
+          <a:noFill/>
+          <a:ln/>
+        </p:spPr>
+        <p:txBody>
+          <a:bodyPr wrap="square" lIns="0" tIns="0" rIns="0" bIns="0" rtlCol="0" anchor="ctr"/>
+          <a:lstStyle/>
+          <a:p>
+            <a:pPr indent="0" marL="0">
+              <a:buNone/>
+            </a:pPr>
+            <a:r>
+              <a:rPr lang="en-US" sz="1300" b="1" dirty="0">
+                <a:solidFill>
+                  <a:srgbClr val="0068B7"/>
+                </a:solidFill>
+                <a:latin typeface="Aptos" pitchFamily="34" charset="0"/>
+                <a:ea typeface="Aptos" pitchFamily="34" charset="-122"/>
+                <a:cs typeface="Aptos" pitchFamily="34" charset="-120"/>
+              </a:rPr>
+              <a:t>Use the play links to</a:t>
+            </a:r>
+            <a:endParaRPr lang="en-US" sz="1300" dirty="0"/>
+          </a:p>
+        </p:txBody>
+      </p:sp>
+      <p:sp>
+        <p:nvSpPr>
+          <p:cNvPr id="15" name="Text 13"/>
+          <p:cNvSpPr/>
+          <p:nvPr/>
+        </p:nvSpPr>
+        <p:spPr>
+          <a:xfrm>
+            <a:off x="8229600" y="4306824"/>
+            <a:ext cx="2679192" cy="941832"/>
+          </a:xfrm>
+          <a:prstGeom prst="rect">
+            <a:avLst/>
+          </a:prstGeom>
+          <a:noFill/>
+          <a:ln/>
+        </p:spPr>
+        <p:txBody>
+          <a:bodyPr wrap="square" lIns="254" tIns="254" rIns="254" bIns="254" rtlCol="0" anchor="t">
             <a:normAutofit/>
           </a:bodyPr>
           <a:lstStyle/>
           <a:p>
-            <a:pPr algn="ctr" indent="0" marL="0">
-              <a:buNone/>
-            </a:pPr>
-            <a:r>
-              <a:rPr lang="en-US" sz="1500" b="1" dirty="0">
-                <a:solidFill>
-                  <a:srgbClr val="FFFFFF"/>
-                </a:solidFill>
-                <a:latin typeface="Aptos" pitchFamily="34" charset="0"/>
-                <a:ea typeface="Aptos" pitchFamily="34" charset="-122"/>
-                <a:cs typeface="Aptos" pitchFamily="34" charset="-120"/>
-              </a:rPr>
-              <a:t>Lesson</a:t>
-            </a:r>
-            <a:endParaRPr lang="en-US" sz="1500" dirty="0"/>
-          </a:p>
-        </p:txBody>
-      </p:sp>
-      <p:sp>
-        <p:nvSpPr>
-          <p:cNvPr id="15" name="Shape 13"/>
-          <p:cNvSpPr/>
-          <p:nvPr/>
-        </p:nvSpPr>
-        <p:spPr>
-          <a:xfrm>
-            <a:off x="9046464" y="3977640"/>
-            <a:ext cx="972312" cy="749808"/>
-          </a:xfrm>
-          <a:prstGeom prst="roundRect">
-            <a:avLst>
-              <a:gd name="adj" fmla="val 14634"/>
-            </a:avLst>
-          </a:prstGeom>
-          <a:solidFill>
-            <a:srgbClr val="2F8A28"/>
-          </a:solidFill>
-          <a:ln w="12700">
-            <a:solidFill>
-              <a:srgbClr val="2F8A28"/>
-            </a:solidFill>
-            <a:prstDash val="solid"/>
-          </a:ln>
-        </p:spPr>
-      </p:sp>
-      <p:sp>
-        <p:nvSpPr>
-          <p:cNvPr id="16" name="Text 14"/>
-          <p:cNvSpPr/>
-          <p:nvPr/>
-        </p:nvSpPr>
-        <p:spPr>
-          <a:xfrm>
-            <a:off x="9119616" y="4169664"/>
-            <a:ext cx="826008" cy="310896"/>
-          </a:xfrm>
-          <a:prstGeom prst="rect">
-            <a:avLst/>
-          </a:prstGeom>
-          <a:noFill/>
-          <a:ln/>
-        </p:spPr>
-        <p:txBody>
-          <a:bodyPr wrap="square" lIns="0" tIns="0" rIns="0" bIns="0" rtlCol="0" anchor="ctr">
-            <a:normAutofit/>
-          </a:bodyPr>
-          <a:lstStyle/>
-          <a:p>
-            <a:pPr algn="ctr" indent="0" marL="0">
-              <a:buNone/>
-            </a:pPr>
-            <a:r>
-              <a:rPr lang="en-US" sz="1500" b="1" dirty="0">
-                <a:solidFill>
-                  <a:srgbClr val="FFFFFF"/>
-                </a:solidFill>
-                <a:latin typeface="Aptos" pitchFamily="34" charset="0"/>
-                <a:ea typeface="Aptos" pitchFamily="34" charset="-122"/>
-                <a:cs typeface="Aptos" pitchFamily="34" charset="-120"/>
-              </a:rPr>
-              <a:t>Plays</a:t>
-            </a:r>
-            <a:endParaRPr lang="en-US" sz="1500" dirty="0"/>
-          </a:p>
-        </p:txBody>
-      </p:sp>
-      <p:sp>
-        <p:nvSpPr>
-          <p:cNvPr id="17" name="Shape 15"/>
-          <p:cNvSpPr/>
-          <p:nvPr/>
-        </p:nvSpPr>
-        <p:spPr>
-          <a:xfrm>
-            <a:off x="10274808" y="3977640"/>
-            <a:ext cx="972312" cy="749808"/>
-          </a:xfrm>
-          <a:prstGeom prst="roundRect">
-            <a:avLst>
-              <a:gd name="adj" fmla="val 14634"/>
-            </a:avLst>
-          </a:prstGeom>
-          <a:solidFill>
-            <a:srgbClr val="6A4CA3"/>
-          </a:solidFill>
-          <a:ln w="12700">
-            <a:solidFill>
-              <a:srgbClr val="6A4CA3"/>
-            </a:solidFill>
-            <a:prstDash val="solid"/>
-          </a:ln>
-        </p:spPr>
-      </p:sp>
-      <p:sp>
-        <p:nvSpPr>
-          <p:cNvPr id="18" name="Text 16"/>
-          <p:cNvSpPr/>
-          <p:nvPr/>
-        </p:nvSpPr>
-        <p:spPr>
-          <a:xfrm>
-            <a:off x="10347960" y="4169664"/>
-            <a:ext cx="826008" cy="310896"/>
-          </a:xfrm>
-          <a:prstGeom prst="rect">
-            <a:avLst/>
-          </a:prstGeom>
-          <a:noFill/>
-          <a:ln/>
-        </p:spPr>
-        <p:txBody>
-          <a:bodyPr wrap="square" lIns="0" tIns="0" rIns="0" bIns="0" rtlCol="0" anchor="ctr">
-            <a:normAutofit/>
-          </a:bodyPr>
-          <a:lstStyle/>
-          <a:p>
-            <a:pPr algn="ctr" indent="0" marL="0">
-              <a:buNone/>
-            </a:pPr>
-            <a:r>
-              <a:rPr lang="en-US" sz="1500" b="1" dirty="0">
-                <a:solidFill>
-                  <a:srgbClr val="FFFFFF"/>
-                </a:solidFill>
-                <a:latin typeface="Aptos" pitchFamily="34" charset="0"/>
-                <a:ea typeface="Aptos" pitchFamily="34" charset="-122"/>
-                <a:cs typeface="Aptos" pitchFamily="34" charset="-120"/>
-              </a:rPr>
-              <a:t>Action</a:t>
-            </a:r>
-            <a:endParaRPr lang="en-US" sz="1500" dirty="0"/>
+            <a:r>
+              <a:rPr lang="en-US" sz="1380" dirty="0">
+                <a:solidFill>
+                  <a:srgbClr val="17364A"/>
+                </a:solidFill>
+                <a:latin typeface="Aptos" pitchFamily="34" charset="0"/>
+                <a:ea typeface="Aptos" pitchFamily="34" charset="-122"/>
+                <a:cs typeface="Aptos" pitchFamily="34" charset="-120"/>
+              </a:rPr>
+              <a:t>Locate the decision point in the playbook sequence.</a:t>
+            </a:r>
+            <a:endParaRPr lang="en-US" sz="1380" dirty="0"/>
+          </a:p>
+          <a:p>
+            <a:r>
+              <a:rPr lang="en-US" sz="1380" dirty="0">
+                <a:solidFill>
+                  <a:srgbClr val="17364A"/>
+                </a:solidFill>
+                <a:latin typeface="Aptos" pitchFamily="34" charset="0"/>
+                <a:ea typeface="Aptos" pitchFamily="34" charset="-122"/>
+                <a:cs typeface="Aptos" pitchFamily="34" charset="-120"/>
+              </a:rPr>
+              <a:t>Identify who should participate in the work.</a:t>
+            </a:r>
+            <a:endParaRPr lang="en-US" sz="1380" dirty="0"/>
+          </a:p>
+          <a:p>
+            <a:r>
+              <a:rPr lang="en-US" sz="1380" dirty="0">
+                <a:solidFill>
+                  <a:srgbClr val="17364A"/>
+                </a:solidFill>
+                <a:latin typeface="Aptos" pitchFamily="34" charset="0"/>
+                <a:ea typeface="Aptos" pitchFamily="34" charset="-122"/>
+                <a:cs typeface="Aptos" pitchFamily="34" charset="-120"/>
+              </a:rPr>
+              <a:t>Document the review, approval, or implementation step.</a:t>
+            </a:r>
+            <a:endParaRPr lang="en-US" sz="1380" dirty="0"/>
           </a:p>
         </p:txBody>
       </p:sp>
@@ -15357,20 +13578,20 @@
         </p:nvSpPr>
         <p:spPr>
           <a:xfrm>
-            <a:off x="7818120" y="3977640"/>
-            <a:ext cx="972312" cy="749808"/>
+            <a:off x="8046720" y="3794760"/>
+            <a:ext cx="3063240" cy="1600200"/>
           </a:xfrm>
           <a:prstGeom prst="roundRect">
             <a:avLst>
-              <a:gd name="adj" fmla="val 14634"/>
+              <a:gd name="adj" fmla="val 6857"/>
             </a:avLst>
           </a:prstGeom>
           <a:solidFill>
-            <a:srgbClr val="0068B7"/>
+            <a:srgbClr val="FFFFFF"/>
           </a:solidFill>
           <a:ln w="12700">
             <a:solidFill>
-              <a:srgbClr val="0068B7"/>
+              <a:srgbClr val="B9D7E6"/>
             </a:solidFill>
             <a:prstDash val="solid"/>
           </a:ln>
@@ -15384,172 +13605,100 @@
         </p:nvSpPr>
         <p:spPr>
           <a:xfrm>
-            <a:off x="7891272" y="4169664"/>
-            <a:ext cx="826008" cy="310896"/>
-          </a:xfrm>
-          <a:prstGeom prst="rect">
-            <a:avLst/>
-          </a:prstGeom>
-          <a:noFill/>
-          <a:ln/>
-        </p:spPr>
-        <p:txBody>
-          <a:bodyPr wrap="square" lIns="0" tIns="0" rIns="0" bIns="0" rtlCol="0" anchor="ctr">
+            <a:off x="8211312" y="3941064"/>
+            <a:ext cx="2734056" cy="256032"/>
+          </a:xfrm>
+          <a:prstGeom prst="rect">
+            <a:avLst/>
+          </a:prstGeom>
+          <a:noFill/>
+          <a:ln/>
+        </p:spPr>
+        <p:txBody>
+          <a:bodyPr wrap="square" lIns="0" tIns="0" rIns="0" bIns="0" rtlCol="0" anchor="ctr"/>
+          <a:lstStyle/>
+          <a:p>
+            <a:pPr indent="0" marL="0">
+              <a:buNone/>
+            </a:pPr>
+            <a:r>
+              <a:rPr lang="en-US" sz="1300" b="1" dirty="0">
+                <a:solidFill>
+                  <a:srgbClr val="0068B7"/>
+                </a:solidFill>
+                <a:latin typeface="Aptos" pitchFamily="34" charset="0"/>
+                <a:ea typeface="Aptos" pitchFamily="34" charset="-122"/>
+                <a:cs typeface="Aptos" pitchFamily="34" charset="-120"/>
+              </a:rPr>
+              <a:t>Tool selection cues</a:t>
+            </a:r>
+            <a:endParaRPr lang="en-US" sz="1300" dirty="0"/>
+          </a:p>
+        </p:txBody>
+      </p:sp>
+      <p:sp>
+        <p:nvSpPr>
+          <p:cNvPr id="15" name="Text 13"/>
+          <p:cNvSpPr/>
+          <p:nvPr/>
+        </p:nvSpPr>
+        <p:spPr>
+          <a:xfrm>
+            <a:off x="8229600" y="4306824"/>
+            <a:ext cx="2679192" cy="941832"/>
+          </a:xfrm>
+          <a:prstGeom prst="rect">
+            <a:avLst/>
+          </a:prstGeom>
+          <a:noFill/>
+          <a:ln/>
+        </p:spPr>
+        <p:txBody>
+          <a:bodyPr wrap="square" lIns="254" tIns="254" rIns="254" bIns="254" rtlCol="0" anchor="t">
             <a:normAutofit/>
           </a:bodyPr>
           <a:lstStyle/>
           <a:p>
-            <a:pPr algn="ctr" indent="0" marL="0">
-              <a:buNone/>
-            </a:pPr>
-            <a:r>
-              <a:rPr lang="en-US" sz="1500" b="1" dirty="0">
-                <a:solidFill>
-                  <a:srgbClr val="FFFFFF"/>
-                </a:solidFill>
-                <a:latin typeface="Aptos" pitchFamily="34" charset="0"/>
-                <a:ea typeface="Aptos" pitchFamily="34" charset="-122"/>
-                <a:cs typeface="Aptos" pitchFamily="34" charset="-120"/>
-              </a:rPr>
-              <a:t>Concept</a:t>
-            </a:r>
-            <a:endParaRPr lang="en-US" sz="1500" dirty="0"/>
-          </a:p>
-        </p:txBody>
-      </p:sp>
-      <p:sp>
-        <p:nvSpPr>
-          <p:cNvPr id="15" name="Shape 13"/>
-          <p:cNvSpPr/>
-          <p:nvPr/>
-        </p:nvSpPr>
-        <p:spPr>
-          <a:xfrm>
-            <a:off x="9046464" y="3977640"/>
-            <a:ext cx="972312" cy="749808"/>
-          </a:xfrm>
-          <a:prstGeom prst="roundRect">
-            <a:avLst>
-              <a:gd name="adj" fmla="val 14634"/>
-            </a:avLst>
-          </a:prstGeom>
-          <a:solidFill>
-            <a:srgbClr val="2F8A28"/>
-          </a:solidFill>
-          <a:ln w="12700">
-            <a:solidFill>
-              <a:srgbClr val="2F8A28"/>
-            </a:solidFill>
-            <a:prstDash val="solid"/>
-          </a:ln>
-        </p:spPr>
-      </p:sp>
-      <p:sp>
-        <p:nvSpPr>
-          <p:cNvPr id="16" name="Text 14"/>
-          <p:cNvSpPr/>
-          <p:nvPr/>
-        </p:nvSpPr>
-        <p:spPr>
-          <a:xfrm>
-            <a:off x="9119616" y="4169664"/>
-            <a:ext cx="826008" cy="310896"/>
-          </a:xfrm>
-          <a:prstGeom prst="rect">
-            <a:avLst/>
-          </a:prstGeom>
-          <a:noFill/>
-          <a:ln/>
-        </p:spPr>
-        <p:txBody>
-          <a:bodyPr wrap="square" lIns="0" tIns="0" rIns="0" bIns="0" rtlCol="0" anchor="ctr">
-            <a:normAutofit/>
-          </a:bodyPr>
-          <a:lstStyle/>
-          <a:p>
-            <a:pPr algn="ctr" indent="0" marL="0">
-              <a:buNone/>
-            </a:pPr>
-            <a:r>
-              <a:rPr lang="en-US" sz="1500" b="1" dirty="0">
-                <a:solidFill>
-                  <a:srgbClr val="FFFFFF"/>
-                </a:solidFill>
-                <a:latin typeface="Aptos" pitchFamily="34" charset="0"/>
-                <a:ea typeface="Aptos" pitchFamily="34" charset="-122"/>
-                <a:cs typeface="Aptos" pitchFamily="34" charset="-120"/>
-              </a:rPr>
-              <a:t>Tool</a:t>
-            </a:r>
-            <a:endParaRPr lang="en-US" sz="1500" dirty="0"/>
-          </a:p>
-        </p:txBody>
-      </p:sp>
-      <p:sp>
-        <p:nvSpPr>
-          <p:cNvPr id="17" name="Shape 15"/>
-          <p:cNvSpPr/>
-          <p:nvPr/>
-        </p:nvSpPr>
-        <p:spPr>
-          <a:xfrm>
-            <a:off x="10274808" y="3977640"/>
-            <a:ext cx="972312" cy="749808"/>
-          </a:xfrm>
-          <a:prstGeom prst="roundRect">
-            <a:avLst>
-              <a:gd name="adj" fmla="val 14634"/>
-            </a:avLst>
-          </a:prstGeom>
-          <a:solidFill>
-            <a:srgbClr val="D69A2D"/>
-          </a:solidFill>
-          <a:ln w="12700">
-            <a:solidFill>
-              <a:srgbClr val="D69A2D"/>
-            </a:solidFill>
-            <a:prstDash val="solid"/>
-          </a:ln>
-        </p:spPr>
-      </p:sp>
-      <p:sp>
-        <p:nvSpPr>
-          <p:cNvPr id="18" name="Text 16"/>
-          <p:cNvSpPr/>
-          <p:nvPr/>
-        </p:nvSpPr>
-        <p:spPr>
-          <a:xfrm>
-            <a:off x="10347960" y="4169664"/>
-            <a:ext cx="826008" cy="310896"/>
-          </a:xfrm>
-          <a:prstGeom prst="rect">
-            <a:avLst/>
-          </a:prstGeom>
-          <a:noFill/>
-          <a:ln/>
-        </p:spPr>
-        <p:txBody>
-          <a:bodyPr wrap="square" lIns="0" tIns="0" rIns="0" bIns="0" rtlCol="0" anchor="ctr">
-            <a:normAutofit/>
-          </a:bodyPr>
-          <a:lstStyle/>
-          <a:p>
-            <a:pPr algn="ctr" indent="0" marL="0">
-              <a:buNone/>
-            </a:pPr>
-            <a:r>
-              <a:rPr lang="en-US" sz="1500" b="1" dirty="0">
-                <a:solidFill>
-                  <a:srgbClr val="FFFFFF"/>
-                </a:solidFill>
-                <a:latin typeface="Aptos" pitchFamily="34" charset="0"/>
-                <a:ea typeface="Aptos" pitchFamily="34" charset="-122"/>
-                <a:cs typeface="Aptos" pitchFamily="34" charset="-120"/>
-              </a:rPr>
-              <a:t>Artifact</a:t>
-            </a:r>
-            <a:endParaRPr lang="en-US" sz="1500" dirty="0"/>
+            <a:r>
+              <a:rPr lang="en-US" sz="1380" dirty="0">
+                <a:solidFill>
+                  <a:srgbClr val="17364A"/>
+                </a:solidFill>
+                <a:latin typeface="Aptos" pitchFamily="34" charset="0"/>
+                <a:ea typeface="Aptos" pitchFamily="34" charset="-122"/>
+                <a:cs typeface="Aptos" pitchFamily="34" charset="-120"/>
+              </a:rPr>
+              <a:t>Use a tool when no comparable local process exists.</a:t>
+            </a:r>
+            <a:endParaRPr lang="en-US" sz="1380" dirty="0"/>
+          </a:p>
+          <a:p>
+            <a:r>
+              <a:rPr lang="en-US" sz="1380" dirty="0">
+                <a:solidFill>
+                  <a:srgbClr val="17364A"/>
+                </a:solidFill>
+                <a:latin typeface="Aptos" pitchFamily="34" charset="0"/>
+                <a:ea typeface="Aptos" pitchFamily="34" charset="-122"/>
+                <a:cs typeface="Aptos" pitchFamily="34" charset="-120"/>
+              </a:rPr>
+              <a:t>Adapt existing department templates when they already fit the purpose.</a:t>
+            </a:r>
+            <a:endParaRPr lang="en-US" sz="1380" dirty="0"/>
+          </a:p>
+          <a:p>
+            <a:r>
+              <a:rPr lang="en-US" sz="1380" dirty="0">
+                <a:solidFill>
+                  <a:srgbClr val="17364A"/>
+                </a:solidFill>
+                <a:latin typeface="Aptos" pitchFamily="34" charset="0"/>
+                <a:ea typeface="Aptos" pitchFamily="34" charset="-122"/>
+                <a:cs typeface="Aptos" pitchFamily="34" charset="-120"/>
+              </a:rPr>
+              <a:t>Save the completed artifact as evidence of the decision.</a:t>
+            </a:r>
+            <a:endParaRPr lang="en-US" sz="1380" dirty="0"/>
           </a:p>
         </p:txBody>
       </p:sp>
@@ -16022,13 +14171,11 @@
             </a:avLst>
           </a:prstGeom>
           <a:solidFill>
-            <a:srgbClr val="FFFFFF">
-              <a:alpha val="88000"/>
-            </a:srgbClr>
+            <a:srgbClr val="FFFFFF"/>
           </a:solidFill>
           <a:ln w="12700">
             <a:solidFill>
-              <a:srgbClr val="D6E8F2"/>
+              <a:srgbClr val="B9D7E6"/>
             </a:solidFill>
             <a:prstDash val="solid"/>
           </a:ln>
@@ -16036,30 +14183,42 @@
       </p:sp>
       <p:sp>
         <p:nvSpPr>
-          <p:cNvPr id="14" name="Shape 12"/>
-          <p:cNvSpPr/>
-          <p:nvPr/>
-        </p:nvSpPr>
-        <p:spPr>
-          <a:xfrm>
-            <a:off x="7927848" y="3319272"/>
-            <a:ext cx="792480" cy="749808"/>
-          </a:xfrm>
-          <a:prstGeom prst="roundRect">
-            <a:avLst>
-              <a:gd name="adj" fmla="val 14634"/>
-            </a:avLst>
-          </a:prstGeom>
-          <a:solidFill>
-            <a:srgbClr val="0068B7"/>
-          </a:solidFill>
-          <a:ln w="12700">
-            <a:solidFill>
-              <a:srgbClr val="0068B7"/>
-            </a:solidFill>
-            <a:prstDash val="solid"/>
-          </a:ln>
-        </p:spPr>
+          <p:cNvPr id="14" name="Text 12"/>
+          <p:cNvSpPr/>
+          <p:nvPr/>
+        </p:nvSpPr>
+        <p:spPr>
+          <a:xfrm>
+            <a:off x="7799832" y="2935224"/>
+            <a:ext cx="3145536" cy="256032"/>
+          </a:xfrm>
+          <a:prstGeom prst="rect">
+            <a:avLst/>
+          </a:prstGeom>
+          <a:noFill/>
+          <a:ln/>
+        </p:spPr>
+        <p:txBody>
+          <a:bodyPr wrap="square" lIns="0" tIns="0" rIns="0" bIns="0" rtlCol="0" anchor="ctr"/>
+          <a:lstStyle/>
+          <a:p>
+            <a:pPr indent="0" marL="0">
+              <a:buNone/>
+            </a:pPr>
+            <a:r>
+              <a:rPr lang="en-US" sz="1300" b="1" dirty="0">
+                <a:solidFill>
+                  <a:srgbClr val="0068B7"/>
+                </a:solidFill>
+                <a:latin typeface="Aptos" pitchFamily="34" charset="0"/>
+                <a:ea typeface="Aptos" pitchFamily="34" charset="-122"/>
+                <a:cs typeface="Aptos" pitchFamily="34" charset="-120"/>
+              </a:rPr>
+              <a:t>Concept checkpoints</a:t>
+            </a:r>
+            <a:endParaRPr lang="en-US" sz="1300" dirty="0"/>
+          </a:p>
+        </p:txBody>
       </p:sp>
       <p:sp>
         <p:nvSpPr>
@@ -16069,240 +14228,67 @@
         </p:nvSpPr>
         <p:spPr>
           <a:xfrm>
-            <a:off x="8001000" y="3511296"/>
-            <a:ext cx="646176" cy="310896"/>
-          </a:xfrm>
-          <a:prstGeom prst="rect">
-            <a:avLst/>
-          </a:prstGeom>
-          <a:noFill/>
-          <a:ln/>
-        </p:spPr>
-        <p:txBody>
-          <a:bodyPr wrap="square" lIns="0" tIns="0" rIns="0" bIns="0" rtlCol="0" anchor="ctr">
+            <a:off x="7818120" y="3300984"/>
+            <a:ext cx="3090672" cy="877824"/>
+          </a:xfrm>
+          <a:prstGeom prst="rect">
+            <a:avLst/>
+          </a:prstGeom>
+          <a:noFill/>
+          <a:ln/>
+        </p:spPr>
+        <p:txBody>
+          <a:bodyPr wrap="square" lIns="254" tIns="254" rIns="254" bIns="254" rtlCol="0" anchor="t">
             <a:normAutofit/>
           </a:bodyPr>
           <a:lstStyle/>
           <a:p>
-            <a:pPr algn="ctr" indent="0" marL="0">
-              <a:buNone/>
-            </a:pPr>
-            <a:r>
-              <a:rPr lang="en-US" sz="1500" b="1" dirty="0">
-                <a:solidFill>
-                  <a:srgbClr val="FFFFFF"/>
-                </a:solidFill>
-                <a:latin typeface="Aptos" pitchFamily="34" charset="0"/>
-                <a:ea typeface="Aptos" pitchFamily="34" charset="-122"/>
-                <a:cs typeface="Aptos" pitchFamily="34" charset="-120"/>
-              </a:rPr>
-              <a:t>Plan</a:t>
-            </a:r>
-            <a:endParaRPr lang="en-US" sz="1500" dirty="0"/>
+            <a:r>
+              <a:rPr lang="en-US" sz="1380" dirty="0">
+                <a:solidFill>
+                  <a:srgbClr val="17364A"/>
+                </a:solidFill>
+                <a:latin typeface="Aptos" pitchFamily="34" charset="0"/>
+                <a:ea typeface="Aptos" pitchFamily="34" charset="-122"/>
+                <a:cs typeface="Aptos" pitchFamily="34" charset="-120"/>
+              </a:rPr>
+              <a:t>Develop an AI project charter that includes scope, objectives, roles, risks, dependencies,.</a:t>
+            </a:r>
+            <a:endParaRPr lang="en-US" sz="1380" dirty="0"/>
+          </a:p>
+          <a:p>
+            <a:r>
+              <a:rPr lang="en-US" sz="1380" dirty="0">
+                <a:solidFill>
+                  <a:srgbClr val="17364A"/>
+                </a:solidFill>
+                <a:latin typeface="Aptos" pitchFamily="34" charset="0"/>
+                <a:ea typeface="Aptos" pitchFamily="34" charset="-122"/>
+                <a:cs typeface="Aptos" pitchFamily="34" charset="-120"/>
+              </a:rPr>
+              <a:t>Identify implementation dependencies across data, systems, privacy, security, procurement,.</a:t>
+            </a:r>
+            <a:endParaRPr lang="en-US" sz="1380" dirty="0"/>
+          </a:p>
+          <a:p>
+            <a:r>
+              <a:rPr lang="en-US" sz="1380" dirty="0">
+                <a:solidFill>
+                  <a:srgbClr val="17364A"/>
+                </a:solidFill>
+                <a:latin typeface="Aptos" pitchFamily="34" charset="0"/>
+                <a:ea typeface="Aptos" pitchFamily="34" charset="-122"/>
+                <a:cs typeface="Aptos" pitchFamily="34" charset="-120"/>
+              </a:rPr>
+              <a:t>Create a launch readiness checklist for an AI-supported workflow.</a:t>
+            </a:r>
+            <a:endParaRPr lang="en-US" sz="1380" dirty="0"/>
           </a:p>
         </p:txBody>
       </p:sp>
       <p:sp>
         <p:nvSpPr>
           <p:cNvPr id="16" name="Shape 14"/>
-          <p:cNvSpPr/>
-          <p:nvPr/>
-        </p:nvSpPr>
-        <p:spPr>
-          <a:xfrm>
-            <a:off x="8976360" y="3319272"/>
-            <a:ext cx="792480" cy="749808"/>
-          </a:xfrm>
-          <a:prstGeom prst="roundRect">
-            <a:avLst>
-              <a:gd name="adj" fmla="val 14634"/>
-            </a:avLst>
-          </a:prstGeom>
-          <a:solidFill>
-            <a:srgbClr val="2F8A28"/>
-          </a:solidFill>
-          <a:ln w="12700">
-            <a:solidFill>
-              <a:srgbClr val="2F8A28"/>
-            </a:solidFill>
-            <a:prstDash val="solid"/>
-          </a:ln>
-        </p:spPr>
-      </p:sp>
-      <p:sp>
-        <p:nvSpPr>
-          <p:cNvPr id="17" name="Text 15"/>
-          <p:cNvSpPr/>
-          <p:nvPr/>
-        </p:nvSpPr>
-        <p:spPr>
-          <a:xfrm>
-            <a:off x="9049512" y="3511296"/>
-            <a:ext cx="646176" cy="310896"/>
-          </a:xfrm>
-          <a:prstGeom prst="rect">
-            <a:avLst/>
-          </a:prstGeom>
-          <a:noFill/>
-          <a:ln/>
-        </p:spPr>
-        <p:txBody>
-          <a:bodyPr wrap="square" lIns="0" tIns="0" rIns="0" bIns="0" rtlCol="0" anchor="ctr">
-            <a:normAutofit/>
-          </a:bodyPr>
-          <a:lstStyle/>
-          <a:p>
-            <a:pPr algn="ctr" indent="0" marL="0">
-              <a:buNone/>
-            </a:pPr>
-            <a:r>
-              <a:rPr lang="en-US" sz="1500" b="1" dirty="0">
-                <a:solidFill>
-                  <a:srgbClr val="FFFFFF"/>
-                </a:solidFill>
-                <a:latin typeface="Aptos" pitchFamily="34" charset="0"/>
-                <a:ea typeface="Aptos" pitchFamily="34" charset="-122"/>
-                <a:cs typeface="Aptos" pitchFamily="34" charset="-120"/>
-              </a:rPr>
-              <a:t>Do</a:t>
-            </a:r>
-            <a:endParaRPr lang="en-US" sz="1500" dirty="0"/>
-          </a:p>
-        </p:txBody>
-      </p:sp>
-      <p:sp>
-        <p:nvSpPr>
-          <p:cNvPr id="18" name="Shape 16"/>
-          <p:cNvSpPr/>
-          <p:nvPr/>
-        </p:nvSpPr>
-        <p:spPr>
-          <a:xfrm>
-            <a:off x="10024872" y="3319272"/>
-            <a:ext cx="792480" cy="749808"/>
-          </a:xfrm>
-          <a:prstGeom prst="roundRect">
-            <a:avLst>
-              <a:gd name="adj" fmla="val 14634"/>
-            </a:avLst>
-          </a:prstGeom>
-          <a:solidFill>
-            <a:srgbClr val="D69A2D"/>
-          </a:solidFill>
-          <a:ln w="12700">
-            <a:solidFill>
-              <a:srgbClr val="D69A2D"/>
-            </a:solidFill>
-            <a:prstDash val="solid"/>
-          </a:ln>
-        </p:spPr>
-      </p:sp>
-      <p:sp>
-        <p:nvSpPr>
-          <p:cNvPr id="19" name="Text 17"/>
-          <p:cNvSpPr/>
-          <p:nvPr/>
-        </p:nvSpPr>
-        <p:spPr>
-          <a:xfrm>
-            <a:off x="10098024" y="3511296"/>
-            <a:ext cx="646176" cy="310896"/>
-          </a:xfrm>
-          <a:prstGeom prst="rect">
-            <a:avLst/>
-          </a:prstGeom>
-          <a:noFill/>
-          <a:ln/>
-        </p:spPr>
-        <p:txBody>
-          <a:bodyPr wrap="square" lIns="0" tIns="0" rIns="0" bIns="0" rtlCol="0" anchor="ctr">
-            <a:normAutofit/>
-          </a:bodyPr>
-          <a:lstStyle/>
-          <a:p>
-            <a:pPr algn="ctr" indent="0" marL="0">
-              <a:buNone/>
-            </a:pPr>
-            <a:r>
-              <a:rPr lang="en-US" sz="1500" b="1" dirty="0">
-                <a:solidFill>
-                  <a:srgbClr val="FFFFFF"/>
-                </a:solidFill>
-                <a:latin typeface="Aptos" pitchFamily="34" charset="0"/>
-                <a:ea typeface="Aptos" pitchFamily="34" charset="-122"/>
-                <a:cs typeface="Aptos" pitchFamily="34" charset="-120"/>
-              </a:rPr>
-              <a:t>Review</a:t>
-            </a:r>
-            <a:endParaRPr lang="en-US" sz="1500" dirty="0"/>
-          </a:p>
-        </p:txBody>
-      </p:sp>
-      <p:sp>
-        <p:nvSpPr>
-          <p:cNvPr id="20" name="Shape 18"/>
-          <p:cNvSpPr/>
-          <p:nvPr/>
-        </p:nvSpPr>
-        <p:spPr>
-          <a:xfrm>
-            <a:off x="8293608" y="4389120"/>
-            <a:ext cx="2157984" cy="0"/>
-          </a:xfrm>
-          <a:prstGeom prst="line">
-            <a:avLst/>
-          </a:prstGeom>
-          <a:noFill/>
-          <a:ln w="25400">
-            <a:solidFill>
-              <a:srgbClr val="8ABBD8"/>
-            </a:solidFill>
-            <a:prstDash val="solid"/>
-          </a:ln>
-        </p:spPr>
-      </p:sp>
-      <p:sp>
-        <p:nvSpPr>
-          <p:cNvPr id="21" name="Text 19"/>
-          <p:cNvSpPr/>
-          <p:nvPr/>
-        </p:nvSpPr>
-        <p:spPr>
-          <a:xfrm>
-            <a:off x="7909560" y="3977640"/>
-            <a:ext cx="2926080" cy="182880"/>
-          </a:xfrm>
-          <a:prstGeom prst="rect">
-            <a:avLst/>
-          </a:prstGeom>
-          <a:noFill/>
-          <a:ln/>
-        </p:spPr>
-        <p:txBody>
-          <a:bodyPr wrap="square" lIns="0" tIns="0" rIns="0" bIns="0" rtlCol="0" anchor="ctr"/>
-          <a:lstStyle/>
-          <a:p>
-            <a:pPr algn="ctr" indent="0" marL="0">
-              <a:buNone/>
-            </a:pPr>
-            <a:r>
-              <a:rPr lang="en-US" sz="1000" dirty="0">
-                <a:solidFill>
-                  <a:srgbClr val="003A63"/>
-                </a:solidFill>
-                <a:latin typeface="Aptos" pitchFamily="34" charset="0"/>
-                <a:ea typeface="Aptos" pitchFamily="34" charset="-122"/>
-                <a:cs typeface="Aptos" pitchFamily="34" charset="-120"/>
-              </a:rPr>
-              <a:t>Dependencies visible</a:t>
-            </a:r>
-            <a:endParaRPr lang="en-US" sz="1000" dirty="0"/>
-          </a:p>
-        </p:txBody>
-      </p:sp>
-      <p:sp>
-        <p:nvSpPr>
-          <p:cNvPr id="22" name="Shape 20"/>
           <p:cNvSpPr/>
           <p:nvPr/>
         </p:nvSpPr>
@@ -16329,7 +14315,7 @@
       </p:sp>
       <p:sp>
         <p:nvSpPr>
-          <p:cNvPr id="23" name="Text 21"/>
+          <p:cNvPr id="17" name="Text 15"/>
           <p:cNvSpPr/>
           <p:nvPr/>
         </p:nvSpPr>
@@ -16368,7 +14354,7 @@
       </p:sp>
       <p:sp>
         <p:nvSpPr>
-          <p:cNvPr id="24" name="Text 22"/>
+          <p:cNvPr id="18" name="Text 16"/>
           <p:cNvSpPr/>
           <p:nvPr/>
         </p:nvSpPr>
@@ -16876,13 +14862,11 @@
             </a:avLst>
           </a:prstGeom>
           <a:solidFill>
-            <a:srgbClr val="FFFFFF">
-              <a:alpha val="88000"/>
-            </a:srgbClr>
+            <a:srgbClr val="FFFFFF"/>
           </a:solidFill>
           <a:ln w="12700">
             <a:solidFill>
-              <a:srgbClr val="D6E8F2"/>
+              <a:srgbClr val="B9D7E6"/>
             </a:solidFill>
             <a:prstDash val="solid"/>
           </a:ln>
@@ -16890,30 +14874,42 @@
       </p:sp>
       <p:sp>
         <p:nvSpPr>
-          <p:cNvPr id="14" name="Shape 12"/>
-          <p:cNvSpPr/>
-          <p:nvPr/>
-        </p:nvSpPr>
-        <p:spPr>
-          <a:xfrm>
-            <a:off x="7927848" y="3319272"/>
-            <a:ext cx="792480" cy="749808"/>
-          </a:xfrm>
-          <a:prstGeom prst="roundRect">
-            <a:avLst>
-              <a:gd name="adj" fmla="val 14634"/>
-            </a:avLst>
-          </a:prstGeom>
-          <a:solidFill>
-            <a:srgbClr val="0068B7"/>
-          </a:solidFill>
-          <a:ln w="12700">
-            <a:solidFill>
-              <a:srgbClr val="0068B7"/>
-            </a:solidFill>
-            <a:prstDash val="solid"/>
-          </a:ln>
-        </p:spPr>
+          <p:cNvPr id="14" name="Text 12"/>
+          <p:cNvSpPr/>
+          <p:nvPr/>
+        </p:nvSpPr>
+        <p:spPr>
+          <a:xfrm>
+            <a:off x="7799832" y="2935224"/>
+            <a:ext cx="3145536" cy="256032"/>
+          </a:xfrm>
+          <a:prstGeom prst="rect">
+            <a:avLst/>
+          </a:prstGeom>
+          <a:noFill/>
+          <a:ln/>
+        </p:spPr>
+        <p:txBody>
+          <a:bodyPr wrap="square" lIns="0" tIns="0" rIns="0" bIns="0" rtlCol="0" anchor="ctr"/>
+          <a:lstStyle/>
+          <a:p>
+            <a:pPr indent="0" marL="0">
+              <a:buNone/>
+            </a:pPr>
+            <a:r>
+              <a:rPr lang="en-US" sz="1300" b="1" dirty="0">
+                <a:solidFill>
+                  <a:srgbClr val="0068B7"/>
+                </a:solidFill>
+                <a:latin typeface="Aptos" pitchFamily="34" charset="0"/>
+                <a:ea typeface="Aptos" pitchFamily="34" charset="-122"/>
+                <a:cs typeface="Aptos" pitchFamily="34" charset="-120"/>
+              </a:rPr>
+              <a:t>Concept checkpoints</a:t>
+            </a:r>
+            <a:endParaRPr lang="en-US" sz="1300" dirty="0"/>
+          </a:p>
+        </p:txBody>
       </p:sp>
       <p:sp>
         <p:nvSpPr>
@@ -16923,240 +14919,67 @@
         </p:nvSpPr>
         <p:spPr>
           <a:xfrm>
-            <a:off x="8001000" y="3511296"/>
-            <a:ext cx="646176" cy="310896"/>
-          </a:xfrm>
-          <a:prstGeom prst="rect">
-            <a:avLst/>
-          </a:prstGeom>
-          <a:noFill/>
-          <a:ln/>
-        </p:spPr>
-        <p:txBody>
-          <a:bodyPr wrap="square" lIns="0" tIns="0" rIns="0" bIns="0" rtlCol="0" anchor="ctr">
+            <a:off x="7818120" y="3300984"/>
+            <a:ext cx="3090672" cy="877824"/>
+          </a:xfrm>
+          <a:prstGeom prst="rect">
+            <a:avLst/>
+          </a:prstGeom>
+          <a:noFill/>
+          <a:ln/>
+        </p:spPr>
+        <p:txBody>
+          <a:bodyPr wrap="square" lIns="254" tIns="254" rIns="254" bIns="254" rtlCol="0" anchor="t">
             <a:normAutofit/>
           </a:bodyPr>
           <a:lstStyle/>
           <a:p>
-            <a:pPr algn="ctr" indent="0" marL="0">
-              <a:buNone/>
-            </a:pPr>
-            <a:r>
-              <a:rPr lang="en-US" sz="1500" b="1" dirty="0">
-                <a:solidFill>
-                  <a:srgbClr val="FFFFFF"/>
-                </a:solidFill>
-                <a:latin typeface="Aptos" pitchFamily="34" charset="0"/>
-                <a:ea typeface="Aptos" pitchFamily="34" charset="-122"/>
-                <a:cs typeface="Aptos" pitchFamily="34" charset="-120"/>
-              </a:rPr>
-              <a:t>Plan</a:t>
-            </a:r>
-            <a:endParaRPr lang="en-US" sz="1500" dirty="0"/>
+            <a:r>
+              <a:rPr lang="en-US" sz="1380" dirty="0">
+                <a:solidFill>
+                  <a:srgbClr val="17364A"/>
+                </a:solidFill>
+                <a:latin typeface="Aptos" pitchFamily="34" charset="0"/>
+                <a:ea typeface="Aptos" pitchFamily="34" charset="-122"/>
+                <a:cs typeface="Aptos" pitchFamily="34" charset="-120"/>
+              </a:rPr>
+              <a:t>AI projects require disciplined implementation planning because they combine technology,.</a:t>
+            </a:r>
+            <a:endParaRPr lang="en-US" sz="1380" dirty="0"/>
+          </a:p>
+          <a:p>
+            <a:r>
+              <a:rPr lang="en-US" sz="1380" dirty="0">
+                <a:solidFill>
+                  <a:srgbClr val="17364A"/>
+                </a:solidFill>
+                <a:latin typeface="Aptos" pitchFamily="34" charset="0"/>
+                <a:ea typeface="Aptos" pitchFamily="34" charset="-122"/>
+                <a:cs typeface="Aptos" pitchFamily="34" charset="-120"/>
+              </a:rPr>
+              <a:t>A project that appears small, such as adding an AI summarization tool, may still require.</a:t>
+            </a:r>
+            <a:endParaRPr lang="en-US" sz="1380" dirty="0"/>
+          </a:p>
+          <a:p>
+            <a:r>
+              <a:rPr lang="en-US" sz="1380" dirty="0">
+                <a:solidFill>
+                  <a:srgbClr val="17364A"/>
+                </a:solidFill>
+                <a:latin typeface="Aptos" pitchFamily="34" charset="0"/>
+                <a:ea typeface="Aptos" pitchFamily="34" charset="-122"/>
+                <a:cs typeface="Aptos" pitchFamily="34" charset="-120"/>
+              </a:rPr>
+              <a:t>Public health agencies need project management methods that account for these dependencies.</a:t>
+            </a:r>
+            <a:endParaRPr lang="en-US" sz="1380" dirty="0"/>
           </a:p>
         </p:txBody>
       </p:sp>
       <p:sp>
         <p:nvSpPr>
           <p:cNvPr id="16" name="Shape 14"/>
-          <p:cNvSpPr/>
-          <p:nvPr/>
-        </p:nvSpPr>
-        <p:spPr>
-          <a:xfrm>
-            <a:off x="8976360" y="3319272"/>
-            <a:ext cx="792480" cy="749808"/>
-          </a:xfrm>
-          <a:prstGeom prst="roundRect">
-            <a:avLst>
-              <a:gd name="adj" fmla="val 14634"/>
-            </a:avLst>
-          </a:prstGeom>
-          <a:solidFill>
-            <a:srgbClr val="2F8A28"/>
-          </a:solidFill>
-          <a:ln w="12700">
-            <a:solidFill>
-              <a:srgbClr val="2F8A28"/>
-            </a:solidFill>
-            <a:prstDash val="solid"/>
-          </a:ln>
-        </p:spPr>
-      </p:sp>
-      <p:sp>
-        <p:nvSpPr>
-          <p:cNvPr id="17" name="Text 15"/>
-          <p:cNvSpPr/>
-          <p:nvPr/>
-        </p:nvSpPr>
-        <p:spPr>
-          <a:xfrm>
-            <a:off x="9049512" y="3511296"/>
-            <a:ext cx="646176" cy="310896"/>
-          </a:xfrm>
-          <a:prstGeom prst="rect">
-            <a:avLst/>
-          </a:prstGeom>
-          <a:noFill/>
-          <a:ln/>
-        </p:spPr>
-        <p:txBody>
-          <a:bodyPr wrap="square" lIns="0" tIns="0" rIns="0" bIns="0" rtlCol="0" anchor="ctr">
-            <a:normAutofit/>
-          </a:bodyPr>
-          <a:lstStyle/>
-          <a:p>
-            <a:pPr algn="ctr" indent="0" marL="0">
-              <a:buNone/>
-            </a:pPr>
-            <a:r>
-              <a:rPr lang="en-US" sz="1500" b="1" dirty="0">
-                <a:solidFill>
-                  <a:srgbClr val="FFFFFF"/>
-                </a:solidFill>
-                <a:latin typeface="Aptos" pitchFamily="34" charset="0"/>
-                <a:ea typeface="Aptos" pitchFamily="34" charset="-122"/>
-                <a:cs typeface="Aptos" pitchFamily="34" charset="-120"/>
-              </a:rPr>
-              <a:t>Do</a:t>
-            </a:r>
-            <a:endParaRPr lang="en-US" sz="1500" dirty="0"/>
-          </a:p>
-        </p:txBody>
-      </p:sp>
-      <p:sp>
-        <p:nvSpPr>
-          <p:cNvPr id="18" name="Shape 16"/>
-          <p:cNvSpPr/>
-          <p:nvPr/>
-        </p:nvSpPr>
-        <p:spPr>
-          <a:xfrm>
-            <a:off x="10024872" y="3319272"/>
-            <a:ext cx="792480" cy="749808"/>
-          </a:xfrm>
-          <a:prstGeom prst="roundRect">
-            <a:avLst>
-              <a:gd name="adj" fmla="val 14634"/>
-            </a:avLst>
-          </a:prstGeom>
-          <a:solidFill>
-            <a:srgbClr val="D69A2D"/>
-          </a:solidFill>
-          <a:ln w="12700">
-            <a:solidFill>
-              <a:srgbClr val="D69A2D"/>
-            </a:solidFill>
-            <a:prstDash val="solid"/>
-          </a:ln>
-        </p:spPr>
-      </p:sp>
-      <p:sp>
-        <p:nvSpPr>
-          <p:cNvPr id="19" name="Text 17"/>
-          <p:cNvSpPr/>
-          <p:nvPr/>
-        </p:nvSpPr>
-        <p:spPr>
-          <a:xfrm>
-            <a:off x="10098024" y="3511296"/>
-            <a:ext cx="646176" cy="310896"/>
-          </a:xfrm>
-          <a:prstGeom prst="rect">
-            <a:avLst/>
-          </a:prstGeom>
-          <a:noFill/>
-          <a:ln/>
-        </p:spPr>
-        <p:txBody>
-          <a:bodyPr wrap="square" lIns="0" tIns="0" rIns="0" bIns="0" rtlCol="0" anchor="ctr">
-            <a:normAutofit/>
-          </a:bodyPr>
-          <a:lstStyle/>
-          <a:p>
-            <a:pPr algn="ctr" indent="0" marL="0">
-              <a:buNone/>
-            </a:pPr>
-            <a:r>
-              <a:rPr lang="en-US" sz="1500" b="1" dirty="0">
-                <a:solidFill>
-                  <a:srgbClr val="FFFFFF"/>
-                </a:solidFill>
-                <a:latin typeface="Aptos" pitchFamily="34" charset="0"/>
-                <a:ea typeface="Aptos" pitchFamily="34" charset="-122"/>
-                <a:cs typeface="Aptos" pitchFamily="34" charset="-120"/>
-              </a:rPr>
-              <a:t>Review</a:t>
-            </a:r>
-            <a:endParaRPr lang="en-US" sz="1500" dirty="0"/>
-          </a:p>
-        </p:txBody>
-      </p:sp>
-      <p:sp>
-        <p:nvSpPr>
-          <p:cNvPr id="20" name="Shape 18"/>
-          <p:cNvSpPr/>
-          <p:nvPr/>
-        </p:nvSpPr>
-        <p:spPr>
-          <a:xfrm>
-            <a:off x="8293608" y="4389120"/>
-            <a:ext cx="2157984" cy="0"/>
-          </a:xfrm>
-          <a:prstGeom prst="line">
-            <a:avLst/>
-          </a:prstGeom>
-          <a:noFill/>
-          <a:ln w="25400">
-            <a:solidFill>
-              <a:srgbClr val="8ABBD8"/>
-            </a:solidFill>
-            <a:prstDash val="solid"/>
-          </a:ln>
-        </p:spPr>
-      </p:sp>
-      <p:sp>
-        <p:nvSpPr>
-          <p:cNvPr id="21" name="Text 19"/>
-          <p:cNvSpPr/>
-          <p:nvPr/>
-        </p:nvSpPr>
-        <p:spPr>
-          <a:xfrm>
-            <a:off x="7909560" y="3977640"/>
-            <a:ext cx="2926080" cy="182880"/>
-          </a:xfrm>
-          <a:prstGeom prst="rect">
-            <a:avLst/>
-          </a:prstGeom>
-          <a:noFill/>
-          <a:ln/>
-        </p:spPr>
-        <p:txBody>
-          <a:bodyPr wrap="square" lIns="0" tIns="0" rIns="0" bIns="0" rtlCol="0" anchor="ctr"/>
-          <a:lstStyle/>
-          <a:p>
-            <a:pPr algn="ctr" indent="0" marL="0">
-              <a:buNone/>
-            </a:pPr>
-            <a:r>
-              <a:rPr lang="en-US" sz="1000" dirty="0">
-                <a:solidFill>
-                  <a:srgbClr val="003A63"/>
-                </a:solidFill>
-                <a:latin typeface="Aptos" pitchFamily="34" charset="0"/>
-                <a:ea typeface="Aptos" pitchFamily="34" charset="-122"/>
-                <a:cs typeface="Aptos" pitchFamily="34" charset="-120"/>
-              </a:rPr>
-              <a:t>Dependencies visible</a:t>
-            </a:r>
-            <a:endParaRPr lang="en-US" sz="1000" dirty="0"/>
-          </a:p>
-        </p:txBody>
-      </p:sp>
-      <p:sp>
-        <p:nvSpPr>
-          <p:cNvPr id="22" name="Shape 20"/>
           <p:cNvSpPr/>
           <p:nvPr/>
         </p:nvSpPr>
@@ -17183,7 +15006,7 @@
       </p:sp>
       <p:sp>
         <p:nvSpPr>
-          <p:cNvPr id="23" name="Text 21"/>
+          <p:cNvPr id="17" name="Text 15"/>
           <p:cNvSpPr/>
           <p:nvPr/>
         </p:nvSpPr>
@@ -17222,7 +15045,7 @@
       </p:sp>
       <p:sp>
         <p:nvSpPr>
-          <p:cNvPr id="24" name="Text 22"/>
+          <p:cNvPr id="18" name="Text 16"/>
           <p:cNvSpPr/>
           <p:nvPr/>
         </p:nvSpPr>
@@ -17730,13 +15553,11 @@
             </a:avLst>
           </a:prstGeom>
           <a:solidFill>
-            <a:srgbClr val="FFFFFF">
-              <a:alpha val="88000"/>
-            </a:srgbClr>
+            <a:srgbClr val="FFFFFF"/>
           </a:solidFill>
           <a:ln w="12700">
             <a:solidFill>
-              <a:srgbClr val="D6E8F2"/>
+              <a:srgbClr val="B9D7E6"/>
             </a:solidFill>
             <a:prstDash val="solid"/>
           </a:ln>
@@ -17744,30 +15565,42 @@
       </p:sp>
       <p:sp>
         <p:nvSpPr>
-          <p:cNvPr id="14" name="Shape 12"/>
-          <p:cNvSpPr/>
-          <p:nvPr/>
-        </p:nvSpPr>
-        <p:spPr>
-          <a:xfrm>
-            <a:off x="7927848" y="3319272"/>
-            <a:ext cx="792480" cy="749808"/>
-          </a:xfrm>
-          <a:prstGeom prst="roundRect">
-            <a:avLst>
-              <a:gd name="adj" fmla="val 14634"/>
-            </a:avLst>
-          </a:prstGeom>
-          <a:solidFill>
-            <a:srgbClr val="0068B7"/>
-          </a:solidFill>
-          <a:ln w="12700">
-            <a:solidFill>
-              <a:srgbClr val="0068B7"/>
-            </a:solidFill>
-            <a:prstDash val="solid"/>
-          </a:ln>
-        </p:spPr>
+          <p:cNvPr id="14" name="Text 12"/>
+          <p:cNvSpPr/>
+          <p:nvPr/>
+        </p:nvSpPr>
+        <p:spPr>
+          <a:xfrm>
+            <a:off x="7799832" y="2935224"/>
+            <a:ext cx="3145536" cy="256032"/>
+          </a:xfrm>
+          <a:prstGeom prst="rect">
+            <a:avLst/>
+          </a:prstGeom>
+          <a:noFill/>
+          <a:ln/>
+        </p:spPr>
+        <p:txBody>
+          <a:bodyPr wrap="square" lIns="0" tIns="0" rIns="0" bIns="0" rtlCol="0" anchor="ctr"/>
+          <a:lstStyle/>
+          <a:p>
+            <a:pPr indent="0" marL="0">
+              <a:buNone/>
+            </a:pPr>
+            <a:r>
+              <a:rPr lang="en-US" sz="1300" b="1" dirty="0">
+                <a:solidFill>
+                  <a:srgbClr val="0068B7"/>
+                </a:solidFill>
+                <a:latin typeface="Aptos" pitchFamily="34" charset="0"/>
+                <a:ea typeface="Aptos" pitchFamily="34" charset="-122"/>
+                <a:cs typeface="Aptos" pitchFamily="34" charset="-120"/>
+              </a:rPr>
+              <a:t>Concept checkpoints</a:t>
+            </a:r>
+            <a:endParaRPr lang="en-US" sz="1300" dirty="0"/>
+          </a:p>
+        </p:txBody>
       </p:sp>
       <p:sp>
         <p:nvSpPr>
@@ -17777,240 +15610,53 @@
         </p:nvSpPr>
         <p:spPr>
           <a:xfrm>
-            <a:off x="8001000" y="3511296"/>
-            <a:ext cx="646176" cy="310896"/>
-          </a:xfrm>
-          <a:prstGeom prst="rect">
-            <a:avLst/>
-          </a:prstGeom>
-          <a:noFill/>
-          <a:ln/>
-        </p:spPr>
-        <p:txBody>
-          <a:bodyPr wrap="square" lIns="0" tIns="0" rIns="0" bIns="0" rtlCol="0" anchor="ctr">
+            <a:off x="7818120" y="3300984"/>
+            <a:ext cx="3090672" cy="877824"/>
+          </a:xfrm>
+          <a:prstGeom prst="rect">
+            <a:avLst/>
+          </a:prstGeom>
+          <a:noFill/>
+          <a:ln/>
+        </p:spPr>
+        <p:txBody>
+          <a:bodyPr wrap="square" lIns="254" tIns="254" rIns="254" bIns="254" rtlCol="0" anchor="t">
             <a:normAutofit/>
           </a:bodyPr>
           <a:lstStyle/>
           <a:p>
-            <a:pPr algn="ctr" indent="0" marL="0">
-              <a:buNone/>
-            </a:pPr>
-            <a:r>
-              <a:rPr lang="en-US" sz="1500" b="1" dirty="0">
-                <a:solidFill>
-                  <a:srgbClr val="FFFFFF"/>
-                </a:solidFill>
-                <a:latin typeface="Aptos" pitchFamily="34" charset="0"/>
-                <a:ea typeface="Aptos" pitchFamily="34" charset="-122"/>
-                <a:cs typeface="Aptos" pitchFamily="34" charset="-120"/>
-              </a:rPr>
-              <a:t>Plan</a:t>
-            </a:r>
-            <a:endParaRPr lang="en-US" sz="1500" dirty="0"/>
+            <a:r>
+              <a:rPr lang="en-US" sz="1380" dirty="0">
+                <a:solidFill>
+                  <a:srgbClr val="17364A"/>
+                </a:solidFill>
+                <a:latin typeface="Aptos" pitchFamily="34" charset="0"/>
+                <a:ea typeface="Aptos" pitchFamily="34" charset="-122"/>
+                <a:cs typeface="Aptos" pitchFamily="34" charset="-120"/>
+              </a:rPr>
+              <a:t>The project plan identifies governance approval, data access, system integration,.</a:t>
+            </a:r>
+            <a:endParaRPr lang="en-US" sz="1380" dirty="0"/>
+          </a:p>
+          <a:p>
+            <a:r>
+              <a:rPr lang="en-US" sz="1380" dirty="0">
+                <a:solidFill>
+                  <a:srgbClr val="17364A"/>
+                </a:solidFill>
+                <a:latin typeface="Aptos" pitchFamily="34" charset="0"/>
+                <a:ea typeface="Aptos" pitchFamily="34" charset="-122"/>
+                <a:cs typeface="Aptos" pitchFamily="34" charset="-120"/>
+              </a:rPr>
+              <a:t>It must pass readiness checks showing that staff know how to review the output, errors can.</a:t>
+            </a:r>
+            <a:endParaRPr lang="en-US" sz="1380" dirty="0"/>
           </a:p>
         </p:txBody>
       </p:sp>
       <p:sp>
         <p:nvSpPr>
           <p:cNvPr id="16" name="Shape 14"/>
-          <p:cNvSpPr/>
-          <p:nvPr/>
-        </p:nvSpPr>
-        <p:spPr>
-          <a:xfrm>
-            <a:off x="8976360" y="3319272"/>
-            <a:ext cx="792480" cy="749808"/>
-          </a:xfrm>
-          <a:prstGeom prst="roundRect">
-            <a:avLst>
-              <a:gd name="adj" fmla="val 14634"/>
-            </a:avLst>
-          </a:prstGeom>
-          <a:solidFill>
-            <a:srgbClr val="2F8A28"/>
-          </a:solidFill>
-          <a:ln w="12700">
-            <a:solidFill>
-              <a:srgbClr val="2F8A28"/>
-            </a:solidFill>
-            <a:prstDash val="solid"/>
-          </a:ln>
-        </p:spPr>
-      </p:sp>
-      <p:sp>
-        <p:nvSpPr>
-          <p:cNvPr id="17" name="Text 15"/>
-          <p:cNvSpPr/>
-          <p:nvPr/>
-        </p:nvSpPr>
-        <p:spPr>
-          <a:xfrm>
-            <a:off x="9049512" y="3511296"/>
-            <a:ext cx="646176" cy="310896"/>
-          </a:xfrm>
-          <a:prstGeom prst="rect">
-            <a:avLst/>
-          </a:prstGeom>
-          <a:noFill/>
-          <a:ln/>
-        </p:spPr>
-        <p:txBody>
-          <a:bodyPr wrap="square" lIns="0" tIns="0" rIns="0" bIns="0" rtlCol="0" anchor="ctr">
-            <a:normAutofit/>
-          </a:bodyPr>
-          <a:lstStyle/>
-          <a:p>
-            <a:pPr algn="ctr" indent="0" marL="0">
-              <a:buNone/>
-            </a:pPr>
-            <a:r>
-              <a:rPr lang="en-US" sz="1500" b="1" dirty="0">
-                <a:solidFill>
-                  <a:srgbClr val="FFFFFF"/>
-                </a:solidFill>
-                <a:latin typeface="Aptos" pitchFamily="34" charset="0"/>
-                <a:ea typeface="Aptos" pitchFamily="34" charset="-122"/>
-                <a:cs typeface="Aptos" pitchFamily="34" charset="-120"/>
-              </a:rPr>
-              <a:t>Do</a:t>
-            </a:r>
-            <a:endParaRPr lang="en-US" sz="1500" dirty="0"/>
-          </a:p>
-        </p:txBody>
-      </p:sp>
-      <p:sp>
-        <p:nvSpPr>
-          <p:cNvPr id="18" name="Shape 16"/>
-          <p:cNvSpPr/>
-          <p:nvPr/>
-        </p:nvSpPr>
-        <p:spPr>
-          <a:xfrm>
-            <a:off x="10024872" y="3319272"/>
-            <a:ext cx="792480" cy="749808"/>
-          </a:xfrm>
-          <a:prstGeom prst="roundRect">
-            <a:avLst>
-              <a:gd name="adj" fmla="val 14634"/>
-            </a:avLst>
-          </a:prstGeom>
-          <a:solidFill>
-            <a:srgbClr val="D69A2D"/>
-          </a:solidFill>
-          <a:ln w="12700">
-            <a:solidFill>
-              <a:srgbClr val="D69A2D"/>
-            </a:solidFill>
-            <a:prstDash val="solid"/>
-          </a:ln>
-        </p:spPr>
-      </p:sp>
-      <p:sp>
-        <p:nvSpPr>
-          <p:cNvPr id="19" name="Text 17"/>
-          <p:cNvSpPr/>
-          <p:nvPr/>
-        </p:nvSpPr>
-        <p:spPr>
-          <a:xfrm>
-            <a:off x="10098024" y="3511296"/>
-            <a:ext cx="646176" cy="310896"/>
-          </a:xfrm>
-          <a:prstGeom prst="rect">
-            <a:avLst/>
-          </a:prstGeom>
-          <a:noFill/>
-          <a:ln/>
-        </p:spPr>
-        <p:txBody>
-          <a:bodyPr wrap="square" lIns="0" tIns="0" rIns="0" bIns="0" rtlCol="0" anchor="ctr">
-            <a:normAutofit/>
-          </a:bodyPr>
-          <a:lstStyle/>
-          <a:p>
-            <a:pPr algn="ctr" indent="0" marL="0">
-              <a:buNone/>
-            </a:pPr>
-            <a:r>
-              <a:rPr lang="en-US" sz="1500" b="1" dirty="0">
-                <a:solidFill>
-                  <a:srgbClr val="FFFFFF"/>
-                </a:solidFill>
-                <a:latin typeface="Aptos" pitchFamily="34" charset="0"/>
-                <a:ea typeface="Aptos" pitchFamily="34" charset="-122"/>
-                <a:cs typeface="Aptos" pitchFamily="34" charset="-120"/>
-              </a:rPr>
-              <a:t>Review</a:t>
-            </a:r>
-            <a:endParaRPr lang="en-US" sz="1500" dirty="0"/>
-          </a:p>
-        </p:txBody>
-      </p:sp>
-      <p:sp>
-        <p:nvSpPr>
-          <p:cNvPr id="20" name="Shape 18"/>
-          <p:cNvSpPr/>
-          <p:nvPr/>
-        </p:nvSpPr>
-        <p:spPr>
-          <a:xfrm>
-            <a:off x="8293608" y="4389120"/>
-            <a:ext cx="2157984" cy="0"/>
-          </a:xfrm>
-          <a:prstGeom prst="line">
-            <a:avLst/>
-          </a:prstGeom>
-          <a:noFill/>
-          <a:ln w="25400">
-            <a:solidFill>
-              <a:srgbClr val="8ABBD8"/>
-            </a:solidFill>
-            <a:prstDash val="solid"/>
-          </a:ln>
-        </p:spPr>
-      </p:sp>
-      <p:sp>
-        <p:nvSpPr>
-          <p:cNvPr id="21" name="Text 19"/>
-          <p:cNvSpPr/>
-          <p:nvPr/>
-        </p:nvSpPr>
-        <p:spPr>
-          <a:xfrm>
-            <a:off x="7909560" y="3977640"/>
-            <a:ext cx="2926080" cy="182880"/>
-          </a:xfrm>
-          <a:prstGeom prst="rect">
-            <a:avLst/>
-          </a:prstGeom>
-          <a:noFill/>
-          <a:ln/>
-        </p:spPr>
-        <p:txBody>
-          <a:bodyPr wrap="square" lIns="0" tIns="0" rIns="0" bIns="0" rtlCol="0" anchor="ctr"/>
-          <a:lstStyle/>
-          <a:p>
-            <a:pPr algn="ctr" indent="0" marL="0">
-              <a:buNone/>
-            </a:pPr>
-            <a:r>
-              <a:rPr lang="en-US" sz="1000" dirty="0">
-                <a:solidFill>
-                  <a:srgbClr val="003A63"/>
-                </a:solidFill>
-                <a:latin typeface="Aptos" pitchFamily="34" charset="0"/>
-                <a:ea typeface="Aptos" pitchFamily="34" charset="-122"/>
-                <a:cs typeface="Aptos" pitchFamily="34" charset="-120"/>
-              </a:rPr>
-              <a:t>Dependencies visible</a:t>
-            </a:r>
-            <a:endParaRPr lang="en-US" sz="1000" dirty="0"/>
-          </a:p>
-        </p:txBody>
-      </p:sp>
-      <p:sp>
-        <p:nvSpPr>
-          <p:cNvPr id="22" name="Shape 20"/>
           <p:cNvSpPr/>
           <p:nvPr/>
         </p:nvSpPr>
@@ -18037,7 +15683,7 @@
       </p:sp>
       <p:sp>
         <p:nvSpPr>
-          <p:cNvPr id="23" name="Text 21"/>
+          <p:cNvPr id="17" name="Text 15"/>
           <p:cNvSpPr/>
           <p:nvPr/>
         </p:nvSpPr>
@@ -18076,7 +15722,7 @@
       </p:sp>
       <p:sp>
         <p:nvSpPr>
-          <p:cNvPr id="24" name="Text 22"/>
+          <p:cNvPr id="18" name="Text 16"/>
           <p:cNvSpPr/>
           <p:nvPr/>
         </p:nvSpPr>
@@ -18584,13 +16230,11 @@
             </a:avLst>
           </a:prstGeom>
           <a:solidFill>
-            <a:srgbClr val="FFFFFF">
-              <a:alpha val="88000"/>
-            </a:srgbClr>
+            <a:srgbClr val="FFFFFF"/>
           </a:solidFill>
           <a:ln w="12700">
             <a:solidFill>
-              <a:srgbClr val="D6E8F2"/>
+              <a:srgbClr val="B9D7E6"/>
             </a:solidFill>
             <a:prstDash val="solid"/>
           </a:ln>
@@ -18598,30 +16242,42 @@
       </p:sp>
       <p:sp>
         <p:nvSpPr>
-          <p:cNvPr id="14" name="Shape 12"/>
-          <p:cNvSpPr/>
-          <p:nvPr/>
-        </p:nvSpPr>
-        <p:spPr>
-          <a:xfrm>
-            <a:off x="7927848" y="3319272"/>
-            <a:ext cx="792480" cy="749808"/>
-          </a:xfrm>
-          <a:prstGeom prst="roundRect">
-            <a:avLst>
-              <a:gd name="adj" fmla="val 14634"/>
-            </a:avLst>
-          </a:prstGeom>
-          <a:solidFill>
-            <a:srgbClr val="0068B7"/>
-          </a:solidFill>
-          <a:ln w="12700">
-            <a:solidFill>
-              <a:srgbClr val="0068B7"/>
-            </a:solidFill>
-            <a:prstDash val="solid"/>
-          </a:ln>
-        </p:spPr>
+          <p:cNvPr id="14" name="Text 12"/>
+          <p:cNvSpPr/>
+          <p:nvPr/>
+        </p:nvSpPr>
+        <p:spPr>
+          <a:xfrm>
+            <a:off x="7799832" y="2935224"/>
+            <a:ext cx="3145536" cy="256032"/>
+          </a:xfrm>
+          <a:prstGeom prst="rect">
+            <a:avLst/>
+          </a:prstGeom>
+          <a:noFill/>
+          <a:ln/>
+        </p:spPr>
+        <p:txBody>
+          <a:bodyPr wrap="square" lIns="0" tIns="0" rIns="0" bIns="0" rtlCol="0" anchor="ctr"/>
+          <a:lstStyle/>
+          <a:p>
+            <a:pPr indent="0" marL="0">
+              <a:buNone/>
+            </a:pPr>
+            <a:r>
+              <a:rPr lang="en-US" sz="1300" b="1" dirty="0">
+                <a:solidFill>
+                  <a:srgbClr val="0068B7"/>
+                </a:solidFill>
+                <a:latin typeface="Aptos" pitchFamily="34" charset="0"/>
+                <a:ea typeface="Aptos" pitchFamily="34" charset="-122"/>
+                <a:cs typeface="Aptos" pitchFamily="34" charset="-120"/>
+              </a:rPr>
+              <a:t>Concept checkpoints</a:t>
+            </a:r>
+            <a:endParaRPr lang="en-US" sz="1300" dirty="0"/>
+          </a:p>
+        </p:txBody>
       </p:sp>
       <p:sp>
         <p:nvSpPr>
@@ -18631,240 +16287,67 @@
         </p:nvSpPr>
         <p:spPr>
           <a:xfrm>
-            <a:off x="8001000" y="3511296"/>
-            <a:ext cx="646176" cy="310896"/>
-          </a:xfrm>
-          <a:prstGeom prst="rect">
-            <a:avLst/>
-          </a:prstGeom>
-          <a:noFill/>
-          <a:ln/>
-        </p:spPr>
-        <p:txBody>
-          <a:bodyPr wrap="square" lIns="0" tIns="0" rIns="0" bIns="0" rtlCol="0" anchor="ctr">
+            <a:off x="7818120" y="3300984"/>
+            <a:ext cx="3090672" cy="877824"/>
+          </a:xfrm>
+          <a:prstGeom prst="rect">
+            <a:avLst/>
+          </a:prstGeom>
+          <a:noFill/>
+          <a:ln/>
+        </p:spPr>
+        <p:txBody>
+          <a:bodyPr wrap="square" lIns="254" tIns="254" rIns="254" bIns="254" rtlCol="0" anchor="t">
             <a:normAutofit/>
           </a:bodyPr>
           <a:lstStyle/>
           <a:p>
-            <a:pPr algn="ctr" indent="0" marL="0">
-              <a:buNone/>
-            </a:pPr>
-            <a:r>
-              <a:rPr lang="en-US" sz="1500" b="1" dirty="0">
-                <a:solidFill>
-                  <a:srgbClr val="FFFFFF"/>
-                </a:solidFill>
-                <a:latin typeface="Aptos" pitchFamily="34" charset="0"/>
-                <a:ea typeface="Aptos" pitchFamily="34" charset="-122"/>
-                <a:cs typeface="Aptos" pitchFamily="34" charset="-120"/>
-              </a:rPr>
-              <a:t>Plan</a:t>
-            </a:r>
-            <a:endParaRPr lang="en-US" sz="1500" dirty="0"/>
+            <a:r>
+              <a:rPr lang="en-US" sz="1380" dirty="0">
+                <a:solidFill>
+                  <a:srgbClr val="17364A"/>
+                </a:solidFill>
+                <a:latin typeface="Aptos" pitchFamily="34" charset="0"/>
+                <a:ea typeface="Aptos" pitchFamily="34" charset="-122"/>
+                <a:cs typeface="Aptos" pitchFamily="34" charset="-120"/>
+              </a:rPr>
+              <a:t>The charter should explain the public health problem, intended users, expected benefits,.</a:t>
+            </a:r>
+            <a:endParaRPr lang="en-US" sz="1380" dirty="0"/>
+          </a:p>
+          <a:p>
+            <a:r>
+              <a:rPr lang="en-US" sz="1380" dirty="0">
+                <a:solidFill>
+                  <a:srgbClr val="17364A"/>
+                </a:solidFill>
+                <a:latin typeface="Aptos" pitchFamily="34" charset="0"/>
+                <a:ea typeface="Aptos" pitchFamily="34" charset="-122"/>
+                <a:cs typeface="Aptos" pitchFamily="34" charset="-120"/>
+              </a:rPr>
+              <a:t>It should also identify the sponsor, product owner, implementation lead, technical lead,.</a:t>
+            </a:r>
+            <a:endParaRPr lang="en-US" sz="1380" dirty="0"/>
+          </a:p>
+          <a:p>
+            <a:r>
+              <a:rPr lang="en-US" sz="1380" dirty="0">
+                <a:solidFill>
+                  <a:srgbClr val="17364A"/>
+                </a:solidFill>
+                <a:latin typeface="Aptos" pitchFamily="34" charset="0"/>
+                <a:ea typeface="Aptos" pitchFamily="34" charset="-122"/>
+                <a:cs typeface="Aptos" pitchFamily="34" charset="-120"/>
+              </a:rPr>
+              <a:t>Implementation should be organized into phases.</a:t>
+            </a:r>
+            <a:endParaRPr lang="en-US" sz="1380" dirty="0"/>
           </a:p>
         </p:txBody>
       </p:sp>
       <p:sp>
         <p:nvSpPr>
           <p:cNvPr id="16" name="Shape 14"/>
-          <p:cNvSpPr/>
-          <p:nvPr/>
-        </p:nvSpPr>
-        <p:spPr>
-          <a:xfrm>
-            <a:off x="8976360" y="3319272"/>
-            <a:ext cx="792480" cy="749808"/>
-          </a:xfrm>
-          <a:prstGeom prst="roundRect">
-            <a:avLst>
-              <a:gd name="adj" fmla="val 14634"/>
-            </a:avLst>
-          </a:prstGeom>
-          <a:solidFill>
-            <a:srgbClr val="2F8A28"/>
-          </a:solidFill>
-          <a:ln w="12700">
-            <a:solidFill>
-              <a:srgbClr val="2F8A28"/>
-            </a:solidFill>
-            <a:prstDash val="solid"/>
-          </a:ln>
-        </p:spPr>
-      </p:sp>
-      <p:sp>
-        <p:nvSpPr>
-          <p:cNvPr id="17" name="Text 15"/>
-          <p:cNvSpPr/>
-          <p:nvPr/>
-        </p:nvSpPr>
-        <p:spPr>
-          <a:xfrm>
-            <a:off x="9049512" y="3511296"/>
-            <a:ext cx="646176" cy="310896"/>
-          </a:xfrm>
-          <a:prstGeom prst="rect">
-            <a:avLst/>
-          </a:prstGeom>
-          <a:noFill/>
-          <a:ln/>
-        </p:spPr>
-        <p:txBody>
-          <a:bodyPr wrap="square" lIns="0" tIns="0" rIns="0" bIns="0" rtlCol="0" anchor="ctr">
-            <a:normAutofit/>
-          </a:bodyPr>
-          <a:lstStyle/>
-          <a:p>
-            <a:pPr algn="ctr" indent="0" marL="0">
-              <a:buNone/>
-            </a:pPr>
-            <a:r>
-              <a:rPr lang="en-US" sz="1500" b="1" dirty="0">
-                <a:solidFill>
-                  <a:srgbClr val="FFFFFF"/>
-                </a:solidFill>
-                <a:latin typeface="Aptos" pitchFamily="34" charset="0"/>
-                <a:ea typeface="Aptos" pitchFamily="34" charset="-122"/>
-                <a:cs typeface="Aptos" pitchFamily="34" charset="-120"/>
-              </a:rPr>
-              <a:t>Do</a:t>
-            </a:r>
-            <a:endParaRPr lang="en-US" sz="1500" dirty="0"/>
-          </a:p>
-        </p:txBody>
-      </p:sp>
-      <p:sp>
-        <p:nvSpPr>
-          <p:cNvPr id="18" name="Shape 16"/>
-          <p:cNvSpPr/>
-          <p:nvPr/>
-        </p:nvSpPr>
-        <p:spPr>
-          <a:xfrm>
-            <a:off x="10024872" y="3319272"/>
-            <a:ext cx="792480" cy="749808"/>
-          </a:xfrm>
-          <a:prstGeom prst="roundRect">
-            <a:avLst>
-              <a:gd name="adj" fmla="val 14634"/>
-            </a:avLst>
-          </a:prstGeom>
-          <a:solidFill>
-            <a:srgbClr val="D69A2D"/>
-          </a:solidFill>
-          <a:ln w="12700">
-            <a:solidFill>
-              <a:srgbClr val="D69A2D"/>
-            </a:solidFill>
-            <a:prstDash val="solid"/>
-          </a:ln>
-        </p:spPr>
-      </p:sp>
-      <p:sp>
-        <p:nvSpPr>
-          <p:cNvPr id="19" name="Text 17"/>
-          <p:cNvSpPr/>
-          <p:nvPr/>
-        </p:nvSpPr>
-        <p:spPr>
-          <a:xfrm>
-            <a:off x="10098024" y="3511296"/>
-            <a:ext cx="646176" cy="310896"/>
-          </a:xfrm>
-          <a:prstGeom prst="rect">
-            <a:avLst/>
-          </a:prstGeom>
-          <a:noFill/>
-          <a:ln/>
-        </p:spPr>
-        <p:txBody>
-          <a:bodyPr wrap="square" lIns="0" tIns="0" rIns="0" bIns="0" rtlCol="0" anchor="ctr">
-            <a:normAutofit/>
-          </a:bodyPr>
-          <a:lstStyle/>
-          <a:p>
-            <a:pPr algn="ctr" indent="0" marL="0">
-              <a:buNone/>
-            </a:pPr>
-            <a:r>
-              <a:rPr lang="en-US" sz="1500" b="1" dirty="0">
-                <a:solidFill>
-                  <a:srgbClr val="FFFFFF"/>
-                </a:solidFill>
-                <a:latin typeface="Aptos" pitchFamily="34" charset="0"/>
-                <a:ea typeface="Aptos" pitchFamily="34" charset="-122"/>
-                <a:cs typeface="Aptos" pitchFamily="34" charset="-120"/>
-              </a:rPr>
-              <a:t>Review</a:t>
-            </a:r>
-            <a:endParaRPr lang="en-US" sz="1500" dirty="0"/>
-          </a:p>
-        </p:txBody>
-      </p:sp>
-      <p:sp>
-        <p:nvSpPr>
-          <p:cNvPr id="20" name="Shape 18"/>
-          <p:cNvSpPr/>
-          <p:nvPr/>
-        </p:nvSpPr>
-        <p:spPr>
-          <a:xfrm>
-            <a:off x="8293608" y="4389120"/>
-            <a:ext cx="2157984" cy="0"/>
-          </a:xfrm>
-          <a:prstGeom prst="line">
-            <a:avLst/>
-          </a:prstGeom>
-          <a:noFill/>
-          <a:ln w="25400">
-            <a:solidFill>
-              <a:srgbClr val="8ABBD8"/>
-            </a:solidFill>
-            <a:prstDash val="solid"/>
-          </a:ln>
-        </p:spPr>
-      </p:sp>
-      <p:sp>
-        <p:nvSpPr>
-          <p:cNvPr id="21" name="Text 19"/>
-          <p:cNvSpPr/>
-          <p:nvPr/>
-        </p:nvSpPr>
-        <p:spPr>
-          <a:xfrm>
-            <a:off x="7909560" y="3977640"/>
-            <a:ext cx="2926080" cy="182880"/>
-          </a:xfrm>
-          <a:prstGeom prst="rect">
-            <a:avLst/>
-          </a:prstGeom>
-          <a:noFill/>
-          <a:ln/>
-        </p:spPr>
-        <p:txBody>
-          <a:bodyPr wrap="square" lIns="0" tIns="0" rIns="0" bIns="0" rtlCol="0" anchor="ctr"/>
-          <a:lstStyle/>
-          <a:p>
-            <a:pPr algn="ctr" indent="0" marL="0">
-              <a:buNone/>
-            </a:pPr>
-            <a:r>
-              <a:rPr lang="en-US" sz="1000" dirty="0">
-                <a:solidFill>
-                  <a:srgbClr val="003A63"/>
-                </a:solidFill>
-                <a:latin typeface="Aptos" pitchFamily="34" charset="0"/>
-                <a:ea typeface="Aptos" pitchFamily="34" charset="-122"/>
-                <a:cs typeface="Aptos" pitchFamily="34" charset="-120"/>
-              </a:rPr>
-              <a:t>Dependencies visible</a:t>
-            </a:r>
-            <a:endParaRPr lang="en-US" sz="1000" dirty="0"/>
-          </a:p>
-        </p:txBody>
-      </p:sp>
-      <p:sp>
-        <p:nvSpPr>
-          <p:cNvPr id="22" name="Shape 20"/>
           <p:cNvSpPr/>
           <p:nvPr/>
         </p:nvSpPr>
@@ -18891,7 +16374,7 @@
       </p:sp>
       <p:sp>
         <p:nvSpPr>
-          <p:cNvPr id="23" name="Text 21"/>
+          <p:cNvPr id="17" name="Text 15"/>
           <p:cNvSpPr/>
           <p:nvPr/>
         </p:nvSpPr>
@@ -18930,7 +16413,7 @@
       </p:sp>
       <p:sp>
         <p:nvSpPr>
-          <p:cNvPr id="24" name="Text 22"/>
+          <p:cNvPr id="18" name="Text 16"/>
           <p:cNvSpPr/>
           <p:nvPr/>
         </p:nvSpPr>
@@ -19438,13 +16921,11 @@
             </a:avLst>
           </a:prstGeom>
           <a:solidFill>
-            <a:srgbClr val="FFFFFF">
-              <a:alpha val="88000"/>
-            </a:srgbClr>
+            <a:srgbClr val="FFFFFF"/>
           </a:solidFill>
           <a:ln w="12700">
             <a:solidFill>
-              <a:srgbClr val="D6E8F2"/>
+              <a:srgbClr val="B9D7E6"/>
             </a:solidFill>
             <a:prstDash val="solid"/>
           </a:ln>
@@ -19452,30 +16933,42 @@
       </p:sp>
       <p:sp>
         <p:nvSpPr>
-          <p:cNvPr id="14" name="Shape 12"/>
-          <p:cNvSpPr/>
-          <p:nvPr/>
-        </p:nvSpPr>
-        <p:spPr>
-          <a:xfrm>
-            <a:off x="7927848" y="3319272"/>
-            <a:ext cx="792480" cy="749808"/>
-          </a:xfrm>
-          <a:prstGeom prst="roundRect">
-            <a:avLst>
-              <a:gd name="adj" fmla="val 14634"/>
-            </a:avLst>
-          </a:prstGeom>
-          <a:solidFill>
-            <a:srgbClr val="0068B7"/>
-          </a:solidFill>
-          <a:ln w="12700">
-            <a:solidFill>
-              <a:srgbClr val="0068B7"/>
-            </a:solidFill>
-            <a:prstDash val="solid"/>
-          </a:ln>
-        </p:spPr>
+          <p:cNvPr id="14" name="Text 12"/>
+          <p:cNvSpPr/>
+          <p:nvPr/>
+        </p:nvSpPr>
+        <p:spPr>
+          <a:xfrm>
+            <a:off x="7799832" y="2935224"/>
+            <a:ext cx="3145536" cy="256032"/>
+          </a:xfrm>
+          <a:prstGeom prst="rect">
+            <a:avLst/>
+          </a:prstGeom>
+          <a:noFill/>
+          <a:ln/>
+        </p:spPr>
+        <p:txBody>
+          <a:bodyPr wrap="square" lIns="0" tIns="0" rIns="0" bIns="0" rtlCol="0" anchor="ctr"/>
+          <a:lstStyle/>
+          <a:p>
+            <a:pPr indent="0" marL="0">
+              <a:buNone/>
+            </a:pPr>
+            <a:r>
+              <a:rPr lang="en-US" sz="1300" b="1" dirty="0">
+                <a:solidFill>
+                  <a:srgbClr val="0068B7"/>
+                </a:solidFill>
+                <a:latin typeface="Aptos" pitchFamily="34" charset="0"/>
+                <a:ea typeface="Aptos" pitchFamily="34" charset="-122"/>
+                <a:cs typeface="Aptos" pitchFamily="34" charset="-120"/>
+              </a:rPr>
+              <a:t>Concept checkpoints</a:t>
+            </a:r>
+            <a:endParaRPr lang="en-US" sz="1300" dirty="0"/>
+          </a:p>
+        </p:txBody>
       </p:sp>
       <p:sp>
         <p:nvSpPr>
@@ -19485,240 +16978,53 @@
         </p:nvSpPr>
         <p:spPr>
           <a:xfrm>
-            <a:off x="8001000" y="3511296"/>
-            <a:ext cx="646176" cy="310896"/>
-          </a:xfrm>
-          <a:prstGeom prst="rect">
-            <a:avLst/>
-          </a:prstGeom>
-          <a:noFill/>
-          <a:ln/>
-        </p:spPr>
-        <p:txBody>
-          <a:bodyPr wrap="square" lIns="0" tIns="0" rIns="0" bIns="0" rtlCol="0" anchor="ctr">
+            <a:off x="7818120" y="3300984"/>
+            <a:ext cx="3090672" cy="877824"/>
+          </a:xfrm>
+          <a:prstGeom prst="rect">
+            <a:avLst/>
+          </a:prstGeom>
+          <a:noFill/>
+          <a:ln/>
+        </p:spPr>
+        <p:txBody>
+          <a:bodyPr wrap="square" lIns="254" tIns="254" rIns="254" bIns="254" rtlCol="0" anchor="t">
             <a:normAutofit/>
           </a:bodyPr>
           <a:lstStyle/>
           <a:p>
-            <a:pPr algn="ctr" indent="0" marL="0">
-              <a:buNone/>
-            </a:pPr>
-            <a:r>
-              <a:rPr lang="en-US" sz="1500" b="1" dirty="0">
-                <a:solidFill>
-                  <a:srgbClr val="FFFFFF"/>
-                </a:solidFill>
-                <a:latin typeface="Aptos" pitchFamily="34" charset="0"/>
-                <a:ea typeface="Aptos" pitchFamily="34" charset="-122"/>
-                <a:cs typeface="Aptos" pitchFamily="34" charset="-120"/>
-              </a:rPr>
-              <a:t>Plan</a:t>
-            </a:r>
-            <a:endParaRPr lang="en-US" sz="1500" dirty="0"/>
+            <a:r>
+              <a:rPr lang="en-US" sz="1380" dirty="0">
+                <a:solidFill>
+                  <a:srgbClr val="17364A"/>
+                </a:solidFill>
+                <a:latin typeface="Aptos" pitchFamily="34" charset="0"/>
+                <a:ea typeface="Aptos" pitchFamily="34" charset="-122"/>
+                <a:cs typeface="Aptos" pitchFamily="34" charset="-120"/>
+              </a:rPr>
+              <a:t>A pilot may show promise, but routine use requires support, monitoring, maintenance,.</a:t>
+            </a:r>
+            <a:endParaRPr lang="en-US" sz="1380" dirty="0"/>
+          </a:p>
+          <a:p>
+            <a:r>
+              <a:rPr lang="en-US" sz="1380" dirty="0">
+                <a:solidFill>
+                  <a:srgbClr val="17364A"/>
+                </a:solidFill>
+                <a:latin typeface="Aptos" pitchFamily="34" charset="0"/>
+                <a:ea typeface="Aptos" pitchFamily="34" charset="-122"/>
+                <a:cs typeface="Aptos" pitchFamily="34" charset="-120"/>
+              </a:rPr>
+              <a:t>The project plan should define when the implementation team ends and who becomes.</a:t>
+            </a:r>
+            <a:endParaRPr lang="en-US" sz="1380" dirty="0"/>
           </a:p>
         </p:txBody>
       </p:sp>
       <p:sp>
         <p:nvSpPr>
           <p:cNvPr id="16" name="Shape 14"/>
-          <p:cNvSpPr/>
-          <p:nvPr/>
-        </p:nvSpPr>
-        <p:spPr>
-          <a:xfrm>
-            <a:off x="8976360" y="3319272"/>
-            <a:ext cx="792480" cy="749808"/>
-          </a:xfrm>
-          <a:prstGeom prst="roundRect">
-            <a:avLst>
-              <a:gd name="adj" fmla="val 14634"/>
-            </a:avLst>
-          </a:prstGeom>
-          <a:solidFill>
-            <a:srgbClr val="2F8A28"/>
-          </a:solidFill>
-          <a:ln w="12700">
-            <a:solidFill>
-              <a:srgbClr val="2F8A28"/>
-            </a:solidFill>
-            <a:prstDash val="solid"/>
-          </a:ln>
-        </p:spPr>
-      </p:sp>
-      <p:sp>
-        <p:nvSpPr>
-          <p:cNvPr id="17" name="Text 15"/>
-          <p:cNvSpPr/>
-          <p:nvPr/>
-        </p:nvSpPr>
-        <p:spPr>
-          <a:xfrm>
-            <a:off x="9049512" y="3511296"/>
-            <a:ext cx="646176" cy="310896"/>
-          </a:xfrm>
-          <a:prstGeom prst="rect">
-            <a:avLst/>
-          </a:prstGeom>
-          <a:noFill/>
-          <a:ln/>
-        </p:spPr>
-        <p:txBody>
-          <a:bodyPr wrap="square" lIns="0" tIns="0" rIns="0" bIns="0" rtlCol="0" anchor="ctr">
-            <a:normAutofit/>
-          </a:bodyPr>
-          <a:lstStyle/>
-          <a:p>
-            <a:pPr algn="ctr" indent="0" marL="0">
-              <a:buNone/>
-            </a:pPr>
-            <a:r>
-              <a:rPr lang="en-US" sz="1500" b="1" dirty="0">
-                <a:solidFill>
-                  <a:srgbClr val="FFFFFF"/>
-                </a:solidFill>
-                <a:latin typeface="Aptos" pitchFamily="34" charset="0"/>
-                <a:ea typeface="Aptos" pitchFamily="34" charset="-122"/>
-                <a:cs typeface="Aptos" pitchFamily="34" charset="-120"/>
-              </a:rPr>
-              <a:t>Do</a:t>
-            </a:r>
-            <a:endParaRPr lang="en-US" sz="1500" dirty="0"/>
-          </a:p>
-        </p:txBody>
-      </p:sp>
-      <p:sp>
-        <p:nvSpPr>
-          <p:cNvPr id="18" name="Shape 16"/>
-          <p:cNvSpPr/>
-          <p:nvPr/>
-        </p:nvSpPr>
-        <p:spPr>
-          <a:xfrm>
-            <a:off x="10024872" y="3319272"/>
-            <a:ext cx="792480" cy="749808"/>
-          </a:xfrm>
-          <a:prstGeom prst="roundRect">
-            <a:avLst>
-              <a:gd name="adj" fmla="val 14634"/>
-            </a:avLst>
-          </a:prstGeom>
-          <a:solidFill>
-            <a:srgbClr val="D69A2D"/>
-          </a:solidFill>
-          <a:ln w="12700">
-            <a:solidFill>
-              <a:srgbClr val="D69A2D"/>
-            </a:solidFill>
-            <a:prstDash val="solid"/>
-          </a:ln>
-        </p:spPr>
-      </p:sp>
-      <p:sp>
-        <p:nvSpPr>
-          <p:cNvPr id="19" name="Text 17"/>
-          <p:cNvSpPr/>
-          <p:nvPr/>
-        </p:nvSpPr>
-        <p:spPr>
-          <a:xfrm>
-            <a:off x="10098024" y="3511296"/>
-            <a:ext cx="646176" cy="310896"/>
-          </a:xfrm>
-          <a:prstGeom prst="rect">
-            <a:avLst/>
-          </a:prstGeom>
-          <a:noFill/>
-          <a:ln/>
-        </p:spPr>
-        <p:txBody>
-          <a:bodyPr wrap="square" lIns="0" tIns="0" rIns="0" bIns="0" rtlCol="0" anchor="ctr">
-            <a:normAutofit/>
-          </a:bodyPr>
-          <a:lstStyle/>
-          <a:p>
-            <a:pPr algn="ctr" indent="0" marL="0">
-              <a:buNone/>
-            </a:pPr>
-            <a:r>
-              <a:rPr lang="en-US" sz="1500" b="1" dirty="0">
-                <a:solidFill>
-                  <a:srgbClr val="FFFFFF"/>
-                </a:solidFill>
-                <a:latin typeface="Aptos" pitchFamily="34" charset="0"/>
-                <a:ea typeface="Aptos" pitchFamily="34" charset="-122"/>
-                <a:cs typeface="Aptos" pitchFamily="34" charset="-120"/>
-              </a:rPr>
-              <a:t>Review</a:t>
-            </a:r>
-            <a:endParaRPr lang="en-US" sz="1500" dirty="0"/>
-          </a:p>
-        </p:txBody>
-      </p:sp>
-      <p:sp>
-        <p:nvSpPr>
-          <p:cNvPr id="20" name="Shape 18"/>
-          <p:cNvSpPr/>
-          <p:nvPr/>
-        </p:nvSpPr>
-        <p:spPr>
-          <a:xfrm>
-            <a:off x="8293608" y="4389120"/>
-            <a:ext cx="2157984" cy="0"/>
-          </a:xfrm>
-          <a:prstGeom prst="line">
-            <a:avLst/>
-          </a:prstGeom>
-          <a:noFill/>
-          <a:ln w="25400">
-            <a:solidFill>
-              <a:srgbClr val="8ABBD8"/>
-            </a:solidFill>
-            <a:prstDash val="solid"/>
-          </a:ln>
-        </p:spPr>
-      </p:sp>
-      <p:sp>
-        <p:nvSpPr>
-          <p:cNvPr id="21" name="Text 19"/>
-          <p:cNvSpPr/>
-          <p:nvPr/>
-        </p:nvSpPr>
-        <p:spPr>
-          <a:xfrm>
-            <a:off x="7909560" y="3977640"/>
-            <a:ext cx="2926080" cy="182880"/>
-          </a:xfrm>
-          <a:prstGeom prst="rect">
-            <a:avLst/>
-          </a:prstGeom>
-          <a:noFill/>
-          <a:ln/>
-        </p:spPr>
-        <p:txBody>
-          <a:bodyPr wrap="square" lIns="0" tIns="0" rIns="0" bIns="0" rtlCol="0" anchor="ctr"/>
-          <a:lstStyle/>
-          <a:p>
-            <a:pPr algn="ctr" indent="0" marL="0">
-              <a:buNone/>
-            </a:pPr>
-            <a:r>
-              <a:rPr lang="en-US" sz="1000" dirty="0">
-                <a:solidFill>
-                  <a:srgbClr val="003A63"/>
-                </a:solidFill>
-                <a:latin typeface="Aptos" pitchFamily="34" charset="0"/>
-                <a:ea typeface="Aptos" pitchFamily="34" charset="-122"/>
-                <a:cs typeface="Aptos" pitchFamily="34" charset="-120"/>
-              </a:rPr>
-              <a:t>Dependencies visible</a:t>
-            </a:r>
-            <a:endParaRPr lang="en-US" sz="1000" dirty="0"/>
-          </a:p>
-        </p:txBody>
-      </p:sp>
-      <p:sp>
-        <p:nvSpPr>
-          <p:cNvPr id="22" name="Shape 20"/>
           <p:cNvSpPr/>
           <p:nvPr/>
         </p:nvSpPr>
@@ -19745,7 +17051,7 @@
       </p:sp>
       <p:sp>
         <p:nvSpPr>
-          <p:cNvPr id="23" name="Text 21"/>
+          <p:cNvPr id="17" name="Text 15"/>
           <p:cNvSpPr/>
           <p:nvPr/>
         </p:nvSpPr>
@@ -19784,7 +17090,7 @@
       </p:sp>
       <p:sp>
         <p:nvSpPr>
-          <p:cNvPr id="24" name="Text 22"/>
+          <p:cNvPr id="18" name="Text 16"/>
           <p:cNvSpPr/>
           <p:nvPr/>
         </p:nvSpPr>

--- a/downloads/presentations/modules/pmg-220.pptx
+++ b/downloads/presentations/modules/pmg-220.pptx
@@ -3356,49 +3356,58 @@
           <a:ln/>
         </p:spPr>
         <p:txBody>
-          <a:bodyPr wrap="square" lIns="635" tIns="635" rIns="635" bIns="635" rtlCol="0" anchor="t">
+          <a:bodyPr wrap="square" lIns="1016" tIns="1016" rIns="1016" bIns="1016" rtlCol="0" anchor="t">
             <a:normAutofit/>
           </a:bodyPr>
           <a:lstStyle/>
           <a:p>
+            <a:pPr indent="0" marL="0">
+              <a:buNone/>
+            </a:pPr>
             <a:r>
               <a:rPr lang="en-US" sz="2100" dirty="0">
                 <a:solidFill>
-                  <a:srgbClr val="17364A"/>
-                </a:solidFill>
-                <a:latin typeface="Aptos" pitchFamily="34" charset="0"/>
-                <a:ea typeface="Aptos" pitchFamily="34" charset="-122"/>
-                <a:cs typeface="Aptos" pitchFamily="34" charset="-120"/>
-              </a:rPr>
-              <a:t>Risks and failure modes include the following:</a:t>
+                  <a:srgbClr val="003A63"/>
+                </a:solidFill>
+                <a:latin typeface="Aptos" pitchFamily="34" charset="0"/>
+                <a:ea typeface="Aptos" pitchFamily="34" charset="-122"/>
+                <a:cs typeface="Aptos" pitchFamily="34" charset="-120"/>
+              </a:rPr>
+              <a:t>• Risks and failure modes include the following:</a:t>
             </a:r>
             <a:endParaRPr lang="en-US" sz="2100" dirty="0"/>
           </a:p>
           <a:p>
+            <a:pPr indent="0" marL="0">
+              <a:buNone/>
+            </a:pPr>
             <a:r>
               <a:rPr lang="en-US" sz="2100" dirty="0">
                 <a:solidFill>
-                  <a:srgbClr val="17364A"/>
-                </a:solidFill>
-                <a:latin typeface="Aptos" pitchFamily="34" charset="0"/>
-                <a:ea typeface="Aptos" pitchFamily="34" charset="-122"/>
-                <a:cs typeface="Aptos" pitchFamily="34" charset="-120"/>
-              </a:rPr>
-              <a:t>Pilots launching without governance approval or operational ownership.</a:t>
+                  <a:srgbClr val="003A63"/>
+                </a:solidFill>
+                <a:latin typeface="Aptos" pitchFamily="34" charset="0"/>
+                <a:ea typeface="Aptos" pitchFamily="34" charset="-122"/>
+                <a:cs typeface="Aptos" pitchFamily="34" charset="-120"/>
+              </a:rPr>
+              <a:t>• Pilots launching without governance approval or operational ownership.</a:t>
             </a:r>
             <a:endParaRPr lang="en-US" sz="2100" dirty="0"/>
           </a:p>
           <a:p>
+            <a:pPr indent="0" marL="0">
+              <a:buNone/>
+            </a:pPr>
             <a:r>
               <a:rPr lang="en-US" sz="2100" dirty="0">
                 <a:solidFill>
-                  <a:srgbClr val="17364A"/>
-                </a:solidFill>
-                <a:latin typeface="Aptos" pitchFamily="34" charset="0"/>
-                <a:ea typeface="Aptos" pitchFamily="34" charset="-122"/>
-                <a:cs typeface="Aptos" pitchFamily="34" charset="-120"/>
-              </a:rPr>
-              <a:t>Project plans overlooking data, privacy, security, workflow, or training dependencies.</a:t>
+                  <a:srgbClr val="003A63"/>
+                </a:solidFill>
+                <a:latin typeface="Aptos" pitchFamily="34" charset="0"/>
+                <a:ea typeface="Aptos" pitchFamily="34" charset="-122"/>
+                <a:cs typeface="Aptos" pitchFamily="34" charset="-120"/>
+              </a:rPr>
+              <a:t>• Project plans overlooking data, privacy, security, workflow, or training dependencies.</a:t>
             </a:r>
             <a:endParaRPr lang="en-US" sz="2100" dirty="0"/>
           </a:p>
@@ -3478,17 +3487,17 @@
         </p:nvSpPr>
         <p:spPr>
           <a:xfrm>
-            <a:off x="7799832" y="1828800"/>
-            <a:ext cx="3145536" cy="685800"/>
-          </a:xfrm>
-          <a:prstGeom prst="rect">
-            <a:avLst/>
-          </a:prstGeom>
-          <a:noFill/>
-          <a:ln/>
-        </p:spPr>
-        <p:txBody>
-          <a:bodyPr wrap="square" lIns="0" tIns="0" rIns="0" bIns="0" rtlCol="0" anchor="t">
+            <a:off x="7799832" y="1801368"/>
+            <a:ext cx="3145536" cy="758952"/>
+          </a:xfrm>
+          <a:prstGeom prst="rect">
+            <a:avLst/>
+          </a:prstGeom>
+          <a:noFill/>
+          <a:ln/>
+        </p:spPr>
+        <p:txBody>
+          <a:bodyPr wrap="square" lIns="254" tIns="254" rIns="254" bIns="254" rtlCol="0" anchor="t">
             <a:normAutofit/>
           </a:bodyPr>
           <a:lstStyle/>
@@ -3497,7 +3506,7 @@
               <a:buNone/>
             </a:pPr>
             <a:r>
-              <a:rPr lang="en-US" sz="1550" dirty="0">
+              <a:rPr lang="en-US" sz="1320" dirty="0">
                 <a:solidFill>
                   <a:srgbClr val="17364A"/>
                 </a:solidFill>
@@ -3507,7 +3516,7 @@
               </a:rPr>
               <a:t>Risks and failure modes include the following:</a:t>
             </a:r>
-            <a:endParaRPr lang="en-US" sz="1550" dirty="0"/>
+            <a:endParaRPr lang="en-US" sz="1320" dirty="0"/>
           </a:p>
         </p:txBody>
       </p:sp>
@@ -3595,13 +3604,16 @@
           <a:ln/>
         </p:spPr>
         <p:txBody>
-          <a:bodyPr wrap="square" lIns="254" tIns="254" rIns="254" bIns="254" rtlCol="0" anchor="t">
+          <a:bodyPr wrap="square" lIns="508" tIns="508" rIns="508" bIns="508" rtlCol="0" anchor="t">
             <a:normAutofit/>
           </a:bodyPr>
           <a:lstStyle/>
           <a:p>
-            <a:r>
-              <a:rPr lang="en-US" sz="1380" dirty="0">
+            <a:pPr indent="0" marL="0">
+              <a:buNone/>
+            </a:pPr>
+            <a:r>
+              <a:rPr lang="en-US" sz="1220" dirty="0">
                 <a:solidFill>
                   <a:srgbClr val="17364A"/>
                 </a:solidFill>
@@ -3611,11 +3623,14 @@
               </a:rPr>
               <a:t>Risks and failure modes include the following:</a:t>
             </a:r>
-            <a:endParaRPr lang="en-US" sz="1380" dirty="0"/>
-          </a:p>
-          <a:p>
-            <a:r>
-              <a:rPr lang="en-US" sz="1380" dirty="0">
+            <a:endParaRPr lang="en-US" sz="1220" dirty="0"/>
+          </a:p>
+          <a:p>
+            <a:pPr indent="0" marL="0">
+              <a:buNone/>
+            </a:pPr>
+            <a:r>
+              <a:rPr lang="en-US" sz="1220" dirty="0">
                 <a:solidFill>
                   <a:srgbClr val="17364A"/>
                 </a:solidFill>
@@ -3623,13 +3638,16 @@
                 <a:ea typeface="Aptos" pitchFamily="34" charset="-122"/>
                 <a:cs typeface="Aptos" pitchFamily="34" charset="-120"/>
               </a:rPr>
-              <a:t>Pilots launching without governance approval or operational ownership.</a:t>
-            </a:r>
-            <a:endParaRPr lang="en-US" sz="1380" dirty="0"/>
-          </a:p>
-          <a:p>
-            <a:r>
-              <a:rPr lang="en-US" sz="1380" dirty="0">
+              <a:t>Pilots launching without governance approval or operational.</a:t>
+            </a:r>
+            <a:endParaRPr lang="en-US" sz="1220" dirty="0"/>
+          </a:p>
+          <a:p>
+            <a:pPr indent="0" marL="0">
+              <a:buNone/>
+            </a:pPr>
+            <a:r>
+              <a:rPr lang="en-US" sz="1220" dirty="0">
                 <a:solidFill>
                   <a:srgbClr val="17364A"/>
                 </a:solidFill>
@@ -3637,9 +3655,9 @@
                 <a:ea typeface="Aptos" pitchFamily="34" charset="-122"/>
                 <a:cs typeface="Aptos" pitchFamily="34" charset="-120"/>
               </a:rPr>
-              <a:t>Project plans overlooking data, privacy, security, workflow, or training dependencies.</a:t>
-            </a:r>
-            <a:endParaRPr lang="en-US" sz="1380" dirty="0"/>
+              <a:t>Project plans overlooking data, privacy, security, workflow, or.</a:t>
+            </a:r>
+            <a:endParaRPr lang="en-US" sz="1220" dirty="0"/>
           </a:p>
         </p:txBody>
       </p:sp>
@@ -3717,17 +3735,17 @@
         </p:nvSpPr>
         <p:spPr>
           <a:xfrm>
-            <a:off x="7799832" y="5001768"/>
-            <a:ext cx="3145536" cy="502920"/>
-          </a:xfrm>
-          <a:prstGeom prst="rect">
-            <a:avLst/>
-          </a:prstGeom>
-          <a:noFill/>
-          <a:ln/>
-        </p:spPr>
-        <p:txBody>
-          <a:bodyPr wrap="square" lIns="0" tIns="0" rIns="0" bIns="0" rtlCol="0" anchor="t">
+            <a:off x="7799832" y="4974336"/>
+            <a:ext cx="3145536" cy="576072"/>
+          </a:xfrm>
+          <a:prstGeom prst="rect">
+            <a:avLst/>
+          </a:prstGeom>
+          <a:noFill/>
+          <a:ln/>
+        </p:spPr>
+        <p:txBody>
+          <a:bodyPr wrap="square" lIns="254" tIns="254" rIns="254" bIns="254" rtlCol="0" anchor="t">
             <a:normAutofit/>
           </a:bodyPr>
           <a:lstStyle/>
@@ -3736,7 +3754,7 @@
               <a:buNone/>
             </a:pPr>
             <a:r>
-              <a:rPr lang="en-US" sz="1550" dirty="0">
+              <a:rPr lang="en-US" sz="1320" dirty="0">
                 <a:solidFill>
                   <a:srgbClr val="17364A"/>
                 </a:solidFill>
@@ -3744,9 +3762,9 @@
                 <a:ea typeface="Aptos" pitchFamily="34" charset="-122"/>
                 <a:cs typeface="Aptos" pitchFamily="34" charset="-120"/>
               </a:rPr>
-              <a:t>Identify what could go wrong, who could be affected, what safeguards are needed, and what evidence should be reviewed before use expands.</a:t>
-            </a:r>
-            <a:endParaRPr lang="en-US" sz="1550" dirty="0"/>
+              <a:t>Identify what could go wrong, who could be affected, what safeguards are needed, and what evidence should be reviewed.</a:t>
+            </a:r>
+            <a:endParaRPr lang="en-US" sz="1320" dirty="0"/>
           </a:p>
         </p:txBody>
       </p:sp>
@@ -4047,49 +4065,58 @@
           <a:ln/>
         </p:spPr>
         <p:txBody>
-          <a:bodyPr wrap="square" lIns="635" tIns="635" rIns="635" bIns="635" rtlCol="0" anchor="t">
+          <a:bodyPr wrap="square" lIns="1016" tIns="1016" rIns="1016" bIns="1016" rtlCol="0" anchor="t">
             <a:normAutofit/>
           </a:bodyPr>
           <a:lstStyle/>
           <a:p>
+            <a:pPr indent="0" marL="0">
+              <a:buNone/>
+            </a:pPr>
             <a:r>
               <a:rPr lang="en-US" sz="2100" dirty="0">
                 <a:solidFill>
-                  <a:srgbClr val="17364A"/>
-                </a:solidFill>
-                <a:latin typeface="Aptos" pitchFamily="34" charset="0"/>
-                <a:ea typeface="Aptos" pitchFamily="34" charset="-122"/>
-                <a:cs typeface="Aptos" pitchFamily="34" charset="-120"/>
-              </a:rPr>
-              <a:t>Vendors controlling implementation timelines without agency readiness gates.</a:t>
+                  <a:srgbClr val="003A63"/>
+                </a:solidFill>
+                <a:latin typeface="Aptos" pitchFamily="34" charset="0"/>
+                <a:ea typeface="Aptos" pitchFamily="34" charset="-122"/>
+                <a:cs typeface="Aptos" pitchFamily="34" charset="-120"/>
+              </a:rPr>
+              <a:t>• Vendors controlling implementation timelines without agency readiness gates.</a:t>
             </a:r>
             <a:endParaRPr lang="en-US" sz="2100" dirty="0"/>
           </a:p>
           <a:p>
+            <a:pPr indent="0" marL="0">
+              <a:buNone/>
+            </a:pPr>
             <a:r>
               <a:rPr lang="en-US" sz="2100" dirty="0">
                 <a:solidFill>
-                  <a:srgbClr val="17364A"/>
-                </a:solidFill>
-                <a:latin typeface="Aptos" pitchFamily="34" charset="0"/>
-                <a:ea typeface="Aptos" pitchFamily="34" charset="-122"/>
-                <a:cs typeface="Aptos" pitchFamily="34" charset="-120"/>
-              </a:rPr>
-              <a:t>No transition plan from pilot to routine operations.</a:t>
+                  <a:srgbClr val="003A63"/>
+                </a:solidFill>
+                <a:latin typeface="Aptos" pitchFamily="34" charset="0"/>
+                <a:ea typeface="Aptos" pitchFamily="34" charset="-122"/>
+                <a:cs typeface="Aptos" pitchFamily="34" charset="-120"/>
+              </a:rPr>
+              <a:t>• No transition plan from pilot to routine operations.</a:t>
             </a:r>
             <a:endParaRPr lang="en-US" sz="2100" dirty="0"/>
           </a:p>
           <a:p>
+            <a:pPr indent="0" marL="0">
+              <a:buNone/>
+            </a:pPr>
             <a:r>
               <a:rPr lang="en-US" sz="2100" dirty="0">
                 <a:solidFill>
-                  <a:srgbClr val="17364A"/>
-                </a:solidFill>
-                <a:latin typeface="Aptos" pitchFamily="34" charset="0"/>
-                <a:ea typeface="Aptos" pitchFamily="34" charset="-122"/>
-                <a:cs typeface="Aptos" pitchFamily="34" charset="-120"/>
-              </a:rPr>
-              <a:t>Success measured only by deployment rather than public health value and safe use.</a:t>
+                  <a:srgbClr val="003A63"/>
+                </a:solidFill>
+                <a:latin typeface="Aptos" pitchFamily="34" charset="0"/>
+                <a:ea typeface="Aptos" pitchFamily="34" charset="-122"/>
+                <a:cs typeface="Aptos" pitchFamily="34" charset="-120"/>
+              </a:rPr>
+              <a:t>• Success measured only by deployment rather than public health value and safe use.</a:t>
             </a:r>
             <a:endParaRPr lang="en-US" sz="2100" dirty="0"/>
           </a:p>
@@ -4169,17 +4196,17 @@
         </p:nvSpPr>
         <p:spPr>
           <a:xfrm>
-            <a:off x="7799832" y="1828800"/>
-            <a:ext cx="3145536" cy="685800"/>
-          </a:xfrm>
-          <a:prstGeom prst="rect">
-            <a:avLst/>
-          </a:prstGeom>
-          <a:noFill/>
-          <a:ln/>
-        </p:spPr>
-        <p:txBody>
-          <a:bodyPr wrap="square" lIns="0" tIns="0" rIns="0" bIns="0" rtlCol="0" anchor="t">
+            <a:off x="7799832" y="1801368"/>
+            <a:ext cx="3145536" cy="758952"/>
+          </a:xfrm>
+          <a:prstGeom prst="rect">
+            <a:avLst/>
+          </a:prstGeom>
+          <a:noFill/>
+          <a:ln/>
+        </p:spPr>
+        <p:txBody>
+          <a:bodyPr wrap="square" lIns="254" tIns="254" rIns="254" bIns="254" rtlCol="0" anchor="t">
             <a:normAutofit/>
           </a:bodyPr>
           <a:lstStyle/>
@@ -4188,7 +4215,7 @@
               <a:buNone/>
             </a:pPr>
             <a:r>
-              <a:rPr lang="en-US" sz="1550" dirty="0">
+              <a:rPr lang="en-US" sz="1320" dirty="0">
                 <a:solidFill>
                   <a:srgbClr val="17364A"/>
                 </a:solidFill>
@@ -4198,7 +4225,7 @@
               </a:rPr>
               <a:t>Vendors controlling implementation timelines without agency readiness gates.</a:t>
             </a:r>
-            <a:endParaRPr lang="en-US" sz="1550" dirty="0"/>
+            <a:endParaRPr lang="en-US" sz="1320" dirty="0"/>
           </a:p>
         </p:txBody>
       </p:sp>
@@ -4286,13 +4313,16 @@
           <a:ln/>
         </p:spPr>
         <p:txBody>
-          <a:bodyPr wrap="square" lIns="254" tIns="254" rIns="254" bIns="254" rtlCol="0" anchor="t">
+          <a:bodyPr wrap="square" lIns="508" tIns="508" rIns="508" bIns="508" rtlCol="0" anchor="t">
             <a:normAutofit/>
           </a:bodyPr>
           <a:lstStyle/>
           <a:p>
-            <a:r>
-              <a:rPr lang="en-US" sz="1380" dirty="0">
+            <a:pPr indent="0" marL="0">
+              <a:buNone/>
+            </a:pPr>
+            <a:r>
+              <a:rPr lang="en-US" sz="1220" dirty="0">
                 <a:solidFill>
                   <a:srgbClr val="17364A"/>
                 </a:solidFill>
@@ -4300,13 +4330,16 @@
                 <a:ea typeface="Aptos" pitchFamily="34" charset="-122"/>
                 <a:cs typeface="Aptos" pitchFamily="34" charset="-120"/>
               </a:rPr>
-              <a:t>Vendors controlling implementation timelines without agency readiness gates.</a:t>
-            </a:r>
-            <a:endParaRPr lang="en-US" sz="1380" dirty="0"/>
-          </a:p>
-          <a:p>
-            <a:r>
-              <a:rPr lang="en-US" sz="1380" dirty="0">
+              <a:t>Vendors controlling implementation timelines without agency.</a:t>
+            </a:r>
+            <a:endParaRPr lang="en-US" sz="1220" dirty="0"/>
+          </a:p>
+          <a:p>
+            <a:pPr indent="0" marL="0">
+              <a:buNone/>
+            </a:pPr>
+            <a:r>
+              <a:rPr lang="en-US" sz="1220" dirty="0">
                 <a:solidFill>
                   <a:srgbClr val="17364A"/>
                 </a:solidFill>
@@ -4316,11 +4349,14 @@
               </a:rPr>
               <a:t>No transition plan from pilot to routine operations.</a:t>
             </a:r>
-            <a:endParaRPr lang="en-US" sz="1380" dirty="0"/>
-          </a:p>
-          <a:p>
-            <a:r>
-              <a:rPr lang="en-US" sz="1380" dirty="0">
+            <a:endParaRPr lang="en-US" sz="1220" dirty="0"/>
+          </a:p>
+          <a:p>
+            <a:pPr indent="0" marL="0">
+              <a:buNone/>
+            </a:pPr>
+            <a:r>
+              <a:rPr lang="en-US" sz="1220" dirty="0">
                 <a:solidFill>
                   <a:srgbClr val="17364A"/>
                 </a:solidFill>
@@ -4328,9 +4364,9 @@
                 <a:ea typeface="Aptos" pitchFamily="34" charset="-122"/>
                 <a:cs typeface="Aptos" pitchFamily="34" charset="-120"/>
               </a:rPr>
-              <a:t>Success measured only by deployment rather than public health value and safe use.</a:t>
-            </a:r>
-            <a:endParaRPr lang="en-US" sz="1380" dirty="0"/>
+              <a:t>Success measured only by deployment rather than public health.</a:t>
+            </a:r>
+            <a:endParaRPr lang="en-US" sz="1220" dirty="0"/>
           </a:p>
         </p:txBody>
       </p:sp>
@@ -4408,17 +4444,17 @@
         </p:nvSpPr>
         <p:spPr>
           <a:xfrm>
-            <a:off x="7799832" y="5001768"/>
-            <a:ext cx="3145536" cy="502920"/>
-          </a:xfrm>
-          <a:prstGeom prst="rect">
-            <a:avLst/>
-          </a:prstGeom>
-          <a:noFill/>
-          <a:ln/>
-        </p:spPr>
-        <p:txBody>
-          <a:bodyPr wrap="square" lIns="0" tIns="0" rIns="0" bIns="0" rtlCol="0" anchor="t">
+            <a:off x="7799832" y="4974336"/>
+            <a:ext cx="3145536" cy="576072"/>
+          </a:xfrm>
+          <a:prstGeom prst="rect">
+            <a:avLst/>
+          </a:prstGeom>
+          <a:noFill/>
+          <a:ln/>
+        </p:spPr>
+        <p:txBody>
+          <a:bodyPr wrap="square" lIns="254" tIns="254" rIns="254" bIns="254" rtlCol="0" anchor="t">
             <a:normAutofit/>
           </a:bodyPr>
           <a:lstStyle/>
@@ -4427,7 +4463,7 @@
               <a:buNone/>
             </a:pPr>
             <a:r>
-              <a:rPr lang="en-US" sz="1550" dirty="0">
+              <a:rPr lang="en-US" sz="1320" dirty="0">
                 <a:solidFill>
                   <a:srgbClr val="17364A"/>
                 </a:solidFill>
@@ -4435,9 +4471,9 @@
                 <a:ea typeface="Aptos" pitchFamily="34" charset="-122"/>
                 <a:cs typeface="Aptos" pitchFamily="34" charset="-120"/>
               </a:rPr>
-              <a:t>Identify what could go wrong, who could be affected, what safeguards are needed, and what evidence should be reviewed before use expands.</a:t>
-            </a:r>
-            <a:endParaRPr lang="en-US" sz="1550" dirty="0"/>
+              <a:t>Identify what could go wrong, who could be affected, what safeguards are needed, and what evidence should be reviewed.</a:t>
+            </a:r>
+            <a:endParaRPr lang="en-US" sz="1320" dirty="0"/>
           </a:p>
         </p:txBody>
       </p:sp>
@@ -4738,49 +4774,58 @@
           <a:ln/>
         </p:spPr>
         <p:txBody>
-          <a:bodyPr wrap="square" lIns="635" tIns="635" rIns="635" bIns="635" rtlCol="0" anchor="t">
+          <a:bodyPr wrap="square" lIns="1016" tIns="1016" rIns="1016" bIns="1016" rtlCol="0" anchor="t">
             <a:normAutofit/>
           </a:bodyPr>
           <a:lstStyle/>
           <a:p>
+            <a:pPr indent="0" marL="0">
+              <a:buNone/>
+            </a:pPr>
             <a:r>
               <a:rPr lang="en-US" sz="2100" dirty="0">
                 <a:solidFill>
-                  <a:srgbClr val="17364A"/>
-                </a:solidFill>
-                <a:latin typeface="Aptos" pitchFamily="34" charset="0"/>
-                <a:ea typeface="Aptos" pitchFamily="34" charset="-122"/>
-                <a:cs typeface="Aptos" pitchFamily="34" charset="-120"/>
-              </a:rPr>
-              <a:t>Recommended guardrails include the following:</a:t>
+                  <a:srgbClr val="003A63"/>
+                </a:solidFill>
+                <a:latin typeface="Aptos" pitchFamily="34" charset="0"/>
+                <a:ea typeface="Aptos" pitchFamily="34" charset="-122"/>
+                <a:cs typeface="Aptos" pitchFamily="34" charset="-120"/>
+              </a:rPr>
+              <a:t>• Recommended guardrails include the following:</a:t>
             </a:r>
             <a:endParaRPr lang="en-US" sz="2100" dirty="0"/>
           </a:p>
           <a:p>
+            <a:pPr indent="0" marL="0">
+              <a:buNone/>
+            </a:pPr>
             <a:r>
               <a:rPr lang="en-US" sz="2100" dirty="0">
                 <a:solidFill>
-                  <a:srgbClr val="17364A"/>
-                </a:solidFill>
-                <a:latin typeface="Aptos" pitchFamily="34" charset="0"/>
-                <a:ea typeface="Aptos" pitchFamily="34" charset="-122"/>
-                <a:cs typeface="Aptos" pitchFamily="34" charset="-120"/>
-              </a:rPr>
-              <a:t>Use an AI-specific project charter and risk log.</a:t>
+                  <a:srgbClr val="003A63"/>
+                </a:solidFill>
+                <a:latin typeface="Aptos" pitchFamily="34" charset="0"/>
+                <a:ea typeface="Aptos" pitchFamily="34" charset="-122"/>
+                <a:cs typeface="Aptos" pitchFamily="34" charset="-120"/>
+              </a:rPr>
+              <a:t>• Use an AI-specific project charter and risk log.</a:t>
             </a:r>
             <a:endParaRPr lang="en-US" sz="2100" dirty="0"/>
           </a:p>
           <a:p>
+            <a:pPr indent="0" marL="0">
+              <a:buNone/>
+            </a:pPr>
             <a:r>
               <a:rPr lang="en-US" sz="2100" dirty="0">
                 <a:solidFill>
-                  <a:srgbClr val="17364A"/>
-                </a:solidFill>
-                <a:latin typeface="Aptos" pitchFamily="34" charset="0"/>
-                <a:ea typeface="Aptos" pitchFamily="34" charset="-122"/>
-                <a:cs typeface="Aptos" pitchFamily="34" charset="-120"/>
-              </a:rPr>
-              <a:t>Define governance gates before implementation begins.</a:t>
+                  <a:srgbClr val="003A63"/>
+                </a:solidFill>
+                <a:latin typeface="Aptos" pitchFamily="34" charset="0"/>
+                <a:ea typeface="Aptos" pitchFamily="34" charset="-122"/>
+                <a:cs typeface="Aptos" pitchFamily="34" charset="-120"/>
+              </a:rPr>
+              <a:t>• Define governance gates before implementation begins.</a:t>
             </a:r>
             <a:endParaRPr lang="en-US" sz="2100" dirty="0"/>
           </a:p>
@@ -4860,17 +4905,17 @@
         </p:nvSpPr>
         <p:spPr>
           <a:xfrm>
-            <a:off x="7799832" y="1828800"/>
-            <a:ext cx="3145536" cy="685800"/>
-          </a:xfrm>
-          <a:prstGeom prst="rect">
-            <a:avLst/>
-          </a:prstGeom>
-          <a:noFill/>
-          <a:ln/>
-        </p:spPr>
-        <p:txBody>
-          <a:bodyPr wrap="square" lIns="0" tIns="0" rIns="0" bIns="0" rtlCol="0" anchor="t">
+            <a:off x="7799832" y="1801368"/>
+            <a:ext cx="3145536" cy="758952"/>
+          </a:xfrm>
+          <a:prstGeom prst="rect">
+            <a:avLst/>
+          </a:prstGeom>
+          <a:noFill/>
+          <a:ln/>
+        </p:spPr>
+        <p:txBody>
+          <a:bodyPr wrap="square" lIns="254" tIns="254" rIns="254" bIns="254" rtlCol="0" anchor="t">
             <a:normAutofit/>
           </a:bodyPr>
           <a:lstStyle/>
@@ -4879,7 +4924,7 @@
               <a:buNone/>
             </a:pPr>
             <a:r>
-              <a:rPr lang="en-US" sz="1550" dirty="0">
+              <a:rPr lang="en-US" sz="1320" dirty="0">
                 <a:solidFill>
                   <a:srgbClr val="17364A"/>
                 </a:solidFill>
@@ -4889,7 +4934,7 @@
               </a:rPr>
               <a:t>Recommended guardrails include the following:</a:t>
             </a:r>
-            <a:endParaRPr lang="en-US" sz="1550" dirty="0"/>
+            <a:endParaRPr lang="en-US" sz="1320" dirty="0"/>
           </a:p>
         </p:txBody>
       </p:sp>
@@ -4977,13 +5022,16 @@
           <a:ln/>
         </p:spPr>
         <p:txBody>
-          <a:bodyPr wrap="square" lIns="254" tIns="254" rIns="254" bIns="254" rtlCol="0" anchor="t">
+          <a:bodyPr wrap="square" lIns="508" tIns="508" rIns="508" bIns="508" rtlCol="0" anchor="t">
             <a:normAutofit/>
           </a:bodyPr>
           <a:lstStyle/>
           <a:p>
-            <a:r>
-              <a:rPr lang="en-US" sz="1380" dirty="0">
+            <a:pPr indent="0" marL="0">
+              <a:buNone/>
+            </a:pPr>
+            <a:r>
+              <a:rPr lang="en-US" sz="1220" dirty="0">
                 <a:solidFill>
                   <a:srgbClr val="17364A"/>
                 </a:solidFill>
@@ -4993,11 +5041,14 @@
               </a:rPr>
               <a:t>Recommended guardrails include the following:</a:t>
             </a:r>
-            <a:endParaRPr lang="en-US" sz="1380" dirty="0"/>
-          </a:p>
-          <a:p>
-            <a:r>
-              <a:rPr lang="en-US" sz="1380" dirty="0">
+            <a:endParaRPr lang="en-US" sz="1220" dirty="0"/>
+          </a:p>
+          <a:p>
+            <a:pPr indent="0" marL="0">
+              <a:buNone/>
+            </a:pPr>
+            <a:r>
+              <a:rPr lang="en-US" sz="1220" dirty="0">
                 <a:solidFill>
                   <a:srgbClr val="17364A"/>
                 </a:solidFill>
@@ -5007,11 +5058,14 @@
               </a:rPr>
               <a:t>Use an AI-specific project charter and risk log.</a:t>
             </a:r>
-            <a:endParaRPr lang="en-US" sz="1380" dirty="0"/>
-          </a:p>
-          <a:p>
-            <a:r>
-              <a:rPr lang="en-US" sz="1380" dirty="0">
+            <a:endParaRPr lang="en-US" sz="1220" dirty="0"/>
+          </a:p>
+          <a:p>
+            <a:pPr indent="0" marL="0">
+              <a:buNone/>
+            </a:pPr>
+            <a:r>
+              <a:rPr lang="en-US" sz="1220" dirty="0">
                 <a:solidFill>
                   <a:srgbClr val="17364A"/>
                 </a:solidFill>
@@ -5021,7 +5075,7 @@
               </a:rPr>
               <a:t>Define governance gates before implementation begins.</a:t>
             </a:r>
-            <a:endParaRPr lang="en-US" sz="1380" dirty="0"/>
+            <a:endParaRPr lang="en-US" sz="1220" dirty="0"/>
           </a:p>
         </p:txBody>
       </p:sp>
@@ -5099,17 +5153,17 @@
         </p:nvSpPr>
         <p:spPr>
           <a:xfrm>
-            <a:off x="7799832" y="5001768"/>
-            <a:ext cx="3145536" cy="502920"/>
-          </a:xfrm>
-          <a:prstGeom prst="rect">
-            <a:avLst/>
-          </a:prstGeom>
-          <a:noFill/>
-          <a:ln/>
-        </p:spPr>
-        <p:txBody>
-          <a:bodyPr wrap="square" lIns="0" tIns="0" rIns="0" bIns="0" rtlCol="0" anchor="t">
+            <a:off x="7799832" y="4974336"/>
+            <a:ext cx="3145536" cy="576072"/>
+          </a:xfrm>
+          <a:prstGeom prst="rect">
+            <a:avLst/>
+          </a:prstGeom>
+          <a:noFill/>
+          <a:ln/>
+        </p:spPr>
+        <p:txBody>
+          <a:bodyPr wrap="square" lIns="254" tIns="254" rIns="254" bIns="254" rtlCol="0" anchor="t">
             <a:normAutofit/>
           </a:bodyPr>
           <a:lstStyle/>
@@ -5118,7 +5172,7 @@
               <a:buNone/>
             </a:pPr>
             <a:r>
-              <a:rPr lang="en-US" sz="1550" dirty="0">
+              <a:rPr lang="en-US" sz="1320" dirty="0">
                 <a:solidFill>
                   <a:srgbClr val="17364A"/>
                 </a:solidFill>
@@ -5126,9 +5180,9 @@
                 <a:ea typeface="Aptos" pitchFamily="34" charset="-122"/>
                 <a:cs typeface="Aptos" pitchFamily="34" charset="-120"/>
               </a:rPr>
-              <a:t>Identify what could go wrong, who could be affected, what safeguards are needed, and what evidence should be reviewed before use expands.</a:t>
-            </a:r>
-            <a:endParaRPr lang="en-US" sz="1550" dirty="0"/>
+              <a:t>Identify what could go wrong, who could be affected, what safeguards are needed, and what evidence should be reviewed.</a:t>
+            </a:r>
+            <a:endParaRPr lang="en-US" sz="1320" dirty="0"/>
           </a:p>
         </p:txBody>
       </p:sp>
@@ -5429,49 +5483,58 @@
           <a:ln/>
         </p:spPr>
         <p:txBody>
-          <a:bodyPr wrap="square" lIns="635" tIns="635" rIns="635" bIns="635" rtlCol="0" anchor="t">
+          <a:bodyPr wrap="square" lIns="1016" tIns="1016" rIns="1016" bIns="1016" rtlCol="0" anchor="t">
             <a:normAutofit/>
           </a:bodyPr>
           <a:lstStyle/>
           <a:p>
+            <a:pPr indent="0" marL="0">
+              <a:buNone/>
+            </a:pPr>
             <a:r>
               <a:rPr lang="en-US" sz="2100" dirty="0">
                 <a:solidFill>
-                  <a:srgbClr val="17364A"/>
-                </a:solidFill>
-                <a:latin typeface="Aptos" pitchFamily="34" charset="0"/>
-                <a:ea typeface="Aptos" pitchFamily="34" charset="-122"/>
-                <a:cs typeface="Aptos" pitchFamily="34" charset="-120"/>
-              </a:rPr>
-              <a:t>Create separate workstreams for data, technology, governance, workflow, training, validation, and.</a:t>
+                  <a:srgbClr val="003A63"/>
+                </a:solidFill>
+                <a:latin typeface="Aptos" pitchFamily="34" charset="0"/>
+                <a:ea typeface="Aptos" pitchFamily="34" charset="-122"/>
+                <a:cs typeface="Aptos" pitchFamily="34" charset="-120"/>
+              </a:rPr>
+              <a:t>• Create separate workstreams for data, technology, governance, workflow, training, validation,.</a:t>
             </a:r>
             <a:endParaRPr lang="en-US" sz="2100" dirty="0"/>
           </a:p>
           <a:p>
+            <a:pPr indent="0" marL="0">
+              <a:buNone/>
+            </a:pPr>
             <a:r>
               <a:rPr lang="en-US" sz="2100" dirty="0">
                 <a:solidFill>
-                  <a:srgbClr val="17364A"/>
-                </a:solidFill>
-                <a:latin typeface="Aptos" pitchFamily="34" charset="0"/>
-                <a:ea typeface="Aptos" pitchFamily="34" charset="-122"/>
-                <a:cs typeface="Aptos" pitchFamily="34" charset="-120"/>
-              </a:rPr>
-              <a:t>Require launch readiness review before deployment.</a:t>
+                  <a:srgbClr val="003A63"/>
+                </a:solidFill>
+                <a:latin typeface="Aptos" pitchFamily="34" charset="0"/>
+                <a:ea typeface="Aptos" pitchFamily="34" charset="-122"/>
+                <a:cs typeface="Aptos" pitchFamily="34" charset="-120"/>
+              </a:rPr>
+              <a:t>• Require launch readiness review before deployment.</a:t>
             </a:r>
             <a:endParaRPr lang="en-US" sz="2100" dirty="0"/>
           </a:p>
           <a:p>
+            <a:pPr indent="0" marL="0">
+              <a:buNone/>
+            </a:pPr>
             <a:r>
               <a:rPr lang="en-US" sz="2100" dirty="0">
                 <a:solidFill>
-                  <a:srgbClr val="17364A"/>
-                </a:solidFill>
-                <a:latin typeface="Aptos" pitchFamily="34" charset="0"/>
-                <a:ea typeface="Aptos" pitchFamily="34" charset="-122"/>
-                <a:cs typeface="Aptos" pitchFamily="34" charset="-120"/>
-              </a:rPr>
-              <a:t>Document transition to operations and sustainability responsibilities.</a:t>
+                  <a:srgbClr val="003A63"/>
+                </a:solidFill>
+                <a:latin typeface="Aptos" pitchFamily="34" charset="0"/>
+                <a:ea typeface="Aptos" pitchFamily="34" charset="-122"/>
+                <a:cs typeface="Aptos" pitchFamily="34" charset="-120"/>
+              </a:rPr>
+              <a:t>• Document transition to operations and sustainability responsibilities.</a:t>
             </a:r>
             <a:endParaRPr lang="en-US" sz="2100" dirty="0"/>
           </a:p>
@@ -5551,17 +5614,17 @@
         </p:nvSpPr>
         <p:spPr>
           <a:xfrm>
-            <a:off x="7799832" y="1828800"/>
-            <a:ext cx="3145536" cy="685800"/>
-          </a:xfrm>
-          <a:prstGeom prst="rect">
-            <a:avLst/>
-          </a:prstGeom>
-          <a:noFill/>
-          <a:ln/>
-        </p:spPr>
-        <p:txBody>
-          <a:bodyPr wrap="square" lIns="0" tIns="0" rIns="0" bIns="0" rtlCol="0" anchor="t">
+            <a:off x="7799832" y="1801368"/>
+            <a:ext cx="3145536" cy="758952"/>
+          </a:xfrm>
+          <a:prstGeom prst="rect">
+            <a:avLst/>
+          </a:prstGeom>
+          <a:noFill/>
+          <a:ln/>
+        </p:spPr>
+        <p:txBody>
+          <a:bodyPr wrap="square" lIns="254" tIns="254" rIns="254" bIns="254" rtlCol="0" anchor="t">
             <a:normAutofit/>
           </a:bodyPr>
           <a:lstStyle/>
@@ -5570,7 +5633,7 @@
               <a:buNone/>
             </a:pPr>
             <a:r>
-              <a:rPr lang="en-US" sz="1550" dirty="0">
+              <a:rPr lang="en-US" sz="1320" dirty="0">
                 <a:solidFill>
                   <a:srgbClr val="17364A"/>
                 </a:solidFill>
@@ -5580,7 +5643,7 @@
               </a:rPr>
               <a:t>Create separate workstreams for data, technology, governance, workflow, training, validation, and.</a:t>
             </a:r>
-            <a:endParaRPr lang="en-US" sz="1550" dirty="0"/>
+            <a:endParaRPr lang="en-US" sz="1320" dirty="0"/>
           </a:p>
         </p:txBody>
       </p:sp>
@@ -5668,13 +5731,16 @@
           <a:ln/>
         </p:spPr>
         <p:txBody>
-          <a:bodyPr wrap="square" lIns="254" tIns="254" rIns="254" bIns="254" rtlCol="0" anchor="t">
+          <a:bodyPr wrap="square" lIns="508" tIns="508" rIns="508" bIns="508" rtlCol="0" anchor="t">
             <a:normAutofit/>
           </a:bodyPr>
           <a:lstStyle/>
           <a:p>
-            <a:r>
-              <a:rPr lang="en-US" sz="1380" dirty="0">
+            <a:pPr indent="0" marL="0">
+              <a:buNone/>
+            </a:pPr>
+            <a:r>
+              <a:rPr lang="en-US" sz="1220" dirty="0">
                 <a:solidFill>
                   <a:srgbClr val="17364A"/>
                 </a:solidFill>
@@ -5682,13 +5748,16 @@
                 <a:ea typeface="Aptos" pitchFamily="34" charset="-122"/>
                 <a:cs typeface="Aptos" pitchFamily="34" charset="-120"/>
               </a:rPr>
-              <a:t>Create separate workstreams for data, technology, governance, workflow, training,.</a:t>
-            </a:r>
-            <a:endParaRPr lang="en-US" sz="1380" dirty="0"/>
-          </a:p>
-          <a:p>
-            <a:r>
-              <a:rPr lang="en-US" sz="1380" dirty="0">
+              <a:t>Create separate workstreams for data, technology, governance,.</a:t>
+            </a:r>
+            <a:endParaRPr lang="en-US" sz="1220" dirty="0"/>
+          </a:p>
+          <a:p>
+            <a:pPr indent="0" marL="0">
+              <a:buNone/>
+            </a:pPr>
+            <a:r>
+              <a:rPr lang="en-US" sz="1220" dirty="0">
                 <a:solidFill>
                   <a:srgbClr val="17364A"/>
                 </a:solidFill>
@@ -5698,11 +5767,14 @@
               </a:rPr>
               <a:t>Require launch readiness review before deployment.</a:t>
             </a:r>
-            <a:endParaRPr lang="en-US" sz="1380" dirty="0"/>
-          </a:p>
-          <a:p>
-            <a:r>
-              <a:rPr lang="en-US" sz="1380" dirty="0">
+            <a:endParaRPr lang="en-US" sz="1220" dirty="0"/>
+          </a:p>
+          <a:p>
+            <a:pPr indent="0" marL="0">
+              <a:buNone/>
+            </a:pPr>
+            <a:r>
+              <a:rPr lang="en-US" sz="1220" dirty="0">
                 <a:solidFill>
                   <a:srgbClr val="17364A"/>
                 </a:solidFill>
@@ -5710,9 +5782,9 @@
                 <a:ea typeface="Aptos" pitchFamily="34" charset="-122"/>
                 <a:cs typeface="Aptos" pitchFamily="34" charset="-120"/>
               </a:rPr>
-              <a:t>Document transition to operations and sustainability responsibilities.</a:t>
-            </a:r>
-            <a:endParaRPr lang="en-US" sz="1380" dirty="0"/>
+              <a:t>Document transition to operations and sustainability.</a:t>
+            </a:r>
+            <a:endParaRPr lang="en-US" sz="1220" dirty="0"/>
           </a:p>
         </p:txBody>
       </p:sp>
@@ -5790,17 +5862,17 @@
         </p:nvSpPr>
         <p:spPr>
           <a:xfrm>
-            <a:off x="7799832" y="5001768"/>
-            <a:ext cx="3145536" cy="502920"/>
-          </a:xfrm>
-          <a:prstGeom prst="rect">
-            <a:avLst/>
-          </a:prstGeom>
-          <a:noFill/>
-          <a:ln/>
-        </p:spPr>
-        <p:txBody>
-          <a:bodyPr wrap="square" lIns="0" tIns="0" rIns="0" bIns="0" rtlCol="0" anchor="t">
+            <a:off x="7799832" y="4974336"/>
+            <a:ext cx="3145536" cy="576072"/>
+          </a:xfrm>
+          <a:prstGeom prst="rect">
+            <a:avLst/>
+          </a:prstGeom>
+          <a:noFill/>
+          <a:ln/>
+        </p:spPr>
+        <p:txBody>
+          <a:bodyPr wrap="square" lIns="254" tIns="254" rIns="254" bIns="254" rtlCol="0" anchor="t">
             <a:normAutofit/>
           </a:bodyPr>
           <a:lstStyle/>
@@ -5809,7 +5881,7 @@
               <a:buNone/>
             </a:pPr>
             <a:r>
-              <a:rPr lang="en-US" sz="1550" dirty="0">
+              <a:rPr lang="en-US" sz="1320" dirty="0">
                 <a:solidFill>
                   <a:srgbClr val="17364A"/>
                 </a:solidFill>
@@ -5817,9 +5889,9 @@
                 <a:ea typeface="Aptos" pitchFamily="34" charset="-122"/>
                 <a:cs typeface="Aptos" pitchFamily="34" charset="-120"/>
               </a:rPr>
-              <a:t>Identify what could go wrong, who could be affected, what safeguards are needed, and what evidence should be reviewed before use expands.</a:t>
-            </a:r>
-            <a:endParaRPr lang="en-US" sz="1550" dirty="0"/>
+              <a:t>Identify what could go wrong, who could be affected, what safeguards are needed, and what evidence should be reviewed.</a:t>
+            </a:r>
+            <a:endParaRPr lang="en-US" sz="1320" dirty="0"/>
           </a:p>
         </p:txBody>
       </p:sp>
@@ -6120,49 +6192,58 @@
           <a:ln/>
         </p:spPr>
         <p:txBody>
-          <a:bodyPr wrap="square" lIns="635" tIns="635" rIns="635" bIns="635" rtlCol="0" anchor="t">
+          <a:bodyPr wrap="square" lIns="1016" tIns="1016" rIns="1016" bIns="1016" rtlCol="0" anchor="t">
             <a:normAutofit/>
           </a:bodyPr>
           <a:lstStyle/>
           <a:p>
+            <a:pPr indent="0" marL="0">
+              <a:buNone/>
+            </a:pPr>
             <a:r>
               <a:rPr lang="en-US" sz="2100" dirty="0">
                 <a:solidFill>
-                  <a:srgbClr val="17364A"/>
-                </a:solidFill>
-                <a:latin typeface="Aptos" pitchFamily="34" charset="0"/>
-                <a:ea typeface="Aptos" pitchFamily="34" charset="-122"/>
-                <a:cs typeface="Aptos" pitchFamily="34" charset="-120"/>
-              </a:rPr>
-              <a:t>Where does this topic appear in your agency, program, or workflow?</a:t>
+                  <a:srgbClr val="003A63"/>
+                </a:solidFill>
+                <a:latin typeface="Aptos" pitchFamily="34" charset="0"/>
+                <a:ea typeface="Aptos" pitchFamily="34" charset="-122"/>
+                <a:cs typeface="Aptos" pitchFamily="34" charset="-120"/>
+              </a:rPr>
+              <a:t>• Where does this topic appear in your agency, program, or workflow?</a:t>
             </a:r>
             <a:endParaRPr lang="en-US" sz="2100" dirty="0"/>
           </a:p>
           <a:p>
+            <a:pPr indent="0" marL="0">
+              <a:buNone/>
+            </a:pPr>
             <a:r>
               <a:rPr lang="en-US" sz="2100" dirty="0">
                 <a:solidFill>
-                  <a:srgbClr val="17364A"/>
-                </a:solidFill>
-                <a:latin typeface="Aptos" pitchFamily="34" charset="0"/>
-                <a:ea typeface="Aptos" pitchFamily="34" charset="-122"/>
-                <a:cs typeface="Aptos" pitchFamily="34" charset="-120"/>
-              </a:rPr>
-              <a:t>Which staff roles would need to understand or apply this concept before AI use is approved?</a:t>
+                  <a:srgbClr val="003A63"/>
+                </a:solidFill>
+                <a:latin typeface="Aptos" pitchFamily="34" charset="0"/>
+                <a:ea typeface="Aptos" pitchFamily="34" charset="-122"/>
+                <a:cs typeface="Aptos" pitchFamily="34" charset="-120"/>
+              </a:rPr>
+              <a:t>• Which staff roles would need to understand or apply this concept before AI use is approved?</a:t>
             </a:r>
             <a:endParaRPr lang="en-US" sz="2100" dirty="0"/>
           </a:p>
           <a:p>
+            <a:pPr indent="0" marL="0">
+              <a:buNone/>
+            </a:pPr>
             <a:r>
               <a:rPr lang="en-US" sz="2100" dirty="0">
                 <a:solidFill>
-                  <a:srgbClr val="17364A"/>
-                </a:solidFill>
-                <a:latin typeface="Aptos" pitchFamily="34" charset="0"/>
-                <a:ea typeface="Aptos" pitchFamily="34" charset="-122"/>
-                <a:cs typeface="Aptos" pitchFamily="34" charset="-120"/>
-              </a:rPr>
-              <a:t>What could go wrong if this topic is not addressed before implementation?</a:t>
+                  <a:srgbClr val="003A63"/>
+                </a:solidFill>
+                <a:latin typeface="Aptos" pitchFamily="34" charset="0"/>
+                <a:ea typeface="Aptos" pitchFamily="34" charset="-122"/>
+                <a:cs typeface="Aptos" pitchFamily="34" charset="-120"/>
+              </a:rPr>
+              <a:t>• What could go wrong if this topic is not addressed before implementation?</a:t>
             </a:r>
             <a:endParaRPr lang="en-US" sz="2100" dirty="0"/>
           </a:p>
@@ -6242,17 +6323,17 @@
         </p:nvSpPr>
         <p:spPr>
           <a:xfrm>
-            <a:off x="7799832" y="1828800"/>
-            <a:ext cx="3145536" cy="685800"/>
-          </a:xfrm>
-          <a:prstGeom prst="rect">
-            <a:avLst/>
-          </a:prstGeom>
-          <a:noFill/>
-          <a:ln/>
-        </p:spPr>
-        <p:txBody>
-          <a:bodyPr wrap="square" lIns="0" tIns="0" rIns="0" bIns="0" rtlCol="0" anchor="t">
+            <a:off x="7799832" y="1801368"/>
+            <a:ext cx="3145536" cy="758952"/>
+          </a:xfrm>
+          <a:prstGeom prst="rect">
+            <a:avLst/>
+          </a:prstGeom>
+          <a:noFill/>
+          <a:ln/>
+        </p:spPr>
+        <p:txBody>
+          <a:bodyPr wrap="square" lIns="254" tIns="254" rIns="254" bIns="254" rtlCol="0" anchor="t">
             <a:normAutofit/>
           </a:bodyPr>
           <a:lstStyle/>
@@ -6261,7 +6342,7 @@
               <a:buNone/>
             </a:pPr>
             <a:r>
-              <a:rPr lang="en-US" sz="1550" dirty="0">
+              <a:rPr lang="en-US" sz="1320" dirty="0">
                 <a:solidFill>
                   <a:srgbClr val="17364A"/>
                 </a:solidFill>
@@ -6271,7 +6352,7 @@
               </a:rPr>
               <a:t>Where does this topic appear in your agency, program, or workflow?</a:t>
             </a:r>
-            <a:endParaRPr lang="en-US" sz="1550" dirty="0"/>
+            <a:endParaRPr lang="en-US" sz="1320" dirty="0"/>
           </a:p>
         </p:txBody>
       </p:sp>
@@ -6359,13 +6440,16 @@
           <a:ln/>
         </p:spPr>
         <p:txBody>
-          <a:bodyPr wrap="square" lIns="254" tIns="254" rIns="254" bIns="254" rtlCol="0" anchor="t">
+          <a:bodyPr wrap="square" lIns="508" tIns="508" rIns="508" bIns="508" rtlCol="0" anchor="t">
             <a:normAutofit/>
           </a:bodyPr>
           <a:lstStyle/>
           <a:p>
-            <a:r>
-              <a:rPr lang="en-US" sz="1380" dirty="0">
+            <a:pPr indent="0" marL="0">
+              <a:buNone/>
+            </a:pPr>
+            <a:r>
+              <a:rPr lang="en-US" sz="1220" dirty="0">
                 <a:solidFill>
                   <a:srgbClr val="17364A"/>
                 </a:solidFill>
@@ -6375,11 +6459,14 @@
               </a:rPr>
               <a:t>Where does this topic appear in your agency, program, or workflow?</a:t>
             </a:r>
-            <a:endParaRPr lang="en-US" sz="1380" dirty="0"/>
-          </a:p>
-          <a:p>
-            <a:r>
-              <a:rPr lang="en-US" sz="1380" dirty="0">
+            <a:endParaRPr lang="en-US" sz="1220" dirty="0"/>
+          </a:p>
+          <a:p>
+            <a:pPr indent="0" marL="0">
+              <a:buNone/>
+            </a:pPr>
+            <a:r>
+              <a:rPr lang="en-US" sz="1220" dirty="0">
                 <a:solidFill>
                   <a:srgbClr val="17364A"/>
                 </a:solidFill>
@@ -6387,13 +6474,16 @@
                 <a:ea typeface="Aptos" pitchFamily="34" charset="-122"/>
                 <a:cs typeface="Aptos" pitchFamily="34" charset="-120"/>
               </a:rPr>
-              <a:t>Which staff roles would need to understand or apply this concept before AI use is approved?</a:t>
-            </a:r>
-            <a:endParaRPr lang="en-US" sz="1380" dirty="0"/>
-          </a:p>
-          <a:p>
-            <a:r>
-              <a:rPr lang="en-US" sz="1380" dirty="0">
+              <a:t>Which staff roles would need to understand or apply this concept.</a:t>
+            </a:r>
+            <a:endParaRPr lang="en-US" sz="1220" dirty="0"/>
+          </a:p>
+          <a:p>
+            <a:pPr indent="0" marL="0">
+              <a:buNone/>
+            </a:pPr>
+            <a:r>
+              <a:rPr lang="en-US" sz="1220" dirty="0">
                 <a:solidFill>
                   <a:srgbClr val="17364A"/>
                 </a:solidFill>
@@ -6401,9 +6491,9 @@
                 <a:ea typeface="Aptos" pitchFamily="34" charset="-122"/>
                 <a:cs typeface="Aptos" pitchFamily="34" charset="-120"/>
               </a:rPr>
-              <a:t>What could go wrong if this topic is not addressed before implementation?</a:t>
-            </a:r>
-            <a:endParaRPr lang="en-US" sz="1380" dirty="0"/>
+              <a:t>What could go wrong if this topic is not addressed before.</a:t>
+            </a:r>
+            <a:endParaRPr lang="en-US" sz="1220" dirty="0"/>
           </a:p>
         </p:txBody>
       </p:sp>
@@ -6481,17 +6571,17 @@
         </p:nvSpPr>
         <p:spPr>
           <a:xfrm>
-            <a:off x="7799832" y="5001768"/>
-            <a:ext cx="3145536" cy="502920"/>
-          </a:xfrm>
-          <a:prstGeom prst="rect">
-            <a:avLst/>
-          </a:prstGeom>
-          <a:noFill/>
-          <a:ln/>
-        </p:spPr>
-        <p:txBody>
-          <a:bodyPr wrap="square" lIns="0" tIns="0" rIns="0" bIns="0" rtlCol="0" anchor="t">
+            <a:off x="7799832" y="4974336"/>
+            <a:ext cx="3145536" cy="576072"/>
+          </a:xfrm>
+          <a:prstGeom prst="rect">
+            <a:avLst/>
+          </a:prstGeom>
+          <a:noFill/>
+          <a:ln/>
+        </p:spPr>
+        <p:txBody>
+          <a:bodyPr wrap="square" lIns="254" tIns="254" rIns="254" bIns="254" rtlCol="0" anchor="t">
             <a:normAutofit/>
           </a:bodyPr>
           <a:lstStyle/>
@@ -6500,7 +6590,7 @@
               <a:buNone/>
             </a:pPr>
             <a:r>
-              <a:rPr lang="en-US" sz="1550" dirty="0">
+              <a:rPr lang="en-US" sz="1320" dirty="0">
                 <a:solidFill>
                   <a:srgbClr val="17364A"/>
                 </a:solidFill>
@@ -6508,9 +6598,9 @@
                 <a:ea typeface="Aptos" pitchFamily="34" charset="-122"/>
                 <a:cs typeface="Aptos" pitchFamily="34" charset="-120"/>
               </a:rPr>
-              <a:t>Use the concept to clarify workflow changes, dependencies, staffing, procurement requirements, training needs, and implementation checkpoints.</a:t>
-            </a:r>
-            <a:endParaRPr lang="en-US" sz="1550" dirty="0"/>
+              <a:t>Use the concept to clarify workflow changes, dependencies, staffing, procurement requirements, training needs, and.</a:t>
+            </a:r>
+            <a:endParaRPr lang="en-US" sz="1320" dirty="0"/>
           </a:p>
         </p:txBody>
       </p:sp>
@@ -6811,35 +6901,41 @@
           <a:ln/>
         </p:spPr>
         <p:txBody>
-          <a:bodyPr wrap="square" lIns="635" tIns="635" rIns="635" bIns="635" rtlCol="0" anchor="t">
+          <a:bodyPr wrap="square" lIns="1016" tIns="1016" rIns="1016" bIns="1016" rtlCol="0" anchor="t">
             <a:normAutofit/>
           </a:bodyPr>
           <a:lstStyle/>
           <a:p>
+            <a:pPr indent="0" marL="0">
+              <a:buNone/>
+            </a:pPr>
             <a:r>
               <a:rPr lang="en-US" sz="2100" dirty="0">
                 <a:solidFill>
-                  <a:srgbClr val="17364A"/>
-                </a:solidFill>
-                <a:latin typeface="Aptos" pitchFamily="34" charset="0"/>
-                <a:ea typeface="Aptos" pitchFamily="34" charset="-122"/>
-                <a:cs typeface="Aptos" pitchFamily="34" charset="-120"/>
-              </a:rPr>
-              <a:t>What evidence would governance, leadership, or operations staff need before moving forward?</a:t>
+                  <a:srgbClr val="003A63"/>
+                </a:solidFill>
+                <a:latin typeface="Aptos" pitchFamily="34" charset="0"/>
+                <a:ea typeface="Aptos" pitchFamily="34" charset="-122"/>
+                <a:cs typeface="Aptos" pitchFamily="34" charset="-120"/>
+              </a:rPr>
+              <a:t>• What evidence would governance, leadership, or operations staff need before moving forward?</a:t>
             </a:r>
             <a:endParaRPr lang="en-US" sz="2100" dirty="0"/>
           </a:p>
           <a:p>
+            <a:pPr indent="0" marL="0">
+              <a:buNone/>
+            </a:pPr>
             <a:r>
               <a:rPr lang="en-US" sz="2100" dirty="0">
                 <a:solidFill>
-                  <a:srgbClr val="17364A"/>
-                </a:solidFill>
-                <a:latin typeface="Aptos" pitchFamily="34" charset="0"/>
-                <a:ea typeface="Aptos" pitchFamily="34" charset="-122"/>
-                <a:cs typeface="Aptos" pitchFamily="34" charset="-120"/>
-              </a:rPr>
-              <a:t>Which policy, data, equity, privacy, security, or workflow questions remain unresolved?</a:t>
+                  <a:srgbClr val="003A63"/>
+                </a:solidFill>
+                <a:latin typeface="Aptos" pitchFamily="34" charset="0"/>
+                <a:ea typeface="Aptos" pitchFamily="34" charset="-122"/>
+                <a:cs typeface="Aptos" pitchFamily="34" charset="-120"/>
+              </a:rPr>
+              <a:t>• Which policy, data, equity, privacy, security, or workflow questions remain unresolved?</a:t>
             </a:r>
             <a:endParaRPr lang="en-US" sz="2100" dirty="0"/>
           </a:p>
@@ -6919,17 +7015,17 @@
         </p:nvSpPr>
         <p:spPr>
           <a:xfrm>
-            <a:off x="7799832" y="1828800"/>
-            <a:ext cx="3145536" cy="685800"/>
-          </a:xfrm>
-          <a:prstGeom prst="rect">
-            <a:avLst/>
-          </a:prstGeom>
-          <a:noFill/>
-          <a:ln/>
-        </p:spPr>
-        <p:txBody>
-          <a:bodyPr wrap="square" lIns="0" tIns="0" rIns="0" bIns="0" rtlCol="0" anchor="t">
+            <a:off x="7799832" y="1801368"/>
+            <a:ext cx="3145536" cy="758952"/>
+          </a:xfrm>
+          <a:prstGeom prst="rect">
+            <a:avLst/>
+          </a:prstGeom>
+          <a:noFill/>
+          <a:ln/>
+        </p:spPr>
+        <p:txBody>
+          <a:bodyPr wrap="square" lIns="254" tIns="254" rIns="254" bIns="254" rtlCol="0" anchor="t">
             <a:normAutofit/>
           </a:bodyPr>
           <a:lstStyle/>
@@ -6938,7 +7034,7 @@
               <a:buNone/>
             </a:pPr>
             <a:r>
-              <a:rPr lang="en-US" sz="1550" dirty="0">
+              <a:rPr lang="en-US" sz="1320" dirty="0">
                 <a:solidFill>
                   <a:srgbClr val="17364A"/>
                 </a:solidFill>
@@ -6948,7 +7044,7 @@
               </a:rPr>
               <a:t>What evidence would governance, leadership, or operations staff need before moving forward?</a:t>
             </a:r>
-            <a:endParaRPr lang="en-US" sz="1550" dirty="0"/>
+            <a:endParaRPr lang="en-US" sz="1320" dirty="0"/>
           </a:p>
         </p:txBody>
       </p:sp>
@@ -7036,13 +7132,16 @@
           <a:ln/>
         </p:spPr>
         <p:txBody>
-          <a:bodyPr wrap="square" lIns="254" tIns="254" rIns="254" bIns="254" rtlCol="0" anchor="t">
+          <a:bodyPr wrap="square" lIns="508" tIns="508" rIns="508" bIns="508" rtlCol="0" anchor="t">
             <a:normAutofit/>
           </a:bodyPr>
           <a:lstStyle/>
           <a:p>
-            <a:r>
-              <a:rPr lang="en-US" sz="1380" dirty="0">
+            <a:pPr indent="0" marL="0">
+              <a:buNone/>
+            </a:pPr>
+            <a:r>
+              <a:rPr lang="en-US" sz="1220" dirty="0">
                 <a:solidFill>
                   <a:srgbClr val="17364A"/>
                 </a:solidFill>
@@ -7050,13 +7149,16 @@
                 <a:ea typeface="Aptos" pitchFamily="34" charset="-122"/>
                 <a:cs typeface="Aptos" pitchFamily="34" charset="-120"/>
               </a:rPr>
-              <a:t>What evidence would governance, leadership, or operations staff need before moving forward?</a:t>
-            </a:r>
-            <a:endParaRPr lang="en-US" sz="1380" dirty="0"/>
-          </a:p>
-          <a:p>
-            <a:r>
-              <a:rPr lang="en-US" sz="1380" dirty="0">
+              <a:t>What evidence would governance, leadership, or operations staff.</a:t>
+            </a:r>
+            <a:endParaRPr lang="en-US" sz="1220" dirty="0"/>
+          </a:p>
+          <a:p>
+            <a:pPr indent="0" marL="0">
+              <a:buNone/>
+            </a:pPr>
+            <a:r>
+              <a:rPr lang="en-US" sz="1220" dirty="0">
                 <a:solidFill>
                   <a:srgbClr val="17364A"/>
                 </a:solidFill>
@@ -7064,9 +7166,9 @@
                 <a:ea typeface="Aptos" pitchFamily="34" charset="-122"/>
                 <a:cs typeface="Aptos" pitchFamily="34" charset="-120"/>
               </a:rPr>
-              <a:t>Which policy, data, equity, privacy, security, or workflow questions remain unresolved?</a:t>
-            </a:r>
-            <a:endParaRPr lang="en-US" sz="1380" dirty="0"/>
+              <a:t>Which policy, data, equity, privacy, security, or workflow.</a:t>
+            </a:r>
+            <a:endParaRPr lang="en-US" sz="1220" dirty="0"/>
           </a:p>
         </p:txBody>
       </p:sp>
@@ -7144,17 +7246,17 @@
         </p:nvSpPr>
         <p:spPr>
           <a:xfrm>
-            <a:off x="7799832" y="5001768"/>
-            <a:ext cx="3145536" cy="502920"/>
-          </a:xfrm>
-          <a:prstGeom prst="rect">
-            <a:avLst/>
-          </a:prstGeom>
-          <a:noFill/>
-          <a:ln/>
-        </p:spPr>
-        <p:txBody>
-          <a:bodyPr wrap="square" lIns="0" tIns="0" rIns="0" bIns="0" rtlCol="0" anchor="t">
+            <a:off x="7799832" y="4974336"/>
+            <a:ext cx="3145536" cy="576072"/>
+          </a:xfrm>
+          <a:prstGeom prst="rect">
+            <a:avLst/>
+          </a:prstGeom>
+          <a:noFill/>
+          <a:ln/>
+        </p:spPr>
+        <p:txBody>
+          <a:bodyPr wrap="square" lIns="254" tIns="254" rIns="254" bIns="254" rtlCol="0" anchor="t">
             <a:normAutofit/>
           </a:bodyPr>
           <a:lstStyle/>
@@ -7163,7 +7265,7 @@
               <a:buNone/>
             </a:pPr>
             <a:r>
-              <a:rPr lang="en-US" sz="1550" dirty="0">
+              <a:rPr lang="en-US" sz="1320" dirty="0">
                 <a:solidFill>
                   <a:srgbClr val="17364A"/>
                 </a:solidFill>
@@ -7171,9 +7273,9 @@
                 <a:ea typeface="Aptos" pitchFamily="34" charset="-122"/>
                 <a:cs typeface="Aptos" pitchFamily="34" charset="-120"/>
               </a:rPr>
-              <a:t>Use the concept to clarify workflow changes, dependencies, staffing, procurement requirements, training needs, and implementation checkpoints.</a:t>
-            </a:r>
-            <a:endParaRPr lang="en-US" sz="1550" dirty="0"/>
+              <a:t>Use the concept to clarify workflow changes, dependencies, staffing, procurement requirements, training needs, and.</a:t>
+            </a:r>
+            <a:endParaRPr lang="en-US" sz="1320" dirty="0"/>
           </a:p>
         </p:txBody>
       </p:sp>
@@ -7474,35 +7576,41 @@
           <a:ln/>
         </p:spPr>
         <p:txBody>
-          <a:bodyPr wrap="square" lIns="635" tIns="635" rIns="635" bIns="635" rtlCol="0" anchor="t">
+          <a:bodyPr wrap="square" lIns="1016" tIns="1016" rIns="1016" bIns="1016" rtlCol="0" anchor="t">
             <a:normAutofit/>
           </a:bodyPr>
           <a:lstStyle/>
           <a:p>
+            <a:pPr indent="0" marL="0">
+              <a:buNone/>
+            </a:pPr>
             <a:r>
               <a:rPr lang="en-US" sz="2100" dirty="0">
                 <a:solidFill>
-                  <a:srgbClr val="17364A"/>
-                </a:solidFill>
-                <a:latin typeface="Aptos" pitchFamily="34" charset="0"/>
-                <a:ea typeface="Aptos" pitchFamily="34" charset="-122"/>
-                <a:cs typeface="Aptos" pitchFamily="34" charset="-120"/>
-              </a:rPr>
-              <a:t>Create an AI project charter and implementation plan for one proposed AI-supported public health.</a:t>
+                  <a:srgbClr val="003A63"/>
+                </a:solidFill>
+                <a:latin typeface="Aptos" pitchFamily="34" charset="0"/>
+                <a:ea typeface="Aptos" pitchFamily="34" charset="-122"/>
+                <a:cs typeface="Aptos" pitchFamily="34" charset="-120"/>
+              </a:rPr>
+              <a:t>• Create an AI project charter and implementation plan for one proposed AI-supported public.</a:t>
             </a:r>
             <a:endParaRPr lang="en-US" sz="2100" dirty="0"/>
           </a:p>
           <a:p>
+            <a:pPr indent="0" marL="0">
+              <a:buNone/>
+            </a:pPr>
             <a:r>
               <a:rPr lang="en-US" sz="2100" dirty="0">
                 <a:solidFill>
-                  <a:srgbClr val="17364A"/>
-                </a:solidFill>
-                <a:latin typeface="Aptos" pitchFamily="34" charset="0"/>
-                <a:ea typeface="Aptos" pitchFamily="34" charset="-122"/>
-                <a:cs typeface="Aptos" pitchFamily="34" charset="-120"/>
-              </a:rPr>
-              <a:t>Include project purpose, scope, objectives, roles, governance gates, milestones, workstreams,.</a:t>
+                  <a:srgbClr val="003A63"/>
+                </a:solidFill>
+                <a:latin typeface="Aptos" pitchFamily="34" charset="0"/>
+                <a:ea typeface="Aptos" pitchFamily="34" charset="-122"/>
+                <a:cs typeface="Aptos" pitchFamily="34" charset="-120"/>
+              </a:rPr>
+              <a:t>• Include project purpose, scope, objectives, roles, governance gates, milestones, workstreams,.</a:t>
             </a:r>
             <a:endParaRPr lang="en-US" sz="2100" dirty="0"/>
           </a:p>
@@ -7582,17 +7690,17 @@
         </p:nvSpPr>
         <p:spPr>
           <a:xfrm>
-            <a:off x="7799832" y="1828800"/>
-            <a:ext cx="3145536" cy="685800"/>
-          </a:xfrm>
-          <a:prstGeom prst="rect">
-            <a:avLst/>
-          </a:prstGeom>
-          <a:noFill/>
-          <a:ln/>
-        </p:spPr>
-        <p:txBody>
-          <a:bodyPr wrap="square" lIns="0" tIns="0" rIns="0" bIns="0" rtlCol="0" anchor="t">
+            <a:off x="7799832" y="1801368"/>
+            <a:ext cx="3145536" cy="758952"/>
+          </a:xfrm>
+          <a:prstGeom prst="rect">
+            <a:avLst/>
+          </a:prstGeom>
+          <a:noFill/>
+          <a:ln/>
+        </p:spPr>
+        <p:txBody>
+          <a:bodyPr wrap="square" lIns="254" tIns="254" rIns="254" bIns="254" rtlCol="0" anchor="t">
             <a:normAutofit/>
           </a:bodyPr>
           <a:lstStyle/>
@@ -7601,7 +7709,7 @@
               <a:buNone/>
             </a:pPr>
             <a:r>
-              <a:rPr lang="en-US" sz="1550" dirty="0">
+              <a:rPr lang="en-US" sz="1320" dirty="0">
                 <a:solidFill>
                   <a:srgbClr val="17364A"/>
                 </a:solidFill>
@@ -7611,7 +7719,7 @@
               </a:rPr>
               <a:t>Create an AI project charter and implementation plan for one proposed AI-supported public health.</a:t>
             </a:r>
-            <a:endParaRPr lang="en-US" sz="1550" dirty="0"/>
+            <a:endParaRPr lang="en-US" sz="1320" dirty="0"/>
           </a:p>
         </p:txBody>
       </p:sp>
@@ -7699,13 +7807,16 @@
           <a:ln/>
         </p:spPr>
         <p:txBody>
-          <a:bodyPr wrap="square" lIns="254" tIns="254" rIns="254" bIns="254" rtlCol="0" anchor="t">
+          <a:bodyPr wrap="square" lIns="508" tIns="508" rIns="508" bIns="508" rtlCol="0" anchor="t">
             <a:normAutofit/>
           </a:bodyPr>
           <a:lstStyle/>
           <a:p>
-            <a:r>
-              <a:rPr lang="en-US" sz="1380" dirty="0">
+            <a:pPr indent="0" marL="0">
+              <a:buNone/>
+            </a:pPr>
+            <a:r>
+              <a:rPr lang="en-US" sz="1220" dirty="0">
                 <a:solidFill>
                   <a:srgbClr val="17364A"/>
                 </a:solidFill>
@@ -7713,13 +7824,16 @@
                 <a:ea typeface="Aptos" pitchFamily="34" charset="-122"/>
                 <a:cs typeface="Aptos" pitchFamily="34" charset="-120"/>
               </a:rPr>
-              <a:t>Create an AI project charter and implementation plan for one proposed AI-supported public.</a:t>
-            </a:r>
-            <a:endParaRPr lang="en-US" sz="1380" dirty="0"/>
-          </a:p>
-          <a:p>
-            <a:r>
-              <a:rPr lang="en-US" sz="1380" dirty="0">
+              <a:t>Create an AI project charter and implementation plan for one.</a:t>
+            </a:r>
+            <a:endParaRPr lang="en-US" sz="1220" dirty="0"/>
+          </a:p>
+          <a:p>
+            <a:pPr indent="0" marL="0">
+              <a:buNone/>
+            </a:pPr>
+            <a:r>
+              <a:rPr lang="en-US" sz="1220" dirty="0">
                 <a:solidFill>
                   <a:srgbClr val="17364A"/>
                 </a:solidFill>
@@ -7727,9 +7841,9 @@
                 <a:ea typeface="Aptos" pitchFamily="34" charset="-122"/>
                 <a:cs typeface="Aptos" pitchFamily="34" charset="-120"/>
               </a:rPr>
-              <a:t>Include project purpose, scope, objectives, roles, governance gates, milestones,.</a:t>
-            </a:r>
-            <a:endParaRPr lang="en-US" sz="1380" dirty="0"/>
+              <a:t>Include project purpose, scope, objectives, roles, governance.</a:t>
+            </a:r>
+            <a:endParaRPr lang="en-US" sz="1220" dirty="0"/>
           </a:p>
         </p:txBody>
       </p:sp>
@@ -7807,17 +7921,17 @@
         </p:nvSpPr>
         <p:spPr>
           <a:xfrm>
-            <a:off x="7799832" y="5001768"/>
-            <a:ext cx="3145536" cy="502920"/>
-          </a:xfrm>
-          <a:prstGeom prst="rect">
-            <a:avLst/>
-          </a:prstGeom>
-          <a:noFill/>
-          <a:ln/>
-        </p:spPr>
-        <p:txBody>
-          <a:bodyPr wrap="square" lIns="0" tIns="0" rIns="0" bIns="0" rtlCol="0" anchor="t">
+            <a:off x="7799832" y="4974336"/>
+            <a:ext cx="3145536" cy="576072"/>
+          </a:xfrm>
+          <a:prstGeom prst="rect">
+            <a:avLst/>
+          </a:prstGeom>
+          <a:noFill/>
+          <a:ln/>
+        </p:spPr>
+        <p:txBody>
+          <a:bodyPr wrap="square" lIns="254" tIns="254" rIns="254" bIns="254" rtlCol="0" anchor="t">
             <a:normAutofit/>
           </a:bodyPr>
           <a:lstStyle/>
@@ -7826,7 +7940,7 @@
               <a:buNone/>
             </a:pPr>
             <a:r>
-              <a:rPr lang="en-US" sz="1550" dirty="0">
+              <a:rPr lang="en-US" sz="1320" dirty="0">
                 <a:solidFill>
                   <a:srgbClr val="17364A"/>
                 </a:solidFill>
@@ -7834,9 +7948,9 @@
                 <a:ea typeface="Aptos" pitchFamily="34" charset="-122"/>
                 <a:cs typeface="Aptos" pitchFamily="34" charset="-120"/>
               </a:rPr>
-              <a:t>Use the assignment to test whether you can explain the concept, apply it to a realistic public health situation, and identify what would need review before the work moves forward.</a:t>
-            </a:r>
-            <a:endParaRPr lang="en-US" sz="1550" dirty="0"/>
+              <a:t>Use the assignment to test whether you can explain the concept, apply it to a realistic public health situation, and.</a:t>
+            </a:r>
+            <a:endParaRPr lang="en-US" sz="1320" dirty="0"/>
           </a:p>
         </p:txBody>
       </p:sp>
@@ -8137,49 +8251,58 @@
           <a:ln/>
         </p:spPr>
         <p:txBody>
-          <a:bodyPr wrap="square" lIns="635" tIns="635" rIns="635" bIns="635" rtlCol="0" anchor="t">
+          <a:bodyPr wrap="square" lIns="1016" tIns="1016" rIns="1016" bIns="1016" rtlCol="0" anchor="t">
             <a:normAutofit/>
           </a:bodyPr>
           <a:lstStyle/>
           <a:p>
+            <a:pPr indent="0" marL="0">
+              <a:buNone/>
+            </a:pPr>
             <a:r>
               <a:rPr lang="en-US" sz="2100" dirty="0">
                 <a:solidFill>
-                  <a:srgbClr val="17364A"/>
-                </a:solidFill>
-                <a:latin typeface="Aptos" pitchFamily="34" charset="0"/>
-                <a:ea typeface="Aptos" pitchFamily="34" charset="-122"/>
-                <a:cs typeface="Aptos" pitchFamily="34" charset="-120"/>
-              </a:rPr>
-              <a:t>AI project charter</a:t>
+                  <a:srgbClr val="003A63"/>
+                </a:solidFill>
+                <a:latin typeface="Aptos" pitchFamily="34" charset="0"/>
+                <a:ea typeface="Aptos" pitchFamily="34" charset="-122"/>
+                <a:cs typeface="Aptos" pitchFamily="34" charset="-120"/>
+              </a:rPr>
+              <a:t>• AI project charter</a:t>
             </a:r>
             <a:endParaRPr lang="en-US" sz="2100" dirty="0"/>
           </a:p>
           <a:p>
+            <a:pPr indent="0" marL="0">
+              <a:buNone/>
+            </a:pPr>
             <a:r>
               <a:rPr lang="en-US" sz="2100" dirty="0">
                 <a:solidFill>
-                  <a:srgbClr val="17364A"/>
-                </a:solidFill>
-                <a:latin typeface="Aptos" pitchFamily="34" charset="0"/>
-                <a:ea typeface="Aptos" pitchFamily="34" charset="-122"/>
-                <a:cs typeface="Aptos" pitchFamily="34" charset="-120"/>
-              </a:rPr>
-              <a:t>Implementation workplan</a:t>
+                  <a:srgbClr val="003A63"/>
+                </a:solidFill>
+                <a:latin typeface="Aptos" pitchFamily="34" charset="0"/>
+                <a:ea typeface="Aptos" pitchFamily="34" charset="-122"/>
+                <a:cs typeface="Aptos" pitchFamily="34" charset="-120"/>
+              </a:rPr>
+              <a:t>• Implementation workplan</a:t>
             </a:r>
             <a:endParaRPr lang="en-US" sz="2100" dirty="0"/>
           </a:p>
           <a:p>
+            <a:pPr indent="0" marL="0">
+              <a:buNone/>
+            </a:pPr>
             <a:r>
               <a:rPr lang="en-US" sz="2100" dirty="0">
                 <a:solidFill>
-                  <a:srgbClr val="17364A"/>
-                </a:solidFill>
-                <a:latin typeface="Aptos" pitchFamily="34" charset="0"/>
-                <a:ea typeface="Aptos" pitchFamily="34" charset="-122"/>
-                <a:cs typeface="Aptos" pitchFamily="34" charset="-120"/>
-              </a:rPr>
-              <a:t>AI-specific risk log</a:t>
+                  <a:srgbClr val="003A63"/>
+                </a:solidFill>
+                <a:latin typeface="Aptos" pitchFamily="34" charset="0"/>
+                <a:ea typeface="Aptos" pitchFamily="34" charset="-122"/>
+                <a:cs typeface="Aptos" pitchFamily="34" charset="-120"/>
+              </a:rPr>
+              <a:t>• AI-specific risk log</a:t>
             </a:r>
             <a:endParaRPr lang="en-US" sz="2100" dirty="0"/>
           </a:p>
@@ -8259,17 +8382,17 @@
         </p:nvSpPr>
         <p:spPr>
           <a:xfrm>
-            <a:off x="7799832" y="1828800"/>
-            <a:ext cx="3145536" cy="685800"/>
-          </a:xfrm>
-          <a:prstGeom prst="rect">
-            <a:avLst/>
-          </a:prstGeom>
-          <a:noFill/>
-          <a:ln/>
-        </p:spPr>
-        <p:txBody>
-          <a:bodyPr wrap="square" lIns="0" tIns="0" rIns="0" bIns="0" rtlCol="0" anchor="t">
+            <a:off x="7799832" y="1801368"/>
+            <a:ext cx="3145536" cy="758952"/>
+          </a:xfrm>
+          <a:prstGeom prst="rect">
+            <a:avLst/>
+          </a:prstGeom>
+          <a:noFill/>
+          <a:ln/>
+        </p:spPr>
+        <p:txBody>
+          <a:bodyPr wrap="square" lIns="254" tIns="254" rIns="254" bIns="254" rtlCol="0" anchor="t">
             <a:normAutofit/>
           </a:bodyPr>
           <a:lstStyle/>
@@ -8278,7 +8401,7 @@
               <a:buNone/>
             </a:pPr>
             <a:r>
-              <a:rPr lang="en-US" sz="1550" dirty="0">
+              <a:rPr lang="en-US" sz="1320" dirty="0">
                 <a:solidFill>
                   <a:srgbClr val="17364A"/>
                 </a:solidFill>
@@ -8288,7 +8411,7 @@
               </a:rPr>
               <a:t>AI project charter</a:t>
             </a:r>
-            <a:endParaRPr lang="en-US" sz="1550" dirty="0"/>
+            <a:endParaRPr lang="en-US" sz="1320" dirty="0"/>
           </a:p>
         </p:txBody>
       </p:sp>
@@ -8376,13 +8499,16 @@
           <a:ln/>
         </p:spPr>
         <p:txBody>
-          <a:bodyPr wrap="square" lIns="254" tIns="254" rIns="254" bIns="254" rtlCol="0" anchor="t">
+          <a:bodyPr wrap="square" lIns="508" tIns="508" rIns="508" bIns="508" rtlCol="0" anchor="t">
             <a:normAutofit/>
           </a:bodyPr>
           <a:lstStyle/>
           <a:p>
-            <a:r>
-              <a:rPr lang="en-US" sz="1380" dirty="0">
+            <a:pPr indent="0" marL="0">
+              <a:buNone/>
+            </a:pPr>
+            <a:r>
+              <a:rPr lang="en-US" sz="1220" dirty="0">
                 <a:solidFill>
                   <a:srgbClr val="17364A"/>
                 </a:solidFill>
@@ -8392,11 +8518,14 @@
               </a:rPr>
               <a:t>AI project charter</a:t>
             </a:r>
-            <a:endParaRPr lang="en-US" sz="1380" dirty="0"/>
-          </a:p>
-          <a:p>
-            <a:r>
-              <a:rPr lang="en-US" sz="1380" dirty="0">
+            <a:endParaRPr lang="en-US" sz="1220" dirty="0"/>
+          </a:p>
+          <a:p>
+            <a:pPr indent="0" marL="0">
+              <a:buNone/>
+            </a:pPr>
+            <a:r>
+              <a:rPr lang="en-US" sz="1220" dirty="0">
                 <a:solidFill>
                   <a:srgbClr val="17364A"/>
                 </a:solidFill>
@@ -8406,11 +8535,14 @@
               </a:rPr>
               <a:t>Implementation workplan</a:t>
             </a:r>
-            <a:endParaRPr lang="en-US" sz="1380" dirty="0"/>
-          </a:p>
-          <a:p>
-            <a:r>
-              <a:rPr lang="en-US" sz="1380" dirty="0">
+            <a:endParaRPr lang="en-US" sz="1220" dirty="0"/>
+          </a:p>
+          <a:p>
+            <a:pPr indent="0" marL="0">
+              <a:buNone/>
+            </a:pPr>
+            <a:r>
+              <a:rPr lang="en-US" sz="1220" dirty="0">
                 <a:solidFill>
                   <a:srgbClr val="17364A"/>
                 </a:solidFill>
@@ -8420,7 +8552,7 @@
               </a:rPr>
               <a:t>AI-specific risk log</a:t>
             </a:r>
-            <a:endParaRPr lang="en-US" sz="1380" dirty="0"/>
+            <a:endParaRPr lang="en-US" sz="1220" dirty="0"/>
           </a:p>
         </p:txBody>
       </p:sp>
@@ -8498,17 +8630,17 @@
         </p:nvSpPr>
         <p:spPr>
           <a:xfrm>
-            <a:off x="7799832" y="5001768"/>
-            <a:ext cx="3145536" cy="502920"/>
-          </a:xfrm>
-          <a:prstGeom prst="rect">
-            <a:avLst/>
-          </a:prstGeom>
-          <a:noFill/>
-          <a:ln/>
-        </p:spPr>
-        <p:txBody>
-          <a:bodyPr wrap="square" lIns="0" tIns="0" rIns="0" bIns="0" rtlCol="0" anchor="t">
+            <a:off x="7799832" y="4974336"/>
+            <a:ext cx="3145536" cy="576072"/>
+          </a:xfrm>
+          <a:prstGeom prst="rect">
+            <a:avLst/>
+          </a:prstGeom>
+          <a:noFill/>
+          <a:ln/>
+        </p:spPr>
+        <p:txBody>
+          <a:bodyPr wrap="square" lIns="254" tIns="254" rIns="254" bIns="254" rtlCol="0" anchor="t">
             <a:normAutofit/>
           </a:bodyPr>
           <a:lstStyle/>
@@ -8517,7 +8649,7 @@
               <a:buNone/>
             </a:pPr>
             <a:r>
-              <a:rPr lang="en-US" sz="1550" dirty="0">
+              <a:rPr lang="en-US" sz="1320" dirty="0">
                 <a:solidFill>
                   <a:srgbClr val="17364A"/>
                 </a:solidFill>
@@ -8525,9 +8657,9 @@
                 <a:ea typeface="Aptos" pitchFamily="34" charset="-122"/>
                 <a:cs typeface="Aptos" pitchFamily="34" charset="-120"/>
               </a:rPr>
-              <a:t>Use the concept to clarify workflow changes, dependencies, staffing, procurement requirements, training needs, and implementation checkpoints.</a:t>
-            </a:r>
-            <a:endParaRPr lang="en-US" sz="1550" dirty="0"/>
+              <a:t>Use the concept to clarify workflow changes, dependencies, staffing, procurement requirements, training needs, and.</a:t>
+            </a:r>
+            <a:endParaRPr lang="en-US" sz="1320" dirty="0"/>
           </a:p>
         </p:txBody>
       </p:sp>
@@ -8828,35 +8960,41 @@
           <a:ln/>
         </p:spPr>
         <p:txBody>
-          <a:bodyPr wrap="square" lIns="635" tIns="635" rIns="635" bIns="635" rtlCol="0" anchor="t">
+          <a:bodyPr wrap="square" lIns="1016" tIns="1016" rIns="1016" bIns="1016" rtlCol="0" anchor="t">
             <a:normAutofit/>
           </a:bodyPr>
           <a:lstStyle/>
           <a:p>
+            <a:pPr indent="0" marL="0">
+              <a:buNone/>
+            </a:pPr>
             <a:r>
               <a:rPr lang="en-US" sz="2100" dirty="0">
                 <a:solidFill>
-                  <a:srgbClr val="17364A"/>
-                </a:solidFill>
-                <a:latin typeface="Aptos" pitchFamily="34" charset="0"/>
-                <a:ea typeface="Aptos" pitchFamily="34" charset="-122"/>
-                <a:cs typeface="Aptos" pitchFamily="34" charset="-120"/>
-              </a:rPr>
-              <a:t>Launch readiness checklist</a:t>
+                  <a:srgbClr val="003A63"/>
+                </a:solidFill>
+                <a:latin typeface="Aptos" pitchFamily="34" charset="0"/>
+                <a:ea typeface="Aptos" pitchFamily="34" charset="-122"/>
+                <a:cs typeface="Aptos" pitchFamily="34" charset="-120"/>
+              </a:rPr>
+              <a:t>• Launch readiness checklist</a:t>
             </a:r>
             <a:endParaRPr lang="en-US" sz="2100" dirty="0"/>
           </a:p>
           <a:p>
+            <a:pPr indent="0" marL="0">
+              <a:buNone/>
+            </a:pPr>
             <a:r>
               <a:rPr lang="en-US" sz="2100" dirty="0">
                 <a:solidFill>
-                  <a:srgbClr val="17364A"/>
-                </a:solidFill>
-                <a:latin typeface="Aptos" pitchFamily="34" charset="0"/>
-                <a:ea typeface="Aptos" pitchFamily="34" charset="-122"/>
-                <a:cs typeface="Aptos" pitchFamily="34" charset="-120"/>
-              </a:rPr>
-              <a:t>Transition-to-operations plan</a:t>
+                  <a:srgbClr val="003A63"/>
+                </a:solidFill>
+                <a:latin typeface="Aptos" pitchFamily="34" charset="0"/>
+                <a:ea typeface="Aptos" pitchFamily="34" charset="-122"/>
+                <a:cs typeface="Aptos" pitchFamily="34" charset="-120"/>
+              </a:rPr>
+              <a:t>• Transition-to-operations plan</a:t>
             </a:r>
             <a:endParaRPr lang="en-US" sz="2100" dirty="0"/>
           </a:p>
@@ -8936,17 +9074,17 @@
         </p:nvSpPr>
         <p:spPr>
           <a:xfrm>
-            <a:off x="7799832" y="1828800"/>
-            <a:ext cx="3145536" cy="685800"/>
-          </a:xfrm>
-          <a:prstGeom prst="rect">
-            <a:avLst/>
-          </a:prstGeom>
-          <a:noFill/>
-          <a:ln/>
-        </p:spPr>
-        <p:txBody>
-          <a:bodyPr wrap="square" lIns="0" tIns="0" rIns="0" bIns="0" rtlCol="0" anchor="t">
+            <a:off x="7799832" y="1801368"/>
+            <a:ext cx="3145536" cy="758952"/>
+          </a:xfrm>
+          <a:prstGeom prst="rect">
+            <a:avLst/>
+          </a:prstGeom>
+          <a:noFill/>
+          <a:ln/>
+        </p:spPr>
+        <p:txBody>
+          <a:bodyPr wrap="square" lIns="254" tIns="254" rIns="254" bIns="254" rtlCol="0" anchor="t">
             <a:normAutofit/>
           </a:bodyPr>
           <a:lstStyle/>
@@ -8955,7 +9093,7 @@
               <a:buNone/>
             </a:pPr>
             <a:r>
-              <a:rPr lang="en-US" sz="1550" dirty="0">
+              <a:rPr lang="en-US" sz="1320" dirty="0">
                 <a:solidFill>
                   <a:srgbClr val="17364A"/>
                 </a:solidFill>
@@ -8965,7 +9103,7 @@
               </a:rPr>
               <a:t>Launch readiness checklist</a:t>
             </a:r>
-            <a:endParaRPr lang="en-US" sz="1550" dirty="0"/>
+            <a:endParaRPr lang="en-US" sz="1320" dirty="0"/>
           </a:p>
         </p:txBody>
       </p:sp>
@@ -9053,13 +9191,16 @@
           <a:ln/>
         </p:spPr>
         <p:txBody>
-          <a:bodyPr wrap="square" lIns="254" tIns="254" rIns="254" bIns="254" rtlCol="0" anchor="t">
+          <a:bodyPr wrap="square" lIns="508" tIns="508" rIns="508" bIns="508" rtlCol="0" anchor="t">
             <a:normAutofit/>
           </a:bodyPr>
           <a:lstStyle/>
           <a:p>
-            <a:r>
-              <a:rPr lang="en-US" sz="1380" dirty="0">
+            <a:pPr indent="0" marL="0">
+              <a:buNone/>
+            </a:pPr>
+            <a:r>
+              <a:rPr lang="en-US" sz="1220" dirty="0">
                 <a:solidFill>
                   <a:srgbClr val="17364A"/>
                 </a:solidFill>
@@ -9069,11 +9210,14 @@
               </a:rPr>
               <a:t>Launch readiness checklist</a:t>
             </a:r>
-            <a:endParaRPr lang="en-US" sz="1380" dirty="0"/>
-          </a:p>
-          <a:p>
-            <a:r>
-              <a:rPr lang="en-US" sz="1380" dirty="0">
+            <a:endParaRPr lang="en-US" sz="1220" dirty="0"/>
+          </a:p>
+          <a:p>
+            <a:pPr indent="0" marL="0">
+              <a:buNone/>
+            </a:pPr>
+            <a:r>
+              <a:rPr lang="en-US" sz="1220" dirty="0">
                 <a:solidFill>
                   <a:srgbClr val="17364A"/>
                 </a:solidFill>
@@ -9083,7 +9227,7 @@
               </a:rPr>
               <a:t>Transition-to-operations plan</a:t>
             </a:r>
-            <a:endParaRPr lang="en-US" sz="1380" dirty="0"/>
+            <a:endParaRPr lang="en-US" sz="1220" dirty="0"/>
           </a:p>
         </p:txBody>
       </p:sp>
@@ -9161,17 +9305,17 @@
         </p:nvSpPr>
         <p:spPr>
           <a:xfrm>
-            <a:off x="7799832" y="5001768"/>
-            <a:ext cx="3145536" cy="502920"/>
-          </a:xfrm>
-          <a:prstGeom prst="rect">
-            <a:avLst/>
-          </a:prstGeom>
-          <a:noFill/>
-          <a:ln/>
-        </p:spPr>
-        <p:txBody>
-          <a:bodyPr wrap="square" lIns="0" tIns="0" rIns="0" bIns="0" rtlCol="0" anchor="t">
+            <a:off x="7799832" y="4974336"/>
+            <a:ext cx="3145536" cy="576072"/>
+          </a:xfrm>
+          <a:prstGeom prst="rect">
+            <a:avLst/>
+          </a:prstGeom>
+          <a:noFill/>
+          <a:ln/>
+        </p:spPr>
+        <p:txBody>
+          <a:bodyPr wrap="square" lIns="254" tIns="254" rIns="254" bIns="254" rtlCol="0" anchor="t">
             <a:normAutofit/>
           </a:bodyPr>
           <a:lstStyle/>
@@ -9180,7 +9324,7 @@
               <a:buNone/>
             </a:pPr>
             <a:r>
-              <a:rPr lang="en-US" sz="1550" dirty="0">
+              <a:rPr lang="en-US" sz="1320" dirty="0">
                 <a:solidFill>
                   <a:srgbClr val="17364A"/>
                 </a:solidFill>
@@ -9188,9 +9332,9 @@
                 <a:ea typeface="Aptos" pitchFamily="34" charset="-122"/>
                 <a:cs typeface="Aptos" pitchFamily="34" charset="-120"/>
               </a:rPr>
-              <a:t>Use the concept to clarify workflow changes, dependencies, staffing, procurement requirements, training needs, and implementation checkpoints.</a:t>
-            </a:r>
-            <a:endParaRPr lang="en-US" sz="1550" dirty="0"/>
+              <a:t>Use the concept to clarify workflow changes, dependencies, staffing, procurement requirements, training needs, and.</a:t>
+            </a:r>
+            <a:endParaRPr lang="en-US" sz="1320" dirty="0"/>
           </a:p>
         </p:txBody>
       </p:sp>
@@ -9491,49 +9635,58 @@
           <a:ln/>
         </p:spPr>
         <p:txBody>
-          <a:bodyPr wrap="square" lIns="635" tIns="635" rIns="635" bIns="635" rtlCol="0" anchor="t">
+          <a:bodyPr wrap="square" lIns="1016" tIns="1016" rIns="1016" bIns="1016" rtlCol="0" anchor="t">
             <a:normAutofit/>
           </a:bodyPr>
           <a:lstStyle/>
           <a:p>
+            <a:pPr indent="0" marL="0">
+              <a:buNone/>
+            </a:pPr>
             <a:r>
               <a:rPr lang="en-US" sz="2100" dirty="0">
                 <a:solidFill>
-                  <a:srgbClr val="17364A"/>
-                </a:solidFill>
-                <a:latin typeface="Aptos" pitchFamily="34" charset="0"/>
-                <a:ea typeface="Aptos" pitchFamily="34" charset="-122"/>
-                <a:cs typeface="Aptos" pitchFamily="34" charset="-120"/>
-              </a:rPr>
-              <a:t>AI project charter</a:t>
+                  <a:srgbClr val="003A63"/>
+                </a:solidFill>
+                <a:latin typeface="Aptos" pitchFamily="34" charset="0"/>
+                <a:ea typeface="Aptos" pitchFamily="34" charset="-122"/>
+                <a:cs typeface="Aptos" pitchFamily="34" charset="-120"/>
+              </a:rPr>
+              <a:t>• AI project charter</a:t>
             </a:r>
             <a:endParaRPr lang="en-US" sz="2100" dirty="0"/>
           </a:p>
           <a:p>
+            <a:pPr indent="0" marL="0">
+              <a:buNone/>
+            </a:pPr>
             <a:r>
               <a:rPr lang="en-US" sz="2100" dirty="0">
                 <a:solidFill>
-                  <a:srgbClr val="17364A"/>
-                </a:solidFill>
-                <a:latin typeface="Aptos" pitchFamily="34" charset="0"/>
-                <a:ea typeface="Aptos" pitchFamily="34" charset="-122"/>
-                <a:cs typeface="Aptos" pitchFamily="34" charset="-120"/>
-              </a:rPr>
-              <a:t>Implementation workplan</a:t>
+                  <a:srgbClr val="003A63"/>
+                </a:solidFill>
+                <a:latin typeface="Aptos" pitchFamily="34" charset="0"/>
+                <a:ea typeface="Aptos" pitchFamily="34" charset="-122"/>
+                <a:cs typeface="Aptos" pitchFamily="34" charset="-120"/>
+              </a:rPr>
+              <a:t>• Implementation workplan</a:t>
             </a:r>
             <a:endParaRPr lang="en-US" sz="2100" dirty="0"/>
           </a:p>
           <a:p>
+            <a:pPr indent="0" marL="0">
+              <a:buNone/>
+            </a:pPr>
             <a:r>
               <a:rPr lang="en-US" sz="2100" dirty="0">
                 <a:solidFill>
-                  <a:srgbClr val="17364A"/>
-                </a:solidFill>
-                <a:latin typeface="Aptos" pitchFamily="34" charset="0"/>
-                <a:ea typeface="Aptos" pitchFamily="34" charset="-122"/>
-                <a:cs typeface="Aptos" pitchFamily="34" charset="-120"/>
-              </a:rPr>
-              <a:t>AI-specific risk log</a:t>
+                  <a:srgbClr val="003A63"/>
+                </a:solidFill>
+                <a:latin typeface="Aptos" pitchFamily="34" charset="0"/>
+                <a:ea typeface="Aptos" pitchFamily="34" charset="-122"/>
+                <a:cs typeface="Aptos" pitchFamily="34" charset="-120"/>
+              </a:rPr>
+              <a:t>• AI-specific risk log</a:t>
             </a:r>
             <a:endParaRPr lang="en-US" sz="2100" dirty="0"/>
           </a:p>
@@ -9613,17 +9766,17 @@
         </p:nvSpPr>
         <p:spPr>
           <a:xfrm>
-            <a:off x="7799832" y="1828800"/>
-            <a:ext cx="3145536" cy="685800"/>
-          </a:xfrm>
-          <a:prstGeom prst="rect">
-            <a:avLst/>
-          </a:prstGeom>
-          <a:noFill/>
-          <a:ln/>
-        </p:spPr>
-        <p:txBody>
-          <a:bodyPr wrap="square" lIns="0" tIns="0" rIns="0" bIns="0" rtlCol="0" anchor="t">
+            <a:off x="7799832" y="1801368"/>
+            <a:ext cx="3145536" cy="758952"/>
+          </a:xfrm>
+          <a:prstGeom prst="rect">
+            <a:avLst/>
+          </a:prstGeom>
+          <a:noFill/>
+          <a:ln/>
+        </p:spPr>
+        <p:txBody>
+          <a:bodyPr wrap="square" lIns="254" tIns="254" rIns="254" bIns="254" rtlCol="0" anchor="t">
             <a:normAutofit/>
           </a:bodyPr>
           <a:lstStyle/>
@@ -9632,7 +9785,7 @@
               <a:buNone/>
             </a:pPr>
             <a:r>
-              <a:rPr lang="en-US" sz="1550" dirty="0">
+              <a:rPr lang="en-US" sz="1320" dirty="0">
                 <a:solidFill>
                   <a:srgbClr val="17364A"/>
                 </a:solidFill>
@@ -9642,7 +9795,7 @@
               </a:rPr>
               <a:t>AI project charter</a:t>
             </a:r>
-            <a:endParaRPr lang="en-US" sz="1550" dirty="0"/>
+            <a:endParaRPr lang="en-US" sz="1320" dirty="0"/>
           </a:p>
         </p:txBody>
       </p:sp>
@@ -9730,13 +9883,16 @@
           <a:ln/>
         </p:spPr>
         <p:txBody>
-          <a:bodyPr wrap="square" lIns="254" tIns="254" rIns="254" bIns="254" rtlCol="0" anchor="t">
+          <a:bodyPr wrap="square" lIns="508" tIns="508" rIns="508" bIns="508" rtlCol="0" anchor="t">
             <a:normAutofit/>
           </a:bodyPr>
           <a:lstStyle/>
           <a:p>
-            <a:r>
-              <a:rPr lang="en-US" sz="1380" dirty="0">
+            <a:pPr indent="0" marL="0">
+              <a:buNone/>
+            </a:pPr>
+            <a:r>
+              <a:rPr lang="en-US" sz="1220" dirty="0">
                 <a:solidFill>
                   <a:srgbClr val="17364A"/>
                 </a:solidFill>
@@ -9746,11 +9902,14 @@
               </a:rPr>
               <a:t>Launch readiness checklist</a:t>
             </a:r>
-            <a:endParaRPr lang="en-US" sz="1380" dirty="0"/>
-          </a:p>
-          <a:p>
-            <a:r>
-              <a:rPr lang="en-US" sz="1380" dirty="0">
+            <a:endParaRPr lang="en-US" sz="1220" dirty="0"/>
+          </a:p>
+          <a:p>
+            <a:pPr indent="0" marL="0">
+              <a:buNone/>
+            </a:pPr>
+            <a:r>
+              <a:rPr lang="en-US" sz="1220" dirty="0">
                 <a:solidFill>
                   <a:srgbClr val="17364A"/>
                 </a:solidFill>
@@ -9760,7 +9919,7 @@
               </a:rPr>
               <a:t>Transition-to-operations plan</a:t>
             </a:r>
-            <a:endParaRPr lang="en-US" sz="1380" dirty="0"/>
+            <a:endParaRPr lang="en-US" sz="1220" dirty="0"/>
           </a:p>
         </p:txBody>
       </p:sp>
@@ -9838,17 +9997,17 @@
         </p:nvSpPr>
         <p:spPr>
           <a:xfrm>
-            <a:off x="7799832" y="5001768"/>
-            <a:ext cx="3145536" cy="502920"/>
-          </a:xfrm>
-          <a:prstGeom prst="rect">
-            <a:avLst/>
-          </a:prstGeom>
-          <a:noFill/>
-          <a:ln/>
-        </p:spPr>
-        <p:txBody>
-          <a:bodyPr wrap="square" lIns="0" tIns="0" rIns="0" bIns="0" rtlCol="0" anchor="t">
+            <a:off x="7799832" y="4974336"/>
+            <a:ext cx="3145536" cy="576072"/>
+          </a:xfrm>
+          <a:prstGeom prst="rect">
+            <a:avLst/>
+          </a:prstGeom>
+          <a:noFill/>
+          <a:ln/>
+        </p:spPr>
+        <p:txBody>
+          <a:bodyPr wrap="square" lIns="254" tIns="254" rIns="254" bIns="254" rtlCol="0" anchor="t">
             <a:normAutofit/>
           </a:bodyPr>
           <a:lstStyle/>
@@ -9857,7 +10016,7 @@
               <a:buNone/>
             </a:pPr>
             <a:r>
-              <a:rPr lang="en-US" sz="1550" dirty="0">
+              <a:rPr lang="en-US" sz="1320" dirty="0">
                 <a:solidFill>
                   <a:srgbClr val="17364A"/>
                 </a:solidFill>
@@ -9865,9 +10024,9 @@
                 <a:ea typeface="Aptos" pitchFamily="34" charset="-122"/>
                 <a:cs typeface="Aptos" pitchFamily="34" charset="-120"/>
               </a:rPr>
-              <a:t>Use the assignment to test whether you can explain the concept, apply it to a realistic public health situation, and identify what would need review before the work moves forward.</a:t>
-            </a:r>
-            <a:endParaRPr lang="en-US" sz="1550" dirty="0"/>
+              <a:t>Use the assignment to test whether you can explain the concept, apply it to a realistic public health situation, and.</a:t>
+            </a:r>
+            <a:endParaRPr lang="en-US" sz="1320" dirty="0"/>
           </a:p>
         </p:txBody>
       </p:sp>
@@ -10168,49 +10327,58 @@
           <a:ln/>
         </p:spPr>
         <p:txBody>
-          <a:bodyPr wrap="square" lIns="635" tIns="635" rIns="635" bIns="635" rtlCol="0" anchor="t">
+          <a:bodyPr wrap="square" lIns="1016" tIns="1016" rIns="1016" bIns="1016" rtlCol="0" anchor="t">
             <a:normAutofit/>
           </a:bodyPr>
           <a:lstStyle/>
           <a:p>
+            <a:pPr indent="0" marL="0">
+              <a:buNone/>
+            </a:pPr>
             <a:r>
               <a:rPr lang="en-US" sz="2100" dirty="0">
                 <a:solidFill>
-                  <a:srgbClr val="17364A"/>
-                </a:solidFill>
-                <a:latin typeface="Aptos" pitchFamily="34" charset="0"/>
-                <a:ea typeface="Aptos" pitchFamily="34" charset="-122"/>
-                <a:cs typeface="Aptos" pitchFamily="34" charset="-120"/>
-              </a:rPr>
-              <a:t>AI projects require disciplined implementation planning because they combine technology, data, governance,.</a:t>
+                  <a:srgbClr val="003A63"/>
+                </a:solidFill>
+                <a:latin typeface="Aptos" pitchFamily="34" charset="0"/>
+                <a:ea typeface="Aptos" pitchFamily="34" charset="-122"/>
+                <a:cs typeface="Aptos" pitchFamily="34" charset="-120"/>
+              </a:rPr>
+              <a:t>• AI projects require disciplined implementation planning because they combine technology, data,.</a:t>
             </a:r>
             <a:endParaRPr lang="en-US" sz="2100" dirty="0"/>
           </a:p>
           <a:p>
+            <a:pPr indent="0" marL="0">
+              <a:buNone/>
+            </a:pPr>
             <a:r>
               <a:rPr lang="en-US" sz="2100" dirty="0">
                 <a:solidFill>
-                  <a:srgbClr val="17364A"/>
-                </a:solidFill>
-                <a:latin typeface="Aptos" pitchFamily="34" charset="0"/>
-                <a:ea typeface="Aptos" pitchFamily="34" charset="-122"/>
-                <a:cs typeface="Aptos" pitchFamily="34" charset="-120"/>
-              </a:rPr>
-              <a:t>A project that appears small, such as adding an AI summarization tool, may still require data access decisions,.</a:t>
+                  <a:srgbClr val="003A63"/>
+                </a:solidFill>
+                <a:latin typeface="Aptos" pitchFamily="34" charset="0"/>
+                <a:ea typeface="Aptos" pitchFamily="34" charset="-122"/>
+                <a:cs typeface="Aptos" pitchFamily="34" charset="-120"/>
+              </a:rPr>
+              <a:t>• A project that appears small, such as adding an AI summarization tool, may still require data.</a:t>
             </a:r>
             <a:endParaRPr lang="en-US" sz="2100" dirty="0"/>
           </a:p>
           <a:p>
+            <a:pPr indent="0" marL="0">
+              <a:buNone/>
+            </a:pPr>
             <a:r>
               <a:rPr lang="en-US" sz="2100" dirty="0">
                 <a:solidFill>
-                  <a:srgbClr val="17364A"/>
-                </a:solidFill>
-                <a:latin typeface="Aptos" pitchFamily="34" charset="0"/>
-                <a:ea typeface="Aptos" pitchFamily="34" charset="-122"/>
-                <a:cs typeface="Aptos" pitchFamily="34" charset="-120"/>
-              </a:rPr>
-              <a:t>Public health agencies need project management methods that account for these dependencies before implementation.</a:t>
+                  <a:srgbClr val="003A63"/>
+                </a:solidFill>
+                <a:latin typeface="Aptos" pitchFamily="34" charset="0"/>
+                <a:ea typeface="Aptos" pitchFamily="34" charset="-122"/>
+                <a:cs typeface="Aptos" pitchFamily="34" charset="-120"/>
+              </a:rPr>
+              <a:t>• Public health agencies need project management methods that account for these dependencies.</a:t>
             </a:r>
             <a:endParaRPr lang="en-US" sz="2100" dirty="0"/>
           </a:p>
@@ -10290,17 +10458,17 @@
         </p:nvSpPr>
         <p:spPr>
           <a:xfrm>
-            <a:off x="8074152" y="1920240"/>
-            <a:ext cx="2825496" cy="1280160"/>
-          </a:xfrm>
-          <a:prstGeom prst="rect">
-            <a:avLst/>
-          </a:prstGeom>
-          <a:noFill/>
-          <a:ln/>
-        </p:spPr>
-        <p:txBody>
-          <a:bodyPr wrap="square" lIns="0" tIns="0" rIns="0" bIns="0" rtlCol="0" anchor="t">
+            <a:off x="8074152" y="1892808"/>
+            <a:ext cx="2825496" cy="1353312"/>
+          </a:xfrm>
+          <a:prstGeom prst="rect">
+            <a:avLst/>
+          </a:prstGeom>
+          <a:noFill/>
+          <a:ln/>
+        </p:spPr>
+        <p:txBody>
+          <a:bodyPr wrap="square" lIns="254" tIns="254" rIns="254" bIns="254" rtlCol="0" anchor="t">
             <a:normAutofit/>
           </a:bodyPr>
           <a:lstStyle/>
@@ -10309,7 +10477,7 @@
               <a:buNone/>
             </a:pPr>
             <a:r>
-              <a:rPr lang="en-US" sz="1550" dirty="0">
+              <a:rPr lang="en-US" sz="1320" dirty="0">
                 <a:solidFill>
                   <a:srgbClr val="17364A"/>
                 </a:solidFill>
@@ -10317,43 +10485,9 @@
                 <a:ea typeface="Aptos" pitchFamily="34" charset="-122"/>
                 <a:cs typeface="Aptos" pitchFamily="34" charset="-120"/>
               </a:rPr>
-              <a:t>Level: applied/foundational</a:t>
-            </a:r>
-            <a:endParaRPr lang="en-US" sz="1550" dirty="0"/>
-          </a:p>
-          <a:p>
-            <a:pPr indent="0" marL="0">
-              <a:buNone/>
-            </a:pPr>
-            <a:r>
-              <a:rPr lang="en-US" sz="1550" dirty="0">
-                <a:solidFill>
-                  <a:srgbClr val="17364A"/>
-                </a:solidFill>
-                <a:latin typeface="Aptos" pitchFamily="34" charset="0"/>
-                <a:ea typeface="Aptos" pitchFamily="34" charset="-122"/>
-                <a:cs typeface="Aptos" pitchFamily="34" charset="-120"/>
-              </a:rPr>
-              <a:t>Primary track: Program Management Role-Based Track</a:t>
-            </a:r>
-            <a:endParaRPr lang="en-US" sz="1550" dirty="0"/>
-          </a:p>
-          <a:p>
-            <a:pPr indent="0" marL="0">
-              <a:buNone/>
-            </a:pPr>
-            <a:r>
-              <a:rPr lang="en-US" sz="1550" dirty="0">
-                <a:solidFill>
-                  <a:srgbClr val="17364A"/>
-                </a:solidFill>
-                <a:latin typeface="Aptos" pitchFamily="34" charset="0"/>
-                <a:ea typeface="Aptos" pitchFamily="34" charset="-122"/>
-                <a:cs typeface="Aptos" pitchFamily="34" charset="-120"/>
-              </a:rPr>
-              <a:t>Appears in tracks: program-management, operations-and-data-quality, technical-architecture, public-health-executive-leadership</a:t>
-            </a:r>
-            <a:endParaRPr lang="en-US" sz="1550" dirty="0"/>
+              <a:t>Level: applied/foundational Primary track: Program Management Role-Based Track Appears in tracks: program-management,.</a:t>
+            </a:r>
+            <a:endParaRPr lang="en-US" sz="1320" dirty="0"/>
           </a:p>
         </p:txBody>
       </p:sp>
@@ -10441,13 +10575,16 @@
           <a:ln/>
         </p:spPr>
         <p:txBody>
-          <a:bodyPr wrap="square" lIns="254" tIns="254" rIns="254" bIns="254" rtlCol="0" anchor="t">
+          <a:bodyPr wrap="square" lIns="508" tIns="508" rIns="508" bIns="508" rtlCol="0" anchor="t">
             <a:normAutofit/>
           </a:bodyPr>
           <a:lstStyle/>
           <a:p>
-            <a:r>
-              <a:rPr lang="en-US" sz="1380" dirty="0">
+            <a:pPr indent="0" marL="0">
+              <a:buNone/>
+            </a:pPr>
+            <a:r>
+              <a:rPr lang="en-US" sz="1220" dirty="0">
                 <a:solidFill>
                   <a:srgbClr val="17364A"/>
                 </a:solidFill>
@@ -10457,11 +10594,14 @@
               </a:rPr>
               <a:t>Read the module for shared vocabulary and context.</a:t>
             </a:r>
-            <a:endParaRPr lang="en-US" sz="1380" dirty="0"/>
-          </a:p>
-          <a:p>
-            <a:r>
-              <a:rPr lang="en-US" sz="1380" dirty="0">
+            <a:endParaRPr lang="en-US" sz="1220" dirty="0"/>
+          </a:p>
+          <a:p>
+            <a:pPr indent="0" marL="0">
+              <a:buNone/>
+            </a:pPr>
+            <a:r>
+              <a:rPr lang="en-US" sz="1220" dirty="0">
                 <a:solidFill>
                   <a:srgbClr val="17364A"/>
                 </a:solidFill>
@@ -10471,11 +10611,14 @@
               </a:rPr>
               <a:t>Complete the practical exercise to apply the concept.</a:t>
             </a:r>
-            <a:endParaRPr lang="en-US" sz="1380" dirty="0"/>
-          </a:p>
-          <a:p>
-            <a:r>
-              <a:rPr lang="en-US" sz="1380" dirty="0">
+            <a:endParaRPr lang="en-US" sz="1220" dirty="0"/>
+          </a:p>
+          <a:p>
+            <a:pPr indent="0" marL="0">
+              <a:buNone/>
+            </a:pPr>
+            <a:r>
+              <a:rPr lang="en-US" sz="1220" dirty="0">
                 <a:solidFill>
                   <a:srgbClr val="17364A"/>
                 </a:solidFill>
@@ -10485,7 +10628,7 @@
               </a:rPr>
               <a:t>Use the notes and references for deeper review.</a:t>
             </a:r>
-            <a:endParaRPr lang="en-US" sz="1380" dirty="0"/>
+            <a:endParaRPr lang="en-US" sz="1220" dirty="0"/>
           </a:p>
         </p:txBody>
       </p:sp>
@@ -10786,49 +10929,58 @@
           <a:ln/>
         </p:spPr>
         <p:txBody>
-          <a:bodyPr wrap="square" lIns="635" tIns="635" rIns="635" bIns="635" rtlCol="0" anchor="t">
+          <a:bodyPr wrap="square" lIns="1016" tIns="1016" rIns="1016" bIns="1016" rtlCol="0" anchor="t">
             <a:normAutofit/>
           </a:bodyPr>
           <a:lstStyle/>
           <a:p>
+            <a:pPr indent="0" marL="0">
+              <a:buNone/>
+            </a:pPr>
             <a:r>
               <a:rPr lang="en-US" sz="2100" dirty="0">
                 <a:solidFill>
-                  <a:srgbClr val="17364A"/>
-                </a:solidFill>
-                <a:latin typeface="Aptos" pitchFamily="34" charset="0"/>
-                <a:ea typeface="Aptos" pitchFamily="34" charset="-122"/>
-                <a:cs typeface="Aptos" pitchFamily="34" charset="-120"/>
-              </a:rPr>
-              <a:t>1. What distinguishes AI project management from ordinary software implementation?</a:t>
+                  <a:srgbClr val="003A63"/>
+                </a:solidFill>
+                <a:latin typeface="Aptos" pitchFamily="34" charset="0"/>
+                <a:ea typeface="Aptos" pitchFamily="34" charset="-122"/>
+                <a:cs typeface="Aptos" pitchFamily="34" charset="-120"/>
+              </a:rPr>
+              <a:t>• 1. What distinguishes AI project management from ordinary software implementation?</a:t>
             </a:r>
             <a:endParaRPr lang="en-US" sz="2100" dirty="0"/>
           </a:p>
           <a:p>
+            <a:pPr indent="0" marL="0">
+              <a:buNone/>
+            </a:pPr>
             <a:r>
               <a:rPr lang="en-US" sz="2100" dirty="0">
                 <a:solidFill>
-                  <a:srgbClr val="17364A"/>
-                </a:solidFill>
-                <a:latin typeface="Aptos" pitchFamily="34" charset="0"/>
-                <a:ea typeface="Aptos" pitchFamily="34" charset="-122"/>
-                <a:cs typeface="Aptos" pitchFamily="34" charset="-120"/>
-              </a:rPr>
-              <a:t>2. What is a governance gate?</a:t>
+                  <a:srgbClr val="003A63"/>
+                </a:solidFill>
+                <a:latin typeface="Aptos" pitchFamily="34" charset="0"/>
+                <a:ea typeface="Aptos" pitchFamily="34" charset="-122"/>
+                <a:cs typeface="Aptos" pitchFamily="34" charset="-120"/>
+              </a:rPr>
+              <a:t>• 2. What is a governance gate?</a:t>
             </a:r>
             <a:endParaRPr lang="en-US" sz="2100" dirty="0"/>
           </a:p>
           <a:p>
+            <a:pPr indent="0" marL="0">
+              <a:buNone/>
+            </a:pPr>
             <a:r>
               <a:rPr lang="en-US" sz="2100" dirty="0">
                 <a:solidFill>
-                  <a:srgbClr val="17364A"/>
-                </a:solidFill>
-                <a:latin typeface="Aptos" pitchFamily="34" charset="0"/>
-                <a:ea typeface="Aptos" pitchFamily="34" charset="-122"/>
-                <a:cs typeface="Aptos" pitchFamily="34" charset="-120"/>
-              </a:rPr>
-              <a:t>3. Which item belongs in an AI project charter?</a:t>
+                  <a:srgbClr val="003A63"/>
+                </a:solidFill>
+                <a:latin typeface="Aptos" pitchFamily="34" charset="0"/>
+                <a:ea typeface="Aptos" pitchFamily="34" charset="-122"/>
+                <a:cs typeface="Aptos" pitchFamily="34" charset="-120"/>
+              </a:rPr>
+              <a:t>• 3. Which item belongs in an AI project charter?</a:t>
             </a:r>
             <a:endParaRPr lang="en-US" sz="2100" dirty="0"/>
           </a:p>
@@ -10908,17 +11060,17 @@
         </p:nvSpPr>
         <p:spPr>
           <a:xfrm>
-            <a:off x="7799832" y="1828800"/>
-            <a:ext cx="3145536" cy="685800"/>
-          </a:xfrm>
-          <a:prstGeom prst="rect">
-            <a:avLst/>
-          </a:prstGeom>
-          <a:noFill/>
-          <a:ln/>
-        </p:spPr>
-        <p:txBody>
-          <a:bodyPr wrap="square" lIns="0" tIns="0" rIns="0" bIns="0" rtlCol="0" anchor="t">
+            <a:off x="7799832" y="1801368"/>
+            <a:ext cx="3145536" cy="758952"/>
+          </a:xfrm>
+          <a:prstGeom prst="rect">
+            <a:avLst/>
+          </a:prstGeom>
+          <a:noFill/>
+          <a:ln/>
+        </p:spPr>
+        <p:txBody>
+          <a:bodyPr wrap="square" lIns="254" tIns="254" rIns="254" bIns="254" rtlCol="0" anchor="t">
             <a:normAutofit/>
           </a:bodyPr>
           <a:lstStyle/>
@@ -10927,7 +11079,7 @@
               <a:buNone/>
             </a:pPr>
             <a:r>
-              <a:rPr lang="en-US" sz="1550" dirty="0">
+              <a:rPr lang="en-US" sz="1320" dirty="0">
                 <a:solidFill>
                   <a:srgbClr val="17364A"/>
                 </a:solidFill>
@@ -10937,7 +11089,7 @@
               </a:rPr>
               <a:t>1. What distinguishes AI project management from ordinary software implementation?</a:t>
             </a:r>
-            <a:endParaRPr lang="en-US" sz="1550" dirty="0"/>
+            <a:endParaRPr lang="en-US" sz="1320" dirty="0"/>
           </a:p>
         </p:txBody>
       </p:sp>
@@ -11025,13 +11177,16 @@
           <a:ln/>
         </p:spPr>
         <p:txBody>
-          <a:bodyPr wrap="square" lIns="254" tIns="254" rIns="254" bIns="254" rtlCol="0" anchor="t">
+          <a:bodyPr wrap="square" lIns="508" tIns="508" rIns="508" bIns="508" rtlCol="0" anchor="t">
             <a:normAutofit/>
           </a:bodyPr>
           <a:lstStyle/>
           <a:p>
-            <a:r>
-              <a:rPr lang="en-US" sz="1380" dirty="0">
+            <a:pPr indent="0" marL="0">
+              <a:buNone/>
+            </a:pPr>
+            <a:r>
+              <a:rPr lang="en-US" sz="1220" dirty="0">
                 <a:solidFill>
                   <a:srgbClr val="17364A"/>
                 </a:solidFill>
@@ -11041,11 +11196,14 @@
               </a:rPr>
               <a:t>1.</a:t>
             </a:r>
-            <a:endParaRPr lang="en-US" sz="1380" dirty="0"/>
-          </a:p>
-          <a:p>
-            <a:r>
-              <a:rPr lang="en-US" sz="1380" dirty="0">
+            <a:endParaRPr lang="en-US" sz="1220" dirty="0"/>
+          </a:p>
+          <a:p>
+            <a:pPr indent="0" marL="0">
+              <a:buNone/>
+            </a:pPr>
+            <a:r>
+              <a:rPr lang="en-US" sz="1220" dirty="0">
                 <a:solidFill>
                   <a:srgbClr val="17364A"/>
                 </a:solidFill>
@@ -11053,13 +11211,16 @@
                 <a:ea typeface="Aptos" pitchFamily="34" charset="-122"/>
                 <a:cs typeface="Aptos" pitchFamily="34" charset="-120"/>
               </a:rPr>
-              <a:t>What distinguishes AI project management from ordinary software implementation?</a:t>
-            </a:r>
-            <a:endParaRPr lang="en-US" sz="1380" dirty="0"/>
-          </a:p>
-          <a:p>
-            <a:r>
-              <a:rPr lang="en-US" sz="1380" dirty="0">
+              <a:t>What distinguishes AI project management from ordinary software.</a:t>
+            </a:r>
+            <a:endParaRPr lang="en-US" sz="1220" dirty="0"/>
+          </a:p>
+          <a:p>
+            <a:pPr indent="0" marL="0">
+              <a:buNone/>
+            </a:pPr>
+            <a:r>
+              <a:rPr lang="en-US" sz="1220" dirty="0">
                 <a:solidFill>
                   <a:srgbClr val="17364A"/>
                 </a:solidFill>
@@ -11069,7 +11230,7 @@
               </a:rPr>
               <a:t>2.</a:t>
             </a:r>
-            <a:endParaRPr lang="en-US" sz="1380" dirty="0"/>
+            <a:endParaRPr lang="en-US" sz="1220" dirty="0"/>
           </a:p>
         </p:txBody>
       </p:sp>
@@ -11147,17 +11308,17 @@
         </p:nvSpPr>
         <p:spPr>
           <a:xfrm>
-            <a:off x="7799832" y="5001768"/>
-            <a:ext cx="3145536" cy="502920"/>
-          </a:xfrm>
-          <a:prstGeom prst="rect">
-            <a:avLst/>
-          </a:prstGeom>
-          <a:noFill/>
-          <a:ln/>
-        </p:spPr>
-        <p:txBody>
-          <a:bodyPr wrap="square" lIns="0" tIns="0" rIns="0" bIns="0" rtlCol="0" anchor="t">
+            <a:off x="7799832" y="4974336"/>
+            <a:ext cx="3145536" cy="576072"/>
+          </a:xfrm>
+          <a:prstGeom prst="rect">
+            <a:avLst/>
+          </a:prstGeom>
+          <a:noFill/>
+          <a:ln/>
+        </p:spPr>
+        <p:txBody>
+          <a:bodyPr wrap="square" lIns="254" tIns="254" rIns="254" bIns="254" rtlCol="0" anchor="t">
             <a:normAutofit/>
           </a:bodyPr>
           <a:lstStyle/>
@@ -11166,7 +11327,7 @@
               <a:buNone/>
             </a:pPr>
             <a:r>
-              <a:rPr lang="en-US" sz="1550" dirty="0">
+              <a:rPr lang="en-US" sz="1320" dirty="0">
                 <a:solidFill>
                   <a:srgbClr val="17364A"/>
                 </a:solidFill>
@@ -11174,9 +11335,9 @@
                 <a:ea typeface="Aptos" pitchFamily="34" charset="-122"/>
                 <a:cs typeface="Aptos" pitchFamily="34" charset="-120"/>
               </a:rPr>
-              <a:t>Use the assignment to test whether you can explain the concept, apply it to a realistic public health situation, and identify what would need review before the work moves forward.</a:t>
-            </a:r>
-            <a:endParaRPr lang="en-US" sz="1550" dirty="0"/>
+              <a:t>Use the assignment to test whether you can explain the concept, apply it to a realistic public health situation, and.</a:t>
+            </a:r>
+            <a:endParaRPr lang="en-US" sz="1320" dirty="0"/>
           </a:p>
         </p:txBody>
       </p:sp>
@@ -11477,49 +11638,58 @@
           <a:ln/>
         </p:spPr>
         <p:txBody>
-          <a:bodyPr wrap="square" lIns="635" tIns="635" rIns="635" bIns="635" rtlCol="0" anchor="t">
+          <a:bodyPr wrap="square" lIns="1016" tIns="1016" rIns="1016" bIns="1016" rtlCol="0" anchor="t">
             <a:normAutofit/>
           </a:bodyPr>
           <a:lstStyle/>
           <a:p>
+            <a:pPr indent="0" marL="0">
+              <a:buNone/>
+            </a:pPr>
             <a:r>
               <a:rPr lang="en-US" sz="2100" dirty="0">
                 <a:solidFill>
-                  <a:srgbClr val="17364A"/>
-                </a:solidFill>
-                <a:latin typeface="Aptos" pitchFamily="34" charset="0"/>
-                <a:ea typeface="Aptos" pitchFamily="34" charset="-122"/>
-                <a:cs typeface="Aptos" pitchFamily="34" charset="-120"/>
-              </a:rPr>
-              <a:t>NIST Artificial Intelligence Risk Management Framework:.</a:t>
+                  <a:srgbClr val="003A63"/>
+                </a:solidFill>
+                <a:latin typeface="Aptos" pitchFamily="34" charset="0"/>
+                <a:ea typeface="Aptos" pitchFamily="34" charset="-122"/>
+                <a:cs typeface="Aptos" pitchFamily="34" charset="-120"/>
+              </a:rPr>
+              <a:t>• NIST Artificial Intelligence Risk Management Framework:.</a:t>
             </a:r>
             <a:endParaRPr lang="en-US" sz="2100" dirty="0"/>
           </a:p>
           <a:p>
+            <a:pPr indent="0" marL="0">
+              <a:buNone/>
+            </a:pPr>
             <a:r>
               <a:rPr lang="en-US" sz="2100" dirty="0">
                 <a:solidFill>
-                  <a:srgbClr val="17364A"/>
-                </a:solidFill>
-                <a:latin typeface="Aptos" pitchFamily="34" charset="0"/>
-                <a:ea typeface="Aptos" pitchFamily="34" charset="-122"/>
-                <a:cs typeface="Aptos" pitchFamily="34" charset="-120"/>
-              </a:rPr>
-              <a:t>NIST Generative AI Profile:.</a:t>
+                  <a:srgbClr val="003A63"/>
+                </a:solidFill>
+                <a:latin typeface="Aptos" pitchFamily="34" charset="0"/>
+                <a:ea typeface="Aptos" pitchFamily="34" charset="-122"/>
+                <a:cs typeface="Aptos" pitchFamily="34" charset="-120"/>
+              </a:rPr>
+              <a:t>• NIST Generative AI Profile:.</a:t>
             </a:r>
             <a:endParaRPr lang="en-US" sz="2100" dirty="0"/>
           </a:p>
           <a:p>
+            <a:pPr indent="0" marL="0">
+              <a:buNone/>
+            </a:pPr>
             <a:r>
               <a:rPr lang="en-US" sz="2100" dirty="0">
                 <a:solidFill>
-                  <a:srgbClr val="17364A"/>
-                </a:solidFill>
-                <a:latin typeface="Aptos" pitchFamily="34" charset="0"/>
-                <a:ea typeface="Aptos" pitchFamily="34" charset="-122"/>
-                <a:cs typeface="Aptos" pitchFamily="34" charset="-120"/>
-              </a:rPr>
-              <a:t>CDC Public Health Data Strategy and Data Modernization resources:.</a:t>
+                  <a:srgbClr val="003A63"/>
+                </a:solidFill>
+                <a:latin typeface="Aptos" pitchFamily="34" charset="0"/>
+                <a:ea typeface="Aptos" pitchFamily="34" charset="-122"/>
+                <a:cs typeface="Aptos" pitchFamily="34" charset="-120"/>
+              </a:rPr>
+              <a:t>• CDC Public Health Data Strategy and Data Modernization resources:.</a:t>
             </a:r>
             <a:endParaRPr lang="en-US" sz="2100" dirty="0"/>
           </a:p>
@@ -11599,17 +11769,17 @@
         </p:nvSpPr>
         <p:spPr>
           <a:xfrm>
-            <a:off x="7799832" y="1828800"/>
-            <a:ext cx="3145536" cy="685800"/>
-          </a:xfrm>
-          <a:prstGeom prst="rect">
-            <a:avLst/>
-          </a:prstGeom>
-          <a:noFill/>
-          <a:ln/>
-        </p:spPr>
-        <p:txBody>
-          <a:bodyPr wrap="square" lIns="0" tIns="0" rIns="0" bIns="0" rtlCol="0" anchor="t">
+            <a:off x="7799832" y="1801368"/>
+            <a:ext cx="3145536" cy="758952"/>
+          </a:xfrm>
+          <a:prstGeom prst="rect">
+            <a:avLst/>
+          </a:prstGeom>
+          <a:noFill/>
+          <a:ln/>
+        </p:spPr>
+        <p:txBody>
+          <a:bodyPr wrap="square" lIns="254" tIns="254" rIns="254" bIns="254" rtlCol="0" anchor="t">
             <a:normAutofit/>
           </a:bodyPr>
           <a:lstStyle/>
@@ -11618,7 +11788,7 @@
               <a:buNone/>
             </a:pPr>
             <a:r>
-              <a:rPr lang="en-US" sz="1550" dirty="0">
+              <a:rPr lang="en-US" sz="1320" dirty="0">
                 <a:solidFill>
                   <a:srgbClr val="17364A"/>
                 </a:solidFill>
@@ -11628,7 +11798,7 @@
               </a:rPr>
               <a:t>NIST Artificial Intelligence Risk Management Framework:.</a:t>
             </a:r>
-            <a:endParaRPr lang="en-US" sz="1550" dirty="0"/>
+            <a:endParaRPr lang="en-US" sz="1320" dirty="0"/>
           </a:p>
         </p:txBody>
       </p:sp>
@@ -11716,13 +11886,16 @@
           <a:ln/>
         </p:spPr>
         <p:txBody>
-          <a:bodyPr wrap="square" lIns="254" tIns="254" rIns="254" bIns="254" rtlCol="0" anchor="t">
+          <a:bodyPr wrap="square" lIns="508" tIns="508" rIns="508" bIns="508" rtlCol="0" anchor="t">
             <a:normAutofit/>
           </a:bodyPr>
           <a:lstStyle/>
           <a:p>
-            <a:r>
-              <a:rPr lang="en-US" sz="1380" dirty="0">
+            <a:pPr indent="0" marL="0">
+              <a:buNone/>
+            </a:pPr>
+            <a:r>
+              <a:rPr lang="en-US" sz="1220" dirty="0">
                 <a:solidFill>
                   <a:srgbClr val="17364A"/>
                 </a:solidFill>
@@ -11732,11 +11905,14 @@
               </a:rPr>
               <a:t>NIST Artificial Intelligence Risk Management Framework:.</a:t>
             </a:r>
-            <a:endParaRPr lang="en-US" sz="1380" dirty="0"/>
-          </a:p>
-          <a:p>
-            <a:r>
-              <a:rPr lang="en-US" sz="1380" dirty="0">
+            <a:endParaRPr lang="en-US" sz="1220" dirty="0"/>
+          </a:p>
+          <a:p>
+            <a:pPr indent="0" marL="0">
+              <a:buNone/>
+            </a:pPr>
+            <a:r>
+              <a:rPr lang="en-US" sz="1220" dirty="0">
                 <a:solidFill>
                   <a:srgbClr val="17364A"/>
                 </a:solidFill>
@@ -11746,11 +11922,14 @@
               </a:rPr>
               <a:t>OWASP guidance for LLM application security</a:t>
             </a:r>
-            <a:endParaRPr lang="en-US" sz="1380" dirty="0"/>
-          </a:p>
-          <a:p>
-            <a:r>
-              <a:rPr lang="en-US" sz="1380" dirty="0">
+            <a:endParaRPr lang="en-US" sz="1220" dirty="0"/>
+          </a:p>
+          <a:p>
+            <a:pPr indent="0" marL="0">
+              <a:buNone/>
+            </a:pPr>
+            <a:r>
+              <a:rPr lang="en-US" sz="1220" dirty="0">
                 <a:solidFill>
                   <a:srgbClr val="17364A"/>
                 </a:solidFill>
@@ -11758,9 +11937,9 @@
                 <a:ea typeface="Aptos" pitchFamily="34" charset="-122"/>
                 <a:cs typeface="Aptos" pitchFamily="34" charset="-120"/>
               </a:rPr>
-              <a:t>Agency policies for privacy, cybersecurity, records, procurement, accessibility, and.</a:t>
-            </a:r>
-            <a:endParaRPr lang="en-US" sz="1380" dirty="0"/>
+              <a:t>Agency policies for privacy, cybersecurity, records, procurement,.</a:t>
+            </a:r>
+            <a:endParaRPr lang="en-US" sz="1220" dirty="0"/>
           </a:p>
         </p:txBody>
       </p:sp>
@@ -11838,17 +12017,17 @@
         </p:nvSpPr>
         <p:spPr>
           <a:xfrm>
-            <a:off x="7799832" y="5001768"/>
-            <a:ext cx="3145536" cy="502920"/>
-          </a:xfrm>
-          <a:prstGeom prst="rect">
-            <a:avLst/>
-          </a:prstGeom>
-          <a:noFill/>
-          <a:ln/>
-        </p:spPr>
-        <p:txBody>
-          <a:bodyPr wrap="square" lIns="0" tIns="0" rIns="0" bIns="0" rtlCol="0" anchor="t">
+            <a:off x="7799832" y="4974336"/>
+            <a:ext cx="3145536" cy="576072"/>
+          </a:xfrm>
+          <a:prstGeom prst="rect">
+            <a:avLst/>
+          </a:prstGeom>
+          <a:noFill/>
+          <a:ln/>
+        </p:spPr>
+        <p:txBody>
+          <a:bodyPr wrap="square" lIns="254" tIns="254" rIns="254" bIns="254" rtlCol="0" anchor="t">
             <a:normAutofit/>
           </a:bodyPr>
           <a:lstStyle/>
@@ -11857,7 +12036,7 @@
               <a:buNone/>
             </a:pPr>
             <a:r>
-              <a:rPr lang="en-US" sz="1550" dirty="0">
+              <a:rPr lang="en-US" sz="1320" dirty="0">
                 <a:solidFill>
                   <a:srgbClr val="17364A"/>
                 </a:solidFill>
@@ -11865,9 +12044,9 @@
                 <a:ea typeface="Aptos" pitchFamily="34" charset="-122"/>
                 <a:cs typeface="Aptos" pitchFamily="34" charset="-120"/>
               </a:rPr>
-              <a:t>Use the concept to clarify workflow changes, dependencies, staffing, procurement requirements, training needs, and implementation checkpoints.</a:t>
-            </a:r>
-            <a:endParaRPr lang="en-US" sz="1550" dirty="0"/>
+              <a:t>Use the concept to clarify workflow changes, dependencies, staffing, procurement requirements, training needs, and.</a:t>
+            </a:r>
+            <a:endParaRPr lang="en-US" sz="1320" dirty="0"/>
           </a:p>
         </p:txBody>
       </p:sp>
@@ -12168,21 +12347,24 @@
           <a:ln/>
         </p:spPr>
         <p:txBody>
-          <a:bodyPr wrap="square" lIns="635" tIns="635" rIns="635" bIns="635" rtlCol="0" anchor="t">
+          <a:bodyPr wrap="square" lIns="1016" tIns="1016" rIns="1016" bIns="1016" rtlCol="0" anchor="t">
             <a:normAutofit/>
           </a:bodyPr>
           <a:lstStyle/>
           <a:p>
+            <a:pPr indent="0" marL="0">
+              <a:buNone/>
+            </a:pPr>
             <a:r>
               <a:rPr lang="en-US" sz="2100" dirty="0">
                 <a:solidFill>
-                  <a:srgbClr val="17364A"/>
-                </a:solidFill>
-                <a:latin typeface="Aptos" pitchFamily="34" charset="0"/>
-                <a:ea typeface="Aptos" pitchFamily="34" charset="-122"/>
-                <a:cs typeface="Aptos" pitchFamily="34" charset="-120"/>
-              </a:rPr>
-              <a:t>Relevant public health program SOPs, data governance documentation, and implementation plans</a:t>
+                  <a:srgbClr val="003A63"/>
+                </a:solidFill>
+                <a:latin typeface="Aptos" pitchFamily="34" charset="0"/>
+                <a:ea typeface="Aptos" pitchFamily="34" charset="-122"/>
+                <a:cs typeface="Aptos" pitchFamily="34" charset="-120"/>
+              </a:rPr>
+              <a:t>• Relevant public health program SOPs, data governance documentation, and implementation plans</a:t>
             </a:r>
             <a:endParaRPr lang="en-US" sz="2100" dirty="0"/>
           </a:p>
@@ -12262,17 +12444,17 @@
         </p:nvSpPr>
         <p:spPr>
           <a:xfrm>
-            <a:off x="7799832" y="1828800"/>
-            <a:ext cx="3145536" cy="685800"/>
-          </a:xfrm>
-          <a:prstGeom prst="rect">
-            <a:avLst/>
-          </a:prstGeom>
-          <a:noFill/>
-          <a:ln/>
-        </p:spPr>
-        <p:txBody>
-          <a:bodyPr wrap="square" lIns="0" tIns="0" rIns="0" bIns="0" rtlCol="0" anchor="t">
+            <a:off x="7799832" y="1801368"/>
+            <a:ext cx="3145536" cy="758952"/>
+          </a:xfrm>
+          <a:prstGeom prst="rect">
+            <a:avLst/>
+          </a:prstGeom>
+          <a:noFill/>
+          <a:ln/>
+        </p:spPr>
+        <p:txBody>
+          <a:bodyPr wrap="square" lIns="254" tIns="254" rIns="254" bIns="254" rtlCol="0" anchor="t">
             <a:normAutofit/>
           </a:bodyPr>
           <a:lstStyle/>
@@ -12281,7 +12463,7 @@
               <a:buNone/>
             </a:pPr>
             <a:r>
-              <a:rPr lang="en-US" sz="1550" dirty="0">
+              <a:rPr lang="en-US" sz="1320" dirty="0">
                 <a:solidFill>
                   <a:srgbClr val="17364A"/>
                 </a:solidFill>
@@ -12291,7 +12473,7 @@
               </a:rPr>
               <a:t>Relevant public health program SOPs, data governance documentation, and implementation plans</a:t>
             </a:r>
-            <a:endParaRPr lang="en-US" sz="1550" dirty="0"/>
+            <a:endParaRPr lang="en-US" sz="1320" dirty="0"/>
           </a:p>
         </p:txBody>
       </p:sp>
@@ -12379,13 +12561,16 @@
           <a:ln/>
         </p:spPr>
         <p:txBody>
-          <a:bodyPr wrap="square" lIns="254" tIns="254" rIns="254" bIns="254" rtlCol="0" anchor="t">
+          <a:bodyPr wrap="square" lIns="508" tIns="508" rIns="508" bIns="508" rtlCol="0" anchor="t">
             <a:normAutofit/>
           </a:bodyPr>
           <a:lstStyle/>
           <a:p>
-            <a:r>
-              <a:rPr lang="en-US" sz="1380" dirty="0">
+            <a:pPr indent="0" marL="0">
+              <a:buNone/>
+            </a:pPr>
+            <a:r>
+              <a:rPr lang="en-US" sz="1220" dirty="0">
                 <a:solidFill>
                   <a:srgbClr val="17364A"/>
                 </a:solidFill>
@@ -12393,9 +12578,9 @@
                 <a:ea typeface="Aptos" pitchFamily="34" charset="-122"/>
                 <a:cs typeface="Aptos" pitchFamily="34" charset="-120"/>
               </a:rPr>
-              <a:t>Relevant public health program SOPs, data governance documentation, and implementation plans</a:t>
-            </a:r>
-            <a:endParaRPr lang="en-US" sz="1380" dirty="0"/>
+              <a:t>Relevant public health program SOPs, data governance.</a:t>
+            </a:r>
+            <a:endParaRPr lang="en-US" sz="1220" dirty="0"/>
           </a:p>
         </p:txBody>
       </p:sp>
@@ -12473,17 +12658,17 @@
         </p:nvSpPr>
         <p:spPr>
           <a:xfrm>
-            <a:off x="7799832" y="5001768"/>
-            <a:ext cx="3145536" cy="502920"/>
-          </a:xfrm>
-          <a:prstGeom prst="rect">
-            <a:avLst/>
-          </a:prstGeom>
-          <a:noFill/>
-          <a:ln/>
-        </p:spPr>
-        <p:txBody>
-          <a:bodyPr wrap="square" lIns="0" tIns="0" rIns="0" bIns="0" rtlCol="0" anchor="t">
+            <a:off x="7799832" y="4974336"/>
+            <a:ext cx="3145536" cy="576072"/>
+          </a:xfrm>
+          <a:prstGeom prst="rect">
+            <a:avLst/>
+          </a:prstGeom>
+          <a:noFill/>
+          <a:ln/>
+        </p:spPr>
+        <p:txBody>
+          <a:bodyPr wrap="square" lIns="254" tIns="254" rIns="254" bIns="254" rtlCol="0" anchor="t">
             <a:normAutofit/>
           </a:bodyPr>
           <a:lstStyle/>
@@ -12492,7 +12677,7 @@
               <a:buNone/>
             </a:pPr>
             <a:r>
-              <a:rPr lang="en-US" sz="1550" dirty="0">
+              <a:rPr lang="en-US" sz="1320" dirty="0">
                 <a:solidFill>
                   <a:srgbClr val="17364A"/>
                 </a:solidFill>
@@ -12500,9 +12685,9 @@
                 <a:ea typeface="Aptos" pitchFamily="34" charset="-122"/>
                 <a:cs typeface="Aptos" pitchFamily="34" charset="-120"/>
               </a:rPr>
-              <a:t>Use the concept to clarify workflow changes, dependencies, staffing, procurement requirements, training needs, and implementation checkpoints.</a:t>
-            </a:r>
-            <a:endParaRPr lang="en-US" sz="1550" dirty="0"/>
+              <a:t>Use the concept to clarify workflow changes, dependencies, staffing, procurement requirements, training needs, and.</a:t>
+            </a:r>
+            <a:endParaRPr lang="en-US" sz="1320" dirty="0"/>
           </a:p>
         </p:txBody>
       </p:sp>
@@ -12803,63 +12988,75 @@
           <a:ln/>
         </p:spPr>
         <p:txBody>
-          <a:bodyPr wrap="square" lIns="635" tIns="635" rIns="635" bIns="635" rtlCol="0" anchor="t">
+          <a:bodyPr wrap="square" lIns="1016" tIns="1016" rIns="1016" bIns="1016" rtlCol="0" anchor="t">
             <a:normAutofit/>
           </a:bodyPr>
           <a:lstStyle/>
           <a:p>
+            <a:pPr indent="0" marL="0">
+              <a:buNone/>
+            </a:pPr>
             <a:r>
               <a:rPr lang="en-US" sz="1900" dirty="0">
                 <a:solidFill>
-                  <a:srgbClr val="17364A"/>
-                </a:solidFill>
-                <a:latin typeface="Aptos" pitchFamily="34" charset="0"/>
-                <a:ea typeface="Aptos" pitchFamily="34" charset="-122"/>
-                <a:cs typeface="Aptos" pitchFamily="34" charset="-120"/>
-              </a:rPr>
-              <a:t>Play 11: Build and Deploy AI Solutions - This lesson informs Play 11 by helping learners connect the lesson.</a:t>
+                  <a:srgbClr val="003A63"/>
+                </a:solidFill>
+                <a:latin typeface="Aptos" pitchFamily="34" charset="0"/>
+                <a:ea typeface="Aptos" pitchFamily="34" charset="-122"/>
+                <a:cs typeface="Aptos" pitchFamily="34" charset="-120"/>
+              </a:rPr>
+              <a:t>• Play 11: Build and Deploy AI Solutions - This lesson informs Play 11 by helping learners.</a:t>
             </a:r>
             <a:endParaRPr lang="en-US" sz="1900" dirty="0"/>
           </a:p>
           <a:p>
+            <a:pPr indent="0" marL="0">
+              <a:buNone/>
+            </a:pPr>
             <a:r>
               <a:rPr lang="en-US" sz="1900" dirty="0">
                 <a:solidFill>
-                  <a:srgbClr val="17364A"/>
-                </a:solidFill>
-                <a:latin typeface="Aptos" pitchFamily="34" charset="0"/>
-                <a:ea typeface="Aptos" pitchFamily="34" charset="-122"/>
-                <a:cs typeface="Aptos" pitchFamily="34" charset="-120"/>
-              </a:rPr>
-              <a:t>Play 2: Readiness Assessment - This lesson informs Play 2 by helping learners connect the lesson topic to.</a:t>
+                  <a:srgbClr val="003A63"/>
+                </a:solidFill>
+                <a:latin typeface="Aptos" pitchFamily="34" charset="0"/>
+                <a:ea typeface="Aptos" pitchFamily="34" charset="-122"/>
+                <a:cs typeface="Aptos" pitchFamily="34" charset="-120"/>
+              </a:rPr>
+              <a:t>• Play 2: Readiness Assessment - This lesson informs Play 2 by helping learners connect the.</a:t>
             </a:r>
             <a:endParaRPr lang="en-US" sz="1900" dirty="0"/>
           </a:p>
           <a:p>
+            <a:pPr indent="0" marL="0">
+              <a:buNone/>
+            </a:pPr>
             <a:r>
               <a:rPr lang="en-US" sz="1900" dirty="0">
                 <a:solidFill>
-                  <a:srgbClr val="17364A"/>
-                </a:solidFill>
-                <a:latin typeface="Aptos" pitchFamily="34" charset="0"/>
-                <a:ea typeface="Aptos" pitchFamily="34" charset="-122"/>
-                <a:cs typeface="Aptos" pitchFamily="34" charset="-120"/>
-              </a:rPr>
-              <a:t>Play 1: Vision &amp; Guardrails - This lesson informs Play 1 by helping learners connect the lesson topic to.</a:t>
+                  <a:srgbClr val="003A63"/>
+                </a:solidFill>
+                <a:latin typeface="Aptos" pitchFamily="34" charset="0"/>
+                <a:ea typeface="Aptos" pitchFamily="34" charset="-122"/>
+                <a:cs typeface="Aptos" pitchFamily="34" charset="-120"/>
+              </a:rPr>
+              <a:t>• Play 1: Vision &amp; Guardrails - This lesson informs Play 1 by helping learners connect the.</a:t>
             </a:r>
             <a:endParaRPr lang="en-US" sz="1900" dirty="0"/>
           </a:p>
           <a:p>
+            <a:pPr indent="0" marL="0">
+              <a:buNone/>
+            </a:pPr>
             <a:r>
               <a:rPr lang="en-US" sz="1900" dirty="0">
                 <a:solidFill>
-                  <a:srgbClr val="17364A"/>
-                </a:solidFill>
-                <a:latin typeface="Aptos" pitchFamily="34" charset="0"/>
-                <a:ea typeface="Aptos" pitchFamily="34" charset="-122"/>
-                <a:cs typeface="Aptos" pitchFamily="34" charset="-120"/>
-              </a:rPr>
-              <a:t>Play 7: Prioritize Use Cases - This lesson informs Play 7 by helping learners connect the lesson topic to.</a:t>
+                  <a:srgbClr val="003A63"/>
+                </a:solidFill>
+                <a:latin typeface="Aptos" pitchFamily="34" charset="0"/>
+                <a:ea typeface="Aptos" pitchFamily="34" charset="-122"/>
+                <a:cs typeface="Aptos" pitchFamily="34" charset="-120"/>
+              </a:rPr>
+              <a:t>• Play 7: Prioritize Use Cases - This lesson informs Play 7 by helping learners connect the.</a:t>
             </a:r>
             <a:endParaRPr lang="en-US" sz="1900" dirty="0"/>
           </a:p>
@@ -12939,17 +13136,17 @@
         </p:nvSpPr>
         <p:spPr>
           <a:xfrm>
-            <a:off x="8211312" y="1920240"/>
-            <a:ext cx="2734056" cy="1463040"/>
-          </a:xfrm>
-          <a:prstGeom prst="rect">
-            <a:avLst/>
-          </a:prstGeom>
-          <a:noFill/>
-          <a:ln/>
-        </p:spPr>
-        <p:txBody>
-          <a:bodyPr wrap="square" lIns="0" tIns="0" rIns="0" bIns="0" rtlCol="0" anchor="t">
+            <a:off x="8211312" y="1892808"/>
+            <a:ext cx="2734056" cy="1536192"/>
+          </a:xfrm>
+          <a:prstGeom prst="rect">
+            <a:avLst/>
+          </a:prstGeom>
+          <a:noFill/>
+          <a:ln/>
+        </p:spPr>
+        <p:txBody>
+          <a:bodyPr wrap="square" lIns="254" tIns="254" rIns="254" bIns="254" rtlCol="0" anchor="t">
             <a:normAutofit/>
           </a:bodyPr>
           <a:lstStyle/>
@@ -12958,7 +13155,7 @@
               <a:buNone/>
             </a:pPr>
             <a:r>
-              <a:rPr lang="en-US" sz="1550" dirty="0">
+              <a:rPr lang="en-US" sz="1320" dirty="0">
                 <a:solidFill>
                   <a:srgbClr val="17364A"/>
                 </a:solidFill>
@@ -12966,9 +13163,9 @@
                 <a:ea typeface="Aptos" pitchFamily="34" charset="-122"/>
                 <a:cs typeface="Aptos" pitchFamily="34" charset="-120"/>
               </a:rPr>
-              <a:t>Use the related plays to identify decisions, participants, timing, approvals, and documentation needed for responsible implementation.</a:t>
-            </a:r>
-            <a:endParaRPr lang="en-US" sz="1550" dirty="0"/>
+              <a:t>Use the related plays to identify decisions, participants, timing, approvals, and documentation needed for responsible.</a:t>
+            </a:r>
+            <a:endParaRPr lang="en-US" sz="1320" dirty="0"/>
           </a:p>
         </p:txBody>
       </p:sp>
@@ -13056,13 +13253,16 @@
           <a:ln/>
         </p:spPr>
         <p:txBody>
-          <a:bodyPr wrap="square" lIns="254" tIns="254" rIns="254" bIns="254" rtlCol="0" anchor="t">
+          <a:bodyPr wrap="square" lIns="508" tIns="508" rIns="508" bIns="508" rtlCol="0" anchor="t">
             <a:normAutofit/>
           </a:bodyPr>
           <a:lstStyle/>
           <a:p>
-            <a:r>
-              <a:rPr lang="en-US" sz="1380" dirty="0">
+            <a:pPr indent="0" marL="0">
+              <a:buNone/>
+            </a:pPr>
+            <a:r>
+              <a:rPr lang="en-US" sz="1220" dirty="0">
                 <a:solidFill>
                   <a:srgbClr val="17364A"/>
                 </a:solidFill>
@@ -13072,11 +13272,14 @@
               </a:rPr>
               <a:t>Locate the decision point in the playbook sequence.</a:t>
             </a:r>
-            <a:endParaRPr lang="en-US" sz="1380" dirty="0"/>
-          </a:p>
-          <a:p>
-            <a:r>
-              <a:rPr lang="en-US" sz="1380" dirty="0">
+            <a:endParaRPr lang="en-US" sz="1220" dirty="0"/>
+          </a:p>
+          <a:p>
+            <a:pPr indent="0" marL="0">
+              <a:buNone/>
+            </a:pPr>
+            <a:r>
+              <a:rPr lang="en-US" sz="1220" dirty="0">
                 <a:solidFill>
                   <a:srgbClr val="17364A"/>
                 </a:solidFill>
@@ -13086,11 +13289,14 @@
               </a:rPr>
               <a:t>Identify who should participate in the work.</a:t>
             </a:r>
-            <a:endParaRPr lang="en-US" sz="1380" dirty="0"/>
-          </a:p>
-          <a:p>
-            <a:r>
-              <a:rPr lang="en-US" sz="1380" dirty="0">
+            <a:endParaRPr lang="en-US" sz="1220" dirty="0"/>
+          </a:p>
+          <a:p>
+            <a:pPr indent="0" marL="0">
+              <a:buNone/>
+            </a:pPr>
+            <a:r>
+              <a:rPr lang="en-US" sz="1220" dirty="0">
                 <a:solidFill>
                   <a:srgbClr val="17364A"/>
                 </a:solidFill>
@@ -13100,7 +13306,7 @@
               </a:rPr>
               <a:t>Document the review, approval, or implementation step.</a:t>
             </a:r>
-            <a:endParaRPr lang="en-US" sz="1380" dirty="0"/>
+            <a:endParaRPr lang="en-US" sz="1220" dirty="0"/>
           </a:p>
         </p:txBody>
       </p:sp>
@@ -13401,63 +13607,75 @@
           <a:ln/>
         </p:spPr>
         <p:txBody>
-          <a:bodyPr wrap="square" lIns="635" tIns="635" rIns="635" bIns="635" rtlCol="0" anchor="t">
+          <a:bodyPr wrap="square" lIns="1016" tIns="1016" rIns="1016" bIns="1016" rtlCol="0" anchor="t">
             <a:normAutofit/>
           </a:bodyPr>
           <a:lstStyle/>
           <a:p>
+            <a:pPr indent="0" marL="0">
+              <a:buNone/>
+            </a:pPr>
             <a:r>
               <a:rPr lang="en-US" sz="1850" dirty="0">
                 <a:solidFill>
-                  <a:srgbClr val="17364A"/>
-                </a:solidFill>
-                <a:latin typeface="Aptos" pitchFamily="34" charset="0"/>
-                <a:ea typeface="Aptos" pitchFamily="34" charset="-122"/>
-                <a:cs typeface="Aptos" pitchFamily="34" charset="-120"/>
-              </a:rPr>
-              <a:t>Tool 4: AI Policy Landscape Scan (Worksheet) - Use AI Policy Landscape Scan to translate this lesson into a.</a:t>
+                  <a:srgbClr val="003A63"/>
+                </a:solidFill>
+                <a:latin typeface="Aptos" pitchFamily="34" charset="0"/>
+                <a:ea typeface="Aptos" pitchFamily="34" charset="-122"/>
+                <a:cs typeface="Aptos" pitchFamily="34" charset="-120"/>
+              </a:rPr>
+              <a:t>• Tool 4: AI Policy Landscape Scan (Worksheet) - Use AI Policy Landscape Scan to translate this.</a:t>
             </a:r>
             <a:endParaRPr lang="en-US" sz="1850" dirty="0"/>
           </a:p>
           <a:p>
+            <a:pPr indent="0" marL="0">
+              <a:buNone/>
+            </a:pPr>
             <a:r>
               <a:rPr lang="en-US" sz="1850" dirty="0">
                 <a:solidFill>
-                  <a:srgbClr val="17364A"/>
-                </a:solidFill>
-                <a:latin typeface="Aptos" pitchFamily="34" charset="0"/>
-                <a:ea typeface="Aptos" pitchFamily="34" charset="-122"/>
-                <a:cs typeface="Aptos" pitchFamily="34" charset="-120"/>
-              </a:rPr>
-              <a:t>Tool 5: AI Environmental and Resource Impact Review (Checklist) - Use this tool to complete or strengthen.</a:t>
+                  <a:srgbClr val="003A63"/>
+                </a:solidFill>
+                <a:latin typeface="Aptos" pitchFamily="34" charset="0"/>
+                <a:ea typeface="Aptos" pitchFamily="34" charset="-122"/>
+                <a:cs typeface="Aptos" pitchFamily="34" charset="-120"/>
+              </a:rPr>
+              <a:t>• Tool 5: AI Environmental and Resource Impact Review (Checklist) - Use this tool to complete or.</a:t>
             </a:r>
             <a:endParaRPr lang="en-US" sz="1850" dirty="0"/>
           </a:p>
           <a:p>
+            <a:pPr indent="0" marL="0">
+              <a:buNone/>
+            </a:pPr>
             <a:r>
               <a:rPr lang="en-US" sz="1850" dirty="0">
                 <a:solidFill>
-                  <a:srgbClr val="17364A"/>
-                </a:solidFill>
-                <a:latin typeface="Aptos" pitchFamily="34" charset="0"/>
-                <a:ea typeface="Aptos" pitchFamily="34" charset="-122"/>
-                <a:cs typeface="Aptos" pitchFamily="34" charset="-120"/>
-              </a:rPr>
-              <a:t>Tool 6: Human-Centered AI Decision Rule Checklist (Checklist) - Use Human-Centered AI Decision Rule.</a:t>
+                  <a:srgbClr val="003A63"/>
+                </a:solidFill>
+                <a:latin typeface="Aptos" pitchFamily="34" charset="0"/>
+                <a:ea typeface="Aptos" pitchFamily="34" charset="-122"/>
+                <a:cs typeface="Aptos" pitchFamily="34" charset="-120"/>
+              </a:rPr>
+              <a:t>• Tool 6: Human-Centered AI Decision Rule Checklist (Checklist) - Use Human-Centered AI Decision.</a:t>
             </a:r>
             <a:endParaRPr lang="en-US" sz="1850" dirty="0"/>
           </a:p>
           <a:p>
+            <a:pPr indent="0" marL="0">
+              <a:buNone/>
+            </a:pPr>
             <a:r>
               <a:rPr lang="en-US" sz="1850" dirty="0">
                 <a:solidFill>
-                  <a:srgbClr val="17364A"/>
-                </a:solidFill>
-                <a:latin typeface="Aptos" pitchFamily="34" charset="0"/>
-                <a:ea typeface="Aptos" pitchFamily="34" charset="-122"/>
-                <a:cs typeface="Aptos" pitchFamily="34" charset="-120"/>
-              </a:rPr>
-              <a:t>Tool 8: AI Project Charter (Planning) - Use this tool to complete or strengthen the practical exercise for.</a:t>
+                  <a:srgbClr val="003A63"/>
+                </a:solidFill>
+                <a:latin typeface="Aptos" pitchFamily="34" charset="0"/>
+                <a:ea typeface="Aptos" pitchFamily="34" charset="-122"/>
+                <a:cs typeface="Aptos" pitchFamily="34" charset="-120"/>
+              </a:rPr>
+              <a:t>• Tool 8: AI Project Charter (Planning) - Use this tool to complete or strengthen the practical.</a:t>
             </a:r>
             <a:endParaRPr lang="en-US" sz="1850" dirty="0"/>
           </a:p>
@@ -13537,17 +13755,17 @@
         </p:nvSpPr>
         <p:spPr>
           <a:xfrm>
-            <a:off x="8211312" y="1920240"/>
-            <a:ext cx="2734056" cy="1463040"/>
-          </a:xfrm>
-          <a:prstGeom prst="rect">
-            <a:avLst/>
-          </a:prstGeom>
-          <a:noFill/>
-          <a:ln/>
-        </p:spPr>
-        <p:txBody>
-          <a:bodyPr wrap="square" lIns="0" tIns="0" rIns="0" bIns="0" rtlCol="0" anchor="t">
+            <a:off x="8211312" y="1892808"/>
+            <a:ext cx="2734056" cy="1536192"/>
+          </a:xfrm>
+          <a:prstGeom prst="rect">
+            <a:avLst/>
+          </a:prstGeom>
+          <a:noFill/>
+          <a:ln/>
+        </p:spPr>
+        <p:txBody>
+          <a:bodyPr wrap="square" lIns="254" tIns="254" rIns="254" bIns="254" rtlCol="0" anchor="t">
             <a:normAutofit/>
           </a:bodyPr>
           <a:lstStyle/>
@@ -13556,7 +13774,7 @@
               <a:buNone/>
             </a:pPr>
             <a:r>
-              <a:rPr lang="en-US" sz="1550" dirty="0">
+              <a:rPr lang="en-US" sz="1320" dirty="0">
                 <a:solidFill>
                   <a:srgbClr val="17364A"/>
                 </a:solidFill>
@@ -13564,9 +13782,9 @@
                 <a:ea typeface="Aptos" pitchFamily="34" charset="-122"/>
                 <a:cs typeface="Aptos" pitchFamily="34" charset="-120"/>
               </a:rPr>
-              <a:t>Use linked tools when your department needs a structured worksheet, template, checklist, review process, or documentation artifact.</a:t>
-            </a:r>
-            <a:endParaRPr lang="en-US" sz="1550" dirty="0"/>
+              <a:t>Use linked tools when your department needs a structured worksheet, template, checklist, review process, or.</a:t>
+            </a:r>
+            <a:endParaRPr lang="en-US" sz="1320" dirty="0"/>
           </a:p>
         </p:txBody>
       </p:sp>
@@ -13654,13 +13872,16 @@
           <a:ln/>
         </p:spPr>
         <p:txBody>
-          <a:bodyPr wrap="square" lIns="254" tIns="254" rIns="254" bIns="254" rtlCol="0" anchor="t">
+          <a:bodyPr wrap="square" lIns="508" tIns="508" rIns="508" bIns="508" rtlCol="0" anchor="t">
             <a:normAutofit/>
           </a:bodyPr>
           <a:lstStyle/>
           <a:p>
-            <a:r>
-              <a:rPr lang="en-US" sz="1380" dirty="0">
+            <a:pPr indent="0" marL="0">
+              <a:buNone/>
+            </a:pPr>
+            <a:r>
+              <a:rPr lang="en-US" sz="1220" dirty="0">
                 <a:solidFill>
                   <a:srgbClr val="17364A"/>
                 </a:solidFill>
@@ -13670,11 +13891,14 @@
               </a:rPr>
               <a:t>Use a tool when no comparable local process exists.</a:t>
             </a:r>
-            <a:endParaRPr lang="en-US" sz="1380" dirty="0"/>
-          </a:p>
-          <a:p>
-            <a:r>
-              <a:rPr lang="en-US" sz="1380" dirty="0">
+            <a:endParaRPr lang="en-US" sz="1220" dirty="0"/>
+          </a:p>
+          <a:p>
+            <a:pPr indent="0" marL="0">
+              <a:buNone/>
+            </a:pPr>
+            <a:r>
+              <a:rPr lang="en-US" sz="1220" dirty="0">
                 <a:solidFill>
                   <a:srgbClr val="17364A"/>
                 </a:solidFill>
@@ -13682,13 +13906,16 @@
                 <a:ea typeface="Aptos" pitchFamily="34" charset="-122"/>
                 <a:cs typeface="Aptos" pitchFamily="34" charset="-120"/>
               </a:rPr>
-              <a:t>Adapt existing department templates when they already fit the purpose.</a:t>
-            </a:r>
-            <a:endParaRPr lang="en-US" sz="1380" dirty="0"/>
-          </a:p>
-          <a:p>
-            <a:r>
-              <a:rPr lang="en-US" sz="1380" dirty="0">
+              <a:t>Adapt existing department templates when they already fit the.</a:t>
+            </a:r>
+            <a:endParaRPr lang="en-US" sz="1220" dirty="0"/>
+          </a:p>
+          <a:p>
+            <a:pPr indent="0" marL="0">
+              <a:buNone/>
+            </a:pPr>
+            <a:r>
+              <a:rPr lang="en-US" sz="1220" dirty="0">
                 <a:solidFill>
                   <a:srgbClr val="17364A"/>
                 </a:solidFill>
@@ -13698,7 +13925,7 @@
               </a:rPr>
               <a:t>Save the completed artifact as evidence of the decision.</a:t>
             </a:r>
-            <a:endParaRPr lang="en-US" sz="1380" dirty="0"/>
+            <a:endParaRPr lang="en-US" sz="1220" dirty="0"/>
           </a:p>
         </p:txBody>
       </p:sp>
@@ -13999,49 +14226,58 @@
           <a:ln/>
         </p:spPr>
         <p:txBody>
-          <a:bodyPr wrap="square" lIns="635" tIns="635" rIns="635" bIns="635" rtlCol="0" anchor="t">
+          <a:bodyPr wrap="square" lIns="1016" tIns="1016" rIns="1016" bIns="1016" rtlCol="0" anchor="t">
             <a:normAutofit/>
           </a:bodyPr>
           <a:lstStyle/>
           <a:p>
+            <a:pPr indent="0" marL="0">
+              <a:buNone/>
+            </a:pPr>
             <a:r>
               <a:rPr lang="en-US" sz="2100" dirty="0">
                 <a:solidFill>
-                  <a:srgbClr val="17364A"/>
-                </a:solidFill>
-                <a:latin typeface="Aptos" pitchFamily="34" charset="0"/>
-                <a:ea typeface="Aptos" pitchFamily="34" charset="-122"/>
-                <a:cs typeface="Aptos" pitchFamily="34" charset="-120"/>
-              </a:rPr>
-              <a:t>Define the major phases of an AI implementation project.</a:t>
+                  <a:srgbClr val="003A63"/>
+                </a:solidFill>
+                <a:latin typeface="Aptos" pitchFamily="34" charset="0"/>
+                <a:ea typeface="Aptos" pitchFamily="34" charset="-122"/>
+                <a:cs typeface="Aptos" pitchFamily="34" charset="-120"/>
+              </a:rPr>
+              <a:t>• Define the major phases of an AI implementation project.</a:t>
             </a:r>
             <a:endParaRPr lang="en-US" sz="2100" dirty="0"/>
           </a:p>
           <a:p>
+            <a:pPr indent="0" marL="0">
+              <a:buNone/>
+            </a:pPr>
             <a:r>
               <a:rPr lang="en-US" sz="2100" dirty="0">
                 <a:solidFill>
-                  <a:srgbClr val="17364A"/>
-                </a:solidFill>
-                <a:latin typeface="Aptos" pitchFamily="34" charset="0"/>
-                <a:ea typeface="Aptos" pitchFamily="34" charset="-122"/>
-                <a:cs typeface="Aptos" pitchFamily="34" charset="-120"/>
-              </a:rPr>
-              <a:t>Develop an AI project charter that includes scope, objectives, roles, risks, dependencies, and.</a:t>
+                  <a:srgbClr val="003A63"/>
+                </a:solidFill>
+                <a:latin typeface="Aptos" pitchFamily="34" charset="0"/>
+                <a:ea typeface="Aptos" pitchFamily="34" charset="-122"/>
+                <a:cs typeface="Aptos" pitchFamily="34" charset="-120"/>
+              </a:rPr>
+              <a:t>• Develop an AI project charter that includes scope, objectives, roles, risks, dependencies, and.</a:t>
             </a:r>
             <a:endParaRPr lang="en-US" sz="2100" dirty="0"/>
           </a:p>
           <a:p>
+            <a:pPr indent="0" marL="0">
+              <a:buNone/>
+            </a:pPr>
             <a:r>
               <a:rPr lang="en-US" sz="2100" dirty="0">
                 <a:solidFill>
-                  <a:srgbClr val="17364A"/>
-                </a:solidFill>
-                <a:latin typeface="Aptos" pitchFamily="34" charset="0"/>
-                <a:ea typeface="Aptos" pitchFamily="34" charset="-122"/>
-                <a:cs typeface="Aptos" pitchFamily="34" charset="-120"/>
-              </a:rPr>
-              <a:t>Identify implementation dependencies across data, systems, privacy, security, procurement, workflow,.</a:t>
+                  <a:srgbClr val="003A63"/>
+                </a:solidFill>
+                <a:latin typeface="Aptos" pitchFamily="34" charset="0"/>
+                <a:ea typeface="Aptos" pitchFamily="34" charset="-122"/>
+                <a:cs typeface="Aptos" pitchFamily="34" charset="-120"/>
+              </a:rPr>
+              <a:t>• Identify implementation dependencies across data, systems, privacy, security, procurement,.</a:t>
             </a:r>
             <a:endParaRPr lang="en-US" sz="2100" dirty="0"/>
           </a:p>
@@ -14121,17 +14357,17 @@
         </p:nvSpPr>
         <p:spPr>
           <a:xfrm>
-            <a:off x="7799832" y="1828800"/>
-            <a:ext cx="3145536" cy="685800"/>
-          </a:xfrm>
-          <a:prstGeom prst="rect">
-            <a:avLst/>
-          </a:prstGeom>
-          <a:noFill/>
-          <a:ln/>
-        </p:spPr>
-        <p:txBody>
-          <a:bodyPr wrap="square" lIns="0" tIns="0" rIns="0" bIns="0" rtlCol="0" anchor="t">
+            <a:off x="7799832" y="1801368"/>
+            <a:ext cx="3145536" cy="758952"/>
+          </a:xfrm>
+          <a:prstGeom prst="rect">
+            <a:avLst/>
+          </a:prstGeom>
+          <a:noFill/>
+          <a:ln/>
+        </p:spPr>
+        <p:txBody>
+          <a:bodyPr wrap="square" lIns="254" tIns="254" rIns="254" bIns="254" rtlCol="0" anchor="t">
             <a:normAutofit/>
           </a:bodyPr>
           <a:lstStyle/>
@@ -14140,7 +14376,7 @@
               <a:buNone/>
             </a:pPr>
             <a:r>
-              <a:rPr lang="en-US" sz="1550" dirty="0">
+              <a:rPr lang="en-US" sz="1320" dirty="0">
                 <a:solidFill>
                   <a:srgbClr val="17364A"/>
                 </a:solidFill>
@@ -14150,7 +14386,7 @@
               </a:rPr>
               <a:t>Define the major phases of an AI implementation project.</a:t>
             </a:r>
-            <a:endParaRPr lang="en-US" sz="1550" dirty="0"/>
+            <a:endParaRPr lang="en-US" sz="1320" dirty="0"/>
           </a:p>
         </p:txBody>
       </p:sp>
@@ -14238,13 +14474,16 @@
           <a:ln/>
         </p:spPr>
         <p:txBody>
-          <a:bodyPr wrap="square" lIns="254" tIns="254" rIns="254" bIns="254" rtlCol="0" anchor="t">
+          <a:bodyPr wrap="square" lIns="508" tIns="508" rIns="508" bIns="508" rtlCol="0" anchor="t">
             <a:normAutofit/>
           </a:bodyPr>
           <a:lstStyle/>
           <a:p>
-            <a:r>
-              <a:rPr lang="en-US" sz="1380" dirty="0">
+            <a:pPr indent="0" marL="0">
+              <a:buNone/>
+            </a:pPr>
+            <a:r>
+              <a:rPr lang="en-US" sz="1220" dirty="0">
                 <a:solidFill>
                   <a:srgbClr val="17364A"/>
                 </a:solidFill>
@@ -14252,13 +14491,16 @@
                 <a:ea typeface="Aptos" pitchFamily="34" charset="-122"/>
                 <a:cs typeface="Aptos" pitchFamily="34" charset="-120"/>
               </a:rPr>
-              <a:t>Develop an AI project charter that includes scope, objectives, roles, risks, dependencies,.</a:t>
-            </a:r>
-            <a:endParaRPr lang="en-US" sz="1380" dirty="0"/>
-          </a:p>
-          <a:p>
-            <a:r>
-              <a:rPr lang="en-US" sz="1380" dirty="0">
+              <a:t>Develop an AI project charter that includes scope, objectives,.</a:t>
+            </a:r>
+            <a:endParaRPr lang="en-US" sz="1220" dirty="0"/>
+          </a:p>
+          <a:p>
+            <a:pPr indent="0" marL="0">
+              <a:buNone/>
+            </a:pPr>
+            <a:r>
+              <a:rPr lang="en-US" sz="1220" dirty="0">
                 <a:solidFill>
                   <a:srgbClr val="17364A"/>
                 </a:solidFill>
@@ -14266,13 +14508,16 @@
                 <a:ea typeface="Aptos" pitchFamily="34" charset="-122"/>
                 <a:cs typeface="Aptos" pitchFamily="34" charset="-120"/>
               </a:rPr>
-              <a:t>Identify implementation dependencies across data, systems, privacy, security, procurement,.</a:t>
-            </a:r>
-            <a:endParaRPr lang="en-US" sz="1380" dirty="0"/>
-          </a:p>
-          <a:p>
-            <a:r>
-              <a:rPr lang="en-US" sz="1380" dirty="0">
+              <a:t>Identify implementation dependencies across data, systems,.</a:t>
+            </a:r>
+            <a:endParaRPr lang="en-US" sz="1220" dirty="0"/>
+          </a:p>
+          <a:p>
+            <a:pPr indent="0" marL="0">
+              <a:buNone/>
+            </a:pPr>
+            <a:r>
+              <a:rPr lang="en-US" sz="1220" dirty="0">
                 <a:solidFill>
                   <a:srgbClr val="17364A"/>
                 </a:solidFill>
@@ -14282,7 +14527,7 @@
               </a:rPr>
               <a:t>Create a launch readiness checklist for an AI-supported workflow.</a:t>
             </a:r>
-            <a:endParaRPr lang="en-US" sz="1380" dirty="0"/>
+            <a:endParaRPr lang="en-US" sz="1220" dirty="0"/>
           </a:p>
         </p:txBody>
       </p:sp>
@@ -14360,17 +14605,17 @@
         </p:nvSpPr>
         <p:spPr>
           <a:xfrm>
-            <a:off x="7799832" y="5001768"/>
-            <a:ext cx="3145536" cy="502920"/>
-          </a:xfrm>
-          <a:prstGeom prst="rect">
-            <a:avLst/>
-          </a:prstGeom>
-          <a:noFill/>
-          <a:ln/>
-        </p:spPr>
-        <p:txBody>
-          <a:bodyPr wrap="square" lIns="0" tIns="0" rIns="0" bIns="0" rtlCol="0" anchor="t">
+            <a:off x="7799832" y="4974336"/>
+            <a:ext cx="3145536" cy="576072"/>
+          </a:xfrm>
+          <a:prstGeom prst="rect">
+            <a:avLst/>
+          </a:prstGeom>
+          <a:noFill/>
+          <a:ln/>
+        </p:spPr>
+        <p:txBody>
+          <a:bodyPr wrap="square" lIns="254" tIns="254" rIns="254" bIns="254" rtlCol="0" anchor="t">
             <a:normAutofit/>
           </a:bodyPr>
           <a:lstStyle/>
@@ -14379,7 +14624,7 @@
               <a:buNone/>
             </a:pPr>
             <a:r>
-              <a:rPr lang="en-US" sz="1550" dirty="0">
+              <a:rPr lang="en-US" sz="1320" dirty="0">
                 <a:solidFill>
                   <a:srgbClr val="17364A"/>
                 </a:solidFill>
@@ -14387,9 +14632,9 @@
                 <a:ea typeface="Aptos" pitchFamily="34" charset="-122"/>
                 <a:cs typeface="Aptos" pitchFamily="34" charset="-120"/>
               </a:rPr>
-              <a:t>Use the assignment to test whether you can explain the concept, apply it to a realistic public health situation, and identify what would need review before the work moves forward.</a:t>
-            </a:r>
-            <a:endParaRPr lang="en-US" sz="1550" dirty="0"/>
+              <a:t>Use the assignment to test whether you can explain the concept, apply it to a realistic public health situation, and.</a:t>
+            </a:r>
+            <a:endParaRPr lang="en-US" sz="1320" dirty="0"/>
           </a:p>
         </p:txBody>
       </p:sp>
@@ -14690,49 +14935,58 @@
           <a:ln/>
         </p:spPr>
         <p:txBody>
-          <a:bodyPr wrap="square" lIns="635" tIns="635" rIns="635" bIns="635" rtlCol="0" anchor="t">
+          <a:bodyPr wrap="square" lIns="1016" tIns="1016" rIns="1016" bIns="1016" rtlCol="0" anchor="t">
             <a:normAutofit/>
           </a:bodyPr>
           <a:lstStyle/>
           <a:p>
+            <a:pPr indent="0" marL="0">
+              <a:buNone/>
+            </a:pPr>
             <a:r>
               <a:rPr lang="en-US" sz="2100" dirty="0">
                 <a:solidFill>
-                  <a:srgbClr val="17364A"/>
-                </a:solidFill>
-                <a:latin typeface="Aptos" pitchFamily="34" charset="0"/>
-                <a:ea typeface="Aptos" pitchFamily="34" charset="-122"/>
-                <a:cs typeface="Aptos" pitchFamily="34" charset="-120"/>
-              </a:rPr>
-              <a:t>AI projects require disciplined implementation planning because they combine technology, data,.</a:t>
+                  <a:srgbClr val="003A63"/>
+                </a:solidFill>
+                <a:latin typeface="Aptos" pitchFamily="34" charset="0"/>
+                <a:ea typeface="Aptos" pitchFamily="34" charset="-122"/>
+                <a:cs typeface="Aptos" pitchFamily="34" charset="-120"/>
+              </a:rPr>
+              <a:t>• AI projects require disciplined implementation planning because they combine technology, data,.</a:t>
             </a:r>
             <a:endParaRPr lang="en-US" sz="2100" dirty="0"/>
           </a:p>
           <a:p>
+            <a:pPr indent="0" marL="0">
+              <a:buNone/>
+            </a:pPr>
             <a:r>
               <a:rPr lang="en-US" sz="2100" dirty="0">
                 <a:solidFill>
-                  <a:srgbClr val="17364A"/>
-                </a:solidFill>
-                <a:latin typeface="Aptos" pitchFamily="34" charset="0"/>
-                <a:ea typeface="Aptos" pitchFamily="34" charset="-122"/>
-                <a:cs typeface="Aptos" pitchFamily="34" charset="-120"/>
-              </a:rPr>
-              <a:t>A project that appears small, such as adding an AI summarization tool, may still require data access.</a:t>
+                  <a:srgbClr val="003A63"/>
+                </a:solidFill>
+                <a:latin typeface="Aptos" pitchFamily="34" charset="0"/>
+                <a:ea typeface="Aptos" pitchFamily="34" charset="-122"/>
+                <a:cs typeface="Aptos" pitchFamily="34" charset="-120"/>
+              </a:rPr>
+              <a:t>• A project that appears small, such as adding an AI summarization tool, may still require data.</a:t>
             </a:r>
             <a:endParaRPr lang="en-US" sz="2100" dirty="0"/>
           </a:p>
           <a:p>
+            <a:pPr indent="0" marL="0">
+              <a:buNone/>
+            </a:pPr>
             <a:r>
               <a:rPr lang="en-US" sz="2100" dirty="0">
                 <a:solidFill>
-                  <a:srgbClr val="17364A"/>
-                </a:solidFill>
-                <a:latin typeface="Aptos" pitchFamily="34" charset="0"/>
-                <a:ea typeface="Aptos" pitchFamily="34" charset="-122"/>
-                <a:cs typeface="Aptos" pitchFamily="34" charset="-120"/>
-              </a:rPr>
-              <a:t>Public health agencies need project management methods that account for these dependencies before.</a:t>
+                  <a:srgbClr val="003A63"/>
+                </a:solidFill>
+                <a:latin typeface="Aptos" pitchFamily="34" charset="0"/>
+                <a:ea typeface="Aptos" pitchFamily="34" charset="-122"/>
+                <a:cs typeface="Aptos" pitchFamily="34" charset="-120"/>
+              </a:rPr>
+              <a:t>• Public health agencies need project management methods that account for these dependencies.</a:t>
             </a:r>
             <a:endParaRPr lang="en-US" sz="2100" dirty="0"/>
           </a:p>
@@ -14812,17 +15066,17 @@
         </p:nvSpPr>
         <p:spPr>
           <a:xfrm>
-            <a:off x="7799832" y="1828800"/>
-            <a:ext cx="3145536" cy="685800"/>
-          </a:xfrm>
-          <a:prstGeom prst="rect">
-            <a:avLst/>
-          </a:prstGeom>
-          <a:noFill/>
-          <a:ln/>
-        </p:spPr>
-        <p:txBody>
-          <a:bodyPr wrap="square" lIns="0" tIns="0" rIns="0" bIns="0" rtlCol="0" anchor="t">
+            <a:off x="7799832" y="1801368"/>
+            <a:ext cx="3145536" cy="758952"/>
+          </a:xfrm>
+          <a:prstGeom prst="rect">
+            <a:avLst/>
+          </a:prstGeom>
+          <a:noFill/>
+          <a:ln/>
+        </p:spPr>
+        <p:txBody>
+          <a:bodyPr wrap="square" lIns="254" tIns="254" rIns="254" bIns="254" rtlCol="0" anchor="t">
             <a:normAutofit/>
           </a:bodyPr>
           <a:lstStyle/>
@@ -14831,7 +15085,7 @@
               <a:buNone/>
             </a:pPr>
             <a:r>
-              <a:rPr lang="en-US" sz="1550" dirty="0">
+              <a:rPr lang="en-US" sz="1320" dirty="0">
                 <a:solidFill>
                   <a:srgbClr val="17364A"/>
                 </a:solidFill>
@@ -14841,7 +15095,7 @@
               </a:rPr>
               <a:t>AI projects require disciplined implementation planning because they combine technology, data,.</a:t>
             </a:r>
-            <a:endParaRPr lang="en-US" sz="1550" dirty="0"/>
+            <a:endParaRPr lang="en-US" sz="1320" dirty="0"/>
           </a:p>
         </p:txBody>
       </p:sp>
@@ -14929,13 +15183,16 @@
           <a:ln/>
         </p:spPr>
         <p:txBody>
-          <a:bodyPr wrap="square" lIns="254" tIns="254" rIns="254" bIns="254" rtlCol="0" anchor="t">
+          <a:bodyPr wrap="square" lIns="508" tIns="508" rIns="508" bIns="508" rtlCol="0" anchor="t">
             <a:normAutofit/>
           </a:bodyPr>
           <a:lstStyle/>
           <a:p>
-            <a:r>
-              <a:rPr lang="en-US" sz="1380" dirty="0">
+            <a:pPr indent="0" marL="0">
+              <a:buNone/>
+            </a:pPr>
+            <a:r>
+              <a:rPr lang="en-US" sz="1220" dirty="0">
                 <a:solidFill>
                   <a:srgbClr val="17364A"/>
                 </a:solidFill>
@@ -14943,13 +15200,16 @@
                 <a:ea typeface="Aptos" pitchFamily="34" charset="-122"/>
                 <a:cs typeface="Aptos" pitchFamily="34" charset="-120"/>
               </a:rPr>
-              <a:t>AI projects require disciplined implementation planning because they combine technology,.</a:t>
-            </a:r>
-            <a:endParaRPr lang="en-US" sz="1380" dirty="0"/>
-          </a:p>
-          <a:p>
-            <a:r>
-              <a:rPr lang="en-US" sz="1380" dirty="0">
+              <a:t>AI projects require disciplined implementation planning because.</a:t>
+            </a:r>
+            <a:endParaRPr lang="en-US" sz="1220" dirty="0"/>
+          </a:p>
+          <a:p>
+            <a:pPr indent="0" marL="0">
+              <a:buNone/>
+            </a:pPr>
+            <a:r>
+              <a:rPr lang="en-US" sz="1220" dirty="0">
                 <a:solidFill>
                   <a:srgbClr val="17364A"/>
                 </a:solidFill>
@@ -14957,13 +15217,16 @@
                 <a:ea typeface="Aptos" pitchFamily="34" charset="-122"/>
                 <a:cs typeface="Aptos" pitchFamily="34" charset="-120"/>
               </a:rPr>
-              <a:t>A project that appears small, such as adding an AI summarization tool, may still require.</a:t>
-            </a:r>
-            <a:endParaRPr lang="en-US" sz="1380" dirty="0"/>
-          </a:p>
-          <a:p>
-            <a:r>
-              <a:rPr lang="en-US" sz="1380" dirty="0">
+              <a:t>A project that appears small, such as adding an AI summarization.</a:t>
+            </a:r>
+            <a:endParaRPr lang="en-US" sz="1220" dirty="0"/>
+          </a:p>
+          <a:p>
+            <a:pPr indent="0" marL="0">
+              <a:buNone/>
+            </a:pPr>
+            <a:r>
+              <a:rPr lang="en-US" sz="1220" dirty="0">
                 <a:solidFill>
                   <a:srgbClr val="17364A"/>
                 </a:solidFill>
@@ -14971,9 +15234,9 @@
                 <a:ea typeface="Aptos" pitchFamily="34" charset="-122"/>
                 <a:cs typeface="Aptos" pitchFamily="34" charset="-120"/>
               </a:rPr>
-              <a:t>Public health agencies need project management methods that account for these dependencies.</a:t>
-            </a:r>
-            <a:endParaRPr lang="en-US" sz="1380" dirty="0"/>
+              <a:t>Public health agencies need project management methods that.</a:t>
+            </a:r>
+            <a:endParaRPr lang="en-US" sz="1220" dirty="0"/>
           </a:p>
         </p:txBody>
       </p:sp>
@@ -15051,17 +15314,17 @@
         </p:nvSpPr>
         <p:spPr>
           <a:xfrm>
-            <a:off x="7799832" y="5001768"/>
-            <a:ext cx="3145536" cy="502920"/>
-          </a:xfrm>
-          <a:prstGeom prst="rect">
-            <a:avLst/>
-          </a:prstGeom>
-          <a:noFill/>
-          <a:ln/>
-        </p:spPr>
-        <p:txBody>
-          <a:bodyPr wrap="square" lIns="0" tIns="0" rIns="0" bIns="0" rtlCol="0" anchor="t">
+            <a:off x="7799832" y="4974336"/>
+            <a:ext cx="3145536" cy="576072"/>
+          </a:xfrm>
+          <a:prstGeom prst="rect">
+            <a:avLst/>
+          </a:prstGeom>
+          <a:noFill/>
+          <a:ln/>
+        </p:spPr>
+        <p:txBody>
+          <a:bodyPr wrap="square" lIns="254" tIns="254" rIns="254" bIns="254" rtlCol="0" anchor="t">
             <a:normAutofit/>
           </a:bodyPr>
           <a:lstStyle/>
@@ -15070,7 +15333,7 @@
               <a:buNone/>
             </a:pPr>
             <a:r>
-              <a:rPr lang="en-US" sz="1550" dirty="0">
+              <a:rPr lang="en-US" sz="1320" dirty="0">
                 <a:solidFill>
                   <a:srgbClr val="17364A"/>
                 </a:solidFill>
@@ -15078,9 +15341,9 @@
                 <a:ea typeface="Aptos" pitchFamily="34" charset="-122"/>
                 <a:cs typeface="Aptos" pitchFamily="34" charset="-120"/>
               </a:rPr>
-              <a:t>Use the concept to clarify workflow changes, dependencies, staffing, procurement requirements, training needs, and implementation checkpoints.</a:t>
-            </a:r>
-            <a:endParaRPr lang="en-US" sz="1550" dirty="0"/>
+              <a:t>Use the concept to clarify workflow changes, dependencies, staffing, procurement requirements, training needs, and.</a:t>
+            </a:r>
+            <a:endParaRPr lang="en-US" sz="1320" dirty="0"/>
           </a:p>
         </p:txBody>
       </p:sp>
@@ -15381,49 +15644,58 @@
           <a:ln/>
         </p:spPr>
         <p:txBody>
-          <a:bodyPr wrap="square" lIns="635" tIns="635" rIns="635" bIns="635" rtlCol="0" anchor="t">
+          <a:bodyPr wrap="square" lIns="1016" tIns="1016" rIns="1016" bIns="1016" rtlCol="0" anchor="t">
             <a:normAutofit/>
           </a:bodyPr>
           <a:lstStyle/>
           <a:p>
+            <a:pPr indent="0" marL="0">
+              <a:buNone/>
+            </a:pPr>
             <a:r>
               <a:rPr lang="en-US" sz="2100" dirty="0">
                 <a:solidFill>
-                  <a:srgbClr val="17364A"/>
-                </a:solidFill>
-                <a:latin typeface="Aptos" pitchFamily="34" charset="0"/>
-                <a:ea typeface="Aptos" pitchFamily="34" charset="-122"/>
-                <a:cs typeface="Aptos" pitchFamily="34" charset="-120"/>
-              </a:rPr>
-              <a:t>A public health agency plans to pilot an AI tool that drafts summaries of incoming case reports.</a:t>
+                  <a:srgbClr val="003A63"/>
+                </a:solidFill>
+                <a:latin typeface="Aptos" pitchFamily="34" charset="0"/>
+                <a:ea typeface="Aptos" pitchFamily="34" charset="-122"/>
+                <a:cs typeface="Aptos" pitchFamily="34" charset="-120"/>
+              </a:rPr>
+              <a:t>• A public health agency plans to pilot an AI tool that drafts summaries of incoming case reports.</a:t>
             </a:r>
             <a:endParaRPr lang="en-US" sz="2100" dirty="0"/>
           </a:p>
           <a:p>
+            <a:pPr indent="0" marL="0">
+              <a:buNone/>
+            </a:pPr>
             <a:r>
               <a:rPr lang="en-US" sz="2100" dirty="0">
                 <a:solidFill>
-                  <a:srgbClr val="17364A"/>
-                </a:solidFill>
-                <a:latin typeface="Aptos" pitchFamily="34" charset="0"/>
-                <a:ea typeface="Aptos" pitchFamily="34" charset="-122"/>
-                <a:cs typeface="Aptos" pitchFamily="34" charset="-120"/>
-              </a:rPr>
-              <a:t>The project plan identifies governance approval, data access, system integration, validation, user.</a:t>
+                  <a:srgbClr val="003A63"/>
+                </a:solidFill>
+                <a:latin typeface="Aptos" pitchFamily="34" charset="0"/>
+                <a:ea typeface="Aptos" pitchFamily="34" charset="-122"/>
+                <a:cs typeface="Aptos" pitchFamily="34" charset="-120"/>
+              </a:rPr>
+              <a:t>• The project plan identifies governance approval, data access, system integration, validation,.</a:t>
             </a:r>
             <a:endParaRPr lang="en-US" sz="2100" dirty="0"/>
           </a:p>
           <a:p>
+            <a:pPr indent="0" marL="0">
+              <a:buNone/>
+            </a:pPr>
             <a:r>
               <a:rPr lang="en-US" sz="2100" dirty="0">
                 <a:solidFill>
-                  <a:srgbClr val="17364A"/>
-                </a:solidFill>
-                <a:latin typeface="Aptos" pitchFamily="34" charset="0"/>
-                <a:ea typeface="Aptos" pitchFamily="34" charset="-122"/>
-                <a:cs typeface="Aptos" pitchFamily="34" charset="-120"/>
-              </a:rPr>
-              <a:t>The project cannot launch simply because the tool works in a demonstration.</a:t>
+                  <a:srgbClr val="003A63"/>
+                </a:solidFill>
+                <a:latin typeface="Aptos" pitchFamily="34" charset="0"/>
+                <a:ea typeface="Aptos" pitchFamily="34" charset="-122"/>
+                <a:cs typeface="Aptos" pitchFamily="34" charset="-120"/>
+              </a:rPr>
+              <a:t>• The project cannot launch simply because the tool works in a demonstration.</a:t>
             </a:r>
             <a:endParaRPr lang="en-US" sz="2100" dirty="0"/>
           </a:p>
@@ -15503,17 +15775,17 @@
         </p:nvSpPr>
         <p:spPr>
           <a:xfrm>
-            <a:off x="7799832" y="1828800"/>
-            <a:ext cx="3145536" cy="685800"/>
-          </a:xfrm>
-          <a:prstGeom prst="rect">
-            <a:avLst/>
-          </a:prstGeom>
-          <a:noFill/>
-          <a:ln/>
-        </p:spPr>
-        <p:txBody>
-          <a:bodyPr wrap="square" lIns="0" tIns="0" rIns="0" bIns="0" rtlCol="0" anchor="t">
+            <a:off x="7799832" y="1801368"/>
+            <a:ext cx="3145536" cy="758952"/>
+          </a:xfrm>
+          <a:prstGeom prst="rect">
+            <a:avLst/>
+          </a:prstGeom>
+          <a:noFill/>
+          <a:ln/>
+        </p:spPr>
+        <p:txBody>
+          <a:bodyPr wrap="square" lIns="254" tIns="254" rIns="254" bIns="254" rtlCol="0" anchor="t">
             <a:normAutofit/>
           </a:bodyPr>
           <a:lstStyle/>
@@ -15522,7 +15794,7 @@
               <a:buNone/>
             </a:pPr>
             <a:r>
-              <a:rPr lang="en-US" sz="1550" dirty="0">
+              <a:rPr lang="en-US" sz="1320" dirty="0">
                 <a:solidFill>
                   <a:srgbClr val="17364A"/>
                 </a:solidFill>
@@ -15532,7 +15804,7 @@
               </a:rPr>
               <a:t>A public health agency plans to pilot an AI tool that drafts summaries of incoming case reports.</a:t>
             </a:r>
-            <a:endParaRPr lang="en-US" sz="1550" dirty="0"/>
+            <a:endParaRPr lang="en-US" sz="1320" dirty="0"/>
           </a:p>
         </p:txBody>
       </p:sp>
@@ -15620,13 +15892,16 @@
           <a:ln/>
         </p:spPr>
         <p:txBody>
-          <a:bodyPr wrap="square" lIns="254" tIns="254" rIns="254" bIns="254" rtlCol="0" anchor="t">
+          <a:bodyPr wrap="square" lIns="508" tIns="508" rIns="508" bIns="508" rtlCol="0" anchor="t">
             <a:normAutofit/>
           </a:bodyPr>
           <a:lstStyle/>
           <a:p>
-            <a:r>
-              <a:rPr lang="en-US" sz="1380" dirty="0">
+            <a:pPr indent="0" marL="0">
+              <a:buNone/>
+            </a:pPr>
+            <a:r>
+              <a:rPr lang="en-US" sz="1220" dirty="0">
                 <a:solidFill>
                   <a:srgbClr val="17364A"/>
                 </a:solidFill>
@@ -15634,13 +15909,16 @@
                 <a:ea typeface="Aptos" pitchFamily="34" charset="-122"/>
                 <a:cs typeface="Aptos" pitchFamily="34" charset="-120"/>
               </a:rPr>
-              <a:t>The project plan identifies governance approval, data access, system integration,.</a:t>
-            </a:r>
-            <a:endParaRPr lang="en-US" sz="1380" dirty="0"/>
-          </a:p>
-          <a:p>
-            <a:r>
-              <a:rPr lang="en-US" sz="1380" dirty="0">
+              <a:t>The project plan identifies governance approval, data access,.</a:t>
+            </a:r>
+            <a:endParaRPr lang="en-US" sz="1220" dirty="0"/>
+          </a:p>
+          <a:p>
+            <a:pPr indent="0" marL="0">
+              <a:buNone/>
+            </a:pPr>
+            <a:r>
+              <a:rPr lang="en-US" sz="1220" dirty="0">
                 <a:solidFill>
                   <a:srgbClr val="17364A"/>
                 </a:solidFill>
@@ -15648,9 +15926,9 @@
                 <a:ea typeface="Aptos" pitchFamily="34" charset="-122"/>
                 <a:cs typeface="Aptos" pitchFamily="34" charset="-120"/>
               </a:rPr>
-              <a:t>It must pass readiness checks showing that staff know how to review the output, errors can.</a:t>
-            </a:r>
-            <a:endParaRPr lang="en-US" sz="1380" dirty="0"/>
+              <a:t>It must pass readiness checks showing that staff know how to.</a:t>
+            </a:r>
+            <a:endParaRPr lang="en-US" sz="1220" dirty="0"/>
           </a:p>
         </p:txBody>
       </p:sp>
@@ -15728,17 +16006,17 @@
         </p:nvSpPr>
         <p:spPr>
           <a:xfrm>
-            <a:off x="7799832" y="5001768"/>
-            <a:ext cx="3145536" cy="502920"/>
-          </a:xfrm>
-          <a:prstGeom prst="rect">
-            <a:avLst/>
-          </a:prstGeom>
-          <a:noFill/>
-          <a:ln/>
-        </p:spPr>
-        <p:txBody>
-          <a:bodyPr wrap="square" lIns="0" tIns="0" rIns="0" bIns="0" rtlCol="0" anchor="t">
+            <a:off x="7799832" y="4974336"/>
+            <a:ext cx="3145536" cy="576072"/>
+          </a:xfrm>
+          <a:prstGeom prst="rect">
+            <a:avLst/>
+          </a:prstGeom>
+          <a:noFill/>
+          <a:ln/>
+        </p:spPr>
+        <p:txBody>
+          <a:bodyPr wrap="square" lIns="254" tIns="254" rIns="254" bIns="254" rtlCol="0" anchor="t">
             <a:normAutofit/>
           </a:bodyPr>
           <a:lstStyle/>
@@ -15747,7 +16025,7 @@
               <a:buNone/>
             </a:pPr>
             <a:r>
-              <a:rPr lang="en-US" sz="1550" dirty="0">
+              <a:rPr lang="en-US" sz="1320" dirty="0">
                 <a:solidFill>
                   <a:srgbClr val="17364A"/>
                 </a:solidFill>
@@ -15755,9 +16033,9 @@
                 <a:ea typeface="Aptos" pitchFamily="34" charset="-122"/>
                 <a:cs typeface="Aptos" pitchFamily="34" charset="-120"/>
               </a:rPr>
-              <a:t>Use the concept to clarify workflow changes, dependencies, staffing, procurement requirements, training needs, and implementation checkpoints.</a:t>
-            </a:r>
-            <a:endParaRPr lang="en-US" sz="1550" dirty="0"/>
+              <a:t>Use the concept to clarify workflow changes, dependencies, staffing, procurement requirements, training needs, and.</a:t>
+            </a:r>
+            <a:endParaRPr lang="en-US" sz="1320" dirty="0"/>
           </a:p>
         </p:txBody>
       </p:sp>
@@ -16058,49 +16336,58 @@
           <a:ln/>
         </p:spPr>
         <p:txBody>
-          <a:bodyPr wrap="square" lIns="635" tIns="635" rIns="635" bIns="635" rtlCol="0" anchor="t">
+          <a:bodyPr wrap="square" lIns="1016" tIns="1016" rIns="1016" bIns="1016" rtlCol="0" anchor="t">
             <a:normAutofit/>
           </a:bodyPr>
           <a:lstStyle/>
           <a:p>
+            <a:pPr indent="0" marL="0">
+              <a:buNone/>
+            </a:pPr>
             <a:r>
               <a:rPr lang="en-US" sz="2100" dirty="0">
                 <a:solidFill>
-                  <a:srgbClr val="17364A"/>
-                </a:solidFill>
-                <a:latin typeface="Aptos" pitchFamily="34" charset="0"/>
-                <a:ea typeface="Aptos" pitchFamily="34" charset="-122"/>
-                <a:cs typeface="Aptos" pitchFamily="34" charset="-120"/>
-              </a:rPr>
-              <a:t>AI project planning should begin with a charter that defines the use case and sets boundaries.</a:t>
+                  <a:srgbClr val="003A63"/>
+                </a:solidFill>
+                <a:latin typeface="Aptos" pitchFamily="34" charset="0"/>
+                <a:ea typeface="Aptos" pitchFamily="34" charset="-122"/>
+                <a:cs typeface="Aptos" pitchFamily="34" charset="-120"/>
+              </a:rPr>
+              <a:t>• AI project planning should begin with a charter that defines the use case and sets boundaries.</a:t>
             </a:r>
             <a:endParaRPr lang="en-US" sz="2100" dirty="0"/>
           </a:p>
           <a:p>
+            <a:pPr indent="0" marL="0">
+              <a:buNone/>
+            </a:pPr>
             <a:r>
               <a:rPr lang="en-US" sz="2100" dirty="0">
                 <a:solidFill>
-                  <a:srgbClr val="17364A"/>
-                </a:solidFill>
-                <a:latin typeface="Aptos" pitchFamily="34" charset="0"/>
-                <a:ea typeface="Aptos" pitchFamily="34" charset="-122"/>
-                <a:cs typeface="Aptos" pitchFamily="34" charset="-120"/>
-              </a:rPr>
-              <a:t>The charter should explain the public health problem, intended users, expected benefits, data involved,.</a:t>
+                  <a:srgbClr val="003A63"/>
+                </a:solidFill>
+                <a:latin typeface="Aptos" pitchFamily="34" charset="0"/>
+                <a:ea typeface="Aptos" pitchFamily="34" charset="-122"/>
+                <a:cs typeface="Aptos" pitchFamily="34" charset="-120"/>
+              </a:rPr>
+              <a:t>• The charter should explain the public health problem, intended users, expected benefits, data.</a:t>
             </a:r>
             <a:endParaRPr lang="en-US" sz="2100" dirty="0"/>
           </a:p>
           <a:p>
+            <a:pPr indent="0" marL="0">
+              <a:buNone/>
+            </a:pPr>
             <a:r>
               <a:rPr lang="en-US" sz="2100" dirty="0">
                 <a:solidFill>
-                  <a:srgbClr val="17364A"/>
-                </a:solidFill>
-                <a:latin typeface="Aptos" pitchFamily="34" charset="0"/>
-                <a:ea typeface="Aptos" pitchFamily="34" charset="-122"/>
-                <a:cs typeface="Aptos" pitchFamily="34" charset="-120"/>
-              </a:rPr>
-              <a:t>It should also identify the sponsor, product owner, implementation lead, technical lead, privacy or.</a:t>
+                  <a:srgbClr val="003A63"/>
+                </a:solidFill>
+                <a:latin typeface="Aptos" pitchFamily="34" charset="0"/>
+                <a:ea typeface="Aptos" pitchFamily="34" charset="-122"/>
+                <a:cs typeface="Aptos" pitchFamily="34" charset="-120"/>
+              </a:rPr>
+              <a:t>• It should also identify the sponsor, product owner, implementation lead, technical lead,.</a:t>
             </a:r>
             <a:endParaRPr lang="en-US" sz="2100" dirty="0"/>
           </a:p>
@@ -16180,17 +16467,17 @@
         </p:nvSpPr>
         <p:spPr>
           <a:xfrm>
-            <a:off x="7799832" y="1828800"/>
-            <a:ext cx="3145536" cy="685800"/>
-          </a:xfrm>
-          <a:prstGeom prst="rect">
-            <a:avLst/>
-          </a:prstGeom>
-          <a:noFill/>
-          <a:ln/>
-        </p:spPr>
-        <p:txBody>
-          <a:bodyPr wrap="square" lIns="0" tIns="0" rIns="0" bIns="0" rtlCol="0" anchor="t">
+            <a:off x="7799832" y="1801368"/>
+            <a:ext cx="3145536" cy="758952"/>
+          </a:xfrm>
+          <a:prstGeom prst="rect">
+            <a:avLst/>
+          </a:prstGeom>
+          <a:noFill/>
+          <a:ln/>
+        </p:spPr>
+        <p:txBody>
+          <a:bodyPr wrap="square" lIns="254" tIns="254" rIns="254" bIns="254" rtlCol="0" anchor="t">
             <a:normAutofit/>
           </a:bodyPr>
           <a:lstStyle/>
@@ -16199,7 +16486,7 @@
               <a:buNone/>
             </a:pPr>
             <a:r>
-              <a:rPr lang="en-US" sz="1550" dirty="0">
+              <a:rPr lang="en-US" sz="1320" dirty="0">
                 <a:solidFill>
                   <a:srgbClr val="17364A"/>
                 </a:solidFill>
@@ -16209,7 +16496,7 @@
               </a:rPr>
               <a:t>AI project planning should begin with a charter that defines the use case and sets boundaries.</a:t>
             </a:r>
-            <a:endParaRPr lang="en-US" sz="1550" dirty="0"/>
+            <a:endParaRPr lang="en-US" sz="1320" dirty="0"/>
           </a:p>
         </p:txBody>
       </p:sp>
@@ -16297,13 +16584,16 @@
           <a:ln/>
         </p:spPr>
         <p:txBody>
-          <a:bodyPr wrap="square" lIns="254" tIns="254" rIns="254" bIns="254" rtlCol="0" anchor="t">
+          <a:bodyPr wrap="square" lIns="508" tIns="508" rIns="508" bIns="508" rtlCol="0" anchor="t">
             <a:normAutofit/>
           </a:bodyPr>
           <a:lstStyle/>
           <a:p>
-            <a:r>
-              <a:rPr lang="en-US" sz="1380" dirty="0">
+            <a:pPr indent="0" marL="0">
+              <a:buNone/>
+            </a:pPr>
+            <a:r>
+              <a:rPr lang="en-US" sz="1220" dirty="0">
                 <a:solidFill>
                   <a:srgbClr val="17364A"/>
                 </a:solidFill>
@@ -16311,13 +16601,16 @@
                 <a:ea typeface="Aptos" pitchFamily="34" charset="-122"/>
                 <a:cs typeface="Aptos" pitchFamily="34" charset="-120"/>
               </a:rPr>
-              <a:t>The charter should explain the public health problem, intended users, expected benefits,.</a:t>
-            </a:r>
-            <a:endParaRPr lang="en-US" sz="1380" dirty="0"/>
-          </a:p>
-          <a:p>
-            <a:r>
-              <a:rPr lang="en-US" sz="1380" dirty="0">
+              <a:t>The charter should explain the public health problem, intended.</a:t>
+            </a:r>
+            <a:endParaRPr lang="en-US" sz="1220" dirty="0"/>
+          </a:p>
+          <a:p>
+            <a:pPr indent="0" marL="0">
+              <a:buNone/>
+            </a:pPr>
+            <a:r>
+              <a:rPr lang="en-US" sz="1220" dirty="0">
                 <a:solidFill>
                   <a:srgbClr val="17364A"/>
                 </a:solidFill>
@@ -16325,13 +16618,16 @@
                 <a:ea typeface="Aptos" pitchFamily="34" charset="-122"/>
                 <a:cs typeface="Aptos" pitchFamily="34" charset="-120"/>
               </a:rPr>
-              <a:t>It should also identify the sponsor, product owner, implementation lead, technical lead,.</a:t>
-            </a:r>
-            <a:endParaRPr lang="en-US" sz="1380" dirty="0"/>
-          </a:p>
-          <a:p>
-            <a:r>
-              <a:rPr lang="en-US" sz="1380" dirty="0">
+              <a:t>It should also identify the sponsor, product owner, implementation.</a:t>
+            </a:r>
+            <a:endParaRPr lang="en-US" sz="1220" dirty="0"/>
+          </a:p>
+          <a:p>
+            <a:pPr indent="0" marL="0">
+              <a:buNone/>
+            </a:pPr>
+            <a:r>
+              <a:rPr lang="en-US" sz="1220" dirty="0">
                 <a:solidFill>
                   <a:srgbClr val="17364A"/>
                 </a:solidFill>
@@ -16341,7 +16637,7 @@
               </a:rPr>
               <a:t>Implementation should be organized into phases.</a:t>
             </a:r>
-            <a:endParaRPr lang="en-US" sz="1380" dirty="0"/>
+            <a:endParaRPr lang="en-US" sz="1220" dirty="0"/>
           </a:p>
         </p:txBody>
       </p:sp>
@@ -16419,17 +16715,17 @@
         </p:nvSpPr>
         <p:spPr>
           <a:xfrm>
-            <a:off x="7799832" y="5001768"/>
-            <a:ext cx="3145536" cy="502920"/>
-          </a:xfrm>
-          <a:prstGeom prst="rect">
-            <a:avLst/>
-          </a:prstGeom>
-          <a:noFill/>
-          <a:ln/>
-        </p:spPr>
-        <p:txBody>
-          <a:bodyPr wrap="square" lIns="0" tIns="0" rIns="0" bIns="0" rtlCol="0" anchor="t">
+            <a:off x="7799832" y="4974336"/>
+            <a:ext cx="3145536" cy="576072"/>
+          </a:xfrm>
+          <a:prstGeom prst="rect">
+            <a:avLst/>
+          </a:prstGeom>
+          <a:noFill/>
+          <a:ln/>
+        </p:spPr>
+        <p:txBody>
+          <a:bodyPr wrap="square" lIns="254" tIns="254" rIns="254" bIns="254" rtlCol="0" anchor="t">
             <a:normAutofit/>
           </a:bodyPr>
           <a:lstStyle/>
@@ -16438,7 +16734,7 @@
               <a:buNone/>
             </a:pPr>
             <a:r>
-              <a:rPr lang="en-US" sz="1550" dirty="0">
+              <a:rPr lang="en-US" sz="1320" dirty="0">
                 <a:solidFill>
                   <a:srgbClr val="17364A"/>
                 </a:solidFill>
@@ -16446,9 +16742,9 @@
                 <a:ea typeface="Aptos" pitchFamily="34" charset="-122"/>
                 <a:cs typeface="Aptos" pitchFamily="34" charset="-120"/>
               </a:rPr>
-              <a:t>Use the concept to clarify workflow changes, dependencies, staffing, procurement requirements, training needs, and implementation checkpoints.</a:t>
-            </a:r>
-            <a:endParaRPr lang="en-US" sz="1550" dirty="0"/>
+              <a:t>Use the concept to clarify workflow changes, dependencies, staffing, procurement requirements, training needs, and.</a:t>
+            </a:r>
+            <a:endParaRPr lang="en-US" sz="1320" dirty="0"/>
           </a:p>
         </p:txBody>
       </p:sp>
@@ -16749,49 +17045,58 @@
           <a:ln/>
         </p:spPr>
         <p:txBody>
-          <a:bodyPr wrap="square" lIns="635" tIns="635" rIns="635" bIns="635" rtlCol="0" anchor="t">
+          <a:bodyPr wrap="square" lIns="1016" tIns="1016" rIns="1016" bIns="1016" rtlCol="0" anchor="t">
             <a:normAutofit/>
           </a:bodyPr>
           <a:lstStyle/>
           <a:p>
+            <a:pPr indent="0" marL="0">
+              <a:buNone/>
+            </a:pPr>
             <a:r>
               <a:rPr lang="en-US" sz="2100" dirty="0">
                 <a:solidFill>
-                  <a:srgbClr val="17364A"/>
-                </a:solidFill>
-                <a:latin typeface="Aptos" pitchFamily="34" charset="0"/>
-                <a:ea typeface="Aptos" pitchFamily="34" charset="-122"/>
-                <a:cs typeface="Aptos" pitchFamily="34" charset="-120"/>
-              </a:rPr>
-              <a:t>Transition to operations is often neglected.</a:t>
+                  <a:srgbClr val="003A63"/>
+                </a:solidFill>
+                <a:latin typeface="Aptos" pitchFamily="34" charset="0"/>
+                <a:ea typeface="Aptos" pitchFamily="34" charset="-122"/>
+                <a:cs typeface="Aptos" pitchFamily="34" charset="-120"/>
+              </a:rPr>
+              <a:t>• Transition to operations is often neglected.</a:t>
             </a:r>
             <a:endParaRPr lang="en-US" sz="2100" dirty="0"/>
           </a:p>
           <a:p>
+            <a:pPr indent="0" marL="0">
+              <a:buNone/>
+            </a:pPr>
             <a:r>
               <a:rPr lang="en-US" sz="2100" dirty="0">
                 <a:solidFill>
-                  <a:srgbClr val="17364A"/>
-                </a:solidFill>
-                <a:latin typeface="Aptos" pitchFamily="34" charset="0"/>
-                <a:ea typeface="Aptos" pitchFamily="34" charset="-122"/>
-                <a:cs typeface="Aptos" pitchFamily="34" charset="-120"/>
-              </a:rPr>
-              <a:t>A pilot may show promise, but routine use requires support, monitoring, maintenance, budget, staff.</a:t>
+                  <a:srgbClr val="003A63"/>
+                </a:solidFill>
+                <a:latin typeface="Aptos" pitchFamily="34" charset="0"/>
+                <a:ea typeface="Aptos" pitchFamily="34" charset="-122"/>
+                <a:cs typeface="Aptos" pitchFamily="34" charset="-120"/>
+              </a:rPr>
+              <a:t>• A pilot may show promise, but routine use requires support, monitoring, maintenance, budget,.</a:t>
             </a:r>
             <a:endParaRPr lang="en-US" sz="2100" dirty="0"/>
           </a:p>
           <a:p>
+            <a:pPr indent="0" marL="0">
+              <a:buNone/>
+            </a:pPr>
             <a:r>
               <a:rPr lang="en-US" sz="2100" dirty="0">
                 <a:solidFill>
-                  <a:srgbClr val="17364A"/>
-                </a:solidFill>
-                <a:latin typeface="Aptos" pitchFamily="34" charset="0"/>
-                <a:ea typeface="Aptos" pitchFamily="34" charset="-122"/>
-                <a:cs typeface="Aptos" pitchFamily="34" charset="-120"/>
-              </a:rPr>
-              <a:t>The project plan should define when the implementation team ends and who becomes responsible for.</a:t>
+                  <a:srgbClr val="003A63"/>
+                </a:solidFill>
+                <a:latin typeface="Aptos" pitchFamily="34" charset="0"/>
+                <a:ea typeface="Aptos" pitchFamily="34" charset="-122"/>
+                <a:cs typeface="Aptos" pitchFamily="34" charset="-120"/>
+              </a:rPr>
+              <a:t>• The project plan should define when the implementation team ends and who becomes responsible.</a:t>
             </a:r>
             <a:endParaRPr lang="en-US" sz="2100" dirty="0"/>
           </a:p>
@@ -16871,17 +17176,17 @@
         </p:nvSpPr>
         <p:spPr>
           <a:xfrm>
-            <a:off x="7799832" y="1828800"/>
-            <a:ext cx="3145536" cy="685800"/>
-          </a:xfrm>
-          <a:prstGeom prst="rect">
-            <a:avLst/>
-          </a:prstGeom>
-          <a:noFill/>
-          <a:ln/>
-        </p:spPr>
-        <p:txBody>
-          <a:bodyPr wrap="square" lIns="0" tIns="0" rIns="0" bIns="0" rtlCol="0" anchor="t">
+            <a:off x="7799832" y="1801368"/>
+            <a:ext cx="3145536" cy="758952"/>
+          </a:xfrm>
+          <a:prstGeom prst="rect">
+            <a:avLst/>
+          </a:prstGeom>
+          <a:noFill/>
+          <a:ln/>
+        </p:spPr>
+        <p:txBody>
+          <a:bodyPr wrap="square" lIns="254" tIns="254" rIns="254" bIns="254" rtlCol="0" anchor="t">
             <a:normAutofit/>
           </a:bodyPr>
           <a:lstStyle/>
@@ -16890,7 +17195,7 @@
               <a:buNone/>
             </a:pPr>
             <a:r>
-              <a:rPr lang="en-US" sz="1550" dirty="0">
+              <a:rPr lang="en-US" sz="1320" dirty="0">
                 <a:solidFill>
                   <a:srgbClr val="17364A"/>
                 </a:solidFill>
@@ -16900,7 +17205,7 @@
               </a:rPr>
               <a:t>Transition to operations is often neglected.</a:t>
             </a:r>
-            <a:endParaRPr lang="en-US" sz="1550" dirty="0"/>
+            <a:endParaRPr lang="en-US" sz="1320" dirty="0"/>
           </a:p>
         </p:txBody>
       </p:sp>
@@ -16988,13 +17293,16 @@
           <a:ln/>
         </p:spPr>
         <p:txBody>
-          <a:bodyPr wrap="square" lIns="254" tIns="254" rIns="254" bIns="254" rtlCol="0" anchor="t">
+          <a:bodyPr wrap="square" lIns="508" tIns="508" rIns="508" bIns="508" rtlCol="0" anchor="t">
             <a:normAutofit/>
           </a:bodyPr>
           <a:lstStyle/>
           <a:p>
-            <a:r>
-              <a:rPr lang="en-US" sz="1380" dirty="0">
+            <a:pPr indent="0" marL="0">
+              <a:buNone/>
+            </a:pPr>
+            <a:r>
+              <a:rPr lang="en-US" sz="1220" dirty="0">
                 <a:solidFill>
                   <a:srgbClr val="17364A"/>
                 </a:solidFill>
@@ -17002,13 +17310,16 @@
                 <a:ea typeface="Aptos" pitchFamily="34" charset="-122"/>
                 <a:cs typeface="Aptos" pitchFamily="34" charset="-120"/>
               </a:rPr>
-              <a:t>A pilot may show promise, but routine use requires support, monitoring, maintenance,.</a:t>
-            </a:r>
-            <a:endParaRPr lang="en-US" sz="1380" dirty="0"/>
-          </a:p>
-          <a:p>
-            <a:r>
-              <a:rPr lang="en-US" sz="1380" dirty="0">
+              <a:t>A pilot may show promise, but routine use requires support,.</a:t>
+            </a:r>
+            <a:endParaRPr lang="en-US" sz="1220" dirty="0"/>
+          </a:p>
+          <a:p>
+            <a:pPr indent="0" marL="0">
+              <a:buNone/>
+            </a:pPr>
+            <a:r>
+              <a:rPr lang="en-US" sz="1220" dirty="0">
                 <a:solidFill>
                   <a:srgbClr val="17364A"/>
                 </a:solidFill>
@@ -17016,9 +17327,9 @@
                 <a:ea typeface="Aptos" pitchFamily="34" charset="-122"/>
                 <a:cs typeface="Aptos" pitchFamily="34" charset="-120"/>
               </a:rPr>
-              <a:t>The project plan should define when the implementation team ends and who becomes.</a:t>
-            </a:r>
-            <a:endParaRPr lang="en-US" sz="1380" dirty="0"/>
+              <a:t>The project plan should define when the implementation team ends.</a:t>
+            </a:r>
+            <a:endParaRPr lang="en-US" sz="1220" dirty="0"/>
           </a:p>
         </p:txBody>
       </p:sp>
@@ -17096,17 +17407,17 @@
         </p:nvSpPr>
         <p:spPr>
           <a:xfrm>
-            <a:off x="7799832" y="5001768"/>
-            <a:ext cx="3145536" cy="502920"/>
-          </a:xfrm>
-          <a:prstGeom prst="rect">
-            <a:avLst/>
-          </a:prstGeom>
-          <a:noFill/>
-          <a:ln/>
-        </p:spPr>
-        <p:txBody>
-          <a:bodyPr wrap="square" lIns="0" tIns="0" rIns="0" bIns="0" rtlCol="0" anchor="t">
+            <a:off x="7799832" y="4974336"/>
+            <a:ext cx="3145536" cy="576072"/>
+          </a:xfrm>
+          <a:prstGeom prst="rect">
+            <a:avLst/>
+          </a:prstGeom>
+          <a:noFill/>
+          <a:ln/>
+        </p:spPr>
+        <p:txBody>
+          <a:bodyPr wrap="square" lIns="254" tIns="254" rIns="254" bIns="254" rtlCol="0" anchor="t">
             <a:normAutofit/>
           </a:bodyPr>
           <a:lstStyle/>
@@ -17115,7 +17426,7 @@
               <a:buNone/>
             </a:pPr>
             <a:r>
-              <a:rPr lang="en-US" sz="1550" dirty="0">
+              <a:rPr lang="en-US" sz="1320" dirty="0">
                 <a:solidFill>
                   <a:srgbClr val="17364A"/>
                 </a:solidFill>
@@ -17123,9 +17434,9 @@
                 <a:ea typeface="Aptos" pitchFamily="34" charset="-122"/>
                 <a:cs typeface="Aptos" pitchFamily="34" charset="-120"/>
               </a:rPr>
-              <a:t>Use the concept to clarify workflow changes, dependencies, staffing, procurement requirements, training needs, and implementation checkpoints.</a:t>
-            </a:r>
-            <a:endParaRPr lang="en-US" sz="1550" dirty="0"/>
+              <a:t>Use the concept to clarify workflow changes, dependencies, staffing, procurement requirements, training needs, and.</a:t>
+            </a:r>
+            <a:endParaRPr lang="en-US" sz="1320" dirty="0"/>
           </a:p>
         </p:txBody>
       </p:sp>

--- a/downloads/presentations/modules/pmg-220.pptx
+++ b/downloads/presentations/modules/pmg-220.pptx
@@ -3422,11 +3422,11 @@
         <p:spPr>
           <a:xfrm>
             <a:off x="7635240" y="1325880"/>
-            <a:ext cx="3474720" cy="1325880"/>
+            <a:ext cx="3474720" cy="1207008"/>
           </a:xfrm>
           <a:prstGeom prst="roundRect">
             <a:avLst>
-              <a:gd name="adj" fmla="val 8276"/>
+              <a:gd name="adj" fmla="val 9091"/>
             </a:avLst>
           </a:prstGeom>
           <a:solidFill>
@@ -3488,7 +3488,7 @@
         <p:spPr>
           <a:xfrm>
             <a:off x="7799832" y="1801368"/>
-            <a:ext cx="3145536" cy="758952"/>
+            <a:ext cx="3145536" cy="640080"/>
           </a:xfrm>
           <a:prstGeom prst="rect">
             <a:avLst/>
@@ -3528,7 +3528,7 @@
         </p:nvSpPr>
         <p:spPr>
           <a:xfrm>
-            <a:off x="7635240" y="2788920"/>
+            <a:off x="7635240" y="2670048"/>
             <a:ext cx="3474720" cy="1536192"/>
           </a:xfrm>
           <a:prstGeom prst="roundRect">
@@ -3555,7 +3555,7 @@
         </p:nvSpPr>
         <p:spPr>
           <a:xfrm>
-            <a:off x="7799832" y="2935224"/>
+            <a:off x="7799832" y="2816352"/>
             <a:ext cx="3145536" cy="256032"/>
           </a:xfrm>
           <a:prstGeom prst="rect">
@@ -3594,7 +3594,7 @@
         </p:nvSpPr>
         <p:spPr>
           <a:xfrm>
-            <a:off x="7818120" y="3300984"/>
+            <a:off x="7818120" y="3182112"/>
             <a:ext cx="3090672" cy="877824"/>
           </a:xfrm>
           <a:prstGeom prst="rect">
@@ -3669,12 +3669,12 @@
         </p:nvSpPr>
         <p:spPr>
           <a:xfrm>
-            <a:off x="7635240" y="4498848"/>
-            <a:ext cx="3474720" cy="1143000"/>
+            <a:off x="7635240" y="4343400"/>
+            <a:ext cx="3474720" cy="1255471"/>
           </a:xfrm>
           <a:prstGeom prst="roundRect">
             <a:avLst>
-              <a:gd name="adj" fmla="val 9600"/>
+              <a:gd name="adj" fmla="val 8740"/>
             </a:avLst>
           </a:prstGeom>
           <a:solidFill>
@@ -3696,7 +3696,7 @@
         </p:nvSpPr>
         <p:spPr>
           <a:xfrm>
-            <a:off x="7799832" y="4645152"/>
+            <a:off x="7799832" y="4489704"/>
             <a:ext cx="3145536" cy="256032"/>
           </a:xfrm>
           <a:prstGeom prst="rect">
@@ -3735,8 +3735,8 @@
         </p:nvSpPr>
         <p:spPr>
           <a:xfrm>
-            <a:off x="7799832" y="4974336"/>
-            <a:ext cx="3145536" cy="576072"/>
+            <a:off x="7799832" y="4818888"/>
+            <a:ext cx="3145536" cy="688543"/>
           </a:xfrm>
           <a:prstGeom prst="rect">
             <a:avLst/>
@@ -3762,7 +3762,7 @@
                 <a:ea typeface="Aptos" pitchFamily="34" charset="-122"/>
                 <a:cs typeface="Aptos" pitchFamily="34" charset="-120"/>
               </a:rPr>
-              <a:t>Identify what could go wrong, who could be affected, what safeguards are needed, and what evidence should be reviewed.</a:t>
+              <a:t>Identify what could go wrong, who could be affected, what safeguards are needed, and what evidence should be reviewed before use.</a:t>
             </a:r>
             <a:endParaRPr lang="en-US" sz="1320" dirty="0"/>
           </a:p>
@@ -4131,11 +4131,11 @@
         <p:spPr>
           <a:xfrm>
             <a:off x="7635240" y="1325880"/>
-            <a:ext cx="3474720" cy="1325880"/>
+            <a:ext cx="3474720" cy="1207008"/>
           </a:xfrm>
           <a:prstGeom prst="roundRect">
             <a:avLst>
-              <a:gd name="adj" fmla="val 8276"/>
+              <a:gd name="adj" fmla="val 9091"/>
             </a:avLst>
           </a:prstGeom>
           <a:solidFill>
@@ -4197,7 +4197,7 @@
         <p:spPr>
           <a:xfrm>
             <a:off x="7799832" y="1801368"/>
-            <a:ext cx="3145536" cy="758952"/>
+            <a:ext cx="3145536" cy="640080"/>
           </a:xfrm>
           <a:prstGeom prst="rect">
             <a:avLst/>
@@ -4237,7 +4237,7 @@
         </p:nvSpPr>
         <p:spPr>
           <a:xfrm>
-            <a:off x="7635240" y="2788920"/>
+            <a:off x="7635240" y="2670048"/>
             <a:ext cx="3474720" cy="1536192"/>
           </a:xfrm>
           <a:prstGeom prst="roundRect">
@@ -4264,7 +4264,7 @@
         </p:nvSpPr>
         <p:spPr>
           <a:xfrm>
-            <a:off x="7799832" y="2935224"/>
+            <a:off x="7799832" y="2816352"/>
             <a:ext cx="3145536" cy="256032"/>
           </a:xfrm>
           <a:prstGeom prst="rect">
@@ -4303,7 +4303,7 @@
         </p:nvSpPr>
         <p:spPr>
           <a:xfrm>
-            <a:off x="7818120" y="3300984"/>
+            <a:off x="7818120" y="3182112"/>
             <a:ext cx="3090672" cy="877824"/>
           </a:xfrm>
           <a:prstGeom prst="rect">
@@ -4378,12 +4378,12 @@
         </p:nvSpPr>
         <p:spPr>
           <a:xfrm>
-            <a:off x="7635240" y="4498848"/>
-            <a:ext cx="3474720" cy="1143000"/>
+            <a:off x="7635240" y="4343400"/>
+            <a:ext cx="3474720" cy="1255471"/>
           </a:xfrm>
           <a:prstGeom prst="roundRect">
             <a:avLst>
-              <a:gd name="adj" fmla="val 9600"/>
+              <a:gd name="adj" fmla="val 8740"/>
             </a:avLst>
           </a:prstGeom>
           <a:solidFill>
@@ -4405,7 +4405,7 @@
         </p:nvSpPr>
         <p:spPr>
           <a:xfrm>
-            <a:off x="7799832" y="4645152"/>
+            <a:off x="7799832" y="4489704"/>
             <a:ext cx="3145536" cy="256032"/>
           </a:xfrm>
           <a:prstGeom prst="rect">
@@ -4444,8 +4444,8 @@
         </p:nvSpPr>
         <p:spPr>
           <a:xfrm>
-            <a:off x="7799832" y="4974336"/>
-            <a:ext cx="3145536" cy="576072"/>
+            <a:off x="7799832" y="4818888"/>
+            <a:ext cx="3145536" cy="688543"/>
           </a:xfrm>
           <a:prstGeom prst="rect">
             <a:avLst/>
@@ -4471,7 +4471,7 @@
                 <a:ea typeface="Aptos" pitchFamily="34" charset="-122"/>
                 <a:cs typeface="Aptos" pitchFamily="34" charset="-120"/>
               </a:rPr>
-              <a:t>Identify what could go wrong, who could be affected, what safeguards are needed, and what evidence should be reviewed.</a:t>
+              <a:t>Identify what could go wrong, who could be affected, what safeguards are needed, and what evidence should be reviewed before use.</a:t>
             </a:r>
             <a:endParaRPr lang="en-US" sz="1320" dirty="0"/>
           </a:p>
@@ -4840,11 +4840,11 @@
         <p:spPr>
           <a:xfrm>
             <a:off x="7635240" y="1325880"/>
-            <a:ext cx="3474720" cy="1325880"/>
+            <a:ext cx="3474720" cy="1207008"/>
           </a:xfrm>
           <a:prstGeom prst="roundRect">
             <a:avLst>
-              <a:gd name="adj" fmla="val 8276"/>
+              <a:gd name="adj" fmla="val 9091"/>
             </a:avLst>
           </a:prstGeom>
           <a:solidFill>
@@ -4906,7 +4906,7 @@
         <p:spPr>
           <a:xfrm>
             <a:off x="7799832" y="1801368"/>
-            <a:ext cx="3145536" cy="758952"/>
+            <a:ext cx="3145536" cy="640080"/>
           </a:xfrm>
           <a:prstGeom prst="rect">
             <a:avLst/>
@@ -4946,7 +4946,7 @@
         </p:nvSpPr>
         <p:spPr>
           <a:xfrm>
-            <a:off x="7635240" y="2788920"/>
+            <a:off x="7635240" y="2670048"/>
             <a:ext cx="3474720" cy="1536192"/>
           </a:xfrm>
           <a:prstGeom prst="roundRect">
@@ -4973,7 +4973,7 @@
         </p:nvSpPr>
         <p:spPr>
           <a:xfrm>
-            <a:off x="7799832" y="2935224"/>
+            <a:off x="7799832" y="2816352"/>
             <a:ext cx="3145536" cy="256032"/>
           </a:xfrm>
           <a:prstGeom prst="rect">
@@ -5012,7 +5012,7 @@
         </p:nvSpPr>
         <p:spPr>
           <a:xfrm>
-            <a:off x="7818120" y="3300984"/>
+            <a:off x="7818120" y="3182112"/>
             <a:ext cx="3090672" cy="877824"/>
           </a:xfrm>
           <a:prstGeom prst="rect">
@@ -5087,12 +5087,12 @@
         </p:nvSpPr>
         <p:spPr>
           <a:xfrm>
-            <a:off x="7635240" y="4498848"/>
-            <a:ext cx="3474720" cy="1143000"/>
+            <a:off x="7635240" y="4343400"/>
+            <a:ext cx="3474720" cy="1255471"/>
           </a:xfrm>
           <a:prstGeom prst="roundRect">
             <a:avLst>
-              <a:gd name="adj" fmla="val 9600"/>
+              <a:gd name="adj" fmla="val 8740"/>
             </a:avLst>
           </a:prstGeom>
           <a:solidFill>
@@ -5114,7 +5114,7 @@
         </p:nvSpPr>
         <p:spPr>
           <a:xfrm>
-            <a:off x="7799832" y="4645152"/>
+            <a:off x="7799832" y="4489704"/>
             <a:ext cx="3145536" cy="256032"/>
           </a:xfrm>
           <a:prstGeom prst="rect">
@@ -5153,8 +5153,8 @@
         </p:nvSpPr>
         <p:spPr>
           <a:xfrm>
-            <a:off x="7799832" y="4974336"/>
-            <a:ext cx="3145536" cy="576072"/>
+            <a:off x="7799832" y="4818888"/>
+            <a:ext cx="3145536" cy="688543"/>
           </a:xfrm>
           <a:prstGeom prst="rect">
             <a:avLst/>
@@ -5180,7 +5180,7 @@
                 <a:ea typeface="Aptos" pitchFamily="34" charset="-122"/>
                 <a:cs typeface="Aptos" pitchFamily="34" charset="-120"/>
               </a:rPr>
-              <a:t>Identify what could go wrong, who could be affected, what safeguards are needed, and what evidence should be reviewed.</a:t>
+              <a:t>Identify what could go wrong, who could be affected, what safeguards are needed, and what evidence should be reviewed before use.</a:t>
             </a:r>
             <a:endParaRPr lang="en-US" sz="1320" dirty="0"/>
           </a:p>
@@ -5549,11 +5549,11 @@
         <p:spPr>
           <a:xfrm>
             <a:off x="7635240" y="1325880"/>
-            <a:ext cx="3474720" cy="1325880"/>
+            <a:ext cx="3474720" cy="1255471"/>
           </a:xfrm>
           <a:prstGeom prst="roundRect">
             <a:avLst>
-              <a:gd name="adj" fmla="val 8276"/>
+              <a:gd name="adj" fmla="val 8740"/>
             </a:avLst>
           </a:prstGeom>
           <a:solidFill>
@@ -5615,7 +5615,7 @@
         <p:spPr>
           <a:xfrm>
             <a:off x="7799832" y="1801368"/>
-            <a:ext cx="3145536" cy="758952"/>
+            <a:ext cx="3145536" cy="688543"/>
           </a:xfrm>
           <a:prstGeom prst="rect">
             <a:avLst/>
@@ -5655,7 +5655,7 @@
         </p:nvSpPr>
         <p:spPr>
           <a:xfrm>
-            <a:off x="7635240" y="2788920"/>
+            <a:off x="7635240" y="2718511"/>
             <a:ext cx="3474720" cy="1536192"/>
           </a:xfrm>
           <a:prstGeom prst="roundRect">
@@ -5682,7 +5682,7 @@
         </p:nvSpPr>
         <p:spPr>
           <a:xfrm>
-            <a:off x="7799832" y="2935224"/>
+            <a:off x="7799832" y="2864815"/>
             <a:ext cx="3145536" cy="256032"/>
           </a:xfrm>
           <a:prstGeom prst="rect">
@@ -5721,7 +5721,7 @@
         </p:nvSpPr>
         <p:spPr>
           <a:xfrm>
-            <a:off x="7818120" y="3300984"/>
+            <a:off x="7818120" y="3230575"/>
             <a:ext cx="3090672" cy="877824"/>
           </a:xfrm>
           <a:prstGeom prst="rect">
@@ -5796,12 +5796,12 @@
         </p:nvSpPr>
         <p:spPr>
           <a:xfrm>
-            <a:off x="7635240" y="4498848"/>
-            <a:ext cx="3474720" cy="1143000"/>
+            <a:off x="7635240" y="4391863"/>
+            <a:ext cx="3474720" cy="1255471"/>
           </a:xfrm>
           <a:prstGeom prst="roundRect">
             <a:avLst>
-              <a:gd name="adj" fmla="val 9600"/>
+              <a:gd name="adj" fmla="val 8740"/>
             </a:avLst>
           </a:prstGeom>
           <a:solidFill>
@@ -5823,7 +5823,7 @@
         </p:nvSpPr>
         <p:spPr>
           <a:xfrm>
-            <a:off x="7799832" y="4645152"/>
+            <a:off x="7799832" y="4538167"/>
             <a:ext cx="3145536" cy="256032"/>
           </a:xfrm>
           <a:prstGeom prst="rect">
@@ -5862,8 +5862,8 @@
         </p:nvSpPr>
         <p:spPr>
           <a:xfrm>
-            <a:off x="7799832" y="4974336"/>
-            <a:ext cx="3145536" cy="576072"/>
+            <a:off x="7799832" y="4867351"/>
+            <a:ext cx="3145536" cy="688543"/>
           </a:xfrm>
           <a:prstGeom prst="rect">
             <a:avLst/>
@@ -5889,7 +5889,7 @@
                 <a:ea typeface="Aptos" pitchFamily="34" charset="-122"/>
                 <a:cs typeface="Aptos" pitchFamily="34" charset="-120"/>
               </a:rPr>
-              <a:t>Identify what could go wrong, who could be affected, what safeguards are needed, and what evidence should be reviewed.</a:t>
+              <a:t>Identify what could go wrong, who could be affected, what safeguards are needed, and what evidence should be reviewed before use.</a:t>
             </a:r>
             <a:endParaRPr lang="en-US" sz="1320" dirty="0"/>
           </a:p>
@@ -6258,11 +6258,11 @@
         <p:spPr>
           <a:xfrm>
             <a:off x="7635240" y="1325880"/>
-            <a:ext cx="3474720" cy="1325880"/>
+            <a:ext cx="3474720" cy="1207008"/>
           </a:xfrm>
           <a:prstGeom prst="roundRect">
             <a:avLst>
-              <a:gd name="adj" fmla="val 8276"/>
+              <a:gd name="adj" fmla="val 9091"/>
             </a:avLst>
           </a:prstGeom>
           <a:solidFill>
@@ -6324,7 +6324,7 @@
         <p:spPr>
           <a:xfrm>
             <a:off x="7799832" y="1801368"/>
-            <a:ext cx="3145536" cy="758952"/>
+            <a:ext cx="3145536" cy="640080"/>
           </a:xfrm>
           <a:prstGeom prst="rect">
             <a:avLst/>
@@ -6364,12 +6364,12 @@
         </p:nvSpPr>
         <p:spPr>
           <a:xfrm>
-            <a:off x="7635240" y="2788920"/>
-            <a:ext cx="3474720" cy="1536192"/>
+            <a:off x="7635240" y="2670048"/>
+            <a:ext cx="3474720" cy="1377086"/>
           </a:xfrm>
           <a:prstGeom prst="roundRect">
             <a:avLst>
-              <a:gd name="adj" fmla="val 7143"/>
+              <a:gd name="adj" fmla="val 7968"/>
             </a:avLst>
           </a:prstGeom>
           <a:solidFill>
@@ -6391,7 +6391,7 @@
         </p:nvSpPr>
         <p:spPr>
           <a:xfrm>
-            <a:off x="7799832" y="2935224"/>
+            <a:off x="7799832" y="2816352"/>
             <a:ext cx="3145536" cy="256032"/>
           </a:xfrm>
           <a:prstGeom prst="rect">
@@ -6430,8 +6430,8 @@
         </p:nvSpPr>
         <p:spPr>
           <a:xfrm>
-            <a:off x="7818120" y="3300984"/>
-            <a:ext cx="3090672" cy="877824"/>
+            <a:off x="7818120" y="3182112"/>
+            <a:ext cx="3090672" cy="718718"/>
           </a:xfrm>
           <a:prstGeom prst="rect">
             <a:avLst/>
@@ -6505,12 +6505,12 @@
         </p:nvSpPr>
         <p:spPr>
           <a:xfrm>
-            <a:off x="7635240" y="4498848"/>
-            <a:ext cx="3474720" cy="1143000"/>
+            <a:off x="7635240" y="4184294"/>
+            <a:ext cx="3474720" cy="1466698"/>
           </a:xfrm>
           <a:prstGeom prst="roundRect">
             <a:avLst>
-              <a:gd name="adj" fmla="val 9600"/>
+              <a:gd name="adj" fmla="val 7481"/>
             </a:avLst>
           </a:prstGeom>
           <a:solidFill>
@@ -6532,7 +6532,7 @@
         </p:nvSpPr>
         <p:spPr>
           <a:xfrm>
-            <a:off x="7799832" y="4645152"/>
+            <a:off x="7799832" y="4330598"/>
             <a:ext cx="3145536" cy="256032"/>
           </a:xfrm>
           <a:prstGeom prst="rect">
@@ -6571,8 +6571,8 @@
         </p:nvSpPr>
         <p:spPr>
           <a:xfrm>
-            <a:off x="7799832" y="4974336"/>
-            <a:ext cx="3145536" cy="576072"/>
+            <a:off x="7799832" y="4659782"/>
+            <a:ext cx="3145536" cy="899770"/>
           </a:xfrm>
           <a:prstGeom prst="rect">
             <a:avLst/>
@@ -6598,7 +6598,7 @@
                 <a:ea typeface="Aptos" pitchFamily="34" charset="-122"/>
                 <a:cs typeface="Aptos" pitchFamily="34" charset="-120"/>
               </a:rPr>
-              <a:t>Use the concept to clarify workflow changes, dependencies, staffing, procurement requirements, training needs, and.</a:t>
+              <a:t>Use the concept to clarify workflow changes, dependencies, staffing, procurement requirements, training needs, and implementation checkpoints.</a:t>
             </a:r>
             <a:endParaRPr lang="en-US" sz="1320" dirty="0"/>
           </a:p>
@@ -6950,11 +6950,11 @@
         <p:spPr>
           <a:xfrm>
             <a:off x="7635240" y="1325880"/>
-            <a:ext cx="3474720" cy="1325880"/>
+            <a:ext cx="3474720" cy="1207008"/>
           </a:xfrm>
           <a:prstGeom prst="roundRect">
             <a:avLst>
-              <a:gd name="adj" fmla="val 8276"/>
+              <a:gd name="adj" fmla="val 9091"/>
             </a:avLst>
           </a:prstGeom>
           <a:solidFill>
@@ -7016,7 +7016,7 @@
         <p:spPr>
           <a:xfrm>
             <a:off x="7799832" y="1801368"/>
-            <a:ext cx="3145536" cy="758952"/>
+            <a:ext cx="3145536" cy="640080"/>
           </a:xfrm>
           <a:prstGeom prst="rect">
             <a:avLst/>
@@ -7042,7 +7042,7 @@
                 <a:ea typeface="Aptos" pitchFamily="34" charset="-122"/>
                 <a:cs typeface="Aptos" pitchFamily="34" charset="-120"/>
               </a:rPr>
-              <a:t>What evidence would governance, leadership, or operations staff need before moving forward?</a:t>
+              <a:t>What evidence would governance, leadership, or operations staff need before moving.</a:t>
             </a:r>
             <a:endParaRPr lang="en-US" sz="1320" dirty="0"/>
           </a:p>
@@ -7056,12 +7056,12 @@
         </p:nvSpPr>
         <p:spPr>
           <a:xfrm>
-            <a:off x="7635240" y="2788920"/>
-            <a:ext cx="3474720" cy="1536192"/>
+            <a:off x="7635240" y="2670048"/>
+            <a:ext cx="3474720" cy="1377086"/>
           </a:xfrm>
           <a:prstGeom prst="roundRect">
             <a:avLst>
-              <a:gd name="adj" fmla="val 7143"/>
+              <a:gd name="adj" fmla="val 7968"/>
             </a:avLst>
           </a:prstGeom>
           <a:solidFill>
@@ -7083,7 +7083,7 @@
         </p:nvSpPr>
         <p:spPr>
           <a:xfrm>
-            <a:off x="7799832" y="2935224"/>
+            <a:off x="7799832" y="2816352"/>
             <a:ext cx="3145536" cy="256032"/>
           </a:xfrm>
           <a:prstGeom prst="rect">
@@ -7122,8 +7122,8 @@
         </p:nvSpPr>
         <p:spPr>
           <a:xfrm>
-            <a:off x="7818120" y="3300984"/>
-            <a:ext cx="3090672" cy="877824"/>
+            <a:off x="7818120" y="3182112"/>
+            <a:ext cx="3090672" cy="718718"/>
           </a:xfrm>
           <a:prstGeom prst="rect">
             <a:avLst/>
@@ -7180,12 +7180,12 @@
         </p:nvSpPr>
         <p:spPr>
           <a:xfrm>
-            <a:off x="7635240" y="4498848"/>
-            <a:ext cx="3474720" cy="1143000"/>
+            <a:off x="7635240" y="4184294"/>
+            <a:ext cx="3474720" cy="1466698"/>
           </a:xfrm>
           <a:prstGeom prst="roundRect">
             <a:avLst>
-              <a:gd name="adj" fmla="val 9600"/>
+              <a:gd name="adj" fmla="val 7481"/>
             </a:avLst>
           </a:prstGeom>
           <a:solidFill>
@@ -7207,7 +7207,7 @@
         </p:nvSpPr>
         <p:spPr>
           <a:xfrm>
-            <a:off x="7799832" y="4645152"/>
+            <a:off x="7799832" y="4330598"/>
             <a:ext cx="3145536" cy="256032"/>
           </a:xfrm>
           <a:prstGeom prst="rect">
@@ -7246,8 +7246,8 @@
         </p:nvSpPr>
         <p:spPr>
           <a:xfrm>
-            <a:off x="7799832" y="4974336"/>
-            <a:ext cx="3145536" cy="576072"/>
+            <a:off x="7799832" y="4659782"/>
+            <a:ext cx="3145536" cy="899770"/>
           </a:xfrm>
           <a:prstGeom prst="rect">
             <a:avLst/>
@@ -7273,7 +7273,7 @@
                 <a:ea typeface="Aptos" pitchFamily="34" charset="-122"/>
                 <a:cs typeface="Aptos" pitchFamily="34" charset="-120"/>
               </a:rPr>
-              <a:t>Use the concept to clarify workflow changes, dependencies, staffing, procurement requirements, training needs, and.</a:t>
+              <a:t>Use the concept to clarify workflow changes, dependencies, staffing, procurement requirements, training needs, and implementation checkpoints.</a:t>
             </a:r>
             <a:endParaRPr lang="en-US" sz="1320" dirty="0"/>
           </a:p>
@@ -7625,11 +7625,11 @@
         <p:spPr>
           <a:xfrm>
             <a:off x="7635240" y="1325880"/>
-            <a:ext cx="3474720" cy="1325880"/>
+            <a:ext cx="3474720" cy="1255471"/>
           </a:xfrm>
           <a:prstGeom prst="roundRect">
             <a:avLst>
-              <a:gd name="adj" fmla="val 8276"/>
+              <a:gd name="adj" fmla="val 8740"/>
             </a:avLst>
           </a:prstGeom>
           <a:solidFill>
@@ -7691,7 +7691,7 @@
         <p:spPr>
           <a:xfrm>
             <a:off x="7799832" y="1801368"/>
-            <a:ext cx="3145536" cy="758952"/>
+            <a:ext cx="3145536" cy="688543"/>
           </a:xfrm>
           <a:prstGeom prst="rect">
             <a:avLst/>
@@ -7731,12 +7731,12 @@
         </p:nvSpPr>
         <p:spPr>
           <a:xfrm>
-            <a:off x="7635240" y="2788920"/>
-            <a:ext cx="3474720" cy="1536192"/>
+            <a:off x="7635240" y="2718511"/>
+            <a:ext cx="3474720" cy="1328623"/>
           </a:xfrm>
           <a:prstGeom prst="roundRect">
             <a:avLst>
-              <a:gd name="adj" fmla="val 7143"/>
+              <a:gd name="adj" fmla="val 8259"/>
             </a:avLst>
           </a:prstGeom>
           <a:solidFill>
@@ -7758,7 +7758,7 @@
         </p:nvSpPr>
         <p:spPr>
           <a:xfrm>
-            <a:off x="7799832" y="2935224"/>
+            <a:off x="7799832" y="2864815"/>
             <a:ext cx="3145536" cy="256032"/>
           </a:xfrm>
           <a:prstGeom prst="rect">
@@ -7797,8 +7797,8 @@
         </p:nvSpPr>
         <p:spPr>
           <a:xfrm>
-            <a:off x="7818120" y="3300984"/>
-            <a:ext cx="3090672" cy="877824"/>
+            <a:off x="7818120" y="3230575"/>
+            <a:ext cx="3090672" cy="670255"/>
           </a:xfrm>
           <a:prstGeom prst="rect">
             <a:avLst/>
@@ -7855,12 +7855,12 @@
         </p:nvSpPr>
         <p:spPr>
           <a:xfrm>
-            <a:off x="7635240" y="4498848"/>
-            <a:ext cx="3474720" cy="1143000"/>
+            <a:off x="7635240" y="4184294"/>
+            <a:ext cx="3474720" cy="1466698"/>
           </a:xfrm>
           <a:prstGeom prst="roundRect">
             <a:avLst>
-              <a:gd name="adj" fmla="val 9600"/>
+              <a:gd name="adj" fmla="val 7481"/>
             </a:avLst>
           </a:prstGeom>
           <a:solidFill>
@@ -7882,7 +7882,7 @@
         </p:nvSpPr>
         <p:spPr>
           <a:xfrm>
-            <a:off x="7799832" y="4645152"/>
+            <a:off x="7799832" y="4330598"/>
             <a:ext cx="3145536" cy="256032"/>
           </a:xfrm>
           <a:prstGeom prst="rect">
@@ -7921,8 +7921,8 @@
         </p:nvSpPr>
         <p:spPr>
           <a:xfrm>
-            <a:off x="7799832" y="4974336"/>
-            <a:ext cx="3145536" cy="576072"/>
+            <a:off x="7799832" y="4659782"/>
+            <a:ext cx="3145536" cy="899770"/>
           </a:xfrm>
           <a:prstGeom prst="rect">
             <a:avLst/>
@@ -7948,7 +7948,7 @@
                 <a:ea typeface="Aptos" pitchFamily="34" charset="-122"/>
                 <a:cs typeface="Aptos" pitchFamily="34" charset="-120"/>
               </a:rPr>
-              <a:t>Use the assignment to test whether you can explain the concept, apply it to a realistic public health situation, and.</a:t>
+              <a:t>Use the assignment to test whether you can explain the concept, apply it to a realistic public health situation, and identify what would need review before the work moves forward.</a:t>
             </a:r>
             <a:endParaRPr lang="en-US" sz="1320" dirty="0"/>
           </a:p>
@@ -8317,11 +8317,11 @@
         <p:spPr>
           <a:xfrm>
             <a:off x="7635240" y="1325880"/>
-            <a:ext cx="3474720" cy="1325880"/>
+            <a:ext cx="3474720" cy="1207008"/>
           </a:xfrm>
           <a:prstGeom prst="roundRect">
             <a:avLst>
-              <a:gd name="adj" fmla="val 8276"/>
+              <a:gd name="adj" fmla="val 9091"/>
             </a:avLst>
           </a:prstGeom>
           <a:solidFill>
@@ -8383,7 +8383,7 @@
         <p:spPr>
           <a:xfrm>
             <a:off x="7799832" y="1801368"/>
-            <a:ext cx="3145536" cy="758952"/>
+            <a:ext cx="3145536" cy="640080"/>
           </a:xfrm>
           <a:prstGeom prst="rect">
             <a:avLst/>
@@ -8423,12 +8423,12 @@
         </p:nvSpPr>
         <p:spPr>
           <a:xfrm>
-            <a:off x="7635240" y="2788920"/>
-            <a:ext cx="3474720" cy="1536192"/>
+            <a:off x="7635240" y="2670048"/>
+            <a:ext cx="3474720" cy="1377086"/>
           </a:xfrm>
           <a:prstGeom prst="roundRect">
             <a:avLst>
-              <a:gd name="adj" fmla="val 7143"/>
+              <a:gd name="adj" fmla="val 7968"/>
             </a:avLst>
           </a:prstGeom>
           <a:solidFill>
@@ -8450,7 +8450,7 @@
         </p:nvSpPr>
         <p:spPr>
           <a:xfrm>
-            <a:off x="7799832" y="2935224"/>
+            <a:off x="7799832" y="2816352"/>
             <a:ext cx="3145536" cy="256032"/>
           </a:xfrm>
           <a:prstGeom prst="rect">
@@ -8489,8 +8489,8 @@
         </p:nvSpPr>
         <p:spPr>
           <a:xfrm>
-            <a:off x="7818120" y="3300984"/>
-            <a:ext cx="3090672" cy="877824"/>
+            <a:off x="7818120" y="3182112"/>
+            <a:ext cx="3090672" cy="718718"/>
           </a:xfrm>
           <a:prstGeom prst="rect">
             <a:avLst/>
@@ -8564,12 +8564,12 @@
         </p:nvSpPr>
         <p:spPr>
           <a:xfrm>
-            <a:off x="7635240" y="4498848"/>
-            <a:ext cx="3474720" cy="1143000"/>
+            <a:off x="7635240" y="4184294"/>
+            <a:ext cx="3474720" cy="1466698"/>
           </a:xfrm>
           <a:prstGeom prst="roundRect">
             <a:avLst>
-              <a:gd name="adj" fmla="val 9600"/>
+              <a:gd name="adj" fmla="val 7481"/>
             </a:avLst>
           </a:prstGeom>
           <a:solidFill>
@@ -8591,7 +8591,7 @@
         </p:nvSpPr>
         <p:spPr>
           <a:xfrm>
-            <a:off x="7799832" y="4645152"/>
+            <a:off x="7799832" y="4330598"/>
             <a:ext cx="3145536" cy="256032"/>
           </a:xfrm>
           <a:prstGeom prst="rect">
@@ -8630,8 +8630,8 @@
         </p:nvSpPr>
         <p:spPr>
           <a:xfrm>
-            <a:off x="7799832" y="4974336"/>
-            <a:ext cx="3145536" cy="576072"/>
+            <a:off x="7799832" y="4659782"/>
+            <a:ext cx="3145536" cy="899770"/>
           </a:xfrm>
           <a:prstGeom prst="rect">
             <a:avLst/>
@@ -8657,7 +8657,7 @@
                 <a:ea typeface="Aptos" pitchFamily="34" charset="-122"/>
                 <a:cs typeface="Aptos" pitchFamily="34" charset="-120"/>
               </a:rPr>
-              <a:t>Use the concept to clarify workflow changes, dependencies, staffing, procurement requirements, training needs, and.</a:t>
+              <a:t>Use the concept to clarify workflow changes, dependencies, staffing, procurement requirements, training needs, and implementation checkpoints.</a:t>
             </a:r>
             <a:endParaRPr lang="en-US" sz="1320" dirty="0"/>
           </a:p>
@@ -9009,11 +9009,11 @@
         <p:spPr>
           <a:xfrm>
             <a:off x="7635240" y="1325880"/>
-            <a:ext cx="3474720" cy="1325880"/>
+            <a:ext cx="3474720" cy="1207008"/>
           </a:xfrm>
           <a:prstGeom prst="roundRect">
             <a:avLst>
-              <a:gd name="adj" fmla="val 8276"/>
+              <a:gd name="adj" fmla="val 9091"/>
             </a:avLst>
           </a:prstGeom>
           <a:solidFill>
@@ -9075,7 +9075,7 @@
         <p:spPr>
           <a:xfrm>
             <a:off x="7799832" y="1801368"/>
-            <a:ext cx="3145536" cy="758952"/>
+            <a:ext cx="3145536" cy="640080"/>
           </a:xfrm>
           <a:prstGeom prst="rect">
             <a:avLst/>
@@ -9115,12 +9115,12 @@
         </p:nvSpPr>
         <p:spPr>
           <a:xfrm>
-            <a:off x="7635240" y="2788920"/>
-            <a:ext cx="3474720" cy="1536192"/>
+            <a:off x="7635240" y="2670048"/>
+            <a:ext cx="3474720" cy="1377086"/>
           </a:xfrm>
           <a:prstGeom prst="roundRect">
             <a:avLst>
-              <a:gd name="adj" fmla="val 7143"/>
+              <a:gd name="adj" fmla="val 7968"/>
             </a:avLst>
           </a:prstGeom>
           <a:solidFill>
@@ -9142,7 +9142,7 @@
         </p:nvSpPr>
         <p:spPr>
           <a:xfrm>
-            <a:off x="7799832" y="2935224"/>
+            <a:off x="7799832" y="2816352"/>
             <a:ext cx="3145536" cy="256032"/>
           </a:xfrm>
           <a:prstGeom prst="rect">
@@ -9181,8 +9181,8 @@
         </p:nvSpPr>
         <p:spPr>
           <a:xfrm>
-            <a:off x="7818120" y="3300984"/>
-            <a:ext cx="3090672" cy="877824"/>
+            <a:off x="7818120" y="3182112"/>
+            <a:ext cx="3090672" cy="718718"/>
           </a:xfrm>
           <a:prstGeom prst="rect">
             <a:avLst/>
@@ -9239,12 +9239,12 @@
         </p:nvSpPr>
         <p:spPr>
           <a:xfrm>
-            <a:off x="7635240" y="4498848"/>
-            <a:ext cx="3474720" cy="1143000"/>
+            <a:off x="7635240" y="4184294"/>
+            <a:ext cx="3474720" cy="1466698"/>
           </a:xfrm>
           <a:prstGeom prst="roundRect">
             <a:avLst>
-              <a:gd name="adj" fmla="val 9600"/>
+              <a:gd name="adj" fmla="val 7481"/>
             </a:avLst>
           </a:prstGeom>
           <a:solidFill>
@@ -9266,7 +9266,7 @@
         </p:nvSpPr>
         <p:spPr>
           <a:xfrm>
-            <a:off x="7799832" y="4645152"/>
+            <a:off x="7799832" y="4330598"/>
             <a:ext cx="3145536" cy="256032"/>
           </a:xfrm>
           <a:prstGeom prst="rect">
@@ -9305,8 +9305,8 @@
         </p:nvSpPr>
         <p:spPr>
           <a:xfrm>
-            <a:off x="7799832" y="4974336"/>
-            <a:ext cx="3145536" cy="576072"/>
+            <a:off x="7799832" y="4659782"/>
+            <a:ext cx="3145536" cy="899770"/>
           </a:xfrm>
           <a:prstGeom prst="rect">
             <a:avLst/>
@@ -9332,7 +9332,7 @@
                 <a:ea typeface="Aptos" pitchFamily="34" charset="-122"/>
                 <a:cs typeface="Aptos" pitchFamily="34" charset="-120"/>
               </a:rPr>
-              <a:t>Use the concept to clarify workflow changes, dependencies, staffing, procurement requirements, training needs, and.</a:t>
+              <a:t>Use the concept to clarify workflow changes, dependencies, staffing, procurement requirements, training needs, and implementation checkpoints.</a:t>
             </a:r>
             <a:endParaRPr lang="en-US" sz="1320" dirty="0"/>
           </a:p>
@@ -9701,11 +9701,11 @@
         <p:spPr>
           <a:xfrm>
             <a:off x="7635240" y="1325880"/>
-            <a:ext cx="3474720" cy="1325880"/>
+            <a:ext cx="3474720" cy="1207008"/>
           </a:xfrm>
           <a:prstGeom prst="roundRect">
             <a:avLst>
-              <a:gd name="adj" fmla="val 8276"/>
+              <a:gd name="adj" fmla="val 9091"/>
             </a:avLst>
           </a:prstGeom>
           <a:solidFill>
@@ -9767,7 +9767,7 @@
         <p:spPr>
           <a:xfrm>
             <a:off x="7799832" y="1801368"/>
-            <a:ext cx="3145536" cy="758952"/>
+            <a:ext cx="3145536" cy="640080"/>
           </a:xfrm>
           <a:prstGeom prst="rect">
             <a:avLst/>
@@ -9807,12 +9807,12 @@
         </p:nvSpPr>
         <p:spPr>
           <a:xfrm>
-            <a:off x="7635240" y="2788920"/>
-            <a:ext cx="3474720" cy="1536192"/>
+            <a:off x="7635240" y="2670048"/>
+            <a:ext cx="3474720" cy="1377086"/>
           </a:xfrm>
           <a:prstGeom prst="roundRect">
             <a:avLst>
-              <a:gd name="adj" fmla="val 7143"/>
+              <a:gd name="adj" fmla="val 7968"/>
             </a:avLst>
           </a:prstGeom>
           <a:solidFill>
@@ -9834,7 +9834,7 @@
         </p:nvSpPr>
         <p:spPr>
           <a:xfrm>
-            <a:off x="7799832" y="2935224"/>
+            <a:off x="7799832" y="2816352"/>
             <a:ext cx="3145536" cy="256032"/>
           </a:xfrm>
           <a:prstGeom prst="rect">
@@ -9873,8 +9873,8 @@
         </p:nvSpPr>
         <p:spPr>
           <a:xfrm>
-            <a:off x="7818120" y="3300984"/>
-            <a:ext cx="3090672" cy="877824"/>
+            <a:off x="7818120" y="3182112"/>
+            <a:ext cx="3090672" cy="718718"/>
           </a:xfrm>
           <a:prstGeom prst="rect">
             <a:avLst/>
@@ -9931,12 +9931,12 @@
         </p:nvSpPr>
         <p:spPr>
           <a:xfrm>
-            <a:off x="7635240" y="4498848"/>
-            <a:ext cx="3474720" cy="1143000"/>
+            <a:off x="7635240" y="4184294"/>
+            <a:ext cx="3474720" cy="1466698"/>
           </a:xfrm>
           <a:prstGeom prst="roundRect">
             <a:avLst>
-              <a:gd name="adj" fmla="val 9600"/>
+              <a:gd name="adj" fmla="val 7481"/>
             </a:avLst>
           </a:prstGeom>
           <a:solidFill>
@@ -9958,7 +9958,7 @@
         </p:nvSpPr>
         <p:spPr>
           <a:xfrm>
-            <a:off x="7799832" y="4645152"/>
+            <a:off x="7799832" y="4330598"/>
             <a:ext cx="3145536" cy="256032"/>
           </a:xfrm>
           <a:prstGeom prst="rect">
@@ -9997,8 +9997,8 @@
         </p:nvSpPr>
         <p:spPr>
           <a:xfrm>
-            <a:off x="7799832" y="4974336"/>
-            <a:ext cx="3145536" cy="576072"/>
+            <a:off x="7799832" y="4659782"/>
+            <a:ext cx="3145536" cy="899770"/>
           </a:xfrm>
           <a:prstGeom prst="rect">
             <a:avLst/>
@@ -10024,7 +10024,7 @@
                 <a:ea typeface="Aptos" pitchFamily="34" charset="-122"/>
                 <a:cs typeface="Aptos" pitchFamily="34" charset="-120"/>
               </a:rPr>
-              <a:t>Use the assignment to test whether you can explain the concept, apply it to a realistic public health situation, and.</a:t>
+              <a:t>Use the assignment to test whether you can explain the concept, apply it to a realistic public health situation, and identify what would need review before the work moves forward.</a:t>
             </a:r>
             <a:endParaRPr lang="en-US" sz="1320" dirty="0"/>
           </a:p>
@@ -10485,7 +10485,7 @@
                 <a:ea typeface="Aptos" pitchFamily="34" charset="-122"/>
                 <a:cs typeface="Aptos" pitchFamily="34" charset="-120"/>
               </a:rPr>
-              <a:t>Level: applied/foundational Primary track: Program Management Role-Based Track Appears in tracks: program-management,.</a:t>
+              <a:t>Level: applied/foundational Primary track: Program Management Role-Based Track Appears in tracks: program-management, operations-and-data-quality, technical-architecture, public-health-executive-leadership</a:t>
             </a:r>
             <a:endParaRPr lang="en-US" sz="1320" dirty="0"/>
           </a:p>
@@ -10995,11 +10995,11 @@
         <p:spPr>
           <a:xfrm>
             <a:off x="7635240" y="1325880"/>
-            <a:ext cx="3474720" cy="1325880"/>
+            <a:ext cx="3474720" cy="1207008"/>
           </a:xfrm>
           <a:prstGeom prst="roundRect">
             <a:avLst>
-              <a:gd name="adj" fmla="val 8276"/>
+              <a:gd name="adj" fmla="val 9091"/>
             </a:avLst>
           </a:prstGeom>
           <a:solidFill>
@@ -11061,7 +11061,7 @@
         <p:spPr>
           <a:xfrm>
             <a:off x="7799832" y="1801368"/>
-            <a:ext cx="3145536" cy="758952"/>
+            <a:ext cx="3145536" cy="640080"/>
           </a:xfrm>
           <a:prstGeom prst="rect">
             <a:avLst/>
@@ -11101,12 +11101,12 @@
         </p:nvSpPr>
         <p:spPr>
           <a:xfrm>
-            <a:off x="7635240" y="2788920"/>
-            <a:ext cx="3474720" cy="1536192"/>
+            <a:off x="7635240" y="2670048"/>
+            <a:ext cx="3474720" cy="1377086"/>
           </a:xfrm>
           <a:prstGeom prst="roundRect">
             <a:avLst>
-              <a:gd name="adj" fmla="val 7143"/>
+              <a:gd name="adj" fmla="val 7968"/>
             </a:avLst>
           </a:prstGeom>
           <a:solidFill>
@@ -11128,7 +11128,7 @@
         </p:nvSpPr>
         <p:spPr>
           <a:xfrm>
-            <a:off x="7799832" y="2935224"/>
+            <a:off x="7799832" y="2816352"/>
             <a:ext cx="3145536" cy="256032"/>
           </a:xfrm>
           <a:prstGeom prst="rect">
@@ -11167,8 +11167,8 @@
         </p:nvSpPr>
         <p:spPr>
           <a:xfrm>
-            <a:off x="7818120" y="3300984"/>
-            <a:ext cx="3090672" cy="877824"/>
+            <a:off x="7818120" y="3182112"/>
+            <a:ext cx="3090672" cy="718718"/>
           </a:xfrm>
           <a:prstGeom prst="rect">
             <a:avLst/>
@@ -11242,12 +11242,12 @@
         </p:nvSpPr>
         <p:spPr>
           <a:xfrm>
-            <a:off x="7635240" y="4498848"/>
-            <a:ext cx="3474720" cy="1143000"/>
+            <a:off x="7635240" y="4184294"/>
+            <a:ext cx="3474720" cy="1466698"/>
           </a:xfrm>
           <a:prstGeom prst="roundRect">
             <a:avLst>
-              <a:gd name="adj" fmla="val 9600"/>
+              <a:gd name="adj" fmla="val 7481"/>
             </a:avLst>
           </a:prstGeom>
           <a:solidFill>
@@ -11269,7 +11269,7 @@
         </p:nvSpPr>
         <p:spPr>
           <a:xfrm>
-            <a:off x="7799832" y="4645152"/>
+            <a:off x="7799832" y="4330598"/>
             <a:ext cx="3145536" cy="256032"/>
           </a:xfrm>
           <a:prstGeom prst="rect">
@@ -11308,8 +11308,8 @@
         </p:nvSpPr>
         <p:spPr>
           <a:xfrm>
-            <a:off x="7799832" y="4974336"/>
-            <a:ext cx="3145536" cy="576072"/>
+            <a:off x="7799832" y="4659782"/>
+            <a:ext cx="3145536" cy="899770"/>
           </a:xfrm>
           <a:prstGeom prst="rect">
             <a:avLst/>
@@ -11335,7 +11335,7 @@
                 <a:ea typeface="Aptos" pitchFamily="34" charset="-122"/>
                 <a:cs typeface="Aptos" pitchFamily="34" charset="-120"/>
               </a:rPr>
-              <a:t>Use the assignment to test whether you can explain the concept, apply it to a realistic public health situation, and.</a:t>
+              <a:t>Use the assignment to test whether you can explain the concept, apply it to a realistic public health situation, and identify what would need review before the work moves forward.</a:t>
             </a:r>
             <a:endParaRPr lang="en-US" sz="1320" dirty="0"/>
           </a:p>
@@ -11704,11 +11704,11 @@
         <p:spPr>
           <a:xfrm>
             <a:off x="7635240" y="1325880"/>
-            <a:ext cx="3474720" cy="1325880"/>
+            <a:ext cx="3474720" cy="1207008"/>
           </a:xfrm>
           <a:prstGeom prst="roundRect">
             <a:avLst>
-              <a:gd name="adj" fmla="val 8276"/>
+              <a:gd name="adj" fmla="val 9091"/>
             </a:avLst>
           </a:prstGeom>
           <a:solidFill>
@@ -11770,7 +11770,7 @@
         <p:spPr>
           <a:xfrm>
             <a:off x="7799832" y="1801368"/>
-            <a:ext cx="3145536" cy="758952"/>
+            <a:ext cx="3145536" cy="640080"/>
           </a:xfrm>
           <a:prstGeom prst="rect">
             <a:avLst/>
@@ -11810,12 +11810,12 @@
         </p:nvSpPr>
         <p:spPr>
           <a:xfrm>
-            <a:off x="7635240" y="2788920"/>
-            <a:ext cx="3474720" cy="1536192"/>
+            <a:off x="7635240" y="2670048"/>
+            <a:ext cx="3474720" cy="1377086"/>
           </a:xfrm>
           <a:prstGeom prst="roundRect">
             <a:avLst>
-              <a:gd name="adj" fmla="val 7143"/>
+              <a:gd name="adj" fmla="val 7968"/>
             </a:avLst>
           </a:prstGeom>
           <a:solidFill>
@@ -11837,7 +11837,7 @@
         </p:nvSpPr>
         <p:spPr>
           <a:xfrm>
-            <a:off x="7799832" y="2935224"/>
+            <a:off x="7799832" y="2816352"/>
             <a:ext cx="3145536" cy="256032"/>
           </a:xfrm>
           <a:prstGeom prst="rect">
@@ -11876,8 +11876,8 @@
         </p:nvSpPr>
         <p:spPr>
           <a:xfrm>
-            <a:off x="7818120" y="3300984"/>
-            <a:ext cx="3090672" cy="877824"/>
+            <a:off x="7818120" y="3182112"/>
+            <a:ext cx="3090672" cy="718718"/>
           </a:xfrm>
           <a:prstGeom prst="rect">
             <a:avLst/>
@@ -11951,12 +11951,12 @@
         </p:nvSpPr>
         <p:spPr>
           <a:xfrm>
-            <a:off x="7635240" y="4498848"/>
-            <a:ext cx="3474720" cy="1143000"/>
+            <a:off x="7635240" y="4184294"/>
+            <a:ext cx="3474720" cy="1466698"/>
           </a:xfrm>
           <a:prstGeom prst="roundRect">
             <a:avLst>
-              <a:gd name="adj" fmla="val 9600"/>
+              <a:gd name="adj" fmla="val 7481"/>
             </a:avLst>
           </a:prstGeom>
           <a:solidFill>
@@ -11978,7 +11978,7 @@
         </p:nvSpPr>
         <p:spPr>
           <a:xfrm>
-            <a:off x="7799832" y="4645152"/>
+            <a:off x="7799832" y="4330598"/>
             <a:ext cx="3145536" cy="256032"/>
           </a:xfrm>
           <a:prstGeom prst="rect">
@@ -12017,8 +12017,8 @@
         </p:nvSpPr>
         <p:spPr>
           <a:xfrm>
-            <a:off x="7799832" y="4974336"/>
-            <a:ext cx="3145536" cy="576072"/>
+            <a:off x="7799832" y="4659782"/>
+            <a:ext cx="3145536" cy="899770"/>
           </a:xfrm>
           <a:prstGeom prst="rect">
             <a:avLst/>
@@ -12044,7 +12044,7 @@
                 <a:ea typeface="Aptos" pitchFamily="34" charset="-122"/>
                 <a:cs typeface="Aptos" pitchFamily="34" charset="-120"/>
               </a:rPr>
-              <a:t>Use the concept to clarify workflow changes, dependencies, staffing, procurement requirements, training needs, and.</a:t>
+              <a:t>Use the concept to clarify workflow changes, dependencies, staffing, procurement requirements, training needs, and implementation checkpoints.</a:t>
             </a:r>
             <a:endParaRPr lang="en-US" sz="1320" dirty="0"/>
           </a:p>
@@ -12379,11 +12379,11 @@
         <p:spPr>
           <a:xfrm>
             <a:off x="7635240" y="1325880"/>
-            <a:ext cx="3474720" cy="1325880"/>
+            <a:ext cx="3474720" cy="1207008"/>
           </a:xfrm>
           <a:prstGeom prst="roundRect">
             <a:avLst>
-              <a:gd name="adj" fmla="val 8276"/>
+              <a:gd name="adj" fmla="val 9091"/>
             </a:avLst>
           </a:prstGeom>
           <a:solidFill>
@@ -12445,7 +12445,7 @@
         <p:spPr>
           <a:xfrm>
             <a:off x="7799832" y="1801368"/>
-            <a:ext cx="3145536" cy="758952"/>
+            <a:ext cx="3145536" cy="640080"/>
           </a:xfrm>
           <a:prstGeom prst="rect">
             <a:avLst/>
@@ -12471,7 +12471,7 @@
                 <a:ea typeface="Aptos" pitchFamily="34" charset="-122"/>
                 <a:cs typeface="Aptos" pitchFamily="34" charset="-120"/>
               </a:rPr>
-              <a:t>Relevant public health program SOPs, data governance documentation, and implementation plans</a:t>
+              <a:t>Relevant public health program SOPs, data governance documentation, and implementation.</a:t>
             </a:r>
             <a:endParaRPr lang="en-US" sz="1320" dirty="0"/>
           </a:p>
@@ -12485,12 +12485,12 @@
         </p:nvSpPr>
         <p:spPr>
           <a:xfrm>
-            <a:off x="7635240" y="2788920"/>
-            <a:ext cx="3474720" cy="1536192"/>
+            <a:off x="7635240" y="2670048"/>
+            <a:ext cx="3474720" cy="1377086"/>
           </a:xfrm>
           <a:prstGeom prst="roundRect">
             <a:avLst>
-              <a:gd name="adj" fmla="val 7143"/>
+              <a:gd name="adj" fmla="val 7968"/>
             </a:avLst>
           </a:prstGeom>
           <a:solidFill>
@@ -12512,7 +12512,7 @@
         </p:nvSpPr>
         <p:spPr>
           <a:xfrm>
-            <a:off x="7799832" y="2935224"/>
+            <a:off x="7799832" y="2816352"/>
             <a:ext cx="3145536" cy="256032"/>
           </a:xfrm>
           <a:prstGeom prst="rect">
@@ -12551,8 +12551,8 @@
         </p:nvSpPr>
         <p:spPr>
           <a:xfrm>
-            <a:off x="7818120" y="3300984"/>
-            <a:ext cx="3090672" cy="877824"/>
+            <a:off x="7818120" y="3182112"/>
+            <a:ext cx="3090672" cy="718718"/>
           </a:xfrm>
           <a:prstGeom prst="rect">
             <a:avLst/>
@@ -12592,12 +12592,12 @@
         </p:nvSpPr>
         <p:spPr>
           <a:xfrm>
-            <a:off x="7635240" y="4498848"/>
-            <a:ext cx="3474720" cy="1143000"/>
+            <a:off x="7635240" y="4184294"/>
+            <a:ext cx="3474720" cy="1466698"/>
           </a:xfrm>
           <a:prstGeom prst="roundRect">
             <a:avLst>
-              <a:gd name="adj" fmla="val 9600"/>
+              <a:gd name="adj" fmla="val 7481"/>
             </a:avLst>
           </a:prstGeom>
           <a:solidFill>
@@ -12619,7 +12619,7 @@
         </p:nvSpPr>
         <p:spPr>
           <a:xfrm>
-            <a:off x="7799832" y="4645152"/>
+            <a:off x="7799832" y="4330598"/>
             <a:ext cx="3145536" cy="256032"/>
           </a:xfrm>
           <a:prstGeom prst="rect">
@@ -12658,8 +12658,8 @@
         </p:nvSpPr>
         <p:spPr>
           <a:xfrm>
-            <a:off x="7799832" y="4974336"/>
-            <a:ext cx="3145536" cy="576072"/>
+            <a:off x="7799832" y="4659782"/>
+            <a:ext cx="3145536" cy="899770"/>
           </a:xfrm>
           <a:prstGeom prst="rect">
             <a:avLst/>
@@ -12685,7 +12685,7 @@
                 <a:ea typeface="Aptos" pitchFamily="34" charset="-122"/>
                 <a:cs typeface="Aptos" pitchFamily="34" charset="-120"/>
               </a:rPr>
-              <a:t>Use the concept to clarify workflow changes, dependencies, staffing, procurement requirements, training needs, and.</a:t>
+              <a:t>Use the concept to clarify workflow changes, dependencies, staffing, procurement requirements, training needs, and implementation checkpoints.</a:t>
             </a:r>
             <a:endParaRPr lang="en-US" sz="1320" dirty="0"/>
           </a:p>
@@ -13163,7 +13163,7 @@
                 <a:ea typeface="Aptos" pitchFamily="34" charset="-122"/>
                 <a:cs typeface="Aptos" pitchFamily="34" charset="-120"/>
               </a:rPr>
-              <a:t>Use the related plays to identify decisions, participants, timing, approvals, and documentation needed for responsible.</a:t>
+              <a:t>Use the related plays to identify decisions, participants, timing, approvals, and documentation needed for responsible implementation.</a:t>
             </a:r>
             <a:endParaRPr lang="en-US" sz="1320" dirty="0"/>
           </a:p>
@@ -13782,7 +13782,7 @@
                 <a:ea typeface="Aptos" pitchFamily="34" charset="-122"/>
                 <a:cs typeface="Aptos" pitchFamily="34" charset="-120"/>
               </a:rPr>
-              <a:t>Use linked tools when your department needs a structured worksheet, template, checklist, review process, or.</a:t>
+              <a:t>Use linked tools when your department needs a structured worksheet, template, checklist, review process, or documentation artifact.</a:t>
             </a:r>
             <a:endParaRPr lang="en-US" sz="1320" dirty="0"/>
           </a:p>
@@ -14292,11 +14292,11 @@
         <p:spPr>
           <a:xfrm>
             <a:off x="7635240" y="1325880"/>
-            <a:ext cx="3474720" cy="1325880"/>
+            <a:ext cx="3474720" cy="1207008"/>
           </a:xfrm>
           <a:prstGeom prst="roundRect">
             <a:avLst>
-              <a:gd name="adj" fmla="val 8276"/>
+              <a:gd name="adj" fmla="val 9091"/>
             </a:avLst>
           </a:prstGeom>
           <a:solidFill>
@@ -14358,7 +14358,7 @@
         <p:spPr>
           <a:xfrm>
             <a:off x="7799832" y="1801368"/>
-            <a:ext cx="3145536" cy="758952"/>
+            <a:ext cx="3145536" cy="640080"/>
           </a:xfrm>
           <a:prstGeom prst="rect">
             <a:avLst/>
@@ -14398,12 +14398,12 @@
         </p:nvSpPr>
         <p:spPr>
           <a:xfrm>
-            <a:off x="7635240" y="2788920"/>
-            <a:ext cx="3474720" cy="1536192"/>
+            <a:off x="7635240" y="2670048"/>
+            <a:ext cx="3474720" cy="1377086"/>
           </a:xfrm>
           <a:prstGeom prst="roundRect">
             <a:avLst>
-              <a:gd name="adj" fmla="val 7143"/>
+              <a:gd name="adj" fmla="val 7968"/>
             </a:avLst>
           </a:prstGeom>
           <a:solidFill>
@@ -14425,7 +14425,7 @@
         </p:nvSpPr>
         <p:spPr>
           <a:xfrm>
-            <a:off x="7799832" y="2935224"/>
+            <a:off x="7799832" y="2816352"/>
             <a:ext cx="3145536" cy="256032"/>
           </a:xfrm>
           <a:prstGeom prst="rect">
@@ -14464,8 +14464,8 @@
         </p:nvSpPr>
         <p:spPr>
           <a:xfrm>
-            <a:off x="7818120" y="3300984"/>
-            <a:ext cx="3090672" cy="877824"/>
+            <a:off x="7818120" y="3182112"/>
+            <a:ext cx="3090672" cy="718718"/>
           </a:xfrm>
           <a:prstGeom prst="rect">
             <a:avLst/>
@@ -14539,12 +14539,12 @@
         </p:nvSpPr>
         <p:spPr>
           <a:xfrm>
-            <a:off x="7635240" y="4498848"/>
-            <a:ext cx="3474720" cy="1143000"/>
+            <a:off x="7635240" y="4184294"/>
+            <a:ext cx="3474720" cy="1466698"/>
           </a:xfrm>
           <a:prstGeom prst="roundRect">
             <a:avLst>
-              <a:gd name="adj" fmla="val 9600"/>
+              <a:gd name="adj" fmla="val 7481"/>
             </a:avLst>
           </a:prstGeom>
           <a:solidFill>
@@ -14566,7 +14566,7 @@
         </p:nvSpPr>
         <p:spPr>
           <a:xfrm>
-            <a:off x="7799832" y="4645152"/>
+            <a:off x="7799832" y="4330598"/>
             <a:ext cx="3145536" cy="256032"/>
           </a:xfrm>
           <a:prstGeom prst="rect">
@@ -14605,8 +14605,8 @@
         </p:nvSpPr>
         <p:spPr>
           <a:xfrm>
-            <a:off x="7799832" y="4974336"/>
-            <a:ext cx="3145536" cy="576072"/>
+            <a:off x="7799832" y="4659782"/>
+            <a:ext cx="3145536" cy="899770"/>
           </a:xfrm>
           <a:prstGeom prst="rect">
             <a:avLst/>
@@ -14632,7 +14632,7 @@
                 <a:ea typeface="Aptos" pitchFamily="34" charset="-122"/>
                 <a:cs typeface="Aptos" pitchFamily="34" charset="-120"/>
               </a:rPr>
-              <a:t>Use the assignment to test whether you can explain the concept, apply it to a realistic public health situation, and.</a:t>
+              <a:t>Use the assignment to test whether you can explain the concept, apply it to a realistic public health situation, and identify what would need review before the work moves forward.</a:t>
             </a:r>
             <a:endParaRPr lang="en-US" sz="1320" dirty="0"/>
           </a:p>
@@ -15001,11 +15001,11 @@
         <p:spPr>
           <a:xfrm>
             <a:off x="7635240" y="1325880"/>
-            <a:ext cx="3474720" cy="1325880"/>
+            <a:ext cx="3474720" cy="1255471"/>
           </a:xfrm>
           <a:prstGeom prst="roundRect">
             <a:avLst>
-              <a:gd name="adj" fmla="val 8276"/>
+              <a:gd name="adj" fmla="val 8740"/>
             </a:avLst>
           </a:prstGeom>
           <a:solidFill>
@@ -15067,7 +15067,7 @@
         <p:spPr>
           <a:xfrm>
             <a:off x="7799832" y="1801368"/>
-            <a:ext cx="3145536" cy="758952"/>
+            <a:ext cx="3145536" cy="688543"/>
           </a:xfrm>
           <a:prstGeom prst="rect">
             <a:avLst/>
@@ -15107,12 +15107,12 @@
         </p:nvSpPr>
         <p:spPr>
           <a:xfrm>
-            <a:off x="7635240" y="2788920"/>
-            <a:ext cx="3474720" cy="1536192"/>
+            <a:off x="7635240" y="2718511"/>
+            <a:ext cx="3474720" cy="1328623"/>
           </a:xfrm>
           <a:prstGeom prst="roundRect">
             <a:avLst>
-              <a:gd name="adj" fmla="val 7143"/>
+              <a:gd name="adj" fmla="val 8259"/>
             </a:avLst>
           </a:prstGeom>
           <a:solidFill>
@@ -15134,8 +15134,8 @@
         </p:nvSpPr>
         <p:spPr>
           <a:xfrm>
-            <a:off x="7799832" y="2935224"/>
-            <a:ext cx="3145536" cy="256032"/>
+            <a:off x="7799832" y="2846527"/>
+            <a:ext cx="3145536" cy="237744"/>
           </a:xfrm>
           <a:prstGeom prst="rect">
             <a:avLst/>
@@ -15151,7 +15151,7 @@
               <a:buNone/>
             </a:pPr>
             <a:r>
-              <a:rPr lang="en-US" sz="1300" b="1" dirty="0">
+              <a:rPr lang="en-US" sz="1250" b="1" dirty="0">
                 <a:solidFill>
                   <a:srgbClr val="0068B7"/>
                 </a:solidFill>
@@ -15159,101 +15159,317 @@
                 <a:ea typeface="Aptos" pitchFamily="34" charset="-122"/>
                 <a:cs typeface="Aptos" pitchFamily="34" charset="-120"/>
               </a:rPr>
-              <a:t>Concept checkpoints</a:t>
-            </a:r>
-            <a:endParaRPr lang="en-US" sz="1300" dirty="0"/>
-          </a:p>
-        </p:txBody>
-      </p:sp>
-      <p:sp>
-        <p:nvSpPr>
-          <p:cNvPr id="15" name="Text 13"/>
-          <p:cNvSpPr/>
-          <p:nvPr/>
-        </p:nvSpPr>
-        <p:spPr>
-          <a:xfrm>
-            <a:off x="7818120" y="3300984"/>
-            <a:ext cx="3090672" cy="877824"/>
-          </a:xfrm>
-          <a:prstGeom prst="rect">
-            <a:avLst/>
-          </a:prstGeom>
-          <a:noFill/>
-          <a:ln/>
-        </p:spPr>
-        <p:txBody>
-          <a:bodyPr wrap="square" lIns="508" tIns="508" rIns="508" bIns="508" rtlCol="0" anchor="t">
+              <a:t>Implementation path</a:t>
+            </a:r>
+            <a:endParaRPr lang="en-US" sz="1250" dirty="0"/>
+          </a:p>
+        </p:txBody>
+      </p:sp>
+      <p:sp>
+        <p:nvSpPr>
+          <p:cNvPr id="15" name="Shape 13"/>
+          <p:cNvSpPr/>
+          <p:nvPr/>
+        </p:nvSpPr>
+        <p:spPr>
+          <a:xfrm>
+            <a:off x="8763000" y="3399739"/>
+            <a:ext cx="164592" cy="0"/>
+          </a:xfrm>
+          <a:prstGeom prst="line">
+            <a:avLst/>
+          </a:prstGeom>
+          <a:noFill/>
+          <a:ln w="15240">
+            <a:solidFill>
+              <a:srgbClr val="8ABBD8"/>
+            </a:solidFill>
+            <a:prstDash val="solid"/>
+          </a:ln>
+        </p:spPr>
+      </p:sp>
+      <p:sp>
+        <p:nvSpPr>
+          <p:cNvPr id="16" name="Shape 14"/>
+          <p:cNvSpPr/>
+          <p:nvPr/>
+        </p:nvSpPr>
+        <p:spPr>
+          <a:xfrm>
+            <a:off x="7872984" y="3248863"/>
+            <a:ext cx="890016" cy="301752"/>
+          </a:xfrm>
+          <a:prstGeom prst="roundRect">
+            <a:avLst>
+              <a:gd name="adj" fmla="val 24242"/>
+            </a:avLst>
+          </a:prstGeom>
+          <a:solidFill>
+            <a:srgbClr val="0068B7"/>
+          </a:solidFill>
+          <a:ln w="12700">
+            <a:solidFill>
+              <a:srgbClr val="0068B7"/>
+            </a:solidFill>
+            <a:prstDash val="solid"/>
+          </a:ln>
+        </p:spPr>
+      </p:sp>
+      <p:sp>
+        <p:nvSpPr>
+          <p:cNvPr id="17" name="Text 15"/>
+          <p:cNvSpPr/>
+          <p:nvPr/>
+        </p:nvSpPr>
+        <p:spPr>
+          <a:xfrm>
+            <a:off x="7909560" y="3322015"/>
+            <a:ext cx="816864" cy="146304"/>
+          </a:xfrm>
+          <a:prstGeom prst="rect">
+            <a:avLst/>
+          </a:prstGeom>
+          <a:noFill/>
+          <a:ln/>
+        </p:spPr>
+        <p:txBody>
+          <a:bodyPr wrap="square" lIns="0" tIns="0" rIns="0" bIns="0" rtlCol="0" anchor="ctr">
             <a:normAutofit/>
           </a:bodyPr>
           <a:lstStyle/>
           <a:p>
-            <a:pPr indent="0" marL="0">
-              <a:buNone/>
-            </a:pPr>
-            <a:r>
-              <a:rPr lang="en-US" sz="1220" dirty="0">
-                <a:solidFill>
-                  <a:srgbClr val="17364A"/>
-                </a:solidFill>
-                <a:latin typeface="Aptos" pitchFamily="34" charset="0"/>
-                <a:ea typeface="Aptos" pitchFamily="34" charset="-122"/>
-                <a:cs typeface="Aptos" pitchFamily="34" charset="-120"/>
-              </a:rPr>
-              <a:t>AI projects require disciplined implementation planning because.</a:t>
-            </a:r>
-            <a:endParaRPr lang="en-US" sz="1220" dirty="0"/>
-          </a:p>
-          <a:p>
-            <a:pPr indent="0" marL="0">
-              <a:buNone/>
-            </a:pPr>
-            <a:r>
-              <a:rPr lang="en-US" sz="1220" dirty="0">
-                <a:solidFill>
-                  <a:srgbClr val="17364A"/>
-                </a:solidFill>
-                <a:latin typeface="Aptos" pitchFamily="34" charset="0"/>
-                <a:ea typeface="Aptos" pitchFamily="34" charset="-122"/>
-                <a:cs typeface="Aptos" pitchFamily="34" charset="-120"/>
-              </a:rPr>
-              <a:t>A project that appears small, such as adding an AI summarization.</a:t>
-            </a:r>
-            <a:endParaRPr lang="en-US" sz="1220" dirty="0"/>
-          </a:p>
-          <a:p>
-            <a:pPr indent="0" marL="0">
-              <a:buNone/>
-            </a:pPr>
-            <a:r>
-              <a:rPr lang="en-US" sz="1220" dirty="0">
-                <a:solidFill>
-                  <a:srgbClr val="17364A"/>
-                </a:solidFill>
-                <a:latin typeface="Aptos" pitchFamily="34" charset="0"/>
-                <a:ea typeface="Aptos" pitchFamily="34" charset="-122"/>
-                <a:cs typeface="Aptos" pitchFamily="34" charset="-120"/>
-              </a:rPr>
-              <a:t>Public health agencies need project management methods that.</a:t>
-            </a:r>
-            <a:endParaRPr lang="en-US" sz="1220" dirty="0"/>
-          </a:p>
-        </p:txBody>
-      </p:sp>
-      <p:sp>
-        <p:nvSpPr>
-          <p:cNvPr id="16" name="Shape 14"/>
-          <p:cNvSpPr/>
-          <p:nvPr/>
-        </p:nvSpPr>
-        <p:spPr>
-          <a:xfrm>
-            <a:off x="7635240" y="4498848"/>
-            <a:ext cx="3474720" cy="1143000"/>
+            <a:pPr algn="ctr" indent="0" marL="0">
+              <a:buNone/>
+            </a:pPr>
+            <a:r>
+              <a:rPr lang="en-US" sz="880" b="1" dirty="0">
+                <a:solidFill>
+                  <a:srgbClr val="FFFFFF"/>
+                </a:solidFill>
+                <a:latin typeface="Aptos" pitchFamily="34" charset="0"/>
+                <a:ea typeface="Aptos" pitchFamily="34" charset="-122"/>
+                <a:cs typeface="Aptos" pitchFamily="34" charset="-120"/>
+              </a:rPr>
+              <a:t>Need</a:t>
+            </a:r>
+            <a:endParaRPr lang="en-US" sz="880" dirty="0"/>
+          </a:p>
+        </p:txBody>
+      </p:sp>
+      <p:sp>
+        <p:nvSpPr>
+          <p:cNvPr id="18" name="Shape 16"/>
+          <p:cNvSpPr/>
+          <p:nvPr/>
+        </p:nvSpPr>
+        <p:spPr>
+          <a:xfrm>
+            <a:off x="9817608" y="3399739"/>
+            <a:ext cx="164592" cy="0"/>
+          </a:xfrm>
+          <a:prstGeom prst="line">
+            <a:avLst/>
+          </a:prstGeom>
+          <a:noFill/>
+          <a:ln w="15240">
+            <a:solidFill>
+              <a:srgbClr val="8ABBD8"/>
+            </a:solidFill>
+            <a:prstDash val="solid"/>
+          </a:ln>
+        </p:spPr>
+      </p:sp>
+      <p:sp>
+        <p:nvSpPr>
+          <p:cNvPr id="19" name="Shape 17"/>
+          <p:cNvSpPr/>
+          <p:nvPr/>
+        </p:nvSpPr>
+        <p:spPr>
+          <a:xfrm>
+            <a:off x="8927592" y="3248863"/>
+            <a:ext cx="890016" cy="301752"/>
           </a:xfrm>
           <a:prstGeom prst="roundRect">
             <a:avLst>
-              <a:gd name="adj" fmla="val 9600"/>
+              <a:gd name="adj" fmla="val 24242"/>
+            </a:avLst>
+          </a:prstGeom>
+          <a:solidFill>
+            <a:srgbClr val="2F8A28"/>
+          </a:solidFill>
+          <a:ln w="12700">
+            <a:solidFill>
+              <a:srgbClr val="2F8A28"/>
+            </a:solidFill>
+            <a:prstDash val="solid"/>
+          </a:ln>
+        </p:spPr>
+      </p:sp>
+      <p:sp>
+        <p:nvSpPr>
+          <p:cNvPr id="20" name="Text 18"/>
+          <p:cNvSpPr/>
+          <p:nvPr/>
+        </p:nvSpPr>
+        <p:spPr>
+          <a:xfrm>
+            <a:off x="8964168" y="3322015"/>
+            <a:ext cx="816864" cy="146304"/>
+          </a:xfrm>
+          <a:prstGeom prst="rect">
+            <a:avLst/>
+          </a:prstGeom>
+          <a:noFill/>
+          <a:ln/>
+        </p:spPr>
+        <p:txBody>
+          <a:bodyPr wrap="square" lIns="0" tIns="0" rIns="0" bIns="0" rtlCol="0" anchor="ctr">
+            <a:normAutofit/>
+          </a:bodyPr>
+          <a:lstStyle/>
+          <a:p>
+            <a:pPr algn="ctr" indent="0" marL="0">
+              <a:buNone/>
+            </a:pPr>
+            <a:r>
+              <a:rPr lang="en-US" sz="880" b="1" dirty="0">
+                <a:solidFill>
+                  <a:srgbClr val="FFFFFF"/>
+                </a:solidFill>
+                <a:latin typeface="Aptos" pitchFamily="34" charset="0"/>
+                <a:ea typeface="Aptos" pitchFamily="34" charset="-122"/>
+                <a:cs typeface="Aptos" pitchFamily="34" charset="-120"/>
+              </a:rPr>
+              <a:t>Build</a:t>
+            </a:r>
+            <a:endParaRPr lang="en-US" sz="880" dirty="0"/>
+          </a:p>
+        </p:txBody>
+      </p:sp>
+      <p:sp>
+        <p:nvSpPr>
+          <p:cNvPr id="21" name="Shape 19"/>
+          <p:cNvSpPr/>
+          <p:nvPr/>
+        </p:nvSpPr>
+        <p:spPr>
+          <a:xfrm>
+            <a:off x="9982200" y="3248863"/>
+            <a:ext cx="890016" cy="301752"/>
+          </a:xfrm>
+          <a:prstGeom prst="roundRect">
+            <a:avLst>
+              <a:gd name="adj" fmla="val 24242"/>
+            </a:avLst>
+          </a:prstGeom>
+          <a:solidFill>
+            <a:srgbClr val="6A4CA3"/>
+          </a:solidFill>
+          <a:ln w="12700">
+            <a:solidFill>
+              <a:srgbClr val="6A4CA3"/>
+            </a:solidFill>
+            <a:prstDash val="solid"/>
+          </a:ln>
+        </p:spPr>
+      </p:sp>
+      <p:sp>
+        <p:nvSpPr>
+          <p:cNvPr id="22" name="Text 20"/>
+          <p:cNvSpPr/>
+          <p:nvPr/>
+        </p:nvSpPr>
+        <p:spPr>
+          <a:xfrm>
+            <a:off x="10018776" y="3322015"/>
+            <a:ext cx="816864" cy="146304"/>
+          </a:xfrm>
+          <a:prstGeom prst="rect">
+            <a:avLst/>
+          </a:prstGeom>
+          <a:noFill/>
+          <a:ln/>
+        </p:spPr>
+        <p:txBody>
+          <a:bodyPr wrap="square" lIns="0" tIns="0" rIns="0" bIns="0" rtlCol="0" anchor="ctr">
+            <a:normAutofit/>
+          </a:bodyPr>
+          <a:lstStyle/>
+          <a:p>
+            <a:pPr algn="ctr" indent="0" marL="0">
+              <a:buNone/>
+            </a:pPr>
+            <a:r>
+              <a:rPr lang="en-US" sz="880" b="1" dirty="0">
+                <a:solidFill>
+                  <a:srgbClr val="FFFFFF"/>
+                </a:solidFill>
+                <a:latin typeface="Aptos" pitchFamily="34" charset="0"/>
+                <a:ea typeface="Aptos" pitchFamily="34" charset="-122"/>
+                <a:cs typeface="Aptos" pitchFamily="34" charset="-120"/>
+              </a:rPr>
+              <a:t>Adopt</a:t>
+            </a:r>
+            <a:endParaRPr lang="en-US" sz="880" dirty="0"/>
+          </a:p>
+        </p:txBody>
+      </p:sp>
+      <p:sp>
+        <p:nvSpPr>
+          <p:cNvPr id="23" name="Text 21"/>
+          <p:cNvSpPr/>
+          <p:nvPr/>
+        </p:nvSpPr>
+        <p:spPr>
+          <a:xfrm>
+            <a:off x="7854696" y="3742639"/>
+            <a:ext cx="3035808" cy="158191"/>
+          </a:xfrm>
+          <a:prstGeom prst="rect">
+            <a:avLst/>
+          </a:prstGeom>
+          <a:noFill/>
+          <a:ln/>
+        </p:spPr>
+        <p:txBody>
+          <a:bodyPr wrap="square" lIns="254" tIns="254" rIns="254" bIns="254" rtlCol="0" anchor="t">
+            <a:normAutofit/>
+          </a:bodyPr>
+          <a:lstStyle/>
+          <a:p>
+            <a:pPr indent="0" marL="0">
+              <a:buNone/>
+            </a:pPr>
+            <a:r>
+              <a:rPr lang="en-US" sz="1120" dirty="0">
+                <a:solidFill>
+                  <a:srgbClr val="17364A"/>
+                </a:solidFill>
+                <a:latin typeface="Aptos" pitchFamily="34" charset="0"/>
+                <a:ea typeface="Aptos" pitchFamily="34" charset="-122"/>
+                <a:cs typeface="Aptos" pitchFamily="34" charset="-120"/>
+              </a:rPr>
+              <a:t>Implementation work should make dependencies, approvals, training, and sustainment visible before launch.</a:t>
+            </a:r>
+            <a:endParaRPr lang="en-US" sz="1120" dirty="0"/>
+          </a:p>
+        </p:txBody>
+      </p:sp>
+      <p:sp>
+        <p:nvSpPr>
+          <p:cNvPr id="24" name="Shape 22"/>
+          <p:cNvSpPr/>
+          <p:nvPr/>
+        </p:nvSpPr>
+        <p:spPr>
+          <a:xfrm>
+            <a:off x="7635240" y="4184294"/>
+            <a:ext cx="3474720" cy="1466698"/>
+          </a:xfrm>
+          <a:prstGeom prst="roundRect">
+            <a:avLst>
+              <a:gd name="adj" fmla="val 7481"/>
             </a:avLst>
           </a:prstGeom>
           <a:solidFill>
@@ -15269,13 +15485,13 @@
       </p:sp>
       <p:sp>
         <p:nvSpPr>
-          <p:cNvPr id="17" name="Text 15"/>
-          <p:cNvSpPr/>
-          <p:nvPr/>
-        </p:nvSpPr>
-        <p:spPr>
-          <a:xfrm>
-            <a:off x="7799832" y="4645152"/>
+          <p:cNvPr id="25" name="Text 23"/>
+          <p:cNvSpPr/>
+          <p:nvPr/>
+        </p:nvSpPr>
+        <p:spPr>
+          <a:xfrm>
+            <a:off x="7799832" y="4330598"/>
             <a:ext cx="3145536" cy="256032"/>
           </a:xfrm>
           <a:prstGeom prst="rect">
@@ -15308,14 +15524,14 @@
       </p:sp>
       <p:sp>
         <p:nvSpPr>
-          <p:cNvPr id="18" name="Text 16"/>
-          <p:cNvSpPr/>
-          <p:nvPr/>
-        </p:nvSpPr>
-        <p:spPr>
-          <a:xfrm>
-            <a:off x="7799832" y="4974336"/>
-            <a:ext cx="3145536" cy="576072"/>
+          <p:cNvPr id="26" name="Text 24"/>
+          <p:cNvSpPr/>
+          <p:nvPr/>
+        </p:nvSpPr>
+        <p:spPr>
+          <a:xfrm>
+            <a:off x="7799832" y="4659782"/>
+            <a:ext cx="3145536" cy="899770"/>
           </a:xfrm>
           <a:prstGeom prst="rect">
             <a:avLst/>
@@ -15341,7 +15557,7 @@
                 <a:ea typeface="Aptos" pitchFamily="34" charset="-122"/>
                 <a:cs typeface="Aptos" pitchFamily="34" charset="-120"/>
               </a:rPr>
-              <a:t>Use the concept to clarify workflow changes, dependencies, staffing, procurement requirements, training needs, and.</a:t>
+              <a:t>Use the concept to clarify workflow changes, dependencies, staffing, procurement requirements, training needs, and implementation checkpoints.</a:t>
             </a:r>
             <a:endParaRPr lang="en-US" sz="1320" dirty="0"/>
           </a:p>
@@ -15710,11 +15926,11 @@
         <p:spPr>
           <a:xfrm>
             <a:off x="7635240" y="1325880"/>
-            <a:ext cx="3474720" cy="1325880"/>
+            <a:ext cx="3474720" cy="1255471"/>
           </a:xfrm>
           <a:prstGeom prst="roundRect">
             <a:avLst>
-              <a:gd name="adj" fmla="val 8276"/>
+              <a:gd name="adj" fmla="val 8740"/>
             </a:avLst>
           </a:prstGeom>
           <a:solidFill>
@@ -15776,7 +15992,7 @@
         <p:spPr>
           <a:xfrm>
             <a:off x="7799832" y="1801368"/>
-            <a:ext cx="3145536" cy="758952"/>
+            <a:ext cx="3145536" cy="688543"/>
           </a:xfrm>
           <a:prstGeom prst="rect">
             <a:avLst/>
@@ -15816,12 +16032,12 @@
         </p:nvSpPr>
         <p:spPr>
           <a:xfrm>
-            <a:off x="7635240" y="2788920"/>
-            <a:ext cx="3474720" cy="1536192"/>
+            <a:off x="7635240" y="2718511"/>
+            <a:ext cx="3474720" cy="1328623"/>
           </a:xfrm>
           <a:prstGeom prst="roundRect">
             <a:avLst>
-              <a:gd name="adj" fmla="val 7143"/>
+              <a:gd name="adj" fmla="val 8259"/>
             </a:avLst>
           </a:prstGeom>
           <a:solidFill>
@@ -15843,7 +16059,7 @@
         </p:nvSpPr>
         <p:spPr>
           <a:xfrm>
-            <a:off x="7799832" y="2935224"/>
+            <a:off x="7799832" y="2864815"/>
             <a:ext cx="3145536" cy="256032"/>
           </a:xfrm>
           <a:prstGeom prst="rect">
@@ -15882,8 +16098,8 @@
         </p:nvSpPr>
         <p:spPr>
           <a:xfrm>
-            <a:off x="7818120" y="3300984"/>
-            <a:ext cx="3090672" cy="877824"/>
+            <a:off x="7818120" y="3230575"/>
+            <a:ext cx="3090672" cy="670255"/>
           </a:xfrm>
           <a:prstGeom prst="rect">
             <a:avLst/>
@@ -15940,12 +16156,12 @@
         </p:nvSpPr>
         <p:spPr>
           <a:xfrm>
-            <a:off x="7635240" y="4498848"/>
-            <a:ext cx="3474720" cy="1143000"/>
+            <a:off x="7635240" y="4184294"/>
+            <a:ext cx="3474720" cy="1466698"/>
           </a:xfrm>
           <a:prstGeom prst="roundRect">
             <a:avLst>
-              <a:gd name="adj" fmla="val 9600"/>
+              <a:gd name="adj" fmla="val 7481"/>
             </a:avLst>
           </a:prstGeom>
           <a:solidFill>
@@ -15967,7 +16183,7 @@
         </p:nvSpPr>
         <p:spPr>
           <a:xfrm>
-            <a:off x="7799832" y="4645152"/>
+            <a:off x="7799832" y="4330598"/>
             <a:ext cx="3145536" cy="256032"/>
           </a:xfrm>
           <a:prstGeom prst="rect">
@@ -16006,8 +16222,8 @@
         </p:nvSpPr>
         <p:spPr>
           <a:xfrm>
-            <a:off x="7799832" y="4974336"/>
-            <a:ext cx="3145536" cy="576072"/>
+            <a:off x="7799832" y="4659782"/>
+            <a:ext cx="3145536" cy="899770"/>
           </a:xfrm>
           <a:prstGeom prst="rect">
             <a:avLst/>
@@ -16033,7 +16249,7 @@
                 <a:ea typeface="Aptos" pitchFamily="34" charset="-122"/>
                 <a:cs typeface="Aptos" pitchFamily="34" charset="-120"/>
               </a:rPr>
-              <a:t>Use the concept to clarify workflow changes, dependencies, staffing, procurement requirements, training needs, and.</a:t>
+              <a:t>Use the concept to clarify workflow changes, dependencies, staffing, procurement requirements, training needs, and implementation checkpoints.</a:t>
             </a:r>
             <a:endParaRPr lang="en-US" sz="1320" dirty="0"/>
           </a:p>
@@ -16402,11 +16618,11 @@
         <p:spPr>
           <a:xfrm>
             <a:off x="7635240" y="1325880"/>
-            <a:ext cx="3474720" cy="1325880"/>
+            <a:ext cx="3474720" cy="1207008"/>
           </a:xfrm>
           <a:prstGeom prst="roundRect">
             <a:avLst>
-              <a:gd name="adj" fmla="val 8276"/>
+              <a:gd name="adj" fmla="val 9091"/>
             </a:avLst>
           </a:prstGeom>
           <a:solidFill>
@@ -16468,7 +16684,7 @@
         <p:spPr>
           <a:xfrm>
             <a:off x="7799832" y="1801368"/>
-            <a:ext cx="3145536" cy="758952"/>
+            <a:ext cx="3145536" cy="640080"/>
           </a:xfrm>
           <a:prstGeom prst="rect">
             <a:avLst/>
@@ -16494,7 +16710,7 @@
                 <a:ea typeface="Aptos" pitchFamily="34" charset="-122"/>
                 <a:cs typeface="Aptos" pitchFamily="34" charset="-120"/>
               </a:rPr>
-              <a:t>AI project planning should begin with a charter that defines the use case and sets boundaries.</a:t>
+              <a:t>AI project planning should begin with a charter that defines the use case and sets.</a:t>
             </a:r>
             <a:endParaRPr lang="en-US" sz="1320" dirty="0"/>
           </a:p>
@@ -16508,12 +16724,12 @@
         </p:nvSpPr>
         <p:spPr>
           <a:xfrm>
-            <a:off x="7635240" y="2788920"/>
-            <a:ext cx="3474720" cy="1536192"/>
+            <a:off x="7635240" y="2670048"/>
+            <a:ext cx="3474720" cy="1377086"/>
           </a:xfrm>
           <a:prstGeom prst="roundRect">
             <a:avLst>
-              <a:gd name="adj" fmla="val 7143"/>
+              <a:gd name="adj" fmla="val 7968"/>
             </a:avLst>
           </a:prstGeom>
           <a:solidFill>
@@ -16535,8 +16751,8 @@
         </p:nvSpPr>
         <p:spPr>
           <a:xfrm>
-            <a:off x="7799832" y="2935224"/>
-            <a:ext cx="3145536" cy="256032"/>
+            <a:off x="7799832" y="2798064"/>
+            <a:ext cx="3145536" cy="237744"/>
           </a:xfrm>
           <a:prstGeom prst="rect">
             <a:avLst/>
@@ -16552,7 +16768,7 @@
               <a:buNone/>
             </a:pPr>
             <a:r>
-              <a:rPr lang="en-US" sz="1300" b="1" dirty="0">
+              <a:rPr lang="en-US" sz="1250" b="1" dirty="0">
                 <a:solidFill>
                   <a:srgbClr val="0068B7"/>
                 </a:solidFill>
@@ -16560,101 +16776,317 @@
                 <a:ea typeface="Aptos" pitchFamily="34" charset="-122"/>
                 <a:cs typeface="Aptos" pitchFamily="34" charset="-120"/>
               </a:rPr>
-              <a:t>Concept checkpoints</a:t>
-            </a:r>
-            <a:endParaRPr lang="en-US" sz="1300" dirty="0"/>
-          </a:p>
-        </p:txBody>
-      </p:sp>
-      <p:sp>
-        <p:nvSpPr>
-          <p:cNvPr id="15" name="Text 13"/>
-          <p:cNvSpPr/>
-          <p:nvPr/>
-        </p:nvSpPr>
-        <p:spPr>
-          <a:xfrm>
-            <a:off x="7818120" y="3300984"/>
-            <a:ext cx="3090672" cy="877824"/>
-          </a:xfrm>
-          <a:prstGeom prst="rect">
-            <a:avLst/>
-          </a:prstGeom>
-          <a:noFill/>
-          <a:ln/>
-        </p:spPr>
-        <p:txBody>
-          <a:bodyPr wrap="square" lIns="508" tIns="508" rIns="508" bIns="508" rtlCol="0" anchor="t">
+              <a:t>Implementation path</a:t>
+            </a:r>
+            <a:endParaRPr lang="en-US" sz="1250" dirty="0"/>
+          </a:p>
+        </p:txBody>
+      </p:sp>
+      <p:sp>
+        <p:nvSpPr>
+          <p:cNvPr id="15" name="Shape 13"/>
+          <p:cNvSpPr/>
+          <p:nvPr/>
+        </p:nvSpPr>
+        <p:spPr>
+          <a:xfrm>
+            <a:off x="8763000" y="3351276"/>
+            <a:ext cx="164592" cy="0"/>
+          </a:xfrm>
+          <a:prstGeom prst="line">
+            <a:avLst/>
+          </a:prstGeom>
+          <a:noFill/>
+          <a:ln w="15240">
+            <a:solidFill>
+              <a:srgbClr val="8ABBD8"/>
+            </a:solidFill>
+            <a:prstDash val="solid"/>
+          </a:ln>
+        </p:spPr>
+      </p:sp>
+      <p:sp>
+        <p:nvSpPr>
+          <p:cNvPr id="16" name="Shape 14"/>
+          <p:cNvSpPr/>
+          <p:nvPr/>
+        </p:nvSpPr>
+        <p:spPr>
+          <a:xfrm>
+            <a:off x="7872984" y="3200400"/>
+            <a:ext cx="890016" cy="301752"/>
+          </a:xfrm>
+          <a:prstGeom prst="roundRect">
+            <a:avLst>
+              <a:gd name="adj" fmla="val 24242"/>
+            </a:avLst>
+          </a:prstGeom>
+          <a:solidFill>
+            <a:srgbClr val="0068B7"/>
+          </a:solidFill>
+          <a:ln w="12700">
+            <a:solidFill>
+              <a:srgbClr val="0068B7"/>
+            </a:solidFill>
+            <a:prstDash val="solid"/>
+          </a:ln>
+        </p:spPr>
+      </p:sp>
+      <p:sp>
+        <p:nvSpPr>
+          <p:cNvPr id="17" name="Text 15"/>
+          <p:cNvSpPr/>
+          <p:nvPr/>
+        </p:nvSpPr>
+        <p:spPr>
+          <a:xfrm>
+            <a:off x="7909560" y="3273552"/>
+            <a:ext cx="816864" cy="146304"/>
+          </a:xfrm>
+          <a:prstGeom prst="rect">
+            <a:avLst/>
+          </a:prstGeom>
+          <a:noFill/>
+          <a:ln/>
+        </p:spPr>
+        <p:txBody>
+          <a:bodyPr wrap="square" lIns="0" tIns="0" rIns="0" bIns="0" rtlCol="0" anchor="ctr">
             <a:normAutofit/>
           </a:bodyPr>
           <a:lstStyle/>
           <a:p>
-            <a:pPr indent="0" marL="0">
-              <a:buNone/>
-            </a:pPr>
-            <a:r>
-              <a:rPr lang="en-US" sz="1220" dirty="0">
-                <a:solidFill>
-                  <a:srgbClr val="17364A"/>
-                </a:solidFill>
-                <a:latin typeface="Aptos" pitchFamily="34" charset="0"/>
-                <a:ea typeface="Aptos" pitchFamily="34" charset="-122"/>
-                <a:cs typeface="Aptos" pitchFamily="34" charset="-120"/>
-              </a:rPr>
-              <a:t>The charter should explain the public health problem, intended.</a:t>
-            </a:r>
-            <a:endParaRPr lang="en-US" sz="1220" dirty="0"/>
-          </a:p>
-          <a:p>
-            <a:pPr indent="0" marL="0">
-              <a:buNone/>
-            </a:pPr>
-            <a:r>
-              <a:rPr lang="en-US" sz="1220" dirty="0">
-                <a:solidFill>
-                  <a:srgbClr val="17364A"/>
-                </a:solidFill>
-                <a:latin typeface="Aptos" pitchFamily="34" charset="0"/>
-                <a:ea typeface="Aptos" pitchFamily="34" charset="-122"/>
-                <a:cs typeface="Aptos" pitchFamily="34" charset="-120"/>
-              </a:rPr>
-              <a:t>It should also identify the sponsor, product owner, implementation.</a:t>
-            </a:r>
-            <a:endParaRPr lang="en-US" sz="1220" dirty="0"/>
-          </a:p>
-          <a:p>
-            <a:pPr indent="0" marL="0">
-              <a:buNone/>
-            </a:pPr>
-            <a:r>
-              <a:rPr lang="en-US" sz="1220" dirty="0">
-                <a:solidFill>
-                  <a:srgbClr val="17364A"/>
-                </a:solidFill>
-                <a:latin typeface="Aptos" pitchFamily="34" charset="0"/>
-                <a:ea typeface="Aptos" pitchFamily="34" charset="-122"/>
-                <a:cs typeface="Aptos" pitchFamily="34" charset="-120"/>
-              </a:rPr>
-              <a:t>Implementation should be organized into phases.</a:t>
-            </a:r>
-            <a:endParaRPr lang="en-US" sz="1220" dirty="0"/>
-          </a:p>
-        </p:txBody>
-      </p:sp>
-      <p:sp>
-        <p:nvSpPr>
-          <p:cNvPr id="16" name="Shape 14"/>
-          <p:cNvSpPr/>
-          <p:nvPr/>
-        </p:nvSpPr>
-        <p:spPr>
-          <a:xfrm>
-            <a:off x="7635240" y="4498848"/>
-            <a:ext cx="3474720" cy="1143000"/>
+            <a:pPr algn="ctr" indent="0" marL="0">
+              <a:buNone/>
+            </a:pPr>
+            <a:r>
+              <a:rPr lang="en-US" sz="880" b="1" dirty="0">
+                <a:solidFill>
+                  <a:srgbClr val="FFFFFF"/>
+                </a:solidFill>
+                <a:latin typeface="Aptos" pitchFamily="34" charset="0"/>
+                <a:ea typeface="Aptos" pitchFamily="34" charset="-122"/>
+                <a:cs typeface="Aptos" pitchFamily="34" charset="-120"/>
+              </a:rPr>
+              <a:t>Need</a:t>
+            </a:r>
+            <a:endParaRPr lang="en-US" sz="880" dirty="0"/>
+          </a:p>
+        </p:txBody>
+      </p:sp>
+      <p:sp>
+        <p:nvSpPr>
+          <p:cNvPr id="18" name="Shape 16"/>
+          <p:cNvSpPr/>
+          <p:nvPr/>
+        </p:nvSpPr>
+        <p:spPr>
+          <a:xfrm>
+            <a:off x="9817608" y="3351276"/>
+            <a:ext cx="164592" cy="0"/>
+          </a:xfrm>
+          <a:prstGeom prst="line">
+            <a:avLst/>
+          </a:prstGeom>
+          <a:noFill/>
+          <a:ln w="15240">
+            <a:solidFill>
+              <a:srgbClr val="8ABBD8"/>
+            </a:solidFill>
+            <a:prstDash val="solid"/>
+          </a:ln>
+        </p:spPr>
+      </p:sp>
+      <p:sp>
+        <p:nvSpPr>
+          <p:cNvPr id="19" name="Shape 17"/>
+          <p:cNvSpPr/>
+          <p:nvPr/>
+        </p:nvSpPr>
+        <p:spPr>
+          <a:xfrm>
+            <a:off x="8927592" y="3200400"/>
+            <a:ext cx="890016" cy="301752"/>
           </a:xfrm>
           <a:prstGeom prst="roundRect">
             <a:avLst>
-              <a:gd name="adj" fmla="val 9600"/>
+              <a:gd name="adj" fmla="val 24242"/>
+            </a:avLst>
+          </a:prstGeom>
+          <a:solidFill>
+            <a:srgbClr val="2F8A28"/>
+          </a:solidFill>
+          <a:ln w="12700">
+            <a:solidFill>
+              <a:srgbClr val="2F8A28"/>
+            </a:solidFill>
+            <a:prstDash val="solid"/>
+          </a:ln>
+        </p:spPr>
+      </p:sp>
+      <p:sp>
+        <p:nvSpPr>
+          <p:cNvPr id="20" name="Text 18"/>
+          <p:cNvSpPr/>
+          <p:nvPr/>
+        </p:nvSpPr>
+        <p:spPr>
+          <a:xfrm>
+            <a:off x="8964168" y="3273552"/>
+            <a:ext cx="816864" cy="146304"/>
+          </a:xfrm>
+          <a:prstGeom prst="rect">
+            <a:avLst/>
+          </a:prstGeom>
+          <a:noFill/>
+          <a:ln/>
+        </p:spPr>
+        <p:txBody>
+          <a:bodyPr wrap="square" lIns="0" tIns="0" rIns="0" bIns="0" rtlCol="0" anchor="ctr">
+            <a:normAutofit/>
+          </a:bodyPr>
+          <a:lstStyle/>
+          <a:p>
+            <a:pPr algn="ctr" indent="0" marL="0">
+              <a:buNone/>
+            </a:pPr>
+            <a:r>
+              <a:rPr lang="en-US" sz="880" b="1" dirty="0">
+                <a:solidFill>
+                  <a:srgbClr val="FFFFFF"/>
+                </a:solidFill>
+                <a:latin typeface="Aptos" pitchFamily="34" charset="0"/>
+                <a:ea typeface="Aptos" pitchFamily="34" charset="-122"/>
+                <a:cs typeface="Aptos" pitchFamily="34" charset="-120"/>
+              </a:rPr>
+              <a:t>Build</a:t>
+            </a:r>
+            <a:endParaRPr lang="en-US" sz="880" dirty="0"/>
+          </a:p>
+        </p:txBody>
+      </p:sp>
+      <p:sp>
+        <p:nvSpPr>
+          <p:cNvPr id="21" name="Shape 19"/>
+          <p:cNvSpPr/>
+          <p:nvPr/>
+        </p:nvSpPr>
+        <p:spPr>
+          <a:xfrm>
+            <a:off x="9982200" y="3200400"/>
+            <a:ext cx="890016" cy="301752"/>
+          </a:xfrm>
+          <a:prstGeom prst="roundRect">
+            <a:avLst>
+              <a:gd name="adj" fmla="val 24242"/>
+            </a:avLst>
+          </a:prstGeom>
+          <a:solidFill>
+            <a:srgbClr val="6A4CA3"/>
+          </a:solidFill>
+          <a:ln w="12700">
+            <a:solidFill>
+              <a:srgbClr val="6A4CA3"/>
+            </a:solidFill>
+            <a:prstDash val="solid"/>
+          </a:ln>
+        </p:spPr>
+      </p:sp>
+      <p:sp>
+        <p:nvSpPr>
+          <p:cNvPr id="22" name="Text 20"/>
+          <p:cNvSpPr/>
+          <p:nvPr/>
+        </p:nvSpPr>
+        <p:spPr>
+          <a:xfrm>
+            <a:off x="10018776" y="3273552"/>
+            <a:ext cx="816864" cy="146304"/>
+          </a:xfrm>
+          <a:prstGeom prst="rect">
+            <a:avLst/>
+          </a:prstGeom>
+          <a:noFill/>
+          <a:ln/>
+        </p:spPr>
+        <p:txBody>
+          <a:bodyPr wrap="square" lIns="0" tIns="0" rIns="0" bIns="0" rtlCol="0" anchor="ctr">
+            <a:normAutofit/>
+          </a:bodyPr>
+          <a:lstStyle/>
+          <a:p>
+            <a:pPr algn="ctr" indent="0" marL="0">
+              <a:buNone/>
+            </a:pPr>
+            <a:r>
+              <a:rPr lang="en-US" sz="880" b="1" dirty="0">
+                <a:solidFill>
+                  <a:srgbClr val="FFFFFF"/>
+                </a:solidFill>
+                <a:latin typeface="Aptos" pitchFamily="34" charset="0"/>
+                <a:ea typeface="Aptos" pitchFamily="34" charset="-122"/>
+                <a:cs typeface="Aptos" pitchFamily="34" charset="-120"/>
+              </a:rPr>
+              <a:t>Adopt</a:t>
+            </a:r>
+            <a:endParaRPr lang="en-US" sz="880" dirty="0"/>
+          </a:p>
+        </p:txBody>
+      </p:sp>
+      <p:sp>
+        <p:nvSpPr>
+          <p:cNvPr id="23" name="Text 21"/>
+          <p:cNvSpPr/>
+          <p:nvPr/>
+        </p:nvSpPr>
+        <p:spPr>
+          <a:xfrm>
+            <a:off x="7854696" y="3694176"/>
+            <a:ext cx="3035808" cy="206654"/>
+          </a:xfrm>
+          <a:prstGeom prst="rect">
+            <a:avLst/>
+          </a:prstGeom>
+          <a:noFill/>
+          <a:ln/>
+        </p:spPr>
+        <p:txBody>
+          <a:bodyPr wrap="square" lIns="254" tIns="254" rIns="254" bIns="254" rtlCol="0" anchor="t">
+            <a:normAutofit/>
+          </a:bodyPr>
+          <a:lstStyle/>
+          <a:p>
+            <a:pPr indent="0" marL="0">
+              <a:buNone/>
+            </a:pPr>
+            <a:r>
+              <a:rPr lang="en-US" sz="1120" dirty="0">
+                <a:solidFill>
+                  <a:srgbClr val="17364A"/>
+                </a:solidFill>
+                <a:latin typeface="Aptos" pitchFamily="34" charset="0"/>
+                <a:ea typeface="Aptos" pitchFamily="34" charset="-122"/>
+                <a:cs typeface="Aptos" pitchFamily="34" charset="-120"/>
+              </a:rPr>
+              <a:t>Implementation work should make dependencies, approvals, training, and sustainment visible before launch.</a:t>
+            </a:r>
+            <a:endParaRPr lang="en-US" sz="1120" dirty="0"/>
+          </a:p>
+        </p:txBody>
+      </p:sp>
+      <p:sp>
+        <p:nvSpPr>
+          <p:cNvPr id="24" name="Shape 22"/>
+          <p:cNvSpPr/>
+          <p:nvPr/>
+        </p:nvSpPr>
+        <p:spPr>
+          <a:xfrm>
+            <a:off x="7635240" y="4184294"/>
+            <a:ext cx="3474720" cy="1466698"/>
+          </a:xfrm>
+          <a:prstGeom prst="roundRect">
+            <a:avLst>
+              <a:gd name="adj" fmla="val 7481"/>
             </a:avLst>
           </a:prstGeom>
           <a:solidFill>
@@ -16670,13 +17102,13 @@
       </p:sp>
       <p:sp>
         <p:nvSpPr>
-          <p:cNvPr id="17" name="Text 15"/>
-          <p:cNvSpPr/>
-          <p:nvPr/>
-        </p:nvSpPr>
-        <p:spPr>
-          <a:xfrm>
-            <a:off x="7799832" y="4645152"/>
+          <p:cNvPr id="25" name="Text 23"/>
+          <p:cNvSpPr/>
+          <p:nvPr/>
+        </p:nvSpPr>
+        <p:spPr>
+          <a:xfrm>
+            <a:off x="7799832" y="4330598"/>
             <a:ext cx="3145536" cy="256032"/>
           </a:xfrm>
           <a:prstGeom prst="rect">
@@ -16709,14 +17141,14 @@
       </p:sp>
       <p:sp>
         <p:nvSpPr>
-          <p:cNvPr id="18" name="Text 16"/>
-          <p:cNvSpPr/>
-          <p:nvPr/>
-        </p:nvSpPr>
-        <p:spPr>
-          <a:xfrm>
-            <a:off x="7799832" y="4974336"/>
-            <a:ext cx="3145536" cy="576072"/>
+          <p:cNvPr id="26" name="Text 24"/>
+          <p:cNvSpPr/>
+          <p:nvPr/>
+        </p:nvSpPr>
+        <p:spPr>
+          <a:xfrm>
+            <a:off x="7799832" y="4659782"/>
+            <a:ext cx="3145536" cy="899770"/>
           </a:xfrm>
           <a:prstGeom prst="rect">
             <a:avLst/>
@@ -16742,7 +17174,7 @@
                 <a:ea typeface="Aptos" pitchFamily="34" charset="-122"/>
                 <a:cs typeface="Aptos" pitchFamily="34" charset="-120"/>
               </a:rPr>
-              <a:t>Use the concept to clarify workflow changes, dependencies, staffing, procurement requirements, training needs, and.</a:t>
+              <a:t>Use the concept to clarify workflow changes, dependencies, staffing, procurement requirements, training needs, and implementation checkpoints.</a:t>
             </a:r>
             <a:endParaRPr lang="en-US" sz="1320" dirty="0"/>
           </a:p>
@@ -17111,11 +17543,11 @@
         <p:spPr>
           <a:xfrm>
             <a:off x="7635240" y="1325880"/>
-            <a:ext cx="3474720" cy="1325880"/>
+            <a:ext cx="3474720" cy="1207008"/>
           </a:xfrm>
           <a:prstGeom prst="roundRect">
             <a:avLst>
-              <a:gd name="adj" fmla="val 8276"/>
+              <a:gd name="adj" fmla="val 9091"/>
             </a:avLst>
           </a:prstGeom>
           <a:solidFill>
@@ -17177,7 +17609,7 @@
         <p:spPr>
           <a:xfrm>
             <a:off x="7799832" y="1801368"/>
-            <a:ext cx="3145536" cy="758952"/>
+            <a:ext cx="3145536" cy="640080"/>
           </a:xfrm>
           <a:prstGeom prst="rect">
             <a:avLst/>
@@ -17217,12 +17649,12 @@
         </p:nvSpPr>
         <p:spPr>
           <a:xfrm>
-            <a:off x="7635240" y="2788920"/>
-            <a:ext cx="3474720" cy="1536192"/>
+            <a:off x="7635240" y="2670048"/>
+            <a:ext cx="3474720" cy="1377086"/>
           </a:xfrm>
           <a:prstGeom prst="roundRect">
             <a:avLst>
-              <a:gd name="adj" fmla="val 7143"/>
+              <a:gd name="adj" fmla="val 7968"/>
             </a:avLst>
           </a:prstGeom>
           <a:solidFill>
@@ -17244,8 +17676,8 @@
         </p:nvSpPr>
         <p:spPr>
           <a:xfrm>
-            <a:off x="7799832" y="2935224"/>
-            <a:ext cx="3145536" cy="256032"/>
+            <a:off x="7799832" y="2798064"/>
+            <a:ext cx="3145536" cy="237744"/>
           </a:xfrm>
           <a:prstGeom prst="rect">
             <a:avLst/>
@@ -17261,7 +17693,7 @@
               <a:buNone/>
             </a:pPr>
             <a:r>
-              <a:rPr lang="en-US" sz="1300" b="1" dirty="0">
+              <a:rPr lang="en-US" sz="1250" b="1" dirty="0">
                 <a:solidFill>
                   <a:srgbClr val="0068B7"/>
                 </a:solidFill>
@@ -17269,84 +17701,317 @@
                 <a:ea typeface="Aptos" pitchFamily="34" charset="-122"/>
                 <a:cs typeface="Aptos" pitchFamily="34" charset="-120"/>
               </a:rPr>
-              <a:t>Concept checkpoints</a:t>
-            </a:r>
-            <a:endParaRPr lang="en-US" sz="1300" dirty="0"/>
-          </a:p>
-        </p:txBody>
-      </p:sp>
-      <p:sp>
-        <p:nvSpPr>
-          <p:cNvPr id="15" name="Text 13"/>
-          <p:cNvSpPr/>
-          <p:nvPr/>
-        </p:nvSpPr>
-        <p:spPr>
-          <a:xfrm>
-            <a:off x="7818120" y="3300984"/>
-            <a:ext cx="3090672" cy="877824"/>
-          </a:xfrm>
-          <a:prstGeom prst="rect">
-            <a:avLst/>
-          </a:prstGeom>
-          <a:noFill/>
-          <a:ln/>
-        </p:spPr>
-        <p:txBody>
-          <a:bodyPr wrap="square" lIns="508" tIns="508" rIns="508" bIns="508" rtlCol="0" anchor="t">
+              <a:t>Implementation path</a:t>
+            </a:r>
+            <a:endParaRPr lang="en-US" sz="1250" dirty="0"/>
+          </a:p>
+        </p:txBody>
+      </p:sp>
+      <p:sp>
+        <p:nvSpPr>
+          <p:cNvPr id="15" name="Shape 13"/>
+          <p:cNvSpPr/>
+          <p:nvPr/>
+        </p:nvSpPr>
+        <p:spPr>
+          <a:xfrm>
+            <a:off x="8763000" y="3351276"/>
+            <a:ext cx="164592" cy="0"/>
+          </a:xfrm>
+          <a:prstGeom prst="line">
+            <a:avLst/>
+          </a:prstGeom>
+          <a:noFill/>
+          <a:ln w="15240">
+            <a:solidFill>
+              <a:srgbClr val="8ABBD8"/>
+            </a:solidFill>
+            <a:prstDash val="solid"/>
+          </a:ln>
+        </p:spPr>
+      </p:sp>
+      <p:sp>
+        <p:nvSpPr>
+          <p:cNvPr id="16" name="Shape 14"/>
+          <p:cNvSpPr/>
+          <p:nvPr/>
+        </p:nvSpPr>
+        <p:spPr>
+          <a:xfrm>
+            <a:off x="7872984" y="3200400"/>
+            <a:ext cx="890016" cy="301752"/>
+          </a:xfrm>
+          <a:prstGeom prst="roundRect">
+            <a:avLst>
+              <a:gd name="adj" fmla="val 24242"/>
+            </a:avLst>
+          </a:prstGeom>
+          <a:solidFill>
+            <a:srgbClr val="0068B7"/>
+          </a:solidFill>
+          <a:ln w="12700">
+            <a:solidFill>
+              <a:srgbClr val="0068B7"/>
+            </a:solidFill>
+            <a:prstDash val="solid"/>
+          </a:ln>
+        </p:spPr>
+      </p:sp>
+      <p:sp>
+        <p:nvSpPr>
+          <p:cNvPr id="17" name="Text 15"/>
+          <p:cNvSpPr/>
+          <p:nvPr/>
+        </p:nvSpPr>
+        <p:spPr>
+          <a:xfrm>
+            <a:off x="7909560" y="3273552"/>
+            <a:ext cx="816864" cy="146304"/>
+          </a:xfrm>
+          <a:prstGeom prst="rect">
+            <a:avLst/>
+          </a:prstGeom>
+          <a:noFill/>
+          <a:ln/>
+        </p:spPr>
+        <p:txBody>
+          <a:bodyPr wrap="square" lIns="0" tIns="0" rIns="0" bIns="0" rtlCol="0" anchor="ctr">
             <a:normAutofit/>
           </a:bodyPr>
           <a:lstStyle/>
           <a:p>
-            <a:pPr indent="0" marL="0">
-              <a:buNone/>
-            </a:pPr>
-            <a:r>
-              <a:rPr lang="en-US" sz="1220" dirty="0">
-                <a:solidFill>
-                  <a:srgbClr val="17364A"/>
-                </a:solidFill>
-                <a:latin typeface="Aptos" pitchFamily="34" charset="0"/>
-                <a:ea typeface="Aptos" pitchFamily="34" charset="-122"/>
-                <a:cs typeface="Aptos" pitchFamily="34" charset="-120"/>
-              </a:rPr>
-              <a:t>A pilot may show promise, but routine use requires support,.</a:t>
-            </a:r>
-            <a:endParaRPr lang="en-US" sz="1220" dirty="0"/>
-          </a:p>
-          <a:p>
-            <a:pPr indent="0" marL="0">
-              <a:buNone/>
-            </a:pPr>
-            <a:r>
-              <a:rPr lang="en-US" sz="1220" dirty="0">
-                <a:solidFill>
-                  <a:srgbClr val="17364A"/>
-                </a:solidFill>
-                <a:latin typeface="Aptos" pitchFamily="34" charset="0"/>
-                <a:ea typeface="Aptos" pitchFamily="34" charset="-122"/>
-                <a:cs typeface="Aptos" pitchFamily="34" charset="-120"/>
-              </a:rPr>
-              <a:t>The project plan should define when the implementation team ends.</a:t>
-            </a:r>
-            <a:endParaRPr lang="en-US" sz="1220" dirty="0"/>
-          </a:p>
-        </p:txBody>
-      </p:sp>
-      <p:sp>
-        <p:nvSpPr>
-          <p:cNvPr id="16" name="Shape 14"/>
-          <p:cNvSpPr/>
-          <p:nvPr/>
-        </p:nvSpPr>
-        <p:spPr>
-          <a:xfrm>
-            <a:off x="7635240" y="4498848"/>
-            <a:ext cx="3474720" cy="1143000"/>
+            <a:pPr algn="ctr" indent="0" marL="0">
+              <a:buNone/>
+            </a:pPr>
+            <a:r>
+              <a:rPr lang="en-US" sz="880" b="1" dirty="0">
+                <a:solidFill>
+                  <a:srgbClr val="FFFFFF"/>
+                </a:solidFill>
+                <a:latin typeface="Aptos" pitchFamily="34" charset="0"/>
+                <a:ea typeface="Aptos" pitchFamily="34" charset="-122"/>
+                <a:cs typeface="Aptos" pitchFamily="34" charset="-120"/>
+              </a:rPr>
+              <a:t>Need</a:t>
+            </a:r>
+            <a:endParaRPr lang="en-US" sz="880" dirty="0"/>
+          </a:p>
+        </p:txBody>
+      </p:sp>
+      <p:sp>
+        <p:nvSpPr>
+          <p:cNvPr id="18" name="Shape 16"/>
+          <p:cNvSpPr/>
+          <p:nvPr/>
+        </p:nvSpPr>
+        <p:spPr>
+          <a:xfrm>
+            <a:off x="9817608" y="3351276"/>
+            <a:ext cx="164592" cy="0"/>
+          </a:xfrm>
+          <a:prstGeom prst="line">
+            <a:avLst/>
+          </a:prstGeom>
+          <a:noFill/>
+          <a:ln w="15240">
+            <a:solidFill>
+              <a:srgbClr val="8ABBD8"/>
+            </a:solidFill>
+            <a:prstDash val="solid"/>
+          </a:ln>
+        </p:spPr>
+      </p:sp>
+      <p:sp>
+        <p:nvSpPr>
+          <p:cNvPr id="19" name="Shape 17"/>
+          <p:cNvSpPr/>
+          <p:nvPr/>
+        </p:nvSpPr>
+        <p:spPr>
+          <a:xfrm>
+            <a:off x="8927592" y="3200400"/>
+            <a:ext cx="890016" cy="301752"/>
           </a:xfrm>
           <a:prstGeom prst="roundRect">
             <a:avLst>
-              <a:gd name="adj" fmla="val 9600"/>
+              <a:gd name="adj" fmla="val 24242"/>
+            </a:avLst>
+          </a:prstGeom>
+          <a:solidFill>
+            <a:srgbClr val="2F8A28"/>
+          </a:solidFill>
+          <a:ln w="12700">
+            <a:solidFill>
+              <a:srgbClr val="2F8A28"/>
+            </a:solidFill>
+            <a:prstDash val="solid"/>
+          </a:ln>
+        </p:spPr>
+      </p:sp>
+      <p:sp>
+        <p:nvSpPr>
+          <p:cNvPr id="20" name="Text 18"/>
+          <p:cNvSpPr/>
+          <p:nvPr/>
+        </p:nvSpPr>
+        <p:spPr>
+          <a:xfrm>
+            <a:off x="8964168" y="3273552"/>
+            <a:ext cx="816864" cy="146304"/>
+          </a:xfrm>
+          <a:prstGeom prst="rect">
+            <a:avLst/>
+          </a:prstGeom>
+          <a:noFill/>
+          <a:ln/>
+        </p:spPr>
+        <p:txBody>
+          <a:bodyPr wrap="square" lIns="0" tIns="0" rIns="0" bIns="0" rtlCol="0" anchor="ctr">
+            <a:normAutofit/>
+          </a:bodyPr>
+          <a:lstStyle/>
+          <a:p>
+            <a:pPr algn="ctr" indent="0" marL="0">
+              <a:buNone/>
+            </a:pPr>
+            <a:r>
+              <a:rPr lang="en-US" sz="880" b="1" dirty="0">
+                <a:solidFill>
+                  <a:srgbClr val="FFFFFF"/>
+                </a:solidFill>
+                <a:latin typeface="Aptos" pitchFamily="34" charset="0"/>
+                <a:ea typeface="Aptos" pitchFamily="34" charset="-122"/>
+                <a:cs typeface="Aptos" pitchFamily="34" charset="-120"/>
+              </a:rPr>
+              <a:t>Build</a:t>
+            </a:r>
+            <a:endParaRPr lang="en-US" sz="880" dirty="0"/>
+          </a:p>
+        </p:txBody>
+      </p:sp>
+      <p:sp>
+        <p:nvSpPr>
+          <p:cNvPr id="21" name="Shape 19"/>
+          <p:cNvSpPr/>
+          <p:nvPr/>
+        </p:nvSpPr>
+        <p:spPr>
+          <a:xfrm>
+            <a:off x="9982200" y="3200400"/>
+            <a:ext cx="890016" cy="301752"/>
+          </a:xfrm>
+          <a:prstGeom prst="roundRect">
+            <a:avLst>
+              <a:gd name="adj" fmla="val 24242"/>
+            </a:avLst>
+          </a:prstGeom>
+          <a:solidFill>
+            <a:srgbClr val="6A4CA3"/>
+          </a:solidFill>
+          <a:ln w="12700">
+            <a:solidFill>
+              <a:srgbClr val="6A4CA3"/>
+            </a:solidFill>
+            <a:prstDash val="solid"/>
+          </a:ln>
+        </p:spPr>
+      </p:sp>
+      <p:sp>
+        <p:nvSpPr>
+          <p:cNvPr id="22" name="Text 20"/>
+          <p:cNvSpPr/>
+          <p:nvPr/>
+        </p:nvSpPr>
+        <p:spPr>
+          <a:xfrm>
+            <a:off x="10018776" y="3273552"/>
+            <a:ext cx="816864" cy="146304"/>
+          </a:xfrm>
+          <a:prstGeom prst="rect">
+            <a:avLst/>
+          </a:prstGeom>
+          <a:noFill/>
+          <a:ln/>
+        </p:spPr>
+        <p:txBody>
+          <a:bodyPr wrap="square" lIns="0" tIns="0" rIns="0" bIns="0" rtlCol="0" anchor="ctr">
+            <a:normAutofit/>
+          </a:bodyPr>
+          <a:lstStyle/>
+          <a:p>
+            <a:pPr algn="ctr" indent="0" marL="0">
+              <a:buNone/>
+            </a:pPr>
+            <a:r>
+              <a:rPr lang="en-US" sz="880" b="1" dirty="0">
+                <a:solidFill>
+                  <a:srgbClr val="FFFFFF"/>
+                </a:solidFill>
+                <a:latin typeface="Aptos" pitchFamily="34" charset="0"/>
+                <a:ea typeface="Aptos" pitchFamily="34" charset="-122"/>
+                <a:cs typeface="Aptos" pitchFamily="34" charset="-120"/>
+              </a:rPr>
+              <a:t>Adopt</a:t>
+            </a:r>
+            <a:endParaRPr lang="en-US" sz="880" dirty="0"/>
+          </a:p>
+        </p:txBody>
+      </p:sp>
+      <p:sp>
+        <p:nvSpPr>
+          <p:cNvPr id="23" name="Text 21"/>
+          <p:cNvSpPr/>
+          <p:nvPr/>
+        </p:nvSpPr>
+        <p:spPr>
+          <a:xfrm>
+            <a:off x="7854696" y="3694176"/>
+            <a:ext cx="3035808" cy="206654"/>
+          </a:xfrm>
+          <a:prstGeom prst="rect">
+            <a:avLst/>
+          </a:prstGeom>
+          <a:noFill/>
+          <a:ln/>
+        </p:spPr>
+        <p:txBody>
+          <a:bodyPr wrap="square" lIns="254" tIns="254" rIns="254" bIns="254" rtlCol="0" anchor="t">
+            <a:normAutofit/>
+          </a:bodyPr>
+          <a:lstStyle/>
+          <a:p>
+            <a:pPr indent="0" marL="0">
+              <a:buNone/>
+            </a:pPr>
+            <a:r>
+              <a:rPr lang="en-US" sz="1120" dirty="0">
+                <a:solidFill>
+                  <a:srgbClr val="17364A"/>
+                </a:solidFill>
+                <a:latin typeface="Aptos" pitchFamily="34" charset="0"/>
+                <a:ea typeface="Aptos" pitchFamily="34" charset="-122"/>
+                <a:cs typeface="Aptos" pitchFamily="34" charset="-120"/>
+              </a:rPr>
+              <a:t>Implementation work should make dependencies, approvals, training, and sustainment visible before launch.</a:t>
+            </a:r>
+            <a:endParaRPr lang="en-US" sz="1120" dirty="0"/>
+          </a:p>
+        </p:txBody>
+      </p:sp>
+      <p:sp>
+        <p:nvSpPr>
+          <p:cNvPr id="24" name="Shape 22"/>
+          <p:cNvSpPr/>
+          <p:nvPr/>
+        </p:nvSpPr>
+        <p:spPr>
+          <a:xfrm>
+            <a:off x="7635240" y="4184294"/>
+            <a:ext cx="3474720" cy="1466698"/>
+          </a:xfrm>
+          <a:prstGeom prst="roundRect">
+            <a:avLst>
+              <a:gd name="adj" fmla="val 7481"/>
             </a:avLst>
           </a:prstGeom>
           <a:solidFill>
@@ -17362,13 +18027,13 @@
       </p:sp>
       <p:sp>
         <p:nvSpPr>
-          <p:cNvPr id="17" name="Text 15"/>
-          <p:cNvSpPr/>
-          <p:nvPr/>
-        </p:nvSpPr>
-        <p:spPr>
-          <a:xfrm>
-            <a:off x="7799832" y="4645152"/>
+          <p:cNvPr id="25" name="Text 23"/>
+          <p:cNvSpPr/>
+          <p:nvPr/>
+        </p:nvSpPr>
+        <p:spPr>
+          <a:xfrm>
+            <a:off x="7799832" y="4330598"/>
             <a:ext cx="3145536" cy="256032"/>
           </a:xfrm>
           <a:prstGeom prst="rect">
@@ -17401,14 +18066,14 @@
       </p:sp>
       <p:sp>
         <p:nvSpPr>
-          <p:cNvPr id="18" name="Text 16"/>
-          <p:cNvSpPr/>
-          <p:nvPr/>
-        </p:nvSpPr>
-        <p:spPr>
-          <a:xfrm>
-            <a:off x="7799832" y="4974336"/>
-            <a:ext cx="3145536" cy="576072"/>
+          <p:cNvPr id="26" name="Text 24"/>
+          <p:cNvSpPr/>
+          <p:nvPr/>
+        </p:nvSpPr>
+        <p:spPr>
+          <a:xfrm>
+            <a:off x="7799832" y="4659782"/>
+            <a:ext cx="3145536" cy="899770"/>
           </a:xfrm>
           <a:prstGeom prst="rect">
             <a:avLst/>
@@ -17434,7 +18099,7 @@
                 <a:ea typeface="Aptos" pitchFamily="34" charset="-122"/>
                 <a:cs typeface="Aptos" pitchFamily="34" charset="-120"/>
               </a:rPr>
-              <a:t>Use the concept to clarify workflow changes, dependencies, staffing, procurement requirements, training needs, and.</a:t>
+              <a:t>Use the concept to clarify workflow changes, dependencies, staffing, procurement requirements, training needs, and implementation checkpoints.</a:t>
             </a:r>
             <a:endParaRPr lang="en-US" sz="1320" dirty="0"/>
           </a:p>

--- a/downloads/presentations/modules/pmg-220.pptx
+++ b/downloads/presentations/modules/pmg-220.pptx
@@ -3346,8 +3346,8 @@
         </p:nvSpPr>
         <p:spPr>
           <a:xfrm>
-            <a:off x="868680" y="1508760"/>
-            <a:ext cx="6309360" cy="4160520"/>
+            <a:off x="822960" y="1463040"/>
+            <a:ext cx="6565392" cy="4343400"/>
           </a:xfrm>
           <a:prstGeom prst="rect">
             <a:avLst/>
@@ -3365,7 +3365,7 @@
               <a:buNone/>
             </a:pPr>
             <a:r>
-              <a:rPr lang="en-US" sz="2100" dirty="0">
+              <a:rPr lang="en-US" sz="1920" dirty="0">
                 <a:solidFill>
                   <a:srgbClr val="003A63"/>
                 </a:solidFill>
@@ -3375,14 +3375,14 @@
               </a:rPr>
               <a:t>• Risks and failure modes include the following:</a:t>
             </a:r>
-            <a:endParaRPr lang="en-US" sz="2100" dirty="0"/>
-          </a:p>
-          <a:p>
-            <a:pPr indent="0" marL="0">
-              <a:buNone/>
-            </a:pPr>
-            <a:r>
-              <a:rPr lang="en-US" sz="2100" dirty="0">
+            <a:endParaRPr lang="en-US" sz="1920" dirty="0"/>
+          </a:p>
+          <a:p>
+            <a:pPr indent="0" marL="0">
+              <a:buNone/>
+            </a:pPr>
+            <a:r>
+              <a:rPr lang="en-US" sz="1920" dirty="0">
                 <a:solidFill>
                   <a:srgbClr val="003A63"/>
                 </a:solidFill>
@@ -3392,14 +3392,14 @@
               </a:rPr>
               <a:t>• Pilots launching without governance approval or operational ownership.</a:t>
             </a:r>
-            <a:endParaRPr lang="en-US" sz="2100" dirty="0"/>
-          </a:p>
-          <a:p>
-            <a:pPr indent="0" marL="0">
-              <a:buNone/>
-            </a:pPr>
-            <a:r>
-              <a:rPr lang="en-US" sz="2100" dirty="0">
+            <a:endParaRPr lang="en-US" sz="1920" dirty="0"/>
+          </a:p>
+          <a:p>
+            <a:pPr indent="0" marL="0">
+              <a:buNone/>
+            </a:pPr>
+            <a:r>
+              <a:rPr lang="en-US" sz="1920" dirty="0">
                 <a:solidFill>
                   <a:srgbClr val="003A63"/>
                 </a:solidFill>
@@ -3407,9 +3407,9 @@
                 <a:ea typeface="Aptos" pitchFamily="34" charset="-122"/>
                 <a:cs typeface="Aptos" pitchFamily="34" charset="-120"/>
               </a:rPr>
-              <a:t>• Project plans overlooking data, privacy, security, workflow, or training dependencies.</a:t>
-            </a:r>
-            <a:endParaRPr lang="en-US" sz="2100" dirty="0"/>
+              <a:t>• Project plans overlooking data, privacy, security, workflow, or training.</a:t>
+            </a:r>
+            <a:endParaRPr lang="en-US" sz="1920" dirty="0"/>
           </a:p>
         </p:txBody>
       </p:sp>
@@ -3421,12 +3421,12 @@
         </p:nvSpPr>
         <p:spPr>
           <a:xfrm>
-            <a:off x="7635240" y="1325880"/>
-            <a:ext cx="3474720" cy="1207008"/>
+            <a:off x="7543800" y="1325880"/>
+            <a:ext cx="3611880" cy="1261872"/>
           </a:xfrm>
           <a:prstGeom prst="roundRect">
             <a:avLst>
-              <a:gd name="adj" fmla="val 9091"/>
+              <a:gd name="adj" fmla="val 8696"/>
             </a:avLst>
           </a:prstGeom>
           <a:solidFill>
@@ -3448,8 +3448,8 @@
         </p:nvSpPr>
         <p:spPr>
           <a:xfrm>
-            <a:off x="7799832" y="1472184"/>
-            <a:ext cx="3145536" cy="256032"/>
+            <a:off x="7708392" y="1453896"/>
+            <a:ext cx="3282696" cy="228600"/>
           </a:xfrm>
           <a:prstGeom prst="rect">
             <a:avLst/>
@@ -3465,7 +3465,7 @@
               <a:buNone/>
             </a:pPr>
             <a:r>
-              <a:rPr lang="en-US" sz="1300" b="1" dirty="0">
+              <a:rPr lang="en-US" sz="1220" b="1" dirty="0">
                 <a:solidFill>
                   <a:srgbClr val="0068B7"/>
                 </a:solidFill>
@@ -3475,7 +3475,7 @@
               </a:rPr>
               <a:t>Risk check</a:t>
             </a:r>
-            <a:endParaRPr lang="en-US" sz="1300" dirty="0"/>
+            <a:endParaRPr lang="en-US" sz="1220" dirty="0"/>
           </a:p>
         </p:txBody>
       </p:sp>
@@ -3487,8 +3487,8 @@
         </p:nvSpPr>
         <p:spPr>
           <a:xfrm>
-            <a:off x="7799832" y="1801368"/>
-            <a:ext cx="3145536" cy="640080"/>
+            <a:off x="7708392" y="1764792"/>
+            <a:ext cx="3282696" cy="749808"/>
           </a:xfrm>
           <a:prstGeom prst="rect">
             <a:avLst/>
@@ -3506,7 +3506,7 @@
               <a:buNone/>
             </a:pPr>
             <a:r>
-              <a:rPr lang="en-US" sz="1320" dirty="0">
+              <a:rPr lang="en-US" sz="1220" dirty="0">
                 <a:solidFill>
                   <a:srgbClr val="17364A"/>
                 </a:solidFill>
@@ -3516,7 +3516,7 @@
               </a:rPr>
               <a:t>Risks and failure modes include the following:</a:t>
             </a:r>
-            <a:endParaRPr lang="en-US" sz="1320" dirty="0"/>
+            <a:endParaRPr lang="en-US" sz="1220" dirty="0"/>
           </a:p>
         </p:txBody>
       </p:sp>
@@ -3528,12 +3528,12 @@
         </p:nvSpPr>
         <p:spPr>
           <a:xfrm>
-            <a:off x="7635240" y="2670048"/>
-            <a:ext cx="3474720" cy="1536192"/>
+            <a:off x="7543800" y="2724912"/>
+            <a:ext cx="3611880" cy="1527048"/>
           </a:xfrm>
           <a:prstGeom prst="roundRect">
             <a:avLst>
-              <a:gd name="adj" fmla="val 7143"/>
+              <a:gd name="adj" fmla="val 7186"/>
             </a:avLst>
           </a:prstGeom>
           <a:solidFill>
@@ -3555,8 +3555,8 @@
         </p:nvSpPr>
         <p:spPr>
           <a:xfrm>
-            <a:off x="7799832" y="2816352"/>
-            <a:ext cx="3145536" cy="256032"/>
+            <a:off x="7708392" y="2852928"/>
+            <a:ext cx="3282696" cy="228600"/>
           </a:xfrm>
           <a:prstGeom prst="rect">
             <a:avLst/>
@@ -3572,7 +3572,7 @@
               <a:buNone/>
             </a:pPr>
             <a:r>
-              <a:rPr lang="en-US" sz="1300" b="1" dirty="0">
+              <a:rPr lang="en-US" sz="1220" b="1" dirty="0">
                 <a:solidFill>
                   <a:srgbClr val="0068B7"/>
                 </a:solidFill>
@@ -3582,7 +3582,7 @@
               </a:rPr>
               <a:t>Concept checkpoints</a:t>
             </a:r>
-            <a:endParaRPr lang="en-US" sz="1300" dirty="0"/>
+            <a:endParaRPr lang="en-US" sz="1220" dirty="0"/>
           </a:p>
         </p:txBody>
       </p:sp>
@@ -3594,8 +3594,8 @@
         </p:nvSpPr>
         <p:spPr>
           <a:xfrm>
-            <a:off x="7818120" y="3182112"/>
-            <a:ext cx="3090672" cy="877824"/>
+            <a:off x="7726680" y="3182112"/>
+            <a:ext cx="3227832" cy="960120"/>
           </a:xfrm>
           <a:prstGeom prst="rect">
             <a:avLst/>
@@ -3613,7 +3613,7 @@
               <a:buNone/>
             </a:pPr>
             <a:r>
-              <a:rPr lang="en-US" sz="1220" dirty="0">
+              <a:rPr lang="en-US" sz="1140" dirty="0">
                 <a:solidFill>
                   <a:srgbClr val="17364A"/>
                 </a:solidFill>
@@ -3623,14 +3623,14 @@
               </a:rPr>
               <a:t>Risks and failure modes include the following:</a:t>
             </a:r>
-            <a:endParaRPr lang="en-US" sz="1220" dirty="0"/>
-          </a:p>
-          <a:p>
-            <a:pPr indent="0" marL="0">
-              <a:buNone/>
-            </a:pPr>
-            <a:r>
-              <a:rPr lang="en-US" sz="1220" dirty="0">
+            <a:endParaRPr lang="en-US" sz="1140" dirty="0"/>
+          </a:p>
+          <a:p>
+            <a:pPr indent="0" marL="0">
+              <a:buNone/>
+            </a:pPr>
+            <a:r>
+              <a:rPr lang="en-US" sz="1140" dirty="0">
                 <a:solidFill>
                   <a:srgbClr val="17364A"/>
                 </a:solidFill>
@@ -3638,16 +3638,16 @@
                 <a:ea typeface="Aptos" pitchFamily="34" charset="-122"/>
                 <a:cs typeface="Aptos" pitchFamily="34" charset="-120"/>
               </a:rPr>
-              <a:t>Pilots launching without governance approval or operational.</a:t>
-            </a:r>
-            <a:endParaRPr lang="en-US" sz="1220" dirty="0"/>
-          </a:p>
-          <a:p>
-            <a:pPr indent="0" marL="0">
-              <a:buNone/>
-            </a:pPr>
-            <a:r>
-              <a:rPr lang="en-US" sz="1220" dirty="0">
+              <a:t>Pilots launching without governance approval or.</a:t>
+            </a:r>
+            <a:endParaRPr lang="en-US" sz="1140" dirty="0"/>
+          </a:p>
+          <a:p>
+            <a:pPr indent="0" marL="0">
+              <a:buNone/>
+            </a:pPr>
+            <a:r>
+              <a:rPr lang="en-US" sz="1140" dirty="0">
                 <a:solidFill>
                   <a:srgbClr val="17364A"/>
                 </a:solidFill>
@@ -3655,9 +3655,9 @@
                 <a:ea typeface="Aptos" pitchFamily="34" charset="-122"/>
                 <a:cs typeface="Aptos" pitchFamily="34" charset="-120"/>
               </a:rPr>
-              <a:t>Project plans overlooking data, privacy, security, workflow, or.</a:t>
-            </a:r>
-            <a:endParaRPr lang="en-US" sz="1220" dirty="0"/>
+              <a:t>Project plans overlooking data, privacy, security,.</a:t>
+            </a:r>
+            <a:endParaRPr lang="en-US" sz="1140" dirty="0"/>
           </a:p>
         </p:txBody>
       </p:sp>
@@ -3669,12 +3669,12 @@
         </p:nvSpPr>
         <p:spPr>
           <a:xfrm>
-            <a:off x="7635240" y="4343400"/>
-            <a:ext cx="3474720" cy="1255471"/>
+            <a:off x="7543800" y="4389120"/>
+            <a:ext cx="3611880" cy="1261872"/>
           </a:xfrm>
           <a:prstGeom prst="roundRect">
             <a:avLst>
-              <a:gd name="adj" fmla="val 8740"/>
+              <a:gd name="adj" fmla="val 8696"/>
             </a:avLst>
           </a:prstGeom>
           <a:solidFill>
@@ -3696,8 +3696,8 @@
         </p:nvSpPr>
         <p:spPr>
           <a:xfrm>
-            <a:off x="7799832" y="4489704"/>
-            <a:ext cx="3145536" cy="256032"/>
+            <a:off x="7708392" y="4517136"/>
+            <a:ext cx="3282696" cy="228600"/>
           </a:xfrm>
           <a:prstGeom prst="rect">
             <a:avLst/>
@@ -3713,7 +3713,7 @@
               <a:buNone/>
             </a:pPr>
             <a:r>
-              <a:rPr lang="en-US" sz="1300" b="1" dirty="0">
+              <a:rPr lang="en-US" sz="1220" b="1" dirty="0">
                 <a:solidFill>
                   <a:srgbClr val="0068B7"/>
                 </a:solidFill>
@@ -3723,7 +3723,7 @@
               </a:rPr>
               <a:t>Safeguard to plan</a:t>
             </a:r>
-            <a:endParaRPr lang="en-US" sz="1300" dirty="0"/>
+            <a:endParaRPr lang="en-US" sz="1220" dirty="0"/>
           </a:p>
         </p:txBody>
       </p:sp>
@@ -3735,8 +3735,8 @@
         </p:nvSpPr>
         <p:spPr>
           <a:xfrm>
-            <a:off x="7799832" y="4818888"/>
-            <a:ext cx="3145536" cy="688543"/>
+            <a:off x="7708392" y="4828032"/>
+            <a:ext cx="3282696" cy="749808"/>
           </a:xfrm>
           <a:prstGeom prst="rect">
             <a:avLst/>
@@ -3754,7 +3754,7 @@
               <a:buNone/>
             </a:pPr>
             <a:r>
-              <a:rPr lang="en-US" sz="1320" dirty="0">
+              <a:rPr lang="en-US" sz="1220" dirty="0">
                 <a:solidFill>
                   <a:srgbClr val="17364A"/>
                 </a:solidFill>
@@ -3762,9 +3762,9 @@
                 <a:ea typeface="Aptos" pitchFamily="34" charset="-122"/>
                 <a:cs typeface="Aptos" pitchFamily="34" charset="-120"/>
               </a:rPr>
-              <a:t>Identify what could go wrong, who could be affected, what safeguards are needed, and what evidence should be reviewed before use.</a:t>
-            </a:r>
-            <a:endParaRPr lang="en-US" sz="1320" dirty="0"/>
+              <a:t>Identify what could go wrong, who could be affected, what safeguards are needed,.</a:t>
+            </a:r>
+            <a:endParaRPr lang="en-US" sz="1220" dirty="0"/>
           </a:p>
         </p:txBody>
       </p:sp>
@@ -4055,8 +4055,8 @@
         </p:nvSpPr>
         <p:spPr>
           <a:xfrm>
-            <a:off x="868680" y="1508760"/>
-            <a:ext cx="6309360" cy="4160520"/>
+            <a:off x="822960" y="1463040"/>
+            <a:ext cx="6565392" cy="4343400"/>
           </a:xfrm>
           <a:prstGeom prst="rect">
             <a:avLst/>
@@ -4074,7 +4074,7 @@
               <a:buNone/>
             </a:pPr>
             <a:r>
-              <a:rPr lang="en-US" sz="2100" dirty="0">
+              <a:rPr lang="en-US" sz="1920" dirty="0">
                 <a:solidFill>
                   <a:srgbClr val="003A63"/>
                 </a:solidFill>
@@ -4084,14 +4084,14 @@
               </a:rPr>
               <a:t>• Vendors controlling implementation timelines without agency readiness gates.</a:t>
             </a:r>
-            <a:endParaRPr lang="en-US" sz="2100" dirty="0"/>
-          </a:p>
-          <a:p>
-            <a:pPr indent="0" marL="0">
-              <a:buNone/>
-            </a:pPr>
-            <a:r>
-              <a:rPr lang="en-US" sz="2100" dirty="0">
+            <a:endParaRPr lang="en-US" sz="1920" dirty="0"/>
+          </a:p>
+          <a:p>
+            <a:pPr indent="0" marL="0">
+              <a:buNone/>
+            </a:pPr>
+            <a:r>
+              <a:rPr lang="en-US" sz="1920" dirty="0">
                 <a:solidFill>
                   <a:srgbClr val="003A63"/>
                 </a:solidFill>
@@ -4101,14 +4101,14 @@
               </a:rPr>
               <a:t>• No transition plan from pilot to routine operations.</a:t>
             </a:r>
-            <a:endParaRPr lang="en-US" sz="2100" dirty="0"/>
-          </a:p>
-          <a:p>
-            <a:pPr indent="0" marL="0">
-              <a:buNone/>
-            </a:pPr>
-            <a:r>
-              <a:rPr lang="en-US" sz="2100" dirty="0">
+            <a:endParaRPr lang="en-US" sz="1920" dirty="0"/>
+          </a:p>
+          <a:p>
+            <a:pPr indent="0" marL="0">
+              <a:buNone/>
+            </a:pPr>
+            <a:r>
+              <a:rPr lang="en-US" sz="1920" dirty="0">
                 <a:solidFill>
                   <a:srgbClr val="003A63"/>
                 </a:solidFill>
@@ -4116,9 +4116,9 @@
                 <a:ea typeface="Aptos" pitchFamily="34" charset="-122"/>
                 <a:cs typeface="Aptos" pitchFamily="34" charset="-120"/>
               </a:rPr>
-              <a:t>• Success measured only by deployment rather than public health value and safe use.</a:t>
-            </a:r>
-            <a:endParaRPr lang="en-US" sz="2100" dirty="0"/>
+              <a:t>• Success measured only by deployment rather than public health value and safe.</a:t>
+            </a:r>
+            <a:endParaRPr lang="en-US" sz="1920" dirty="0"/>
           </a:p>
         </p:txBody>
       </p:sp>
@@ -4130,12 +4130,12 @@
         </p:nvSpPr>
         <p:spPr>
           <a:xfrm>
-            <a:off x="7635240" y="1325880"/>
-            <a:ext cx="3474720" cy="1207008"/>
+            <a:off x="7543800" y="1325880"/>
+            <a:ext cx="3611880" cy="1261872"/>
           </a:xfrm>
           <a:prstGeom prst="roundRect">
             <a:avLst>
-              <a:gd name="adj" fmla="val 9091"/>
+              <a:gd name="adj" fmla="val 8696"/>
             </a:avLst>
           </a:prstGeom>
           <a:solidFill>
@@ -4157,8 +4157,8 @@
         </p:nvSpPr>
         <p:spPr>
           <a:xfrm>
-            <a:off x="7799832" y="1472184"/>
-            <a:ext cx="3145536" cy="256032"/>
+            <a:off x="7708392" y="1453896"/>
+            <a:ext cx="3282696" cy="228600"/>
           </a:xfrm>
           <a:prstGeom prst="rect">
             <a:avLst/>
@@ -4174,7 +4174,7 @@
               <a:buNone/>
             </a:pPr>
             <a:r>
-              <a:rPr lang="en-US" sz="1300" b="1" dirty="0">
+              <a:rPr lang="en-US" sz="1220" b="1" dirty="0">
                 <a:solidFill>
                   <a:srgbClr val="0068B7"/>
                 </a:solidFill>
@@ -4184,7 +4184,7 @@
               </a:rPr>
               <a:t>Risk check</a:t>
             </a:r>
-            <a:endParaRPr lang="en-US" sz="1300" dirty="0"/>
+            <a:endParaRPr lang="en-US" sz="1220" dirty="0"/>
           </a:p>
         </p:txBody>
       </p:sp>
@@ -4196,8 +4196,8 @@
         </p:nvSpPr>
         <p:spPr>
           <a:xfrm>
-            <a:off x="7799832" y="1801368"/>
-            <a:ext cx="3145536" cy="640080"/>
+            <a:off x="7708392" y="1764792"/>
+            <a:ext cx="3282696" cy="749808"/>
           </a:xfrm>
           <a:prstGeom prst="rect">
             <a:avLst/>
@@ -4215,7 +4215,7 @@
               <a:buNone/>
             </a:pPr>
             <a:r>
-              <a:rPr lang="en-US" sz="1320" dirty="0">
+              <a:rPr lang="en-US" sz="1220" dirty="0">
                 <a:solidFill>
                   <a:srgbClr val="17364A"/>
                 </a:solidFill>
@@ -4225,7 +4225,7 @@
               </a:rPr>
               <a:t>Vendors controlling implementation timelines without agency readiness gates.</a:t>
             </a:r>
-            <a:endParaRPr lang="en-US" sz="1320" dirty="0"/>
+            <a:endParaRPr lang="en-US" sz="1220" dirty="0"/>
           </a:p>
         </p:txBody>
       </p:sp>
@@ -4237,12 +4237,12 @@
         </p:nvSpPr>
         <p:spPr>
           <a:xfrm>
-            <a:off x="7635240" y="2670048"/>
-            <a:ext cx="3474720" cy="1536192"/>
+            <a:off x="7543800" y="2724912"/>
+            <a:ext cx="3611880" cy="1527048"/>
           </a:xfrm>
           <a:prstGeom prst="roundRect">
             <a:avLst>
-              <a:gd name="adj" fmla="val 7143"/>
+              <a:gd name="adj" fmla="val 7186"/>
             </a:avLst>
           </a:prstGeom>
           <a:solidFill>
@@ -4264,8 +4264,8 @@
         </p:nvSpPr>
         <p:spPr>
           <a:xfrm>
-            <a:off x="7799832" y="2816352"/>
-            <a:ext cx="3145536" cy="256032"/>
+            <a:off x="7708392" y="2852928"/>
+            <a:ext cx="3282696" cy="228600"/>
           </a:xfrm>
           <a:prstGeom prst="rect">
             <a:avLst/>
@@ -4281,7 +4281,7 @@
               <a:buNone/>
             </a:pPr>
             <a:r>
-              <a:rPr lang="en-US" sz="1300" b="1" dirty="0">
+              <a:rPr lang="en-US" sz="1220" b="1" dirty="0">
                 <a:solidFill>
                   <a:srgbClr val="0068B7"/>
                 </a:solidFill>
@@ -4291,7 +4291,7 @@
               </a:rPr>
               <a:t>Concept checkpoints</a:t>
             </a:r>
-            <a:endParaRPr lang="en-US" sz="1300" dirty="0"/>
+            <a:endParaRPr lang="en-US" sz="1220" dirty="0"/>
           </a:p>
         </p:txBody>
       </p:sp>
@@ -4303,8 +4303,8 @@
         </p:nvSpPr>
         <p:spPr>
           <a:xfrm>
-            <a:off x="7818120" y="3182112"/>
-            <a:ext cx="3090672" cy="877824"/>
+            <a:off x="7726680" y="3182112"/>
+            <a:ext cx="3227832" cy="960120"/>
           </a:xfrm>
           <a:prstGeom prst="rect">
             <a:avLst/>
@@ -4322,7 +4322,7 @@
               <a:buNone/>
             </a:pPr>
             <a:r>
-              <a:rPr lang="en-US" sz="1220" dirty="0">
+              <a:rPr lang="en-US" sz="1140" dirty="0">
                 <a:solidFill>
                   <a:srgbClr val="17364A"/>
                 </a:solidFill>
@@ -4330,16 +4330,16 @@
                 <a:ea typeface="Aptos" pitchFamily="34" charset="-122"/>
                 <a:cs typeface="Aptos" pitchFamily="34" charset="-120"/>
               </a:rPr>
-              <a:t>Vendors controlling implementation timelines without agency.</a:t>
-            </a:r>
-            <a:endParaRPr lang="en-US" sz="1220" dirty="0"/>
-          </a:p>
-          <a:p>
-            <a:pPr indent="0" marL="0">
-              <a:buNone/>
-            </a:pPr>
-            <a:r>
-              <a:rPr lang="en-US" sz="1220" dirty="0">
+              <a:t>Vendors controlling implementation timelines.</a:t>
+            </a:r>
+            <a:endParaRPr lang="en-US" sz="1140" dirty="0"/>
+          </a:p>
+          <a:p>
+            <a:pPr indent="0" marL="0">
+              <a:buNone/>
+            </a:pPr>
+            <a:r>
+              <a:rPr lang="en-US" sz="1140" dirty="0">
                 <a:solidFill>
                   <a:srgbClr val="17364A"/>
                 </a:solidFill>
@@ -4349,14 +4349,14 @@
               </a:rPr>
               <a:t>No transition plan from pilot to routine operations.</a:t>
             </a:r>
-            <a:endParaRPr lang="en-US" sz="1220" dirty="0"/>
-          </a:p>
-          <a:p>
-            <a:pPr indent="0" marL="0">
-              <a:buNone/>
-            </a:pPr>
-            <a:r>
-              <a:rPr lang="en-US" sz="1220" dirty="0">
+            <a:endParaRPr lang="en-US" sz="1140" dirty="0"/>
+          </a:p>
+          <a:p>
+            <a:pPr indent="0" marL="0">
+              <a:buNone/>
+            </a:pPr>
+            <a:r>
+              <a:rPr lang="en-US" sz="1140" dirty="0">
                 <a:solidFill>
                   <a:srgbClr val="17364A"/>
                 </a:solidFill>
@@ -4364,9 +4364,9 @@
                 <a:ea typeface="Aptos" pitchFamily="34" charset="-122"/>
                 <a:cs typeface="Aptos" pitchFamily="34" charset="-120"/>
               </a:rPr>
-              <a:t>Success measured only by deployment rather than public health.</a:t>
-            </a:r>
-            <a:endParaRPr lang="en-US" sz="1220" dirty="0"/>
+              <a:t>Success measured only by deployment rather than.</a:t>
+            </a:r>
+            <a:endParaRPr lang="en-US" sz="1140" dirty="0"/>
           </a:p>
         </p:txBody>
       </p:sp>
@@ -4378,12 +4378,12 @@
         </p:nvSpPr>
         <p:spPr>
           <a:xfrm>
-            <a:off x="7635240" y="4343400"/>
-            <a:ext cx="3474720" cy="1255471"/>
+            <a:off x="7543800" y="4389120"/>
+            <a:ext cx="3611880" cy="1261872"/>
           </a:xfrm>
           <a:prstGeom prst="roundRect">
             <a:avLst>
-              <a:gd name="adj" fmla="val 8740"/>
+              <a:gd name="adj" fmla="val 8696"/>
             </a:avLst>
           </a:prstGeom>
           <a:solidFill>
@@ -4405,8 +4405,8 @@
         </p:nvSpPr>
         <p:spPr>
           <a:xfrm>
-            <a:off x="7799832" y="4489704"/>
-            <a:ext cx="3145536" cy="256032"/>
+            <a:off x="7708392" y="4517136"/>
+            <a:ext cx="3282696" cy="228600"/>
           </a:xfrm>
           <a:prstGeom prst="rect">
             <a:avLst/>
@@ -4422,7 +4422,7 @@
               <a:buNone/>
             </a:pPr>
             <a:r>
-              <a:rPr lang="en-US" sz="1300" b="1" dirty="0">
+              <a:rPr lang="en-US" sz="1220" b="1" dirty="0">
                 <a:solidFill>
                   <a:srgbClr val="0068B7"/>
                 </a:solidFill>
@@ -4432,7 +4432,7 @@
               </a:rPr>
               <a:t>Safeguard to plan</a:t>
             </a:r>
-            <a:endParaRPr lang="en-US" sz="1300" dirty="0"/>
+            <a:endParaRPr lang="en-US" sz="1220" dirty="0"/>
           </a:p>
         </p:txBody>
       </p:sp>
@@ -4444,8 +4444,8 @@
         </p:nvSpPr>
         <p:spPr>
           <a:xfrm>
-            <a:off x="7799832" y="4818888"/>
-            <a:ext cx="3145536" cy="688543"/>
+            <a:off x="7708392" y="4828032"/>
+            <a:ext cx="3282696" cy="749808"/>
           </a:xfrm>
           <a:prstGeom prst="rect">
             <a:avLst/>
@@ -4463,7 +4463,7 @@
               <a:buNone/>
             </a:pPr>
             <a:r>
-              <a:rPr lang="en-US" sz="1320" dirty="0">
+              <a:rPr lang="en-US" sz="1220" dirty="0">
                 <a:solidFill>
                   <a:srgbClr val="17364A"/>
                 </a:solidFill>
@@ -4471,9 +4471,9 @@
                 <a:ea typeface="Aptos" pitchFamily="34" charset="-122"/>
                 <a:cs typeface="Aptos" pitchFamily="34" charset="-120"/>
               </a:rPr>
-              <a:t>Identify what could go wrong, who could be affected, what safeguards are needed, and what evidence should be reviewed before use.</a:t>
-            </a:r>
-            <a:endParaRPr lang="en-US" sz="1320" dirty="0"/>
+              <a:t>Identify what could go wrong, who could be affected, what safeguards are needed,.</a:t>
+            </a:r>
+            <a:endParaRPr lang="en-US" sz="1220" dirty="0"/>
           </a:p>
         </p:txBody>
       </p:sp>
@@ -4764,8 +4764,8 @@
         </p:nvSpPr>
         <p:spPr>
           <a:xfrm>
-            <a:off x="868680" y="1508760"/>
-            <a:ext cx="6309360" cy="4160520"/>
+            <a:off x="822960" y="1463040"/>
+            <a:ext cx="6565392" cy="4343400"/>
           </a:xfrm>
           <a:prstGeom prst="rect">
             <a:avLst/>
@@ -4783,7 +4783,7 @@
               <a:buNone/>
             </a:pPr>
             <a:r>
-              <a:rPr lang="en-US" sz="2100" dirty="0">
+              <a:rPr lang="en-US" sz="1920" dirty="0">
                 <a:solidFill>
                   <a:srgbClr val="003A63"/>
                 </a:solidFill>
@@ -4793,14 +4793,14 @@
               </a:rPr>
               <a:t>• Recommended guardrails include the following:</a:t>
             </a:r>
-            <a:endParaRPr lang="en-US" sz="2100" dirty="0"/>
-          </a:p>
-          <a:p>
-            <a:pPr indent="0" marL="0">
-              <a:buNone/>
-            </a:pPr>
-            <a:r>
-              <a:rPr lang="en-US" sz="2100" dirty="0">
+            <a:endParaRPr lang="en-US" sz="1920" dirty="0"/>
+          </a:p>
+          <a:p>
+            <a:pPr indent="0" marL="0">
+              <a:buNone/>
+            </a:pPr>
+            <a:r>
+              <a:rPr lang="en-US" sz="1920" dirty="0">
                 <a:solidFill>
                   <a:srgbClr val="003A63"/>
                 </a:solidFill>
@@ -4810,14 +4810,14 @@
               </a:rPr>
               <a:t>• Use an AI-specific project charter and risk log.</a:t>
             </a:r>
-            <a:endParaRPr lang="en-US" sz="2100" dirty="0"/>
-          </a:p>
-          <a:p>
-            <a:pPr indent="0" marL="0">
-              <a:buNone/>
-            </a:pPr>
-            <a:r>
-              <a:rPr lang="en-US" sz="2100" dirty="0">
+            <a:endParaRPr lang="en-US" sz="1920" dirty="0"/>
+          </a:p>
+          <a:p>
+            <a:pPr indent="0" marL="0">
+              <a:buNone/>
+            </a:pPr>
+            <a:r>
+              <a:rPr lang="en-US" sz="1920" dirty="0">
                 <a:solidFill>
                   <a:srgbClr val="003A63"/>
                 </a:solidFill>
@@ -4827,7 +4827,7 @@
               </a:rPr>
               <a:t>• Define governance gates before implementation begins.</a:t>
             </a:r>
-            <a:endParaRPr lang="en-US" sz="2100" dirty="0"/>
+            <a:endParaRPr lang="en-US" sz="1920" dirty="0"/>
           </a:p>
         </p:txBody>
       </p:sp>
@@ -4839,12 +4839,12 @@
         </p:nvSpPr>
         <p:spPr>
           <a:xfrm>
-            <a:off x="7635240" y="1325880"/>
-            <a:ext cx="3474720" cy="1207008"/>
+            <a:off x="7543800" y="1325880"/>
+            <a:ext cx="3611880" cy="1261872"/>
           </a:xfrm>
           <a:prstGeom prst="roundRect">
             <a:avLst>
-              <a:gd name="adj" fmla="val 9091"/>
+              <a:gd name="adj" fmla="val 8696"/>
             </a:avLst>
           </a:prstGeom>
           <a:solidFill>
@@ -4866,8 +4866,8 @@
         </p:nvSpPr>
         <p:spPr>
           <a:xfrm>
-            <a:off x="7799832" y="1472184"/>
-            <a:ext cx="3145536" cy="256032"/>
+            <a:off x="7708392" y="1453896"/>
+            <a:ext cx="3282696" cy="228600"/>
           </a:xfrm>
           <a:prstGeom prst="rect">
             <a:avLst/>
@@ -4883,7 +4883,7 @@
               <a:buNone/>
             </a:pPr>
             <a:r>
-              <a:rPr lang="en-US" sz="1300" b="1" dirty="0">
+              <a:rPr lang="en-US" sz="1220" b="1" dirty="0">
                 <a:solidFill>
                   <a:srgbClr val="0068B7"/>
                 </a:solidFill>
@@ -4893,7 +4893,7 @@
               </a:rPr>
               <a:t>Risk check</a:t>
             </a:r>
-            <a:endParaRPr lang="en-US" sz="1300" dirty="0"/>
+            <a:endParaRPr lang="en-US" sz="1220" dirty="0"/>
           </a:p>
         </p:txBody>
       </p:sp>
@@ -4905,8 +4905,8 @@
         </p:nvSpPr>
         <p:spPr>
           <a:xfrm>
-            <a:off x="7799832" y="1801368"/>
-            <a:ext cx="3145536" cy="640080"/>
+            <a:off x="7708392" y="1764792"/>
+            <a:ext cx="3282696" cy="749808"/>
           </a:xfrm>
           <a:prstGeom prst="rect">
             <a:avLst/>
@@ -4924,7 +4924,7 @@
               <a:buNone/>
             </a:pPr>
             <a:r>
-              <a:rPr lang="en-US" sz="1320" dirty="0">
+              <a:rPr lang="en-US" sz="1220" dirty="0">
                 <a:solidFill>
                   <a:srgbClr val="17364A"/>
                 </a:solidFill>
@@ -4934,7 +4934,7 @@
               </a:rPr>
               <a:t>Recommended guardrails include the following:</a:t>
             </a:r>
-            <a:endParaRPr lang="en-US" sz="1320" dirty="0"/>
+            <a:endParaRPr lang="en-US" sz="1220" dirty="0"/>
           </a:p>
         </p:txBody>
       </p:sp>
@@ -4946,12 +4946,12 @@
         </p:nvSpPr>
         <p:spPr>
           <a:xfrm>
-            <a:off x="7635240" y="2670048"/>
-            <a:ext cx="3474720" cy="1536192"/>
+            <a:off x="7543800" y="2724912"/>
+            <a:ext cx="3611880" cy="1527048"/>
           </a:xfrm>
           <a:prstGeom prst="roundRect">
             <a:avLst>
-              <a:gd name="adj" fmla="val 7143"/>
+              <a:gd name="adj" fmla="val 7186"/>
             </a:avLst>
           </a:prstGeom>
           <a:solidFill>
@@ -4973,8 +4973,8 @@
         </p:nvSpPr>
         <p:spPr>
           <a:xfrm>
-            <a:off x="7799832" y="2816352"/>
-            <a:ext cx="3145536" cy="256032"/>
+            <a:off x="7708392" y="2852928"/>
+            <a:ext cx="3282696" cy="228600"/>
           </a:xfrm>
           <a:prstGeom prst="rect">
             <a:avLst/>
@@ -4990,7 +4990,7 @@
               <a:buNone/>
             </a:pPr>
             <a:r>
-              <a:rPr lang="en-US" sz="1300" b="1" dirty="0">
+              <a:rPr lang="en-US" sz="1220" b="1" dirty="0">
                 <a:solidFill>
                   <a:srgbClr val="0068B7"/>
                 </a:solidFill>
@@ -5000,7 +5000,7 @@
               </a:rPr>
               <a:t>Concept checkpoints</a:t>
             </a:r>
-            <a:endParaRPr lang="en-US" sz="1300" dirty="0"/>
+            <a:endParaRPr lang="en-US" sz="1220" dirty="0"/>
           </a:p>
         </p:txBody>
       </p:sp>
@@ -5012,8 +5012,8 @@
         </p:nvSpPr>
         <p:spPr>
           <a:xfrm>
-            <a:off x="7818120" y="3182112"/>
-            <a:ext cx="3090672" cy="877824"/>
+            <a:off x="7726680" y="3182112"/>
+            <a:ext cx="3227832" cy="960120"/>
           </a:xfrm>
           <a:prstGeom prst="rect">
             <a:avLst/>
@@ -5031,7 +5031,7 @@
               <a:buNone/>
             </a:pPr>
             <a:r>
-              <a:rPr lang="en-US" sz="1220" dirty="0">
+              <a:rPr lang="en-US" sz="1140" dirty="0">
                 <a:solidFill>
                   <a:srgbClr val="17364A"/>
                 </a:solidFill>
@@ -5041,14 +5041,14 @@
               </a:rPr>
               <a:t>Recommended guardrails include the following:</a:t>
             </a:r>
-            <a:endParaRPr lang="en-US" sz="1220" dirty="0"/>
-          </a:p>
-          <a:p>
-            <a:pPr indent="0" marL="0">
-              <a:buNone/>
-            </a:pPr>
-            <a:r>
-              <a:rPr lang="en-US" sz="1220" dirty="0">
+            <a:endParaRPr lang="en-US" sz="1140" dirty="0"/>
+          </a:p>
+          <a:p>
+            <a:pPr indent="0" marL="0">
+              <a:buNone/>
+            </a:pPr>
+            <a:r>
+              <a:rPr lang="en-US" sz="1140" dirty="0">
                 <a:solidFill>
                   <a:srgbClr val="17364A"/>
                 </a:solidFill>
@@ -5058,14 +5058,14 @@
               </a:rPr>
               <a:t>Use an AI-specific project charter and risk log.</a:t>
             </a:r>
-            <a:endParaRPr lang="en-US" sz="1220" dirty="0"/>
-          </a:p>
-          <a:p>
-            <a:pPr indent="0" marL="0">
-              <a:buNone/>
-            </a:pPr>
-            <a:r>
-              <a:rPr lang="en-US" sz="1220" dirty="0">
+            <a:endParaRPr lang="en-US" sz="1140" dirty="0"/>
+          </a:p>
+          <a:p>
+            <a:pPr indent="0" marL="0">
+              <a:buNone/>
+            </a:pPr>
+            <a:r>
+              <a:rPr lang="en-US" sz="1140" dirty="0">
                 <a:solidFill>
                   <a:srgbClr val="17364A"/>
                 </a:solidFill>
@@ -5073,9 +5073,9 @@
                 <a:ea typeface="Aptos" pitchFamily="34" charset="-122"/>
                 <a:cs typeface="Aptos" pitchFamily="34" charset="-120"/>
               </a:rPr>
-              <a:t>Define governance gates before implementation begins.</a:t>
-            </a:r>
-            <a:endParaRPr lang="en-US" sz="1220" dirty="0"/>
+              <a:t>Define governance gates before implementation.</a:t>
+            </a:r>
+            <a:endParaRPr lang="en-US" sz="1140" dirty="0"/>
           </a:p>
         </p:txBody>
       </p:sp>
@@ -5087,12 +5087,12 @@
         </p:nvSpPr>
         <p:spPr>
           <a:xfrm>
-            <a:off x="7635240" y="4343400"/>
-            <a:ext cx="3474720" cy="1255471"/>
+            <a:off x="7543800" y="4389120"/>
+            <a:ext cx="3611880" cy="1261872"/>
           </a:xfrm>
           <a:prstGeom prst="roundRect">
             <a:avLst>
-              <a:gd name="adj" fmla="val 8740"/>
+              <a:gd name="adj" fmla="val 8696"/>
             </a:avLst>
           </a:prstGeom>
           <a:solidFill>
@@ -5114,8 +5114,8 @@
         </p:nvSpPr>
         <p:spPr>
           <a:xfrm>
-            <a:off x="7799832" y="4489704"/>
-            <a:ext cx="3145536" cy="256032"/>
+            <a:off x="7708392" y="4517136"/>
+            <a:ext cx="3282696" cy="228600"/>
           </a:xfrm>
           <a:prstGeom prst="rect">
             <a:avLst/>
@@ -5131,7 +5131,7 @@
               <a:buNone/>
             </a:pPr>
             <a:r>
-              <a:rPr lang="en-US" sz="1300" b="1" dirty="0">
+              <a:rPr lang="en-US" sz="1220" b="1" dirty="0">
                 <a:solidFill>
                   <a:srgbClr val="0068B7"/>
                 </a:solidFill>
@@ -5141,7 +5141,7 @@
               </a:rPr>
               <a:t>Safeguard to plan</a:t>
             </a:r>
-            <a:endParaRPr lang="en-US" sz="1300" dirty="0"/>
+            <a:endParaRPr lang="en-US" sz="1220" dirty="0"/>
           </a:p>
         </p:txBody>
       </p:sp>
@@ -5153,8 +5153,8 @@
         </p:nvSpPr>
         <p:spPr>
           <a:xfrm>
-            <a:off x="7799832" y="4818888"/>
-            <a:ext cx="3145536" cy="688543"/>
+            <a:off x="7708392" y="4828032"/>
+            <a:ext cx="3282696" cy="749808"/>
           </a:xfrm>
           <a:prstGeom prst="rect">
             <a:avLst/>
@@ -5172,7 +5172,7 @@
               <a:buNone/>
             </a:pPr>
             <a:r>
-              <a:rPr lang="en-US" sz="1320" dirty="0">
+              <a:rPr lang="en-US" sz="1220" dirty="0">
                 <a:solidFill>
                   <a:srgbClr val="17364A"/>
                 </a:solidFill>
@@ -5180,9 +5180,9 @@
                 <a:ea typeface="Aptos" pitchFamily="34" charset="-122"/>
                 <a:cs typeface="Aptos" pitchFamily="34" charset="-120"/>
               </a:rPr>
-              <a:t>Identify what could go wrong, who could be affected, what safeguards are needed, and what evidence should be reviewed before use.</a:t>
-            </a:r>
-            <a:endParaRPr lang="en-US" sz="1320" dirty="0"/>
+              <a:t>Identify what could go wrong, who could be affected, what safeguards are needed,.</a:t>
+            </a:r>
+            <a:endParaRPr lang="en-US" sz="1220" dirty="0"/>
           </a:p>
         </p:txBody>
       </p:sp>
@@ -5473,8 +5473,8 @@
         </p:nvSpPr>
         <p:spPr>
           <a:xfrm>
-            <a:off x="868680" y="1508760"/>
-            <a:ext cx="6309360" cy="4160520"/>
+            <a:off x="822960" y="1463040"/>
+            <a:ext cx="6565392" cy="4343400"/>
           </a:xfrm>
           <a:prstGeom prst="rect">
             <a:avLst/>
@@ -5492,7 +5492,7 @@
               <a:buNone/>
             </a:pPr>
             <a:r>
-              <a:rPr lang="en-US" sz="2100" dirty="0">
+              <a:rPr lang="en-US" sz="1920" dirty="0">
                 <a:solidFill>
                   <a:srgbClr val="003A63"/>
                 </a:solidFill>
@@ -5500,16 +5500,16 @@
                 <a:ea typeface="Aptos" pitchFamily="34" charset="-122"/>
                 <a:cs typeface="Aptos" pitchFamily="34" charset="-120"/>
               </a:rPr>
-              <a:t>• Create separate workstreams for data, technology, governance, workflow, training, validation,.</a:t>
-            </a:r>
-            <a:endParaRPr lang="en-US" sz="2100" dirty="0"/>
-          </a:p>
-          <a:p>
-            <a:pPr indent="0" marL="0">
-              <a:buNone/>
-            </a:pPr>
-            <a:r>
-              <a:rPr lang="en-US" sz="2100" dirty="0">
+              <a:t>• Create separate workstreams for data, technology, governance, workflow,.</a:t>
+            </a:r>
+            <a:endParaRPr lang="en-US" sz="1920" dirty="0"/>
+          </a:p>
+          <a:p>
+            <a:pPr indent="0" marL="0">
+              <a:buNone/>
+            </a:pPr>
+            <a:r>
+              <a:rPr lang="en-US" sz="1920" dirty="0">
                 <a:solidFill>
                   <a:srgbClr val="003A63"/>
                 </a:solidFill>
@@ -5519,14 +5519,14 @@
               </a:rPr>
               <a:t>• Require launch readiness review before deployment.</a:t>
             </a:r>
-            <a:endParaRPr lang="en-US" sz="2100" dirty="0"/>
-          </a:p>
-          <a:p>
-            <a:pPr indent="0" marL="0">
-              <a:buNone/>
-            </a:pPr>
-            <a:r>
-              <a:rPr lang="en-US" sz="2100" dirty="0">
+            <a:endParaRPr lang="en-US" sz="1920" dirty="0"/>
+          </a:p>
+          <a:p>
+            <a:pPr indent="0" marL="0">
+              <a:buNone/>
+            </a:pPr>
+            <a:r>
+              <a:rPr lang="en-US" sz="1920" dirty="0">
                 <a:solidFill>
                   <a:srgbClr val="003A63"/>
                 </a:solidFill>
@@ -5536,7 +5536,7 @@
               </a:rPr>
               <a:t>• Document transition to operations and sustainability responsibilities.</a:t>
             </a:r>
-            <a:endParaRPr lang="en-US" sz="2100" dirty="0"/>
+            <a:endParaRPr lang="en-US" sz="1920" dirty="0"/>
           </a:p>
         </p:txBody>
       </p:sp>
@@ -5548,12 +5548,12 @@
         </p:nvSpPr>
         <p:spPr>
           <a:xfrm>
-            <a:off x="7635240" y="1325880"/>
-            <a:ext cx="3474720" cy="1255471"/>
+            <a:off x="7543800" y="1325880"/>
+            <a:ext cx="3611880" cy="1261872"/>
           </a:xfrm>
           <a:prstGeom prst="roundRect">
             <a:avLst>
-              <a:gd name="adj" fmla="val 8740"/>
+              <a:gd name="adj" fmla="val 8696"/>
             </a:avLst>
           </a:prstGeom>
           <a:solidFill>
@@ -5575,8 +5575,8 @@
         </p:nvSpPr>
         <p:spPr>
           <a:xfrm>
-            <a:off x="7799832" y="1472184"/>
-            <a:ext cx="3145536" cy="256032"/>
+            <a:off x="7708392" y="1453896"/>
+            <a:ext cx="3282696" cy="228600"/>
           </a:xfrm>
           <a:prstGeom prst="rect">
             <a:avLst/>
@@ -5592,7 +5592,7 @@
               <a:buNone/>
             </a:pPr>
             <a:r>
-              <a:rPr lang="en-US" sz="1300" b="1" dirty="0">
+              <a:rPr lang="en-US" sz="1220" b="1" dirty="0">
                 <a:solidFill>
                   <a:srgbClr val="0068B7"/>
                 </a:solidFill>
@@ -5602,7 +5602,7 @@
               </a:rPr>
               <a:t>Risk check</a:t>
             </a:r>
-            <a:endParaRPr lang="en-US" sz="1300" dirty="0"/>
+            <a:endParaRPr lang="en-US" sz="1220" dirty="0"/>
           </a:p>
         </p:txBody>
       </p:sp>
@@ -5614,8 +5614,8 @@
         </p:nvSpPr>
         <p:spPr>
           <a:xfrm>
-            <a:off x="7799832" y="1801368"/>
-            <a:ext cx="3145536" cy="688543"/>
+            <a:off x="7708392" y="1764792"/>
+            <a:ext cx="3282696" cy="749808"/>
           </a:xfrm>
           <a:prstGeom prst="rect">
             <a:avLst/>
@@ -5633,7 +5633,7 @@
               <a:buNone/>
             </a:pPr>
             <a:r>
-              <a:rPr lang="en-US" sz="1320" dirty="0">
+              <a:rPr lang="en-US" sz="1220" dirty="0">
                 <a:solidFill>
                   <a:srgbClr val="17364A"/>
                 </a:solidFill>
@@ -5641,9 +5641,9 @@
                 <a:ea typeface="Aptos" pitchFamily="34" charset="-122"/>
                 <a:cs typeface="Aptos" pitchFamily="34" charset="-120"/>
               </a:rPr>
-              <a:t>Create separate workstreams for data, technology, governance, workflow, training, validation, and.</a:t>
-            </a:r>
-            <a:endParaRPr lang="en-US" sz="1320" dirty="0"/>
+              <a:t>Create separate workstreams for data, technology, governance, workflow,.</a:t>
+            </a:r>
+            <a:endParaRPr lang="en-US" sz="1220" dirty="0"/>
           </a:p>
         </p:txBody>
       </p:sp>
@@ -5655,12 +5655,12 @@
         </p:nvSpPr>
         <p:spPr>
           <a:xfrm>
-            <a:off x="7635240" y="2718511"/>
-            <a:ext cx="3474720" cy="1536192"/>
+            <a:off x="7543800" y="2724912"/>
+            <a:ext cx="3611880" cy="1527048"/>
           </a:xfrm>
           <a:prstGeom prst="roundRect">
             <a:avLst>
-              <a:gd name="adj" fmla="val 7143"/>
+              <a:gd name="adj" fmla="val 7186"/>
             </a:avLst>
           </a:prstGeom>
           <a:solidFill>
@@ -5682,8 +5682,8 @@
         </p:nvSpPr>
         <p:spPr>
           <a:xfrm>
-            <a:off x="7799832" y="2864815"/>
-            <a:ext cx="3145536" cy="256032"/>
+            <a:off x="7708392" y="2852928"/>
+            <a:ext cx="3282696" cy="228600"/>
           </a:xfrm>
           <a:prstGeom prst="rect">
             <a:avLst/>
@@ -5699,7 +5699,7 @@
               <a:buNone/>
             </a:pPr>
             <a:r>
-              <a:rPr lang="en-US" sz="1300" b="1" dirty="0">
+              <a:rPr lang="en-US" sz="1220" b="1" dirty="0">
                 <a:solidFill>
                   <a:srgbClr val="0068B7"/>
                 </a:solidFill>
@@ -5709,7 +5709,7 @@
               </a:rPr>
               <a:t>Concept checkpoints</a:t>
             </a:r>
-            <a:endParaRPr lang="en-US" sz="1300" dirty="0"/>
+            <a:endParaRPr lang="en-US" sz="1220" dirty="0"/>
           </a:p>
         </p:txBody>
       </p:sp>
@@ -5721,8 +5721,8 @@
         </p:nvSpPr>
         <p:spPr>
           <a:xfrm>
-            <a:off x="7818120" y="3230575"/>
-            <a:ext cx="3090672" cy="877824"/>
+            <a:off x="7726680" y="3182112"/>
+            <a:ext cx="3227832" cy="960120"/>
           </a:xfrm>
           <a:prstGeom prst="rect">
             <a:avLst/>
@@ -5740,7 +5740,7 @@
               <a:buNone/>
             </a:pPr>
             <a:r>
-              <a:rPr lang="en-US" sz="1220" dirty="0">
+              <a:rPr lang="en-US" sz="1140" dirty="0">
                 <a:solidFill>
                   <a:srgbClr val="17364A"/>
                 </a:solidFill>
@@ -5748,16 +5748,16 @@
                 <a:ea typeface="Aptos" pitchFamily="34" charset="-122"/>
                 <a:cs typeface="Aptos" pitchFamily="34" charset="-120"/>
               </a:rPr>
-              <a:t>Create separate workstreams for data, technology, governance,.</a:t>
-            </a:r>
-            <a:endParaRPr lang="en-US" sz="1220" dirty="0"/>
-          </a:p>
-          <a:p>
-            <a:pPr indent="0" marL="0">
-              <a:buNone/>
-            </a:pPr>
-            <a:r>
-              <a:rPr lang="en-US" sz="1220" dirty="0">
+              <a:t>Create separate workstreams for data, technology,.</a:t>
+            </a:r>
+            <a:endParaRPr lang="en-US" sz="1140" dirty="0"/>
+          </a:p>
+          <a:p>
+            <a:pPr indent="0" marL="0">
+              <a:buNone/>
+            </a:pPr>
+            <a:r>
+              <a:rPr lang="en-US" sz="1140" dirty="0">
                 <a:solidFill>
                   <a:srgbClr val="17364A"/>
                 </a:solidFill>
@@ -5767,14 +5767,14 @@
               </a:rPr>
               <a:t>Require launch readiness review before deployment.</a:t>
             </a:r>
-            <a:endParaRPr lang="en-US" sz="1220" dirty="0"/>
-          </a:p>
-          <a:p>
-            <a:pPr indent="0" marL="0">
-              <a:buNone/>
-            </a:pPr>
-            <a:r>
-              <a:rPr lang="en-US" sz="1220" dirty="0">
+            <a:endParaRPr lang="en-US" sz="1140" dirty="0"/>
+          </a:p>
+          <a:p>
+            <a:pPr indent="0" marL="0">
+              <a:buNone/>
+            </a:pPr>
+            <a:r>
+              <a:rPr lang="en-US" sz="1140" dirty="0">
                 <a:solidFill>
                   <a:srgbClr val="17364A"/>
                 </a:solidFill>
@@ -5782,9 +5782,9 @@
                 <a:ea typeface="Aptos" pitchFamily="34" charset="-122"/>
                 <a:cs typeface="Aptos" pitchFamily="34" charset="-120"/>
               </a:rPr>
-              <a:t>Document transition to operations and sustainability.</a:t>
-            </a:r>
-            <a:endParaRPr lang="en-US" sz="1220" dirty="0"/>
+              <a:t>Document transition to operations and.</a:t>
+            </a:r>
+            <a:endParaRPr lang="en-US" sz="1140" dirty="0"/>
           </a:p>
         </p:txBody>
       </p:sp>
@@ -5796,12 +5796,12 @@
         </p:nvSpPr>
         <p:spPr>
           <a:xfrm>
-            <a:off x="7635240" y="4391863"/>
-            <a:ext cx="3474720" cy="1255471"/>
+            <a:off x="7543800" y="4389120"/>
+            <a:ext cx="3611880" cy="1261872"/>
           </a:xfrm>
           <a:prstGeom prst="roundRect">
             <a:avLst>
-              <a:gd name="adj" fmla="val 8740"/>
+              <a:gd name="adj" fmla="val 8696"/>
             </a:avLst>
           </a:prstGeom>
           <a:solidFill>
@@ -5823,8 +5823,8 @@
         </p:nvSpPr>
         <p:spPr>
           <a:xfrm>
-            <a:off x="7799832" y="4538167"/>
-            <a:ext cx="3145536" cy="256032"/>
+            <a:off x="7708392" y="4517136"/>
+            <a:ext cx="3282696" cy="228600"/>
           </a:xfrm>
           <a:prstGeom prst="rect">
             <a:avLst/>
@@ -5840,7 +5840,7 @@
               <a:buNone/>
             </a:pPr>
             <a:r>
-              <a:rPr lang="en-US" sz="1300" b="1" dirty="0">
+              <a:rPr lang="en-US" sz="1220" b="1" dirty="0">
                 <a:solidFill>
                   <a:srgbClr val="0068B7"/>
                 </a:solidFill>
@@ -5850,7 +5850,7 @@
               </a:rPr>
               <a:t>Safeguard to plan</a:t>
             </a:r>
-            <a:endParaRPr lang="en-US" sz="1300" dirty="0"/>
+            <a:endParaRPr lang="en-US" sz="1220" dirty="0"/>
           </a:p>
         </p:txBody>
       </p:sp>
@@ -5862,8 +5862,8 @@
         </p:nvSpPr>
         <p:spPr>
           <a:xfrm>
-            <a:off x="7799832" y="4867351"/>
-            <a:ext cx="3145536" cy="688543"/>
+            <a:off x="7708392" y="4828032"/>
+            <a:ext cx="3282696" cy="749808"/>
           </a:xfrm>
           <a:prstGeom prst="rect">
             <a:avLst/>
@@ -5881,7 +5881,7 @@
               <a:buNone/>
             </a:pPr>
             <a:r>
-              <a:rPr lang="en-US" sz="1320" dirty="0">
+              <a:rPr lang="en-US" sz="1220" dirty="0">
                 <a:solidFill>
                   <a:srgbClr val="17364A"/>
                 </a:solidFill>
@@ -5889,9 +5889,9 @@
                 <a:ea typeface="Aptos" pitchFamily="34" charset="-122"/>
                 <a:cs typeface="Aptos" pitchFamily="34" charset="-120"/>
               </a:rPr>
-              <a:t>Identify what could go wrong, who could be affected, what safeguards are needed, and what evidence should be reviewed before use.</a:t>
-            </a:r>
-            <a:endParaRPr lang="en-US" sz="1320" dirty="0"/>
+              <a:t>Identify what could go wrong, who could be affected, what safeguards are needed,.</a:t>
+            </a:r>
+            <a:endParaRPr lang="en-US" sz="1220" dirty="0"/>
           </a:p>
         </p:txBody>
       </p:sp>
@@ -6182,8 +6182,8 @@
         </p:nvSpPr>
         <p:spPr>
           <a:xfrm>
-            <a:off x="868680" y="1508760"/>
-            <a:ext cx="6309360" cy="4160520"/>
+            <a:off x="822960" y="1463040"/>
+            <a:ext cx="6565392" cy="4343400"/>
           </a:xfrm>
           <a:prstGeom prst="rect">
             <a:avLst/>
@@ -6201,7 +6201,7 @@
               <a:buNone/>
             </a:pPr>
             <a:r>
-              <a:rPr lang="en-US" sz="2100" dirty="0">
+              <a:rPr lang="en-US" sz="1920" dirty="0">
                 <a:solidFill>
                   <a:srgbClr val="003A63"/>
                 </a:solidFill>
@@ -6211,14 +6211,14 @@
               </a:rPr>
               <a:t>• Where does this topic appear in your agency, program, or workflow?</a:t>
             </a:r>
-            <a:endParaRPr lang="en-US" sz="2100" dirty="0"/>
-          </a:p>
-          <a:p>
-            <a:pPr indent="0" marL="0">
-              <a:buNone/>
-            </a:pPr>
-            <a:r>
-              <a:rPr lang="en-US" sz="2100" dirty="0">
+            <a:endParaRPr lang="en-US" sz="1920" dirty="0"/>
+          </a:p>
+          <a:p>
+            <a:pPr indent="0" marL="0">
+              <a:buNone/>
+            </a:pPr>
+            <a:r>
+              <a:rPr lang="en-US" sz="1920" dirty="0">
                 <a:solidFill>
                   <a:srgbClr val="003A63"/>
                 </a:solidFill>
@@ -6226,16 +6226,16 @@
                 <a:ea typeface="Aptos" pitchFamily="34" charset="-122"/>
                 <a:cs typeface="Aptos" pitchFamily="34" charset="-120"/>
               </a:rPr>
-              <a:t>• Which staff roles would need to understand or apply this concept before AI use is approved?</a:t>
-            </a:r>
-            <a:endParaRPr lang="en-US" sz="2100" dirty="0"/>
-          </a:p>
-          <a:p>
-            <a:pPr indent="0" marL="0">
-              <a:buNone/>
-            </a:pPr>
-            <a:r>
-              <a:rPr lang="en-US" sz="2100" dirty="0">
+              <a:t>• Which staff roles would need to understand or apply this concept before AI.</a:t>
+            </a:r>
+            <a:endParaRPr lang="en-US" sz="1920" dirty="0"/>
+          </a:p>
+          <a:p>
+            <a:pPr indent="0" marL="0">
+              <a:buNone/>
+            </a:pPr>
+            <a:r>
+              <a:rPr lang="en-US" sz="1920" dirty="0">
                 <a:solidFill>
                   <a:srgbClr val="003A63"/>
                 </a:solidFill>
@@ -6245,7 +6245,7 @@
               </a:rPr>
               <a:t>• What could go wrong if this topic is not addressed before implementation?</a:t>
             </a:r>
-            <a:endParaRPr lang="en-US" sz="2100" dirty="0"/>
+            <a:endParaRPr lang="en-US" sz="1920" dirty="0"/>
           </a:p>
         </p:txBody>
       </p:sp>
@@ -6257,12 +6257,12 @@
         </p:nvSpPr>
         <p:spPr>
           <a:xfrm>
-            <a:off x="7635240" y="1325880"/>
-            <a:ext cx="3474720" cy="1207008"/>
+            <a:off x="7543800" y="1325880"/>
+            <a:ext cx="3611880" cy="1261872"/>
           </a:xfrm>
           <a:prstGeom prst="roundRect">
             <a:avLst>
-              <a:gd name="adj" fmla="val 9091"/>
+              <a:gd name="adj" fmla="val 8696"/>
             </a:avLst>
           </a:prstGeom>
           <a:solidFill>
@@ -6284,8 +6284,8 @@
         </p:nvSpPr>
         <p:spPr>
           <a:xfrm>
-            <a:off x="7799832" y="1472184"/>
-            <a:ext cx="3145536" cy="256032"/>
+            <a:off x="7708392" y="1453896"/>
+            <a:ext cx="3282696" cy="228600"/>
           </a:xfrm>
           <a:prstGeom prst="rect">
             <a:avLst/>
@@ -6301,7 +6301,7 @@
               <a:buNone/>
             </a:pPr>
             <a:r>
-              <a:rPr lang="en-US" sz="1300" b="1" dirty="0">
+              <a:rPr lang="en-US" sz="1220" b="1" dirty="0">
                 <a:solidFill>
                   <a:srgbClr val="0068B7"/>
                 </a:solidFill>
@@ -6311,7 +6311,7 @@
               </a:rPr>
               <a:t>Implementation cue</a:t>
             </a:r>
-            <a:endParaRPr lang="en-US" sz="1300" dirty="0"/>
+            <a:endParaRPr lang="en-US" sz="1220" dirty="0"/>
           </a:p>
         </p:txBody>
       </p:sp>
@@ -6323,8 +6323,8 @@
         </p:nvSpPr>
         <p:spPr>
           <a:xfrm>
-            <a:off x="7799832" y="1801368"/>
-            <a:ext cx="3145536" cy="640080"/>
+            <a:off x="7708392" y="1764792"/>
+            <a:ext cx="3282696" cy="749808"/>
           </a:xfrm>
           <a:prstGeom prst="rect">
             <a:avLst/>
@@ -6342,7 +6342,7 @@
               <a:buNone/>
             </a:pPr>
             <a:r>
-              <a:rPr lang="en-US" sz="1320" dirty="0">
+              <a:rPr lang="en-US" sz="1220" dirty="0">
                 <a:solidFill>
                   <a:srgbClr val="17364A"/>
                 </a:solidFill>
@@ -6352,7 +6352,7 @@
               </a:rPr>
               <a:t>Where does this topic appear in your agency, program, or workflow?</a:t>
             </a:r>
-            <a:endParaRPr lang="en-US" sz="1320" dirty="0"/>
+            <a:endParaRPr lang="en-US" sz="1220" dirty="0"/>
           </a:p>
         </p:txBody>
       </p:sp>
@@ -6364,12 +6364,12 @@
         </p:nvSpPr>
         <p:spPr>
           <a:xfrm>
-            <a:off x="7635240" y="2670048"/>
-            <a:ext cx="3474720" cy="1377086"/>
+            <a:off x="7543800" y="2724912"/>
+            <a:ext cx="3611880" cy="1527048"/>
           </a:xfrm>
           <a:prstGeom prst="roundRect">
             <a:avLst>
-              <a:gd name="adj" fmla="val 7968"/>
+              <a:gd name="adj" fmla="val 7186"/>
             </a:avLst>
           </a:prstGeom>
           <a:solidFill>
@@ -6391,8 +6391,8 @@
         </p:nvSpPr>
         <p:spPr>
           <a:xfrm>
-            <a:off x="7799832" y="2816352"/>
-            <a:ext cx="3145536" cy="256032"/>
+            <a:off x="7708392" y="2852928"/>
+            <a:ext cx="3282696" cy="228600"/>
           </a:xfrm>
           <a:prstGeom prst="rect">
             <a:avLst/>
@@ -6408,7 +6408,7 @@
               <a:buNone/>
             </a:pPr>
             <a:r>
-              <a:rPr lang="en-US" sz="1300" b="1" dirty="0">
+              <a:rPr lang="en-US" sz="1220" b="1" dirty="0">
                 <a:solidFill>
                   <a:srgbClr val="0068B7"/>
                 </a:solidFill>
@@ -6418,7 +6418,7 @@
               </a:rPr>
               <a:t>Concept checkpoints</a:t>
             </a:r>
-            <a:endParaRPr lang="en-US" sz="1300" dirty="0"/>
+            <a:endParaRPr lang="en-US" sz="1220" dirty="0"/>
           </a:p>
         </p:txBody>
       </p:sp>
@@ -6430,8 +6430,8 @@
         </p:nvSpPr>
         <p:spPr>
           <a:xfrm>
-            <a:off x="7818120" y="3182112"/>
-            <a:ext cx="3090672" cy="718718"/>
+            <a:off x="7726680" y="3182112"/>
+            <a:ext cx="3227832" cy="960120"/>
           </a:xfrm>
           <a:prstGeom prst="rect">
             <a:avLst/>
@@ -6449,7 +6449,7 @@
               <a:buNone/>
             </a:pPr>
             <a:r>
-              <a:rPr lang="en-US" sz="1220" dirty="0">
+              <a:rPr lang="en-US" sz="1140" dirty="0">
                 <a:solidFill>
                   <a:srgbClr val="17364A"/>
                 </a:solidFill>
@@ -6457,16 +6457,16 @@
                 <a:ea typeface="Aptos" pitchFamily="34" charset="-122"/>
                 <a:cs typeface="Aptos" pitchFamily="34" charset="-120"/>
               </a:rPr>
-              <a:t>Where does this topic appear in your agency, program, or workflow?</a:t>
-            </a:r>
-            <a:endParaRPr lang="en-US" sz="1220" dirty="0"/>
-          </a:p>
-          <a:p>
-            <a:pPr indent="0" marL="0">
-              <a:buNone/>
-            </a:pPr>
-            <a:r>
-              <a:rPr lang="en-US" sz="1220" dirty="0">
+              <a:t>Where does this topic appear in your agency,.</a:t>
+            </a:r>
+            <a:endParaRPr lang="en-US" sz="1140" dirty="0"/>
+          </a:p>
+          <a:p>
+            <a:pPr indent="0" marL="0">
+              <a:buNone/>
+            </a:pPr>
+            <a:r>
+              <a:rPr lang="en-US" sz="1140" dirty="0">
                 <a:solidFill>
                   <a:srgbClr val="17364A"/>
                 </a:solidFill>
@@ -6474,16 +6474,16 @@
                 <a:ea typeface="Aptos" pitchFamily="34" charset="-122"/>
                 <a:cs typeface="Aptos" pitchFamily="34" charset="-120"/>
               </a:rPr>
-              <a:t>Which staff roles would need to understand or apply this concept.</a:t>
-            </a:r>
-            <a:endParaRPr lang="en-US" sz="1220" dirty="0"/>
-          </a:p>
-          <a:p>
-            <a:pPr indent="0" marL="0">
-              <a:buNone/>
-            </a:pPr>
-            <a:r>
-              <a:rPr lang="en-US" sz="1220" dirty="0">
+              <a:t>Which staff roles would need to understand or.</a:t>
+            </a:r>
+            <a:endParaRPr lang="en-US" sz="1140" dirty="0"/>
+          </a:p>
+          <a:p>
+            <a:pPr indent="0" marL="0">
+              <a:buNone/>
+            </a:pPr>
+            <a:r>
+              <a:rPr lang="en-US" sz="1140" dirty="0">
                 <a:solidFill>
                   <a:srgbClr val="17364A"/>
                 </a:solidFill>
@@ -6491,9 +6491,9 @@
                 <a:ea typeface="Aptos" pitchFamily="34" charset="-122"/>
                 <a:cs typeface="Aptos" pitchFamily="34" charset="-120"/>
               </a:rPr>
-              <a:t>What could go wrong if this topic is not addressed before.</a:t>
-            </a:r>
-            <a:endParaRPr lang="en-US" sz="1220" dirty="0"/>
+              <a:t>What could go wrong if this topic is not addressed.</a:t>
+            </a:r>
+            <a:endParaRPr lang="en-US" sz="1140" dirty="0"/>
           </a:p>
         </p:txBody>
       </p:sp>
@@ -6505,12 +6505,12 @@
         </p:nvSpPr>
         <p:spPr>
           <a:xfrm>
-            <a:off x="7635240" y="4184294"/>
-            <a:ext cx="3474720" cy="1466698"/>
+            <a:off x="7543800" y="4389120"/>
+            <a:ext cx="3611880" cy="1261872"/>
           </a:xfrm>
           <a:prstGeom prst="roundRect">
             <a:avLst>
-              <a:gd name="adj" fmla="val 7481"/>
+              <a:gd name="adj" fmla="val 8696"/>
             </a:avLst>
           </a:prstGeom>
           <a:solidFill>
@@ -6532,8 +6532,8 @@
         </p:nvSpPr>
         <p:spPr>
           <a:xfrm>
-            <a:off x="7799832" y="4330598"/>
-            <a:ext cx="3145536" cy="256032"/>
+            <a:off x="7708392" y="4517136"/>
+            <a:ext cx="3282696" cy="228600"/>
           </a:xfrm>
           <a:prstGeom prst="rect">
             <a:avLst/>
@@ -6549,7 +6549,7 @@
               <a:buNone/>
             </a:pPr>
             <a:r>
-              <a:rPr lang="en-US" sz="1300" b="1" dirty="0">
+              <a:rPr lang="en-US" sz="1220" b="1" dirty="0">
                 <a:solidFill>
                   <a:srgbClr val="0068B7"/>
                 </a:solidFill>
@@ -6559,7 +6559,7 @@
               </a:rPr>
               <a:t>Next action</a:t>
             </a:r>
-            <a:endParaRPr lang="en-US" sz="1300" dirty="0"/>
+            <a:endParaRPr lang="en-US" sz="1220" dirty="0"/>
           </a:p>
         </p:txBody>
       </p:sp>
@@ -6571,8 +6571,8 @@
         </p:nvSpPr>
         <p:spPr>
           <a:xfrm>
-            <a:off x="7799832" y="4659782"/>
-            <a:ext cx="3145536" cy="899770"/>
+            <a:off x="7708392" y="4828032"/>
+            <a:ext cx="3282696" cy="749808"/>
           </a:xfrm>
           <a:prstGeom prst="rect">
             <a:avLst/>
@@ -6590,7 +6590,7 @@
               <a:buNone/>
             </a:pPr>
             <a:r>
-              <a:rPr lang="en-US" sz="1320" dirty="0">
+              <a:rPr lang="en-US" sz="1220" dirty="0">
                 <a:solidFill>
                   <a:srgbClr val="17364A"/>
                 </a:solidFill>
@@ -6598,9 +6598,9 @@
                 <a:ea typeface="Aptos" pitchFamily="34" charset="-122"/>
                 <a:cs typeface="Aptos" pitchFamily="34" charset="-120"/>
               </a:rPr>
-              <a:t>Use the concept to clarify workflow changes, dependencies, staffing, procurement requirements, training needs, and implementation checkpoints.</a:t>
-            </a:r>
-            <a:endParaRPr lang="en-US" sz="1320" dirty="0"/>
+              <a:t>Use the concept to clarify workflow changes, dependencies, staffing, procurement.</a:t>
+            </a:r>
+            <a:endParaRPr lang="en-US" sz="1220" dirty="0"/>
           </a:p>
         </p:txBody>
       </p:sp>
@@ -6891,8 +6891,8 @@
         </p:nvSpPr>
         <p:spPr>
           <a:xfrm>
-            <a:off x="868680" y="1508760"/>
-            <a:ext cx="6309360" cy="4160520"/>
+            <a:off x="822960" y="1463040"/>
+            <a:ext cx="6565392" cy="4343400"/>
           </a:xfrm>
           <a:prstGeom prst="rect">
             <a:avLst/>
@@ -6910,7 +6910,7 @@
               <a:buNone/>
             </a:pPr>
             <a:r>
-              <a:rPr lang="en-US" sz="2100" dirty="0">
+              <a:rPr lang="en-US" sz="1920" dirty="0">
                 <a:solidFill>
                   <a:srgbClr val="003A63"/>
                 </a:solidFill>
@@ -6918,16 +6918,16 @@
                 <a:ea typeface="Aptos" pitchFamily="34" charset="-122"/>
                 <a:cs typeface="Aptos" pitchFamily="34" charset="-120"/>
               </a:rPr>
-              <a:t>• What evidence would governance, leadership, or operations staff need before moving forward?</a:t>
-            </a:r>
-            <a:endParaRPr lang="en-US" sz="2100" dirty="0"/>
-          </a:p>
-          <a:p>
-            <a:pPr indent="0" marL="0">
-              <a:buNone/>
-            </a:pPr>
-            <a:r>
-              <a:rPr lang="en-US" sz="2100" dirty="0">
+              <a:t>• What evidence would governance, leadership, or operations staff need before.</a:t>
+            </a:r>
+            <a:endParaRPr lang="en-US" sz="1920" dirty="0"/>
+          </a:p>
+          <a:p>
+            <a:pPr indent="0" marL="0">
+              <a:buNone/>
+            </a:pPr>
+            <a:r>
+              <a:rPr lang="en-US" sz="1920" dirty="0">
                 <a:solidFill>
                   <a:srgbClr val="003A63"/>
                 </a:solidFill>
@@ -6935,9 +6935,9 @@
                 <a:ea typeface="Aptos" pitchFamily="34" charset="-122"/>
                 <a:cs typeface="Aptos" pitchFamily="34" charset="-120"/>
               </a:rPr>
-              <a:t>• Which policy, data, equity, privacy, security, or workflow questions remain unresolved?</a:t>
-            </a:r>
-            <a:endParaRPr lang="en-US" sz="2100" dirty="0"/>
+              <a:t>• Which policy, data, equity, privacy, security, or workflow questions remain.</a:t>
+            </a:r>
+            <a:endParaRPr lang="en-US" sz="1920" dirty="0"/>
           </a:p>
         </p:txBody>
       </p:sp>
@@ -6949,12 +6949,12 @@
         </p:nvSpPr>
         <p:spPr>
           <a:xfrm>
-            <a:off x="7635240" y="1325880"/>
-            <a:ext cx="3474720" cy="1207008"/>
+            <a:off x="7543800" y="1325880"/>
+            <a:ext cx="3611880" cy="1261872"/>
           </a:xfrm>
           <a:prstGeom prst="roundRect">
             <a:avLst>
-              <a:gd name="adj" fmla="val 9091"/>
+              <a:gd name="adj" fmla="val 8696"/>
             </a:avLst>
           </a:prstGeom>
           <a:solidFill>
@@ -6976,8 +6976,8 @@
         </p:nvSpPr>
         <p:spPr>
           <a:xfrm>
-            <a:off x="7799832" y="1472184"/>
-            <a:ext cx="3145536" cy="256032"/>
+            <a:off x="7708392" y="1453896"/>
+            <a:ext cx="3282696" cy="228600"/>
           </a:xfrm>
           <a:prstGeom prst="rect">
             <a:avLst/>
@@ -6993,7 +6993,7 @@
               <a:buNone/>
             </a:pPr>
             <a:r>
-              <a:rPr lang="en-US" sz="1300" b="1" dirty="0">
+              <a:rPr lang="en-US" sz="1220" b="1" dirty="0">
                 <a:solidFill>
                   <a:srgbClr val="0068B7"/>
                 </a:solidFill>
@@ -7003,7 +7003,7 @@
               </a:rPr>
               <a:t>Implementation cue</a:t>
             </a:r>
-            <a:endParaRPr lang="en-US" sz="1300" dirty="0"/>
+            <a:endParaRPr lang="en-US" sz="1220" dirty="0"/>
           </a:p>
         </p:txBody>
       </p:sp>
@@ -7015,8 +7015,8 @@
         </p:nvSpPr>
         <p:spPr>
           <a:xfrm>
-            <a:off x="7799832" y="1801368"/>
-            <a:ext cx="3145536" cy="640080"/>
+            <a:off x="7708392" y="1764792"/>
+            <a:ext cx="3282696" cy="749808"/>
           </a:xfrm>
           <a:prstGeom prst="rect">
             <a:avLst/>
@@ -7034,7 +7034,7 @@
               <a:buNone/>
             </a:pPr>
             <a:r>
-              <a:rPr lang="en-US" sz="1320" dirty="0">
+              <a:rPr lang="en-US" sz="1220" dirty="0">
                 <a:solidFill>
                   <a:srgbClr val="17364A"/>
                 </a:solidFill>
@@ -7042,9 +7042,9 @@
                 <a:ea typeface="Aptos" pitchFamily="34" charset="-122"/>
                 <a:cs typeface="Aptos" pitchFamily="34" charset="-120"/>
               </a:rPr>
-              <a:t>What evidence would governance, leadership, or operations staff need before moving.</a:t>
-            </a:r>
-            <a:endParaRPr lang="en-US" sz="1320" dirty="0"/>
+              <a:t>What evidence would governance, leadership, or operations staff need before.</a:t>
+            </a:r>
+            <a:endParaRPr lang="en-US" sz="1220" dirty="0"/>
           </a:p>
         </p:txBody>
       </p:sp>
@@ -7056,12 +7056,12 @@
         </p:nvSpPr>
         <p:spPr>
           <a:xfrm>
-            <a:off x="7635240" y="2670048"/>
-            <a:ext cx="3474720" cy="1377086"/>
+            <a:off x="7543800" y="2724912"/>
+            <a:ext cx="3611880" cy="1527048"/>
           </a:xfrm>
           <a:prstGeom prst="roundRect">
             <a:avLst>
-              <a:gd name="adj" fmla="val 7968"/>
+              <a:gd name="adj" fmla="val 7186"/>
             </a:avLst>
           </a:prstGeom>
           <a:solidFill>
@@ -7083,8 +7083,8 @@
         </p:nvSpPr>
         <p:spPr>
           <a:xfrm>
-            <a:off x="7799832" y="2816352"/>
-            <a:ext cx="3145536" cy="256032"/>
+            <a:off x="7708392" y="2852928"/>
+            <a:ext cx="3282696" cy="228600"/>
           </a:xfrm>
           <a:prstGeom prst="rect">
             <a:avLst/>
@@ -7100,7 +7100,7 @@
               <a:buNone/>
             </a:pPr>
             <a:r>
-              <a:rPr lang="en-US" sz="1300" b="1" dirty="0">
+              <a:rPr lang="en-US" sz="1220" b="1" dirty="0">
                 <a:solidFill>
                   <a:srgbClr val="0068B7"/>
                 </a:solidFill>
@@ -7110,7 +7110,7 @@
               </a:rPr>
               <a:t>Concept checkpoints</a:t>
             </a:r>
-            <a:endParaRPr lang="en-US" sz="1300" dirty="0"/>
+            <a:endParaRPr lang="en-US" sz="1220" dirty="0"/>
           </a:p>
         </p:txBody>
       </p:sp>
@@ -7122,8 +7122,8 @@
         </p:nvSpPr>
         <p:spPr>
           <a:xfrm>
-            <a:off x="7818120" y="3182112"/>
-            <a:ext cx="3090672" cy="718718"/>
+            <a:off x="7726680" y="3182112"/>
+            <a:ext cx="3227832" cy="960120"/>
           </a:xfrm>
           <a:prstGeom prst="rect">
             <a:avLst/>
@@ -7141,7 +7141,7 @@
               <a:buNone/>
             </a:pPr>
             <a:r>
-              <a:rPr lang="en-US" sz="1220" dirty="0">
+              <a:rPr lang="en-US" sz="1140" dirty="0">
                 <a:solidFill>
                   <a:srgbClr val="17364A"/>
                 </a:solidFill>
@@ -7149,16 +7149,16 @@
                 <a:ea typeface="Aptos" pitchFamily="34" charset="-122"/>
                 <a:cs typeface="Aptos" pitchFamily="34" charset="-120"/>
               </a:rPr>
-              <a:t>What evidence would governance, leadership, or operations staff.</a:t>
-            </a:r>
-            <a:endParaRPr lang="en-US" sz="1220" dirty="0"/>
-          </a:p>
-          <a:p>
-            <a:pPr indent="0" marL="0">
-              <a:buNone/>
-            </a:pPr>
-            <a:r>
-              <a:rPr lang="en-US" sz="1220" dirty="0">
+              <a:t>What evidence would governance, leadership, or.</a:t>
+            </a:r>
+            <a:endParaRPr lang="en-US" sz="1140" dirty="0"/>
+          </a:p>
+          <a:p>
+            <a:pPr indent="0" marL="0">
+              <a:buNone/>
+            </a:pPr>
+            <a:r>
+              <a:rPr lang="en-US" sz="1140" dirty="0">
                 <a:solidFill>
                   <a:srgbClr val="17364A"/>
                 </a:solidFill>
@@ -7166,9 +7166,9 @@
                 <a:ea typeface="Aptos" pitchFamily="34" charset="-122"/>
                 <a:cs typeface="Aptos" pitchFamily="34" charset="-120"/>
               </a:rPr>
-              <a:t>Which policy, data, equity, privacy, security, or workflow.</a:t>
-            </a:r>
-            <a:endParaRPr lang="en-US" sz="1220" dirty="0"/>
+              <a:t>Which policy, data, equity, privacy, security, or.</a:t>
+            </a:r>
+            <a:endParaRPr lang="en-US" sz="1140" dirty="0"/>
           </a:p>
         </p:txBody>
       </p:sp>
@@ -7180,12 +7180,12 @@
         </p:nvSpPr>
         <p:spPr>
           <a:xfrm>
-            <a:off x="7635240" y="4184294"/>
-            <a:ext cx="3474720" cy="1466698"/>
+            <a:off x="7543800" y="4389120"/>
+            <a:ext cx="3611880" cy="1261872"/>
           </a:xfrm>
           <a:prstGeom prst="roundRect">
             <a:avLst>
-              <a:gd name="adj" fmla="val 7481"/>
+              <a:gd name="adj" fmla="val 8696"/>
             </a:avLst>
           </a:prstGeom>
           <a:solidFill>
@@ -7207,8 +7207,8 @@
         </p:nvSpPr>
         <p:spPr>
           <a:xfrm>
-            <a:off x="7799832" y="4330598"/>
-            <a:ext cx="3145536" cy="256032"/>
+            <a:off x="7708392" y="4517136"/>
+            <a:ext cx="3282696" cy="228600"/>
           </a:xfrm>
           <a:prstGeom prst="rect">
             <a:avLst/>
@@ -7224,7 +7224,7 @@
               <a:buNone/>
             </a:pPr>
             <a:r>
-              <a:rPr lang="en-US" sz="1300" b="1" dirty="0">
+              <a:rPr lang="en-US" sz="1220" b="1" dirty="0">
                 <a:solidFill>
                   <a:srgbClr val="0068B7"/>
                 </a:solidFill>
@@ -7234,7 +7234,7 @@
               </a:rPr>
               <a:t>Next action</a:t>
             </a:r>
-            <a:endParaRPr lang="en-US" sz="1300" dirty="0"/>
+            <a:endParaRPr lang="en-US" sz="1220" dirty="0"/>
           </a:p>
         </p:txBody>
       </p:sp>
@@ -7246,8 +7246,8 @@
         </p:nvSpPr>
         <p:spPr>
           <a:xfrm>
-            <a:off x="7799832" y="4659782"/>
-            <a:ext cx="3145536" cy="899770"/>
+            <a:off x="7708392" y="4828032"/>
+            <a:ext cx="3282696" cy="749808"/>
           </a:xfrm>
           <a:prstGeom prst="rect">
             <a:avLst/>
@@ -7265,7 +7265,7 @@
               <a:buNone/>
             </a:pPr>
             <a:r>
-              <a:rPr lang="en-US" sz="1320" dirty="0">
+              <a:rPr lang="en-US" sz="1220" dirty="0">
                 <a:solidFill>
                   <a:srgbClr val="17364A"/>
                 </a:solidFill>
@@ -7273,9 +7273,9 @@
                 <a:ea typeface="Aptos" pitchFamily="34" charset="-122"/>
                 <a:cs typeface="Aptos" pitchFamily="34" charset="-120"/>
               </a:rPr>
-              <a:t>Use the concept to clarify workflow changes, dependencies, staffing, procurement requirements, training needs, and implementation checkpoints.</a:t>
-            </a:r>
-            <a:endParaRPr lang="en-US" sz="1320" dirty="0"/>
+              <a:t>Use the concept to clarify workflow changes, dependencies, staffing, procurement.</a:t>
+            </a:r>
+            <a:endParaRPr lang="en-US" sz="1220" dirty="0"/>
           </a:p>
         </p:txBody>
       </p:sp>
@@ -7566,8 +7566,8 @@
         </p:nvSpPr>
         <p:spPr>
           <a:xfrm>
-            <a:off x="868680" y="1508760"/>
-            <a:ext cx="6309360" cy="4160520"/>
+            <a:off x="822960" y="1463040"/>
+            <a:ext cx="6565392" cy="4343400"/>
           </a:xfrm>
           <a:prstGeom prst="rect">
             <a:avLst/>
@@ -7585,7 +7585,7 @@
               <a:buNone/>
             </a:pPr>
             <a:r>
-              <a:rPr lang="en-US" sz="2100" dirty="0">
+              <a:rPr lang="en-US" sz="1920" dirty="0">
                 <a:solidFill>
                   <a:srgbClr val="003A63"/>
                 </a:solidFill>
@@ -7593,16 +7593,16 @@
                 <a:ea typeface="Aptos" pitchFamily="34" charset="-122"/>
                 <a:cs typeface="Aptos" pitchFamily="34" charset="-120"/>
               </a:rPr>
-              <a:t>• Create an AI project charter and implementation plan for one proposed AI-supported public.</a:t>
-            </a:r>
-            <a:endParaRPr lang="en-US" sz="2100" dirty="0"/>
-          </a:p>
-          <a:p>
-            <a:pPr indent="0" marL="0">
-              <a:buNone/>
-            </a:pPr>
-            <a:r>
-              <a:rPr lang="en-US" sz="2100" dirty="0">
+              <a:t>• Create an AI project charter and implementation plan for one proposed.</a:t>
+            </a:r>
+            <a:endParaRPr lang="en-US" sz="1920" dirty="0"/>
+          </a:p>
+          <a:p>
+            <a:pPr indent="0" marL="0">
+              <a:buNone/>
+            </a:pPr>
+            <a:r>
+              <a:rPr lang="en-US" sz="1920" dirty="0">
                 <a:solidFill>
                   <a:srgbClr val="003A63"/>
                 </a:solidFill>
@@ -7610,9 +7610,9 @@
                 <a:ea typeface="Aptos" pitchFamily="34" charset="-122"/>
                 <a:cs typeface="Aptos" pitchFamily="34" charset="-120"/>
               </a:rPr>
-              <a:t>• Include project purpose, scope, objectives, roles, governance gates, milestones, workstreams,.</a:t>
-            </a:r>
-            <a:endParaRPr lang="en-US" sz="2100" dirty="0"/>
+              <a:t>• Include project purpose, scope, objectives, roles, governance gates,.</a:t>
+            </a:r>
+            <a:endParaRPr lang="en-US" sz="1920" dirty="0"/>
           </a:p>
         </p:txBody>
       </p:sp>
@@ -7624,12 +7624,12 @@
         </p:nvSpPr>
         <p:spPr>
           <a:xfrm>
-            <a:off x="7635240" y="1325880"/>
-            <a:ext cx="3474720" cy="1255471"/>
+            <a:off x="7543800" y="1325880"/>
+            <a:ext cx="3611880" cy="1261872"/>
           </a:xfrm>
           <a:prstGeom prst="roundRect">
             <a:avLst>
-              <a:gd name="adj" fmla="val 8740"/>
+              <a:gd name="adj" fmla="val 8696"/>
             </a:avLst>
           </a:prstGeom>
           <a:solidFill>
@@ -7651,8 +7651,8 @@
         </p:nvSpPr>
         <p:spPr>
           <a:xfrm>
-            <a:off x="7799832" y="1472184"/>
-            <a:ext cx="3145536" cy="256032"/>
+            <a:off x="7708392" y="1453896"/>
+            <a:ext cx="3282696" cy="228600"/>
           </a:xfrm>
           <a:prstGeom prst="rect">
             <a:avLst/>
@@ -7668,7 +7668,7 @@
               <a:buNone/>
             </a:pPr>
             <a:r>
-              <a:rPr lang="en-US" sz="1300" b="1" dirty="0">
+              <a:rPr lang="en-US" sz="1220" b="1" dirty="0">
                 <a:solidFill>
                   <a:srgbClr val="0068B7"/>
                 </a:solidFill>
@@ -7678,7 +7678,7 @@
               </a:rPr>
               <a:t>Implementation cue</a:t>
             </a:r>
-            <a:endParaRPr lang="en-US" sz="1300" dirty="0"/>
+            <a:endParaRPr lang="en-US" sz="1220" dirty="0"/>
           </a:p>
         </p:txBody>
       </p:sp>
@@ -7690,8 +7690,8 @@
         </p:nvSpPr>
         <p:spPr>
           <a:xfrm>
-            <a:off x="7799832" y="1801368"/>
-            <a:ext cx="3145536" cy="688543"/>
+            <a:off x="7708392" y="1764792"/>
+            <a:ext cx="3282696" cy="749808"/>
           </a:xfrm>
           <a:prstGeom prst="rect">
             <a:avLst/>
@@ -7709,7 +7709,7 @@
               <a:buNone/>
             </a:pPr>
             <a:r>
-              <a:rPr lang="en-US" sz="1320" dirty="0">
+              <a:rPr lang="en-US" sz="1220" dirty="0">
                 <a:solidFill>
                   <a:srgbClr val="17364A"/>
                 </a:solidFill>
@@ -7717,9 +7717,9 @@
                 <a:ea typeface="Aptos" pitchFamily="34" charset="-122"/>
                 <a:cs typeface="Aptos" pitchFamily="34" charset="-120"/>
               </a:rPr>
-              <a:t>Create an AI project charter and implementation plan for one proposed AI-supported public health.</a:t>
-            </a:r>
-            <a:endParaRPr lang="en-US" sz="1320" dirty="0"/>
+              <a:t>Create an AI project charter and implementation plan for one proposed.</a:t>
+            </a:r>
+            <a:endParaRPr lang="en-US" sz="1220" dirty="0"/>
           </a:p>
         </p:txBody>
       </p:sp>
@@ -7731,12 +7731,12 @@
         </p:nvSpPr>
         <p:spPr>
           <a:xfrm>
-            <a:off x="7635240" y="2718511"/>
-            <a:ext cx="3474720" cy="1328623"/>
+            <a:off x="7543800" y="2724912"/>
+            <a:ext cx="3611880" cy="1527048"/>
           </a:xfrm>
           <a:prstGeom prst="roundRect">
             <a:avLst>
-              <a:gd name="adj" fmla="val 8259"/>
+              <a:gd name="adj" fmla="val 7186"/>
             </a:avLst>
           </a:prstGeom>
           <a:solidFill>
@@ -7758,8 +7758,8 @@
         </p:nvSpPr>
         <p:spPr>
           <a:xfrm>
-            <a:off x="7799832" y="2864815"/>
-            <a:ext cx="3145536" cy="256032"/>
+            <a:off x="7708392" y="2852928"/>
+            <a:ext cx="3282696" cy="228600"/>
           </a:xfrm>
           <a:prstGeom prst="rect">
             <a:avLst/>
@@ -7775,7 +7775,7 @@
               <a:buNone/>
             </a:pPr>
             <a:r>
-              <a:rPr lang="en-US" sz="1300" b="1" dirty="0">
+              <a:rPr lang="en-US" sz="1220" b="1" dirty="0">
                 <a:solidFill>
                   <a:srgbClr val="0068B7"/>
                 </a:solidFill>
@@ -7785,7 +7785,7 @@
               </a:rPr>
               <a:t>Concept checkpoints</a:t>
             </a:r>
-            <a:endParaRPr lang="en-US" sz="1300" dirty="0"/>
+            <a:endParaRPr lang="en-US" sz="1220" dirty="0"/>
           </a:p>
         </p:txBody>
       </p:sp>
@@ -7797,8 +7797,8 @@
         </p:nvSpPr>
         <p:spPr>
           <a:xfrm>
-            <a:off x="7818120" y="3230575"/>
-            <a:ext cx="3090672" cy="670255"/>
+            <a:off x="7726680" y="3182112"/>
+            <a:ext cx="3227832" cy="960120"/>
           </a:xfrm>
           <a:prstGeom prst="rect">
             <a:avLst/>
@@ -7816,7 +7816,7 @@
               <a:buNone/>
             </a:pPr>
             <a:r>
-              <a:rPr lang="en-US" sz="1220" dirty="0">
+              <a:rPr lang="en-US" sz="1140" dirty="0">
                 <a:solidFill>
                   <a:srgbClr val="17364A"/>
                 </a:solidFill>
@@ -7824,16 +7824,16 @@
                 <a:ea typeface="Aptos" pitchFamily="34" charset="-122"/>
                 <a:cs typeface="Aptos" pitchFamily="34" charset="-120"/>
               </a:rPr>
-              <a:t>Create an AI project charter and implementation plan for one.</a:t>
-            </a:r>
-            <a:endParaRPr lang="en-US" sz="1220" dirty="0"/>
-          </a:p>
-          <a:p>
-            <a:pPr indent="0" marL="0">
-              <a:buNone/>
-            </a:pPr>
-            <a:r>
-              <a:rPr lang="en-US" sz="1220" dirty="0">
+              <a:t>Create an AI project charter and implementation.</a:t>
+            </a:r>
+            <a:endParaRPr lang="en-US" sz="1140" dirty="0"/>
+          </a:p>
+          <a:p>
+            <a:pPr indent="0" marL="0">
+              <a:buNone/>
+            </a:pPr>
+            <a:r>
+              <a:rPr lang="en-US" sz="1140" dirty="0">
                 <a:solidFill>
                   <a:srgbClr val="17364A"/>
                 </a:solidFill>
@@ -7841,9 +7841,9 @@
                 <a:ea typeface="Aptos" pitchFamily="34" charset="-122"/>
                 <a:cs typeface="Aptos" pitchFamily="34" charset="-120"/>
               </a:rPr>
-              <a:t>Include project purpose, scope, objectives, roles, governance.</a:t>
-            </a:r>
-            <a:endParaRPr lang="en-US" sz="1220" dirty="0"/>
+              <a:t>Include project purpose, scope, objectives, roles,.</a:t>
+            </a:r>
+            <a:endParaRPr lang="en-US" sz="1140" dirty="0"/>
           </a:p>
         </p:txBody>
       </p:sp>
@@ -7855,12 +7855,12 @@
         </p:nvSpPr>
         <p:spPr>
           <a:xfrm>
-            <a:off x="7635240" y="4184294"/>
-            <a:ext cx="3474720" cy="1466698"/>
+            <a:off x="7543800" y="4389120"/>
+            <a:ext cx="3611880" cy="1261872"/>
           </a:xfrm>
           <a:prstGeom prst="roundRect">
             <a:avLst>
-              <a:gd name="adj" fmla="val 7481"/>
+              <a:gd name="adj" fmla="val 8696"/>
             </a:avLst>
           </a:prstGeom>
           <a:solidFill>
@@ -7882,8 +7882,8 @@
         </p:nvSpPr>
         <p:spPr>
           <a:xfrm>
-            <a:off x="7799832" y="4330598"/>
-            <a:ext cx="3145536" cy="256032"/>
+            <a:off x="7708392" y="4517136"/>
+            <a:ext cx="3282696" cy="228600"/>
           </a:xfrm>
           <a:prstGeom prst="rect">
             <a:avLst/>
@@ -7899,7 +7899,7 @@
               <a:buNone/>
             </a:pPr>
             <a:r>
-              <a:rPr lang="en-US" sz="1300" b="1" dirty="0">
+              <a:rPr lang="en-US" sz="1220" b="1" dirty="0">
                 <a:solidFill>
                   <a:srgbClr val="0068B7"/>
                 </a:solidFill>
@@ -7909,7 +7909,7 @@
               </a:rPr>
               <a:t>Next action</a:t>
             </a:r>
-            <a:endParaRPr lang="en-US" sz="1300" dirty="0"/>
+            <a:endParaRPr lang="en-US" sz="1220" dirty="0"/>
           </a:p>
         </p:txBody>
       </p:sp>
@@ -7921,8 +7921,8 @@
         </p:nvSpPr>
         <p:spPr>
           <a:xfrm>
-            <a:off x="7799832" y="4659782"/>
-            <a:ext cx="3145536" cy="899770"/>
+            <a:off x="7708392" y="4828032"/>
+            <a:ext cx="3282696" cy="749808"/>
           </a:xfrm>
           <a:prstGeom prst="rect">
             <a:avLst/>
@@ -7940,7 +7940,7 @@
               <a:buNone/>
             </a:pPr>
             <a:r>
-              <a:rPr lang="en-US" sz="1320" dirty="0">
+              <a:rPr lang="en-US" sz="1220" dirty="0">
                 <a:solidFill>
                   <a:srgbClr val="17364A"/>
                 </a:solidFill>
@@ -7948,9 +7948,9 @@
                 <a:ea typeface="Aptos" pitchFamily="34" charset="-122"/>
                 <a:cs typeface="Aptos" pitchFamily="34" charset="-120"/>
               </a:rPr>
-              <a:t>Use the assignment to test whether you can explain the concept, apply it to a realistic public health situation, and identify what would need review before the work moves forward.</a:t>
-            </a:r>
-            <a:endParaRPr lang="en-US" sz="1320" dirty="0"/>
+              <a:t>Use the assignment to test whether you can explain the concept, apply it to a.</a:t>
+            </a:r>
+            <a:endParaRPr lang="en-US" sz="1220" dirty="0"/>
           </a:p>
         </p:txBody>
       </p:sp>
@@ -8241,8 +8241,8 @@
         </p:nvSpPr>
         <p:spPr>
           <a:xfrm>
-            <a:off x="868680" y="1508760"/>
-            <a:ext cx="6309360" cy="4160520"/>
+            <a:off x="822960" y="1463040"/>
+            <a:ext cx="6565392" cy="4343400"/>
           </a:xfrm>
           <a:prstGeom prst="rect">
             <a:avLst/>
@@ -8260,7 +8260,7 @@
               <a:buNone/>
             </a:pPr>
             <a:r>
-              <a:rPr lang="en-US" sz="2100" dirty="0">
+              <a:rPr lang="en-US" sz="1920" dirty="0">
                 <a:solidFill>
                   <a:srgbClr val="003A63"/>
                 </a:solidFill>
@@ -8270,14 +8270,14 @@
               </a:rPr>
               <a:t>• AI project charter</a:t>
             </a:r>
-            <a:endParaRPr lang="en-US" sz="2100" dirty="0"/>
-          </a:p>
-          <a:p>
-            <a:pPr indent="0" marL="0">
-              <a:buNone/>
-            </a:pPr>
-            <a:r>
-              <a:rPr lang="en-US" sz="2100" dirty="0">
+            <a:endParaRPr lang="en-US" sz="1920" dirty="0"/>
+          </a:p>
+          <a:p>
+            <a:pPr indent="0" marL="0">
+              <a:buNone/>
+            </a:pPr>
+            <a:r>
+              <a:rPr lang="en-US" sz="1920" dirty="0">
                 <a:solidFill>
                   <a:srgbClr val="003A63"/>
                 </a:solidFill>
@@ -8287,14 +8287,14 @@
               </a:rPr>
               <a:t>• Implementation workplan</a:t>
             </a:r>
-            <a:endParaRPr lang="en-US" sz="2100" dirty="0"/>
-          </a:p>
-          <a:p>
-            <a:pPr indent="0" marL="0">
-              <a:buNone/>
-            </a:pPr>
-            <a:r>
-              <a:rPr lang="en-US" sz="2100" dirty="0">
+            <a:endParaRPr lang="en-US" sz="1920" dirty="0"/>
+          </a:p>
+          <a:p>
+            <a:pPr indent="0" marL="0">
+              <a:buNone/>
+            </a:pPr>
+            <a:r>
+              <a:rPr lang="en-US" sz="1920" dirty="0">
                 <a:solidFill>
                   <a:srgbClr val="003A63"/>
                 </a:solidFill>
@@ -8304,7 +8304,7 @@
               </a:rPr>
               <a:t>• AI-specific risk log</a:t>
             </a:r>
-            <a:endParaRPr lang="en-US" sz="2100" dirty="0"/>
+            <a:endParaRPr lang="en-US" sz="1920" dirty="0"/>
           </a:p>
         </p:txBody>
       </p:sp>
@@ -8316,12 +8316,12 @@
         </p:nvSpPr>
         <p:spPr>
           <a:xfrm>
-            <a:off x="7635240" y="1325880"/>
-            <a:ext cx="3474720" cy="1207008"/>
+            <a:off x="7543800" y="1325880"/>
+            <a:ext cx="3611880" cy="1261872"/>
           </a:xfrm>
           <a:prstGeom prst="roundRect">
             <a:avLst>
-              <a:gd name="adj" fmla="val 9091"/>
+              <a:gd name="adj" fmla="val 8696"/>
             </a:avLst>
           </a:prstGeom>
           <a:solidFill>
@@ -8343,8 +8343,8 @@
         </p:nvSpPr>
         <p:spPr>
           <a:xfrm>
-            <a:off x="7799832" y="1472184"/>
-            <a:ext cx="3145536" cy="256032"/>
+            <a:off x="7708392" y="1453896"/>
+            <a:ext cx="3282696" cy="228600"/>
           </a:xfrm>
           <a:prstGeom prst="rect">
             <a:avLst/>
@@ -8360,7 +8360,7 @@
               <a:buNone/>
             </a:pPr>
             <a:r>
-              <a:rPr lang="en-US" sz="1300" b="1" dirty="0">
+              <a:rPr lang="en-US" sz="1220" b="1" dirty="0">
                 <a:solidFill>
                   <a:srgbClr val="0068B7"/>
                 </a:solidFill>
@@ -8370,7 +8370,7 @@
               </a:rPr>
               <a:t>Implementation cue</a:t>
             </a:r>
-            <a:endParaRPr lang="en-US" sz="1300" dirty="0"/>
+            <a:endParaRPr lang="en-US" sz="1220" dirty="0"/>
           </a:p>
         </p:txBody>
       </p:sp>
@@ -8382,8 +8382,8 @@
         </p:nvSpPr>
         <p:spPr>
           <a:xfrm>
-            <a:off x="7799832" y="1801368"/>
-            <a:ext cx="3145536" cy="640080"/>
+            <a:off x="7708392" y="1764792"/>
+            <a:ext cx="3282696" cy="749808"/>
           </a:xfrm>
           <a:prstGeom prst="rect">
             <a:avLst/>
@@ -8401,7 +8401,7 @@
               <a:buNone/>
             </a:pPr>
             <a:r>
-              <a:rPr lang="en-US" sz="1320" dirty="0">
+              <a:rPr lang="en-US" sz="1220" dirty="0">
                 <a:solidFill>
                   <a:srgbClr val="17364A"/>
                 </a:solidFill>
@@ -8411,7 +8411,7 @@
               </a:rPr>
               <a:t>AI project charter</a:t>
             </a:r>
-            <a:endParaRPr lang="en-US" sz="1320" dirty="0"/>
+            <a:endParaRPr lang="en-US" sz="1220" dirty="0"/>
           </a:p>
         </p:txBody>
       </p:sp>
@@ -8423,12 +8423,12 @@
         </p:nvSpPr>
         <p:spPr>
           <a:xfrm>
-            <a:off x="7635240" y="2670048"/>
-            <a:ext cx="3474720" cy="1377086"/>
+            <a:off x="7543800" y="2724912"/>
+            <a:ext cx="3611880" cy="1527048"/>
           </a:xfrm>
           <a:prstGeom prst="roundRect">
             <a:avLst>
-              <a:gd name="adj" fmla="val 7968"/>
+              <a:gd name="adj" fmla="val 7186"/>
             </a:avLst>
           </a:prstGeom>
           <a:solidFill>
@@ -8450,8 +8450,8 @@
         </p:nvSpPr>
         <p:spPr>
           <a:xfrm>
-            <a:off x="7799832" y="2816352"/>
-            <a:ext cx="3145536" cy="256032"/>
+            <a:off x="7708392" y="2852928"/>
+            <a:ext cx="3282696" cy="228600"/>
           </a:xfrm>
           <a:prstGeom prst="rect">
             <a:avLst/>
@@ -8467,7 +8467,7 @@
               <a:buNone/>
             </a:pPr>
             <a:r>
-              <a:rPr lang="en-US" sz="1300" b="1" dirty="0">
+              <a:rPr lang="en-US" sz="1220" b="1" dirty="0">
                 <a:solidFill>
                   <a:srgbClr val="0068B7"/>
                 </a:solidFill>
@@ -8477,7 +8477,7 @@
               </a:rPr>
               <a:t>Concept checkpoints</a:t>
             </a:r>
-            <a:endParaRPr lang="en-US" sz="1300" dirty="0"/>
+            <a:endParaRPr lang="en-US" sz="1220" dirty="0"/>
           </a:p>
         </p:txBody>
       </p:sp>
@@ -8489,8 +8489,8 @@
         </p:nvSpPr>
         <p:spPr>
           <a:xfrm>
-            <a:off x="7818120" y="3182112"/>
-            <a:ext cx="3090672" cy="718718"/>
+            <a:off x="7726680" y="3182112"/>
+            <a:ext cx="3227832" cy="960120"/>
           </a:xfrm>
           <a:prstGeom prst="rect">
             <a:avLst/>
@@ -8508,7 +8508,7 @@
               <a:buNone/>
             </a:pPr>
             <a:r>
-              <a:rPr lang="en-US" sz="1220" dirty="0">
+              <a:rPr lang="en-US" sz="1140" dirty="0">
                 <a:solidFill>
                   <a:srgbClr val="17364A"/>
                 </a:solidFill>
@@ -8518,14 +8518,14 @@
               </a:rPr>
               <a:t>AI project charter</a:t>
             </a:r>
-            <a:endParaRPr lang="en-US" sz="1220" dirty="0"/>
-          </a:p>
-          <a:p>
-            <a:pPr indent="0" marL="0">
-              <a:buNone/>
-            </a:pPr>
-            <a:r>
-              <a:rPr lang="en-US" sz="1220" dirty="0">
+            <a:endParaRPr lang="en-US" sz="1140" dirty="0"/>
+          </a:p>
+          <a:p>
+            <a:pPr indent="0" marL="0">
+              <a:buNone/>
+            </a:pPr>
+            <a:r>
+              <a:rPr lang="en-US" sz="1140" dirty="0">
                 <a:solidFill>
                   <a:srgbClr val="17364A"/>
                 </a:solidFill>
@@ -8535,14 +8535,14 @@
               </a:rPr>
               <a:t>Implementation workplan</a:t>
             </a:r>
-            <a:endParaRPr lang="en-US" sz="1220" dirty="0"/>
-          </a:p>
-          <a:p>
-            <a:pPr indent="0" marL="0">
-              <a:buNone/>
-            </a:pPr>
-            <a:r>
-              <a:rPr lang="en-US" sz="1220" dirty="0">
+            <a:endParaRPr lang="en-US" sz="1140" dirty="0"/>
+          </a:p>
+          <a:p>
+            <a:pPr indent="0" marL="0">
+              <a:buNone/>
+            </a:pPr>
+            <a:r>
+              <a:rPr lang="en-US" sz="1140" dirty="0">
                 <a:solidFill>
                   <a:srgbClr val="17364A"/>
                 </a:solidFill>
@@ -8552,7 +8552,7 @@
               </a:rPr>
               <a:t>AI-specific risk log</a:t>
             </a:r>
-            <a:endParaRPr lang="en-US" sz="1220" dirty="0"/>
+            <a:endParaRPr lang="en-US" sz="1140" dirty="0"/>
           </a:p>
         </p:txBody>
       </p:sp>
@@ -8564,12 +8564,12 @@
         </p:nvSpPr>
         <p:spPr>
           <a:xfrm>
-            <a:off x="7635240" y="4184294"/>
-            <a:ext cx="3474720" cy="1466698"/>
+            <a:off x="7543800" y="4389120"/>
+            <a:ext cx="3611880" cy="1261872"/>
           </a:xfrm>
           <a:prstGeom prst="roundRect">
             <a:avLst>
-              <a:gd name="adj" fmla="val 7481"/>
+              <a:gd name="adj" fmla="val 8696"/>
             </a:avLst>
           </a:prstGeom>
           <a:solidFill>
@@ -8591,8 +8591,8 @@
         </p:nvSpPr>
         <p:spPr>
           <a:xfrm>
-            <a:off x="7799832" y="4330598"/>
-            <a:ext cx="3145536" cy="256032"/>
+            <a:off x="7708392" y="4517136"/>
+            <a:ext cx="3282696" cy="228600"/>
           </a:xfrm>
           <a:prstGeom prst="rect">
             <a:avLst/>
@@ -8608,7 +8608,7 @@
               <a:buNone/>
             </a:pPr>
             <a:r>
-              <a:rPr lang="en-US" sz="1300" b="1" dirty="0">
+              <a:rPr lang="en-US" sz="1220" b="1" dirty="0">
                 <a:solidFill>
                   <a:srgbClr val="0068B7"/>
                 </a:solidFill>
@@ -8618,7 +8618,7 @@
               </a:rPr>
               <a:t>Next action</a:t>
             </a:r>
-            <a:endParaRPr lang="en-US" sz="1300" dirty="0"/>
+            <a:endParaRPr lang="en-US" sz="1220" dirty="0"/>
           </a:p>
         </p:txBody>
       </p:sp>
@@ -8630,8 +8630,8 @@
         </p:nvSpPr>
         <p:spPr>
           <a:xfrm>
-            <a:off x="7799832" y="4659782"/>
-            <a:ext cx="3145536" cy="899770"/>
+            <a:off x="7708392" y="4828032"/>
+            <a:ext cx="3282696" cy="749808"/>
           </a:xfrm>
           <a:prstGeom prst="rect">
             <a:avLst/>
@@ -8649,7 +8649,7 @@
               <a:buNone/>
             </a:pPr>
             <a:r>
-              <a:rPr lang="en-US" sz="1320" dirty="0">
+              <a:rPr lang="en-US" sz="1220" dirty="0">
                 <a:solidFill>
                   <a:srgbClr val="17364A"/>
                 </a:solidFill>
@@ -8657,9 +8657,9 @@
                 <a:ea typeface="Aptos" pitchFamily="34" charset="-122"/>
                 <a:cs typeface="Aptos" pitchFamily="34" charset="-120"/>
               </a:rPr>
-              <a:t>Use the concept to clarify workflow changes, dependencies, staffing, procurement requirements, training needs, and implementation checkpoints.</a:t>
-            </a:r>
-            <a:endParaRPr lang="en-US" sz="1320" dirty="0"/>
+              <a:t>Use the concept to clarify workflow changes, dependencies, staffing, procurement.</a:t>
+            </a:r>
+            <a:endParaRPr lang="en-US" sz="1220" dirty="0"/>
           </a:p>
         </p:txBody>
       </p:sp>
@@ -8950,8 +8950,8 @@
         </p:nvSpPr>
         <p:spPr>
           <a:xfrm>
-            <a:off x="868680" y="1508760"/>
-            <a:ext cx="6309360" cy="4160520"/>
+            <a:off x="822960" y="1463040"/>
+            <a:ext cx="6565392" cy="4343400"/>
           </a:xfrm>
           <a:prstGeom prst="rect">
             <a:avLst/>
@@ -8969,7 +8969,7 @@
               <a:buNone/>
             </a:pPr>
             <a:r>
-              <a:rPr lang="en-US" sz="2100" dirty="0">
+              <a:rPr lang="en-US" sz="1920" dirty="0">
                 <a:solidFill>
                   <a:srgbClr val="003A63"/>
                 </a:solidFill>
@@ -8979,14 +8979,14 @@
               </a:rPr>
               <a:t>• Launch readiness checklist</a:t>
             </a:r>
-            <a:endParaRPr lang="en-US" sz="2100" dirty="0"/>
-          </a:p>
-          <a:p>
-            <a:pPr indent="0" marL="0">
-              <a:buNone/>
-            </a:pPr>
-            <a:r>
-              <a:rPr lang="en-US" sz="2100" dirty="0">
+            <a:endParaRPr lang="en-US" sz="1920" dirty="0"/>
+          </a:p>
+          <a:p>
+            <a:pPr indent="0" marL="0">
+              <a:buNone/>
+            </a:pPr>
+            <a:r>
+              <a:rPr lang="en-US" sz="1920" dirty="0">
                 <a:solidFill>
                   <a:srgbClr val="003A63"/>
                 </a:solidFill>
@@ -8996,7 +8996,7 @@
               </a:rPr>
               <a:t>• Transition-to-operations plan</a:t>
             </a:r>
-            <a:endParaRPr lang="en-US" sz="2100" dirty="0"/>
+            <a:endParaRPr lang="en-US" sz="1920" dirty="0"/>
           </a:p>
         </p:txBody>
       </p:sp>
@@ -9008,12 +9008,12 @@
         </p:nvSpPr>
         <p:spPr>
           <a:xfrm>
-            <a:off x="7635240" y="1325880"/>
-            <a:ext cx="3474720" cy="1207008"/>
+            <a:off x="7543800" y="1325880"/>
+            <a:ext cx="3611880" cy="1261872"/>
           </a:xfrm>
           <a:prstGeom prst="roundRect">
             <a:avLst>
-              <a:gd name="adj" fmla="val 9091"/>
+              <a:gd name="adj" fmla="val 8696"/>
             </a:avLst>
           </a:prstGeom>
           <a:solidFill>
@@ -9035,8 +9035,8 @@
         </p:nvSpPr>
         <p:spPr>
           <a:xfrm>
-            <a:off x="7799832" y="1472184"/>
-            <a:ext cx="3145536" cy="256032"/>
+            <a:off x="7708392" y="1453896"/>
+            <a:ext cx="3282696" cy="228600"/>
           </a:xfrm>
           <a:prstGeom prst="rect">
             <a:avLst/>
@@ -9052,7 +9052,7 @@
               <a:buNone/>
             </a:pPr>
             <a:r>
-              <a:rPr lang="en-US" sz="1300" b="1" dirty="0">
+              <a:rPr lang="en-US" sz="1220" b="1" dirty="0">
                 <a:solidFill>
                   <a:srgbClr val="0068B7"/>
                 </a:solidFill>
@@ -9062,7 +9062,7 @@
               </a:rPr>
               <a:t>Implementation cue</a:t>
             </a:r>
-            <a:endParaRPr lang="en-US" sz="1300" dirty="0"/>
+            <a:endParaRPr lang="en-US" sz="1220" dirty="0"/>
           </a:p>
         </p:txBody>
       </p:sp>
@@ -9074,8 +9074,8 @@
         </p:nvSpPr>
         <p:spPr>
           <a:xfrm>
-            <a:off x="7799832" y="1801368"/>
-            <a:ext cx="3145536" cy="640080"/>
+            <a:off x="7708392" y="1764792"/>
+            <a:ext cx="3282696" cy="749808"/>
           </a:xfrm>
           <a:prstGeom prst="rect">
             <a:avLst/>
@@ -9093,7 +9093,7 @@
               <a:buNone/>
             </a:pPr>
             <a:r>
-              <a:rPr lang="en-US" sz="1320" dirty="0">
+              <a:rPr lang="en-US" sz="1220" dirty="0">
                 <a:solidFill>
                   <a:srgbClr val="17364A"/>
                 </a:solidFill>
@@ -9103,7 +9103,7 @@
               </a:rPr>
               <a:t>Launch readiness checklist</a:t>
             </a:r>
-            <a:endParaRPr lang="en-US" sz="1320" dirty="0"/>
+            <a:endParaRPr lang="en-US" sz="1220" dirty="0"/>
           </a:p>
         </p:txBody>
       </p:sp>
@@ -9115,12 +9115,12 @@
         </p:nvSpPr>
         <p:spPr>
           <a:xfrm>
-            <a:off x="7635240" y="2670048"/>
-            <a:ext cx="3474720" cy="1377086"/>
+            <a:off x="7543800" y="2724912"/>
+            <a:ext cx="3611880" cy="1527048"/>
           </a:xfrm>
           <a:prstGeom prst="roundRect">
             <a:avLst>
-              <a:gd name="adj" fmla="val 7968"/>
+              <a:gd name="adj" fmla="val 7186"/>
             </a:avLst>
           </a:prstGeom>
           <a:solidFill>
@@ -9142,8 +9142,8 @@
         </p:nvSpPr>
         <p:spPr>
           <a:xfrm>
-            <a:off x="7799832" y="2816352"/>
-            <a:ext cx="3145536" cy="256032"/>
+            <a:off x="7708392" y="2852928"/>
+            <a:ext cx="3282696" cy="228600"/>
           </a:xfrm>
           <a:prstGeom prst="rect">
             <a:avLst/>
@@ -9159,7 +9159,7 @@
               <a:buNone/>
             </a:pPr>
             <a:r>
-              <a:rPr lang="en-US" sz="1300" b="1" dirty="0">
+              <a:rPr lang="en-US" sz="1220" b="1" dirty="0">
                 <a:solidFill>
                   <a:srgbClr val="0068B7"/>
                 </a:solidFill>
@@ -9169,7 +9169,7 @@
               </a:rPr>
               <a:t>Concept checkpoints</a:t>
             </a:r>
-            <a:endParaRPr lang="en-US" sz="1300" dirty="0"/>
+            <a:endParaRPr lang="en-US" sz="1220" dirty="0"/>
           </a:p>
         </p:txBody>
       </p:sp>
@@ -9181,8 +9181,8 @@
         </p:nvSpPr>
         <p:spPr>
           <a:xfrm>
-            <a:off x="7818120" y="3182112"/>
-            <a:ext cx="3090672" cy="718718"/>
+            <a:off x="7726680" y="3182112"/>
+            <a:ext cx="3227832" cy="960120"/>
           </a:xfrm>
           <a:prstGeom prst="rect">
             <a:avLst/>
@@ -9200,7 +9200,7 @@
               <a:buNone/>
             </a:pPr>
             <a:r>
-              <a:rPr lang="en-US" sz="1220" dirty="0">
+              <a:rPr lang="en-US" sz="1140" dirty="0">
                 <a:solidFill>
                   <a:srgbClr val="17364A"/>
                 </a:solidFill>
@@ -9210,14 +9210,14 @@
               </a:rPr>
               <a:t>Launch readiness checklist</a:t>
             </a:r>
-            <a:endParaRPr lang="en-US" sz="1220" dirty="0"/>
-          </a:p>
-          <a:p>
-            <a:pPr indent="0" marL="0">
-              <a:buNone/>
-            </a:pPr>
-            <a:r>
-              <a:rPr lang="en-US" sz="1220" dirty="0">
+            <a:endParaRPr lang="en-US" sz="1140" dirty="0"/>
+          </a:p>
+          <a:p>
+            <a:pPr indent="0" marL="0">
+              <a:buNone/>
+            </a:pPr>
+            <a:r>
+              <a:rPr lang="en-US" sz="1140" dirty="0">
                 <a:solidFill>
                   <a:srgbClr val="17364A"/>
                 </a:solidFill>
@@ -9227,7 +9227,7 @@
               </a:rPr>
               <a:t>Transition-to-operations plan</a:t>
             </a:r>
-            <a:endParaRPr lang="en-US" sz="1220" dirty="0"/>
+            <a:endParaRPr lang="en-US" sz="1140" dirty="0"/>
           </a:p>
         </p:txBody>
       </p:sp>
@@ -9239,12 +9239,12 @@
         </p:nvSpPr>
         <p:spPr>
           <a:xfrm>
-            <a:off x="7635240" y="4184294"/>
-            <a:ext cx="3474720" cy="1466698"/>
+            <a:off x="7543800" y="4389120"/>
+            <a:ext cx="3611880" cy="1261872"/>
           </a:xfrm>
           <a:prstGeom prst="roundRect">
             <a:avLst>
-              <a:gd name="adj" fmla="val 7481"/>
+              <a:gd name="adj" fmla="val 8696"/>
             </a:avLst>
           </a:prstGeom>
           <a:solidFill>
@@ -9266,8 +9266,8 @@
         </p:nvSpPr>
         <p:spPr>
           <a:xfrm>
-            <a:off x="7799832" y="4330598"/>
-            <a:ext cx="3145536" cy="256032"/>
+            <a:off x="7708392" y="4517136"/>
+            <a:ext cx="3282696" cy="228600"/>
           </a:xfrm>
           <a:prstGeom prst="rect">
             <a:avLst/>
@@ -9283,7 +9283,7 @@
               <a:buNone/>
             </a:pPr>
             <a:r>
-              <a:rPr lang="en-US" sz="1300" b="1" dirty="0">
+              <a:rPr lang="en-US" sz="1220" b="1" dirty="0">
                 <a:solidFill>
                   <a:srgbClr val="0068B7"/>
                 </a:solidFill>
@@ -9293,7 +9293,7 @@
               </a:rPr>
               <a:t>Next action</a:t>
             </a:r>
-            <a:endParaRPr lang="en-US" sz="1300" dirty="0"/>
+            <a:endParaRPr lang="en-US" sz="1220" dirty="0"/>
           </a:p>
         </p:txBody>
       </p:sp>
@@ -9305,8 +9305,8 @@
         </p:nvSpPr>
         <p:spPr>
           <a:xfrm>
-            <a:off x="7799832" y="4659782"/>
-            <a:ext cx="3145536" cy="899770"/>
+            <a:off x="7708392" y="4828032"/>
+            <a:ext cx="3282696" cy="749808"/>
           </a:xfrm>
           <a:prstGeom prst="rect">
             <a:avLst/>
@@ -9324,7 +9324,7 @@
               <a:buNone/>
             </a:pPr>
             <a:r>
-              <a:rPr lang="en-US" sz="1320" dirty="0">
+              <a:rPr lang="en-US" sz="1220" dirty="0">
                 <a:solidFill>
                   <a:srgbClr val="17364A"/>
                 </a:solidFill>
@@ -9332,9 +9332,9 @@
                 <a:ea typeface="Aptos" pitchFamily="34" charset="-122"/>
                 <a:cs typeface="Aptos" pitchFamily="34" charset="-120"/>
               </a:rPr>
-              <a:t>Use the concept to clarify workflow changes, dependencies, staffing, procurement requirements, training needs, and implementation checkpoints.</a:t>
-            </a:r>
-            <a:endParaRPr lang="en-US" sz="1320" dirty="0"/>
+              <a:t>Use the concept to clarify workflow changes, dependencies, staffing, procurement.</a:t>
+            </a:r>
+            <a:endParaRPr lang="en-US" sz="1220" dirty="0"/>
           </a:p>
         </p:txBody>
       </p:sp>
@@ -9625,8 +9625,8 @@
         </p:nvSpPr>
         <p:spPr>
           <a:xfrm>
-            <a:off x="868680" y="1508760"/>
-            <a:ext cx="6309360" cy="4160520"/>
+            <a:off x="822960" y="1463040"/>
+            <a:ext cx="6565392" cy="4343400"/>
           </a:xfrm>
           <a:prstGeom prst="rect">
             <a:avLst/>
@@ -9644,7 +9644,7 @@
               <a:buNone/>
             </a:pPr>
             <a:r>
-              <a:rPr lang="en-US" sz="2100" dirty="0">
+              <a:rPr lang="en-US" sz="1920" dirty="0">
                 <a:solidFill>
                   <a:srgbClr val="003A63"/>
                 </a:solidFill>
@@ -9654,14 +9654,14 @@
               </a:rPr>
               <a:t>• AI project charter</a:t>
             </a:r>
-            <a:endParaRPr lang="en-US" sz="2100" dirty="0"/>
-          </a:p>
-          <a:p>
-            <a:pPr indent="0" marL="0">
-              <a:buNone/>
-            </a:pPr>
-            <a:r>
-              <a:rPr lang="en-US" sz="2100" dirty="0">
+            <a:endParaRPr lang="en-US" sz="1920" dirty="0"/>
+          </a:p>
+          <a:p>
+            <a:pPr indent="0" marL="0">
+              <a:buNone/>
+            </a:pPr>
+            <a:r>
+              <a:rPr lang="en-US" sz="1920" dirty="0">
                 <a:solidFill>
                   <a:srgbClr val="003A63"/>
                 </a:solidFill>
@@ -9671,14 +9671,14 @@
               </a:rPr>
               <a:t>• Implementation workplan</a:t>
             </a:r>
-            <a:endParaRPr lang="en-US" sz="2100" dirty="0"/>
-          </a:p>
-          <a:p>
-            <a:pPr indent="0" marL="0">
-              <a:buNone/>
-            </a:pPr>
-            <a:r>
-              <a:rPr lang="en-US" sz="2100" dirty="0">
+            <a:endParaRPr lang="en-US" sz="1920" dirty="0"/>
+          </a:p>
+          <a:p>
+            <a:pPr indent="0" marL="0">
+              <a:buNone/>
+            </a:pPr>
+            <a:r>
+              <a:rPr lang="en-US" sz="1920" dirty="0">
                 <a:solidFill>
                   <a:srgbClr val="003A63"/>
                 </a:solidFill>
@@ -9688,7 +9688,7 @@
               </a:rPr>
               <a:t>• AI-specific risk log</a:t>
             </a:r>
-            <a:endParaRPr lang="en-US" sz="2100" dirty="0"/>
+            <a:endParaRPr lang="en-US" sz="1920" dirty="0"/>
           </a:p>
         </p:txBody>
       </p:sp>
@@ -9700,12 +9700,12 @@
         </p:nvSpPr>
         <p:spPr>
           <a:xfrm>
-            <a:off x="7635240" y="1325880"/>
-            <a:ext cx="3474720" cy="1207008"/>
+            <a:off x="7543800" y="1325880"/>
+            <a:ext cx="3611880" cy="1261872"/>
           </a:xfrm>
           <a:prstGeom prst="roundRect">
             <a:avLst>
-              <a:gd name="adj" fmla="val 9091"/>
+              <a:gd name="adj" fmla="val 8696"/>
             </a:avLst>
           </a:prstGeom>
           <a:solidFill>
@@ -9727,8 +9727,8 @@
         </p:nvSpPr>
         <p:spPr>
           <a:xfrm>
-            <a:off x="7799832" y="1472184"/>
-            <a:ext cx="3145536" cy="256032"/>
+            <a:off x="7708392" y="1453896"/>
+            <a:ext cx="3282696" cy="228600"/>
           </a:xfrm>
           <a:prstGeom prst="rect">
             <a:avLst/>
@@ -9744,7 +9744,7 @@
               <a:buNone/>
             </a:pPr>
             <a:r>
-              <a:rPr lang="en-US" sz="1300" b="1" dirty="0">
+              <a:rPr lang="en-US" sz="1220" b="1" dirty="0">
                 <a:solidFill>
                   <a:srgbClr val="0068B7"/>
                 </a:solidFill>
@@ -9754,7 +9754,7 @@
               </a:rPr>
               <a:t>Implementation cue</a:t>
             </a:r>
-            <a:endParaRPr lang="en-US" sz="1300" dirty="0"/>
+            <a:endParaRPr lang="en-US" sz="1220" dirty="0"/>
           </a:p>
         </p:txBody>
       </p:sp>
@@ -9766,8 +9766,8 @@
         </p:nvSpPr>
         <p:spPr>
           <a:xfrm>
-            <a:off x="7799832" y="1801368"/>
-            <a:ext cx="3145536" cy="640080"/>
+            <a:off x="7708392" y="1764792"/>
+            <a:ext cx="3282696" cy="749808"/>
           </a:xfrm>
           <a:prstGeom prst="rect">
             <a:avLst/>
@@ -9785,7 +9785,7 @@
               <a:buNone/>
             </a:pPr>
             <a:r>
-              <a:rPr lang="en-US" sz="1320" dirty="0">
+              <a:rPr lang="en-US" sz="1220" dirty="0">
                 <a:solidFill>
                   <a:srgbClr val="17364A"/>
                 </a:solidFill>
@@ -9795,7 +9795,7 @@
               </a:rPr>
               <a:t>AI project charter</a:t>
             </a:r>
-            <a:endParaRPr lang="en-US" sz="1320" dirty="0"/>
+            <a:endParaRPr lang="en-US" sz="1220" dirty="0"/>
           </a:p>
         </p:txBody>
       </p:sp>
@@ -9807,12 +9807,12 @@
         </p:nvSpPr>
         <p:spPr>
           <a:xfrm>
-            <a:off x="7635240" y="2670048"/>
-            <a:ext cx="3474720" cy="1377086"/>
+            <a:off x="7543800" y="2724912"/>
+            <a:ext cx="3611880" cy="1527048"/>
           </a:xfrm>
           <a:prstGeom prst="roundRect">
             <a:avLst>
-              <a:gd name="adj" fmla="val 7968"/>
+              <a:gd name="adj" fmla="val 7186"/>
             </a:avLst>
           </a:prstGeom>
           <a:solidFill>
@@ -9834,8 +9834,8 @@
         </p:nvSpPr>
         <p:spPr>
           <a:xfrm>
-            <a:off x="7799832" y="2816352"/>
-            <a:ext cx="3145536" cy="256032"/>
+            <a:off x="7708392" y="2852928"/>
+            <a:ext cx="3282696" cy="228600"/>
           </a:xfrm>
           <a:prstGeom prst="rect">
             <a:avLst/>
@@ -9851,7 +9851,7 @@
               <a:buNone/>
             </a:pPr>
             <a:r>
-              <a:rPr lang="en-US" sz="1300" b="1" dirty="0">
+              <a:rPr lang="en-US" sz="1220" b="1" dirty="0">
                 <a:solidFill>
                   <a:srgbClr val="0068B7"/>
                 </a:solidFill>
@@ -9861,7 +9861,7 @@
               </a:rPr>
               <a:t>Concept checkpoints</a:t>
             </a:r>
-            <a:endParaRPr lang="en-US" sz="1300" dirty="0"/>
+            <a:endParaRPr lang="en-US" sz="1220" dirty="0"/>
           </a:p>
         </p:txBody>
       </p:sp>
@@ -9873,8 +9873,8 @@
         </p:nvSpPr>
         <p:spPr>
           <a:xfrm>
-            <a:off x="7818120" y="3182112"/>
-            <a:ext cx="3090672" cy="718718"/>
+            <a:off x="7726680" y="3182112"/>
+            <a:ext cx="3227832" cy="960120"/>
           </a:xfrm>
           <a:prstGeom prst="rect">
             <a:avLst/>
@@ -9892,7 +9892,7 @@
               <a:buNone/>
             </a:pPr>
             <a:r>
-              <a:rPr lang="en-US" sz="1220" dirty="0">
+              <a:rPr lang="en-US" sz="1140" dirty="0">
                 <a:solidFill>
                   <a:srgbClr val="17364A"/>
                 </a:solidFill>
@@ -9902,14 +9902,14 @@
               </a:rPr>
               <a:t>Launch readiness checklist</a:t>
             </a:r>
-            <a:endParaRPr lang="en-US" sz="1220" dirty="0"/>
-          </a:p>
-          <a:p>
-            <a:pPr indent="0" marL="0">
-              <a:buNone/>
-            </a:pPr>
-            <a:r>
-              <a:rPr lang="en-US" sz="1220" dirty="0">
+            <a:endParaRPr lang="en-US" sz="1140" dirty="0"/>
+          </a:p>
+          <a:p>
+            <a:pPr indent="0" marL="0">
+              <a:buNone/>
+            </a:pPr>
+            <a:r>
+              <a:rPr lang="en-US" sz="1140" dirty="0">
                 <a:solidFill>
                   <a:srgbClr val="17364A"/>
                 </a:solidFill>
@@ -9919,7 +9919,7 @@
               </a:rPr>
               <a:t>Transition-to-operations plan</a:t>
             </a:r>
-            <a:endParaRPr lang="en-US" sz="1220" dirty="0"/>
+            <a:endParaRPr lang="en-US" sz="1140" dirty="0"/>
           </a:p>
         </p:txBody>
       </p:sp>
@@ -9931,12 +9931,12 @@
         </p:nvSpPr>
         <p:spPr>
           <a:xfrm>
-            <a:off x="7635240" y="4184294"/>
-            <a:ext cx="3474720" cy="1466698"/>
+            <a:off x="7543800" y="4389120"/>
+            <a:ext cx="3611880" cy="1261872"/>
           </a:xfrm>
           <a:prstGeom prst="roundRect">
             <a:avLst>
-              <a:gd name="adj" fmla="val 7481"/>
+              <a:gd name="adj" fmla="val 8696"/>
             </a:avLst>
           </a:prstGeom>
           <a:solidFill>
@@ -9958,8 +9958,8 @@
         </p:nvSpPr>
         <p:spPr>
           <a:xfrm>
-            <a:off x="7799832" y="4330598"/>
-            <a:ext cx="3145536" cy="256032"/>
+            <a:off x="7708392" y="4517136"/>
+            <a:ext cx="3282696" cy="228600"/>
           </a:xfrm>
           <a:prstGeom prst="rect">
             <a:avLst/>
@@ -9975,7 +9975,7 @@
               <a:buNone/>
             </a:pPr>
             <a:r>
-              <a:rPr lang="en-US" sz="1300" b="1" dirty="0">
+              <a:rPr lang="en-US" sz="1220" b="1" dirty="0">
                 <a:solidFill>
                   <a:srgbClr val="0068B7"/>
                 </a:solidFill>
@@ -9985,7 +9985,7 @@
               </a:rPr>
               <a:t>Next action</a:t>
             </a:r>
-            <a:endParaRPr lang="en-US" sz="1300" dirty="0"/>
+            <a:endParaRPr lang="en-US" sz="1220" dirty="0"/>
           </a:p>
         </p:txBody>
       </p:sp>
@@ -9997,8 +9997,8 @@
         </p:nvSpPr>
         <p:spPr>
           <a:xfrm>
-            <a:off x="7799832" y="4659782"/>
-            <a:ext cx="3145536" cy="899770"/>
+            <a:off x="7708392" y="4828032"/>
+            <a:ext cx="3282696" cy="749808"/>
           </a:xfrm>
           <a:prstGeom prst="rect">
             <a:avLst/>
@@ -10016,7 +10016,7 @@
               <a:buNone/>
             </a:pPr>
             <a:r>
-              <a:rPr lang="en-US" sz="1320" dirty="0">
+              <a:rPr lang="en-US" sz="1220" dirty="0">
                 <a:solidFill>
                   <a:srgbClr val="17364A"/>
                 </a:solidFill>
@@ -10024,9 +10024,9 @@
                 <a:ea typeface="Aptos" pitchFamily="34" charset="-122"/>
                 <a:cs typeface="Aptos" pitchFamily="34" charset="-120"/>
               </a:rPr>
-              <a:t>Use the assignment to test whether you can explain the concept, apply it to a realistic public health situation, and identify what would need review before the work moves forward.</a:t>
-            </a:r>
-            <a:endParaRPr lang="en-US" sz="1320" dirty="0"/>
+              <a:t>Use the assignment to test whether you can explain the concept, apply it to a.</a:t>
+            </a:r>
+            <a:endParaRPr lang="en-US" sz="1220" dirty="0"/>
           </a:p>
         </p:txBody>
       </p:sp>
@@ -10344,7 +10344,7 @@
                 <a:ea typeface="Aptos" pitchFamily="34" charset="-122"/>
                 <a:cs typeface="Aptos" pitchFamily="34" charset="-120"/>
               </a:rPr>
-              <a:t>• AI projects require disciplined implementation planning because they combine technology, data,.</a:t>
+              <a:t>• AI projects require disciplined implementation planning because they combine.</a:t>
             </a:r>
             <a:endParaRPr lang="en-US" sz="2100" dirty="0"/>
           </a:p>
@@ -10361,7 +10361,7 @@
                 <a:ea typeface="Aptos" pitchFamily="34" charset="-122"/>
                 <a:cs typeface="Aptos" pitchFamily="34" charset="-120"/>
               </a:rPr>
-              <a:t>• A project that appears small, such as adding an AI summarization tool, may still require data.</a:t>
+              <a:t>• A project that appears small, such as adding an AI summarization tool, may.</a:t>
             </a:r>
             <a:endParaRPr lang="en-US" sz="2100" dirty="0"/>
           </a:p>
@@ -10378,7 +10378,7 @@
                 <a:ea typeface="Aptos" pitchFamily="34" charset="-122"/>
                 <a:cs typeface="Aptos" pitchFamily="34" charset="-120"/>
               </a:rPr>
-              <a:t>• Public health agencies need project management methods that account for these dependencies.</a:t>
+              <a:t>• Public health agencies need project management methods that account for.</a:t>
             </a:r>
             <a:endParaRPr lang="en-US" sz="2100" dirty="0"/>
           </a:p>
@@ -10419,8 +10419,8 @@
         </p:nvSpPr>
         <p:spPr>
           <a:xfrm>
-            <a:off x="8074152" y="1563624"/>
-            <a:ext cx="2825496" cy="256032"/>
+            <a:off x="8074152" y="1545336"/>
+            <a:ext cx="2825496" cy="228600"/>
           </a:xfrm>
           <a:prstGeom prst="rect">
             <a:avLst/>
@@ -10436,7 +10436,7 @@
               <a:buNone/>
             </a:pPr>
             <a:r>
-              <a:rPr lang="en-US" sz="1300" b="1" dirty="0">
+              <a:rPr lang="en-US" sz="1220" b="1" dirty="0">
                 <a:solidFill>
                   <a:srgbClr val="0068B7"/>
                 </a:solidFill>
@@ -10446,7 +10446,7 @@
               </a:rPr>
               <a:t>Module details</a:t>
             </a:r>
-            <a:endParaRPr lang="en-US" sz="1300" dirty="0"/>
+            <a:endParaRPr lang="en-US" sz="1220" dirty="0"/>
           </a:p>
         </p:txBody>
       </p:sp>
@@ -10458,8 +10458,8 @@
         </p:nvSpPr>
         <p:spPr>
           <a:xfrm>
-            <a:off x="8074152" y="1892808"/>
-            <a:ext cx="2825496" cy="1353312"/>
+            <a:off x="8074152" y="1856232"/>
+            <a:ext cx="2825496" cy="1408176"/>
           </a:xfrm>
           <a:prstGeom prst="rect">
             <a:avLst/>
@@ -10477,7 +10477,7 @@
               <a:buNone/>
             </a:pPr>
             <a:r>
-              <a:rPr lang="en-US" sz="1320" dirty="0">
+              <a:rPr lang="en-US" sz="1220" dirty="0">
                 <a:solidFill>
                   <a:srgbClr val="17364A"/>
                 </a:solidFill>
@@ -10485,9 +10485,9 @@
                 <a:ea typeface="Aptos" pitchFamily="34" charset="-122"/>
                 <a:cs typeface="Aptos" pitchFamily="34" charset="-120"/>
               </a:rPr>
-              <a:t>Level: applied/foundational Primary track: Program Management Role-Based Track Appears in tracks: program-management, operations-and-data-quality, technical-architecture, public-health-executive-leadership</a:t>
-            </a:r>
-            <a:endParaRPr lang="en-US" sz="1320" dirty="0"/>
+              <a:t>Level: applied/foundational Primary track: Program Management Role-Based Track.</a:t>
+            </a:r>
+            <a:endParaRPr lang="en-US" sz="1220" dirty="0"/>
           </a:p>
         </p:txBody>
       </p:sp>
@@ -10526,8 +10526,8 @@
         </p:nvSpPr>
         <p:spPr>
           <a:xfrm>
-            <a:off x="8074152" y="3822192"/>
-            <a:ext cx="2825496" cy="256032"/>
+            <a:off x="8074152" y="3803904"/>
+            <a:ext cx="2825496" cy="228600"/>
           </a:xfrm>
           <a:prstGeom prst="rect">
             <a:avLst/>
@@ -10543,7 +10543,7 @@
               <a:buNone/>
             </a:pPr>
             <a:r>
-              <a:rPr lang="en-US" sz="1300" b="1" dirty="0">
+              <a:rPr lang="en-US" sz="1220" b="1" dirty="0">
                 <a:solidFill>
                   <a:srgbClr val="0068B7"/>
                 </a:solidFill>
@@ -10553,7 +10553,7 @@
               </a:rPr>
               <a:t>Learning sequence</a:t>
             </a:r>
-            <a:endParaRPr lang="en-US" sz="1300" dirty="0"/>
+            <a:endParaRPr lang="en-US" sz="1220" dirty="0"/>
           </a:p>
         </p:txBody>
       </p:sp>
@@ -10565,8 +10565,8 @@
         </p:nvSpPr>
         <p:spPr>
           <a:xfrm>
-            <a:off x="8092440" y="4187952"/>
-            <a:ext cx="2770632" cy="1033272"/>
+            <a:off x="8092440" y="4133088"/>
+            <a:ext cx="2770632" cy="1124712"/>
           </a:xfrm>
           <a:prstGeom prst="rect">
             <a:avLst/>
@@ -10584,7 +10584,7 @@
               <a:buNone/>
             </a:pPr>
             <a:r>
-              <a:rPr lang="en-US" sz="1220" dirty="0">
+              <a:rPr lang="en-US" sz="1140" dirty="0">
                 <a:solidFill>
                   <a:srgbClr val="17364A"/>
                 </a:solidFill>
@@ -10594,14 +10594,14 @@
               </a:rPr>
               <a:t>Read the module for shared vocabulary and context.</a:t>
             </a:r>
-            <a:endParaRPr lang="en-US" sz="1220" dirty="0"/>
-          </a:p>
-          <a:p>
-            <a:pPr indent="0" marL="0">
-              <a:buNone/>
-            </a:pPr>
-            <a:r>
-              <a:rPr lang="en-US" sz="1220" dirty="0">
+            <a:endParaRPr lang="en-US" sz="1140" dirty="0"/>
+          </a:p>
+          <a:p>
+            <a:pPr indent="0" marL="0">
+              <a:buNone/>
+            </a:pPr>
+            <a:r>
+              <a:rPr lang="en-US" sz="1140" dirty="0">
                 <a:solidFill>
                   <a:srgbClr val="17364A"/>
                 </a:solidFill>
@@ -10609,16 +10609,16 @@
                 <a:ea typeface="Aptos" pitchFamily="34" charset="-122"/>
                 <a:cs typeface="Aptos" pitchFamily="34" charset="-120"/>
               </a:rPr>
-              <a:t>Complete the practical exercise to apply the concept.</a:t>
-            </a:r>
-            <a:endParaRPr lang="en-US" sz="1220" dirty="0"/>
-          </a:p>
-          <a:p>
-            <a:pPr indent="0" marL="0">
-              <a:buNone/>
-            </a:pPr>
-            <a:r>
-              <a:rPr lang="en-US" sz="1220" dirty="0">
+              <a:t>Complete the practical exercise to apply the.</a:t>
+            </a:r>
+            <a:endParaRPr lang="en-US" sz="1140" dirty="0"/>
+          </a:p>
+          <a:p>
+            <a:pPr indent="0" marL="0">
+              <a:buNone/>
+            </a:pPr>
+            <a:r>
+              <a:rPr lang="en-US" sz="1140" dirty="0">
                 <a:solidFill>
                   <a:srgbClr val="17364A"/>
                 </a:solidFill>
@@ -10628,7 +10628,7 @@
               </a:rPr>
               <a:t>Use the notes and references for deeper review.</a:t>
             </a:r>
-            <a:endParaRPr lang="en-US" sz="1220" dirty="0"/>
+            <a:endParaRPr lang="en-US" sz="1140" dirty="0"/>
           </a:p>
         </p:txBody>
       </p:sp>
@@ -10919,8 +10919,8 @@
         </p:nvSpPr>
         <p:spPr>
           <a:xfrm>
-            <a:off x="868680" y="1508760"/>
-            <a:ext cx="6309360" cy="4160520"/>
+            <a:off x="822960" y="1463040"/>
+            <a:ext cx="6565392" cy="4343400"/>
           </a:xfrm>
           <a:prstGeom prst="rect">
             <a:avLst/>
@@ -10938,7 +10938,7 @@
               <a:buNone/>
             </a:pPr>
             <a:r>
-              <a:rPr lang="en-US" sz="2100" dirty="0">
+              <a:rPr lang="en-US" sz="1920" dirty="0">
                 <a:solidFill>
                   <a:srgbClr val="003A63"/>
                 </a:solidFill>
@@ -10946,16 +10946,16 @@
                 <a:ea typeface="Aptos" pitchFamily="34" charset="-122"/>
                 <a:cs typeface="Aptos" pitchFamily="34" charset="-120"/>
               </a:rPr>
-              <a:t>• 1. What distinguishes AI project management from ordinary software implementation?</a:t>
-            </a:r>
-            <a:endParaRPr lang="en-US" sz="2100" dirty="0"/>
-          </a:p>
-          <a:p>
-            <a:pPr indent="0" marL="0">
-              <a:buNone/>
-            </a:pPr>
-            <a:r>
-              <a:rPr lang="en-US" sz="2100" dirty="0">
+              <a:t>• 1. What distinguishes AI project management from ordinary software.</a:t>
+            </a:r>
+            <a:endParaRPr lang="en-US" sz="1920" dirty="0"/>
+          </a:p>
+          <a:p>
+            <a:pPr indent="0" marL="0">
+              <a:buNone/>
+            </a:pPr>
+            <a:r>
+              <a:rPr lang="en-US" sz="1920" dirty="0">
                 <a:solidFill>
                   <a:srgbClr val="003A63"/>
                 </a:solidFill>
@@ -10965,14 +10965,14 @@
               </a:rPr>
               <a:t>• 2. What is a governance gate?</a:t>
             </a:r>
-            <a:endParaRPr lang="en-US" sz="2100" dirty="0"/>
-          </a:p>
-          <a:p>
-            <a:pPr indent="0" marL="0">
-              <a:buNone/>
-            </a:pPr>
-            <a:r>
-              <a:rPr lang="en-US" sz="2100" dirty="0">
+            <a:endParaRPr lang="en-US" sz="1920" dirty="0"/>
+          </a:p>
+          <a:p>
+            <a:pPr indent="0" marL="0">
+              <a:buNone/>
+            </a:pPr>
+            <a:r>
+              <a:rPr lang="en-US" sz="1920" dirty="0">
                 <a:solidFill>
                   <a:srgbClr val="003A63"/>
                 </a:solidFill>
@@ -10982,7 +10982,7 @@
               </a:rPr>
               <a:t>• 3. Which item belongs in an AI project charter?</a:t>
             </a:r>
-            <a:endParaRPr lang="en-US" sz="2100" dirty="0"/>
+            <a:endParaRPr lang="en-US" sz="1920" dirty="0"/>
           </a:p>
         </p:txBody>
       </p:sp>
@@ -10994,12 +10994,12 @@
         </p:nvSpPr>
         <p:spPr>
           <a:xfrm>
-            <a:off x="7635240" y="1325880"/>
-            <a:ext cx="3474720" cy="1207008"/>
+            <a:off x="7543800" y="1325880"/>
+            <a:ext cx="3611880" cy="1261872"/>
           </a:xfrm>
           <a:prstGeom prst="roundRect">
             <a:avLst>
-              <a:gd name="adj" fmla="val 9091"/>
+              <a:gd name="adj" fmla="val 8696"/>
             </a:avLst>
           </a:prstGeom>
           <a:solidFill>
@@ -11021,8 +11021,8 @@
         </p:nvSpPr>
         <p:spPr>
           <a:xfrm>
-            <a:off x="7799832" y="1472184"/>
-            <a:ext cx="3145536" cy="256032"/>
+            <a:off x="7708392" y="1453896"/>
+            <a:ext cx="3282696" cy="228600"/>
           </a:xfrm>
           <a:prstGeom prst="rect">
             <a:avLst/>
@@ -11038,7 +11038,7 @@
               <a:buNone/>
             </a:pPr>
             <a:r>
-              <a:rPr lang="en-US" sz="1300" b="1" dirty="0">
+              <a:rPr lang="en-US" sz="1220" b="1" dirty="0">
                 <a:solidFill>
                   <a:srgbClr val="0068B7"/>
                 </a:solidFill>
@@ -11048,7 +11048,7 @@
               </a:rPr>
               <a:t>Implementation cue</a:t>
             </a:r>
-            <a:endParaRPr lang="en-US" sz="1300" dirty="0"/>
+            <a:endParaRPr lang="en-US" sz="1220" dirty="0"/>
           </a:p>
         </p:txBody>
       </p:sp>
@@ -11060,8 +11060,8 @@
         </p:nvSpPr>
         <p:spPr>
           <a:xfrm>
-            <a:off x="7799832" y="1801368"/>
-            <a:ext cx="3145536" cy="640080"/>
+            <a:off x="7708392" y="1764792"/>
+            <a:ext cx="3282696" cy="749808"/>
           </a:xfrm>
           <a:prstGeom prst="rect">
             <a:avLst/>
@@ -11079,7 +11079,7 @@
               <a:buNone/>
             </a:pPr>
             <a:r>
-              <a:rPr lang="en-US" sz="1320" dirty="0">
+              <a:rPr lang="en-US" sz="1220" dirty="0">
                 <a:solidFill>
                   <a:srgbClr val="17364A"/>
                 </a:solidFill>
@@ -11089,7 +11089,7 @@
               </a:rPr>
               <a:t>1. What distinguishes AI project management from ordinary software implementation?</a:t>
             </a:r>
-            <a:endParaRPr lang="en-US" sz="1320" dirty="0"/>
+            <a:endParaRPr lang="en-US" sz="1220" dirty="0"/>
           </a:p>
         </p:txBody>
       </p:sp>
@@ -11101,12 +11101,12 @@
         </p:nvSpPr>
         <p:spPr>
           <a:xfrm>
-            <a:off x="7635240" y="2670048"/>
-            <a:ext cx="3474720" cy="1377086"/>
+            <a:off x="7543800" y="2724912"/>
+            <a:ext cx="3611880" cy="1527048"/>
           </a:xfrm>
           <a:prstGeom prst="roundRect">
             <a:avLst>
-              <a:gd name="adj" fmla="val 7968"/>
+              <a:gd name="adj" fmla="val 7186"/>
             </a:avLst>
           </a:prstGeom>
           <a:solidFill>
@@ -11128,8 +11128,8 @@
         </p:nvSpPr>
         <p:spPr>
           <a:xfrm>
-            <a:off x="7799832" y="2816352"/>
-            <a:ext cx="3145536" cy="256032"/>
+            <a:off x="7708392" y="2852928"/>
+            <a:ext cx="3282696" cy="228600"/>
           </a:xfrm>
           <a:prstGeom prst="rect">
             <a:avLst/>
@@ -11145,7 +11145,7 @@
               <a:buNone/>
             </a:pPr>
             <a:r>
-              <a:rPr lang="en-US" sz="1300" b="1" dirty="0">
+              <a:rPr lang="en-US" sz="1220" b="1" dirty="0">
                 <a:solidFill>
                   <a:srgbClr val="0068B7"/>
                 </a:solidFill>
@@ -11155,7 +11155,7 @@
               </a:rPr>
               <a:t>Concept checkpoints</a:t>
             </a:r>
-            <a:endParaRPr lang="en-US" sz="1300" dirty="0"/>
+            <a:endParaRPr lang="en-US" sz="1220" dirty="0"/>
           </a:p>
         </p:txBody>
       </p:sp>
@@ -11167,8 +11167,8 @@
         </p:nvSpPr>
         <p:spPr>
           <a:xfrm>
-            <a:off x="7818120" y="3182112"/>
-            <a:ext cx="3090672" cy="718718"/>
+            <a:off x="7726680" y="3182112"/>
+            <a:ext cx="3227832" cy="960120"/>
           </a:xfrm>
           <a:prstGeom prst="rect">
             <a:avLst/>
@@ -11186,7 +11186,7 @@
               <a:buNone/>
             </a:pPr>
             <a:r>
-              <a:rPr lang="en-US" sz="1220" dirty="0">
+              <a:rPr lang="en-US" sz="1140" dirty="0">
                 <a:solidFill>
                   <a:srgbClr val="17364A"/>
                 </a:solidFill>
@@ -11196,14 +11196,14 @@
               </a:rPr>
               <a:t>1.</a:t>
             </a:r>
-            <a:endParaRPr lang="en-US" sz="1220" dirty="0"/>
-          </a:p>
-          <a:p>
-            <a:pPr indent="0" marL="0">
-              <a:buNone/>
-            </a:pPr>
-            <a:r>
-              <a:rPr lang="en-US" sz="1220" dirty="0">
+            <a:endParaRPr lang="en-US" sz="1140" dirty="0"/>
+          </a:p>
+          <a:p>
+            <a:pPr indent="0" marL="0">
+              <a:buNone/>
+            </a:pPr>
+            <a:r>
+              <a:rPr lang="en-US" sz="1140" dirty="0">
                 <a:solidFill>
                   <a:srgbClr val="17364A"/>
                 </a:solidFill>
@@ -11211,16 +11211,16 @@
                 <a:ea typeface="Aptos" pitchFamily="34" charset="-122"/>
                 <a:cs typeface="Aptos" pitchFamily="34" charset="-120"/>
               </a:rPr>
-              <a:t>What distinguishes AI project management from ordinary software.</a:t>
-            </a:r>
-            <a:endParaRPr lang="en-US" sz="1220" dirty="0"/>
-          </a:p>
-          <a:p>
-            <a:pPr indent="0" marL="0">
-              <a:buNone/>
-            </a:pPr>
-            <a:r>
-              <a:rPr lang="en-US" sz="1220" dirty="0">
+              <a:t>What distinguishes AI project management from.</a:t>
+            </a:r>
+            <a:endParaRPr lang="en-US" sz="1140" dirty="0"/>
+          </a:p>
+          <a:p>
+            <a:pPr indent="0" marL="0">
+              <a:buNone/>
+            </a:pPr>
+            <a:r>
+              <a:rPr lang="en-US" sz="1140" dirty="0">
                 <a:solidFill>
                   <a:srgbClr val="17364A"/>
                 </a:solidFill>
@@ -11230,7 +11230,7 @@
               </a:rPr>
               <a:t>2.</a:t>
             </a:r>
-            <a:endParaRPr lang="en-US" sz="1220" dirty="0"/>
+            <a:endParaRPr lang="en-US" sz="1140" dirty="0"/>
           </a:p>
         </p:txBody>
       </p:sp>
@@ -11242,12 +11242,12 @@
         </p:nvSpPr>
         <p:spPr>
           <a:xfrm>
-            <a:off x="7635240" y="4184294"/>
-            <a:ext cx="3474720" cy="1466698"/>
+            <a:off x="7543800" y="4389120"/>
+            <a:ext cx="3611880" cy="1261872"/>
           </a:xfrm>
           <a:prstGeom prst="roundRect">
             <a:avLst>
-              <a:gd name="adj" fmla="val 7481"/>
+              <a:gd name="adj" fmla="val 8696"/>
             </a:avLst>
           </a:prstGeom>
           <a:solidFill>
@@ -11269,8 +11269,8 @@
         </p:nvSpPr>
         <p:spPr>
           <a:xfrm>
-            <a:off x="7799832" y="4330598"/>
-            <a:ext cx="3145536" cy="256032"/>
+            <a:off x="7708392" y="4517136"/>
+            <a:ext cx="3282696" cy="228600"/>
           </a:xfrm>
           <a:prstGeom prst="rect">
             <a:avLst/>
@@ -11286,7 +11286,7 @@
               <a:buNone/>
             </a:pPr>
             <a:r>
-              <a:rPr lang="en-US" sz="1300" b="1" dirty="0">
+              <a:rPr lang="en-US" sz="1220" b="1" dirty="0">
                 <a:solidFill>
                   <a:srgbClr val="0068B7"/>
                 </a:solidFill>
@@ -11296,7 +11296,7 @@
               </a:rPr>
               <a:t>Next action</a:t>
             </a:r>
-            <a:endParaRPr lang="en-US" sz="1300" dirty="0"/>
+            <a:endParaRPr lang="en-US" sz="1220" dirty="0"/>
           </a:p>
         </p:txBody>
       </p:sp>
@@ -11308,8 +11308,8 @@
         </p:nvSpPr>
         <p:spPr>
           <a:xfrm>
-            <a:off x="7799832" y="4659782"/>
-            <a:ext cx="3145536" cy="899770"/>
+            <a:off x="7708392" y="4828032"/>
+            <a:ext cx="3282696" cy="749808"/>
           </a:xfrm>
           <a:prstGeom prst="rect">
             <a:avLst/>
@@ -11327,7 +11327,7 @@
               <a:buNone/>
             </a:pPr>
             <a:r>
-              <a:rPr lang="en-US" sz="1320" dirty="0">
+              <a:rPr lang="en-US" sz="1220" dirty="0">
                 <a:solidFill>
                   <a:srgbClr val="17364A"/>
                 </a:solidFill>
@@ -11335,9 +11335,9 @@
                 <a:ea typeface="Aptos" pitchFamily="34" charset="-122"/>
                 <a:cs typeface="Aptos" pitchFamily="34" charset="-120"/>
               </a:rPr>
-              <a:t>Use the assignment to test whether you can explain the concept, apply it to a realistic public health situation, and identify what would need review before the work moves forward.</a:t>
-            </a:r>
-            <a:endParaRPr lang="en-US" sz="1320" dirty="0"/>
+              <a:t>Use the assignment to test whether you can explain the concept, apply it to a.</a:t>
+            </a:r>
+            <a:endParaRPr lang="en-US" sz="1220" dirty="0"/>
           </a:p>
         </p:txBody>
       </p:sp>
@@ -11628,8 +11628,8 @@
         </p:nvSpPr>
         <p:spPr>
           <a:xfrm>
-            <a:off x="868680" y="1508760"/>
-            <a:ext cx="6309360" cy="4160520"/>
+            <a:off x="822960" y="1463040"/>
+            <a:ext cx="6565392" cy="4343400"/>
           </a:xfrm>
           <a:prstGeom prst="rect">
             <a:avLst/>
@@ -11647,7 +11647,7 @@
               <a:buNone/>
             </a:pPr>
             <a:r>
-              <a:rPr lang="en-US" sz="2100" dirty="0">
+              <a:rPr lang="en-US" sz="1920" dirty="0">
                 <a:solidFill>
                   <a:srgbClr val="003A63"/>
                 </a:solidFill>
@@ -11657,14 +11657,14 @@
               </a:rPr>
               <a:t>• NIST Artificial Intelligence Risk Management Framework:.</a:t>
             </a:r>
-            <a:endParaRPr lang="en-US" sz="2100" dirty="0"/>
-          </a:p>
-          <a:p>
-            <a:pPr indent="0" marL="0">
-              <a:buNone/>
-            </a:pPr>
-            <a:r>
-              <a:rPr lang="en-US" sz="2100" dirty="0">
+            <a:endParaRPr lang="en-US" sz="1920" dirty="0"/>
+          </a:p>
+          <a:p>
+            <a:pPr indent="0" marL="0">
+              <a:buNone/>
+            </a:pPr>
+            <a:r>
+              <a:rPr lang="en-US" sz="1920" dirty="0">
                 <a:solidFill>
                   <a:srgbClr val="003A63"/>
                 </a:solidFill>
@@ -11674,14 +11674,14 @@
               </a:rPr>
               <a:t>• NIST Generative AI Profile:.</a:t>
             </a:r>
-            <a:endParaRPr lang="en-US" sz="2100" dirty="0"/>
-          </a:p>
-          <a:p>
-            <a:pPr indent="0" marL="0">
-              <a:buNone/>
-            </a:pPr>
-            <a:r>
-              <a:rPr lang="en-US" sz="2100" dirty="0">
+            <a:endParaRPr lang="en-US" sz="1920" dirty="0"/>
+          </a:p>
+          <a:p>
+            <a:pPr indent="0" marL="0">
+              <a:buNone/>
+            </a:pPr>
+            <a:r>
+              <a:rPr lang="en-US" sz="1920" dirty="0">
                 <a:solidFill>
                   <a:srgbClr val="003A63"/>
                 </a:solidFill>
@@ -11691,7 +11691,7 @@
               </a:rPr>
               <a:t>• CDC Public Health Data Strategy and Data Modernization resources:.</a:t>
             </a:r>
-            <a:endParaRPr lang="en-US" sz="2100" dirty="0"/>
+            <a:endParaRPr lang="en-US" sz="1920" dirty="0"/>
           </a:p>
         </p:txBody>
       </p:sp>
@@ -11703,12 +11703,12 @@
         </p:nvSpPr>
         <p:spPr>
           <a:xfrm>
-            <a:off x="7635240" y="1325880"/>
-            <a:ext cx="3474720" cy="1207008"/>
+            <a:off x="7543800" y="1325880"/>
+            <a:ext cx="3611880" cy="1261872"/>
           </a:xfrm>
           <a:prstGeom prst="roundRect">
             <a:avLst>
-              <a:gd name="adj" fmla="val 9091"/>
+              <a:gd name="adj" fmla="val 8696"/>
             </a:avLst>
           </a:prstGeom>
           <a:solidFill>
@@ -11730,8 +11730,8 @@
         </p:nvSpPr>
         <p:spPr>
           <a:xfrm>
-            <a:off x="7799832" y="1472184"/>
-            <a:ext cx="3145536" cy="256032"/>
+            <a:off x="7708392" y="1453896"/>
+            <a:ext cx="3282696" cy="228600"/>
           </a:xfrm>
           <a:prstGeom prst="rect">
             <a:avLst/>
@@ -11747,7 +11747,7 @@
               <a:buNone/>
             </a:pPr>
             <a:r>
-              <a:rPr lang="en-US" sz="1300" b="1" dirty="0">
+              <a:rPr lang="en-US" sz="1220" b="1" dirty="0">
                 <a:solidFill>
                   <a:srgbClr val="0068B7"/>
                 </a:solidFill>
@@ -11757,7 +11757,7 @@
               </a:rPr>
               <a:t>Implementation cue</a:t>
             </a:r>
-            <a:endParaRPr lang="en-US" sz="1300" dirty="0"/>
+            <a:endParaRPr lang="en-US" sz="1220" dirty="0"/>
           </a:p>
         </p:txBody>
       </p:sp>
@@ -11769,8 +11769,8 @@
         </p:nvSpPr>
         <p:spPr>
           <a:xfrm>
-            <a:off x="7799832" y="1801368"/>
-            <a:ext cx="3145536" cy="640080"/>
+            <a:off x="7708392" y="1764792"/>
+            <a:ext cx="3282696" cy="749808"/>
           </a:xfrm>
           <a:prstGeom prst="rect">
             <a:avLst/>
@@ -11788,7 +11788,7 @@
               <a:buNone/>
             </a:pPr>
             <a:r>
-              <a:rPr lang="en-US" sz="1320" dirty="0">
+              <a:rPr lang="en-US" sz="1220" dirty="0">
                 <a:solidFill>
                   <a:srgbClr val="17364A"/>
                 </a:solidFill>
@@ -11798,7 +11798,7 @@
               </a:rPr>
               <a:t>NIST Artificial Intelligence Risk Management Framework:.</a:t>
             </a:r>
-            <a:endParaRPr lang="en-US" sz="1320" dirty="0"/>
+            <a:endParaRPr lang="en-US" sz="1220" dirty="0"/>
           </a:p>
         </p:txBody>
       </p:sp>
@@ -11810,12 +11810,12 @@
         </p:nvSpPr>
         <p:spPr>
           <a:xfrm>
-            <a:off x="7635240" y="2670048"/>
-            <a:ext cx="3474720" cy="1377086"/>
+            <a:off x="7543800" y="2724912"/>
+            <a:ext cx="3611880" cy="1527048"/>
           </a:xfrm>
           <a:prstGeom prst="roundRect">
             <a:avLst>
-              <a:gd name="adj" fmla="val 7968"/>
+              <a:gd name="adj" fmla="val 7186"/>
             </a:avLst>
           </a:prstGeom>
           <a:solidFill>
@@ -11837,8 +11837,8 @@
         </p:nvSpPr>
         <p:spPr>
           <a:xfrm>
-            <a:off x="7799832" y="2816352"/>
-            <a:ext cx="3145536" cy="256032"/>
+            <a:off x="7708392" y="2852928"/>
+            <a:ext cx="3282696" cy="228600"/>
           </a:xfrm>
           <a:prstGeom prst="rect">
             <a:avLst/>
@@ -11854,7 +11854,7 @@
               <a:buNone/>
             </a:pPr>
             <a:r>
-              <a:rPr lang="en-US" sz="1300" b="1" dirty="0">
+              <a:rPr lang="en-US" sz="1220" b="1" dirty="0">
                 <a:solidFill>
                   <a:srgbClr val="0068B7"/>
                 </a:solidFill>
@@ -11864,7 +11864,7 @@
               </a:rPr>
               <a:t>Concept checkpoints</a:t>
             </a:r>
-            <a:endParaRPr lang="en-US" sz="1300" dirty="0"/>
+            <a:endParaRPr lang="en-US" sz="1220" dirty="0"/>
           </a:p>
         </p:txBody>
       </p:sp>
@@ -11876,8 +11876,8 @@
         </p:nvSpPr>
         <p:spPr>
           <a:xfrm>
-            <a:off x="7818120" y="3182112"/>
-            <a:ext cx="3090672" cy="718718"/>
+            <a:off x="7726680" y="3182112"/>
+            <a:ext cx="3227832" cy="960120"/>
           </a:xfrm>
           <a:prstGeom prst="rect">
             <a:avLst/>
@@ -11895,7 +11895,7 @@
               <a:buNone/>
             </a:pPr>
             <a:r>
-              <a:rPr lang="en-US" sz="1220" dirty="0">
+              <a:rPr lang="en-US" sz="1140" dirty="0">
                 <a:solidFill>
                   <a:srgbClr val="17364A"/>
                 </a:solidFill>
@@ -11903,16 +11903,16 @@
                 <a:ea typeface="Aptos" pitchFamily="34" charset="-122"/>
                 <a:cs typeface="Aptos" pitchFamily="34" charset="-120"/>
               </a:rPr>
-              <a:t>NIST Artificial Intelligence Risk Management Framework:.</a:t>
-            </a:r>
-            <a:endParaRPr lang="en-US" sz="1220" dirty="0"/>
-          </a:p>
-          <a:p>
-            <a:pPr indent="0" marL="0">
-              <a:buNone/>
-            </a:pPr>
-            <a:r>
-              <a:rPr lang="en-US" sz="1220" dirty="0">
+              <a:t>NIST Artificial Intelligence Risk Management.</a:t>
+            </a:r>
+            <a:endParaRPr lang="en-US" sz="1140" dirty="0"/>
+          </a:p>
+          <a:p>
+            <a:pPr indent="0" marL="0">
+              <a:buNone/>
+            </a:pPr>
+            <a:r>
+              <a:rPr lang="en-US" sz="1140" dirty="0">
                 <a:solidFill>
                   <a:srgbClr val="17364A"/>
                 </a:solidFill>
@@ -11922,14 +11922,14 @@
               </a:rPr>
               <a:t>OWASP guidance for LLM application security</a:t>
             </a:r>
-            <a:endParaRPr lang="en-US" sz="1220" dirty="0"/>
-          </a:p>
-          <a:p>
-            <a:pPr indent="0" marL="0">
-              <a:buNone/>
-            </a:pPr>
-            <a:r>
-              <a:rPr lang="en-US" sz="1220" dirty="0">
+            <a:endParaRPr lang="en-US" sz="1140" dirty="0"/>
+          </a:p>
+          <a:p>
+            <a:pPr indent="0" marL="0">
+              <a:buNone/>
+            </a:pPr>
+            <a:r>
+              <a:rPr lang="en-US" sz="1140" dirty="0">
                 <a:solidFill>
                   <a:srgbClr val="17364A"/>
                 </a:solidFill>
@@ -11937,9 +11937,9 @@
                 <a:ea typeface="Aptos" pitchFamily="34" charset="-122"/>
                 <a:cs typeface="Aptos" pitchFamily="34" charset="-120"/>
               </a:rPr>
-              <a:t>Agency policies for privacy, cybersecurity, records, procurement,.</a:t>
-            </a:r>
-            <a:endParaRPr lang="en-US" sz="1220" dirty="0"/>
+              <a:t>Agency policies for privacy, cybersecurity,.</a:t>
+            </a:r>
+            <a:endParaRPr lang="en-US" sz="1140" dirty="0"/>
           </a:p>
         </p:txBody>
       </p:sp>
@@ -11951,12 +11951,12 @@
         </p:nvSpPr>
         <p:spPr>
           <a:xfrm>
-            <a:off x="7635240" y="4184294"/>
-            <a:ext cx="3474720" cy="1466698"/>
+            <a:off x="7543800" y="4389120"/>
+            <a:ext cx="3611880" cy="1261872"/>
           </a:xfrm>
           <a:prstGeom prst="roundRect">
             <a:avLst>
-              <a:gd name="adj" fmla="val 7481"/>
+              <a:gd name="adj" fmla="val 8696"/>
             </a:avLst>
           </a:prstGeom>
           <a:solidFill>
@@ -11978,8 +11978,8 @@
         </p:nvSpPr>
         <p:spPr>
           <a:xfrm>
-            <a:off x="7799832" y="4330598"/>
-            <a:ext cx="3145536" cy="256032"/>
+            <a:off x="7708392" y="4517136"/>
+            <a:ext cx="3282696" cy="228600"/>
           </a:xfrm>
           <a:prstGeom prst="rect">
             <a:avLst/>
@@ -11995,7 +11995,7 @@
               <a:buNone/>
             </a:pPr>
             <a:r>
-              <a:rPr lang="en-US" sz="1300" b="1" dirty="0">
+              <a:rPr lang="en-US" sz="1220" b="1" dirty="0">
                 <a:solidFill>
                   <a:srgbClr val="0068B7"/>
                 </a:solidFill>
@@ -12005,7 +12005,7 @@
               </a:rPr>
               <a:t>Next action</a:t>
             </a:r>
-            <a:endParaRPr lang="en-US" sz="1300" dirty="0"/>
+            <a:endParaRPr lang="en-US" sz="1220" dirty="0"/>
           </a:p>
         </p:txBody>
       </p:sp>
@@ -12017,8 +12017,8 @@
         </p:nvSpPr>
         <p:spPr>
           <a:xfrm>
-            <a:off x="7799832" y="4659782"/>
-            <a:ext cx="3145536" cy="899770"/>
+            <a:off x="7708392" y="4828032"/>
+            <a:ext cx="3282696" cy="749808"/>
           </a:xfrm>
           <a:prstGeom prst="rect">
             <a:avLst/>
@@ -12036,7 +12036,7 @@
               <a:buNone/>
             </a:pPr>
             <a:r>
-              <a:rPr lang="en-US" sz="1320" dirty="0">
+              <a:rPr lang="en-US" sz="1220" dirty="0">
                 <a:solidFill>
                   <a:srgbClr val="17364A"/>
                 </a:solidFill>
@@ -12044,9 +12044,9 @@
                 <a:ea typeface="Aptos" pitchFamily="34" charset="-122"/>
                 <a:cs typeface="Aptos" pitchFamily="34" charset="-120"/>
               </a:rPr>
-              <a:t>Use the concept to clarify workflow changes, dependencies, staffing, procurement requirements, training needs, and implementation checkpoints.</a:t>
-            </a:r>
-            <a:endParaRPr lang="en-US" sz="1320" dirty="0"/>
+              <a:t>Use the concept to clarify workflow changes, dependencies, staffing, procurement.</a:t>
+            </a:r>
+            <a:endParaRPr lang="en-US" sz="1220" dirty="0"/>
           </a:p>
         </p:txBody>
       </p:sp>
@@ -12337,8 +12337,8 @@
         </p:nvSpPr>
         <p:spPr>
           <a:xfrm>
-            <a:off x="868680" y="1508760"/>
-            <a:ext cx="6309360" cy="4160520"/>
+            <a:off x="822960" y="1463040"/>
+            <a:ext cx="6565392" cy="4343400"/>
           </a:xfrm>
           <a:prstGeom prst="rect">
             <a:avLst/>
@@ -12356,7 +12356,7 @@
               <a:buNone/>
             </a:pPr>
             <a:r>
-              <a:rPr lang="en-US" sz="2100" dirty="0">
+              <a:rPr lang="en-US" sz="1920" dirty="0">
                 <a:solidFill>
                   <a:srgbClr val="003A63"/>
                 </a:solidFill>
@@ -12364,9 +12364,9 @@
                 <a:ea typeface="Aptos" pitchFamily="34" charset="-122"/>
                 <a:cs typeface="Aptos" pitchFamily="34" charset="-120"/>
               </a:rPr>
-              <a:t>• Relevant public health program SOPs, data governance documentation, and implementation plans</a:t>
-            </a:r>
-            <a:endParaRPr lang="en-US" sz="2100" dirty="0"/>
+              <a:t>• Relevant public health program SOPs, data governance documentation, and.</a:t>
+            </a:r>
+            <a:endParaRPr lang="en-US" sz="1920" dirty="0"/>
           </a:p>
         </p:txBody>
       </p:sp>
@@ -12378,12 +12378,12 @@
         </p:nvSpPr>
         <p:spPr>
           <a:xfrm>
-            <a:off x="7635240" y="1325880"/>
-            <a:ext cx="3474720" cy="1207008"/>
+            <a:off x="7543800" y="1325880"/>
+            <a:ext cx="3611880" cy="1261872"/>
           </a:xfrm>
           <a:prstGeom prst="roundRect">
             <a:avLst>
-              <a:gd name="adj" fmla="val 9091"/>
+              <a:gd name="adj" fmla="val 8696"/>
             </a:avLst>
           </a:prstGeom>
           <a:solidFill>
@@ -12405,8 +12405,8 @@
         </p:nvSpPr>
         <p:spPr>
           <a:xfrm>
-            <a:off x="7799832" y="1472184"/>
-            <a:ext cx="3145536" cy="256032"/>
+            <a:off x="7708392" y="1453896"/>
+            <a:ext cx="3282696" cy="228600"/>
           </a:xfrm>
           <a:prstGeom prst="rect">
             <a:avLst/>
@@ -12422,7 +12422,7 @@
               <a:buNone/>
             </a:pPr>
             <a:r>
-              <a:rPr lang="en-US" sz="1300" b="1" dirty="0">
+              <a:rPr lang="en-US" sz="1220" b="1" dirty="0">
                 <a:solidFill>
                   <a:srgbClr val="0068B7"/>
                 </a:solidFill>
@@ -12432,7 +12432,7 @@
               </a:rPr>
               <a:t>Implementation cue</a:t>
             </a:r>
-            <a:endParaRPr lang="en-US" sz="1300" dirty="0"/>
+            <a:endParaRPr lang="en-US" sz="1220" dirty="0"/>
           </a:p>
         </p:txBody>
       </p:sp>
@@ -12444,8 +12444,8 @@
         </p:nvSpPr>
         <p:spPr>
           <a:xfrm>
-            <a:off x="7799832" y="1801368"/>
-            <a:ext cx="3145536" cy="640080"/>
+            <a:off x="7708392" y="1764792"/>
+            <a:ext cx="3282696" cy="749808"/>
           </a:xfrm>
           <a:prstGeom prst="rect">
             <a:avLst/>
@@ -12463,7 +12463,7 @@
               <a:buNone/>
             </a:pPr>
             <a:r>
-              <a:rPr lang="en-US" sz="1320" dirty="0">
+              <a:rPr lang="en-US" sz="1220" dirty="0">
                 <a:solidFill>
                   <a:srgbClr val="17364A"/>
                 </a:solidFill>
@@ -12471,9 +12471,9 @@
                 <a:ea typeface="Aptos" pitchFamily="34" charset="-122"/>
                 <a:cs typeface="Aptos" pitchFamily="34" charset="-120"/>
               </a:rPr>
-              <a:t>Relevant public health program SOPs, data governance documentation, and implementation.</a:t>
-            </a:r>
-            <a:endParaRPr lang="en-US" sz="1320" dirty="0"/>
+              <a:t>Relevant public health program SOPs, data governance documentation, and.</a:t>
+            </a:r>
+            <a:endParaRPr lang="en-US" sz="1220" dirty="0"/>
           </a:p>
         </p:txBody>
       </p:sp>
@@ -12485,12 +12485,12 @@
         </p:nvSpPr>
         <p:spPr>
           <a:xfrm>
-            <a:off x="7635240" y="2670048"/>
-            <a:ext cx="3474720" cy="1377086"/>
+            <a:off x="7543800" y="2724912"/>
+            <a:ext cx="3611880" cy="1527048"/>
           </a:xfrm>
           <a:prstGeom prst="roundRect">
             <a:avLst>
-              <a:gd name="adj" fmla="val 7968"/>
+              <a:gd name="adj" fmla="val 7186"/>
             </a:avLst>
           </a:prstGeom>
           <a:solidFill>
@@ -12512,8 +12512,8 @@
         </p:nvSpPr>
         <p:spPr>
           <a:xfrm>
-            <a:off x="7799832" y="2816352"/>
-            <a:ext cx="3145536" cy="256032"/>
+            <a:off x="7708392" y="2852928"/>
+            <a:ext cx="3282696" cy="228600"/>
           </a:xfrm>
           <a:prstGeom prst="rect">
             <a:avLst/>
@@ -12529,7 +12529,7 @@
               <a:buNone/>
             </a:pPr>
             <a:r>
-              <a:rPr lang="en-US" sz="1300" b="1" dirty="0">
+              <a:rPr lang="en-US" sz="1220" b="1" dirty="0">
                 <a:solidFill>
                   <a:srgbClr val="0068B7"/>
                 </a:solidFill>
@@ -12539,7 +12539,7 @@
               </a:rPr>
               <a:t>Concept checkpoints</a:t>
             </a:r>
-            <a:endParaRPr lang="en-US" sz="1300" dirty="0"/>
+            <a:endParaRPr lang="en-US" sz="1220" dirty="0"/>
           </a:p>
         </p:txBody>
       </p:sp>
@@ -12551,8 +12551,8 @@
         </p:nvSpPr>
         <p:spPr>
           <a:xfrm>
-            <a:off x="7818120" y="3182112"/>
-            <a:ext cx="3090672" cy="718718"/>
+            <a:off x="7726680" y="3182112"/>
+            <a:ext cx="3227832" cy="960120"/>
           </a:xfrm>
           <a:prstGeom prst="rect">
             <a:avLst/>
@@ -12570,7 +12570,7 @@
               <a:buNone/>
             </a:pPr>
             <a:r>
-              <a:rPr lang="en-US" sz="1220" dirty="0">
+              <a:rPr lang="en-US" sz="1140" dirty="0">
                 <a:solidFill>
                   <a:srgbClr val="17364A"/>
                 </a:solidFill>
@@ -12578,9 +12578,9 @@
                 <a:ea typeface="Aptos" pitchFamily="34" charset="-122"/>
                 <a:cs typeface="Aptos" pitchFamily="34" charset="-120"/>
               </a:rPr>
-              <a:t>Relevant public health program SOPs, data governance.</a:t>
-            </a:r>
-            <a:endParaRPr lang="en-US" sz="1220" dirty="0"/>
+              <a:t>Relevant public health program SOPs, data.</a:t>
+            </a:r>
+            <a:endParaRPr lang="en-US" sz="1140" dirty="0"/>
           </a:p>
         </p:txBody>
       </p:sp>
@@ -12592,12 +12592,12 @@
         </p:nvSpPr>
         <p:spPr>
           <a:xfrm>
-            <a:off x="7635240" y="4184294"/>
-            <a:ext cx="3474720" cy="1466698"/>
+            <a:off x="7543800" y="4389120"/>
+            <a:ext cx="3611880" cy="1261872"/>
           </a:xfrm>
           <a:prstGeom prst="roundRect">
             <a:avLst>
-              <a:gd name="adj" fmla="val 7481"/>
+              <a:gd name="adj" fmla="val 8696"/>
             </a:avLst>
           </a:prstGeom>
           <a:solidFill>
@@ -12619,8 +12619,8 @@
         </p:nvSpPr>
         <p:spPr>
           <a:xfrm>
-            <a:off x="7799832" y="4330598"/>
-            <a:ext cx="3145536" cy="256032"/>
+            <a:off x="7708392" y="4517136"/>
+            <a:ext cx="3282696" cy="228600"/>
           </a:xfrm>
           <a:prstGeom prst="rect">
             <a:avLst/>
@@ -12636,7 +12636,7 @@
               <a:buNone/>
             </a:pPr>
             <a:r>
-              <a:rPr lang="en-US" sz="1300" b="1" dirty="0">
+              <a:rPr lang="en-US" sz="1220" b="1" dirty="0">
                 <a:solidFill>
                   <a:srgbClr val="0068B7"/>
                 </a:solidFill>
@@ -12646,7 +12646,7 @@
               </a:rPr>
               <a:t>Next action</a:t>
             </a:r>
-            <a:endParaRPr lang="en-US" sz="1300" dirty="0"/>
+            <a:endParaRPr lang="en-US" sz="1220" dirty="0"/>
           </a:p>
         </p:txBody>
       </p:sp>
@@ -12658,8 +12658,8 @@
         </p:nvSpPr>
         <p:spPr>
           <a:xfrm>
-            <a:off x="7799832" y="4659782"/>
-            <a:ext cx="3145536" cy="899770"/>
+            <a:off x="7708392" y="4828032"/>
+            <a:ext cx="3282696" cy="749808"/>
           </a:xfrm>
           <a:prstGeom prst="rect">
             <a:avLst/>
@@ -12677,7 +12677,7 @@
               <a:buNone/>
             </a:pPr>
             <a:r>
-              <a:rPr lang="en-US" sz="1320" dirty="0">
+              <a:rPr lang="en-US" sz="1220" dirty="0">
                 <a:solidFill>
                   <a:srgbClr val="17364A"/>
                 </a:solidFill>
@@ -12685,9 +12685,9 @@
                 <a:ea typeface="Aptos" pitchFamily="34" charset="-122"/>
                 <a:cs typeface="Aptos" pitchFamily="34" charset="-120"/>
               </a:rPr>
-              <a:t>Use the concept to clarify workflow changes, dependencies, staffing, procurement requirements, training needs, and implementation checkpoints.</a:t>
-            </a:r>
-            <a:endParaRPr lang="en-US" sz="1320" dirty="0"/>
+              <a:t>Use the concept to clarify workflow changes, dependencies, staffing, procurement.</a:t>
+            </a:r>
+            <a:endParaRPr lang="en-US" sz="1220" dirty="0"/>
           </a:p>
         </p:txBody>
       </p:sp>
@@ -13005,7 +13005,7 @@
                 <a:ea typeface="Aptos" pitchFamily="34" charset="-122"/>
                 <a:cs typeface="Aptos" pitchFamily="34" charset="-120"/>
               </a:rPr>
-              <a:t>• Play 11: Build and Deploy AI Solutions - This lesson informs Play 11 by helping learners.</a:t>
+              <a:t>• Play 11: Build and Deploy AI Solutions - This lesson informs Play 11 by.</a:t>
             </a:r>
             <a:endParaRPr lang="en-US" sz="1900" dirty="0"/>
           </a:p>
@@ -13022,7 +13022,7 @@
                 <a:ea typeface="Aptos" pitchFamily="34" charset="-122"/>
                 <a:cs typeface="Aptos" pitchFamily="34" charset="-120"/>
               </a:rPr>
-              <a:t>• Play 2: Readiness Assessment - This lesson informs Play 2 by helping learners connect the.</a:t>
+              <a:t>• Play 2: Readiness Assessment - This lesson informs Play 2 by helping.</a:t>
             </a:r>
             <a:endParaRPr lang="en-US" sz="1900" dirty="0"/>
           </a:p>
@@ -13039,7 +13039,7 @@
                 <a:ea typeface="Aptos" pitchFamily="34" charset="-122"/>
                 <a:cs typeface="Aptos" pitchFamily="34" charset="-120"/>
               </a:rPr>
-              <a:t>• Play 1: Vision &amp; Guardrails - This lesson informs Play 1 by helping learners connect the.</a:t>
+              <a:t>• Play 1: Vision &amp; Guardrails - This lesson informs Play 1 by helping learners.</a:t>
             </a:r>
             <a:endParaRPr lang="en-US" sz="1900" dirty="0"/>
           </a:p>
@@ -13056,7 +13056,7 @@
                 <a:ea typeface="Aptos" pitchFamily="34" charset="-122"/>
                 <a:cs typeface="Aptos" pitchFamily="34" charset="-120"/>
               </a:rPr>
-              <a:t>• Play 7: Prioritize Use Cases - This lesson informs Play 7 by helping learners connect the.</a:t>
+              <a:t>• Play 7: Prioritize Use Cases - This lesson informs Play 7 by helping.</a:t>
             </a:r>
             <a:endParaRPr lang="en-US" sz="1900" dirty="0"/>
           </a:p>
@@ -13097,8 +13097,8 @@
         </p:nvSpPr>
         <p:spPr>
           <a:xfrm>
-            <a:off x="8211312" y="1563624"/>
-            <a:ext cx="2734056" cy="256032"/>
+            <a:off x="8211312" y="1545336"/>
+            <a:ext cx="2734056" cy="228600"/>
           </a:xfrm>
           <a:prstGeom prst="rect">
             <a:avLst/>
@@ -13114,7 +13114,7 @@
               <a:buNone/>
             </a:pPr>
             <a:r>
-              <a:rPr lang="en-US" sz="1300" b="1" dirty="0">
+              <a:rPr lang="en-US" sz="1220" b="1" dirty="0">
                 <a:solidFill>
                   <a:srgbClr val="0068B7"/>
                 </a:solidFill>
@@ -13124,7 +13124,7 @@
               </a:rPr>
               <a:t>Apply the lesson</a:t>
             </a:r>
-            <a:endParaRPr lang="en-US" sz="1300" dirty="0"/>
+            <a:endParaRPr lang="en-US" sz="1220" dirty="0"/>
           </a:p>
         </p:txBody>
       </p:sp>
@@ -13136,8 +13136,8 @@
         </p:nvSpPr>
         <p:spPr>
           <a:xfrm>
-            <a:off x="8211312" y="1892808"/>
-            <a:ext cx="2734056" cy="1536192"/>
+            <a:off x="8211312" y="1856232"/>
+            <a:ext cx="2734056" cy="1591056"/>
           </a:xfrm>
           <a:prstGeom prst="rect">
             <a:avLst/>
@@ -13155,7 +13155,7 @@
               <a:buNone/>
             </a:pPr>
             <a:r>
-              <a:rPr lang="en-US" sz="1320" dirty="0">
+              <a:rPr lang="en-US" sz="1220" dirty="0">
                 <a:solidFill>
                   <a:srgbClr val="17364A"/>
                 </a:solidFill>
@@ -13163,9 +13163,9 @@
                 <a:ea typeface="Aptos" pitchFamily="34" charset="-122"/>
                 <a:cs typeface="Aptos" pitchFamily="34" charset="-120"/>
               </a:rPr>
-              <a:t>Use the related plays to identify decisions, participants, timing, approvals, and documentation needed for responsible implementation.</a:t>
-            </a:r>
-            <a:endParaRPr lang="en-US" sz="1320" dirty="0"/>
+              <a:t>Use the related plays to identify decisions, participants, timing, approvals,.</a:t>
+            </a:r>
+            <a:endParaRPr lang="en-US" sz="1220" dirty="0"/>
           </a:p>
         </p:txBody>
       </p:sp>
@@ -13204,8 +13204,8 @@
         </p:nvSpPr>
         <p:spPr>
           <a:xfrm>
-            <a:off x="8211312" y="3941064"/>
-            <a:ext cx="2734056" cy="256032"/>
+            <a:off x="8211312" y="3922776"/>
+            <a:ext cx="2734056" cy="228600"/>
           </a:xfrm>
           <a:prstGeom prst="rect">
             <a:avLst/>
@@ -13221,7 +13221,7 @@
               <a:buNone/>
             </a:pPr>
             <a:r>
-              <a:rPr lang="en-US" sz="1300" b="1" dirty="0">
+              <a:rPr lang="en-US" sz="1220" b="1" dirty="0">
                 <a:solidFill>
                   <a:srgbClr val="0068B7"/>
                 </a:solidFill>
@@ -13231,7 +13231,7 @@
               </a:rPr>
               <a:t>Use the play links to</a:t>
             </a:r>
-            <a:endParaRPr lang="en-US" sz="1300" dirty="0"/>
+            <a:endParaRPr lang="en-US" sz="1220" dirty="0"/>
           </a:p>
         </p:txBody>
       </p:sp>
@@ -13243,8 +13243,8 @@
         </p:nvSpPr>
         <p:spPr>
           <a:xfrm>
-            <a:off x="8229600" y="4306824"/>
-            <a:ext cx="2679192" cy="941832"/>
+            <a:off x="8229600" y="4251960"/>
+            <a:ext cx="2679192" cy="1033272"/>
           </a:xfrm>
           <a:prstGeom prst="rect">
             <a:avLst/>
@@ -13262,7 +13262,7 @@
               <a:buNone/>
             </a:pPr>
             <a:r>
-              <a:rPr lang="en-US" sz="1220" dirty="0">
+              <a:rPr lang="en-US" sz="1140" dirty="0">
                 <a:solidFill>
                   <a:srgbClr val="17364A"/>
                 </a:solidFill>
@@ -13272,14 +13272,14 @@
               </a:rPr>
               <a:t>Locate the decision point in the playbook sequence.</a:t>
             </a:r>
-            <a:endParaRPr lang="en-US" sz="1220" dirty="0"/>
-          </a:p>
-          <a:p>
-            <a:pPr indent="0" marL="0">
-              <a:buNone/>
-            </a:pPr>
-            <a:r>
-              <a:rPr lang="en-US" sz="1220" dirty="0">
+            <a:endParaRPr lang="en-US" sz="1140" dirty="0"/>
+          </a:p>
+          <a:p>
+            <a:pPr indent="0" marL="0">
+              <a:buNone/>
+            </a:pPr>
+            <a:r>
+              <a:rPr lang="en-US" sz="1140" dirty="0">
                 <a:solidFill>
                   <a:srgbClr val="17364A"/>
                 </a:solidFill>
@@ -13289,14 +13289,14 @@
               </a:rPr>
               <a:t>Identify who should participate in the work.</a:t>
             </a:r>
-            <a:endParaRPr lang="en-US" sz="1220" dirty="0"/>
-          </a:p>
-          <a:p>
-            <a:pPr indent="0" marL="0">
-              <a:buNone/>
-            </a:pPr>
-            <a:r>
-              <a:rPr lang="en-US" sz="1220" dirty="0">
+            <a:endParaRPr lang="en-US" sz="1140" dirty="0"/>
+          </a:p>
+          <a:p>
+            <a:pPr indent="0" marL="0">
+              <a:buNone/>
+            </a:pPr>
+            <a:r>
+              <a:rPr lang="en-US" sz="1140" dirty="0">
                 <a:solidFill>
                   <a:srgbClr val="17364A"/>
                 </a:solidFill>
@@ -13304,9 +13304,9 @@
                 <a:ea typeface="Aptos" pitchFamily="34" charset="-122"/>
                 <a:cs typeface="Aptos" pitchFamily="34" charset="-120"/>
               </a:rPr>
-              <a:t>Document the review, approval, or implementation step.</a:t>
-            </a:r>
-            <a:endParaRPr lang="en-US" sz="1220" dirty="0"/>
+              <a:t>Document the review, approval, or implementation.</a:t>
+            </a:r>
+            <a:endParaRPr lang="en-US" sz="1140" dirty="0"/>
           </a:p>
         </p:txBody>
       </p:sp>
@@ -13624,7 +13624,7 @@
                 <a:ea typeface="Aptos" pitchFamily="34" charset="-122"/>
                 <a:cs typeface="Aptos" pitchFamily="34" charset="-120"/>
               </a:rPr>
-              <a:t>• Tool 4: AI Policy Landscape Scan (Worksheet) - Use AI Policy Landscape Scan to translate this.</a:t>
+              <a:t>• Tool 4: AI Policy Landscape Scan (Worksheet) - Use AI Policy Landscape Scan.</a:t>
             </a:r>
             <a:endParaRPr lang="en-US" sz="1850" dirty="0"/>
           </a:p>
@@ -13641,7 +13641,7 @@
                 <a:ea typeface="Aptos" pitchFamily="34" charset="-122"/>
                 <a:cs typeface="Aptos" pitchFamily="34" charset="-120"/>
               </a:rPr>
-              <a:t>• Tool 5: AI Environmental and Resource Impact Review (Checklist) - Use this tool to complete or.</a:t>
+              <a:t>• Tool 5: AI Environmental and Resource Impact Review (Checklist) - Use this.</a:t>
             </a:r>
             <a:endParaRPr lang="en-US" sz="1850" dirty="0"/>
           </a:p>
@@ -13658,7 +13658,7 @@
                 <a:ea typeface="Aptos" pitchFamily="34" charset="-122"/>
                 <a:cs typeface="Aptos" pitchFamily="34" charset="-120"/>
               </a:rPr>
-              <a:t>• Tool 6: Human-Centered AI Decision Rule Checklist (Checklist) - Use Human-Centered AI Decision.</a:t>
+              <a:t>• Tool 6: Human-Centered AI Decision Rule Checklist (Checklist) - Use.</a:t>
             </a:r>
             <a:endParaRPr lang="en-US" sz="1850" dirty="0"/>
           </a:p>
@@ -13675,7 +13675,7 @@
                 <a:ea typeface="Aptos" pitchFamily="34" charset="-122"/>
                 <a:cs typeface="Aptos" pitchFamily="34" charset="-120"/>
               </a:rPr>
-              <a:t>• Tool 8: AI Project Charter (Planning) - Use this tool to complete or strengthen the practical.</a:t>
+              <a:t>• Tool 8: AI Project Charter (Planning) - Use this tool to complete or.</a:t>
             </a:r>
             <a:endParaRPr lang="en-US" sz="1850" dirty="0"/>
           </a:p>
@@ -13716,8 +13716,8 @@
         </p:nvSpPr>
         <p:spPr>
           <a:xfrm>
-            <a:off x="8211312" y="1563624"/>
-            <a:ext cx="2734056" cy="256032"/>
+            <a:off x="8211312" y="1545336"/>
+            <a:ext cx="2734056" cy="228600"/>
           </a:xfrm>
           <a:prstGeom prst="rect">
             <a:avLst/>
@@ -13733,7 +13733,7 @@
               <a:buNone/>
             </a:pPr>
             <a:r>
-              <a:rPr lang="en-US" sz="1300" b="1" dirty="0">
+              <a:rPr lang="en-US" sz="1220" b="1" dirty="0">
                 <a:solidFill>
                   <a:srgbClr val="0068B7"/>
                 </a:solidFill>
@@ -13743,7 +13743,7 @@
               </a:rPr>
               <a:t>Use the tools</a:t>
             </a:r>
-            <a:endParaRPr lang="en-US" sz="1300" dirty="0"/>
+            <a:endParaRPr lang="en-US" sz="1220" dirty="0"/>
           </a:p>
         </p:txBody>
       </p:sp>
@@ -13755,8 +13755,8 @@
         </p:nvSpPr>
         <p:spPr>
           <a:xfrm>
-            <a:off x="8211312" y="1892808"/>
-            <a:ext cx="2734056" cy="1536192"/>
+            <a:off x="8211312" y="1856232"/>
+            <a:ext cx="2734056" cy="1591056"/>
           </a:xfrm>
           <a:prstGeom prst="rect">
             <a:avLst/>
@@ -13774,7 +13774,7 @@
               <a:buNone/>
             </a:pPr>
             <a:r>
-              <a:rPr lang="en-US" sz="1320" dirty="0">
+              <a:rPr lang="en-US" sz="1220" dirty="0">
                 <a:solidFill>
                   <a:srgbClr val="17364A"/>
                 </a:solidFill>
@@ -13782,9 +13782,9 @@
                 <a:ea typeface="Aptos" pitchFamily="34" charset="-122"/>
                 <a:cs typeface="Aptos" pitchFamily="34" charset="-120"/>
               </a:rPr>
-              <a:t>Use linked tools when your department needs a structured worksheet, template, checklist, review process, or documentation artifact.</a:t>
-            </a:r>
-            <a:endParaRPr lang="en-US" sz="1320" dirty="0"/>
+              <a:t>Use linked tools when your department needs a structured worksheet, template,.</a:t>
+            </a:r>
+            <a:endParaRPr lang="en-US" sz="1220" dirty="0"/>
           </a:p>
         </p:txBody>
       </p:sp>
@@ -13823,8 +13823,8 @@
         </p:nvSpPr>
         <p:spPr>
           <a:xfrm>
-            <a:off x="8211312" y="3941064"/>
-            <a:ext cx="2734056" cy="256032"/>
+            <a:off x="8211312" y="3922776"/>
+            <a:ext cx="2734056" cy="228600"/>
           </a:xfrm>
           <a:prstGeom prst="rect">
             <a:avLst/>
@@ -13840,7 +13840,7 @@
               <a:buNone/>
             </a:pPr>
             <a:r>
-              <a:rPr lang="en-US" sz="1300" b="1" dirty="0">
+              <a:rPr lang="en-US" sz="1220" b="1" dirty="0">
                 <a:solidFill>
                   <a:srgbClr val="0068B7"/>
                 </a:solidFill>
@@ -13850,7 +13850,7 @@
               </a:rPr>
               <a:t>Tool selection cues</a:t>
             </a:r>
-            <a:endParaRPr lang="en-US" sz="1300" dirty="0"/>
+            <a:endParaRPr lang="en-US" sz="1220" dirty="0"/>
           </a:p>
         </p:txBody>
       </p:sp>
@@ -13862,8 +13862,8 @@
         </p:nvSpPr>
         <p:spPr>
           <a:xfrm>
-            <a:off x="8229600" y="4306824"/>
-            <a:ext cx="2679192" cy="941832"/>
+            <a:off x="8229600" y="4251960"/>
+            <a:ext cx="2679192" cy="1033272"/>
           </a:xfrm>
           <a:prstGeom prst="rect">
             <a:avLst/>
@@ -13881,7 +13881,7 @@
               <a:buNone/>
             </a:pPr>
             <a:r>
-              <a:rPr lang="en-US" sz="1220" dirty="0">
+              <a:rPr lang="en-US" sz="1140" dirty="0">
                 <a:solidFill>
                   <a:srgbClr val="17364A"/>
                 </a:solidFill>
@@ -13891,14 +13891,14 @@
               </a:rPr>
               <a:t>Use a tool when no comparable local process exists.</a:t>
             </a:r>
-            <a:endParaRPr lang="en-US" sz="1220" dirty="0"/>
-          </a:p>
-          <a:p>
-            <a:pPr indent="0" marL="0">
-              <a:buNone/>
-            </a:pPr>
-            <a:r>
-              <a:rPr lang="en-US" sz="1220" dirty="0">
+            <a:endParaRPr lang="en-US" sz="1140" dirty="0"/>
+          </a:p>
+          <a:p>
+            <a:pPr indent="0" marL="0">
+              <a:buNone/>
+            </a:pPr>
+            <a:r>
+              <a:rPr lang="en-US" sz="1140" dirty="0">
                 <a:solidFill>
                   <a:srgbClr val="17364A"/>
                 </a:solidFill>
@@ -13906,16 +13906,16 @@
                 <a:ea typeface="Aptos" pitchFamily="34" charset="-122"/>
                 <a:cs typeface="Aptos" pitchFamily="34" charset="-120"/>
               </a:rPr>
-              <a:t>Adapt existing department templates when they already fit the.</a:t>
-            </a:r>
-            <a:endParaRPr lang="en-US" sz="1220" dirty="0"/>
-          </a:p>
-          <a:p>
-            <a:pPr indent="0" marL="0">
-              <a:buNone/>
-            </a:pPr>
-            <a:r>
-              <a:rPr lang="en-US" sz="1220" dirty="0">
+              <a:t>Adapt existing department templates when they.</a:t>
+            </a:r>
+            <a:endParaRPr lang="en-US" sz="1140" dirty="0"/>
+          </a:p>
+          <a:p>
+            <a:pPr indent="0" marL="0">
+              <a:buNone/>
+            </a:pPr>
+            <a:r>
+              <a:rPr lang="en-US" sz="1140" dirty="0">
                 <a:solidFill>
                   <a:srgbClr val="17364A"/>
                 </a:solidFill>
@@ -13923,9 +13923,9 @@
                 <a:ea typeface="Aptos" pitchFamily="34" charset="-122"/>
                 <a:cs typeface="Aptos" pitchFamily="34" charset="-120"/>
               </a:rPr>
-              <a:t>Save the completed artifact as evidence of the decision.</a:t>
-            </a:r>
-            <a:endParaRPr lang="en-US" sz="1220" dirty="0"/>
+              <a:t>Save the completed artifact as evidence of the.</a:t>
+            </a:r>
+            <a:endParaRPr lang="en-US" sz="1140" dirty="0"/>
           </a:p>
         </p:txBody>
       </p:sp>
@@ -14216,8 +14216,8 @@
         </p:nvSpPr>
         <p:spPr>
           <a:xfrm>
-            <a:off x="868680" y="1508760"/>
-            <a:ext cx="6309360" cy="4160520"/>
+            <a:off x="822960" y="1463040"/>
+            <a:ext cx="6565392" cy="4343400"/>
           </a:xfrm>
           <a:prstGeom prst="rect">
             <a:avLst/>
@@ -14235,7 +14235,7 @@
               <a:buNone/>
             </a:pPr>
             <a:r>
-              <a:rPr lang="en-US" sz="2100" dirty="0">
+              <a:rPr lang="en-US" sz="1920" dirty="0">
                 <a:solidFill>
                   <a:srgbClr val="003A63"/>
                 </a:solidFill>
@@ -14245,14 +14245,14 @@
               </a:rPr>
               <a:t>• Define the major phases of an AI implementation project.</a:t>
             </a:r>
-            <a:endParaRPr lang="en-US" sz="2100" dirty="0"/>
-          </a:p>
-          <a:p>
-            <a:pPr indent="0" marL="0">
-              <a:buNone/>
-            </a:pPr>
-            <a:r>
-              <a:rPr lang="en-US" sz="2100" dirty="0">
+            <a:endParaRPr lang="en-US" sz="1920" dirty="0"/>
+          </a:p>
+          <a:p>
+            <a:pPr indent="0" marL="0">
+              <a:buNone/>
+            </a:pPr>
+            <a:r>
+              <a:rPr lang="en-US" sz="1920" dirty="0">
                 <a:solidFill>
                   <a:srgbClr val="003A63"/>
                 </a:solidFill>
@@ -14260,16 +14260,16 @@
                 <a:ea typeface="Aptos" pitchFamily="34" charset="-122"/>
                 <a:cs typeface="Aptos" pitchFamily="34" charset="-120"/>
               </a:rPr>
-              <a:t>• Develop an AI project charter that includes scope, objectives, roles, risks, dependencies, and.</a:t>
-            </a:r>
-            <a:endParaRPr lang="en-US" sz="2100" dirty="0"/>
-          </a:p>
-          <a:p>
-            <a:pPr indent="0" marL="0">
-              <a:buNone/>
-            </a:pPr>
-            <a:r>
-              <a:rPr lang="en-US" sz="2100" dirty="0">
+              <a:t>• Develop an AI project charter that includes scope, objectives, roles, risks,.</a:t>
+            </a:r>
+            <a:endParaRPr lang="en-US" sz="1920" dirty="0"/>
+          </a:p>
+          <a:p>
+            <a:pPr indent="0" marL="0">
+              <a:buNone/>
+            </a:pPr>
+            <a:r>
+              <a:rPr lang="en-US" sz="1920" dirty="0">
                 <a:solidFill>
                   <a:srgbClr val="003A63"/>
                 </a:solidFill>
@@ -14277,9 +14277,9 @@
                 <a:ea typeface="Aptos" pitchFamily="34" charset="-122"/>
                 <a:cs typeface="Aptos" pitchFamily="34" charset="-120"/>
               </a:rPr>
-              <a:t>• Identify implementation dependencies across data, systems, privacy, security, procurement,.</a:t>
-            </a:r>
-            <a:endParaRPr lang="en-US" sz="2100" dirty="0"/>
+              <a:t>• Identify implementation dependencies across data, systems, privacy,.</a:t>
+            </a:r>
+            <a:endParaRPr lang="en-US" sz="1920" dirty="0"/>
           </a:p>
         </p:txBody>
       </p:sp>
@@ -14291,12 +14291,12 @@
         </p:nvSpPr>
         <p:spPr>
           <a:xfrm>
-            <a:off x="7635240" y="1325880"/>
-            <a:ext cx="3474720" cy="1207008"/>
+            <a:off x="7543800" y="1325880"/>
+            <a:ext cx="3611880" cy="1261872"/>
           </a:xfrm>
           <a:prstGeom prst="roundRect">
             <a:avLst>
-              <a:gd name="adj" fmla="val 9091"/>
+              <a:gd name="adj" fmla="val 8696"/>
             </a:avLst>
           </a:prstGeom>
           <a:solidFill>
@@ -14318,8 +14318,8 @@
         </p:nvSpPr>
         <p:spPr>
           <a:xfrm>
-            <a:off x="7799832" y="1472184"/>
-            <a:ext cx="3145536" cy="256032"/>
+            <a:off x="7708392" y="1453896"/>
+            <a:ext cx="3282696" cy="228600"/>
           </a:xfrm>
           <a:prstGeom prst="rect">
             <a:avLst/>
@@ -14335,7 +14335,7 @@
               <a:buNone/>
             </a:pPr>
             <a:r>
-              <a:rPr lang="en-US" sz="1300" b="1" dirty="0">
+              <a:rPr lang="en-US" sz="1220" b="1" dirty="0">
                 <a:solidFill>
                   <a:srgbClr val="0068B7"/>
                 </a:solidFill>
@@ -14345,7 +14345,7 @@
               </a:rPr>
               <a:t>Implementation cue</a:t>
             </a:r>
-            <a:endParaRPr lang="en-US" sz="1300" dirty="0"/>
+            <a:endParaRPr lang="en-US" sz="1220" dirty="0"/>
           </a:p>
         </p:txBody>
       </p:sp>
@@ -14357,8 +14357,8 @@
         </p:nvSpPr>
         <p:spPr>
           <a:xfrm>
-            <a:off x="7799832" y="1801368"/>
-            <a:ext cx="3145536" cy="640080"/>
+            <a:off x="7708392" y="1764792"/>
+            <a:ext cx="3282696" cy="749808"/>
           </a:xfrm>
           <a:prstGeom prst="rect">
             <a:avLst/>
@@ -14376,7 +14376,7 @@
               <a:buNone/>
             </a:pPr>
             <a:r>
-              <a:rPr lang="en-US" sz="1320" dirty="0">
+              <a:rPr lang="en-US" sz="1220" dirty="0">
                 <a:solidFill>
                   <a:srgbClr val="17364A"/>
                 </a:solidFill>
@@ -14386,7 +14386,7 @@
               </a:rPr>
               <a:t>Define the major phases of an AI implementation project.</a:t>
             </a:r>
-            <a:endParaRPr lang="en-US" sz="1320" dirty="0"/>
+            <a:endParaRPr lang="en-US" sz="1220" dirty="0"/>
           </a:p>
         </p:txBody>
       </p:sp>
@@ -14398,12 +14398,12 @@
         </p:nvSpPr>
         <p:spPr>
           <a:xfrm>
-            <a:off x="7635240" y="2670048"/>
-            <a:ext cx="3474720" cy="1377086"/>
+            <a:off x="7543800" y="2724912"/>
+            <a:ext cx="3611880" cy="1527048"/>
           </a:xfrm>
           <a:prstGeom prst="roundRect">
             <a:avLst>
-              <a:gd name="adj" fmla="val 7968"/>
+              <a:gd name="adj" fmla="val 7186"/>
             </a:avLst>
           </a:prstGeom>
           <a:solidFill>
@@ -14425,8 +14425,8 @@
         </p:nvSpPr>
         <p:spPr>
           <a:xfrm>
-            <a:off x="7799832" y="2816352"/>
-            <a:ext cx="3145536" cy="256032"/>
+            <a:off x="7708392" y="2852928"/>
+            <a:ext cx="3282696" cy="228600"/>
           </a:xfrm>
           <a:prstGeom prst="rect">
             <a:avLst/>
@@ -14442,7 +14442,7 @@
               <a:buNone/>
             </a:pPr>
             <a:r>
-              <a:rPr lang="en-US" sz="1300" b="1" dirty="0">
+              <a:rPr lang="en-US" sz="1220" b="1" dirty="0">
                 <a:solidFill>
                   <a:srgbClr val="0068B7"/>
                 </a:solidFill>
@@ -14452,7 +14452,7 @@
               </a:rPr>
               <a:t>Concept checkpoints</a:t>
             </a:r>
-            <a:endParaRPr lang="en-US" sz="1300" dirty="0"/>
+            <a:endParaRPr lang="en-US" sz="1220" dirty="0"/>
           </a:p>
         </p:txBody>
       </p:sp>
@@ -14464,8 +14464,8 @@
         </p:nvSpPr>
         <p:spPr>
           <a:xfrm>
-            <a:off x="7818120" y="3182112"/>
-            <a:ext cx="3090672" cy="718718"/>
+            <a:off x="7726680" y="3182112"/>
+            <a:ext cx="3227832" cy="960120"/>
           </a:xfrm>
           <a:prstGeom prst="rect">
             <a:avLst/>
@@ -14483,7 +14483,7 @@
               <a:buNone/>
             </a:pPr>
             <a:r>
-              <a:rPr lang="en-US" sz="1220" dirty="0">
+              <a:rPr lang="en-US" sz="1140" dirty="0">
                 <a:solidFill>
                   <a:srgbClr val="17364A"/>
                 </a:solidFill>
@@ -14491,16 +14491,16 @@
                 <a:ea typeface="Aptos" pitchFamily="34" charset="-122"/>
                 <a:cs typeface="Aptos" pitchFamily="34" charset="-120"/>
               </a:rPr>
-              <a:t>Develop an AI project charter that includes scope, objectives,.</a:t>
-            </a:r>
-            <a:endParaRPr lang="en-US" sz="1220" dirty="0"/>
-          </a:p>
-          <a:p>
-            <a:pPr indent="0" marL="0">
-              <a:buNone/>
-            </a:pPr>
-            <a:r>
-              <a:rPr lang="en-US" sz="1220" dirty="0">
+              <a:t>Develop an AI project charter that includes scope,.</a:t>
+            </a:r>
+            <a:endParaRPr lang="en-US" sz="1140" dirty="0"/>
+          </a:p>
+          <a:p>
+            <a:pPr indent="0" marL="0">
+              <a:buNone/>
+            </a:pPr>
+            <a:r>
+              <a:rPr lang="en-US" sz="1140" dirty="0">
                 <a:solidFill>
                   <a:srgbClr val="17364A"/>
                 </a:solidFill>
@@ -14508,16 +14508,16 @@
                 <a:ea typeface="Aptos" pitchFamily="34" charset="-122"/>
                 <a:cs typeface="Aptos" pitchFamily="34" charset="-120"/>
               </a:rPr>
-              <a:t>Identify implementation dependencies across data, systems,.</a:t>
-            </a:r>
-            <a:endParaRPr lang="en-US" sz="1220" dirty="0"/>
-          </a:p>
-          <a:p>
-            <a:pPr indent="0" marL="0">
-              <a:buNone/>
-            </a:pPr>
-            <a:r>
-              <a:rPr lang="en-US" sz="1220" dirty="0">
+              <a:t>Identify implementation dependencies across data,.</a:t>
+            </a:r>
+            <a:endParaRPr lang="en-US" sz="1140" dirty="0"/>
+          </a:p>
+          <a:p>
+            <a:pPr indent="0" marL="0">
+              <a:buNone/>
+            </a:pPr>
+            <a:r>
+              <a:rPr lang="en-US" sz="1140" dirty="0">
                 <a:solidFill>
                   <a:srgbClr val="17364A"/>
                 </a:solidFill>
@@ -14525,9 +14525,9 @@
                 <a:ea typeface="Aptos" pitchFamily="34" charset="-122"/>
                 <a:cs typeface="Aptos" pitchFamily="34" charset="-120"/>
               </a:rPr>
-              <a:t>Create a launch readiness checklist for an AI-supported workflow.</a:t>
-            </a:r>
-            <a:endParaRPr lang="en-US" sz="1220" dirty="0"/>
+              <a:t>Create a launch readiness checklist for an.</a:t>
+            </a:r>
+            <a:endParaRPr lang="en-US" sz="1140" dirty="0"/>
           </a:p>
         </p:txBody>
       </p:sp>
@@ -14539,12 +14539,12 @@
         </p:nvSpPr>
         <p:spPr>
           <a:xfrm>
-            <a:off x="7635240" y="4184294"/>
-            <a:ext cx="3474720" cy="1466698"/>
+            <a:off x="7543800" y="4389120"/>
+            <a:ext cx="3611880" cy="1261872"/>
           </a:xfrm>
           <a:prstGeom prst="roundRect">
             <a:avLst>
-              <a:gd name="adj" fmla="val 7481"/>
+              <a:gd name="adj" fmla="val 8696"/>
             </a:avLst>
           </a:prstGeom>
           <a:solidFill>
@@ -14566,8 +14566,8 @@
         </p:nvSpPr>
         <p:spPr>
           <a:xfrm>
-            <a:off x="7799832" y="4330598"/>
-            <a:ext cx="3145536" cy="256032"/>
+            <a:off x="7708392" y="4517136"/>
+            <a:ext cx="3282696" cy="228600"/>
           </a:xfrm>
           <a:prstGeom prst="rect">
             <a:avLst/>
@@ -14583,7 +14583,7 @@
               <a:buNone/>
             </a:pPr>
             <a:r>
-              <a:rPr lang="en-US" sz="1300" b="1" dirty="0">
+              <a:rPr lang="en-US" sz="1220" b="1" dirty="0">
                 <a:solidFill>
                   <a:srgbClr val="0068B7"/>
                 </a:solidFill>
@@ -14593,7 +14593,7 @@
               </a:rPr>
               <a:t>Next action</a:t>
             </a:r>
-            <a:endParaRPr lang="en-US" sz="1300" dirty="0"/>
+            <a:endParaRPr lang="en-US" sz="1220" dirty="0"/>
           </a:p>
         </p:txBody>
       </p:sp>
@@ -14605,8 +14605,8 @@
         </p:nvSpPr>
         <p:spPr>
           <a:xfrm>
-            <a:off x="7799832" y="4659782"/>
-            <a:ext cx="3145536" cy="899770"/>
+            <a:off x="7708392" y="4828032"/>
+            <a:ext cx="3282696" cy="749808"/>
           </a:xfrm>
           <a:prstGeom prst="rect">
             <a:avLst/>
@@ -14624,7 +14624,7 @@
               <a:buNone/>
             </a:pPr>
             <a:r>
-              <a:rPr lang="en-US" sz="1320" dirty="0">
+              <a:rPr lang="en-US" sz="1220" dirty="0">
                 <a:solidFill>
                   <a:srgbClr val="17364A"/>
                 </a:solidFill>
@@ -14632,9 +14632,9 @@
                 <a:ea typeface="Aptos" pitchFamily="34" charset="-122"/>
                 <a:cs typeface="Aptos" pitchFamily="34" charset="-120"/>
               </a:rPr>
-              <a:t>Use the assignment to test whether you can explain the concept, apply it to a realistic public health situation, and identify what would need review before the work moves forward.</a:t>
-            </a:r>
-            <a:endParaRPr lang="en-US" sz="1320" dirty="0"/>
+              <a:t>Use the assignment to test whether you can explain the concept, apply it to a.</a:t>
+            </a:r>
+            <a:endParaRPr lang="en-US" sz="1220" dirty="0"/>
           </a:p>
         </p:txBody>
       </p:sp>
@@ -14925,8 +14925,8 @@
         </p:nvSpPr>
         <p:spPr>
           <a:xfrm>
-            <a:off x="868680" y="1508760"/>
-            <a:ext cx="6309360" cy="4160520"/>
+            <a:off x="822960" y="1463040"/>
+            <a:ext cx="6565392" cy="4343400"/>
           </a:xfrm>
           <a:prstGeom prst="rect">
             <a:avLst/>
@@ -14944,7 +14944,7 @@
               <a:buNone/>
             </a:pPr>
             <a:r>
-              <a:rPr lang="en-US" sz="2100" dirty="0">
+              <a:rPr lang="en-US" sz="1920" dirty="0">
                 <a:solidFill>
                   <a:srgbClr val="003A63"/>
                 </a:solidFill>
@@ -14952,16 +14952,16 @@
                 <a:ea typeface="Aptos" pitchFamily="34" charset="-122"/>
                 <a:cs typeface="Aptos" pitchFamily="34" charset="-120"/>
               </a:rPr>
-              <a:t>• AI projects require disciplined implementation planning because they combine technology, data,.</a:t>
-            </a:r>
-            <a:endParaRPr lang="en-US" sz="2100" dirty="0"/>
-          </a:p>
-          <a:p>
-            <a:pPr indent="0" marL="0">
-              <a:buNone/>
-            </a:pPr>
-            <a:r>
-              <a:rPr lang="en-US" sz="2100" dirty="0">
+              <a:t>• AI projects require disciplined implementation planning because they combine.</a:t>
+            </a:r>
+            <a:endParaRPr lang="en-US" sz="1920" dirty="0"/>
+          </a:p>
+          <a:p>
+            <a:pPr indent="0" marL="0">
+              <a:buNone/>
+            </a:pPr>
+            <a:r>
+              <a:rPr lang="en-US" sz="1920" dirty="0">
                 <a:solidFill>
                   <a:srgbClr val="003A63"/>
                 </a:solidFill>
@@ -14969,16 +14969,16 @@
                 <a:ea typeface="Aptos" pitchFamily="34" charset="-122"/>
                 <a:cs typeface="Aptos" pitchFamily="34" charset="-120"/>
               </a:rPr>
-              <a:t>• A project that appears small, such as adding an AI summarization tool, may still require data.</a:t>
-            </a:r>
-            <a:endParaRPr lang="en-US" sz="2100" dirty="0"/>
-          </a:p>
-          <a:p>
-            <a:pPr indent="0" marL="0">
-              <a:buNone/>
-            </a:pPr>
-            <a:r>
-              <a:rPr lang="en-US" sz="2100" dirty="0">
+              <a:t>• A project that appears small, such as adding an AI summarization tool, may.</a:t>
+            </a:r>
+            <a:endParaRPr lang="en-US" sz="1920" dirty="0"/>
+          </a:p>
+          <a:p>
+            <a:pPr indent="0" marL="0">
+              <a:buNone/>
+            </a:pPr>
+            <a:r>
+              <a:rPr lang="en-US" sz="1920" dirty="0">
                 <a:solidFill>
                   <a:srgbClr val="003A63"/>
                 </a:solidFill>
@@ -14986,9 +14986,9 @@
                 <a:ea typeface="Aptos" pitchFamily="34" charset="-122"/>
                 <a:cs typeface="Aptos" pitchFamily="34" charset="-120"/>
               </a:rPr>
-              <a:t>• Public health agencies need project management methods that account for these dependencies.</a:t>
-            </a:r>
-            <a:endParaRPr lang="en-US" sz="2100" dirty="0"/>
+              <a:t>• Public health agencies need project management methods that account for.</a:t>
+            </a:r>
+            <a:endParaRPr lang="en-US" sz="1920" dirty="0"/>
           </a:p>
         </p:txBody>
       </p:sp>
@@ -15000,12 +15000,12 @@
         </p:nvSpPr>
         <p:spPr>
           <a:xfrm>
-            <a:off x="7635240" y="1325880"/>
-            <a:ext cx="3474720" cy="1255471"/>
+            <a:off x="7543800" y="1325880"/>
+            <a:ext cx="3611880" cy="1261872"/>
           </a:xfrm>
           <a:prstGeom prst="roundRect">
             <a:avLst>
-              <a:gd name="adj" fmla="val 8740"/>
+              <a:gd name="adj" fmla="val 8696"/>
             </a:avLst>
           </a:prstGeom>
           <a:solidFill>
@@ -15027,8 +15027,8 @@
         </p:nvSpPr>
         <p:spPr>
           <a:xfrm>
-            <a:off x="7799832" y="1472184"/>
-            <a:ext cx="3145536" cy="256032"/>
+            <a:off x="7708392" y="1453896"/>
+            <a:ext cx="3282696" cy="228600"/>
           </a:xfrm>
           <a:prstGeom prst="rect">
             <a:avLst/>
@@ -15044,7 +15044,7 @@
               <a:buNone/>
             </a:pPr>
             <a:r>
-              <a:rPr lang="en-US" sz="1300" b="1" dirty="0">
+              <a:rPr lang="en-US" sz="1220" b="1" dirty="0">
                 <a:solidFill>
                   <a:srgbClr val="0068B7"/>
                 </a:solidFill>
@@ -15054,7 +15054,7 @@
               </a:rPr>
               <a:t>Implementation cue</a:t>
             </a:r>
-            <a:endParaRPr lang="en-US" sz="1300" dirty="0"/>
+            <a:endParaRPr lang="en-US" sz="1220" dirty="0"/>
           </a:p>
         </p:txBody>
       </p:sp>
@@ -15066,8 +15066,8 @@
         </p:nvSpPr>
         <p:spPr>
           <a:xfrm>
-            <a:off x="7799832" y="1801368"/>
-            <a:ext cx="3145536" cy="688543"/>
+            <a:off x="7708392" y="1764792"/>
+            <a:ext cx="3282696" cy="749808"/>
           </a:xfrm>
           <a:prstGeom prst="rect">
             <a:avLst/>
@@ -15085,7 +15085,7 @@
               <a:buNone/>
             </a:pPr>
             <a:r>
-              <a:rPr lang="en-US" sz="1320" dirty="0">
+              <a:rPr lang="en-US" sz="1220" dirty="0">
                 <a:solidFill>
                   <a:srgbClr val="17364A"/>
                 </a:solidFill>
@@ -15093,9 +15093,9 @@
                 <a:ea typeface="Aptos" pitchFamily="34" charset="-122"/>
                 <a:cs typeface="Aptos" pitchFamily="34" charset="-120"/>
               </a:rPr>
-              <a:t>AI projects require disciplined implementation planning because they combine technology, data,.</a:t>
-            </a:r>
-            <a:endParaRPr lang="en-US" sz="1320" dirty="0"/>
+              <a:t>AI projects require disciplined implementation planning because they combine.</a:t>
+            </a:r>
+            <a:endParaRPr lang="en-US" sz="1220" dirty="0"/>
           </a:p>
         </p:txBody>
       </p:sp>
@@ -15107,12 +15107,12 @@
         </p:nvSpPr>
         <p:spPr>
           <a:xfrm>
-            <a:off x="7635240" y="2718511"/>
-            <a:ext cx="3474720" cy="1328623"/>
+            <a:off x="7543800" y="2724912"/>
+            <a:ext cx="3611880" cy="1527048"/>
           </a:xfrm>
           <a:prstGeom prst="roundRect">
             <a:avLst>
-              <a:gd name="adj" fmla="val 8259"/>
+              <a:gd name="adj" fmla="val 7186"/>
             </a:avLst>
           </a:prstGeom>
           <a:solidFill>
@@ -15134,24 +15134,26 @@
         </p:nvSpPr>
         <p:spPr>
           <a:xfrm>
-            <a:off x="7799832" y="2846527"/>
-            <a:ext cx="3145536" cy="237744"/>
-          </a:xfrm>
-          <a:prstGeom prst="rect">
-            <a:avLst/>
-          </a:prstGeom>
-          <a:noFill/>
-          <a:ln/>
-        </p:spPr>
-        <p:txBody>
-          <a:bodyPr wrap="square" lIns="0" tIns="0" rIns="0" bIns="0" rtlCol="0" anchor="ctr"/>
-          <a:lstStyle/>
-          <a:p>
-            <a:pPr indent="0" marL="0">
-              <a:buNone/>
-            </a:pPr>
-            <a:r>
-              <a:rPr lang="en-US" sz="1250" b="1" dirty="0">
+            <a:off x="7708392" y="2852928"/>
+            <a:ext cx="3282696" cy="219456"/>
+          </a:xfrm>
+          <a:prstGeom prst="rect">
+            <a:avLst/>
+          </a:prstGeom>
+          <a:noFill/>
+          <a:ln/>
+        </p:spPr>
+        <p:txBody>
+          <a:bodyPr wrap="square" lIns="0" tIns="0" rIns="0" bIns="0" rtlCol="0" anchor="ctr">
+            <a:normAutofit/>
+          </a:bodyPr>
+          <a:lstStyle/>
+          <a:p>
+            <a:pPr indent="0" marL="0">
+              <a:buNone/>
+            </a:pPr>
+            <a:r>
+              <a:rPr lang="en-US" sz="1160" b="1" dirty="0">
                 <a:solidFill>
                   <a:srgbClr val="0068B7"/>
                 </a:solidFill>
@@ -15161,7 +15163,7 @@
               </a:rPr>
               <a:t>Implementation path</a:t>
             </a:r>
-            <a:endParaRPr lang="en-US" sz="1250" dirty="0"/>
+            <a:endParaRPr lang="en-US" sz="1160" dirty="0"/>
           </a:p>
         </p:txBody>
       </p:sp>
@@ -15173,7 +15175,7 @@
         </p:nvSpPr>
         <p:spPr>
           <a:xfrm>
-            <a:off x="8763000" y="3399739"/>
+            <a:off x="8717280" y="3406140"/>
             <a:ext cx="164592" cy="0"/>
           </a:xfrm>
           <a:prstGeom prst="line">
@@ -15196,8 +15198,8 @@
         </p:nvSpPr>
         <p:spPr>
           <a:xfrm>
-            <a:off x="7872984" y="3248863"/>
-            <a:ext cx="890016" cy="301752"/>
+            <a:off x="7781544" y="3255264"/>
+            <a:ext cx="935736" cy="301752"/>
           </a:xfrm>
           <a:prstGeom prst="roundRect">
             <a:avLst>
@@ -15223,8 +15225,8 @@
         </p:nvSpPr>
         <p:spPr>
           <a:xfrm>
-            <a:off x="7909560" y="3322015"/>
-            <a:ext cx="816864" cy="146304"/>
+            <a:off x="7818120" y="3328416"/>
+            <a:ext cx="862584" cy="146304"/>
           </a:xfrm>
           <a:prstGeom prst="rect">
             <a:avLst/>
@@ -15264,7 +15266,7 @@
         </p:nvSpPr>
         <p:spPr>
           <a:xfrm>
-            <a:off x="9817608" y="3399739"/>
+            <a:off x="9817608" y="3406140"/>
             <a:ext cx="164592" cy="0"/>
           </a:xfrm>
           <a:prstGeom prst="line">
@@ -15287,8 +15289,8 @@
         </p:nvSpPr>
         <p:spPr>
           <a:xfrm>
-            <a:off x="8927592" y="3248863"/>
-            <a:ext cx="890016" cy="301752"/>
+            <a:off x="8881872" y="3255264"/>
+            <a:ext cx="935736" cy="301752"/>
           </a:xfrm>
           <a:prstGeom prst="roundRect">
             <a:avLst>
@@ -15314,8 +15316,8 @@
         </p:nvSpPr>
         <p:spPr>
           <a:xfrm>
-            <a:off x="8964168" y="3322015"/>
-            <a:ext cx="816864" cy="146304"/>
+            <a:off x="8918448" y="3328416"/>
+            <a:ext cx="862584" cy="146304"/>
           </a:xfrm>
           <a:prstGeom prst="rect">
             <a:avLst/>
@@ -15355,8 +15357,8 @@
         </p:nvSpPr>
         <p:spPr>
           <a:xfrm>
-            <a:off x="9982200" y="3248863"/>
-            <a:ext cx="890016" cy="301752"/>
+            <a:off x="9982200" y="3255264"/>
+            <a:ext cx="935736" cy="301752"/>
           </a:xfrm>
           <a:prstGeom prst="roundRect">
             <a:avLst>
@@ -15382,8 +15384,8 @@
         </p:nvSpPr>
         <p:spPr>
           <a:xfrm>
-            <a:off x="10018776" y="3322015"/>
-            <a:ext cx="816864" cy="146304"/>
+            <a:off x="10018776" y="3328416"/>
+            <a:ext cx="862584" cy="146304"/>
           </a:xfrm>
           <a:prstGeom prst="rect">
             <a:avLst/>
@@ -15423,8 +15425,8 @@
         </p:nvSpPr>
         <p:spPr>
           <a:xfrm>
-            <a:off x="7854696" y="3742639"/>
-            <a:ext cx="3035808" cy="158191"/>
+            <a:off x="7763256" y="3749040"/>
+            <a:ext cx="3172968" cy="356616"/>
           </a:xfrm>
           <a:prstGeom prst="rect">
             <a:avLst/>
@@ -15442,7 +15444,7 @@
               <a:buNone/>
             </a:pPr>
             <a:r>
-              <a:rPr lang="en-US" sz="1120" dirty="0">
+              <a:rPr lang="en-US" sz="1040" dirty="0">
                 <a:solidFill>
                   <a:srgbClr val="17364A"/>
                 </a:solidFill>
@@ -15450,9 +15452,9 @@
                 <a:ea typeface="Aptos" pitchFamily="34" charset="-122"/>
                 <a:cs typeface="Aptos" pitchFamily="34" charset="-120"/>
               </a:rPr>
-              <a:t>Implementation work should make dependencies, approvals, training, and sustainment visible before launch.</a:t>
-            </a:r>
-            <a:endParaRPr lang="en-US" sz="1120" dirty="0"/>
+              <a:t>Implementation work should make dependencies, approvals, training, and.</a:t>
+            </a:r>
+            <a:endParaRPr lang="en-US" sz="1040" dirty="0"/>
           </a:p>
         </p:txBody>
       </p:sp>
@@ -15464,12 +15466,12 @@
         </p:nvSpPr>
         <p:spPr>
           <a:xfrm>
-            <a:off x="7635240" y="4184294"/>
-            <a:ext cx="3474720" cy="1466698"/>
+            <a:off x="7543800" y="4389120"/>
+            <a:ext cx="3611880" cy="1261872"/>
           </a:xfrm>
           <a:prstGeom prst="roundRect">
             <a:avLst>
-              <a:gd name="adj" fmla="val 7481"/>
+              <a:gd name="adj" fmla="val 8696"/>
             </a:avLst>
           </a:prstGeom>
           <a:solidFill>
@@ -15491,8 +15493,8 @@
         </p:nvSpPr>
         <p:spPr>
           <a:xfrm>
-            <a:off x="7799832" y="4330598"/>
-            <a:ext cx="3145536" cy="256032"/>
+            <a:off x="7708392" y="4517136"/>
+            <a:ext cx="3282696" cy="228600"/>
           </a:xfrm>
           <a:prstGeom prst="rect">
             <a:avLst/>
@@ -15508,7 +15510,7 @@
               <a:buNone/>
             </a:pPr>
             <a:r>
-              <a:rPr lang="en-US" sz="1300" b="1" dirty="0">
+              <a:rPr lang="en-US" sz="1220" b="1" dirty="0">
                 <a:solidFill>
                   <a:srgbClr val="0068B7"/>
                 </a:solidFill>
@@ -15518,7 +15520,7 @@
               </a:rPr>
               <a:t>Next action</a:t>
             </a:r>
-            <a:endParaRPr lang="en-US" sz="1300" dirty="0"/>
+            <a:endParaRPr lang="en-US" sz="1220" dirty="0"/>
           </a:p>
         </p:txBody>
       </p:sp>
@@ -15530,8 +15532,8 @@
         </p:nvSpPr>
         <p:spPr>
           <a:xfrm>
-            <a:off x="7799832" y="4659782"/>
-            <a:ext cx="3145536" cy="899770"/>
+            <a:off x="7708392" y="4828032"/>
+            <a:ext cx="3282696" cy="749808"/>
           </a:xfrm>
           <a:prstGeom prst="rect">
             <a:avLst/>
@@ -15549,7 +15551,7 @@
               <a:buNone/>
             </a:pPr>
             <a:r>
-              <a:rPr lang="en-US" sz="1320" dirty="0">
+              <a:rPr lang="en-US" sz="1220" dirty="0">
                 <a:solidFill>
                   <a:srgbClr val="17364A"/>
                 </a:solidFill>
@@ -15557,9 +15559,9 @@
                 <a:ea typeface="Aptos" pitchFamily="34" charset="-122"/>
                 <a:cs typeface="Aptos" pitchFamily="34" charset="-120"/>
               </a:rPr>
-              <a:t>Use the concept to clarify workflow changes, dependencies, staffing, procurement requirements, training needs, and implementation checkpoints.</a:t>
-            </a:r>
-            <a:endParaRPr lang="en-US" sz="1320" dirty="0"/>
+              <a:t>Use the concept to clarify workflow changes, dependencies, staffing, procurement.</a:t>
+            </a:r>
+            <a:endParaRPr lang="en-US" sz="1220" dirty="0"/>
           </a:p>
         </p:txBody>
       </p:sp>
@@ -15850,8 +15852,8 @@
         </p:nvSpPr>
         <p:spPr>
           <a:xfrm>
-            <a:off x="868680" y="1508760"/>
-            <a:ext cx="6309360" cy="4160520"/>
+            <a:off x="822960" y="1463040"/>
+            <a:ext cx="6565392" cy="4343400"/>
           </a:xfrm>
           <a:prstGeom prst="rect">
             <a:avLst/>
@@ -15869,7 +15871,7 @@
               <a:buNone/>
             </a:pPr>
             <a:r>
-              <a:rPr lang="en-US" sz="2100" dirty="0">
+              <a:rPr lang="en-US" sz="1920" dirty="0">
                 <a:solidFill>
                   <a:srgbClr val="003A63"/>
                 </a:solidFill>
@@ -15877,16 +15879,16 @@
                 <a:ea typeface="Aptos" pitchFamily="34" charset="-122"/>
                 <a:cs typeface="Aptos" pitchFamily="34" charset="-120"/>
               </a:rPr>
-              <a:t>• A public health agency plans to pilot an AI tool that drafts summaries of incoming case reports.</a:t>
-            </a:r>
-            <a:endParaRPr lang="en-US" sz="2100" dirty="0"/>
-          </a:p>
-          <a:p>
-            <a:pPr indent="0" marL="0">
-              <a:buNone/>
-            </a:pPr>
-            <a:r>
-              <a:rPr lang="en-US" sz="2100" dirty="0">
+              <a:t>• A public health agency plans to pilot an AI tool that drafts summaries of.</a:t>
+            </a:r>
+            <a:endParaRPr lang="en-US" sz="1920" dirty="0"/>
+          </a:p>
+          <a:p>
+            <a:pPr indent="0" marL="0">
+              <a:buNone/>
+            </a:pPr>
+            <a:r>
+              <a:rPr lang="en-US" sz="1920" dirty="0">
                 <a:solidFill>
                   <a:srgbClr val="003A63"/>
                 </a:solidFill>
@@ -15894,16 +15896,16 @@
                 <a:ea typeface="Aptos" pitchFamily="34" charset="-122"/>
                 <a:cs typeface="Aptos" pitchFamily="34" charset="-120"/>
               </a:rPr>
-              <a:t>• The project plan identifies governance approval, data access, system integration, validation,.</a:t>
-            </a:r>
-            <a:endParaRPr lang="en-US" sz="2100" dirty="0"/>
-          </a:p>
-          <a:p>
-            <a:pPr indent="0" marL="0">
-              <a:buNone/>
-            </a:pPr>
-            <a:r>
-              <a:rPr lang="en-US" sz="2100" dirty="0">
+              <a:t>• The project plan identifies governance approval, data access, system.</a:t>
+            </a:r>
+            <a:endParaRPr lang="en-US" sz="1920" dirty="0"/>
+          </a:p>
+          <a:p>
+            <a:pPr indent="0" marL="0">
+              <a:buNone/>
+            </a:pPr>
+            <a:r>
+              <a:rPr lang="en-US" sz="1920" dirty="0">
                 <a:solidFill>
                   <a:srgbClr val="003A63"/>
                 </a:solidFill>
@@ -15913,7 +15915,7 @@
               </a:rPr>
               <a:t>• The project cannot launch simply because the tool works in a demonstration.</a:t>
             </a:r>
-            <a:endParaRPr lang="en-US" sz="2100" dirty="0"/>
+            <a:endParaRPr lang="en-US" sz="1920" dirty="0"/>
           </a:p>
         </p:txBody>
       </p:sp>
@@ -15925,12 +15927,12 @@
         </p:nvSpPr>
         <p:spPr>
           <a:xfrm>
-            <a:off x="7635240" y="1325880"/>
-            <a:ext cx="3474720" cy="1255471"/>
+            <a:off x="7543800" y="1325880"/>
+            <a:ext cx="3611880" cy="1261872"/>
           </a:xfrm>
           <a:prstGeom prst="roundRect">
             <a:avLst>
-              <a:gd name="adj" fmla="val 8740"/>
+              <a:gd name="adj" fmla="val 8696"/>
             </a:avLst>
           </a:prstGeom>
           <a:solidFill>
@@ -15952,8 +15954,8 @@
         </p:nvSpPr>
         <p:spPr>
           <a:xfrm>
-            <a:off x="7799832" y="1472184"/>
-            <a:ext cx="3145536" cy="256032"/>
+            <a:off x="7708392" y="1453896"/>
+            <a:ext cx="3282696" cy="228600"/>
           </a:xfrm>
           <a:prstGeom prst="rect">
             <a:avLst/>
@@ -15969,7 +15971,7 @@
               <a:buNone/>
             </a:pPr>
             <a:r>
-              <a:rPr lang="en-US" sz="1300" b="1" dirty="0">
+              <a:rPr lang="en-US" sz="1220" b="1" dirty="0">
                 <a:solidFill>
                   <a:srgbClr val="0068B7"/>
                 </a:solidFill>
@@ -15979,7 +15981,7 @@
               </a:rPr>
               <a:t>Implementation cue</a:t>
             </a:r>
-            <a:endParaRPr lang="en-US" sz="1300" dirty="0"/>
+            <a:endParaRPr lang="en-US" sz="1220" dirty="0"/>
           </a:p>
         </p:txBody>
       </p:sp>
@@ -15991,8 +15993,8 @@
         </p:nvSpPr>
         <p:spPr>
           <a:xfrm>
-            <a:off x="7799832" y="1801368"/>
-            <a:ext cx="3145536" cy="688543"/>
+            <a:off x="7708392" y="1764792"/>
+            <a:ext cx="3282696" cy="749808"/>
           </a:xfrm>
           <a:prstGeom prst="rect">
             <a:avLst/>
@@ -16010,7 +16012,7 @@
               <a:buNone/>
             </a:pPr>
             <a:r>
-              <a:rPr lang="en-US" sz="1320" dirty="0">
+              <a:rPr lang="en-US" sz="1220" dirty="0">
                 <a:solidFill>
                   <a:srgbClr val="17364A"/>
                 </a:solidFill>
@@ -16018,9 +16020,9 @@
                 <a:ea typeface="Aptos" pitchFamily="34" charset="-122"/>
                 <a:cs typeface="Aptos" pitchFamily="34" charset="-120"/>
               </a:rPr>
-              <a:t>A public health agency plans to pilot an AI tool that drafts summaries of incoming case reports.</a:t>
-            </a:r>
-            <a:endParaRPr lang="en-US" sz="1320" dirty="0"/>
+              <a:t>A public health agency plans to pilot an AI tool that drafts summaries of.</a:t>
+            </a:r>
+            <a:endParaRPr lang="en-US" sz="1220" dirty="0"/>
           </a:p>
         </p:txBody>
       </p:sp>
@@ -16032,12 +16034,12 @@
         </p:nvSpPr>
         <p:spPr>
           <a:xfrm>
-            <a:off x="7635240" y="2718511"/>
-            <a:ext cx="3474720" cy="1328623"/>
+            <a:off x="7543800" y="2724912"/>
+            <a:ext cx="3611880" cy="1527048"/>
           </a:xfrm>
           <a:prstGeom prst="roundRect">
             <a:avLst>
-              <a:gd name="adj" fmla="val 8259"/>
+              <a:gd name="adj" fmla="val 7186"/>
             </a:avLst>
           </a:prstGeom>
           <a:solidFill>
@@ -16059,8 +16061,8 @@
         </p:nvSpPr>
         <p:spPr>
           <a:xfrm>
-            <a:off x="7799832" y="2864815"/>
-            <a:ext cx="3145536" cy="256032"/>
+            <a:off x="7708392" y="2852928"/>
+            <a:ext cx="3282696" cy="228600"/>
           </a:xfrm>
           <a:prstGeom prst="rect">
             <a:avLst/>
@@ -16076,7 +16078,7 @@
               <a:buNone/>
             </a:pPr>
             <a:r>
-              <a:rPr lang="en-US" sz="1300" b="1" dirty="0">
+              <a:rPr lang="en-US" sz="1220" b="1" dirty="0">
                 <a:solidFill>
                   <a:srgbClr val="0068B7"/>
                 </a:solidFill>
@@ -16086,7 +16088,7 @@
               </a:rPr>
               <a:t>Concept checkpoints</a:t>
             </a:r>
-            <a:endParaRPr lang="en-US" sz="1300" dirty="0"/>
+            <a:endParaRPr lang="en-US" sz="1220" dirty="0"/>
           </a:p>
         </p:txBody>
       </p:sp>
@@ -16098,8 +16100,8 @@
         </p:nvSpPr>
         <p:spPr>
           <a:xfrm>
-            <a:off x="7818120" y="3230575"/>
-            <a:ext cx="3090672" cy="670255"/>
+            <a:off x="7726680" y="3182112"/>
+            <a:ext cx="3227832" cy="960120"/>
           </a:xfrm>
           <a:prstGeom prst="rect">
             <a:avLst/>
@@ -16117,7 +16119,7 @@
               <a:buNone/>
             </a:pPr>
             <a:r>
-              <a:rPr lang="en-US" sz="1220" dirty="0">
+              <a:rPr lang="en-US" sz="1140" dirty="0">
                 <a:solidFill>
                   <a:srgbClr val="17364A"/>
                 </a:solidFill>
@@ -16125,16 +16127,16 @@
                 <a:ea typeface="Aptos" pitchFamily="34" charset="-122"/>
                 <a:cs typeface="Aptos" pitchFamily="34" charset="-120"/>
               </a:rPr>
-              <a:t>The project plan identifies governance approval, data access,.</a:t>
-            </a:r>
-            <a:endParaRPr lang="en-US" sz="1220" dirty="0"/>
-          </a:p>
-          <a:p>
-            <a:pPr indent="0" marL="0">
-              <a:buNone/>
-            </a:pPr>
-            <a:r>
-              <a:rPr lang="en-US" sz="1220" dirty="0">
+              <a:t>The project plan identifies governance approval,.</a:t>
+            </a:r>
+            <a:endParaRPr lang="en-US" sz="1140" dirty="0"/>
+          </a:p>
+          <a:p>
+            <a:pPr indent="0" marL="0">
+              <a:buNone/>
+            </a:pPr>
+            <a:r>
+              <a:rPr lang="en-US" sz="1140" dirty="0">
                 <a:solidFill>
                   <a:srgbClr val="17364A"/>
                 </a:solidFill>
@@ -16142,9 +16144,9 @@
                 <a:ea typeface="Aptos" pitchFamily="34" charset="-122"/>
                 <a:cs typeface="Aptos" pitchFamily="34" charset="-120"/>
               </a:rPr>
-              <a:t>It must pass readiness checks showing that staff know how to.</a:t>
-            </a:r>
-            <a:endParaRPr lang="en-US" sz="1220" dirty="0"/>
+              <a:t>It must pass readiness checks showing that staff.</a:t>
+            </a:r>
+            <a:endParaRPr lang="en-US" sz="1140" dirty="0"/>
           </a:p>
         </p:txBody>
       </p:sp>
@@ -16156,12 +16158,12 @@
         </p:nvSpPr>
         <p:spPr>
           <a:xfrm>
-            <a:off x="7635240" y="4184294"/>
-            <a:ext cx="3474720" cy="1466698"/>
+            <a:off x="7543800" y="4389120"/>
+            <a:ext cx="3611880" cy="1261872"/>
           </a:xfrm>
           <a:prstGeom prst="roundRect">
             <a:avLst>
-              <a:gd name="adj" fmla="val 7481"/>
+              <a:gd name="adj" fmla="val 8696"/>
             </a:avLst>
           </a:prstGeom>
           <a:solidFill>
@@ -16183,8 +16185,8 @@
         </p:nvSpPr>
         <p:spPr>
           <a:xfrm>
-            <a:off x="7799832" y="4330598"/>
-            <a:ext cx="3145536" cy="256032"/>
+            <a:off x="7708392" y="4517136"/>
+            <a:ext cx="3282696" cy="228600"/>
           </a:xfrm>
           <a:prstGeom prst="rect">
             <a:avLst/>
@@ -16200,7 +16202,7 @@
               <a:buNone/>
             </a:pPr>
             <a:r>
-              <a:rPr lang="en-US" sz="1300" b="1" dirty="0">
+              <a:rPr lang="en-US" sz="1220" b="1" dirty="0">
                 <a:solidFill>
                   <a:srgbClr val="0068B7"/>
                 </a:solidFill>
@@ -16210,7 +16212,7 @@
               </a:rPr>
               <a:t>Next action</a:t>
             </a:r>
-            <a:endParaRPr lang="en-US" sz="1300" dirty="0"/>
+            <a:endParaRPr lang="en-US" sz="1220" dirty="0"/>
           </a:p>
         </p:txBody>
       </p:sp>
@@ -16222,8 +16224,8 @@
         </p:nvSpPr>
         <p:spPr>
           <a:xfrm>
-            <a:off x="7799832" y="4659782"/>
-            <a:ext cx="3145536" cy="899770"/>
+            <a:off x="7708392" y="4828032"/>
+            <a:ext cx="3282696" cy="749808"/>
           </a:xfrm>
           <a:prstGeom prst="rect">
             <a:avLst/>
@@ -16241,7 +16243,7 @@
               <a:buNone/>
             </a:pPr>
             <a:r>
-              <a:rPr lang="en-US" sz="1320" dirty="0">
+              <a:rPr lang="en-US" sz="1220" dirty="0">
                 <a:solidFill>
                   <a:srgbClr val="17364A"/>
                 </a:solidFill>
@@ -16249,9 +16251,9 @@
                 <a:ea typeface="Aptos" pitchFamily="34" charset="-122"/>
                 <a:cs typeface="Aptos" pitchFamily="34" charset="-120"/>
               </a:rPr>
-              <a:t>Use the concept to clarify workflow changes, dependencies, staffing, procurement requirements, training needs, and implementation checkpoints.</a:t>
-            </a:r>
-            <a:endParaRPr lang="en-US" sz="1320" dirty="0"/>
+              <a:t>Use the concept to clarify workflow changes, dependencies, staffing, procurement.</a:t>
+            </a:r>
+            <a:endParaRPr lang="en-US" sz="1220" dirty="0"/>
           </a:p>
         </p:txBody>
       </p:sp>
@@ -16542,8 +16544,8 @@
         </p:nvSpPr>
         <p:spPr>
           <a:xfrm>
-            <a:off x="868680" y="1508760"/>
-            <a:ext cx="6309360" cy="4160520"/>
+            <a:off x="822960" y="1463040"/>
+            <a:ext cx="6565392" cy="4343400"/>
           </a:xfrm>
           <a:prstGeom prst="rect">
             <a:avLst/>
@@ -16561,7 +16563,7 @@
               <a:buNone/>
             </a:pPr>
             <a:r>
-              <a:rPr lang="en-US" sz="2100" dirty="0">
+              <a:rPr lang="en-US" sz="1920" dirty="0">
                 <a:solidFill>
                   <a:srgbClr val="003A63"/>
                 </a:solidFill>
@@ -16569,16 +16571,16 @@
                 <a:ea typeface="Aptos" pitchFamily="34" charset="-122"/>
                 <a:cs typeface="Aptos" pitchFamily="34" charset="-120"/>
               </a:rPr>
-              <a:t>• AI project planning should begin with a charter that defines the use case and sets boundaries.</a:t>
-            </a:r>
-            <a:endParaRPr lang="en-US" sz="2100" dirty="0"/>
-          </a:p>
-          <a:p>
-            <a:pPr indent="0" marL="0">
-              <a:buNone/>
-            </a:pPr>
-            <a:r>
-              <a:rPr lang="en-US" sz="2100" dirty="0">
+              <a:t>• AI project planning should begin with a charter that defines the use case.</a:t>
+            </a:r>
+            <a:endParaRPr lang="en-US" sz="1920" dirty="0"/>
+          </a:p>
+          <a:p>
+            <a:pPr indent="0" marL="0">
+              <a:buNone/>
+            </a:pPr>
+            <a:r>
+              <a:rPr lang="en-US" sz="1920" dirty="0">
                 <a:solidFill>
                   <a:srgbClr val="003A63"/>
                 </a:solidFill>
@@ -16586,16 +16588,16 @@
                 <a:ea typeface="Aptos" pitchFamily="34" charset="-122"/>
                 <a:cs typeface="Aptos" pitchFamily="34" charset="-120"/>
               </a:rPr>
-              <a:t>• The charter should explain the public health problem, intended users, expected benefits, data.</a:t>
-            </a:r>
-            <a:endParaRPr lang="en-US" sz="2100" dirty="0"/>
-          </a:p>
-          <a:p>
-            <a:pPr indent="0" marL="0">
-              <a:buNone/>
-            </a:pPr>
-            <a:r>
-              <a:rPr lang="en-US" sz="2100" dirty="0">
+              <a:t>• The charter should explain the public health problem, intended users,.</a:t>
+            </a:r>
+            <a:endParaRPr lang="en-US" sz="1920" dirty="0"/>
+          </a:p>
+          <a:p>
+            <a:pPr indent="0" marL="0">
+              <a:buNone/>
+            </a:pPr>
+            <a:r>
+              <a:rPr lang="en-US" sz="1920" dirty="0">
                 <a:solidFill>
                   <a:srgbClr val="003A63"/>
                 </a:solidFill>
@@ -16603,9 +16605,9 @@
                 <a:ea typeface="Aptos" pitchFamily="34" charset="-122"/>
                 <a:cs typeface="Aptos" pitchFamily="34" charset="-120"/>
               </a:rPr>
-              <a:t>• It should also identify the sponsor, product owner, implementation lead, technical lead,.</a:t>
-            </a:r>
-            <a:endParaRPr lang="en-US" sz="2100" dirty="0"/>
+              <a:t>• It should also identify the sponsor, product owner, implementation lead,.</a:t>
+            </a:r>
+            <a:endParaRPr lang="en-US" sz="1920" dirty="0"/>
           </a:p>
         </p:txBody>
       </p:sp>
@@ -16617,12 +16619,12 @@
         </p:nvSpPr>
         <p:spPr>
           <a:xfrm>
-            <a:off x="7635240" y="1325880"/>
-            <a:ext cx="3474720" cy="1207008"/>
+            <a:off x="7543800" y="1325880"/>
+            <a:ext cx="3611880" cy="1261872"/>
           </a:xfrm>
           <a:prstGeom prst="roundRect">
             <a:avLst>
-              <a:gd name="adj" fmla="val 9091"/>
+              <a:gd name="adj" fmla="val 8696"/>
             </a:avLst>
           </a:prstGeom>
           <a:solidFill>
@@ -16644,8 +16646,8 @@
         </p:nvSpPr>
         <p:spPr>
           <a:xfrm>
-            <a:off x="7799832" y="1472184"/>
-            <a:ext cx="3145536" cy="256032"/>
+            <a:off x="7708392" y="1453896"/>
+            <a:ext cx="3282696" cy="228600"/>
           </a:xfrm>
           <a:prstGeom prst="rect">
             <a:avLst/>
@@ -16661,7 +16663,7 @@
               <a:buNone/>
             </a:pPr>
             <a:r>
-              <a:rPr lang="en-US" sz="1300" b="1" dirty="0">
+              <a:rPr lang="en-US" sz="1220" b="1" dirty="0">
                 <a:solidFill>
                   <a:srgbClr val="0068B7"/>
                 </a:solidFill>
@@ -16671,7 +16673,7 @@
               </a:rPr>
               <a:t>Implementation cue</a:t>
             </a:r>
-            <a:endParaRPr lang="en-US" sz="1300" dirty="0"/>
+            <a:endParaRPr lang="en-US" sz="1220" dirty="0"/>
           </a:p>
         </p:txBody>
       </p:sp>
@@ -16683,8 +16685,8 @@
         </p:nvSpPr>
         <p:spPr>
           <a:xfrm>
-            <a:off x="7799832" y="1801368"/>
-            <a:ext cx="3145536" cy="640080"/>
+            <a:off x="7708392" y="1764792"/>
+            <a:ext cx="3282696" cy="749808"/>
           </a:xfrm>
           <a:prstGeom prst="rect">
             <a:avLst/>
@@ -16702,7 +16704,7 @@
               <a:buNone/>
             </a:pPr>
             <a:r>
-              <a:rPr lang="en-US" sz="1320" dirty="0">
+              <a:rPr lang="en-US" sz="1220" dirty="0">
                 <a:solidFill>
                   <a:srgbClr val="17364A"/>
                 </a:solidFill>
@@ -16710,9 +16712,9 @@
                 <a:ea typeface="Aptos" pitchFamily="34" charset="-122"/>
                 <a:cs typeface="Aptos" pitchFamily="34" charset="-120"/>
               </a:rPr>
-              <a:t>AI project planning should begin with a charter that defines the use case and sets.</a:t>
-            </a:r>
-            <a:endParaRPr lang="en-US" sz="1320" dirty="0"/>
+              <a:t>AI project planning should begin with a charter that defines the use case and.</a:t>
+            </a:r>
+            <a:endParaRPr lang="en-US" sz="1220" dirty="0"/>
           </a:p>
         </p:txBody>
       </p:sp>
@@ -16724,12 +16726,12 @@
         </p:nvSpPr>
         <p:spPr>
           <a:xfrm>
-            <a:off x="7635240" y="2670048"/>
-            <a:ext cx="3474720" cy="1377086"/>
+            <a:off x="7543800" y="2724912"/>
+            <a:ext cx="3611880" cy="1527048"/>
           </a:xfrm>
           <a:prstGeom prst="roundRect">
             <a:avLst>
-              <a:gd name="adj" fmla="val 7968"/>
+              <a:gd name="adj" fmla="val 7186"/>
             </a:avLst>
           </a:prstGeom>
           <a:solidFill>
@@ -16751,24 +16753,26 @@
         </p:nvSpPr>
         <p:spPr>
           <a:xfrm>
-            <a:off x="7799832" y="2798064"/>
-            <a:ext cx="3145536" cy="237744"/>
-          </a:xfrm>
-          <a:prstGeom prst="rect">
-            <a:avLst/>
-          </a:prstGeom>
-          <a:noFill/>
-          <a:ln/>
-        </p:spPr>
-        <p:txBody>
-          <a:bodyPr wrap="square" lIns="0" tIns="0" rIns="0" bIns="0" rtlCol="0" anchor="ctr"/>
-          <a:lstStyle/>
-          <a:p>
-            <a:pPr indent="0" marL="0">
-              <a:buNone/>
-            </a:pPr>
-            <a:r>
-              <a:rPr lang="en-US" sz="1250" b="1" dirty="0">
+            <a:off x="7708392" y="2852928"/>
+            <a:ext cx="3282696" cy="219456"/>
+          </a:xfrm>
+          <a:prstGeom prst="rect">
+            <a:avLst/>
+          </a:prstGeom>
+          <a:noFill/>
+          <a:ln/>
+        </p:spPr>
+        <p:txBody>
+          <a:bodyPr wrap="square" lIns="0" tIns="0" rIns="0" bIns="0" rtlCol="0" anchor="ctr">
+            <a:normAutofit/>
+          </a:bodyPr>
+          <a:lstStyle/>
+          <a:p>
+            <a:pPr indent="0" marL="0">
+              <a:buNone/>
+            </a:pPr>
+            <a:r>
+              <a:rPr lang="en-US" sz="1160" b="1" dirty="0">
                 <a:solidFill>
                   <a:srgbClr val="0068B7"/>
                 </a:solidFill>
@@ -16778,7 +16782,7 @@
               </a:rPr>
               <a:t>Implementation path</a:t>
             </a:r>
-            <a:endParaRPr lang="en-US" sz="1250" dirty="0"/>
+            <a:endParaRPr lang="en-US" sz="1160" dirty="0"/>
           </a:p>
         </p:txBody>
       </p:sp>
@@ -16790,7 +16794,7 @@
         </p:nvSpPr>
         <p:spPr>
           <a:xfrm>
-            <a:off x="8763000" y="3351276"/>
+            <a:off x="8717280" y="3406140"/>
             <a:ext cx="164592" cy="0"/>
           </a:xfrm>
           <a:prstGeom prst="line">
@@ -16813,8 +16817,8 @@
         </p:nvSpPr>
         <p:spPr>
           <a:xfrm>
-            <a:off x="7872984" y="3200400"/>
-            <a:ext cx="890016" cy="301752"/>
+            <a:off x="7781544" y="3255264"/>
+            <a:ext cx="935736" cy="301752"/>
           </a:xfrm>
           <a:prstGeom prst="roundRect">
             <a:avLst>
@@ -16840,8 +16844,8 @@
         </p:nvSpPr>
         <p:spPr>
           <a:xfrm>
-            <a:off x="7909560" y="3273552"/>
-            <a:ext cx="816864" cy="146304"/>
+            <a:off x="7818120" y="3328416"/>
+            <a:ext cx="862584" cy="146304"/>
           </a:xfrm>
           <a:prstGeom prst="rect">
             <a:avLst/>
@@ -16881,7 +16885,7 @@
         </p:nvSpPr>
         <p:spPr>
           <a:xfrm>
-            <a:off x="9817608" y="3351276"/>
+            <a:off x="9817608" y="3406140"/>
             <a:ext cx="164592" cy="0"/>
           </a:xfrm>
           <a:prstGeom prst="line">
@@ -16904,8 +16908,8 @@
         </p:nvSpPr>
         <p:spPr>
           <a:xfrm>
-            <a:off x="8927592" y="3200400"/>
-            <a:ext cx="890016" cy="301752"/>
+            <a:off x="8881872" y="3255264"/>
+            <a:ext cx="935736" cy="301752"/>
           </a:xfrm>
           <a:prstGeom prst="roundRect">
             <a:avLst>
@@ -16931,8 +16935,8 @@
         </p:nvSpPr>
         <p:spPr>
           <a:xfrm>
-            <a:off x="8964168" y="3273552"/>
-            <a:ext cx="816864" cy="146304"/>
+            <a:off x="8918448" y="3328416"/>
+            <a:ext cx="862584" cy="146304"/>
           </a:xfrm>
           <a:prstGeom prst="rect">
             <a:avLst/>
@@ -16972,8 +16976,8 @@
         </p:nvSpPr>
         <p:spPr>
           <a:xfrm>
-            <a:off x="9982200" y="3200400"/>
-            <a:ext cx="890016" cy="301752"/>
+            <a:off x="9982200" y="3255264"/>
+            <a:ext cx="935736" cy="301752"/>
           </a:xfrm>
           <a:prstGeom prst="roundRect">
             <a:avLst>
@@ -16999,8 +17003,8 @@
         </p:nvSpPr>
         <p:spPr>
           <a:xfrm>
-            <a:off x="10018776" y="3273552"/>
-            <a:ext cx="816864" cy="146304"/>
+            <a:off x="10018776" y="3328416"/>
+            <a:ext cx="862584" cy="146304"/>
           </a:xfrm>
           <a:prstGeom prst="rect">
             <a:avLst/>
@@ -17040,8 +17044,8 @@
         </p:nvSpPr>
         <p:spPr>
           <a:xfrm>
-            <a:off x="7854696" y="3694176"/>
-            <a:ext cx="3035808" cy="206654"/>
+            <a:off x="7763256" y="3749040"/>
+            <a:ext cx="3172968" cy="356616"/>
           </a:xfrm>
           <a:prstGeom prst="rect">
             <a:avLst/>
@@ -17059,7 +17063,7 @@
               <a:buNone/>
             </a:pPr>
             <a:r>
-              <a:rPr lang="en-US" sz="1120" dirty="0">
+              <a:rPr lang="en-US" sz="1040" dirty="0">
                 <a:solidFill>
                   <a:srgbClr val="17364A"/>
                 </a:solidFill>
@@ -17067,9 +17071,9 @@
                 <a:ea typeface="Aptos" pitchFamily="34" charset="-122"/>
                 <a:cs typeface="Aptos" pitchFamily="34" charset="-120"/>
               </a:rPr>
-              <a:t>Implementation work should make dependencies, approvals, training, and sustainment visible before launch.</a:t>
-            </a:r>
-            <a:endParaRPr lang="en-US" sz="1120" dirty="0"/>
+              <a:t>Implementation work should make dependencies, approvals, training, and.</a:t>
+            </a:r>
+            <a:endParaRPr lang="en-US" sz="1040" dirty="0"/>
           </a:p>
         </p:txBody>
       </p:sp>
@@ -17081,12 +17085,12 @@
         </p:nvSpPr>
         <p:spPr>
           <a:xfrm>
-            <a:off x="7635240" y="4184294"/>
-            <a:ext cx="3474720" cy="1466698"/>
+            <a:off x="7543800" y="4389120"/>
+            <a:ext cx="3611880" cy="1261872"/>
           </a:xfrm>
           <a:prstGeom prst="roundRect">
             <a:avLst>
-              <a:gd name="adj" fmla="val 7481"/>
+              <a:gd name="adj" fmla="val 8696"/>
             </a:avLst>
           </a:prstGeom>
           <a:solidFill>
@@ -17108,8 +17112,8 @@
         </p:nvSpPr>
         <p:spPr>
           <a:xfrm>
-            <a:off x="7799832" y="4330598"/>
-            <a:ext cx="3145536" cy="256032"/>
+            <a:off x="7708392" y="4517136"/>
+            <a:ext cx="3282696" cy="228600"/>
           </a:xfrm>
           <a:prstGeom prst="rect">
             <a:avLst/>
@@ -17125,7 +17129,7 @@
               <a:buNone/>
             </a:pPr>
             <a:r>
-              <a:rPr lang="en-US" sz="1300" b="1" dirty="0">
+              <a:rPr lang="en-US" sz="1220" b="1" dirty="0">
                 <a:solidFill>
                   <a:srgbClr val="0068B7"/>
                 </a:solidFill>
@@ -17135,7 +17139,7 @@
               </a:rPr>
               <a:t>Next action</a:t>
             </a:r>
-            <a:endParaRPr lang="en-US" sz="1300" dirty="0"/>
+            <a:endParaRPr lang="en-US" sz="1220" dirty="0"/>
           </a:p>
         </p:txBody>
       </p:sp>
@@ -17147,8 +17151,8 @@
         </p:nvSpPr>
         <p:spPr>
           <a:xfrm>
-            <a:off x="7799832" y="4659782"/>
-            <a:ext cx="3145536" cy="899770"/>
+            <a:off x="7708392" y="4828032"/>
+            <a:ext cx="3282696" cy="749808"/>
           </a:xfrm>
           <a:prstGeom prst="rect">
             <a:avLst/>
@@ -17166,7 +17170,7 @@
               <a:buNone/>
             </a:pPr>
             <a:r>
-              <a:rPr lang="en-US" sz="1320" dirty="0">
+              <a:rPr lang="en-US" sz="1220" dirty="0">
                 <a:solidFill>
                   <a:srgbClr val="17364A"/>
                 </a:solidFill>
@@ -17174,9 +17178,9 @@
                 <a:ea typeface="Aptos" pitchFamily="34" charset="-122"/>
                 <a:cs typeface="Aptos" pitchFamily="34" charset="-120"/>
               </a:rPr>
-              <a:t>Use the concept to clarify workflow changes, dependencies, staffing, procurement requirements, training needs, and implementation checkpoints.</a:t>
-            </a:r>
-            <a:endParaRPr lang="en-US" sz="1320" dirty="0"/>
+              <a:t>Use the concept to clarify workflow changes, dependencies, staffing, procurement.</a:t>
+            </a:r>
+            <a:endParaRPr lang="en-US" sz="1220" dirty="0"/>
           </a:p>
         </p:txBody>
       </p:sp>
@@ -17467,8 +17471,8 @@
         </p:nvSpPr>
         <p:spPr>
           <a:xfrm>
-            <a:off x="868680" y="1508760"/>
-            <a:ext cx="6309360" cy="4160520"/>
+            <a:off x="822960" y="1463040"/>
+            <a:ext cx="6565392" cy="4343400"/>
           </a:xfrm>
           <a:prstGeom prst="rect">
             <a:avLst/>
@@ -17486,7 +17490,7 @@
               <a:buNone/>
             </a:pPr>
             <a:r>
-              <a:rPr lang="en-US" sz="2100" dirty="0">
+              <a:rPr lang="en-US" sz="1920" dirty="0">
                 <a:solidFill>
                   <a:srgbClr val="003A63"/>
                 </a:solidFill>
@@ -17496,14 +17500,14 @@
               </a:rPr>
               <a:t>• Transition to operations is often neglected.</a:t>
             </a:r>
-            <a:endParaRPr lang="en-US" sz="2100" dirty="0"/>
-          </a:p>
-          <a:p>
-            <a:pPr indent="0" marL="0">
-              <a:buNone/>
-            </a:pPr>
-            <a:r>
-              <a:rPr lang="en-US" sz="2100" dirty="0">
+            <a:endParaRPr lang="en-US" sz="1920" dirty="0"/>
+          </a:p>
+          <a:p>
+            <a:pPr indent="0" marL="0">
+              <a:buNone/>
+            </a:pPr>
+            <a:r>
+              <a:rPr lang="en-US" sz="1920" dirty="0">
                 <a:solidFill>
                   <a:srgbClr val="003A63"/>
                 </a:solidFill>
@@ -17511,16 +17515,16 @@
                 <a:ea typeface="Aptos" pitchFamily="34" charset="-122"/>
                 <a:cs typeface="Aptos" pitchFamily="34" charset="-120"/>
               </a:rPr>
-              <a:t>• A pilot may show promise, but routine use requires support, monitoring, maintenance, budget,.</a:t>
-            </a:r>
-            <a:endParaRPr lang="en-US" sz="2100" dirty="0"/>
-          </a:p>
-          <a:p>
-            <a:pPr indent="0" marL="0">
-              <a:buNone/>
-            </a:pPr>
-            <a:r>
-              <a:rPr lang="en-US" sz="2100" dirty="0">
+              <a:t>• A pilot may show promise, but routine use requires support, monitoring,.</a:t>
+            </a:r>
+            <a:endParaRPr lang="en-US" sz="1920" dirty="0"/>
+          </a:p>
+          <a:p>
+            <a:pPr indent="0" marL="0">
+              <a:buNone/>
+            </a:pPr>
+            <a:r>
+              <a:rPr lang="en-US" sz="1920" dirty="0">
                 <a:solidFill>
                   <a:srgbClr val="003A63"/>
                 </a:solidFill>
@@ -17528,9 +17532,9 @@
                 <a:ea typeface="Aptos" pitchFamily="34" charset="-122"/>
                 <a:cs typeface="Aptos" pitchFamily="34" charset="-120"/>
               </a:rPr>
-              <a:t>• The project plan should define when the implementation team ends and who becomes responsible.</a:t>
-            </a:r>
-            <a:endParaRPr lang="en-US" sz="2100" dirty="0"/>
+              <a:t>• The project plan should define when the implementation team ends and who.</a:t>
+            </a:r>
+            <a:endParaRPr lang="en-US" sz="1920" dirty="0"/>
           </a:p>
         </p:txBody>
       </p:sp>
@@ -17542,12 +17546,12 @@
         </p:nvSpPr>
         <p:spPr>
           <a:xfrm>
-            <a:off x="7635240" y="1325880"/>
-            <a:ext cx="3474720" cy="1207008"/>
+            <a:off x="7543800" y="1325880"/>
+            <a:ext cx="3611880" cy="1261872"/>
           </a:xfrm>
           <a:prstGeom prst="roundRect">
             <a:avLst>
-              <a:gd name="adj" fmla="val 9091"/>
+              <a:gd name="adj" fmla="val 8696"/>
             </a:avLst>
           </a:prstGeom>
           <a:solidFill>
@@ -17569,8 +17573,8 @@
         </p:nvSpPr>
         <p:spPr>
           <a:xfrm>
-            <a:off x="7799832" y="1472184"/>
-            <a:ext cx="3145536" cy="256032"/>
+            <a:off x="7708392" y="1453896"/>
+            <a:ext cx="3282696" cy="228600"/>
           </a:xfrm>
           <a:prstGeom prst="rect">
             <a:avLst/>
@@ -17586,7 +17590,7 @@
               <a:buNone/>
             </a:pPr>
             <a:r>
-              <a:rPr lang="en-US" sz="1300" b="1" dirty="0">
+              <a:rPr lang="en-US" sz="1220" b="1" dirty="0">
                 <a:solidFill>
                   <a:srgbClr val="0068B7"/>
                 </a:solidFill>
@@ -17596,7 +17600,7 @@
               </a:rPr>
               <a:t>Implementation cue</a:t>
             </a:r>
-            <a:endParaRPr lang="en-US" sz="1300" dirty="0"/>
+            <a:endParaRPr lang="en-US" sz="1220" dirty="0"/>
           </a:p>
         </p:txBody>
       </p:sp>
@@ -17608,8 +17612,8 @@
         </p:nvSpPr>
         <p:spPr>
           <a:xfrm>
-            <a:off x="7799832" y="1801368"/>
-            <a:ext cx="3145536" cy="640080"/>
+            <a:off x="7708392" y="1764792"/>
+            <a:ext cx="3282696" cy="749808"/>
           </a:xfrm>
           <a:prstGeom prst="rect">
             <a:avLst/>
@@ -17627,7 +17631,7 @@
               <a:buNone/>
             </a:pPr>
             <a:r>
-              <a:rPr lang="en-US" sz="1320" dirty="0">
+              <a:rPr lang="en-US" sz="1220" dirty="0">
                 <a:solidFill>
                   <a:srgbClr val="17364A"/>
                 </a:solidFill>
@@ -17637,7 +17641,7 @@
               </a:rPr>
               <a:t>Transition to operations is often neglected.</a:t>
             </a:r>
-            <a:endParaRPr lang="en-US" sz="1320" dirty="0"/>
+            <a:endParaRPr lang="en-US" sz="1220" dirty="0"/>
           </a:p>
         </p:txBody>
       </p:sp>
@@ -17649,12 +17653,12 @@
         </p:nvSpPr>
         <p:spPr>
           <a:xfrm>
-            <a:off x="7635240" y="2670048"/>
-            <a:ext cx="3474720" cy="1377086"/>
+            <a:off x="7543800" y="2724912"/>
+            <a:ext cx="3611880" cy="1527048"/>
           </a:xfrm>
           <a:prstGeom prst="roundRect">
             <a:avLst>
-              <a:gd name="adj" fmla="val 7968"/>
+              <a:gd name="adj" fmla="val 7186"/>
             </a:avLst>
           </a:prstGeom>
           <a:solidFill>
@@ -17676,24 +17680,26 @@
         </p:nvSpPr>
         <p:spPr>
           <a:xfrm>
-            <a:off x="7799832" y="2798064"/>
-            <a:ext cx="3145536" cy="237744"/>
-          </a:xfrm>
-          <a:prstGeom prst="rect">
-            <a:avLst/>
-          </a:prstGeom>
-          <a:noFill/>
-          <a:ln/>
-        </p:spPr>
-        <p:txBody>
-          <a:bodyPr wrap="square" lIns="0" tIns="0" rIns="0" bIns="0" rtlCol="0" anchor="ctr"/>
-          <a:lstStyle/>
-          <a:p>
-            <a:pPr indent="0" marL="0">
-              <a:buNone/>
-            </a:pPr>
-            <a:r>
-              <a:rPr lang="en-US" sz="1250" b="1" dirty="0">
+            <a:off x="7708392" y="2852928"/>
+            <a:ext cx="3282696" cy="219456"/>
+          </a:xfrm>
+          <a:prstGeom prst="rect">
+            <a:avLst/>
+          </a:prstGeom>
+          <a:noFill/>
+          <a:ln/>
+        </p:spPr>
+        <p:txBody>
+          <a:bodyPr wrap="square" lIns="0" tIns="0" rIns="0" bIns="0" rtlCol="0" anchor="ctr">
+            <a:normAutofit/>
+          </a:bodyPr>
+          <a:lstStyle/>
+          <a:p>
+            <a:pPr indent="0" marL="0">
+              <a:buNone/>
+            </a:pPr>
+            <a:r>
+              <a:rPr lang="en-US" sz="1160" b="1" dirty="0">
                 <a:solidFill>
                   <a:srgbClr val="0068B7"/>
                 </a:solidFill>
@@ -17703,7 +17709,7 @@
               </a:rPr>
               <a:t>Implementation path</a:t>
             </a:r>
-            <a:endParaRPr lang="en-US" sz="1250" dirty="0"/>
+            <a:endParaRPr lang="en-US" sz="1160" dirty="0"/>
           </a:p>
         </p:txBody>
       </p:sp>
@@ -17715,7 +17721,7 @@
         </p:nvSpPr>
         <p:spPr>
           <a:xfrm>
-            <a:off x="8763000" y="3351276"/>
+            <a:off x="8717280" y="3406140"/>
             <a:ext cx="164592" cy="0"/>
           </a:xfrm>
           <a:prstGeom prst="line">
@@ -17738,8 +17744,8 @@
         </p:nvSpPr>
         <p:spPr>
           <a:xfrm>
-            <a:off x="7872984" y="3200400"/>
-            <a:ext cx="890016" cy="301752"/>
+            <a:off x="7781544" y="3255264"/>
+            <a:ext cx="935736" cy="301752"/>
           </a:xfrm>
           <a:prstGeom prst="roundRect">
             <a:avLst>
@@ -17765,8 +17771,8 @@
         </p:nvSpPr>
         <p:spPr>
           <a:xfrm>
-            <a:off x="7909560" y="3273552"/>
-            <a:ext cx="816864" cy="146304"/>
+            <a:off x="7818120" y="3328416"/>
+            <a:ext cx="862584" cy="146304"/>
           </a:xfrm>
           <a:prstGeom prst="rect">
             <a:avLst/>
@@ -17806,7 +17812,7 @@
         </p:nvSpPr>
         <p:spPr>
           <a:xfrm>
-            <a:off x="9817608" y="3351276"/>
+            <a:off x="9817608" y="3406140"/>
             <a:ext cx="164592" cy="0"/>
           </a:xfrm>
           <a:prstGeom prst="line">
@@ -17829,8 +17835,8 @@
         </p:nvSpPr>
         <p:spPr>
           <a:xfrm>
-            <a:off x="8927592" y="3200400"/>
-            <a:ext cx="890016" cy="301752"/>
+            <a:off x="8881872" y="3255264"/>
+            <a:ext cx="935736" cy="301752"/>
           </a:xfrm>
           <a:prstGeom prst="roundRect">
             <a:avLst>
@@ -17856,8 +17862,8 @@
         </p:nvSpPr>
         <p:spPr>
           <a:xfrm>
-            <a:off x="8964168" y="3273552"/>
-            <a:ext cx="816864" cy="146304"/>
+            <a:off x="8918448" y="3328416"/>
+            <a:ext cx="862584" cy="146304"/>
           </a:xfrm>
           <a:prstGeom prst="rect">
             <a:avLst/>
@@ -17897,8 +17903,8 @@
         </p:nvSpPr>
         <p:spPr>
           <a:xfrm>
-            <a:off x="9982200" y="3200400"/>
-            <a:ext cx="890016" cy="301752"/>
+            <a:off x="9982200" y="3255264"/>
+            <a:ext cx="935736" cy="301752"/>
           </a:xfrm>
           <a:prstGeom prst="roundRect">
             <a:avLst>
@@ -17924,8 +17930,8 @@
         </p:nvSpPr>
         <p:spPr>
           <a:xfrm>
-            <a:off x="10018776" y="3273552"/>
-            <a:ext cx="816864" cy="146304"/>
+            <a:off x="10018776" y="3328416"/>
+            <a:ext cx="862584" cy="146304"/>
           </a:xfrm>
           <a:prstGeom prst="rect">
             <a:avLst/>
@@ -17965,8 +17971,8 @@
         </p:nvSpPr>
         <p:spPr>
           <a:xfrm>
-            <a:off x="7854696" y="3694176"/>
-            <a:ext cx="3035808" cy="206654"/>
+            <a:off x="7763256" y="3749040"/>
+            <a:ext cx="3172968" cy="356616"/>
           </a:xfrm>
           <a:prstGeom prst="rect">
             <a:avLst/>
@@ -17984,7 +17990,7 @@
               <a:buNone/>
             </a:pPr>
             <a:r>
-              <a:rPr lang="en-US" sz="1120" dirty="0">
+              <a:rPr lang="en-US" sz="1040" dirty="0">
                 <a:solidFill>
                   <a:srgbClr val="17364A"/>
                 </a:solidFill>
@@ -17992,9 +17998,9 @@
                 <a:ea typeface="Aptos" pitchFamily="34" charset="-122"/>
                 <a:cs typeface="Aptos" pitchFamily="34" charset="-120"/>
               </a:rPr>
-              <a:t>Implementation work should make dependencies, approvals, training, and sustainment visible before launch.</a:t>
-            </a:r>
-            <a:endParaRPr lang="en-US" sz="1120" dirty="0"/>
+              <a:t>Implementation work should make dependencies, approvals, training, and.</a:t>
+            </a:r>
+            <a:endParaRPr lang="en-US" sz="1040" dirty="0"/>
           </a:p>
         </p:txBody>
       </p:sp>
@@ -18006,12 +18012,12 @@
         </p:nvSpPr>
         <p:spPr>
           <a:xfrm>
-            <a:off x="7635240" y="4184294"/>
-            <a:ext cx="3474720" cy="1466698"/>
+            <a:off x="7543800" y="4389120"/>
+            <a:ext cx="3611880" cy="1261872"/>
           </a:xfrm>
           <a:prstGeom prst="roundRect">
             <a:avLst>
-              <a:gd name="adj" fmla="val 7481"/>
+              <a:gd name="adj" fmla="val 8696"/>
             </a:avLst>
           </a:prstGeom>
           <a:solidFill>
@@ -18033,8 +18039,8 @@
         </p:nvSpPr>
         <p:spPr>
           <a:xfrm>
-            <a:off x="7799832" y="4330598"/>
-            <a:ext cx="3145536" cy="256032"/>
+            <a:off x="7708392" y="4517136"/>
+            <a:ext cx="3282696" cy="228600"/>
           </a:xfrm>
           <a:prstGeom prst="rect">
             <a:avLst/>
@@ -18050,7 +18056,7 @@
               <a:buNone/>
             </a:pPr>
             <a:r>
-              <a:rPr lang="en-US" sz="1300" b="1" dirty="0">
+              <a:rPr lang="en-US" sz="1220" b="1" dirty="0">
                 <a:solidFill>
                   <a:srgbClr val="0068B7"/>
                 </a:solidFill>
@@ -18060,7 +18066,7 @@
               </a:rPr>
               <a:t>Next action</a:t>
             </a:r>
-            <a:endParaRPr lang="en-US" sz="1300" dirty="0"/>
+            <a:endParaRPr lang="en-US" sz="1220" dirty="0"/>
           </a:p>
         </p:txBody>
       </p:sp>
@@ -18072,8 +18078,8 @@
         </p:nvSpPr>
         <p:spPr>
           <a:xfrm>
-            <a:off x="7799832" y="4659782"/>
-            <a:ext cx="3145536" cy="899770"/>
+            <a:off x="7708392" y="4828032"/>
+            <a:ext cx="3282696" cy="749808"/>
           </a:xfrm>
           <a:prstGeom prst="rect">
             <a:avLst/>
@@ -18091,7 +18097,7 @@
               <a:buNone/>
             </a:pPr>
             <a:r>
-              <a:rPr lang="en-US" sz="1320" dirty="0">
+              <a:rPr lang="en-US" sz="1220" dirty="0">
                 <a:solidFill>
                   <a:srgbClr val="17364A"/>
                 </a:solidFill>
@@ -18099,9 +18105,9 @@
                 <a:ea typeface="Aptos" pitchFamily="34" charset="-122"/>
                 <a:cs typeface="Aptos" pitchFamily="34" charset="-120"/>
               </a:rPr>
-              <a:t>Use the concept to clarify workflow changes, dependencies, staffing, procurement requirements, training needs, and implementation checkpoints.</a:t>
-            </a:r>
-            <a:endParaRPr lang="en-US" sz="1320" dirty="0"/>
+              <a:t>Use the concept to clarify workflow changes, dependencies, staffing, procurement.</a:t>
+            </a:r>
+            <a:endParaRPr lang="en-US" sz="1220" dirty="0"/>
           </a:p>
         </p:txBody>
       </p:sp>

--- a/downloads/presentations/modules/pmg-220.pptx
+++ b/downloads/presentations/modules/pmg-220.pptx
@@ -10946,7 +10946,7 @@
                 <a:ea typeface="Aptos" pitchFamily="34" charset="-122"/>
                 <a:cs typeface="Aptos" pitchFamily="34" charset="-120"/>
               </a:rPr>
-              <a:t>• 1. What distinguishes AI project management from ordinary software.</a:t>
+              <a:t>1. What distinguishes AI project management from ordinary software.</a:t>
             </a:r>
             <a:endParaRPr lang="en-US" sz="1920" dirty="0"/>
           </a:p>
@@ -10963,7 +10963,7 @@
                 <a:ea typeface="Aptos" pitchFamily="34" charset="-122"/>
                 <a:cs typeface="Aptos" pitchFamily="34" charset="-120"/>
               </a:rPr>
-              <a:t>• 2. What is a governance gate?</a:t>
+              <a:t>2. What is a governance gate?</a:t>
             </a:r>
             <a:endParaRPr lang="en-US" sz="1920" dirty="0"/>
           </a:p>
@@ -10980,7 +10980,7 @@
                 <a:ea typeface="Aptos" pitchFamily="34" charset="-122"/>
                 <a:cs typeface="Aptos" pitchFamily="34" charset="-120"/>
               </a:rPr>
-              <a:t>• 3. Which item belongs in an AI project charter?</a:t>
+              <a:t>3. Which item belongs in an AI project charter?</a:t>
             </a:r>
             <a:endParaRPr lang="en-US" sz="1920" dirty="0"/>
           </a:p>
@@ -11087,7 +11087,7 @@
                 <a:ea typeface="Aptos" pitchFamily="34" charset="-122"/>
                 <a:cs typeface="Aptos" pitchFamily="34" charset="-120"/>
               </a:rPr>
-              <a:t>1. What distinguishes AI project management from ordinary software implementation?</a:t>
+              <a:t>What distinguishes AI project management from ordinary software implementation?</a:t>
             </a:r>
             <a:endParaRPr lang="en-US" sz="1220" dirty="0"/>
           </a:p>
@@ -11194,41 +11194,7 @@
                 <a:ea typeface="Aptos" pitchFamily="34" charset="-122"/>
                 <a:cs typeface="Aptos" pitchFamily="34" charset="-120"/>
               </a:rPr>
-              <a:t>1.</a:t>
-            </a:r>
-            <a:endParaRPr lang="en-US" sz="1140" dirty="0"/>
-          </a:p>
-          <a:p>
-            <a:pPr indent="0" marL="0">
-              <a:buNone/>
-            </a:pPr>
-            <a:r>
-              <a:rPr lang="en-US" sz="1140" dirty="0">
-                <a:solidFill>
-                  <a:srgbClr val="17364A"/>
-                </a:solidFill>
-                <a:latin typeface="Aptos" pitchFamily="34" charset="0"/>
-                <a:ea typeface="Aptos" pitchFamily="34" charset="-122"/>
-                <a:cs typeface="Aptos" pitchFamily="34" charset="-120"/>
-              </a:rPr>
               <a:t>What distinguishes AI project management from.</a:t>
-            </a:r>
-            <a:endParaRPr lang="en-US" sz="1140" dirty="0"/>
-          </a:p>
-          <a:p>
-            <a:pPr indent="0" marL="0">
-              <a:buNone/>
-            </a:pPr>
-            <a:r>
-              <a:rPr lang="en-US" sz="1140" dirty="0">
-                <a:solidFill>
-                  <a:srgbClr val="17364A"/>
-                </a:solidFill>
-                <a:latin typeface="Aptos" pitchFamily="34" charset="0"/>
-                <a:ea typeface="Aptos" pitchFamily="34" charset="-122"/>
-                <a:cs typeface="Aptos" pitchFamily="34" charset="-120"/>
-              </a:rPr>
-              <a:t>2.</a:t>
             </a:r>
             <a:endParaRPr lang="en-US" sz="1140" dirty="0"/>
           </a:p>
